--- a/slides/day1.pptx
+++ b/slides/day1.pptx
@@ -10094,7 +10094,7 @@
                 <a:ea typeface="NanumGothic"/>
                 <a:cs typeface="NanumGothic"/>
               </a:rPr>
-              <a:t>AI 에이전트의 정의(LLM+tools+loop)와 리서치 에이전트 개요를 배우고, 실습 도구 Claude Code를 설치·설정합니다.</a:t>
+              <a:t>AI 에이전트의 정의(LLM+tools+loop)와 리서치 에이전트 개요를 배우고, Python과 Claude Code를 설치·설정합니다.</a:t>
             </a:r>
           </a:p>
         </p:txBody>

--- a/slides/day1.pptx
+++ b/slides/day1.pptx
@@ -22,6 +22,10 @@
     <p:sldId id="270" r:id="rId21"/>
     <p:sldId id="271" r:id="rId22"/>
     <p:sldId id="272" r:id="rId23"/>
+    <p:sldId id="273" r:id="rId24"/>
+    <p:sldId id="274" r:id="rId25"/>
+    <p:sldId id="275" r:id="rId26"/>
+    <p:sldId id="276" r:id="rId27"/>
   </p:sldIdLst>
   <p:sldSz cx="12191695" cy="6858000" type="screen4x3"/>
   <p:notesSz cx="6858000" cy="9144000"/>
@@ -3757,7 +3761,7 @@
                 <a:ea typeface="NanumGothic"/>
                 <a:cs typeface="NanumGothic"/>
               </a:rPr>
-              <a:t>생성 제어</a:t>
+              <a:t>추론 모델</a:t>
             </a:r>
           </a:p>
         </p:txBody>
@@ -3804,7 +3808,7 @@
                 <a:ea typeface="NanumSquare"/>
                 <a:cs typeface="NanumSquare"/>
               </a:rPr>
-              <a:t>같은 모델, 다른 출력</a:t>
+              <a:t>추론(사고)하는 모델</a:t>
             </a:r>
           </a:p>
         </p:txBody>
@@ -4033,7 +4037,7 @@
                 <a:ea typeface="NanumGothic"/>
                 <a:cs typeface="NanumGothic"/>
               </a:rPr>
-              <a:t>temperature</a:t>
+              <a:t>일반 생성 vs 추론</a:t>
             </a:r>
           </a:p>
         </p:txBody>
@@ -4080,7 +4084,7 @@
                 <a:ea typeface="NanumGothic"/>
                 <a:cs typeface="NanumGothic"/>
               </a:rPr>
-              <a:t>낮으면 결정적·일관, 높으면 다양·창의(불안정)</a:t>
+              <a:t>바로 답하지 않고, 단계적으로 '생각'한 뒤 답한다</a:t>
             </a:r>
           </a:p>
         </p:txBody>
@@ -4171,7 +4175,7 @@
                 <a:ea typeface="NanumGothic"/>
                 <a:cs typeface="NanumGothic"/>
               </a:rPr>
-              <a:t>확률적 생성</a:t>
+              <a:t>언제 강한가</a:t>
             </a:r>
           </a:p>
         </p:txBody>
@@ -4218,7 +4222,7 @@
                 <a:ea typeface="NanumGothic"/>
                 <a:cs typeface="NanumGothic"/>
               </a:rPr>
-              <a:t>같은 질문도 매번 다른 답이 나올 수 있다</a:t>
+              <a:t>복잡한 문제 · 다단계 추론 · 코딩</a:t>
             </a:r>
           </a:p>
         </p:txBody>
@@ -4309,7 +4313,7 @@
                 <a:ea typeface="NanumGothic"/>
                 <a:cs typeface="NanumGothic"/>
               </a:rPr>
-              <a:t>재현성에의 함의</a:t>
+              <a:t>트레이드오프</a:t>
             </a:r>
           </a:p>
         </p:txBody>
@@ -4356,7 +4360,7 @@
                 <a:ea typeface="NanumGothic"/>
                 <a:cs typeface="NanumGothic"/>
               </a:rPr>
-              <a:t>리서치엔 낮은 temperature가 유리 — 결과 안정</a:t>
+              <a:t>더 정확하지만 더 느리고 비싸다</a:t>
             </a:r>
           </a:p>
         </p:txBody>
@@ -4509,7 +4513,7 @@
                 <a:ea typeface="NanumGothic"/>
                 <a:cs typeface="NanumGothic"/>
               </a:rPr>
-              <a:t>프롬프트</a:t>
+              <a:t>임베딩</a:t>
             </a:r>
           </a:p>
         </p:txBody>
@@ -4556,7 +4560,7 @@
                 <a:ea typeface="NanumSquare"/>
                 <a:cs typeface="NanumSquare"/>
               </a:rPr>
-              <a:t>프롬프트가 동작을 바꾼다</a:t>
+              <a:t>임베딩 &amp; 의미 검색</a:t>
             </a:r>
           </a:p>
         </p:txBody>
@@ -4785,7 +4789,7 @@
                 <a:ea typeface="NanumGothic"/>
                 <a:cs typeface="NanumGothic"/>
               </a:rPr>
-              <a:t>프롬프트 = 모델에 주는 입력 전체</a:t>
+              <a:t>임베딩이란</a:t>
             </a:r>
           </a:p>
         </p:txBody>
@@ -4832,7 +4836,7 @@
                 <a:ea typeface="NanumGothic"/>
                 <a:cs typeface="NanumGothic"/>
               </a:rPr>
-              <a:t>지시 + 맥락 + 예시 + 데이터</a:t>
+              <a:t>텍스트를 의미를 담은 숫자 벡터로 변환</a:t>
             </a:r>
           </a:p>
         </p:txBody>
@@ -4923,7 +4927,7 @@
                 <a:ea typeface="NanumGothic"/>
                 <a:cs typeface="NanumGothic"/>
               </a:rPr>
-              <a:t>좋은 프롬프트</a:t>
+              <a:t>의미 검색</a:t>
             </a:r>
           </a:p>
         </p:txBody>
@@ -4970,7 +4974,7 @@
                 <a:ea typeface="NanumGothic"/>
                 <a:cs typeface="NanumGothic"/>
               </a:rPr>
-              <a:t>명확한 목표 · 충분한 맥락 · 원하는 형식 명시</a:t>
+              <a:t>글자가 달라도 '뜻이 비슷한' 문서를 찾음 (키워드 매칭의 한계 극복)</a:t>
             </a:r>
           </a:p>
         </p:txBody>
@@ -5061,7 +5065,7 @@
                 <a:ea typeface="NanumGothic"/>
                 <a:cs typeface="NanumGothic"/>
               </a:rPr>
-              <a:t>나쁜 프롬프트</a:t>
+              <a:t>어디에 쓰나</a:t>
             </a:r>
           </a:p>
         </p:txBody>
@@ -5108,7 +5112,111 @@
                 <a:ea typeface="NanumGothic"/>
                 <a:cs typeface="NanumGothic"/>
               </a:rPr>
-              <a:t>모호·맥락 부족 → 엉뚱하거나 일반적인 답</a:t>
+              <a:t>방대한 문헌에서 관련 자료 검색 — 리서치 에이전트의 토대</a:t>
+            </a:r>
+          </a:p>
+        </p:txBody>
+      </p:sp>
+      <p:sp>
+        <p:nvSpPr>
+          <p:cNvPr id="18" name="Rounded Rectangle 17"/>
+          <p:cNvSpPr/>
+          <p:nvPr/>
+        </p:nvSpPr>
+        <p:spPr>
+          <a:xfrm>
+            <a:off x="502920" y="5532120"/>
+            <a:ext cx="11155680" cy="658368"/>
+          </a:xfrm>
+          <a:prstGeom prst="roundRect">
+            <a:avLst/>
+          </a:prstGeom>
+          <a:solidFill>
+            <a:srgbClr val="F1F5F9"/>
+          </a:solidFill>
+          <a:ln w="12700">
+            <a:solidFill>
+              <a:srgbClr val="E2E8F0"/>
+            </a:solidFill>
+          </a:ln>
+          <a:effectLst/>
+        </p:spPr>
+        <p:style>
+          <a:lnRef idx="1">
+            <a:schemeClr val="accent1"/>
+          </a:lnRef>
+          <a:fillRef idx="3">
+            <a:schemeClr val="accent1"/>
+          </a:fillRef>
+          <a:effectRef idx="2">
+            <a:schemeClr val="accent1"/>
+          </a:effectRef>
+          <a:fontRef idx="minor">
+            <a:schemeClr val="lt1"/>
+          </a:fontRef>
+        </p:style>
+        <p:txBody>
+          <a:bodyPr rtlCol="0" anchor="ctr"/>
+          <a:lstStyle/>
+          <a:p>
+            <a:pPr algn="ctr"/>
+          </a:p>
+        </p:txBody>
+      </p:sp>
+      <p:sp>
+        <p:nvSpPr>
+          <p:cNvPr id="19" name="TextBox 18"/>
+          <p:cNvSpPr txBox="1"/>
+          <p:nvPr/>
+        </p:nvSpPr>
+        <p:spPr>
+          <a:xfrm>
+            <a:off x="777240" y="5532120"/>
+            <a:ext cx="10607040" cy="658368"/>
+          </a:xfrm>
+          <a:prstGeom prst="rect">
+            <a:avLst/>
+          </a:prstGeom>
+          <a:noFill/>
+        </p:spPr>
+        <p:txBody>
+          <a:bodyPr wrap="square" anchor="ctr" lIns="0" rIns="0" tIns="0" bIns="0">
+            <a:spAutoFit/>
+          </a:bodyPr>
+          <a:lstStyle/>
+          <a:p>
+            <a:pPr algn="l">
+              <a:lnSpc>
+                <a:spcPct val="100000"/>
+              </a:lnSpc>
+              <a:spcBef>
+                <a:spcPts val="0"/>
+              </a:spcBef>
+              <a:spcAft>
+                <a:spcPts val="600"/>
+              </a:spcAft>
+            </a:pPr>
+            <a:r>
+              <a:rPr sz="1200" b="1">
+                <a:solidFill>
+                  <a:srgbClr val="6366F1"/>
+                </a:solidFill>
+                <a:latin typeface="NanumGothic"/>
+                <a:ea typeface="NanumGothic"/>
+                <a:cs typeface="NanumGothic"/>
+              </a:rPr>
+              <a:t>NOTE   </a:t>
+            </a:r>
+            <a:r>
+              <a:rPr sz="1300" b="0">
+                <a:solidFill>
+                  <a:srgbClr val="0F172A"/>
+                </a:solidFill>
+                <a:latin typeface="NanumGothic"/>
+                <a:ea typeface="NanumGothic"/>
+                <a:cs typeface="NanumGothic"/>
+              </a:rPr>
+              <a:t>키워드가 아니라 '의미'로 찾는다</a:t>
             </a:r>
           </a:p>
         </p:txBody>
@@ -5261,7 +5369,7 @@
                 <a:ea typeface="NanumGothic"/>
                 <a:cs typeface="NanumGothic"/>
               </a:rPr>
-              <a:t>프롬프트 기법</a:t>
+              <a:t>RAG</a:t>
             </a:r>
           </a:p>
         </p:txBody>
@@ -5308,7 +5416,7 @@
                 <a:ea typeface="NanumSquare"/>
                 <a:cs typeface="NanumSquare"/>
               </a:rPr>
-              <a:t>자주 쓰는 패턴</a:t>
+              <a:t>검색 증강 생성 (RAG)</a:t>
             </a:r>
           </a:p>
         </p:txBody>
@@ -5453,16 +5561,62 @@
       </p:sp>
       <p:sp>
         <p:nvSpPr>
-          <p:cNvPr id="9" name="Oval 8"/>
+          <p:cNvPr id="9" name="Rounded Rectangle 8"/>
           <p:cNvSpPr/>
           <p:nvPr/>
         </p:nvSpPr>
         <p:spPr>
           <a:xfrm>
-            <a:off x="548640" y="1911096"/>
-            <a:ext cx="146304" cy="146304"/>
-          </a:xfrm>
-          <a:prstGeom prst="ellipse">
+            <a:off x="502920" y="2651760"/>
+            <a:ext cx="2548890" cy="1737360"/>
+          </a:xfrm>
+          <a:prstGeom prst="roundRect">
+            <a:avLst/>
+          </a:prstGeom>
+          <a:solidFill>
+            <a:srgbClr val="F8FAFC"/>
+          </a:solidFill>
+          <a:ln w="12700">
+            <a:solidFill>
+              <a:srgbClr val="E2E8F0"/>
+            </a:solidFill>
+          </a:ln>
+          <a:effectLst/>
+        </p:spPr>
+        <p:style>
+          <a:lnRef idx="1">
+            <a:schemeClr val="accent1"/>
+          </a:lnRef>
+          <a:fillRef idx="3">
+            <a:schemeClr val="accent1"/>
+          </a:fillRef>
+          <a:effectRef idx="2">
+            <a:schemeClr val="accent1"/>
+          </a:effectRef>
+          <a:fontRef idx="minor">
+            <a:schemeClr val="lt1"/>
+          </a:fontRef>
+        </p:style>
+        <p:txBody>
+          <a:bodyPr rtlCol="0" anchor="ctr"/>
+          <a:lstStyle/>
+          <a:p>
+            <a:pPr algn="ctr"/>
+          </a:p>
+        </p:txBody>
+      </p:sp>
+      <p:sp>
+        <p:nvSpPr>
+          <p:cNvPr id="10" name="Rectangle 9"/>
+          <p:cNvSpPr/>
+          <p:nvPr/>
+        </p:nvSpPr>
+        <p:spPr>
+          <a:xfrm>
+            <a:off x="502920" y="2651760"/>
+            <a:ext cx="2548890" cy="109728"/>
+          </a:xfrm>
+          <a:prstGeom prst="rect">
             <a:avLst/>
           </a:prstGeom>
           <a:solidFill>
@@ -5497,14 +5651,14 @@
       </p:sp>
       <p:sp>
         <p:nvSpPr>
-          <p:cNvPr id="10" name="TextBox 9"/>
-          <p:cNvSpPr txBox="1"/>
-          <p:nvPr/>
-        </p:nvSpPr>
-        <p:spPr>
-          <a:xfrm>
-            <a:off x="868680" y="1828800"/>
-            <a:ext cx="10607040" cy="457200"/>
+          <p:cNvPr id="11" name="TextBox 10"/>
+          <p:cNvSpPr txBox="1"/>
+          <p:nvPr/>
+        </p:nvSpPr>
+        <p:spPr>
+          <a:xfrm>
+            <a:off x="640080" y="2944368"/>
+            <a:ext cx="2274570" cy="365760"/>
           </a:xfrm>
           <a:prstGeom prst="rect">
             <a:avLst/>
@@ -5529,7 +5683,54 @@
               </a:spcAft>
             </a:pPr>
             <a:r>
-              <a:rPr sz="1600" b="1">
+              <a:rPr sz="1300" b="1">
+                <a:solidFill>
+                  <a:srgbClr val="6366F1"/>
+                </a:solidFill>
+                <a:latin typeface="NanumSquare"/>
+                <a:ea typeface="NanumSquare"/>
+                <a:cs typeface="NanumSquare"/>
+              </a:rPr>
+              <a:t>1</a:t>
+            </a:r>
+          </a:p>
+        </p:txBody>
+      </p:sp>
+      <p:sp>
+        <p:nvSpPr>
+          <p:cNvPr id="12" name="TextBox 11"/>
+          <p:cNvSpPr txBox="1"/>
+          <p:nvPr/>
+        </p:nvSpPr>
+        <p:spPr>
+          <a:xfrm>
+            <a:off x="640080" y="3310128"/>
+            <a:ext cx="2274570" cy="548640"/>
+          </a:xfrm>
+          <a:prstGeom prst="rect">
+            <a:avLst/>
+          </a:prstGeom>
+          <a:noFill/>
+        </p:spPr>
+        <p:txBody>
+          <a:bodyPr wrap="square" anchor="t" lIns="0" rIns="0" tIns="0" bIns="0">
+            <a:spAutoFit/>
+          </a:bodyPr>
+          <a:lstStyle/>
+          <a:p>
+            <a:pPr algn="l">
+              <a:lnSpc>
+                <a:spcPct val="100000"/>
+              </a:lnSpc>
+              <a:spcBef>
+                <a:spcPts val="0"/>
+              </a:spcBef>
+              <a:spcAft>
+                <a:spcPts val="600"/>
+              </a:spcAft>
+            </a:pPr>
+            <a:r>
+              <a:rPr sz="1500" b="1">
                 <a:solidFill>
                   <a:srgbClr val="0F172A"/>
                 </a:solidFill>
@@ -5537,21 +5738,21 @@
                 <a:ea typeface="NanumGothic"/>
                 <a:cs typeface="NanumGothic"/>
               </a:rPr>
-              <a:t>역할·맥락 부여</a:t>
-            </a:r>
-          </a:p>
-        </p:txBody>
-      </p:sp>
-      <p:sp>
-        <p:nvSpPr>
-          <p:cNvPr id="11" name="TextBox 10"/>
-          <p:cNvSpPr txBox="1"/>
-          <p:nvPr/>
-        </p:nvSpPr>
-        <p:spPr>
-          <a:xfrm>
-            <a:off x="868680" y="2212848"/>
-            <a:ext cx="10607040" cy="457200"/>
+              <a:t>질문</a:t>
+            </a:r>
+          </a:p>
+        </p:txBody>
+      </p:sp>
+      <p:sp>
+        <p:nvSpPr>
+          <p:cNvPr id="13" name="TextBox 12"/>
+          <p:cNvSpPr txBox="1"/>
+          <p:nvPr/>
+        </p:nvSpPr>
+        <p:spPr>
+          <a:xfrm>
+            <a:off x="640080" y="3822192"/>
+            <a:ext cx="2274570" cy="457200"/>
           </a:xfrm>
           <a:prstGeom prst="rect">
             <a:avLst/>
@@ -5576,7 +5777,7 @@
               </a:spcAft>
             </a:pPr>
             <a:r>
-              <a:rPr sz="1300" b="0">
+              <a:rPr sz="1100" b="0">
                 <a:solidFill>
                   <a:srgbClr val="64748B"/>
                 </a:solidFill>
@@ -5584,23 +5785,116 @@
                 <a:ea typeface="NanumGothic"/>
                 <a:cs typeface="NanumGothic"/>
               </a:rPr>
-              <a:t>'너는 ~전문가' + 배경 → 답의 톤·깊이 조정</a:t>
-            </a:r>
-          </a:p>
-        </p:txBody>
-      </p:sp>
-      <p:sp>
-        <p:nvSpPr>
-          <p:cNvPr id="12" name="Oval 11"/>
+              <a:t>사용자 질문</a:t>
+            </a:r>
+          </a:p>
+        </p:txBody>
+      </p:sp>
+      <p:sp>
+        <p:nvSpPr>
+          <p:cNvPr id="14" name="TextBox 13"/>
+          <p:cNvSpPr txBox="1"/>
+          <p:nvPr/>
+        </p:nvSpPr>
+        <p:spPr>
+          <a:xfrm>
+            <a:off x="3097530" y="3154680"/>
+            <a:ext cx="274320" cy="548640"/>
+          </a:xfrm>
+          <a:prstGeom prst="rect">
+            <a:avLst/>
+          </a:prstGeom>
+          <a:noFill/>
+        </p:spPr>
+        <p:txBody>
+          <a:bodyPr wrap="square" anchor="ctr" lIns="0" rIns="0" tIns="0" bIns="0">
+            <a:spAutoFit/>
+          </a:bodyPr>
+          <a:lstStyle/>
+          <a:p>
+            <a:pPr algn="ctr">
+              <a:lnSpc>
+                <a:spcPct val="100000"/>
+              </a:lnSpc>
+              <a:spcBef>
+                <a:spcPts val="0"/>
+              </a:spcBef>
+              <a:spcAft>
+                <a:spcPts val="600"/>
+              </a:spcAft>
+            </a:pPr>
+            <a:r>
+              <a:rPr sz="2200" b="1">
+                <a:solidFill>
+                  <a:srgbClr val="6366F1"/>
+                </a:solidFill>
+                <a:latin typeface="NanumSquare"/>
+                <a:ea typeface="NanumSquare"/>
+                <a:cs typeface="NanumSquare"/>
+              </a:rPr>
+              <a:t>→</a:t>
+            </a:r>
+          </a:p>
+        </p:txBody>
+      </p:sp>
+      <p:sp>
+        <p:nvSpPr>
+          <p:cNvPr id="15" name="Rounded Rectangle 14"/>
           <p:cNvSpPr/>
           <p:nvPr/>
         </p:nvSpPr>
         <p:spPr>
           <a:xfrm>
-            <a:off x="548640" y="2779776"/>
-            <a:ext cx="146304" cy="146304"/>
-          </a:xfrm>
-          <a:prstGeom prst="ellipse">
+            <a:off x="3371850" y="2651760"/>
+            <a:ext cx="2548890" cy="1737360"/>
+          </a:xfrm>
+          <a:prstGeom prst="roundRect">
+            <a:avLst/>
+          </a:prstGeom>
+          <a:solidFill>
+            <a:srgbClr val="F8FAFC"/>
+          </a:solidFill>
+          <a:ln w="12700">
+            <a:solidFill>
+              <a:srgbClr val="E2E8F0"/>
+            </a:solidFill>
+          </a:ln>
+          <a:effectLst/>
+        </p:spPr>
+        <p:style>
+          <a:lnRef idx="1">
+            <a:schemeClr val="accent1"/>
+          </a:lnRef>
+          <a:fillRef idx="3">
+            <a:schemeClr val="accent1"/>
+          </a:fillRef>
+          <a:effectRef idx="2">
+            <a:schemeClr val="accent1"/>
+          </a:effectRef>
+          <a:fontRef idx="minor">
+            <a:schemeClr val="lt1"/>
+          </a:fontRef>
+        </p:style>
+        <p:txBody>
+          <a:bodyPr rtlCol="0" anchor="ctr"/>
+          <a:lstStyle/>
+          <a:p>
+            <a:pPr algn="ctr"/>
+          </a:p>
+        </p:txBody>
+      </p:sp>
+      <p:sp>
+        <p:nvSpPr>
+          <p:cNvPr id="16" name="Rectangle 15"/>
+          <p:cNvSpPr/>
+          <p:nvPr/>
+        </p:nvSpPr>
+        <p:spPr>
+          <a:xfrm>
+            <a:off x="3371850" y="2651760"/>
+            <a:ext cx="2548890" cy="109728"/>
+          </a:xfrm>
+          <a:prstGeom prst="rect">
             <a:avLst/>
           </a:prstGeom>
           <a:solidFill>
@@ -5635,14 +5929,14 @@
       </p:sp>
       <p:sp>
         <p:nvSpPr>
-          <p:cNvPr id="13" name="TextBox 12"/>
-          <p:cNvSpPr txBox="1"/>
-          <p:nvPr/>
-        </p:nvSpPr>
-        <p:spPr>
-          <a:xfrm>
-            <a:off x="868680" y="2697480"/>
-            <a:ext cx="10607040" cy="457200"/>
+          <p:cNvPr id="17" name="TextBox 16"/>
+          <p:cNvSpPr txBox="1"/>
+          <p:nvPr/>
+        </p:nvSpPr>
+        <p:spPr>
+          <a:xfrm>
+            <a:off x="3509010" y="2944368"/>
+            <a:ext cx="2274570" cy="365760"/>
           </a:xfrm>
           <a:prstGeom prst="rect">
             <a:avLst/>
@@ -5667,7 +5961,54 @@
               </a:spcAft>
             </a:pPr>
             <a:r>
-              <a:rPr sz="1600" b="1">
+              <a:rPr sz="1300" b="1">
+                <a:solidFill>
+                  <a:srgbClr val="6366F1"/>
+                </a:solidFill>
+                <a:latin typeface="NanumSquare"/>
+                <a:ea typeface="NanumSquare"/>
+                <a:cs typeface="NanumSquare"/>
+              </a:rPr>
+              <a:t>2</a:t>
+            </a:r>
+          </a:p>
+        </p:txBody>
+      </p:sp>
+      <p:sp>
+        <p:nvSpPr>
+          <p:cNvPr id="18" name="TextBox 17"/>
+          <p:cNvSpPr txBox="1"/>
+          <p:nvPr/>
+        </p:nvSpPr>
+        <p:spPr>
+          <a:xfrm>
+            <a:off x="3509010" y="3310128"/>
+            <a:ext cx="2274570" cy="548640"/>
+          </a:xfrm>
+          <a:prstGeom prst="rect">
+            <a:avLst/>
+          </a:prstGeom>
+          <a:noFill/>
+        </p:spPr>
+        <p:txBody>
+          <a:bodyPr wrap="square" anchor="t" lIns="0" rIns="0" tIns="0" bIns="0">
+            <a:spAutoFit/>
+          </a:bodyPr>
+          <a:lstStyle/>
+          <a:p>
+            <a:pPr algn="l">
+              <a:lnSpc>
+                <a:spcPct val="100000"/>
+              </a:lnSpc>
+              <a:spcBef>
+                <a:spcPts val="0"/>
+              </a:spcBef>
+              <a:spcAft>
+                <a:spcPts val="600"/>
+              </a:spcAft>
+            </a:pPr>
+            <a:r>
+              <a:rPr sz="1500" b="1">
                 <a:solidFill>
                   <a:srgbClr val="0F172A"/>
                 </a:solidFill>
@@ -5675,21 +6016,21 @@
                 <a:ea typeface="NanumGothic"/>
                 <a:cs typeface="NanumGothic"/>
               </a:rPr>
-              <a:t>예시 제공 (few-shot)</a:t>
-            </a:r>
-          </a:p>
-        </p:txBody>
-      </p:sp>
-      <p:sp>
-        <p:nvSpPr>
-          <p:cNvPr id="14" name="TextBox 13"/>
-          <p:cNvSpPr txBox="1"/>
-          <p:nvPr/>
-        </p:nvSpPr>
-        <p:spPr>
-          <a:xfrm>
-            <a:off x="868680" y="3081528"/>
-            <a:ext cx="10607040" cy="457200"/>
+              <a:t>검색</a:t>
+            </a:r>
+          </a:p>
+        </p:txBody>
+      </p:sp>
+      <p:sp>
+        <p:nvSpPr>
+          <p:cNvPr id="19" name="TextBox 18"/>
+          <p:cNvSpPr txBox="1"/>
+          <p:nvPr/>
+        </p:nvSpPr>
+        <p:spPr>
+          <a:xfrm>
+            <a:off x="3509010" y="3822192"/>
+            <a:ext cx="2274570" cy="457200"/>
           </a:xfrm>
           <a:prstGeom prst="rect">
             <a:avLst/>
@@ -5714,7 +6055,7 @@
               </a:spcAft>
             </a:pPr>
             <a:r>
-              <a:rPr sz="1300" b="0">
+              <a:rPr sz="1100" b="0">
                 <a:solidFill>
                   <a:srgbClr val="64748B"/>
                 </a:solidFill>
@@ -5722,23 +6063,116 @@
                 <a:ea typeface="NanumGothic"/>
                 <a:cs typeface="NanumGothic"/>
               </a:rPr>
-              <a:t>원하는 입출력 예 2~3개 → 형식이 안정</a:t>
-            </a:r>
-          </a:p>
-        </p:txBody>
-      </p:sp>
-      <p:sp>
-        <p:nvSpPr>
-          <p:cNvPr id="15" name="Oval 14"/>
+              <a:t>관련 문서 찾기(임베딩)</a:t>
+            </a:r>
+          </a:p>
+        </p:txBody>
+      </p:sp>
+      <p:sp>
+        <p:nvSpPr>
+          <p:cNvPr id="20" name="TextBox 19"/>
+          <p:cNvSpPr txBox="1"/>
+          <p:nvPr/>
+        </p:nvSpPr>
+        <p:spPr>
+          <a:xfrm>
+            <a:off x="5966460" y="3154680"/>
+            <a:ext cx="274320" cy="548640"/>
+          </a:xfrm>
+          <a:prstGeom prst="rect">
+            <a:avLst/>
+          </a:prstGeom>
+          <a:noFill/>
+        </p:spPr>
+        <p:txBody>
+          <a:bodyPr wrap="square" anchor="ctr" lIns="0" rIns="0" tIns="0" bIns="0">
+            <a:spAutoFit/>
+          </a:bodyPr>
+          <a:lstStyle/>
+          <a:p>
+            <a:pPr algn="ctr">
+              <a:lnSpc>
+                <a:spcPct val="100000"/>
+              </a:lnSpc>
+              <a:spcBef>
+                <a:spcPts val="0"/>
+              </a:spcBef>
+              <a:spcAft>
+                <a:spcPts val="600"/>
+              </a:spcAft>
+            </a:pPr>
+            <a:r>
+              <a:rPr sz="2200" b="1">
+                <a:solidFill>
+                  <a:srgbClr val="6366F1"/>
+                </a:solidFill>
+                <a:latin typeface="NanumSquare"/>
+                <a:ea typeface="NanumSquare"/>
+                <a:cs typeface="NanumSquare"/>
+              </a:rPr>
+              <a:t>→</a:t>
+            </a:r>
+          </a:p>
+        </p:txBody>
+      </p:sp>
+      <p:sp>
+        <p:nvSpPr>
+          <p:cNvPr id="21" name="Rounded Rectangle 20"/>
           <p:cNvSpPr/>
           <p:nvPr/>
         </p:nvSpPr>
         <p:spPr>
           <a:xfrm>
-            <a:off x="548640" y="3648456"/>
-            <a:ext cx="146304" cy="146304"/>
-          </a:xfrm>
-          <a:prstGeom prst="ellipse">
+            <a:off x="6240780" y="2651760"/>
+            <a:ext cx="2548890" cy="1737360"/>
+          </a:xfrm>
+          <a:prstGeom prst="roundRect">
+            <a:avLst/>
+          </a:prstGeom>
+          <a:solidFill>
+            <a:srgbClr val="F8FAFC"/>
+          </a:solidFill>
+          <a:ln w="12700">
+            <a:solidFill>
+              <a:srgbClr val="E2E8F0"/>
+            </a:solidFill>
+          </a:ln>
+          <a:effectLst/>
+        </p:spPr>
+        <p:style>
+          <a:lnRef idx="1">
+            <a:schemeClr val="accent1"/>
+          </a:lnRef>
+          <a:fillRef idx="3">
+            <a:schemeClr val="accent1"/>
+          </a:fillRef>
+          <a:effectRef idx="2">
+            <a:schemeClr val="accent1"/>
+          </a:effectRef>
+          <a:fontRef idx="minor">
+            <a:schemeClr val="lt1"/>
+          </a:fontRef>
+        </p:style>
+        <p:txBody>
+          <a:bodyPr rtlCol="0" anchor="ctr"/>
+          <a:lstStyle/>
+          <a:p>
+            <a:pPr algn="ctr"/>
+          </a:p>
+        </p:txBody>
+      </p:sp>
+      <p:sp>
+        <p:nvSpPr>
+          <p:cNvPr id="22" name="Rectangle 21"/>
+          <p:cNvSpPr/>
+          <p:nvPr/>
+        </p:nvSpPr>
+        <p:spPr>
+          <a:xfrm>
+            <a:off x="6240780" y="2651760"/>
+            <a:ext cx="2548890" cy="109728"/>
+          </a:xfrm>
+          <a:prstGeom prst="rect">
             <a:avLst/>
           </a:prstGeom>
           <a:solidFill>
@@ -5773,14 +6207,14 @@
       </p:sp>
       <p:sp>
         <p:nvSpPr>
-          <p:cNvPr id="16" name="TextBox 15"/>
-          <p:cNvSpPr txBox="1"/>
-          <p:nvPr/>
-        </p:nvSpPr>
-        <p:spPr>
-          <a:xfrm>
-            <a:off x="868680" y="3566160"/>
-            <a:ext cx="10607040" cy="457200"/>
+          <p:cNvPr id="23" name="TextBox 22"/>
+          <p:cNvSpPr txBox="1"/>
+          <p:nvPr/>
+        </p:nvSpPr>
+        <p:spPr>
+          <a:xfrm>
+            <a:off x="6377940" y="2944368"/>
+            <a:ext cx="2274570" cy="365760"/>
           </a:xfrm>
           <a:prstGeom prst="rect">
             <a:avLst/>
@@ -5805,7 +6239,54 @@
               </a:spcAft>
             </a:pPr>
             <a:r>
-              <a:rPr sz="1600" b="1">
+              <a:rPr sz="1300" b="1">
+                <a:solidFill>
+                  <a:srgbClr val="6366F1"/>
+                </a:solidFill>
+                <a:latin typeface="NanumSquare"/>
+                <a:ea typeface="NanumSquare"/>
+                <a:cs typeface="NanumSquare"/>
+              </a:rPr>
+              <a:t>3</a:t>
+            </a:r>
+          </a:p>
+        </p:txBody>
+      </p:sp>
+      <p:sp>
+        <p:nvSpPr>
+          <p:cNvPr id="24" name="TextBox 23"/>
+          <p:cNvSpPr txBox="1"/>
+          <p:nvPr/>
+        </p:nvSpPr>
+        <p:spPr>
+          <a:xfrm>
+            <a:off x="6377940" y="3310128"/>
+            <a:ext cx="2274570" cy="548640"/>
+          </a:xfrm>
+          <a:prstGeom prst="rect">
+            <a:avLst/>
+          </a:prstGeom>
+          <a:noFill/>
+        </p:spPr>
+        <p:txBody>
+          <a:bodyPr wrap="square" anchor="t" lIns="0" rIns="0" tIns="0" bIns="0">
+            <a:spAutoFit/>
+          </a:bodyPr>
+          <a:lstStyle/>
+          <a:p>
+            <a:pPr algn="l">
+              <a:lnSpc>
+                <a:spcPct val="100000"/>
+              </a:lnSpc>
+              <a:spcBef>
+                <a:spcPts val="0"/>
+              </a:spcBef>
+              <a:spcAft>
+                <a:spcPts val="600"/>
+              </a:spcAft>
+            </a:pPr>
+            <a:r>
+              <a:rPr sz="1500" b="1">
                 <a:solidFill>
                   <a:srgbClr val="0F172A"/>
                 </a:solidFill>
@@ -5813,21 +6294,21 @@
                 <a:ea typeface="NanumGothic"/>
                 <a:cs typeface="NanumGothic"/>
               </a:rPr>
-              <a:t>단계적 사고 (CoT)</a:t>
-            </a:r>
-          </a:p>
-        </p:txBody>
-      </p:sp>
-      <p:sp>
-        <p:nvSpPr>
-          <p:cNvPr id="17" name="TextBox 16"/>
-          <p:cNvSpPr txBox="1"/>
-          <p:nvPr/>
-        </p:nvSpPr>
-        <p:spPr>
-          <a:xfrm>
-            <a:off x="868680" y="3950208"/>
-            <a:ext cx="10607040" cy="457200"/>
+              <a:t>주입</a:t>
+            </a:r>
+          </a:p>
+        </p:txBody>
+      </p:sp>
+      <p:sp>
+        <p:nvSpPr>
+          <p:cNvPr id="25" name="TextBox 24"/>
+          <p:cNvSpPr txBox="1"/>
+          <p:nvPr/>
+        </p:nvSpPr>
+        <p:spPr>
+          <a:xfrm>
+            <a:off x="6377940" y="3822192"/>
+            <a:ext cx="2274570" cy="457200"/>
           </a:xfrm>
           <a:prstGeom prst="rect">
             <a:avLst/>
@@ -5852,7 +6333,7 @@
               </a:spcAft>
             </a:pPr>
             <a:r>
-              <a:rPr sz="1300" b="0">
+              <a:rPr sz="1100" b="0">
                 <a:solidFill>
                   <a:srgbClr val="64748B"/>
                 </a:solidFill>
@@ -5860,7 +6341,389 @@
                 <a:ea typeface="NanumGothic"/>
                 <a:cs typeface="NanumGothic"/>
               </a:rPr>
-              <a:t>'단계별로 생각해줘' → 복잡한 추론 정확도↑</a:t>
+              <a:t>찾은 근거를 프롬프트에</a:t>
+            </a:r>
+          </a:p>
+        </p:txBody>
+      </p:sp>
+      <p:sp>
+        <p:nvSpPr>
+          <p:cNvPr id="26" name="TextBox 25"/>
+          <p:cNvSpPr txBox="1"/>
+          <p:nvPr/>
+        </p:nvSpPr>
+        <p:spPr>
+          <a:xfrm>
+            <a:off x="8835390" y="3154680"/>
+            <a:ext cx="274320" cy="548640"/>
+          </a:xfrm>
+          <a:prstGeom prst="rect">
+            <a:avLst/>
+          </a:prstGeom>
+          <a:noFill/>
+        </p:spPr>
+        <p:txBody>
+          <a:bodyPr wrap="square" anchor="ctr" lIns="0" rIns="0" tIns="0" bIns="0">
+            <a:spAutoFit/>
+          </a:bodyPr>
+          <a:lstStyle/>
+          <a:p>
+            <a:pPr algn="ctr">
+              <a:lnSpc>
+                <a:spcPct val="100000"/>
+              </a:lnSpc>
+              <a:spcBef>
+                <a:spcPts val="0"/>
+              </a:spcBef>
+              <a:spcAft>
+                <a:spcPts val="600"/>
+              </a:spcAft>
+            </a:pPr>
+            <a:r>
+              <a:rPr sz="2200" b="1">
+                <a:solidFill>
+                  <a:srgbClr val="6366F1"/>
+                </a:solidFill>
+                <a:latin typeface="NanumSquare"/>
+                <a:ea typeface="NanumSquare"/>
+                <a:cs typeface="NanumSquare"/>
+              </a:rPr>
+              <a:t>→</a:t>
+            </a:r>
+          </a:p>
+        </p:txBody>
+      </p:sp>
+      <p:sp>
+        <p:nvSpPr>
+          <p:cNvPr id="27" name="Rounded Rectangle 26"/>
+          <p:cNvSpPr/>
+          <p:nvPr/>
+        </p:nvSpPr>
+        <p:spPr>
+          <a:xfrm>
+            <a:off x="9109710" y="2651760"/>
+            <a:ext cx="2548890" cy="1737360"/>
+          </a:xfrm>
+          <a:prstGeom prst="roundRect">
+            <a:avLst/>
+          </a:prstGeom>
+          <a:solidFill>
+            <a:srgbClr val="F8FAFC"/>
+          </a:solidFill>
+          <a:ln w="12700">
+            <a:solidFill>
+              <a:srgbClr val="E2E8F0"/>
+            </a:solidFill>
+          </a:ln>
+          <a:effectLst/>
+        </p:spPr>
+        <p:style>
+          <a:lnRef idx="1">
+            <a:schemeClr val="accent1"/>
+          </a:lnRef>
+          <a:fillRef idx="3">
+            <a:schemeClr val="accent1"/>
+          </a:fillRef>
+          <a:effectRef idx="2">
+            <a:schemeClr val="accent1"/>
+          </a:effectRef>
+          <a:fontRef idx="minor">
+            <a:schemeClr val="lt1"/>
+          </a:fontRef>
+        </p:style>
+        <p:txBody>
+          <a:bodyPr rtlCol="0" anchor="ctr"/>
+          <a:lstStyle/>
+          <a:p>
+            <a:pPr algn="ctr"/>
+          </a:p>
+        </p:txBody>
+      </p:sp>
+      <p:sp>
+        <p:nvSpPr>
+          <p:cNvPr id="28" name="Rectangle 27"/>
+          <p:cNvSpPr/>
+          <p:nvPr/>
+        </p:nvSpPr>
+        <p:spPr>
+          <a:xfrm>
+            <a:off x="9109710" y="2651760"/>
+            <a:ext cx="2548890" cy="109728"/>
+          </a:xfrm>
+          <a:prstGeom prst="rect">
+            <a:avLst/>
+          </a:prstGeom>
+          <a:solidFill>
+            <a:srgbClr val="6366F1"/>
+          </a:solidFill>
+          <a:ln>
+            <a:noFill/>
+          </a:ln>
+          <a:effectLst/>
+        </p:spPr>
+        <p:style>
+          <a:lnRef idx="1">
+            <a:schemeClr val="accent1"/>
+          </a:lnRef>
+          <a:fillRef idx="3">
+            <a:schemeClr val="accent1"/>
+          </a:fillRef>
+          <a:effectRef idx="2">
+            <a:schemeClr val="accent1"/>
+          </a:effectRef>
+          <a:fontRef idx="minor">
+            <a:schemeClr val="lt1"/>
+          </a:fontRef>
+        </p:style>
+        <p:txBody>
+          <a:bodyPr rtlCol="0" anchor="ctr"/>
+          <a:lstStyle/>
+          <a:p>
+            <a:pPr algn="ctr"/>
+          </a:p>
+        </p:txBody>
+      </p:sp>
+      <p:sp>
+        <p:nvSpPr>
+          <p:cNvPr id="29" name="TextBox 28"/>
+          <p:cNvSpPr txBox="1"/>
+          <p:nvPr/>
+        </p:nvSpPr>
+        <p:spPr>
+          <a:xfrm>
+            <a:off x="9246870" y="2944368"/>
+            <a:ext cx="2274570" cy="365760"/>
+          </a:xfrm>
+          <a:prstGeom prst="rect">
+            <a:avLst/>
+          </a:prstGeom>
+          <a:noFill/>
+        </p:spPr>
+        <p:txBody>
+          <a:bodyPr wrap="square" anchor="t" lIns="0" rIns="0" tIns="0" bIns="0">
+            <a:spAutoFit/>
+          </a:bodyPr>
+          <a:lstStyle/>
+          <a:p>
+            <a:pPr algn="l">
+              <a:lnSpc>
+                <a:spcPct val="100000"/>
+              </a:lnSpc>
+              <a:spcBef>
+                <a:spcPts val="0"/>
+              </a:spcBef>
+              <a:spcAft>
+                <a:spcPts val="600"/>
+              </a:spcAft>
+            </a:pPr>
+            <a:r>
+              <a:rPr sz="1300" b="1">
+                <a:solidFill>
+                  <a:srgbClr val="6366F1"/>
+                </a:solidFill>
+                <a:latin typeface="NanumSquare"/>
+                <a:ea typeface="NanumSquare"/>
+                <a:cs typeface="NanumSquare"/>
+              </a:rPr>
+              <a:t>4</a:t>
+            </a:r>
+          </a:p>
+        </p:txBody>
+      </p:sp>
+      <p:sp>
+        <p:nvSpPr>
+          <p:cNvPr id="30" name="TextBox 29"/>
+          <p:cNvSpPr txBox="1"/>
+          <p:nvPr/>
+        </p:nvSpPr>
+        <p:spPr>
+          <a:xfrm>
+            <a:off x="9246870" y="3310128"/>
+            <a:ext cx="2274570" cy="548640"/>
+          </a:xfrm>
+          <a:prstGeom prst="rect">
+            <a:avLst/>
+          </a:prstGeom>
+          <a:noFill/>
+        </p:spPr>
+        <p:txBody>
+          <a:bodyPr wrap="square" anchor="t" lIns="0" rIns="0" tIns="0" bIns="0">
+            <a:spAutoFit/>
+          </a:bodyPr>
+          <a:lstStyle/>
+          <a:p>
+            <a:pPr algn="l">
+              <a:lnSpc>
+                <a:spcPct val="100000"/>
+              </a:lnSpc>
+              <a:spcBef>
+                <a:spcPts val="0"/>
+              </a:spcBef>
+              <a:spcAft>
+                <a:spcPts val="600"/>
+              </a:spcAft>
+            </a:pPr>
+            <a:r>
+              <a:rPr sz="1500" b="1">
+                <a:solidFill>
+                  <a:srgbClr val="0F172A"/>
+                </a:solidFill>
+                <a:latin typeface="NanumGothic"/>
+                <a:ea typeface="NanumGothic"/>
+                <a:cs typeface="NanumGothic"/>
+              </a:rPr>
+              <a:t>생성</a:t>
+            </a:r>
+          </a:p>
+        </p:txBody>
+      </p:sp>
+      <p:sp>
+        <p:nvSpPr>
+          <p:cNvPr id="31" name="TextBox 30"/>
+          <p:cNvSpPr txBox="1"/>
+          <p:nvPr/>
+        </p:nvSpPr>
+        <p:spPr>
+          <a:xfrm>
+            <a:off x="9246870" y="3822192"/>
+            <a:ext cx="2274570" cy="457200"/>
+          </a:xfrm>
+          <a:prstGeom prst="rect">
+            <a:avLst/>
+          </a:prstGeom>
+          <a:noFill/>
+        </p:spPr>
+        <p:txBody>
+          <a:bodyPr wrap="square" anchor="t" lIns="0" rIns="0" tIns="0" bIns="0">
+            <a:spAutoFit/>
+          </a:bodyPr>
+          <a:lstStyle/>
+          <a:p>
+            <a:pPr algn="l">
+              <a:lnSpc>
+                <a:spcPct val="100000"/>
+              </a:lnSpc>
+              <a:spcBef>
+                <a:spcPts val="0"/>
+              </a:spcBef>
+              <a:spcAft>
+                <a:spcPts val="600"/>
+              </a:spcAft>
+            </a:pPr>
+            <a:r>
+              <a:rPr sz="1100" b="0">
+                <a:solidFill>
+                  <a:srgbClr val="64748B"/>
+                </a:solidFill>
+                <a:latin typeface="NanumGothic"/>
+                <a:ea typeface="NanumGothic"/>
+                <a:cs typeface="NanumGothic"/>
+              </a:rPr>
+              <a:t>근거 기반으로 답</a:t>
+            </a:r>
+          </a:p>
+        </p:txBody>
+      </p:sp>
+      <p:sp>
+        <p:nvSpPr>
+          <p:cNvPr id="32" name="Rounded Rectangle 31"/>
+          <p:cNvSpPr/>
+          <p:nvPr/>
+        </p:nvSpPr>
+        <p:spPr>
+          <a:xfrm>
+            <a:off x="502920" y="5029200"/>
+            <a:ext cx="11155680" cy="658368"/>
+          </a:xfrm>
+          <a:prstGeom prst="roundRect">
+            <a:avLst/>
+          </a:prstGeom>
+          <a:solidFill>
+            <a:srgbClr val="F1F5F9"/>
+          </a:solidFill>
+          <a:ln w="12700">
+            <a:solidFill>
+              <a:srgbClr val="E2E8F0"/>
+            </a:solidFill>
+          </a:ln>
+          <a:effectLst/>
+        </p:spPr>
+        <p:style>
+          <a:lnRef idx="1">
+            <a:schemeClr val="accent1"/>
+          </a:lnRef>
+          <a:fillRef idx="3">
+            <a:schemeClr val="accent1"/>
+          </a:fillRef>
+          <a:effectRef idx="2">
+            <a:schemeClr val="accent1"/>
+          </a:effectRef>
+          <a:fontRef idx="minor">
+            <a:schemeClr val="lt1"/>
+          </a:fontRef>
+        </p:style>
+        <p:txBody>
+          <a:bodyPr rtlCol="0" anchor="ctr"/>
+          <a:lstStyle/>
+          <a:p>
+            <a:pPr algn="ctr"/>
+          </a:p>
+        </p:txBody>
+      </p:sp>
+      <p:sp>
+        <p:nvSpPr>
+          <p:cNvPr id="33" name="TextBox 32"/>
+          <p:cNvSpPr txBox="1"/>
+          <p:nvPr/>
+        </p:nvSpPr>
+        <p:spPr>
+          <a:xfrm>
+            <a:off x="777240" y="5029200"/>
+            <a:ext cx="10607040" cy="658368"/>
+          </a:xfrm>
+          <a:prstGeom prst="rect">
+            <a:avLst/>
+          </a:prstGeom>
+          <a:noFill/>
+        </p:spPr>
+        <p:txBody>
+          <a:bodyPr wrap="square" anchor="ctr" lIns="0" rIns="0" tIns="0" bIns="0">
+            <a:spAutoFit/>
+          </a:bodyPr>
+          <a:lstStyle/>
+          <a:p>
+            <a:pPr algn="l">
+              <a:lnSpc>
+                <a:spcPct val="100000"/>
+              </a:lnSpc>
+              <a:spcBef>
+                <a:spcPts val="0"/>
+              </a:spcBef>
+              <a:spcAft>
+                <a:spcPts val="600"/>
+              </a:spcAft>
+            </a:pPr>
+            <a:r>
+              <a:rPr sz="1200" b="1">
+                <a:solidFill>
+                  <a:srgbClr val="6366F1"/>
+                </a:solidFill>
+                <a:latin typeface="NanumGothic"/>
+                <a:ea typeface="NanumGothic"/>
+                <a:cs typeface="NanumGothic"/>
+              </a:rPr>
+              <a:t>NOTE   </a:t>
+            </a:r>
+            <a:r>
+              <a:rPr sz="1300" b="0">
+                <a:solidFill>
+                  <a:srgbClr val="0F172A"/>
+                </a:solidFill>
+                <a:latin typeface="NanumGothic"/>
+                <a:ea typeface="NanumGothic"/>
+                <a:cs typeface="NanumGothic"/>
+              </a:rPr>
+              <a:t>외부 지식을 붙여 환각↓·최신성↑ — 리서치 에이전트의 핵심 패턴</a:t>
             </a:r>
           </a:p>
         </p:txBody>
@@ -6013,7 +6876,7 @@
                 <a:ea typeface="NanumGothic"/>
                 <a:cs typeface="NanumGothic"/>
               </a:rPr>
-              <a:t>컨텍스트</a:t>
+              <a:t>프롬프트</a:t>
             </a:r>
           </a:p>
         </p:txBody>
@@ -6060,7 +6923,7 @@
                 <a:ea typeface="NanumSquare"/>
                 <a:cs typeface="NanumSquare"/>
               </a:rPr>
-              <a:t>컨텍스트 윈도우</a:t>
+              <a:t>프롬프트가 동작을 바꾼다</a:t>
             </a:r>
           </a:p>
         </p:txBody>
@@ -6289,7 +7152,7 @@
                 <a:ea typeface="NanumGothic"/>
                 <a:cs typeface="NanumGothic"/>
               </a:rPr>
-              <a:t>한 번에 볼 수 있는 토큰 한계</a:t>
+              <a:t>프롬프트 = 모델에 주는 입력 전체</a:t>
             </a:r>
           </a:p>
         </p:txBody>
@@ -6336,7 +7199,7 @@
                 <a:ea typeface="NanumGothic"/>
                 <a:cs typeface="NanumGothic"/>
               </a:rPr>
-              <a:t>프롬프트+대화+자료가 이 한도 안에 들어가야</a:t>
+              <a:t>지시 + 맥락 + 예시 + 데이터</a:t>
             </a:r>
           </a:p>
         </p:txBody>
@@ -6427,7 +7290,7 @@
                 <a:ea typeface="NanumGothic"/>
                 <a:cs typeface="NanumGothic"/>
               </a:rPr>
-              <a:t>길어지면</a:t>
+              <a:t>좋은 프롬프트</a:t>
             </a:r>
           </a:p>
         </p:txBody>
@@ -6474,7 +7337,7 @@
                 <a:ea typeface="NanumGothic"/>
                 <a:cs typeface="NanumGothic"/>
               </a:rPr>
-              <a:t>비용↑·속도↓·중간 내용 놓침(lost in the middle)</a:t>
+              <a:t>명확한 목표 · 충분한 맥락 · 원하는 형식 명시</a:t>
             </a:r>
           </a:p>
         </p:txBody>
@@ -6565,7 +7428,7 @@
                 <a:ea typeface="NanumGothic"/>
                 <a:cs typeface="NanumGothic"/>
               </a:rPr>
-              <a:t>에이전트와의 관련</a:t>
+              <a:t>나쁜 프롬프트</a:t>
             </a:r>
           </a:p>
         </p:txBody>
@@ -6612,7 +7475,7 @@
                 <a:ea typeface="NanumGothic"/>
                 <a:cs typeface="NanumGothic"/>
               </a:rPr>
-              <a:t>외부 메모리·검색·도구로 한계를 보완</a:t>
+              <a:t>모호·맥락 부족 → 엉뚱하거나 일반적인 답</a:t>
             </a:r>
           </a:p>
         </p:txBody>
@@ -6765,7 +7628,7 @@
                 <a:ea typeface="NanumGothic"/>
                 <a:cs typeface="NanumGothic"/>
               </a:rPr>
-              <a:t>핵심 균형</a:t>
+              <a:t>프롬프트 기법</a:t>
             </a:r>
           </a:p>
         </p:txBody>
@@ -6812,7 +7675,7 @@
                 <a:ea typeface="NanumSquare"/>
                 <a:cs typeface="NanumSquare"/>
               </a:rPr>
-              <a:t>LLM의 능력과 한계</a:t>
+              <a:t>자주 쓰는 패턴</a:t>
             </a:r>
           </a:p>
         </p:txBody>
@@ -6957,62 +7820,16 @@
       </p:sp>
       <p:sp>
         <p:nvSpPr>
-          <p:cNvPr id="9" name="Rounded Rectangle 8"/>
+          <p:cNvPr id="9" name="Oval 8"/>
           <p:cNvSpPr/>
           <p:nvPr/>
         </p:nvSpPr>
         <p:spPr>
           <a:xfrm>
-            <a:off x="502920" y="1828800"/>
-            <a:ext cx="5440680" cy="4023360"/>
-          </a:xfrm>
-          <a:prstGeom prst="roundRect">
-            <a:avLst/>
-          </a:prstGeom>
-          <a:solidFill>
-            <a:srgbClr val="F8FAFC"/>
-          </a:solidFill>
-          <a:ln w="12700">
-            <a:solidFill>
-              <a:srgbClr val="E2E8F0"/>
-            </a:solidFill>
-          </a:ln>
-          <a:effectLst/>
-        </p:spPr>
-        <p:style>
-          <a:lnRef idx="1">
-            <a:schemeClr val="accent1"/>
-          </a:lnRef>
-          <a:fillRef idx="3">
-            <a:schemeClr val="accent1"/>
-          </a:fillRef>
-          <a:effectRef idx="2">
-            <a:schemeClr val="accent1"/>
-          </a:effectRef>
-          <a:fontRef idx="minor">
-            <a:schemeClr val="lt1"/>
-          </a:fontRef>
-        </p:style>
-        <p:txBody>
-          <a:bodyPr rtlCol="0" anchor="ctr"/>
-          <a:lstStyle/>
-          <a:p>
-            <a:pPr algn="ctr"/>
-          </a:p>
-        </p:txBody>
-      </p:sp>
-      <p:sp>
-        <p:nvSpPr>
-          <p:cNvPr id="10" name="Rounded Rectangle 9"/>
-          <p:cNvSpPr/>
-          <p:nvPr/>
-        </p:nvSpPr>
-        <p:spPr>
-          <a:xfrm>
-            <a:off x="502920" y="1828800"/>
-            <a:ext cx="5440680" cy="640080"/>
-          </a:xfrm>
-          <a:prstGeom prst="roundRect">
+            <a:off x="548640" y="1911096"/>
+            <a:ext cx="146304" cy="146304"/>
+          </a:xfrm>
+          <a:prstGeom prst="ellipse">
             <a:avLst/>
           </a:prstGeom>
           <a:solidFill>
@@ -7047,22 +7864,22 @@
       </p:sp>
       <p:sp>
         <p:nvSpPr>
-          <p:cNvPr id="11" name="TextBox 10"/>
-          <p:cNvSpPr txBox="1"/>
-          <p:nvPr/>
-        </p:nvSpPr>
-        <p:spPr>
-          <a:xfrm>
-            <a:off x="777240" y="1828800"/>
-            <a:ext cx="4937760" cy="640080"/>
-          </a:xfrm>
-          <a:prstGeom prst="rect">
-            <a:avLst/>
-          </a:prstGeom>
-          <a:noFill/>
-        </p:spPr>
-        <p:txBody>
-          <a:bodyPr wrap="square" anchor="ctr" lIns="0" rIns="0" tIns="0" bIns="0">
+          <p:cNvPr id="10" name="TextBox 9"/>
+          <p:cNvSpPr txBox="1"/>
+          <p:nvPr/>
+        </p:nvSpPr>
+        <p:spPr>
+          <a:xfrm>
+            <a:off x="868680" y="1828800"/>
+            <a:ext cx="10607040" cy="457200"/>
+          </a:xfrm>
+          <a:prstGeom prst="rect">
+            <a:avLst/>
+          </a:prstGeom>
+          <a:noFill/>
+        </p:spPr>
+        <p:txBody>
+          <a:bodyPr wrap="square" anchor="t" lIns="0" rIns="0" tIns="0" bIns="0">
             <a:spAutoFit/>
           </a:bodyPr>
           <a:lstStyle/>
@@ -7081,270 +7898,83 @@
             <a:r>
               <a:rPr sz="1600" b="1">
                 <a:solidFill>
-                  <a:srgbClr val="FFFFFF"/>
-                </a:solidFill>
-                <a:latin typeface="NanumSquare"/>
-                <a:ea typeface="NanumSquare"/>
-                <a:cs typeface="NanumSquare"/>
-              </a:rPr>
-              <a:t>잘하는 것</a:t>
-            </a:r>
-          </a:p>
-        </p:txBody>
-      </p:sp>
-      <p:sp>
-        <p:nvSpPr>
-          <p:cNvPr id="12" name="TextBox 11"/>
-          <p:cNvSpPr txBox="1"/>
-          <p:nvPr/>
-        </p:nvSpPr>
-        <p:spPr>
-          <a:xfrm>
-            <a:off x="822960" y="2697480"/>
-            <a:ext cx="4846320" cy="548640"/>
-          </a:xfrm>
-          <a:prstGeom prst="rect">
-            <a:avLst/>
-          </a:prstGeom>
-          <a:noFill/>
-        </p:spPr>
-        <p:txBody>
-          <a:bodyPr wrap="square" anchor="t" lIns="0" rIns="0" tIns="0" bIns="0">
-            <a:spAutoFit/>
-          </a:bodyPr>
-          <a:lstStyle/>
-          <a:p>
-            <a:pPr algn="l">
-              <a:lnSpc>
-                <a:spcPct val="100000"/>
-              </a:lnSpc>
-              <a:spcBef>
-                <a:spcPts val="0"/>
-              </a:spcBef>
-              <a:spcAft>
-                <a:spcPts val="600"/>
-              </a:spcAft>
-            </a:pPr>
-            <a:r>
-              <a:rPr sz="1400" b="1">
-                <a:solidFill>
-                  <a:srgbClr val="6366F1"/>
+                  <a:srgbClr val="0F172A"/>
                 </a:solidFill>
                 <a:latin typeface="NanumGothic"/>
                 <a:ea typeface="NanumGothic"/>
                 <a:cs typeface="NanumGothic"/>
               </a:rPr>
-              <a:t>•  </a:t>
-            </a:r>
-            <a:r>
-              <a:rPr sz="1400" b="0">
-                <a:solidFill>
-                  <a:srgbClr val="0F172A"/>
+              <a:t>역할·맥락 부여</a:t>
+            </a:r>
+          </a:p>
+        </p:txBody>
+      </p:sp>
+      <p:sp>
+        <p:nvSpPr>
+          <p:cNvPr id="11" name="TextBox 10"/>
+          <p:cNvSpPr txBox="1"/>
+          <p:nvPr/>
+        </p:nvSpPr>
+        <p:spPr>
+          <a:xfrm>
+            <a:off x="868680" y="2212848"/>
+            <a:ext cx="10607040" cy="457200"/>
+          </a:xfrm>
+          <a:prstGeom prst="rect">
+            <a:avLst/>
+          </a:prstGeom>
+          <a:noFill/>
+        </p:spPr>
+        <p:txBody>
+          <a:bodyPr wrap="square" anchor="t" lIns="0" rIns="0" tIns="0" bIns="0">
+            <a:spAutoFit/>
+          </a:bodyPr>
+          <a:lstStyle/>
+          <a:p>
+            <a:pPr algn="l">
+              <a:lnSpc>
+                <a:spcPct val="100000"/>
+              </a:lnSpc>
+              <a:spcBef>
+                <a:spcPts val="0"/>
+              </a:spcBef>
+              <a:spcAft>
+                <a:spcPts val="600"/>
+              </a:spcAft>
+            </a:pPr>
+            <a:r>
+              <a:rPr sz="1300" b="0">
+                <a:solidFill>
+                  <a:srgbClr val="64748B"/>
                 </a:solidFill>
                 <a:latin typeface="NanumGothic"/>
                 <a:ea typeface="NanumGothic"/>
                 <a:cs typeface="NanumGothic"/>
               </a:rPr>
-              <a:t>요약·번역·분류</a:t>
-            </a:r>
-          </a:p>
-        </p:txBody>
-      </p:sp>
-      <p:sp>
-        <p:nvSpPr>
-          <p:cNvPr id="13" name="TextBox 12"/>
-          <p:cNvSpPr txBox="1"/>
-          <p:nvPr/>
-        </p:nvSpPr>
-        <p:spPr>
-          <a:xfrm>
-            <a:off x="822960" y="3264408"/>
-            <a:ext cx="4846320" cy="548640"/>
-          </a:xfrm>
-          <a:prstGeom prst="rect">
-            <a:avLst/>
-          </a:prstGeom>
-          <a:noFill/>
-        </p:spPr>
-        <p:txBody>
-          <a:bodyPr wrap="square" anchor="t" lIns="0" rIns="0" tIns="0" bIns="0">
-            <a:spAutoFit/>
-          </a:bodyPr>
-          <a:lstStyle/>
-          <a:p>
-            <a:pPr algn="l">
-              <a:lnSpc>
-                <a:spcPct val="100000"/>
-              </a:lnSpc>
-              <a:spcBef>
-                <a:spcPts val="0"/>
-              </a:spcBef>
-              <a:spcAft>
-                <a:spcPts val="600"/>
-              </a:spcAft>
-            </a:pPr>
-            <a:r>
-              <a:rPr sz="1400" b="1">
-                <a:solidFill>
-                  <a:srgbClr val="6366F1"/>
-                </a:solidFill>
-                <a:latin typeface="NanumGothic"/>
-                <a:ea typeface="NanumGothic"/>
-                <a:cs typeface="NanumGothic"/>
-              </a:rPr>
-              <a:t>•  </a:t>
-            </a:r>
-            <a:r>
-              <a:rPr sz="1400" b="0">
-                <a:solidFill>
-                  <a:srgbClr val="0F172A"/>
-                </a:solidFill>
-                <a:latin typeface="NanumGothic"/>
-                <a:ea typeface="NanumGothic"/>
-                <a:cs typeface="NanumGothic"/>
-              </a:rPr>
-              <a:t>코드 생성·설명</a:t>
-            </a:r>
-          </a:p>
-        </p:txBody>
-      </p:sp>
-      <p:sp>
-        <p:nvSpPr>
-          <p:cNvPr id="14" name="TextBox 13"/>
-          <p:cNvSpPr txBox="1"/>
-          <p:nvPr/>
-        </p:nvSpPr>
-        <p:spPr>
-          <a:xfrm>
-            <a:off x="822960" y="3831336"/>
-            <a:ext cx="4846320" cy="548640"/>
-          </a:xfrm>
-          <a:prstGeom prst="rect">
-            <a:avLst/>
-          </a:prstGeom>
-          <a:noFill/>
-        </p:spPr>
-        <p:txBody>
-          <a:bodyPr wrap="square" anchor="t" lIns="0" rIns="0" tIns="0" bIns="0">
-            <a:spAutoFit/>
-          </a:bodyPr>
-          <a:lstStyle/>
-          <a:p>
-            <a:pPr algn="l">
-              <a:lnSpc>
-                <a:spcPct val="100000"/>
-              </a:lnSpc>
-              <a:spcBef>
-                <a:spcPts val="0"/>
-              </a:spcBef>
-              <a:spcAft>
-                <a:spcPts val="600"/>
-              </a:spcAft>
-            </a:pPr>
-            <a:r>
-              <a:rPr sz="1400" b="1">
-                <a:solidFill>
-                  <a:srgbClr val="6366F1"/>
-                </a:solidFill>
-                <a:latin typeface="NanumGothic"/>
-                <a:ea typeface="NanumGothic"/>
-                <a:cs typeface="NanumGothic"/>
-              </a:rPr>
-              <a:t>•  </a:t>
-            </a:r>
-            <a:r>
-              <a:rPr sz="1400" b="0">
-                <a:solidFill>
-                  <a:srgbClr val="0F172A"/>
-                </a:solidFill>
-                <a:latin typeface="NanumGothic"/>
-                <a:ea typeface="NanumGothic"/>
-                <a:cs typeface="NanumGothic"/>
-              </a:rPr>
-              <a:t>텍스트 추출·재구성</a:t>
-            </a:r>
-          </a:p>
-        </p:txBody>
-      </p:sp>
-      <p:sp>
-        <p:nvSpPr>
-          <p:cNvPr id="15" name="TextBox 14"/>
-          <p:cNvSpPr txBox="1"/>
-          <p:nvPr/>
-        </p:nvSpPr>
-        <p:spPr>
-          <a:xfrm>
-            <a:off x="822960" y="4398264"/>
-            <a:ext cx="4846320" cy="548640"/>
-          </a:xfrm>
-          <a:prstGeom prst="rect">
-            <a:avLst/>
-          </a:prstGeom>
-          <a:noFill/>
-        </p:spPr>
-        <p:txBody>
-          <a:bodyPr wrap="square" anchor="t" lIns="0" rIns="0" tIns="0" bIns="0">
-            <a:spAutoFit/>
-          </a:bodyPr>
-          <a:lstStyle/>
-          <a:p>
-            <a:pPr algn="l">
-              <a:lnSpc>
-                <a:spcPct val="100000"/>
-              </a:lnSpc>
-              <a:spcBef>
-                <a:spcPts val="0"/>
-              </a:spcBef>
-              <a:spcAft>
-                <a:spcPts val="600"/>
-              </a:spcAft>
-            </a:pPr>
-            <a:r>
-              <a:rPr sz="1400" b="1">
-                <a:solidFill>
-                  <a:srgbClr val="6366F1"/>
-                </a:solidFill>
-                <a:latin typeface="NanumGothic"/>
-                <a:ea typeface="NanumGothic"/>
-                <a:cs typeface="NanumGothic"/>
-              </a:rPr>
-              <a:t>•  </a:t>
-            </a:r>
-            <a:r>
-              <a:rPr sz="1400" b="0">
-                <a:solidFill>
-                  <a:srgbClr val="0F172A"/>
-                </a:solidFill>
-                <a:latin typeface="NanumGothic"/>
-                <a:ea typeface="NanumGothic"/>
-                <a:cs typeface="NanumGothic"/>
-              </a:rPr>
-              <a:t>브레인스토밍</a:t>
-            </a:r>
-          </a:p>
-        </p:txBody>
-      </p:sp>
-      <p:sp>
-        <p:nvSpPr>
-          <p:cNvPr id="16" name="Rounded Rectangle 15"/>
+              <a:t>'너는 ~전문가' + 배경 → 답의 톤·깊이 조정</a:t>
+            </a:r>
+          </a:p>
+        </p:txBody>
+      </p:sp>
+      <p:sp>
+        <p:nvSpPr>
+          <p:cNvPr id="12" name="Oval 11"/>
           <p:cNvSpPr/>
           <p:nvPr/>
         </p:nvSpPr>
         <p:spPr>
           <a:xfrm>
-            <a:off x="6172200" y="1828800"/>
-            <a:ext cx="5440680" cy="4023360"/>
-          </a:xfrm>
-          <a:prstGeom prst="roundRect">
+            <a:off x="548640" y="2779776"/>
+            <a:ext cx="146304" cy="146304"/>
+          </a:xfrm>
+          <a:prstGeom prst="ellipse">
             <a:avLst/>
           </a:prstGeom>
           <a:solidFill>
-            <a:srgbClr val="F8FAFC"/>
+            <a:srgbClr val="6366F1"/>
           </a:solidFill>
-          <a:ln w="12700">
-            <a:solidFill>
-              <a:srgbClr val="E2E8F0"/>
-            </a:solidFill>
+          <a:ln>
+            <a:noFill/>
           </a:ln>
           <a:effectLst/>
         </p:spPr>
@@ -7372,20 +8002,114 @@
       </p:sp>
       <p:sp>
         <p:nvSpPr>
-          <p:cNvPr id="17" name="Rounded Rectangle 16"/>
+          <p:cNvPr id="13" name="TextBox 12"/>
+          <p:cNvSpPr txBox="1"/>
+          <p:nvPr/>
+        </p:nvSpPr>
+        <p:spPr>
+          <a:xfrm>
+            <a:off x="868680" y="2697480"/>
+            <a:ext cx="10607040" cy="457200"/>
+          </a:xfrm>
+          <a:prstGeom prst="rect">
+            <a:avLst/>
+          </a:prstGeom>
+          <a:noFill/>
+        </p:spPr>
+        <p:txBody>
+          <a:bodyPr wrap="square" anchor="t" lIns="0" rIns="0" tIns="0" bIns="0">
+            <a:spAutoFit/>
+          </a:bodyPr>
+          <a:lstStyle/>
+          <a:p>
+            <a:pPr algn="l">
+              <a:lnSpc>
+                <a:spcPct val="100000"/>
+              </a:lnSpc>
+              <a:spcBef>
+                <a:spcPts val="0"/>
+              </a:spcBef>
+              <a:spcAft>
+                <a:spcPts val="600"/>
+              </a:spcAft>
+            </a:pPr>
+            <a:r>
+              <a:rPr sz="1600" b="1">
+                <a:solidFill>
+                  <a:srgbClr val="0F172A"/>
+                </a:solidFill>
+                <a:latin typeface="NanumGothic"/>
+                <a:ea typeface="NanumGothic"/>
+                <a:cs typeface="NanumGothic"/>
+              </a:rPr>
+              <a:t>예시 제공 (few-shot)</a:t>
+            </a:r>
+          </a:p>
+        </p:txBody>
+      </p:sp>
+      <p:sp>
+        <p:nvSpPr>
+          <p:cNvPr id="14" name="TextBox 13"/>
+          <p:cNvSpPr txBox="1"/>
+          <p:nvPr/>
+        </p:nvSpPr>
+        <p:spPr>
+          <a:xfrm>
+            <a:off x="868680" y="3081528"/>
+            <a:ext cx="10607040" cy="457200"/>
+          </a:xfrm>
+          <a:prstGeom prst="rect">
+            <a:avLst/>
+          </a:prstGeom>
+          <a:noFill/>
+        </p:spPr>
+        <p:txBody>
+          <a:bodyPr wrap="square" anchor="t" lIns="0" rIns="0" tIns="0" bIns="0">
+            <a:spAutoFit/>
+          </a:bodyPr>
+          <a:lstStyle/>
+          <a:p>
+            <a:pPr algn="l">
+              <a:lnSpc>
+                <a:spcPct val="100000"/>
+              </a:lnSpc>
+              <a:spcBef>
+                <a:spcPts val="0"/>
+              </a:spcBef>
+              <a:spcAft>
+                <a:spcPts val="600"/>
+              </a:spcAft>
+            </a:pPr>
+            <a:r>
+              <a:rPr sz="1300" b="0">
+                <a:solidFill>
+                  <a:srgbClr val="64748B"/>
+                </a:solidFill>
+                <a:latin typeface="NanumGothic"/>
+                <a:ea typeface="NanumGothic"/>
+                <a:cs typeface="NanumGothic"/>
+              </a:rPr>
+              <a:t>원하는 입출력 예 2~3개 → 형식이 안정</a:t>
+            </a:r>
+          </a:p>
+        </p:txBody>
+      </p:sp>
+      <p:sp>
+        <p:nvSpPr>
+          <p:cNvPr id="15" name="Oval 14"/>
           <p:cNvSpPr/>
           <p:nvPr/>
         </p:nvSpPr>
         <p:spPr>
           <a:xfrm>
-            <a:off x="6172200" y="1828800"/>
-            <a:ext cx="5440680" cy="640080"/>
-          </a:xfrm>
-          <a:prstGeom prst="roundRect">
+            <a:off x="548640" y="3648456"/>
+            <a:ext cx="146304" cy="146304"/>
+          </a:xfrm>
+          <a:prstGeom prst="ellipse">
             <a:avLst/>
           </a:prstGeom>
           <a:solidFill>
-            <a:srgbClr val="12203C"/>
+            <a:srgbClr val="6366F1"/>
           </a:solidFill>
           <a:ln>
             <a:noFill/>
@@ -7416,22 +8140,22 @@
       </p:sp>
       <p:sp>
         <p:nvSpPr>
-          <p:cNvPr id="18" name="TextBox 17"/>
-          <p:cNvSpPr txBox="1"/>
-          <p:nvPr/>
-        </p:nvSpPr>
-        <p:spPr>
-          <a:xfrm>
-            <a:off x="6446520" y="1828800"/>
-            <a:ext cx="4937760" cy="640080"/>
-          </a:xfrm>
-          <a:prstGeom prst="rect">
-            <a:avLst/>
-          </a:prstGeom>
-          <a:noFill/>
-        </p:spPr>
-        <p:txBody>
-          <a:bodyPr wrap="square" anchor="ctr" lIns="0" rIns="0" tIns="0" bIns="0">
+          <p:cNvPr id="16" name="TextBox 15"/>
+          <p:cNvSpPr txBox="1"/>
+          <p:nvPr/>
+        </p:nvSpPr>
+        <p:spPr>
+          <a:xfrm>
+            <a:off x="868680" y="3566160"/>
+            <a:ext cx="10607040" cy="457200"/>
+          </a:xfrm>
+          <a:prstGeom prst="rect">
+            <a:avLst/>
+          </a:prstGeom>
+          <a:noFill/>
+        </p:spPr>
+        <p:txBody>
+          <a:bodyPr wrap="square" anchor="t" lIns="0" rIns="0" tIns="0" bIns="0">
             <a:spAutoFit/>
           </a:bodyPr>
           <a:lstStyle/>
@@ -7450,245 +8174,60 @@
             <a:r>
               <a:rPr sz="1600" b="1">
                 <a:solidFill>
-                  <a:srgbClr val="FFFFFF"/>
-                </a:solidFill>
-                <a:latin typeface="NanumSquare"/>
-                <a:ea typeface="NanumSquare"/>
-                <a:cs typeface="NanumSquare"/>
-              </a:rPr>
-              <a:t>주의할 것</a:t>
-            </a:r>
-          </a:p>
-        </p:txBody>
-      </p:sp>
-      <p:sp>
-        <p:nvSpPr>
-          <p:cNvPr id="19" name="TextBox 18"/>
-          <p:cNvSpPr txBox="1"/>
-          <p:nvPr/>
-        </p:nvSpPr>
-        <p:spPr>
-          <a:xfrm>
-            <a:off x="6492240" y="2697480"/>
-            <a:ext cx="4846320" cy="548640"/>
-          </a:xfrm>
-          <a:prstGeom prst="rect">
-            <a:avLst/>
-          </a:prstGeom>
-          <a:noFill/>
-        </p:spPr>
-        <p:txBody>
-          <a:bodyPr wrap="square" anchor="t" lIns="0" rIns="0" tIns="0" bIns="0">
-            <a:spAutoFit/>
-          </a:bodyPr>
-          <a:lstStyle/>
-          <a:p>
-            <a:pPr algn="l">
-              <a:lnSpc>
-                <a:spcPct val="100000"/>
-              </a:lnSpc>
-              <a:spcBef>
-                <a:spcPts val="0"/>
-              </a:spcBef>
-              <a:spcAft>
-                <a:spcPts val="600"/>
-              </a:spcAft>
-            </a:pPr>
-            <a:r>
-              <a:rPr sz="1400" b="1">
-                <a:solidFill>
-                  <a:srgbClr val="12203C"/>
+                  <a:srgbClr val="0F172A"/>
                 </a:solidFill>
                 <a:latin typeface="NanumGothic"/>
                 <a:ea typeface="NanumGothic"/>
                 <a:cs typeface="NanumGothic"/>
               </a:rPr>
-              <a:t>•  </a:t>
-            </a:r>
-            <a:r>
-              <a:rPr sz="1400" b="0">
-                <a:solidFill>
-                  <a:srgbClr val="0F172A"/>
+              <a:t>단계적 사고 (CoT)</a:t>
+            </a:r>
+          </a:p>
+        </p:txBody>
+      </p:sp>
+      <p:sp>
+        <p:nvSpPr>
+          <p:cNvPr id="17" name="TextBox 16"/>
+          <p:cNvSpPr txBox="1"/>
+          <p:nvPr/>
+        </p:nvSpPr>
+        <p:spPr>
+          <a:xfrm>
+            <a:off x="868680" y="3950208"/>
+            <a:ext cx="10607040" cy="457200"/>
+          </a:xfrm>
+          <a:prstGeom prst="rect">
+            <a:avLst/>
+          </a:prstGeom>
+          <a:noFill/>
+        </p:spPr>
+        <p:txBody>
+          <a:bodyPr wrap="square" anchor="t" lIns="0" rIns="0" tIns="0" bIns="0">
+            <a:spAutoFit/>
+          </a:bodyPr>
+          <a:lstStyle/>
+          <a:p>
+            <a:pPr algn="l">
+              <a:lnSpc>
+                <a:spcPct val="100000"/>
+              </a:lnSpc>
+              <a:spcBef>
+                <a:spcPts val="0"/>
+              </a:spcBef>
+              <a:spcAft>
+                <a:spcPts val="600"/>
+              </a:spcAft>
+            </a:pPr>
+            <a:r>
+              <a:rPr sz="1300" b="0">
+                <a:solidFill>
+                  <a:srgbClr val="64748B"/>
                 </a:solidFill>
                 <a:latin typeface="NanumGothic"/>
                 <a:ea typeface="NanumGothic"/>
                 <a:cs typeface="NanumGothic"/>
               </a:rPr>
-              <a:t>환각 — 없는 사실 지어냄</a:t>
-            </a:r>
-          </a:p>
-        </p:txBody>
-      </p:sp>
-      <p:sp>
-        <p:nvSpPr>
-          <p:cNvPr id="20" name="TextBox 19"/>
-          <p:cNvSpPr txBox="1"/>
-          <p:nvPr/>
-        </p:nvSpPr>
-        <p:spPr>
-          <a:xfrm>
-            <a:off x="6492240" y="3264408"/>
-            <a:ext cx="4846320" cy="548640"/>
-          </a:xfrm>
-          <a:prstGeom prst="rect">
-            <a:avLst/>
-          </a:prstGeom>
-          <a:noFill/>
-        </p:spPr>
-        <p:txBody>
-          <a:bodyPr wrap="square" anchor="t" lIns="0" rIns="0" tIns="0" bIns="0">
-            <a:spAutoFit/>
-          </a:bodyPr>
-          <a:lstStyle/>
-          <a:p>
-            <a:pPr algn="l">
-              <a:lnSpc>
-                <a:spcPct val="100000"/>
-              </a:lnSpc>
-              <a:spcBef>
-                <a:spcPts val="0"/>
-              </a:spcBef>
-              <a:spcAft>
-                <a:spcPts val="600"/>
-              </a:spcAft>
-            </a:pPr>
-            <a:r>
-              <a:rPr sz="1400" b="1">
-                <a:solidFill>
-                  <a:srgbClr val="12203C"/>
-                </a:solidFill>
-                <a:latin typeface="NanumGothic"/>
-                <a:ea typeface="NanumGothic"/>
-                <a:cs typeface="NanumGothic"/>
-              </a:rPr>
-              <a:t>•  </a:t>
-            </a:r>
-            <a:r>
-              <a:rPr sz="1400" b="0">
-                <a:solidFill>
-                  <a:srgbClr val="0F172A"/>
-                </a:solidFill>
-                <a:latin typeface="NanumGothic"/>
-                <a:ea typeface="NanumGothic"/>
-                <a:cs typeface="NanumGothic"/>
-              </a:rPr>
-              <a:t>최신·실시간 정보</a:t>
-            </a:r>
-          </a:p>
-        </p:txBody>
-      </p:sp>
-      <p:sp>
-        <p:nvSpPr>
-          <p:cNvPr id="21" name="TextBox 20"/>
-          <p:cNvSpPr txBox="1"/>
-          <p:nvPr/>
-        </p:nvSpPr>
-        <p:spPr>
-          <a:xfrm>
-            <a:off x="6492240" y="3831336"/>
-            <a:ext cx="4846320" cy="548640"/>
-          </a:xfrm>
-          <a:prstGeom prst="rect">
-            <a:avLst/>
-          </a:prstGeom>
-          <a:noFill/>
-        </p:spPr>
-        <p:txBody>
-          <a:bodyPr wrap="square" anchor="t" lIns="0" rIns="0" tIns="0" bIns="0">
-            <a:spAutoFit/>
-          </a:bodyPr>
-          <a:lstStyle/>
-          <a:p>
-            <a:pPr algn="l">
-              <a:lnSpc>
-                <a:spcPct val="100000"/>
-              </a:lnSpc>
-              <a:spcBef>
-                <a:spcPts val="0"/>
-              </a:spcBef>
-              <a:spcAft>
-                <a:spcPts val="600"/>
-              </a:spcAft>
-            </a:pPr>
-            <a:r>
-              <a:rPr sz="1400" b="1">
-                <a:solidFill>
-                  <a:srgbClr val="12203C"/>
-                </a:solidFill>
-                <a:latin typeface="NanumGothic"/>
-                <a:ea typeface="NanumGothic"/>
-                <a:cs typeface="NanumGothic"/>
-              </a:rPr>
-              <a:t>•  </a:t>
-            </a:r>
-            <a:r>
-              <a:rPr sz="1400" b="0">
-                <a:solidFill>
-                  <a:srgbClr val="0F172A"/>
-                </a:solidFill>
-                <a:latin typeface="NanumGothic"/>
-                <a:ea typeface="NanumGothic"/>
-                <a:cs typeface="NanumGothic"/>
-              </a:rPr>
-              <a:t>정확한 계산·셈</a:t>
-            </a:r>
-          </a:p>
-        </p:txBody>
-      </p:sp>
-      <p:sp>
-        <p:nvSpPr>
-          <p:cNvPr id="22" name="TextBox 21"/>
-          <p:cNvSpPr txBox="1"/>
-          <p:nvPr/>
-        </p:nvSpPr>
-        <p:spPr>
-          <a:xfrm>
-            <a:off x="6492240" y="4398264"/>
-            <a:ext cx="4846320" cy="548640"/>
-          </a:xfrm>
-          <a:prstGeom prst="rect">
-            <a:avLst/>
-          </a:prstGeom>
-          <a:noFill/>
-        </p:spPr>
-        <p:txBody>
-          <a:bodyPr wrap="square" anchor="t" lIns="0" rIns="0" tIns="0" bIns="0">
-            <a:spAutoFit/>
-          </a:bodyPr>
-          <a:lstStyle/>
-          <a:p>
-            <a:pPr algn="l">
-              <a:lnSpc>
-                <a:spcPct val="100000"/>
-              </a:lnSpc>
-              <a:spcBef>
-                <a:spcPts val="0"/>
-              </a:spcBef>
-              <a:spcAft>
-                <a:spcPts val="600"/>
-              </a:spcAft>
-            </a:pPr>
-            <a:r>
-              <a:rPr sz="1400" b="1">
-                <a:solidFill>
-                  <a:srgbClr val="12203C"/>
-                </a:solidFill>
-                <a:latin typeface="NanumGothic"/>
-                <a:ea typeface="NanumGothic"/>
-                <a:cs typeface="NanumGothic"/>
-              </a:rPr>
-              <a:t>•  </a:t>
-            </a:r>
-            <a:r>
-              <a:rPr sz="1400" b="0">
-                <a:solidFill>
-                  <a:srgbClr val="0F172A"/>
-                </a:solidFill>
-                <a:latin typeface="NanumGothic"/>
-                <a:ea typeface="NanumGothic"/>
-                <a:cs typeface="NanumGothic"/>
-              </a:rPr>
-              <a:t>일관된 장기 추론</a:t>
+              <a:t>'단계별로 생각해줘' → 복잡한 추론 정확도↑</a:t>
             </a:r>
           </a:p>
         </p:txBody>
@@ -7841,7 +8380,7 @@
                 <a:ea typeface="NanumGothic"/>
                 <a:cs typeface="NanumGothic"/>
               </a:rPr>
-              <a:t>주의</a:t>
+              <a:t>생성 제어</a:t>
             </a:r>
           </a:p>
         </p:txBody>
@@ -7888,7 +8427,7 @@
                 <a:ea typeface="NanumSquare"/>
                 <a:cs typeface="NanumSquare"/>
               </a:rPr>
-              <a:t>환각(hallucination) 바로 알기</a:t>
+              <a:t>같은 모델, 다른 출력</a:t>
             </a:r>
           </a:p>
         </p:txBody>
@@ -8117,7 +8656,7 @@
                 <a:ea typeface="NanumGothic"/>
                 <a:cs typeface="NanumGothic"/>
               </a:rPr>
-              <a:t>그럴듯하지만 틀린 출력</a:t>
+              <a:t>temperature</a:t>
             </a:r>
           </a:p>
         </p:txBody>
@@ -8164,7 +8703,7 @@
                 <a:ea typeface="NanumGothic"/>
                 <a:cs typeface="NanumGothic"/>
               </a:rPr>
-              <a:t>출처·인용·수치를 자신있게 지어내기도</a:t>
+              <a:t>낮으면 결정적·일관, 높으면 다양·창의(불안정)</a:t>
             </a:r>
           </a:p>
         </p:txBody>
@@ -8255,7 +8794,7 @@
                 <a:ea typeface="NanumGothic"/>
                 <a:cs typeface="NanumGothic"/>
               </a:rPr>
-              <a:t>왜 생기나</a:t>
+              <a:t>확률적 생성</a:t>
             </a:r>
           </a:p>
         </p:txBody>
@@ -8302,7 +8841,7 @@
                 <a:ea typeface="NanumGothic"/>
                 <a:cs typeface="NanumGothic"/>
               </a:rPr>
-              <a:t>'그럴듯한 다음 토큰'을 생성할 뿐 사실 검증을 안 함</a:t>
+              <a:t>같은 질문도 매번 다른 답이 나올 수 있다</a:t>
             </a:r>
           </a:p>
         </p:txBody>
@@ -8393,7 +8932,7 @@
                 <a:ea typeface="NanumGothic"/>
                 <a:cs typeface="NanumGothic"/>
               </a:rPr>
-              <a:t>대응</a:t>
+              <a:t>재현성에의 함의</a:t>
             </a:r>
           </a:p>
         </p:txBody>
@@ -8440,7 +8979,7 @@
                 <a:ea typeface="NanumGothic"/>
                 <a:cs typeface="NanumGothic"/>
               </a:rPr>
-              <a:t>출처 확인·검색 연동·교차검증 → 리서치 에이전트의 존재 이유</a:t>
+              <a:t>리서치엔 낮은 temperature가 유리 — 결과 안정</a:t>
             </a:r>
           </a:p>
         </p:txBody>
@@ -8593,7 +9132,7 @@
                 <a:ea typeface="NanumGothic"/>
                 <a:cs typeface="NanumGothic"/>
               </a:rPr>
-              <a:t>브릿지</a:t>
+              <a:t>컨텍스트</a:t>
             </a:r>
           </a:p>
         </p:txBody>
@@ -8640,7 +9179,7 @@
                 <a:ea typeface="NanumSquare"/>
                 <a:cs typeface="NanumSquare"/>
               </a:rPr>
-              <a:t>LLM → 에이전트로 가는 길</a:t>
+              <a:t>컨텍스트 윈도우</a:t>
             </a:r>
           </a:p>
         </p:txBody>
@@ -8869,7 +9408,7 @@
                 <a:ea typeface="NanumGothic"/>
                 <a:cs typeface="NanumGothic"/>
               </a:rPr>
-              <a:t>LLM 단독의 한계</a:t>
+              <a:t>한 번에 볼 수 있는 토큰 한계</a:t>
             </a:r>
           </a:p>
         </p:txBody>
@@ -8916,7 +9455,7 @@
                 <a:ea typeface="NanumGothic"/>
                 <a:cs typeface="NanumGothic"/>
               </a:rPr>
-              <a:t>도구 없음 · 기억 없음 · 한 번의 응답으로 끝</a:t>
+              <a:t>프롬프트+대화+자료가 이 한도 안에 들어가야</a:t>
             </a:r>
           </a:p>
         </p:txBody>
@@ -9007,7 +9546,7 @@
                 <a:ea typeface="NanumGothic"/>
                 <a:cs typeface="NanumGothic"/>
               </a:rPr>
-              <a:t>LLM + 도구 + 반복 = 에이전트</a:t>
+              <a:t>길어지면</a:t>
             </a:r>
           </a:p>
         </p:txBody>
@@ -9054,7 +9593,7 @@
                 <a:ea typeface="NanumGothic"/>
                 <a:cs typeface="NanumGothic"/>
               </a:rPr>
-              <a:t>검색·실행·파일 접근을 루프로 — 목표를 수행</a:t>
+              <a:t>비용↑·속도↓·중간 내용 놓침(lost in the middle)</a:t>
             </a:r>
           </a:p>
         </p:txBody>
@@ -9145,7 +9684,7 @@
                 <a:ea typeface="NanumGothic"/>
                 <a:cs typeface="NanumGothic"/>
               </a:rPr>
-              <a:t>다음: Day 2</a:t>
+              <a:t>에이전트와의 관련</a:t>
             </a:r>
           </a:p>
         </p:txBody>
@@ -9192,111 +9731,7 @@
                 <a:ea typeface="NanumGothic"/>
                 <a:cs typeface="NanumGothic"/>
               </a:rPr>
-              <a:t>에이전트의 정의와 Claude Code 실습</a:t>
-            </a:r>
-          </a:p>
-        </p:txBody>
-      </p:sp>
-      <p:sp>
-        <p:nvSpPr>
-          <p:cNvPr id="18" name="Rounded Rectangle 17"/>
-          <p:cNvSpPr/>
-          <p:nvPr/>
-        </p:nvSpPr>
-        <p:spPr>
-          <a:xfrm>
-            <a:off x="502920" y="5532120"/>
-            <a:ext cx="11155680" cy="658368"/>
-          </a:xfrm>
-          <a:prstGeom prst="roundRect">
-            <a:avLst/>
-          </a:prstGeom>
-          <a:solidFill>
-            <a:srgbClr val="F1F5F9"/>
-          </a:solidFill>
-          <a:ln w="12700">
-            <a:solidFill>
-              <a:srgbClr val="E2E8F0"/>
-            </a:solidFill>
-          </a:ln>
-          <a:effectLst/>
-        </p:spPr>
-        <p:style>
-          <a:lnRef idx="1">
-            <a:schemeClr val="accent1"/>
-          </a:lnRef>
-          <a:fillRef idx="3">
-            <a:schemeClr val="accent1"/>
-          </a:fillRef>
-          <a:effectRef idx="2">
-            <a:schemeClr val="accent1"/>
-          </a:effectRef>
-          <a:fontRef idx="minor">
-            <a:schemeClr val="lt1"/>
-          </a:fontRef>
-        </p:style>
-        <p:txBody>
-          <a:bodyPr rtlCol="0" anchor="ctr"/>
-          <a:lstStyle/>
-          <a:p>
-            <a:pPr algn="ctr"/>
-          </a:p>
-        </p:txBody>
-      </p:sp>
-      <p:sp>
-        <p:nvSpPr>
-          <p:cNvPr id="19" name="TextBox 18"/>
-          <p:cNvSpPr txBox="1"/>
-          <p:nvPr/>
-        </p:nvSpPr>
-        <p:spPr>
-          <a:xfrm>
-            <a:off x="777240" y="5532120"/>
-            <a:ext cx="10607040" cy="658368"/>
-          </a:xfrm>
-          <a:prstGeom prst="rect">
-            <a:avLst/>
-          </a:prstGeom>
-          <a:noFill/>
-        </p:spPr>
-        <p:txBody>
-          <a:bodyPr wrap="square" anchor="ctr" lIns="0" rIns="0" tIns="0" bIns="0">
-            <a:spAutoFit/>
-          </a:bodyPr>
-          <a:lstStyle/>
-          <a:p>
-            <a:pPr algn="l">
-              <a:lnSpc>
-                <a:spcPct val="100000"/>
-              </a:lnSpc>
-              <a:spcBef>
-                <a:spcPts val="0"/>
-              </a:spcBef>
-              <a:spcAft>
-                <a:spcPts val="600"/>
-              </a:spcAft>
-            </a:pPr>
-            <a:r>
-              <a:rPr sz="1200" b="1">
-                <a:solidFill>
-                  <a:srgbClr val="6366F1"/>
-                </a:solidFill>
-                <a:latin typeface="NanumGothic"/>
-                <a:ea typeface="NanumGothic"/>
-                <a:cs typeface="NanumGothic"/>
-              </a:rPr>
-              <a:t>NOTE   </a:t>
-            </a:r>
-            <a:r>
-              <a:rPr sz="1300" b="0">
-                <a:solidFill>
-                  <a:srgbClr val="0F172A"/>
-                </a:solidFill>
-                <a:latin typeface="NanumGothic"/>
-                <a:ea typeface="NanumGothic"/>
-                <a:cs typeface="NanumGothic"/>
-              </a:rPr>
-              <a:t>에이전트의 정의는 여기서 출발한다</a:t>
+              <a:t>외부 메모리·검색·도구로 한계를 보완</a:t>
             </a:r>
           </a:p>
         </p:txBody>
@@ -9449,7 +9884,7 @@
                 <a:ea typeface="NanumGothic"/>
                 <a:cs typeface="NanumGothic"/>
               </a:rPr>
-              <a:t>SUMMARY</a:t>
+              <a:t>핵심 균형</a:t>
             </a:r>
           </a:p>
         </p:txBody>
@@ -9496,7 +9931,7 @@
                 <a:ea typeface="NanumSquare"/>
                 <a:cs typeface="NanumSquare"/>
               </a:rPr>
-              <a:t>핵심 정리 및 다음 과정</a:t>
+              <a:t>LLM의 능력과 한계</a:t>
             </a:r>
           </a:p>
         </p:txBody>
@@ -9641,334 +10076,14 @@
       </p:sp>
       <p:sp>
         <p:nvSpPr>
-          <p:cNvPr id="9" name="TextBox 8"/>
-          <p:cNvSpPr txBox="1"/>
-          <p:nvPr/>
-        </p:nvSpPr>
-        <p:spPr>
-          <a:xfrm>
-            <a:off x="548640" y="1783080"/>
-            <a:ext cx="6400800" cy="365760"/>
-          </a:xfrm>
-          <a:prstGeom prst="rect">
-            <a:avLst/>
-          </a:prstGeom>
-          <a:noFill/>
-        </p:spPr>
-        <p:txBody>
-          <a:bodyPr wrap="square" anchor="t" lIns="0" rIns="0" tIns="0" bIns="0">
-            <a:spAutoFit/>
-          </a:bodyPr>
-          <a:lstStyle/>
-          <a:p>
-            <a:pPr algn="l">
-              <a:lnSpc>
-                <a:spcPct val="100000"/>
-              </a:lnSpc>
-              <a:spcBef>
-                <a:spcPts val="0"/>
-              </a:spcBef>
-              <a:spcAft>
-                <a:spcPts val="600"/>
-              </a:spcAft>
-            </a:pPr>
-            <a:r>
-              <a:rPr sz="1500" b="1">
-                <a:solidFill>
-                  <a:srgbClr val="6366F1"/>
-                </a:solidFill>
-                <a:latin typeface="NanumSquare"/>
-                <a:ea typeface="NanumSquare"/>
-                <a:cs typeface="NanumSquare"/>
-              </a:rPr>
-              <a:t>핵심 정리</a:t>
-            </a:r>
-          </a:p>
-        </p:txBody>
-      </p:sp>
-      <p:sp>
-        <p:nvSpPr>
-          <p:cNvPr id="10" name="Oval 9"/>
+          <p:cNvPr id="9" name="Rounded Rectangle 8"/>
           <p:cNvSpPr/>
           <p:nvPr/>
         </p:nvSpPr>
         <p:spPr>
           <a:xfrm>
-            <a:off x="566928" y="2359152"/>
-            <a:ext cx="146304" cy="146304"/>
-          </a:xfrm>
-          <a:prstGeom prst="ellipse">
-            <a:avLst/>
-          </a:prstGeom>
-          <a:solidFill>
-            <a:srgbClr val="6366F1"/>
-          </a:solidFill>
-          <a:ln>
-            <a:noFill/>
-          </a:ln>
-          <a:effectLst/>
-        </p:spPr>
-        <p:style>
-          <a:lnRef idx="1">
-            <a:schemeClr val="accent1"/>
-          </a:lnRef>
-          <a:fillRef idx="3">
-            <a:schemeClr val="accent1"/>
-          </a:fillRef>
-          <a:effectRef idx="2">
-            <a:schemeClr val="accent1"/>
-          </a:effectRef>
-          <a:fontRef idx="minor">
-            <a:schemeClr val="lt1"/>
-          </a:fontRef>
-        </p:style>
-        <p:txBody>
-          <a:bodyPr rtlCol="0" anchor="ctr"/>
-          <a:lstStyle/>
-          <a:p>
-            <a:pPr algn="ctr"/>
-          </a:p>
-        </p:txBody>
-      </p:sp>
-      <p:sp>
-        <p:nvSpPr>
-          <p:cNvPr id="11" name="TextBox 10"/>
-          <p:cNvSpPr txBox="1"/>
-          <p:nvPr/>
-        </p:nvSpPr>
-        <p:spPr>
-          <a:xfrm>
-            <a:off x="868680" y="2286000"/>
-            <a:ext cx="6400800" cy="548640"/>
-          </a:xfrm>
-          <a:prstGeom prst="rect">
-            <a:avLst/>
-          </a:prstGeom>
-          <a:noFill/>
-        </p:spPr>
-        <p:txBody>
-          <a:bodyPr wrap="square" anchor="t" lIns="0" rIns="0" tIns="0" bIns="0">
-            <a:spAutoFit/>
-          </a:bodyPr>
-          <a:lstStyle/>
-          <a:p>
-            <a:pPr algn="l">
-              <a:lnSpc>
-                <a:spcPct val="105000"/>
-              </a:lnSpc>
-              <a:spcBef>
-                <a:spcPts val="0"/>
-              </a:spcBef>
-              <a:spcAft>
-                <a:spcPts val="600"/>
-              </a:spcAft>
-            </a:pPr>
-            <a:r>
-              <a:rPr sz="1500" b="0">
-                <a:solidFill>
-                  <a:srgbClr val="0F172A"/>
-                </a:solidFill>
-                <a:latin typeface="NanumGothic"/>
-                <a:ea typeface="NanumGothic"/>
-                <a:cs typeface="NanumGothic"/>
-              </a:rPr>
-              <a:t>LLM의 핵심은 '다음 토큰 예측' — 확률적 생성이다</a:t>
-            </a:r>
-          </a:p>
-        </p:txBody>
-      </p:sp>
-      <p:sp>
-        <p:nvSpPr>
-          <p:cNvPr id="12" name="Oval 11"/>
-          <p:cNvSpPr/>
-          <p:nvPr/>
-        </p:nvSpPr>
-        <p:spPr>
-          <a:xfrm>
-            <a:off x="566928" y="2999232"/>
-            <a:ext cx="146304" cy="146304"/>
-          </a:xfrm>
-          <a:prstGeom prst="ellipse">
-            <a:avLst/>
-          </a:prstGeom>
-          <a:solidFill>
-            <a:srgbClr val="6366F1"/>
-          </a:solidFill>
-          <a:ln>
-            <a:noFill/>
-          </a:ln>
-          <a:effectLst/>
-        </p:spPr>
-        <p:style>
-          <a:lnRef idx="1">
-            <a:schemeClr val="accent1"/>
-          </a:lnRef>
-          <a:fillRef idx="3">
-            <a:schemeClr val="accent1"/>
-          </a:fillRef>
-          <a:effectRef idx="2">
-            <a:schemeClr val="accent1"/>
-          </a:effectRef>
-          <a:fontRef idx="minor">
-            <a:schemeClr val="lt1"/>
-          </a:fontRef>
-        </p:style>
-        <p:txBody>
-          <a:bodyPr rtlCol="0" anchor="ctr"/>
-          <a:lstStyle/>
-          <a:p>
-            <a:pPr algn="ctr"/>
-          </a:p>
-        </p:txBody>
-      </p:sp>
-      <p:sp>
-        <p:nvSpPr>
-          <p:cNvPr id="13" name="TextBox 12"/>
-          <p:cNvSpPr txBox="1"/>
-          <p:nvPr/>
-        </p:nvSpPr>
-        <p:spPr>
-          <a:xfrm>
-            <a:off x="868680" y="2926080"/>
-            <a:ext cx="6400800" cy="548640"/>
-          </a:xfrm>
-          <a:prstGeom prst="rect">
-            <a:avLst/>
-          </a:prstGeom>
-          <a:noFill/>
-        </p:spPr>
-        <p:txBody>
-          <a:bodyPr wrap="square" anchor="t" lIns="0" rIns="0" tIns="0" bIns="0">
-            <a:spAutoFit/>
-          </a:bodyPr>
-          <a:lstStyle/>
-          <a:p>
-            <a:pPr algn="l">
-              <a:lnSpc>
-                <a:spcPct val="105000"/>
-              </a:lnSpc>
-              <a:spcBef>
-                <a:spcPts val="0"/>
-              </a:spcBef>
-              <a:spcAft>
-                <a:spcPts val="600"/>
-              </a:spcAft>
-            </a:pPr>
-            <a:r>
-              <a:rPr sz="1500" b="0">
-                <a:solidFill>
-                  <a:srgbClr val="0F172A"/>
-                </a:solidFill>
-                <a:latin typeface="NanumGothic"/>
-                <a:ea typeface="NanumGothic"/>
-                <a:cs typeface="NanumGothic"/>
-              </a:rPr>
-              <a:t>프롬프트와 컨텍스트가 출력을 좌우한다</a:t>
-            </a:r>
-          </a:p>
-        </p:txBody>
-      </p:sp>
-      <p:sp>
-        <p:nvSpPr>
-          <p:cNvPr id="14" name="Oval 13"/>
-          <p:cNvSpPr/>
-          <p:nvPr/>
-        </p:nvSpPr>
-        <p:spPr>
-          <a:xfrm>
-            <a:off x="566928" y="3639312"/>
-            <a:ext cx="146304" cy="146304"/>
-          </a:xfrm>
-          <a:prstGeom prst="ellipse">
-            <a:avLst/>
-          </a:prstGeom>
-          <a:solidFill>
-            <a:srgbClr val="6366F1"/>
-          </a:solidFill>
-          <a:ln>
-            <a:noFill/>
-          </a:ln>
-          <a:effectLst/>
-        </p:spPr>
-        <p:style>
-          <a:lnRef idx="1">
-            <a:schemeClr val="accent1"/>
-          </a:lnRef>
-          <a:fillRef idx="3">
-            <a:schemeClr val="accent1"/>
-          </a:fillRef>
-          <a:effectRef idx="2">
-            <a:schemeClr val="accent1"/>
-          </a:effectRef>
-          <a:fontRef idx="minor">
-            <a:schemeClr val="lt1"/>
-          </a:fontRef>
-        </p:style>
-        <p:txBody>
-          <a:bodyPr rtlCol="0" anchor="ctr"/>
-          <a:lstStyle/>
-          <a:p>
-            <a:pPr algn="ctr"/>
-          </a:p>
-        </p:txBody>
-      </p:sp>
-      <p:sp>
-        <p:nvSpPr>
-          <p:cNvPr id="15" name="TextBox 14"/>
-          <p:cNvSpPr txBox="1"/>
-          <p:nvPr/>
-        </p:nvSpPr>
-        <p:spPr>
-          <a:xfrm>
-            <a:off x="868680" y="3566160"/>
-            <a:ext cx="6400800" cy="548640"/>
-          </a:xfrm>
-          <a:prstGeom prst="rect">
-            <a:avLst/>
-          </a:prstGeom>
-          <a:noFill/>
-        </p:spPr>
-        <p:txBody>
-          <a:bodyPr wrap="square" anchor="t" lIns="0" rIns="0" tIns="0" bIns="0">
-            <a:spAutoFit/>
-          </a:bodyPr>
-          <a:lstStyle/>
-          <a:p>
-            <a:pPr algn="l">
-              <a:lnSpc>
-                <a:spcPct val="105000"/>
-              </a:lnSpc>
-              <a:spcBef>
-                <a:spcPts val="0"/>
-              </a:spcBef>
-              <a:spcAft>
-                <a:spcPts val="600"/>
-              </a:spcAft>
-            </a:pPr>
-            <a:r>
-              <a:rPr sz="1500" b="0">
-                <a:solidFill>
-                  <a:srgbClr val="0F172A"/>
-                </a:solidFill>
-                <a:latin typeface="NanumGothic"/>
-                <a:ea typeface="NanumGothic"/>
-                <a:cs typeface="NanumGothic"/>
-              </a:rPr>
-              <a:t>LLM은 강력하지만 환각 등 한계가 있다 → 에이전트가 필요한 이유</a:t>
-            </a:r>
-          </a:p>
-        </p:txBody>
-      </p:sp>
-      <p:sp>
-        <p:nvSpPr>
-          <p:cNvPr id="16" name="Rounded Rectangle 15"/>
-          <p:cNvSpPr/>
-          <p:nvPr/>
-        </p:nvSpPr>
-        <p:spPr>
-          <a:xfrm>
-            <a:off x="7589520" y="1783080"/>
-            <a:ext cx="4069080" cy="4023360"/>
+            <a:off x="502920" y="1828800"/>
+            <a:ext cx="5440680" cy="4023360"/>
           </a:xfrm>
           <a:prstGeom prst="roundRect">
             <a:avLst/>
@@ -10007,22 +10122,66 @@
       </p:sp>
       <p:sp>
         <p:nvSpPr>
-          <p:cNvPr id="17" name="TextBox 16"/>
-          <p:cNvSpPr txBox="1"/>
-          <p:nvPr/>
-        </p:nvSpPr>
-        <p:spPr>
-          <a:xfrm>
-            <a:off x="7863840" y="2011680"/>
-            <a:ext cx="3566160" cy="457200"/>
-          </a:xfrm>
-          <a:prstGeom prst="rect">
-            <a:avLst/>
-          </a:prstGeom>
-          <a:noFill/>
-        </p:spPr>
-        <p:txBody>
-          <a:bodyPr wrap="square" anchor="t" lIns="0" rIns="0" tIns="0" bIns="0">
+          <p:cNvPr id="10" name="Rounded Rectangle 9"/>
+          <p:cNvSpPr/>
+          <p:nvPr/>
+        </p:nvSpPr>
+        <p:spPr>
+          <a:xfrm>
+            <a:off x="502920" y="1828800"/>
+            <a:ext cx="5440680" cy="640080"/>
+          </a:xfrm>
+          <a:prstGeom prst="roundRect">
+            <a:avLst/>
+          </a:prstGeom>
+          <a:solidFill>
+            <a:srgbClr val="6366F1"/>
+          </a:solidFill>
+          <a:ln>
+            <a:noFill/>
+          </a:ln>
+          <a:effectLst/>
+        </p:spPr>
+        <p:style>
+          <a:lnRef idx="1">
+            <a:schemeClr val="accent1"/>
+          </a:lnRef>
+          <a:fillRef idx="3">
+            <a:schemeClr val="accent1"/>
+          </a:fillRef>
+          <a:effectRef idx="2">
+            <a:schemeClr val="accent1"/>
+          </a:effectRef>
+          <a:fontRef idx="minor">
+            <a:schemeClr val="lt1"/>
+          </a:fontRef>
+        </p:style>
+        <p:txBody>
+          <a:bodyPr rtlCol="0" anchor="ctr"/>
+          <a:lstStyle/>
+          <a:p>
+            <a:pPr algn="ctr"/>
+          </a:p>
+        </p:txBody>
+      </p:sp>
+      <p:sp>
+        <p:nvSpPr>
+          <p:cNvPr id="11" name="TextBox 10"/>
+          <p:cNvSpPr txBox="1"/>
+          <p:nvPr/>
+        </p:nvSpPr>
+        <p:spPr>
+          <a:xfrm>
+            <a:off x="777240" y="1828800"/>
+            <a:ext cx="4937760" cy="640080"/>
+          </a:xfrm>
+          <a:prstGeom prst="rect">
+            <a:avLst/>
+          </a:prstGeom>
+          <a:noFill/>
+        </p:spPr>
+        <p:txBody>
+          <a:bodyPr wrap="square" anchor="ctr" lIns="0" rIns="0" tIns="0" bIns="0">
             <a:spAutoFit/>
           </a:bodyPr>
           <a:lstStyle/>
@@ -10039,29 +10198,29 @@
               </a:spcAft>
             </a:pPr>
             <a:r>
-              <a:rPr sz="1500" b="1">
-                <a:solidFill>
-                  <a:srgbClr val="0EA5E9"/>
+              <a:rPr sz="1600" b="1">
+                <a:solidFill>
+                  <a:srgbClr val="FFFFFF"/>
                 </a:solidFill>
                 <a:latin typeface="NanumSquare"/>
                 <a:ea typeface="NanumSquare"/>
                 <a:cs typeface="NanumSquare"/>
               </a:rPr>
-              <a:t>다음 과정 — Day 2</a:t>
-            </a:r>
-          </a:p>
-        </p:txBody>
-      </p:sp>
-      <p:sp>
-        <p:nvSpPr>
-          <p:cNvPr id="18" name="TextBox 17"/>
-          <p:cNvSpPr txBox="1"/>
-          <p:nvPr/>
-        </p:nvSpPr>
-        <p:spPr>
-          <a:xfrm>
-            <a:off x="7863840" y="2606040"/>
-            <a:ext cx="3520440" cy="3017520"/>
+              <a:t>잘하는 것</a:t>
+            </a:r>
+          </a:p>
+        </p:txBody>
+      </p:sp>
+      <p:sp>
+        <p:nvSpPr>
+          <p:cNvPr id="12" name="TextBox 11"/>
+          <p:cNvSpPr txBox="1"/>
+          <p:nvPr/>
+        </p:nvSpPr>
+        <p:spPr>
+          <a:xfrm>
+            <a:off x="822960" y="2697480"/>
+            <a:ext cx="4846320" cy="548640"/>
           </a:xfrm>
           <a:prstGeom prst="rect">
             <a:avLst/>
@@ -10076,25 +10235,2083 @@
           <a:p>
             <a:pPr algn="l">
               <a:lnSpc>
-                <a:spcPct val="125000"/>
-              </a:lnSpc>
-              <a:spcBef>
-                <a:spcPts val="0"/>
-              </a:spcBef>
-              <a:spcAft>
-                <a:spcPts val="600"/>
-              </a:spcAft>
-            </a:pPr>
-            <a:r>
-              <a:rPr sz="1400" b="0">
-                <a:solidFill>
-                  <a:srgbClr val="0F172A"/>
+                <a:spcPct val="100000"/>
+              </a:lnSpc>
+              <a:spcBef>
+                <a:spcPts val="0"/>
+              </a:spcBef>
+              <a:spcAft>
+                <a:spcPts val="600"/>
+              </a:spcAft>
+            </a:pPr>
+            <a:r>
+              <a:rPr sz="1400" b="1">
+                <a:solidFill>
+                  <a:srgbClr val="6366F1"/>
                 </a:solidFill>
                 <a:latin typeface="NanumGothic"/>
                 <a:ea typeface="NanumGothic"/>
                 <a:cs typeface="NanumGothic"/>
               </a:rPr>
-              <a:t>AI 에이전트의 정의(LLM+tools+loop)와 리서치 에이전트 개요를 배우고, Python과 Claude Code를 설치·설정합니다.</a:t>
+              <a:t>•  </a:t>
+            </a:r>
+            <a:r>
+              <a:rPr sz="1400" b="0">
+                <a:solidFill>
+                  <a:srgbClr val="0F172A"/>
+                </a:solidFill>
+                <a:latin typeface="NanumGothic"/>
+                <a:ea typeface="NanumGothic"/>
+                <a:cs typeface="NanumGothic"/>
+              </a:rPr>
+              <a:t>요약·번역·분류</a:t>
+            </a:r>
+          </a:p>
+        </p:txBody>
+      </p:sp>
+      <p:sp>
+        <p:nvSpPr>
+          <p:cNvPr id="13" name="TextBox 12"/>
+          <p:cNvSpPr txBox="1"/>
+          <p:nvPr/>
+        </p:nvSpPr>
+        <p:spPr>
+          <a:xfrm>
+            <a:off x="822960" y="3264408"/>
+            <a:ext cx="4846320" cy="548640"/>
+          </a:xfrm>
+          <a:prstGeom prst="rect">
+            <a:avLst/>
+          </a:prstGeom>
+          <a:noFill/>
+        </p:spPr>
+        <p:txBody>
+          <a:bodyPr wrap="square" anchor="t" lIns="0" rIns="0" tIns="0" bIns="0">
+            <a:spAutoFit/>
+          </a:bodyPr>
+          <a:lstStyle/>
+          <a:p>
+            <a:pPr algn="l">
+              <a:lnSpc>
+                <a:spcPct val="100000"/>
+              </a:lnSpc>
+              <a:spcBef>
+                <a:spcPts val="0"/>
+              </a:spcBef>
+              <a:spcAft>
+                <a:spcPts val="600"/>
+              </a:spcAft>
+            </a:pPr>
+            <a:r>
+              <a:rPr sz="1400" b="1">
+                <a:solidFill>
+                  <a:srgbClr val="6366F1"/>
+                </a:solidFill>
+                <a:latin typeface="NanumGothic"/>
+                <a:ea typeface="NanumGothic"/>
+                <a:cs typeface="NanumGothic"/>
+              </a:rPr>
+              <a:t>•  </a:t>
+            </a:r>
+            <a:r>
+              <a:rPr sz="1400" b="0">
+                <a:solidFill>
+                  <a:srgbClr val="0F172A"/>
+                </a:solidFill>
+                <a:latin typeface="NanumGothic"/>
+                <a:ea typeface="NanumGothic"/>
+                <a:cs typeface="NanumGothic"/>
+              </a:rPr>
+              <a:t>코드 생성·설명</a:t>
+            </a:r>
+          </a:p>
+        </p:txBody>
+      </p:sp>
+      <p:sp>
+        <p:nvSpPr>
+          <p:cNvPr id="14" name="TextBox 13"/>
+          <p:cNvSpPr txBox="1"/>
+          <p:nvPr/>
+        </p:nvSpPr>
+        <p:spPr>
+          <a:xfrm>
+            <a:off x="822960" y="3831336"/>
+            <a:ext cx="4846320" cy="548640"/>
+          </a:xfrm>
+          <a:prstGeom prst="rect">
+            <a:avLst/>
+          </a:prstGeom>
+          <a:noFill/>
+        </p:spPr>
+        <p:txBody>
+          <a:bodyPr wrap="square" anchor="t" lIns="0" rIns="0" tIns="0" bIns="0">
+            <a:spAutoFit/>
+          </a:bodyPr>
+          <a:lstStyle/>
+          <a:p>
+            <a:pPr algn="l">
+              <a:lnSpc>
+                <a:spcPct val="100000"/>
+              </a:lnSpc>
+              <a:spcBef>
+                <a:spcPts val="0"/>
+              </a:spcBef>
+              <a:spcAft>
+                <a:spcPts val="600"/>
+              </a:spcAft>
+            </a:pPr>
+            <a:r>
+              <a:rPr sz="1400" b="1">
+                <a:solidFill>
+                  <a:srgbClr val="6366F1"/>
+                </a:solidFill>
+                <a:latin typeface="NanumGothic"/>
+                <a:ea typeface="NanumGothic"/>
+                <a:cs typeface="NanumGothic"/>
+              </a:rPr>
+              <a:t>•  </a:t>
+            </a:r>
+            <a:r>
+              <a:rPr sz="1400" b="0">
+                <a:solidFill>
+                  <a:srgbClr val="0F172A"/>
+                </a:solidFill>
+                <a:latin typeface="NanumGothic"/>
+                <a:ea typeface="NanumGothic"/>
+                <a:cs typeface="NanumGothic"/>
+              </a:rPr>
+              <a:t>텍스트 추출·재구성</a:t>
+            </a:r>
+          </a:p>
+        </p:txBody>
+      </p:sp>
+      <p:sp>
+        <p:nvSpPr>
+          <p:cNvPr id="15" name="TextBox 14"/>
+          <p:cNvSpPr txBox="1"/>
+          <p:nvPr/>
+        </p:nvSpPr>
+        <p:spPr>
+          <a:xfrm>
+            <a:off x="822960" y="4398264"/>
+            <a:ext cx="4846320" cy="548640"/>
+          </a:xfrm>
+          <a:prstGeom prst="rect">
+            <a:avLst/>
+          </a:prstGeom>
+          <a:noFill/>
+        </p:spPr>
+        <p:txBody>
+          <a:bodyPr wrap="square" anchor="t" lIns="0" rIns="0" tIns="0" bIns="0">
+            <a:spAutoFit/>
+          </a:bodyPr>
+          <a:lstStyle/>
+          <a:p>
+            <a:pPr algn="l">
+              <a:lnSpc>
+                <a:spcPct val="100000"/>
+              </a:lnSpc>
+              <a:spcBef>
+                <a:spcPts val="0"/>
+              </a:spcBef>
+              <a:spcAft>
+                <a:spcPts val="600"/>
+              </a:spcAft>
+            </a:pPr>
+            <a:r>
+              <a:rPr sz="1400" b="1">
+                <a:solidFill>
+                  <a:srgbClr val="6366F1"/>
+                </a:solidFill>
+                <a:latin typeface="NanumGothic"/>
+                <a:ea typeface="NanumGothic"/>
+                <a:cs typeface="NanumGothic"/>
+              </a:rPr>
+              <a:t>•  </a:t>
+            </a:r>
+            <a:r>
+              <a:rPr sz="1400" b="0">
+                <a:solidFill>
+                  <a:srgbClr val="0F172A"/>
+                </a:solidFill>
+                <a:latin typeface="NanumGothic"/>
+                <a:ea typeface="NanumGothic"/>
+                <a:cs typeface="NanumGothic"/>
+              </a:rPr>
+              <a:t>브레인스토밍</a:t>
+            </a:r>
+          </a:p>
+        </p:txBody>
+      </p:sp>
+      <p:sp>
+        <p:nvSpPr>
+          <p:cNvPr id="16" name="Rounded Rectangle 15"/>
+          <p:cNvSpPr/>
+          <p:nvPr/>
+        </p:nvSpPr>
+        <p:spPr>
+          <a:xfrm>
+            <a:off x="6172200" y="1828800"/>
+            <a:ext cx="5440680" cy="4023360"/>
+          </a:xfrm>
+          <a:prstGeom prst="roundRect">
+            <a:avLst/>
+          </a:prstGeom>
+          <a:solidFill>
+            <a:srgbClr val="F8FAFC"/>
+          </a:solidFill>
+          <a:ln w="12700">
+            <a:solidFill>
+              <a:srgbClr val="E2E8F0"/>
+            </a:solidFill>
+          </a:ln>
+          <a:effectLst/>
+        </p:spPr>
+        <p:style>
+          <a:lnRef idx="1">
+            <a:schemeClr val="accent1"/>
+          </a:lnRef>
+          <a:fillRef idx="3">
+            <a:schemeClr val="accent1"/>
+          </a:fillRef>
+          <a:effectRef idx="2">
+            <a:schemeClr val="accent1"/>
+          </a:effectRef>
+          <a:fontRef idx="minor">
+            <a:schemeClr val="lt1"/>
+          </a:fontRef>
+        </p:style>
+        <p:txBody>
+          <a:bodyPr rtlCol="0" anchor="ctr"/>
+          <a:lstStyle/>
+          <a:p>
+            <a:pPr algn="ctr"/>
+          </a:p>
+        </p:txBody>
+      </p:sp>
+      <p:sp>
+        <p:nvSpPr>
+          <p:cNvPr id="17" name="Rounded Rectangle 16"/>
+          <p:cNvSpPr/>
+          <p:nvPr/>
+        </p:nvSpPr>
+        <p:spPr>
+          <a:xfrm>
+            <a:off x="6172200" y="1828800"/>
+            <a:ext cx="5440680" cy="640080"/>
+          </a:xfrm>
+          <a:prstGeom prst="roundRect">
+            <a:avLst/>
+          </a:prstGeom>
+          <a:solidFill>
+            <a:srgbClr val="12203C"/>
+          </a:solidFill>
+          <a:ln>
+            <a:noFill/>
+          </a:ln>
+          <a:effectLst/>
+        </p:spPr>
+        <p:style>
+          <a:lnRef idx="1">
+            <a:schemeClr val="accent1"/>
+          </a:lnRef>
+          <a:fillRef idx="3">
+            <a:schemeClr val="accent1"/>
+          </a:fillRef>
+          <a:effectRef idx="2">
+            <a:schemeClr val="accent1"/>
+          </a:effectRef>
+          <a:fontRef idx="minor">
+            <a:schemeClr val="lt1"/>
+          </a:fontRef>
+        </p:style>
+        <p:txBody>
+          <a:bodyPr rtlCol="0" anchor="ctr"/>
+          <a:lstStyle/>
+          <a:p>
+            <a:pPr algn="ctr"/>
+          </a:p>
+        </p:txBody>
+      </p:sp>
+      <p:sp>
+        <p:nvSpPr>
+          <p:cNvPr id="18" name="TextBox 17"/>
+          <p:cNvSpPr txBox="1"/>
+          <p:nvPr/>
+        </p:nvSpPr>
+        <p:spPr>
+          <a:xfrm>
+            <a:off x="6446520" y="1828800"/>
+            <a:ext cx="4937760" cy="640080"/>
+          </a:xfrm>
+          <a:prstGeom prst="rect">
+            <a:avLst/>
+          </a:prstGeom>
+          <a:noFill/>
+        </p:spPr>
+        <p:txBody>
+          <a:bodyPr wrap="square" anchor="ctr" lIns="0" rIns="0" tIns="0" bIns="0">
+            <a:spAutoFit/>
+          </a:bodyPr>
+          <a:lstStyle/>
+          <a:p>
+            <a:pPr algn="l">
+              <a:lnSpc>
+                <a:spcPct val="100000"/>
+              </a:lnSpc>
+              <a:spcBef>
+                <a:spcPts val="0"/>
+              </a:spcBef>
+              <a:spcAft>
+                <a:spcPts val="600"/>
+              </a:spcAft>
+            </a:pPr>
+            <a:r>
+              <a:rPr sz="1600" b="1">
+                <a:solidFill>
+                  <a:srgbClr val="FFFFFF"/>
+                </a:solidFill>
+                <a:latin typeface="NanumSquare"/>
+                <a:ea typeface="NanumSquare"/>
+                <a:cs typeface="NanumSquare"/>
+              </a:rPr>
+              <a:t>주의할 것</a:t>
+            </a:r>
+          </a:p>
+        </p:txBody>
+      </p:sp>
+      <p:sp>
+        <p:nvSpPr>
+          <p:cNvPr id="19" name="TextBox 18"/>
+          <p:cNvSpPr txBox="1"/>
+          <p:nvPr/>
+        </p:nvSpPr>
+        <p:spPr>
+          <a:xfrm>
+            <a:off x="6492240" y="2697480"/>
+            <a:ext cx="4846320" cy="548640"/>
+          </a:xfrm>
+          <a:prstGeom prst="rect">
+            <a:avLst/>
+          </a:prstGeom>
+          <a:noFill/>
+        </p:spPr>
+        <p:txBody>
+          <a:bodyPr wrap="square" anchor="t" lIns="0" rIns="0" tIns="0" bIns="0">
+            <a:spAutoFit/>
+          </a:bodyPr>
+          <a:lstStyle/>
+          <a:p>
+            <a:pPr algn="l">
+              <a:lnSpc>
+                <a:spcPct val="100000"/>
+              </a:lnSpc>
+              <a:spcBef>
+                <a:spcPts val="0"/>
+              </a:spcBef>
+              <a:spcAft>
+                <a:spcPts val="600"/>
+              </a:spcAft>
+            </a:pPr>
+            <a:r>
+              <a:rPr sz="1400" b="1">
+                <a:solidFill>
+                  <a:srgbClr val="12203C"/>
+                </a:solidFill>
+                <a:latin typeface="NanumGothic"/>
+                <a:ea typeface="NanumGothic"/>
+                <a:cs typeface="NanumGothic"/>
+              </a:rPr>
+              <a:t>•  </a:t>
+            </a:r>
+            <a:r>
+              <a:rPr sz="1400" b="0">
+                <a:solidFill>
+                  <a:srgbClr val="0F172A"/>
+                </a:solidFill>
+                <a:latin typeface="NanumGothic"/>
+                <a:ea typeface="NanumGothic"/>
+                <a:cs typeface="NanumGothic"/>
+              </a:rPr>
+              <a:t>환각 — 없는 사실 지어냄</a:t>
+            </a:r>
+          </a:p>
+        </p:txBody>
+      </p:sp>
+      <p:sp>
+        <p:nvSpPr>
+          <p:cNvPr id="20" name="TextBox 19"/>
+          <p:cNvSpPr txBox="1"/>
+          <p:nvPr/>
+        </p:nvSpPr>
+        <p:spPr>
+          <a:xfrm>
+            <a:off x="6492240" y="3264408"/>
+            <a:ext cx="4846320" cy="548640"/>
+          </a:xfrm>
+          <a:prstGeom prst="rect">
+            <a:avLst/>
+          </a:prstGeom>
+          <a:noFill/>
+        </p:spPr>
+        <p:txBody>
+          <a:bodyPr wrap="square" anchor="t" lIns="0" rIns="0" tIns="0" bIns="0">
+            <a:spAutoFit/>
+          </a:bodyPr>
+          <a:lstStyle/>
+          <a:p>
+            <a:pPr algn="l">
+              <a:lnSpc>
+                <a:spcPct val="100000"/>
+              </a:lnSpc>
+              <a:spcBef>
+                <a:spcPts val="0"/>
+              </a:spcBef>
+              <a:spcAft>
+                <a:spcPts val="600"/>
+              </a:spcAft>
+            </a:pPr>
+            <a:r>
+              <a:rPr sz="1400" b="1">
+                <a:solidFill>
+                  <a:srgbClr val="12203C"/>
+                </a:solidFill>
+                <a:latin typeface="NanumGothic"/>
+                <a:ea typeface="NanumGothic"/>
+                <a:cs typeface="NanumGothic"/>
+              </a:rPr>
+              <a:t>•  </a:t>
+            </a:r>
+            <a:r>
+              <a:rPr sz="1400" b="0">
+                <a:solidFill>
+                  <a:srgbClr val="0F172A"/>
+                </a:solidFill>
+                <a:latin typeface="NanumGothic"/>
+                <a:ea typeface="NanumGothic"/>
+                <a:cs typeface="NanumGothic"/>
+              </a:rPr>
+              <a:t>최신·실시간 정보</a:t>
+            </a:r>
+          </a:p>
+        </p:txBody>
+      </p:sp>
+      <p:sp>
+        <p:nvSpPr>
+          <p:cNvPr id="21" name="TextBox 20"/>
+          <p:cNvSpPr txBox="1"/>
+          <p:nvPr/>
+        </p:nvSpPr>
+        <p:spPr>
+          <a:xfrm>
+            <a:off x="6492240" y="3831336"/>
+            <a:ext cx="4846320" cy="548640"/>
+          </a:xfrm>
+          <a:prstGeom prst="rect">
+            <a:avLst/>
+          </a:prstGeom>
+          <a:noFill/>
+        </p:spPr>
+        <p:txBody>
+          <a:bodyPr wrap="square" anchor="t" lIns="0" rIns="0" tIns="0" bIns="0">
+            <a:spAutoFit/>
+          </a:bodyPr>
+          <a:lstStyle/>
+          <a:p>
+            <a:pPr algn="l">
+              <a:lnSpc>
+                <a:spcPct val="100000"/>
+              </a:lnSpc>
+              <a:spcBef>
+                <a:spcPts val="0"/>
+              </a:spcBef>
+              <a:spcAft>
+                <a:spcPts val="600"/>
+              </a:spcAft>
+            </a:pPr>
+            <a:r>
+              <a:rPr sz="1400" b="1">
+                <a:solidFill>
+                  <a:srgbClr val="12203C"/>
+                </a:solidFill>
+                <a:latin typeface="NanumGothic"/>
+                <a:ea typeface="NanumGothic"/>
+                <a:cs typeface="NanumGothic"/>
+              </a:rPr>
+              <a:t>•  </a:t>
+            </a:r>
+            <a:r>
+              <a:rPr sz="1400" b="0">
+                <a:solidFill>
+                  <a:srgbClr val="0F172A"/>
+                </a:solidFill>
+                <a:latin typeface="NanumGothic"/>
+                <a:ea typeface="NanumGothic"/>
+                <a:cs typeface="NanumGothic"/>
+              </a:rPr>
+              <a:t>정확한 계산·셈</a:t>
+            </a:r>
+          </a:p>
+        </p:txBody>
+      </p:sp>
+      <p:sp>
+        <p:nvSpPr>
+          <p:cNvPr id="22" name="TextBox 21"/>
+          <p:cNvSpPr txBox="1"/>
+          <p:nvPr/>
+        </p:nvSpPr>
+        <p:spPr>
+          <a:xfrm>
+            <a:off x="6492240" y="4398264"/>
+            <a:ext cx="4846320" cy="548640"/>
+          </a:xfrm>
+          <a:prstGeom prst="rect">
+            <a:avLst/>
+          </a:prstGeom>
+          <a:noFill/>
+        </p:spPr>
+        <p:txBody>
+          <a:bodyPr wrap="square" anchor="t" lIns="0" rIns="0" tIns="0" bIns="0">
+            <a:spAutoFit/>
+          </a:bodyPr>
+          <a:lstStyle/>
+          <a:p>
+            <a:pPr algn="l">
+              <a:lnSpc>
+                <a:spcPct val="100000"/>
+              </a:lnSpc>
+              <a:spcBef>
+                <a:spcPts val="0"/>
+              </a:spcBef>
+              <a:spcAft>
+                <a:spcPts val="600"/>
+              </a:spcAft>
+            </a:pPr>
+            <a:r>
+              <a:rPr sz="1400" b="1">
+                <a:solidFill>
+                  <a:srgbClr val="12203C"/>
+                </a:solidFill>
+                <a:latin typeface="NanumGothic"/>
+                <a:ea typeface="NanumGothic"/>
+                <a:cs typeface="NanumGothic"/>
+              </a:rPr>
+              <a:t>•  </a:t>
+            </a:r>
+            <a:r>
+              <a:rPr sz="1400" b="0">
+                <a:solidFill>
+                  <a:srgbClr val="0F172A"/>
+                </a:solidFill>
+                <a:latin typeface="NanumGothic"/>
+                <a:ea typeface="NanumGothic"/>
+                <a:cs typeface="NanumGothic"/>
+              </a:rPr>
+              <a:t>일관된 장기 추론</a:t>
+            </a:r>
+          </a:p>
+        </p:txBody>
+      </p:sp>
+    </p:spTree>
+  </p:cSld>
+  <p:clrMapOvr>
+    <a:masterClrMapping/>
+  </p:clrMapOvr>
+</p:sld>
+</file>
+
+<file path=ppt/slides/slide18.xml><?xml version="1.0" encoding="utf-8"?>
+<p:sld xmlns:a="http://schemas.openxmlformats.org/drawingml/2006/main" xmlns:p="http://schemas.openxmlformats.org/presentationml/2006/main" xmlns:r="http://schemas.openxmlformats.org/officeDocument/2006/relationships">
+  <p:cSld>
+    <p:spTree>
+      <p:nvGrpSpPr>
+        <p:cNvPr id="1" name=""/>
+        <p:cNvGrpSpPr/>
+        <p:nvPr/>
+      </p:nvGrpSpPr>
+      <p:grpSpPr/>
+      <p:sp>
+        <p:nvSpPr>
+          <p:cNvPr id="2" name="Rectangle 1"/>
+          <p:cNvSpPr/>
+          <p:nvPr/>
+        </p:nvSpPr>
+        <p:spPr>
+          <a:xfrm>
+            <a:off x="0" y="0"/>
+            <a:ext cx="12191695" cy="6858000"/>
+          </a:xfrm>
+          <a:prstGeom prst="rect">
+            <a:avLst/>
+          </a:prstGeom>
+          <a:solidFill>
+            <a:srgbClr val="FFFFFF"/>
+          </a:solidFill>
+          <a:ln>
+            <a:noFill/>
+          </a:ln>
+          <a:effectLst/>
+        </p:spPr>
+        <p:style>
+          <a:lnRef idx="1">
+            <a:schemeClr val="accent1"/>
+          </a:lnRef>
+          <a:fillRef idx="3">
+            <a:schemeClr val="accent1"/>
+          </a:fillRef>
+          <a:effectRef idx="2">
+            <a:schemeClr val="accent1"/>
+          </a:effectRef>
+          <a:fontRef idx="minor">
+            <a:schemeClr val="lt1"/>
+          </a:fontRef>
+        </p:style>
+        <p:txBody>
+          <a:bodyPr rtlCol="0" anchor="ctr"/>
+          <a:lstStyle/>
+          <a:p>
+            <a:pPr algn="ctr"/>
+          </a:p>
+        </p:txBody>
+      </p:sp>
+      <p:sp>
+        <p:nvSpPr>
+          <p:cNvPr id="3" name="Rectangle 2"/>
+          <p:cNvSpPr/>
+          <p:nvPr/>
+        </p:nvSpPr>
+        <p:spPr>
+          <a:xfrm>
+            <a:off x="0" y="0"/>
+            <a:ext cx="164592" cy="6858000"/>
+          </a:xfrm>
+          <a:prstGeom prst="rect">
+            <a:avLst/>
+          </a:prstGeom>
+          <a:solidFill>
+            <a:srgbClr val="6366F1"/>
+          </a:solidFill>
+          <a:ln>
+            <a:noFill/>
+          </a:ln>
+          <a:effectLst/>
+        </p:spPr>
+        <p:style>
+          <a:lnRef idx="1">
+            <a:schemeClr val="accent1"/>
+          </a:lnRef>
+          <a:fillRef idx="3">
+            <a:schemeClr val="accent1"/>
+          </a:fillRef>
+          <a:effectRef idx="2">
+            <a:schemeClr val="accent1"/>
+          </a:effectRef>
+          <a:fontRef idx="minor">
+            <a:schemeClr val="lt1"/>
+          </a:fontRef>
+        </p:style>
+        <p:txBody>
+          <a:bodyPr rtlCol="0" anchor="ctr"/>
+          <a:lstStyle/>
+          <a:p>
+            <a:pPr algn="ctr"/>
+          </a:p>
+        </p:txBody>
+      </p:sp>
+      <p:sp>
+        <p:nvSpPr>
+          <p:cNvPr id="4" name="TextBox 3"/>
+          <p:cNvSpPr txBox="1"/>
+          <p:nvPr/>
+        </p:nvSpPr>
+        <p:spPr>
+          <a:xfrm>
+            <a:off x="502920" y="384048"/>
+            <a:ext cx="10058400" cy="320040"/>
+          </a:xfrm>
+          <a:prstGeom prst="rect">
+            <a:avLst/>
+          </a:prstGeom>
+          <a:noFill/>
+        </p:spPr>
+        <p:txBody>
+          <a:bodyPr wrap="square" anchor="t" lIns="0" rIns="0" tIns="0" bIns="0">
+            <a:spAutoFit/>
+          </a:bodyPr>
+          <a:lstStyle/>
+          <a:p>
+            <a:pPr algn="l">
+              <a:lnSpc>
+                <a:spcPct val="100000"/>
+              </a:lnSpc>
+              <a:spcBef>
+                <a:spcPts val="0"/>
+              </a:spcBef>
+              <a:spcAft>
+                <a:spcPts val="600"/>
+              </a:spcAft>
+            </a:pPr>
+            <a:r>
+              <a:rPr sz="1200" b="1">
+                <a:solidFill>
+                  <a:srgbClr val="6366F1"/>
+                </a:solidFill>
+                <a:latin typeface="NanumGothic"/>
+                <a:ea typeface="NanumGothic"/>
+                <a:cs typeface="NanumGothic"/>
+              </a:rPr>
+              <a:t>주의</a:t>
+            </a:r>
+          </a:p>
+        </p:txBody>
+      </p:sp>
+      <p:sp>
+        <p:nvSpPr>
+          <p:cNvPr id="5" name="TextBox 4"/>
+          <p:cNvSpPr txBox="1"/>
+          <p:nvPr/>
+        </p:nvSpPr>
+        <p:spPr>
+          <a:xfrm>
+            <a:off x="502920" y="713232"/>
+            <a:ext cx="11155680" cy="731520"/>
+          </a:xfrm>
+          <a:prstGeom prst="rect">
+            <a:avLst/>
+          </a:prstGeom>
+          <a:noFill/>
+        </p:spPr>
+        <p:txBody>
+          <a:bodyPr wrap="square" anchor="t" lIns="0" rIns="0" tIns="0" bIns="0">
+            <a:spAutoFit/>
+          </a:bodyPr>
+          <a:lstStyle/>
+          <a:p>
+            <a:pPr algn="l">
+              <a:lnSpc>
+                <a:spcPct val="100000"/>
+              </a:lnSpc>
+              <a:spcBef>
+                <a:spcPts val="0"/>
+              </a:spcBef>
+              <a:spcAft>
+                <a:spcPts val="600"/>
+              </a:spcAft>
+            </a:pPr>
+            <a:r>
+              <a:rPr sz="2700" b="1">
+                <a:solidFill>
+                  <a:srgbClr val="0F172A"/>
+                </a:solidFill>
+                <a:latin typeface="NanumSquare"/>
+                <a:ea typeface="NanumSquare"/>
+                <a:cs typeface="NanumSquare"/>
+              </a:rPr>
+              <a:t>환각(hallucination) 바로 알기</a:t>
+            </a:r>
+          </a:p>
+        </p:txBody>
+      </p:sp>
+      <p:sp>
+        <p:nvSpPr>
+          <p:cNvPr id="6" name="Rectangle 5"/>
+          <p:cNvSpPr/>
+          <p:nvPr/>
+        </p:nvSpPr>
+        <p:spPr>
+          <a:xfrm>
+            <a:off x="521207" y="1417320"/>
+            <a:ext cx="1005840" cy="45720"/>
+          </a:xfrm>
+          <a:prstGeom prst="rect">
+            <a:avLst/>
+          </a:prstGeom>
+          <a:solidFill>
+            <a:srgbClr val="6366F1"/>
+          </a:solidFill>
+          <a:ln>
+            <a:noFill/>
+          </a:ln>
+          <a:effectLst/>
+        </p:spPr>
+        <p:style>
+          <a:lnRef idx="1">
+            <a:schemeClr val="accent1"/>
+          </a:lnRef>
+          <a:fillRef idx="3">
+            <a:schemeClr val="accent1"/>
+          </a:fillRef>
+          <a:effectRef idx="2">
+            <a:schemeClr val="accent1"/>
+          </a:effectRef>
+          <a:fontRef idx="minor">
+            <a:schemeClr val="lt1"/>
+          </a:fontRef>
+        </p:style>
+        <p:txBody>
+          <a:bodyPr rtlCol="0" anchor="ctr"/>
+          <a:lstStyle/>
+          <a:p>
+            <a:pPr algn="ctr"/>
+          </a:p>
+        </p:txBody>
+      </p:sp>
+      <p:sp>
+        <p:nvSpPr>
+          <p:cNvPr id="7" name="TextBox 6"/>
+          <p:cNvSpPr txBox="1"/>
+          <p:nvPr/>
+        </p:nvSpPr>
+        <p:spPr>
+          <a:xfrm>
+            <a:off x="502920" y="6419088"/>
+            <a:ext cx="7315200" cy="365760"/>
+          </a:xfrm>
+          <a:prstGeom prst="rect">
+            <a:avLst/>
+          </a:prstGeom>
+          <a:noFill/>
+        </p:spPr>
+        <p:txBody>
+          <a:bodyPr wrap="square" anchor="ctr" lIns="0" rIns="0" tIns="0" bIns="0">
+            <a:spAutoFit/>
+          </a:bodyPr>
+          <a:lstStyle/>
+          <a:p>
+            <a:pPr algn="l">
+              <a:lnSpc>
+                <a:spcPct val="100000"/>
+              </a:lnSpc>
+              <a:spcBef>
+                <a:spcPts val="0"/>
+              </a:spcBef>
+              <a:spcAft>
+                <a:spcPts val="600"/>
+              </a:spcAft>
+            </a:pPr>
+            <a:r>
+              <a:rPr sz="900" b="0">
+                <a:solidFill>
+                  <a:srgbClr val="64748B"/>
+                </a:solidFill>
+                <a:latin typeface="NanumGothic"/>
+                <a:ea typeface="NanumGothic"/>
+                <a:cs typeface="NanumGothic"/>
+              </a:rPr>
+              <a:t>AI 에이전트와 응용  ·  원광대학교 5일 교육</a:t>
+            </a:r>
+          </a:p>
+        </p:txBody>
+      </p:sp>
+      <p:sp>
+        <p:nvSpPr>
+          <p:cNvPr id="8" name="TextBox 7"/>
+          <p:cNvSpPr txBox="1"/>
+          <p:nvPr/>
+        </p:nvSpPr>
+        <p:spPr>
+          <a:xfrm>
+            <a:off x="10241280" y="6419088"/>
+            <a:ext cx="1463040" cy="365760"/>
+          </a:xfrm>
+          <a:prstGeom prst="rect">
+            <a:avLst/>
+          </a:prstGeom>
+          <a:noFill/>
+        </p:spPr>
+        <p:txBody>
+          <a:bodyPr wrap="square" anchor="ctr" lIns="0" rIns="0" tIns="0" bIns="0">
+            <a:spAutoFit/>
+          </a:bodyPr>
+          <a:lstStyle/>
+          <a:p>
+            <a:pPr algn="r">
+              <a:lnSpc>
+                <a:spcPct val="100000"/>
+              </a:lnSpc>
+              <a:spcBef>
+                <a:spcPts val="0"/>
+              </a:spcBef>
+              <a:spcAft>
+                <a:spcPts val="600"/>
+              </a:spcAft>
+            </a:pPr>
+            <a:r>
+              <a:rPr sz="900" b="1">
+                <a:solidFill>
+                  <a:srgbClr val="6366F1"/>
+                </a:solidFill>
+                <a:latin typeface="NanumGothic"/>
+                <a:ea typeface="NanumGothic"/>
+                <a:cs typeface="NanumGothic"/>
+              </a:rPr>
+              <a:t>Day 1 · 월</a:t>
+            </a:r>
+          </a:p>
+        </p:txBody>
+      </p:sp>
+      <p:sp>
+        <p:nvSpPr>
+          <p:cNvPr id="9" name="Oval 8"/>
+          <p:cNvSpPr/>
+          <p:nvPr/>
+        </p:nvSpPr>
+        <p:spPr>
+          <a:xfrm>
+            <a:off x="548640" y="1911096"/>
+            <a:ext cx="146304" cy="146304"/>
+          </a:xfrm>
+          <a:prstGeom prst="ellipse">
+            <a:avLst/>
+          </a:prstGeom>
+          <a:solidFill>
+            <a:srgbClr val="6366F1"/>
+          </a:solidFill>
+          <a:ln>
+            <a:noFill/>
+          </a:ln>
+          <a:effectLst/>
+        </p:spPr>
+        <p:style>
+          <a:lnRef idx="1">
+            <a:schemeClr val="accent1"/>
+          </a:lnRef>
+          <a:fillRef idx="3">
+            <a:schemeClr val="accent1"/>
+          </a:fillRef>
+          <a:effectRef idx="2">
+            <a:schemeClr val="accent1"/>
+          </a:effectRef>
+          <a:fontRef idx="minor">
+            <a:schemeClr val="lt1"/>
+          </a:fontRef>
+        </p:style>
+        <p:txBody>
+          <a:bodyPr rtlCol="0" anchor="ctr"/>
+          <a:lstStyle/>
+          <a:p>
+            <a:pPr algn="ctr"/>
+          </a:p>
+        </p:txBody>
+      </p:sp>
+      <p:sp>
+        <p:nvSpPr>
+          <p:cNvPr id="10" name="TextBox 9"/>
+          <p:cNvSpPr txBox="1"/>
+          <p:nvPr/>
+        </p:nvSpPr>
+        <p:spPr>
+          <a:xfrm>
+            <a:off x="868680" y="1828800"/>
+            <a:ext cx="10607040" cy="457200"/>
+          </a:xfrm>
+          <a:prstGeom prst="rect">
+            <a:avLst/>
+          </a:prstGeom>
+          <a:noFill/>
+        </p:spPr>
+        <p:txBody>
+          <a:bodyPr wrap="square" anchor="t" lIns="0" rIns="0" tIns="0" bIns="0">
+            <a:spAutoFit/>
+          </a:bodyPr>
+          <a:lstStyle/>
+          <a:p>
+            <a:pPr algn="l">
+              <a:lnSpc>
+                <a:spcPct val="100000"/>
+              </a:lnSpc>
+              <a:spcBef>
+                <a:spcPts val="0"/>
+              </a:spcBef>
+              <a:spcAft>
+                <a:spcPts val="600"/>
+              </a:spcAft>
+            </a:pPr>
+            <a:r>
+              <a:rPr sz="1600" b="1">
+                <a:solidFill>
+                  <a:srgbClr val="0F172A"/>
+                </a:solidFill>
+                <a:latin typeface="NanumGothic"/>
+                <a:ea typeface="NanumGothic"/>
+                <a:cs typeface="NanumGothic"/>
+              </a:rPr>
+              <a:t>그럴듯하지만 틀린 출력</a:t>
+            </a:r>
+          </a:p>
+        </p:txBody>
+      </p:sp>
+      <p:sp>
+        <p:nvSpPr>
+          <p:cNvPr id="11" name="TextBox 10"/>
+          <p:cNvSpPr txBox="1"/>
+          <p:nvPr/>
+        </p:nvSpPr>
+        <p:spPr>
+          <a:xfrm>
+            <a:off x="868680" y="2212848"/>
+            <a:ext cx="10607040" cy="457200"/>
+          </a:xfrm>
+          <a:prstGeom prst="rect">
+            <a:avLst/>
+          </a:prstGeom>
+          <a:noFill/>
+        </p:spPr>
+        <p:txBody>
+          <a:bodyPr wrap="square" anchor="t" lIns="0" rIns="0" tIns="0" bIns="0">
+            <a:spAutoFit/>
+          </a:bodyPr>
+          <a:lstStyle/>
+          <a:p>
+            <a:pPr algn="l">
+              <a:lnSpc>
+                <a:spcPct val="100000"/>
+              </a:lnSpc>
+              <a:spcBef>
+                <a:spcPts val="0"/>
+              </a:spcBef>
+              <a:spcAft>
+                <a:spcPts val="600"/>
+              </a:spcAft>
+            </a:pPr>
+            <a:r>
+              <a:rPr sz="1300" b="0">
+                <a:solidFill>
+                  <a:srgbClr val="64748B"/>
+                </a:solidFill>
+                <a:latin typeface="NanumGothic"/>
+                <a:ea typeface="NanumGothic"/>
+                <a:cs typeface="NanumGothic"/>
+              </a:rPr>
+              <a:t>출처·인용·수치를 자신있게 지어내기도</a:t>
+            </a:r>
+          </a:p>
+        </p:txBody>
+      </p:sp>
+      <p:sp>
+        <p:nvSpPr>
+          <p:cNvPr id="12" name="Oval 11"/>
+          <p:cNvSpPr/>
+          <p:nvPr/>
+        </p:nvSpPr>
+        <p:spPr>
+          <a:xfrm>
+            <a:off x="548640" y="2779776"/>
+            <a:ext cx="146304" cy="146304"/>
+          </a:xfrm>
+          <a:prstGeom prst="ellipse">
+            <a:avLst/>
+          </a:prstGeom>
+          <a:solidFill>
+            <a:srgbClr val="6366F1"/>
+          </a:solidFill>
+          <a:ln>
+            <a:noFill/>
+          </a:ln>
+          <a:effectLst/>
+        </p:spPr>
+        <p:style>
+          <a:lnRef idx="1">
+            <a:schemeClr val="accent1"/>
+          </a:lnRef>
+          <a:fillRef idx="3">
+            <a:schemeClr val="accent1"/>
+          </a:fillRef>
+          <a:effectRef idx="2">
+            <a:schemeClr val="accent1"/>
+          </a:effectRef>
+          <a:fontRef idx="minor">
+            <a:schemeClr val="lt1"/>
+          </a:fontRef>
+        </p:style>
+        <p:txBody>
+          <a:bodyPr rtlCol="0" anchor="ctr"/>
+          <a:lstStyle/>
+          <a:p>
+            <a:pPr algn="ctr"/>
+          </a:p>
+        </p:txBody>
+      </p:sp>
+      <p:sp>
+        <p:nvSpPr>
+          <p:cNvPr id="13" name="TextBox 12"/>
+          <p:cNvSpPr txBox="1"/>
+          <p:nvPr/>
+        </p:nvSpPr>
+        <p:spPr>
+          <a:xfrm>
+            <a:off x="868680" y="2697480"/>
+            <a:ext cx="10607040" cy="457200"/>
+          </a:xfrm>
+          <a:prstGeom prst="rect">
+            <a:avLst/>
+          </a:prstGeom>
+          <a:noFill/>
+        </p:spPr>
+        <p:txBody>
+          <a:bodyPr wrap="square" anchor="t" lIns="0" rIns="0" tIns="0" bIns="0">
+            <a:spAutoFit/>
+          </a:bodyPr>
+          <a:lstStyle/>
+          <a:p>
+            <a:pPr algn="l">
+              <a:lnSpc>
+                <a:spcPct val="100000"/>
+              </a:lnSpc>
+              <a:spcBef>
+                <a:spcPts val="0"/>
+              </a:spcBef>
+              <a:spcAft>
+                <a:spcPts val="600"/>
+              </a:spcAft>
+            </a:pPr>
+            <a:r>
+              <a:rPr sz="1600" b="1">
+                <a:solidFill>
+                  <a:srgbClr val="0F172A"/>
+                </a:solidFill>
+                <a:latin typeface="NanumGothic"/>
+                <a:ea typeface="NanumGothic"/>
+                <a:cs typeface="NanumGothic"/>
+              </a:rPr>
+              <a:t>왜 생기나</a:t>
+            </a:r>
+          </a:p>
+        </p:txBody>
+      </p:sp>
+      <p:sp>
+        <p:nvSpPr>
+          <p:cNvPr id="14" name="TextBox 13"/>
+          <p:cNvSpPr txBox="1"/>
+          <p:nvPr/>
+        </p:nvSpPr>
+        <p:spPr>
+          <a:xfrm>
+            <a:off x="868680" y="3081528"/>
+            <a:ext cx="10607040" cy="457200"/>
+          </a:xfrm>
+          <a:prstGeom prst="rect">
+            <a:avLst/>
+          </a:prstGeom>
+          <a:noFill/>
+        </p:spPr>
+        <p:txBody>
+          <a:bodyPr wrap="square" anchor="t" lIns="0" rIns="0" tIns="0" bIns="0">
+            <a:spAutoFit/>
+          </a:bodyPr>
+          <a:lstStyle/>
+          <a:p>
+            <a:pPr algn="l">
+              <a:lnSpc>
+                <a:spcPct val="100000"/>
+              </a:lnSpc>
+              <a:spcBef>
+                <a:spcPts val="0"/>
+              </a:spcBef>
+              <a:spcAft>
+                <a:spcPts val="600"/>
+              </a:spcAft>
+            </a:pPr>
+            <a:r>
+              <a:rPr sz="1300" b="0">
+                <a:solidFill>
+                  <a:srgbClr val="64748B"/>
+                </a:solidFill>
+                <a:latin typeface="NanumGothic"/>
+                <a:ea typeface="NanumGothic"/>
+                <a:cs typeface="NanumGothic"/>
+              </a:rPr>
+              <a:t>'그럴듯한 다음 토큰'을 생성할 뿐 사실 검증을 안 함</a:t>
+            </a:r>
+          </a:p>
+        </p:txBody>
+      </p:sp>
+      <p:sp>
+        <p:nvSpPr>
+          <p:cNvPr id="15" name="Oval 14"/>
+          <p:cNvSpPr/>
+          <p:nvPr/>
+        </p:nvSpPr>
+        <p:spPr>
+          <a:xfrm>
+            <a:off x="548640" y="3648456"/>
+            <a:ext cx="146304" cy="146304"/>
+          </a:xfrm>
+          <a:prstGeom prst="ellipse">
+            <a:avLst/>
+          </a:prstGeom>
+          <a:solidFill>
+            <a:srgbClr val="6366F1"/>
+          </a:solidFill>
+          <a:ln>
+            <a:noFill/>
+          </a:ln>
+          <a:effectLst/>
+        </p:spPr>
+        <p:style>
+          <a:lnRef idx="1">
+            <a:schemeClr val="accent1"/>
+          </a:lnRef>
+          <a:fillRef idx="3">
+            <a:schemeClr val="accent1"/>
+          </a:fillRef>
+          <a:effectRef idx="2">
+            <a:schemeClr val="accent1"/>
+          </a:effectRef>
+          <a:fontRef idx="minor">
+            <a:schemeClr val="lt1"/>
+          </a:fontRef>
+        </p:style>
+        <p:txBody>
+          <a:bodyPr rtlCol="0" anchor="ctr"/>
+          <a:lstStyle/>
+          <a:p>
+            <a:pPr algn="ctr"/>
+          </a:p>
+        </p:txBody>
+      </p:sp>
+      <p:sp>
+        <p:nvSpPr>
+          <p:cNvPr id="16" name="TextBox 15"/>
+          <p:cNvSpPr txBox="1"/>
+          <p:nvPr/>
+        </p:nvSpPr>
+        <p:spPr>
+          <a:xfrm>
+            <a:off x="868680" y="3566160"/>
+            <a:ext cx="10607040" cy="457200"/>
+          </a:xfrm>
+          <a:prstGeom prst="rect">
+            <a:avLst/>
+          </a:prstGeom>
+          <a:noFill/>
+        </p:spPr>
+        <p:txBody>
+          <a:bodyPr wrap="square" anchor="t" lIns="0" rIns="0" tIns="0" bIns="0">
+            <a:spAutoFit/>
+          </a:bodyPr>
+          <a:lstStyle/>
+          <a:p>
+            <a:pPr algn="l">
+              <a:lnSpc>
+                <a:spcPct val="100000"/>
+              </a:lnSpc>
+              <a:spcBef>
+                <a:spcPts val="0"/>
+              </a:spcBef>
+              <a:spcAft>
+                <a:spcPts val="600"/>
+              </a:spcAft>
+            </a:pPr>
+            <a:r>
+              <a:rPr sz="1600" b="1">
+                <a:solidFill>
+                  <a:srgbClr val="0F172A"/>
+                </a:solidFill>
+                <a:latin typeface="NanumGothic"/>
+                <a:ea typeface="NanumGothic"/>
+                <a:cs typeface="NanumGothic"/>
+              </a:rPr>
+              <a:t>대응</a:t>
+            </a:r>
+          </a:p>
+        </p:txBody>
+      </p:sp>
+      <p:sp>
+        <p:nvSpPr>
+          <p:cNvPr id="17" name="TextBox 16"/>
+          <p:cNvSpPr txBox="1"/>
+          <p:nvPr/>
+        </p:nvSpPr>
+        <p:spPr>
+          <a:xfrm>
+            <a:off x="868680" y="3950208"/>
+            <a:ext cx="10607040" cy="457200"/>
+          </a:xfrm>
+          <a:prstGeom prst="rect">
+            <a:avLst/>
+          </a:prstGeom>
+          <a:noFill/>
+        </p:spPr>
+        <p:txBody>
+          <a:bodyPr wrap="square" anchor="t" lIns="0" rIns="0" tIns="0" bIns="0">
+            <a:spAutoFit/>
+          </a:bodyPr>
+          <a:lstStyle/>
+          <a:p>
+            <a:pPr algn="l">
+              <a:lnSpc>
+                <a:spcPct val="100000"/>
+              </a:lnSpc>
+              <a:spcBef>
+                <a:spcPts val="0"/>
+              </a:spcBef>
+              <a:spcAft>
+                <a:spcPts val="600"/>
+              </a:spcAft>
+            </a:pPr>
+            <a:r>
+              <a:rPr sz="1300" b="0">
+                <a:solidFill>
+                  <a:srgbClr val="64748B"/>
+                </a:solidFill>
+                <a:latin typeface="NanumGothic"/>
+                <a:ea typeface="NanumGothic"/>
+                <a:cs typeface="NanumGothic"/>
+              </a:rPr>
+              <a:t>출처 확인·검색 연동(RAG)·교차검증 → 리서치 에이전트의 존재 이유</a:t>
+            </a:r>
+          </a:p>
+        </p:txBody>
+      </p:sp>
+    </p:spTree>
+  </p:cSld>
+  <p:clrMapOvr>
+    <a:masterClrMapping/>
+  </p:clrMapOvr>
+</p:sld>
+</file>
+
+<file path=ppt/slides/slide19.xml><?xml version="1.0" encoding="utf-8"?>
+<p:sld xmlns:a="http://schemas.openxmlformats.org/drawingml/2006/main" xmlns:p="http://schemas.openxmlformats.org/presentationml/2006/main" xmlns:r="http://schemas.openxmlformats.org/officeDocument/2006/relationships">
+  <p:cSld>
+    <p:spTree>
+      <p:nvGrpSpPr>
+        <p:cNvPr id="1" name=""/>
+        <p:cNvGrpSpPr/>
+        <p:nvPr/>
+      </p:nvGrpSpPr>
+      <p:grpSpPr/>
+      <p:sp>
+        <p:nvSpPr>
+          <p:cNvPr id="2" name="Rectangle 1"/>
+          <p:cNvSpPr/>
+          <p:nvPr/>
+        </p:nvSpPr>
+        <p:spPr>
+          <a:xfrm>
+            <a:off x="0" y="0"/>
+            <a:ext cx="12191695" cy="6858000"/>
+          </a:xfrm>
+          <a:prstGeom prst="rect">
+            <a:avLst/>
+          </a:prstGeom>
+          <a:solidFill>
+            <a:srgbClr val="FFFFFF"/>
+          </a:solidFill>
+          <a:ln>
+            <a:noFill/>
+          </a:ln>
+          <a:effectLst/>
+        </p:spPr>
+        <p:style>
+          <a:lnRef idx="1">
+            <a:schemeClr val="accent1"/>
+          </a:lnRef>
+          <a:fillRef idx="3">
+            <a:schemeClr val="accent1"/>
+          </a:fillRef>
+          <a:effectRef idx="2">
+            <a:schemeClr val="accent1"/>
+          </a:effectRef>
+          <a:fontRef idx="minor">
+            <a:schemeClr val="lt1"/>
+          </a:fontRef>
+        </p:style>
+        <p:txBody>
+          <a:bodyPr rtlCol="0" anchor="ctr"/>
+          <a:lstStyle/>
+          <a:p>
+            <a:pPr algn="ctr"/>
+          </a:p>
+        </p:txBody>
+      </p:sp>
+      <p:sp>
+        <p:nvSpPr>
+          <p:cNvPr id="3" name="Rectangle 2"/>
+          <p:cNvSpPr/>
+          <p:nvPr/>
+        </p:nvSpPr>
+        <p:spPr>
+          <a:xfrm>
+            <a:off x="0" y="0"/>
+            <a:ext cx="164592" cy="6858000"/>
+          </a:xfrm>
+          <a:prstGeom prst="rect">
+            <a:avLst/>
+          </a:prstGeom>
+          <a:solidFill>
+            <a:srgbClr val="6366F1"/>
+          </a:solidFill>
+          <a:ln>
+            <a:noFill/>
+          </a:ln>
+          <a:effectLst/>
+        </p:spPr>
+        <p:style>
+          <a:lnRef idx="1">
+            <a:schemeClr val="accent1"/>
+          </a:lnRef>
+          <a:fillRef idx="3">
+            <a:schemeClr val="accent1"/>
+          </a:fillRef>
+          <a:effectRef idx="2">
+            <a:schemeClr val="accent1"/>
+          </a:effectRef>
+          <a:fontRef idx="minor">
+            <a:schemeClr val="lt1"/>
+          </a:fontRef>
+        </p:style>
+        <p:txBody>
+          <a:bodyPr rtlCol="0" anchor="ctr"/>
+          <a:lstStyle/>
+          <a:p>
+            <a:pPr algn="ctr"/>
+          </a:p>
+        </p:txBody>
+      </p:sp>
+      <p:sp>
+        <p:nvSpPr>
+          <p:cNvPr id="4" name="TextBox 3"/>
+          <p:cNvSpPr txBox="1"/>
+          <p:nvPr/>
+        </p:nvSpPr>
+        <p:spPr>
+          <a:xfrm>
+            <a:off x="502920" y="384048"/>
+            <a:ext cx="10058400" cy="320040"/>
+          </a:xfrm>
+          <a:prstGeom prst="rect">
+            <a:avLst/>
+          </a:prstGeom>
+          <a:noFill/>
+        </p:spPr>
+        <p:txBody>
+          <a:bodyPr wrap="square" anchor="t" lIns="0" rIns="0" tIns="0" bIns="0">
+            <a:spAutoFit/>
+          </a:bodyPr>
+          <a:lstStyle/>
+          <a:p>
+            <a:pPr algn="l">
+              <a:lnSpc>
+                <a:spcPct val="100000"/>
+              </a:lnSpc>
+              <a:spcBef>
+                <a:spcPts val="0"/>
+              </a:spcBef>
+              <a:spcAft>
+                <a:spcPts val="600"/>
+              </a:spcAft>
+            </a:pPr>
+            <a:r>
+              <a:rPr sz="1200" b="1">
+                <a:solidFill>
+                  <a:srgbClr val="6366F1"/>
+                </a:solidFill>
+                <a:latin typeface="NanumGothic"/>
+                <a:ea typeface="NanumGothic"/>
+                <a:cs typeface="NanumGothic"/>
+              </a:rPr>
+              <a:t>모델 선택</a:t>
+            </a:r>
+          </a:p>
+        </p:txBody>
+      </p:sp>
+      <p:sp>
+        <p:nvSpPr>
+          <p:cNvPr id="5" name="TextBox 4"/>
+          <p:cNvSpPr txBox="1"/>
+          <p:nvPr/>
+        </p:nvSpPr>
+        <p:spPr>
+          <a:xfrm>
+            <a:off x="502920" y="713232"/>
+            <a:ext cx="11155680" cy="731520"/>
+          </a:xfrm>
+          <a:prstGeom prst="rect">
+            <a:avLst/>
+          </a:prstGeom>
+          <a:noFill/>
+        </p:spPr>
+        <p:txBody>
+          <a:bodyPr wrap="square" anchor="t" lIns="0" rIns="0" tIns="0" bIns="0">
+            <a:spAutoFit/>
+          </a:bodyPr>
+          <a:lstStyle/>
+          <a:p>
+            <a:pPr algn="l">
+              <a:lnSpc>
+                <a:spcPct val="100000"/>
+              </a:lnSpc>
+              <a:spcBef>
+                <a:spcPts val="0"/>
+              </a:spcBef>
+              <a:spcAft>
+                <a:spcPts val="600"/>
+              </a:spcAft>
+            </a:pPr>
+            <a:r>
+              <a:rPr sz="2700" b="1">
+                <a:solidFill>
+                  <a:srgbClr val="0F172A"/>
+                </a:solidFill>
+                <a:latin typeface="NanumSquare"/>
+                <a:ea typeface="NanumSquare"/>
+                <a:cs typeface="NanumSquare"/>
+              </a:rPr>
+              <a:t>어떤 모델을 쓸까</a:t>
+            </a:r>
+          </a:p>
+        </p:txBody>
+      </p:sp>
+      <p:sp>
+        <p:nvSpPr>
+          <p:cNvPr id="6" name="Rectangle 5"/>
+          <p:cNvSpPr/>
+          <p:nvPr/>
+        </p:nvSpPr>
+        <p:spPr>
+          <a:xfrm>
+            <a:off x="521207" y="1417320"/>
+            <a:ext cx="1005840" cy="45720"/>
+          </a:xfrm>
+          <a:prstGeom prst="rect">
+            <a:avLst/>
+          </a:prstGeom>
+          <a:solidFill>
+            <a:srgbClr val="6366F1"/>
+          </a:solidFill>
+          <a:ln>
+            <a:noFill/>
+          </a:ln>
+          <a:effectLst/>
+        </p:spPr>
+        <p:style>
+          <a:lnRef idx="1">
+            <a:schemeClr val="accent1"/>
+          </a:lnRef>
+          <a:fillRef idx="3">
+            <a:schemeClr val="accent1"/>
+          </a:fillRef>
+          <a:effectRef idx="2">
+            <a:schemeClr val="accent1"/>
+          </a:effectRef>
+          <a:fontRef idx="minor">
+            <a:schemeClr val="lt1"/>
+          </a:fontRef>
+        </p:style>
+        <p:txBody>
+          <a:bodyPr rtlCol="0" anchor="ctr"/>
+          <a:lstStyle/>
+          <a:p>
+            <a:pPr algn="ctr"/>
+          </a:p>
+        </p:txBody>
+      </p:sp>
+      <p:sp>
+        <p:nvSpPr>
+          <p:cNvPr id="7" name="TextBox 6"/>
+          <p:cNvSpPr txBox="1"/>
+          <p:nvPr/>
+        </p:nvSpPr>
+        <p:spPr>
+          <a:xfrm>
+            <a:off x="502920" y="6419088"/>
+            <a:ext cx="7315200" cy="365760"/>
+          </a:xfrm>
+          <a:prstGeom prst="rect">
+            <a:avLst/>
+          </a:prstGeom>
+          <a:noFill/>
+        </p:spPr>
+        <p:txBody>
+          <a:bodyPr wrap="square" anchor="ctr" lIns="0" rIns="0" tIns="0" bIns="0">
+            <a:spAutoFit/>
+          </a:bodyPr>
+          <a:lstStyle/>
+          <a:p>
+            <a:pPr algn="l">
+              <a:lnSpc>
+                <a:spcPct val="100000"/>
+              </a:lnSpc>
+              <a:spcBef>
+                <a:spcPts val="0"/>
+              </a:spcBef>
+              <a:spcAft>
+                <a:spcPts val="600"/>
+              </a:spcAft>
+            </a:pPr>
+            <a:r>
+              <a:rPr sz="900" b="0">
+                <a:solidFill>
+                  <a:srgbClr val="64748B"/>
+                </a:solidFill>
+                <a:latin typeface="NanumGothic"/>
+                <a:ea typeface="NanumGothic"/>
+                <a:cs typeface="NanumGothic"/>
+              </a:rPr>
+              <a:t>AI 에이전트와 응용  ·  원광대학교 5일 교육</a:t>
+            </a:r>
+          </a:p>
+        </p:txBody>
+      </p:sp>
+      <p:sp>
+        <p:nvSpPr>
+          <p:cNvPr id="8" name="TextBox 7"/>
+          <p:cNvSpPr txBox="1"/>
+          <p:nvPr/>
+        </p:nvSpPr>
+        <p:spPr>
+          <a:xfrm>
+            <a:off x="10241280" y="6419088"/>
+            <a:ext cx="1463040" cy="365760"/>
+          </a:xfrm>
+          <a:prstGeom prst="rect">
+            <a:avLst/>
+          </a:prstGeom>
+          <a:noFill/>
+        </p:spPr>
+        <p:txBody>
+          <a:bodyPr wrap="square" anchor="ctr" lIns="0" rIns="0" tIns="0" bIns="0">
+            <a:spAutoFit/>
+          </a:bodyPr>
+          <a:lstStyle/>
+          <a:p>
+            <a:pPr algn="r">
+              <a:lnSpc>
+                <a:spcPct val="100000"/>
+              </a:lnSpc>
+              <a:spcBef>
+                <a:spcPts val="0"/>
+              </a:spcBef>
+              <a:spcAft>
+                <a:spcPts val="600"/>
+              </a:spcAft>
+            </a:pPr>
+            <a:r>
+              <a:rPr sz="900" b="1">
+                <a:solidFill>
+                  <a:srgbClr val="6366F1"/>
+                </a:solidFill>
+                <a:latin typeface="NanumGothic"/>
+                <a:ea typeface="NanumGothic"/>
+                <a:cs typeface="NanumGothic"/>
+              </a:rPr>
+              <a:t>Day 1 · 월</a:t>
+            </a:r>
+          </a:p>
+        </p:txBody>
+      </p:sp>
+      <p:sp>
+        <p:nvSpPr>
+          <p:cNvPr id="9" name="Oval 8"/>
+          <p:cNvSpPr/>
+          <p:nvPr/>
+        </p:nvSpPr>
+        <p:spPr>
+          <a:xfrm>
+            <a:off x="548640" y="1911096"/>
+            <a:ext cx="146304" cy="146304"/>
+          </a:xfrm>
+          <a:prstGeom prst="ellipse">
+            <a:avLst/>
+          </a:prstGeom>
+          <a:solidFill>
+            <a:srgbClr val="6366F1"/>
+          </a:solidFill>
+          <a:ln>
+            <a:noFill/>
+          </a:ln>
+          <a:effectLst/>
+        </p:spPr>
+        <p:style>
+          <a:lnRef idx="1">
+            <a:schemeClr val="accent1"/>
+          </a:lnRef>
+          <a:fillRef idx="3">
+            <a:schemeClr val="accent1"/>
+          </a:fillRef>
+          <a:effectRef idx="2">
+            <a:schemeClr val="accent1"/>
+          </a:effectRef>
+          <a:fontRef idx="minor">
+            <a:schemeClr val="lt1"/>
+          </a:fontRef>
+        </p:style>
+        <p:txBody>
+          <a:bodyPr rtlCol="0" anchor="ctr"/>
+          <a:lstStyle/>
+          <a:p>
+            <a:pPr algn="ctr"/>
+          </a:p>
+        </p:txBody>
+      </p:sp>
+      <p:sp>
+        <p:nvSpPr>
+          <p:cNvPr id="10" name="TextBox 9"/>
+          <p:cNvSpPr txBox="1"/>
+          <p:nvPr/>
+        </p:nvSpPr>
+        <p:spPr>
+          <a:xfrm>
+            <a:off x="868680" y="1828800"/>
+            <a:ext cx="10607040" cy="457200"/>
+          </a:xfrm>
+          <a:prstGeom prst="rect">
+            <a:avLst/>
+          </a:prstGeom>
+          <a:noFill/>
+        </p:spPr>
+        <p:txBody>
+          <a:bodyPr wrap="square" anchor="t" lIns="0" rIns="0" tIns="0" bIns="0">
+            <a:spAutoFit/>
+          </a:bodyPr>
+          <a:lstStyle/>
+          <a:p>
+            <a:pPr algn="l">
+              <a:lnSpc>
+                <a:spcPct val="100000"/>
+              </a:lnSpc>
+              <a:spcBef>
+                <a:spcPts val="0"/>
+              </a:spcBef>
+              <a:spcAft>
+                <a:spcPts val="600"/>
+              </a:spcAft>
+            </a:pPr>
+            <a:r>
+              <a:rPr sz="1600" b="1">
+                <a:solidFill>
+                  <a:srgbClr val="0F172A"/>
+                </a:solidFill>
+                <a:latin typeface="NanumGothic"/>
+                <a:ea typeface="NanumGothic"/>
+                <a:cs typeface="NanumGothic"/>
+              </a:rPr>
+              <a:t>크기 ↔ 성능</a:t>
+            </a:r>
+          </a:p>
+        </p:txBody>
+      </p:sp>
+      <p:sp>
+        <p:nvSpPr>
+          <p:cNvPr id="11" name="TextBox 10"/>
+          <p:cNvSpPr txBox="1"/>
+          <p:nvPr/>
+        </p:nvSpPr>
+        <p:spPr>
+          <a:xfrm>
+            <a:off x="868680" y="2212848"/>
+            <a:ext cx="10607040" cy="457200"/>
+          </a:xfrm>
+          <a:prstGeom prst="rect">
+            <a:avLst/>
+          </a:prstGeom>
+          <a:noFill/>
+        </p:spPr>
+        <p:txBody>
+          <a:bodyPr wrap="square" anchor="t" lIns="0" rIns="0" tIns="0" bIns="0">
+            <a:spAutoFit/>
+          </a:bodyPr>
+          <a:lstStyle/>
+          <a:p>
+            <a:pPr algn="l">
+              <a:lnSpc>
+                <a:spcPct val="100000"/>
+              </a:lnSpc>
+              <a:spcBef>
+                <a:spcPts val="0"/>
+              </a:spcBef>
+              <a:spcAft>
+                <a:spcPts val="600"/>
+              </a:spcAft>
+            </a:pPr>
+            <a:r>
+              <a:rPr sz="1300" b="0">
+                <a:solidFill>
+                  <a:srgbClr val="64748B"/>
+                </a:solidFill>
+                <a:latin typeface="NanumGothic"/>
+                <a:ea typeface="NanumGothic"/>
+                <a:cs typeface="NanumGothic"/>
+              </a:rPr>
+              <a:t>큰 모델 = 똑똑하지만 느리고 비쌈</a:t>
+            </a:r>
+          </a:p>
+        </p:txBody>
+      </p:sp>
+      <p:sp>
+        <p:nvSpPr>
+          <p:cNvPr id="12" name="Oval 11"/>
+          <p:cNvSpPr/>
+          <p:nvPr/>
+        </p:nvSpPr>
+        <p:spPr>
+          <a:xfrm>
+            <a:off x="548640" y="2779776"/>
+            <a:ext cx="146304" cy="146304"/>
+          </a:xfrm>
+          <a:prstGeom prst="ellipse">
+            <a:avLst/>
+          </a:prstGeom>
+          <a:solidFill>
+            <a:srgbClr val="6366F1"/>
+          </a:solidFill>
+          <a:ln>
+            <a:noFill/>
+          </a:ln>
+          <a:effectLst/>
+        </p:spPr>
+        <p:style>
+          <a:lnRef idx="1">
+            <a:schemeClr val="accent1"/>
+          </a:lnRef>
+          <a:fillRef idx="3">
+            <a:schemeClr val="accent1"/>
+          </a:fillRef>
+          <a:effectRef idx="2">
+            <a:schemeClr val="accent1"/>
+          </a:effectRef>
+          <a:fontRef idx="minor">
+            <a:schemeClr val="lt1"/>
+          </a:fontRef>
+        </p:style>
+        <p:txBody>
+          <a:bodyPr rtlCol="0" anchor="ctr"/>
+          <a:lstStyle/>
+          <a:p>
+            <a:pPr algn="ctr"/>
+          </a:p>
+        </p:txBody>
+      </p:sp>
+      <p:sp>
+        <p:nvSpPr>
+          <p:cNvPr id="13" name="TextBox 12"/>
+          <p:cNvSpPr txBox="1"/>
+          <p:nvPr/>
+        </p:nvSpPr>
+        <p:spPr>
+          <a:xfrm>
+            <a:off x="868680" y="2697480"/>
+            <a:ext cx="10607040" cy="457200"/>
+          </a:xfrm>
+          <a:prstGeom prst="rect">
+            <a:avLst/>
+          </a:prstGeom>
+          <a:noFill/>
+        </p:spPr>
+        <p:txBody>
+          <a:bodyPr wrap="square" anchor="t" lIns="0" rIns="0" tIns="0" bIns="0">
+            <a:spAutoFit/>
+          </a:bodyPr>
+          <a:lstStyle/>
+          <a:p>
+            <a:pPr algn="l">
+              <a:lnSpc>
+                <a:spcPct val="100000"/>
+              </a:lnSpc>
+              <a:spcBef>
+                <a:spcPts val="0"/>
+              </a:spcBef>
+              <a:spcAft>
+                <a:spcPts val="600"/>
+              </a:spcAft>
+            </a:pPr>
+            <a:r>
+              <a:rPr sz="1600" b="1">
+                <a:solidFill>
+                  <a:srgbClr val="0F172A"/>
+                </a:solidFill>
+                <a:latin typeface="NanumGothic"/>
+                <a:ea typeface="NanumGothic"/>
+                <a:cs typeface="NanumGothic"/>
+              </a:rPr>
+              <a:t>작업에 맞게</a:t>
+            </a:r>
+          </a:p>
+        </p:txBody>
+      </p:sp>
+      <p:sp>
+        <p:nvSpPr>
+          <p:cNvPr id="14" name="TextBox 13"/>
+          <p:cNvSpPr txBox="1"/>
+          <p:nvPr/>
+        </p:nvSpPr>
+        <p:spPr>
+          <a:xfrm>
+            <a:off x="868680" y="3081528"/>
+            <a:ext cx="10607040" cy="457200"/>
+          </a:xfrm>
+          <a:prstGeom prst="rect">
+            <a:avLst/>
+          </a:prstGeom>
+          <a:noFill/>
+        </p:spPr>
+        <p:txBody>
+          <a:bodyPr wrap="square" anchor="t" lIns="0" rIns="0" tIns="0" bIns="0">
+            <a:spAutoFit/>
+          </a:bodyPr>
+          <a:lstStyle/>
+          <a:p>
+            <a:pPr algn="l">
+              <a:lnSpc>
+                <a:spcPct val="100000"/>
+              </a:lnSpc>
+              <a:spcBef>
+                <a:spcPts val="0"/>
+              </a:spcBef>
+              <a:spcAft>
+                <a:spcPts val="600"/>
+              </a:spcAft>
+            </a:pPr>
+            <a:r>
+              <a:rPr sz="1300" b="0">
+                <a:solidFill>
+                  <a:srgbClr val="64748B"/>
+                </a:solidFill>
+                <a:latin typeface="NanumGothic"/>
+                <a:ea typeface="NanumGothic"/>
+                <a:cs typeface="NanumGothic"/>
+              </a:rPr>
+              <a:t>간단한 작업엔 작고 빠른 모델, 어려운 작업엔 크고/추론 모델</a:t>
+            </a:r>
+          </a:p>
+        </p:txBody>
+      </p:sp>
+      <p:sp>
+        <p:nvSpPr>
+          <p:cNvPr id="15" name="Oval 14"/>
+          <p:cNvSpPr/>
+          <p:nvPr/>
+        </p:nvSpPr>
+        <p:spPr>
+          <a:xfrm>
+            <a:off x="548640" y="3648456"/>
+            <a:ext cx="146304" cy="146304"/>
+          </a:xfrm>
+          <a:prstGeom prst="ellipse">
+            <a:avLst/>
+          </a:prstGeom>
+          <a:solidFill>
+            <a:srgbClr val="6366F1"/>
+          </a:solidFill>
+          <a:ln>
+            <a:noFill/>
+          </a:ln>
+          <a:effectLst/>
+        </p:spPr>
+        <p:style>
+          <a:lnRef idx="1">
+            <a:schemeClr val="accent1"/>
+          </a:lnRef>
+          <a:fillRef idx="3">
+            <a:schemeClr val="accent1"/>
+          </a:fillRef>
+          <a:effectRef idx="2">
+            <a:schemeClr val="accent1"/>
+          </a:effectRef>
+          <a:fontRef idx="minor">
+            <a:schemeClr val="lt1"/>
+          </a:fontRef>
+        </p:style>
+        <p:txBody>
+          <a:bodyPr rtlCol="0" anchor="ctr"/>
+          <a:lstStyle/>
+          <a:p>
+            <a:pPr algn="ctr"/>
+          </a:p>
+        </p:txBody>
+      </p:sp>
+      <p:sp>
+        <p:nvSpPr>
+          <p:cNvPr id="16" name="TextBox 15"/>
+          <p:cNvSpPr txBox="1"/>
+          <p:nvPr/>
+        </p:nvSpPr>
+        <p:spPr>
+          <a:xfrm>
+            <a:off x="868680" y="3566160"/>
+            <a:ext cx="10607040" cy="457200"/>
+          </a:xfrm>
+          <a:prstGeom prst="rect">
+            <a:avLst/>
+          </a:prstGeom>
+          <a:noFill/>
+        </p:spPr>
+        <p:txBody>
+          <a:bodyPr wrap="square" anchor="t" lIns="0" rIns="0" tIns="0" bIns="0">
+            <a:spAutoFit/>
+          </a:bodyPr>
+          <a:lstStyle/>
+          <a:p>
+            <a:pPr algn="l">
+              <a:lnSpc>
+                <a:spcPct val="100000"/>
+              </a:lnSpc>
+              <a:spcBef>
+                <a:spcPts val="0"/>
+              </a:spcBef>
+              <a:spcAft>
+                <a:spcPts val="600"/>
+              </a:spcAft>
+            </a:pPr>
+            <a:r>
+              <a:rPr sz="1600" b="1">
+                <a:solidFill>
+                  <a:srgbClr val="0F172A"/>
+                </a:solidFill>
+                <a:latin typeface="NanumGothic"/>
+                <a:ea typeface="NanumGothic"/>
+                <a:cs typeface="NanumGothic"/>
+              </a:rPr>
+              <a:t>Claude 예</a:t>
+            </a:r>
+          </a:p>
+        </p:txBody>
+      </p:sp>
+      <p:sp>
+        <p:nvSpPr>
+          <p:cNvPr id="17" name="TextBox 16"/>
+          <p:cNvSpPr txBox="1"/>
+          <p:nvPr/>
+        </p:nvSpPr>
+        <p:spPr>
+          <a:xfrm>
+            <a:off x="868680" y="3950208"/>
+            <a:ext cx="10607040" cy="457200"/>
+          </a:xfrm>
+          <a:prstGeom prst="rect">
+            <a:avLst/>
+          </a:prstGeom>
+          <a:noFill/>
+        </p:spPr>
+        <p:txBody>
+          <a:bodyPr wrap="square" anchor="t" lIns="0" rIns="0" tIns="0" bIns="0">
+            <a:spAutoFit/>
+          </a:bodyPr>
+          <a:lstStyle/>
+          <a:p>
+            <a:pPr algn="l">
+              <a:lnSpc>
+                <a:spcPct val="100000"/>
+              </a:lnSpc>
+              <a:spcBef>
+                <a:spcPts val="0"/>
+              </a:spcBef>
+              <a:spcAft>
+                <a:spcPts val="600"/>
+              </a:spcAft>
+            </a:pPr>
+            <a:r>
+              <a:rPr sz="1300" b="0">
+                <a:solidFill>
+                  <a:srgbClr val="64748B"/>
+                </a:solidFill>
+                <a:latin typeface="NanumGothic"/>
+                <a:ea typeface="NanumGothic"/>
+                <a:cs typeface="NanumGothic"/>
+              </a:rPr>
+              <a:t>Opus(최상) · Sonnet(균형) · Haiku(빠름) (placeholder)</a:t>
             </a:r>
           </a:p>
         </p:txBody>
@@ -11368,6 +13585,1660 @@
 </p:sld>
 </file>
 
+<file path=ppt/slides/slide20.xml><?xml version="1.0" encoding="utf-8"?>
+<p:sld xmlns:a="http://schemas.openxmlformats.org/drawingml/2006/main" xmlns:p="http://schemas.openxmlformats.org/presentationml/2006/main" xmlns:r="http://schemas.openxmlformats.org/officeDocument/2006/relationships">
+  <p:cSld>
+    <p:spTree>
+      <p:nvGrpSpPr>
+        <p:cNvPr id="1" name=""/>
+        <p:cNvGrpSpPr/>
+        <p:nvPr/>
+      </p:nvGrpSpPr>
+      <p:grpSpPr/>
+      <p:sp>
+        <p:nvSpPr>
+          <p:cNvPr id="2" name="Rectangle 1"/>
+          <p:cNvSpPr/>
+          <p:nvPr/>
+        </p:nvSpPr>
+        <p:spPr>
+          <a:xfrm>
+            <a:off x="0" y="0"/>
+            <a:ext cx="12191695" cy="6858000"/>
+          </a:xfrm>
+          <a:prstGeom prst="rect">
+            <a:avLst/>
+          </a:prstGeom>
+          <a:solidFill>
+            <a:srgbClr val="FFFFFF"/>
+          </a:solidFill>
+          <a:ln>
+            <a:noFill/>
+          </a:ln>
+          <a:effectLst/>
+        </p:spPr>
+        <p:style>
+          <a:lnRef idx="1">
+            <a:schemeClr val="accent1"/>
+          </a:lnRef>
+          <a:fillRef idx="3">
+            <a:schemeClr val="accent1"/>
+          </a:fillRef>
+          <a:effectRef idx="2">
+            <a:schemeClr val="accent1"/>
+          </a:effectRef>
+          <a:fontRef idx="minor">
+            <a:schemeClr val="lt1"/>
+          </a:fontRef>
+        </p:style>
+        <p:txBody>
+          <a:bodyPr rtlCol="0" anchor="ctr"/>
+          <a:lstStyle/>
+          <a:p>
+            <a:pPr algn="ctr"/>
+          </a:p>
+        </p:txBody>
+      </p:sp>
+      <p:sp>
+        <p:nvSpPr>
+          <p:cNvPr id="3" name="Rectangle 2"/>
+          <p:cNvSpPr/>
+          <p:nvPr/>
+        </p:nvSpPr>
+        <p:spPr>
+          <a:xfrm>
+            <a:off x="0" y="0"/>
+            <a:ext cx="164592" cy="6858000"/>
+          </a:xfrm>
+          <a:prstGeom prst="rect">
+            <a:avLst/>
+          </a:prstGeom>
+          <a:solidFill>
+            <a:srgbClr val="6366F1"/>
+          </a:solidFill>
+          <a:ln>
+            <a:noFill/>
+          </a:ln>
+          <a:effectLst/>
+        </p:spPr>
+        <p:style>
+          <a:lnRef idx="1">
+            <a:schemeClr val="accent1"/>
+          </a:lnRef>
+          <a:fillRef idx="3">
+            <a:schemeClr val="accent1"/>
+          </a:fillRef>
+          <a:effectRef idx="2">
+            <a:schemeClr val="accent1"/>
+          </a:effectRef>
+          <a:fontRef idx="minor">
+            <a:schemeClr val="lt1"/>
+          </a:fontRef>
+        </p:style>
+        <p:txBody>
+          <a:bodyPr rtlCol="0" anchor="ctr"/>
+          <a:lstStyle/>
+          <a:p>
+            <a:pPr algn="ctr"/>
+          </a:p>
+        </p:txBody>
+      </p:sp>
+      <p:sp>
+        <p:nvSpPr>
+          <p:cNvPr id="4" name="TextBox 3"/>
+          <p:cNvSpPr txBox="1"/>
+          <p:nvPr/>
+        </p:nvSpPr>
+        <p:spPr>
+          <a:xfrm>
+            <a:off x="502920" y="384048"/>
+            <a:ext cx="10058400" cy="320040"/>
+          </a:xfrm>
+          <a:prstGeom prst="rect">
+            <a:avLst/>
+          </a:prstGeom>
+          <a:noFill/>
+        </p:spPr>
+        <p:txBody>
+          <a:bodyPr wrap="square" anchor="t" lIns="0" rIns="0" tIns="0" bIns="0">
+            <a:spAutoFit/>
+          </a:bodyPr>
+          <a:lstStyle/>
+          <a:p>
+            <a:pPr algn="l">
+              <a:lnSpc>
+                <a:spcPct val="100000"/>
+              </a:lnSpc>
+              <a:spcBef>
+                <a:spcPts val="0"/>
+              </a:spcBef>
+              <a:spcAft>
+                <a:spcPts val="600"/>
+              </a:spcAft>
+            </a:pPr>
+            <a:r>
+              <a:rPr sz="1200" b="1">
+                <a:solidFill>
+                  <a:srgbClr val="6366F1"/>
+                </a:solidFill>
+                <a:latin typeface="NanumGothic"/>
+                <a:ea typeface="NanumGothic"/>
+                <a:cs typeface="NanumGothic"/>
+              </a:rPr>
+              <a:t>브릿지</a:t>
+            </a:r>
+          </a:p>
+        </p:txBody>
+      </p:sp>
+      <p:sp>
+        <p:nvSpPr>
+          <p:cNvPr id="5" name="TextBox 4"/>
+          <p:cNvSpPr txBox="1"/>
+          <p:nvPr/>
+        </p:nvSpPr>
+        <p:spPr>
+          <a:xfrm>
+            <a:off x="502920" y="713232"/>
+            <a:ext cx="11155680" cy="731520"/>
+          </a:xfrm>
+          <a:prstGeom prst="rect">
+            <a:avLst/>
+          </a:prstGeom>
+          <a:noFill/>
+        </p:spPr>
+        <p:txBody>
+          <a:bodyPr wrap="square" anchor="t" lIns="0" rIns="0" tIns="0" bIns="0">
+            <a:spAutoFit/>
+          </a:bodyPr>
+          <a:lstStyle/>
+          <a:p>
+            <a:pPr algn="l">
+              <a:lnSpc>
+                <a:spcPct val="100000"/>
+              </a:lnSpc>
+              <a:spcBef>
+                <a:spcPts val="0"/>
+              </a:spcBef>
+              <a:spcAft>
+                <a:spcPts val="600"/>
+              </a:spcAft>
+            </a:pPr>
+            <a:r>
+              <a:rPr sz="2700" b="1">
+                <a:solidFill>
+                  <a:srgbClr val="0F172A"/>
+                </a:solidFill>
+                <a:latin typeface="NanumSquare"/>
+                <a:ea typeface="NanumSquare"/>
+                <a:cs typeface="NanumSquare"/>
+              </a:rPr>
+              <a:t>LLM → 에이전트로 가는 길</a:t>
+            </a:r>
+          </a:p>
+        </p:txBody>
+      </p:sp>
+      <p:sp>
+        <p:nvSpPr>
+          <p:cNvPr id="6" name="Rectangle 5"/>
+          <p:cNvSpPr/>
+          <p:nvPr/>
+        </p:nvSpPr>
+        <p:spPr>
+          <a:xfrm>
+            <a:off x="521207" y="1417320"/>
+            <a:ext cx="1005840" cy="45720"/>
+          </a:xfrm>
+          <a:prstGeom prst="rect">
+            <a:avLst/>
+          </a:prstGeom>
+          <a:solidFill>
+            <a:srgbClr val="6366F1"/>
+          </a:solidFill>
+          <a:ln>
+            <a:noFill/>
+          </a:ln>
+          <a:effectLst/>
+        </p:spPr>
+        <p:style>
+          <a:lnRef idx="1">
+            <a:schemeClr val="accent1"/>
+          </a:lnRef>
+          <a:fillRef idx="3">
+            <a:schemeClr val="accent1"/>
+          </a:fillRef>
+          <a:effectRef idx="2">
+            <a:schemeClr val="accent1"/>
+          </a:effectRef>
+          <a:fontRef idx="minor">
+            <a:schemeClr val="lt1"/>
+          </a:fontRef>
+        </p:style>
+        <p:txBody>
+          <a:bodyPr rtlCol="0" anchor="ctr"/>
+          <a:lstStyle/>
+          <a:p>
+            <a:pPr algn="ctr"/>
+          </a:p>
+        </p:txBody>
+      </p:sp>
+      <p:sp>
+        <p:nvSpPr>
+          <p:cNvPr id="7" name="TextBox 6"/>
+          <p:cNvSpPr txBox="1"/>
+          <p:nvPr/>
+        </p:nvSpPr>
+        <p:spPr>
+          <a:xfrm>
+            <a:off x="502920" y="6419088"/>
+            <a:ext cx="7315200" cy="365760"/>
+          </a:xfrm>
+          <a:prstGeom prst="rect">
+            <a:avLst/>
+          </a:prstGeom>
+          <a:noFill/>
+        </p:spPr>
+        <p:txBody>
+          <a:bodyPr wrap="square" anchor="ctr" lIns="0" rIns="0" tIns="0" bIns="0">
+            <a:spAutoFit/>
+          </a:bodyPr>
+          <a:lstStyle/>
+          <a:p>
+            <a:pPr algn="l">
+              <a:lnSpc>
+                <a:spcPct val="100000"/>
+              </a:lnSpc>
+              <a:spcBef>
+                <a:spcPts val="0"/>
+              </a:spcBef>
+              <a:spcAft>
+                <a:spcPts val="600"/>
+              </a:spcAft>
+            </a:pPr>
+            <a:r>
+              <a:rPr sz="900" b="0">
+                <a:solidFill>
+                  <a:srgbClr val="64748B"/>
+                </a:solidFill>
+                <a:latin typeface="NanumGothic"/>
+                <a:ea typeface="NanumGothic"/>
+                <a:cs typeface="NanumGothic"/>
+              </a:rPr>
+              <a:t>AI 에이전트와 응용  ·  원광대학교 5일 교육</a:t>
+            </a:r>
+          </a:p>
+        </p:txBody>
+      </p:sp>
+      <p:sp>
+        <p:nvSpPr>
+          <p:cNvPr id="8" name="TextBox 7"/>
+          <p:cNvSpPr txBox="1"/>
+          <p:nvPr/>
+        </p:nvSpPr>
+        <p:spPr>
+          <a:xfrm>
+            <a:off x="10241280" y="6419088"/>
+            <a:ext cx="1463040" cy="365760"/>
+          </a:xfrm>
+          <a:prstGeom prst="rect">
+            <a:avLst/>
+          </a:prstGeom>
+          <a:noFill/>
+        </p:spPr>
+        <p:txBody>
+          <a:bodyPr wrap="square" anchor="ctr" lIns="0" rIns="0" tIns="0" bIns="0">
+            <a:spAutoFit/>
+          </a:bodyPr>
+          <a:lstStyle/>
+          <a:p>
+            <a:pPr algn="r">
+              <a:lnSpc>
+                <a:spcPct val="100000"/>
+              </a:lnSpc>
+              <a:spcBef>
+                <a:spcPts val="0"/>
+              </a:spcBef>
+              <a:spcAft>
+                <a:spcPts val="600"/>
+              </a:spcAft>
+            </a:pPr>
+            <a:r>
+              <a:rPr sz="900" b="1">
+                <a:solidFill>
+                  <a:srgbClr val="6366F1"/>
+                </a:solidFill>
+                <a:latin typeface="NanumGothic"/>
+                <a:ea typeface="NanumGothic"/>
+                <a:cs typeface="NanumGothic"/>
+              </a:rPr>
+              <a:t>Day 1 · 월</a:t>
+            </a:r>
+          </a:p>
+        </p:txBody>
+      </p:sp>
+      <p:sp>
+        <p:nvSpPr>
+          <p:cNvPr id="9" name="Oval 8"/>
+          <p:cNvSpPr/>
+          <p:nvPr/>
+        </p:nvSpPr>
+        <p:spPr>
+          <a:xfrm>
+            <a:off x="548640" y="1911096"/>
+            <a:ext cx="146304" cy="146304"/>
+          </a:xfrm>
+          <a:prstGeom prst="ellipse">
+            <a:avLst/>
+          </a:prstGeom>
+          <a:solidFill>
+            <a:srgbClr val="6366F1"/>
+          </a:solidFill>
+          <a:ln>
+            <a:noFill/>
+          </a:ln>
+          <a:effectLst/>
+        </p:spPr>
+        <p:style>
+          <a:lnRef idx="1">
+            <a:schemeClr val="accent1"/>
+          </a:lnRef>
+          <a:fillRef idx="3">
+            <a:schemeClr val="accent1"/>
+          </a:fillRef>
+          <a:effectRef idx="2">
+            <a:schemeClr val="accent1"/>
+          </a:effectRef>
+          <a:fontRef idx="minor">
+            <a:schemeClr val="lt1"/>
+          </a:fontRef>
+        </p:style>
+        <p:txBody>
+          <a:bodyPr rtlCol="0" anchor="ctr"/>
+          <a:lstStyle/>
+          <a:p>
+            <a:pPr algn="ctr"/>
+          </a:p>
+        </p:txBody>
+      </p:sp>
+      <p:sp>
+        <p:nvSpPr>
+          <p:cNvPr id="10" name="TextBox 9"/>
+          <p:cNvSpPr txBox="1"/>
+          <p:nvPr/>
+        </p:nvSpPr>
+        <p:spPr>
+          <a:xfrm>
+            <a:off x="868680" y="1828800"/>
+            <a:ext cx="10607040" cy="457200"/>
+          </a:xfrm>
+          <a:prstGeom prst="rect">
+            <a:avLst/>
+          </a:prstGeom>
+          <a:noFill/>
+        </p:spPr>
+        <p:txBody>
+          <a:bodyPr wrap="square" anchor="t" lIns="0" rIns="0" tIns="0" bIns="0">
+            <a:spAutoFit/>
+          </a:bodyPr>
+          <a:lstStyle/>
+          <a:p>
+            <a:pPr algn="l">
+              <a:lnSpc>
+                <a:spcPct val="100000"/>
+              </a:lnSpc>
+              <a:spcBef>
+                <a:spcPts val="0"/>
+              </a:spcBef>
+              <a:spcAft>
+                <a:spcPts val="600"/>
+              </a:spcAft>
+            </a:pPr>
+            <a:r>
+              <a:rPr sz="1600" b="1">
+                <a:solidFill>
+                  <a:srgbClr val="0F172A"/>
+                </a:solidFill>
+                <a:latin typeface="NanumGothic"/>
+                <a:ea typeface="NanumGothic"/>
+                <a:cs typeface="NanumGothic"/>
+              </a:rPr>
+              <a:t>LLM 단독의 한계</a:t>
+            </a:r>
+          </a:p>
+        </p:txBody>
+      </p:sp>
+      <p:sp>
+        <p:nvSpPr>
+          <p:cNvPr id="11" name="TextBox 10"/>
+          <p:cNvSpPr txBox="1"/>
+          <p:nvPr/>
+        </p:nvSpPr>
+        <p:spPr>
+          <a:xfrm>
+            <a:off x="868680" y="2212848"/>
+            <a:ext cx="10607040" cy="457200"/>
+          </a:xfrm>
+          <a:prstGeom prst="rect">
+            <a:avLst/>
+          </a:prstGeom>
+          <a:noFill/>
+        </p:spPr>
+        <p:txBody>
+          <a:bodyPr wrap="square" anchor="t" lIns="0" rIns="0" tIns="0" bIns="0">
+            <a:spAutoFit/>
+          </a:bodyPr>
+          <a:lstStyle/>
+          <a:p>
+            <a:pPr algn="l">
+              <a:lnSpc>
+                <a:spcPct val="100000"/>
+              </a:lnSpc>
+              <a:spcBef>
+                <a:spcPts val="0"/>
+              </a:spcBef>
+              <a:spcAft>
+                <a:spcPts val="600"/>
+              </a:spcAft>
+            </a:pPr>
+            <a:r>
+              <a:rPr sz="1300" b="0">
+                <a:solidFill>
+                  <a:srgbClr val="64748B"/>
+                </a:solidFill>
+                <a:latin typeface="NanumGothic"/>
+                <a:ea typeface="NanumGothic"/>
+                <a:cs typeface="NanumGothic"/>
+              </a:rPr>
+              <a:t>도구 없음 · 기억 없음 · 한 번의 응답으로 끝</a:t>
+            </a:r>
+          </a:p>
+        </p:txBody>
+      </p:sp>
+      <p:sp>
+        <p:nvSpPr>
+          <p:cNvPr id="12" name="Oval 11"/>
+          <p:cNvSpPr/>
+          <p:nvPr/>
+        </p:nvSpPr>
+        <p:spPr>
+          <a:xfrm>
+            <a:off x="548640" y="2779776"/>
+            <a:ext cx="146304" cy="146304"/>
+          </a:xfrm>
+          <a:prstGeom prst="ellipse">
+            <a:avLst/>
+          </a:prstGeom>
+          <a:solidFill>
+            <a:srgbClr val="6366F1"/>
+          </a:solidFill>
+          <a:ln>
+            <a:noFill/>
+          </a:ln>
+          <a:effectLst/>
+        </p:spPr>
+        <p:style>
+          <a:lnRef idx="1">
+            <a:schemeClr val="accent1"/>
+          </a:lnRef>
+          <a:fillRef idx="3">
+            <a:schemeClr val="accent1"/>
+          </a:fillRef>
+          <a:effectRef idx="2">
+            <a:schemeClr val="accent1"/>
+          </a:effectRef>
+          <a:fontRef idx="minor">
+            <a:schemeClr val="lt1"/>
+          </a:fontRef>
+        </p:style>
+        <p:txBody>
+          <a:bodyPr rtlCol="0" anchor="ctr"/>
+          <a:lstStyle/>
+          <a:p>
+            <a:pPr algn="ctr"/>
+          </a:p>
+        </p:txBody>
+      </p:sp>
+      <p:sp>
+        <p:nvSpPr>
+          <p:cNvPr id="13" name="TextBox 12"/>
+          <p:cNvSpPr txBox="1"/>
+          <p:nvPr/>
+        </p:nvSpPr>
+        <p:spPr>
+          <a:xfrm>
+            <a:off x="868680" y="2697480"/>
+            <a:ext cx="10607040" cy="457200"/>
+          </a:xfrm>
+          <a:prstGeom prst="rect">
+            <a:avLst/>
+          </a:prstGeom>
+          <a:noFill/>
+        </p:spPr>
+        <p:txBody>
+          <a:bodyPr wrap="square" anchor="t" lIns="0" rIns="0" tIns="0" bIns="0">
+            <a:spAutoFit/>
+          </a:bodyPr>
+          <a:lstStyle/>
+          <a:p>
+            <a:pPr algn="l">
+              <a:lnSpc>
+                <a:spcPct val="100000"/>
+              </a:lnSpc>
+              <a:spcBef>
+                <a:spcPts val="0"/>
+              </a:spcBef>
+              <a:spcAft>
+                <a:spcPts val="600"/>
+              </a:spcAft>
+            </a:pPr>
+            <a:r>
+              <a:rPr sz="1600" b="1">
+                <a:solidFill>
+                  <a:srgbClr val="0F172A"/>
+                </a:solidFill>
+                <a:latin typeface="NanumGothic"/>
+                <a:ea typeface="NanumGothic"/>
+                <a:cs typeface="NanumGothic"/>
+              </a:rPr>
+              <a:t>RAG·검색을 루프로 = 에이전트</a:t>
+            </a:r>
+          </a:p>
+        </p:txBody>
+      </p:sp>
+      <p:sp>
+        <p:nvSpPr>
+          <p:cNvPr id="14" name="TextBox 13"/>
+          <p:cNvSpPr txBox="1"/>
+          <p:nvPr/>
+        </p:nvSpPr>
+        <p:spPr>
+          <a:xfrm>
+            <a:off x="868680" y="3081528"/>
+            <a:ext cx="10607040" cy="457200"/>
+          </a:xfrm>
+          <a:prstGeom prst="rect">
+            <a:avLst/>
+          </a:prstGeom>
+          <a:noFill/>
+        </p:spPr>
+        <p:txBody>
+          <a:bodyPr wrap="square" anchor="t" lIns="0" rIns="0" tIns="0" bIns="0">
+            <a:spAutoFit/>
+          </a:bodyPr>
+          <a:lstStyle/>
+          <a:p>
+            <a:pPr algn="l">
+              <a:lnSpc>
+                <a:spcPct val="100000"/>
+              </a:lnSpc>
+              <a:spcBef>
+                <a:spcPts val="0"/>
+              </a:spcBef>
+              <a:spcAft>
+                <a:spcPts val="600"/>
+              </a:spcAft>
+            </a:pPr>
+            <a:r>
+              <a:rPr sz="1300" b="0">
+                <a:solidFill>
+                  <a:srgbClr val="64748B"/>
+                </a:solidFill>
+                <a:latin typeface="NanumGothic"/>
+                <a:ea typeface="NanumGothic"/>
+                <a:cs typeface="NanumGothic"/>
+              </a:rPr>
+              <a:t>찾고 → 검증하고 → 종합 — 리서치 에이전트로</a:t>
+            </a:r>
+          </a:p>
+        </p:txBody>
+      </p:sp>
+      <p:sp>
+        <p:nvSpPr>
+          <p:cNvPr id="15" name="Oval 14"/>
+          <p:cNvSpPr/>
+          <p:nvPr/>
+        </p:nvSpPr>
+        <p:spPr>
+          <a:xfrm>
+            <a:off x="548640" y="3648456"/>
+            <a:ext cx="146304" cy="146304"/>
+          </a:xfrm>
+          <a:prstGeom prst="ellipse">
+            <a:avLst/>
+          </a:prstGeom>
+          <a:solidFill>
+            <a:srgbClr val="6366F1"/>
+          </a:solidFill>
+          <a:ln>
+            <a:noFill/>
+          </a:ln>
+          <a:effectLst/>
+        </p:spPr>
+        <p:style>
+          <a:lnRef idx="1">
+            <a:schemeClr val="accent1"/>
+          </a:lnRef>
+          <a:fillRef idx="3">
+            <a:schemeClr val="accent1"/>
+          </a:fillRef>
+          <a:effectRef idx="2">
+            <a:schemeClr val="accent1"/>
+          </a:effectRef>
+          <a:fontRef idx="minor">
+            <a:schemeClr val="lt1"/>
+          </a:fontRef>
+        </p:style>
+        <p:txBody>
+          <a:bodyPr rtlCol="0" anchor="ctr"/>
+          <a:lstStyle/>
+          <a:p>
+            <a:pPr algn="ctr"/>
+          </a:p>
+        </p:txBody>
+      </p:sp>
+      <p:sp>
+        <p:nvSpPr>
+          <p:cNvPr id="16" name="TextBox 15"/>
+          <p:cNvSpPr txBox="1"/>
+          <p:nvPr/>
+        </p:nvSpPr>
+        <p:spPr>
+          <a:xfrm>
+            <a:off x="868680" y="3566160"/>
+            <a:ext cx="10607040" cy="457200"/>
+          </a:xfrm>
+          <a:prstGeom prst="rect">
+            <a:avLst/>
+          </a:prstGeom>
+          <a:noFill/>
+        </p:spPr>
+        <p:txBody>
+          <a:bodyPr wrap="square" anchor="t" lIns="0" rIns="0" tIns="0" bIns="0">
+            <a:spAutoFit/>
+          </a:bodyPr>
+          <a:lstStyle/>
+          <a:p>
+            <a:pPr algn="l">
+              <a:lnSpc>
+                <a:spcPct val="100000"/>
+              </a:lnSpc>
+              <a:spcBef>
+                <a:spcPts val="0"/>
+              </a:spcBef>
+              <a:spcAft>
+                <a:spcPts val="600"/>
+              </a:spcAft>
+            </a:pPr>
+            <a:r>
+              <a:rPr sz="1600" b="1">
+                <a:solidFill>
+                  <a:srgbClr val="0F172A"/>
+                </a:solidFill>
+                <a:latin typeface="NanumGothic"/>
+                <a:ea typeface="NanumGothic"/>
+                <a:cs typeface="NanumGothic"/>
+              </a:rPr>
+              <a:t>다음: Day 2</a:t>
+            </a:r>
+          </a:p>
+        </p:txBody>
+      </p:sp>
+      <p:sp>
+        <p:nvSpPr>
+          <p:cNvPr id="17" name="TextBox 16"/>
+          <p:cNvSpPr txBox="1"/>
+          <p:nvPr/>
+        </p:nvSpPr>
+        <p:spPr>
+          <a:xfrm>
+            <a:off x="868680" y="3950208"/>
+            <a:ext cx="10607040" cy="457200"/>
+          </a:xfrm>
+          <a:prstGeom prst="rect">
+            <a:avLst/>
+          </a:prstGeom>
+          <a:noFill/>
+        </p:spPr>
+        <p:txBody>
+          <a:bodyPr wrap="square" anchor="t" lIns="0" rIns="0" tIns="0" bIns="0">
+            <a:spAutoFit/>
+          </a:bodyPr>
+          <a:lstStyle/>
+          <a:p>
+            <a:pPr algn="l">
+              <a:lnSpc>
+                <a:spcPct val="100000"/>
+              </a:lnSpc>
+              <a:spcBef>
+                <a:spcPts val="0"/>
+              </a:spcBef>
+              <a:spcAft>
+                <a:spcPts val="600"/>
+              </a:spcAft>
+            </a:pPr>
+            <a:r>
+              <a:rPr sz="1300" b="0">
+                <a:solidFill>
+                  <a:srgbClr val="64748B"/>
+                </a:solidFill>
+                <a:latin typeface="NanumGothic"/>
+                <a:ea typeface="NanumGothic"/>
+                <a:cs typeface="NanumGothic"/>
+              </a:rPr>
+              <a:t>에이전트의 정의와 Claude Code 실습</a:t>
+            </a:r>
+          </a:p>
+        </p:txBody>
+      </p:sp>
+      <p:sp>
+        <p:nvSpPr>
+          <p:cNvPr id="18" name="Rounded Rectangle 17"/>
+          <p:cNvSpPr/>
+          <p:nvPr/>
+        </p:nvSpPr>
+        <p:spPr>
+          <a:xfrm>
+            <a:off x="502920" y="5532120"/>
+            <a:ext cx="11155680" cy="658368"/>
+          </a:xfrm>
+          <a:prstGeom prst="roundRect">
+            <a:avLst/>
+          </a:prstGeom>
+          <a:solidFill>
+            <a:srgbClr val="F1F5F9"/>
+          </a:solidFill>
+          <a:ln w="12700">
+            <a:solidFill>
+              <a:srgbClr val="E2E8F0"/>
+            </a:solidFill>
+          </a:ln>
+          <a:effectLst/>
+        </p:spPr>
+        <p:style>
+          <a:lnRef idx="1">
+            <a:schemeClr val="accent1"/>
+          </a:lnRef>
+          <a:fillRef idx="3">
+            <a:schemeClr val="accent1"/>
+          </a:fillRef>
+          <a:effectRef idx="2">
+            <a:schemeClr val="accent1"/>
+          </a:effectRef>
+          <a:fontRef idx="minor">
+            <a:schemeClr val="lt1"/>
+          </a:fontRef>
+        </p:style>
+        <p:txBody>
+          <a:bodyPr rtlCol="0" anchor="ctr"/>
+          <a:lstStyle/>
+          <a:p>
+            <a:pPr algn="ctr"/>
+          </a:p>
+        </p:txBody>
+      </p:sp>
+      <p:sp>
+        <p:nvSpPr>
+          <p:cNvPr id="19" name="TextBox 18"/>
+          <p:cNvSpPr txBox="1"/>
+          <p:nvPr/>
+        </p:nvSpPr>
+        <p:spPr>
+          <a:xfrm>
+            <a:off x="777240" y="5532120"/>
+            <a:ext cx="10607040" cy="658368"/>
+          </a:xfrm>
+          <a:prstGeom prst="rect">
+            <a:avLst/>
+          </a:prstGeom>
+          <a:noFill/>
+        </p:spPr>
+        <p:txBody>
+          <a:bodyPr wrap="square" anchor="ctr" lIns="0" rIns="0" tIns="0" bIns="0">
+            <a:spAutoFit/>
+          </a:bodyPr>
+          <a:lstStyle/>
+          <a:p>
+            <a:pPr algn="l">
+              <a:lnSpc>
+                <a:spcPct val="100000"/>
+              </a:lnSpc>
+              <a:spcBef>
+                <a:spcPts val="0"/>
+              </a:spcBef>
+              <a:spcAft>
+                <a:spcPts val="600"/>
+              </a:spcAft>
+            </a:pPr>
+            <a:r>
+              <a:rPr sz="1200" b="1">
+                <a:solidFill>
+                  <a:srgbClr val="6366F1"/>
+                </a:solidFill>
+                <a:latin typeface="NanumGothic"/>
+                <a:ea typeface="NanumGothic"/>
+                <a:cs typeface="NanumGothic"/>
+              </a:rPr>
+              <a:t>NOTE   </a:t>
+            </a:r>
+            <a:r>
+              <a:rPr sz="1300" b="0">
+                <a:solidFill>
+                  <a:srgbClr val="0F172A"/>
+                </a:solidFill>
+                <a:latin typeface="NanumGothic"/>
+                <a:ea typeface="NanumGothic"/>
+                <a:cs typeface="NanumGothic"/>
+              </a:rPr>
+              <a:t>오늘의 임베딩·RAG가 리서치 에이전트의 토대다</a:t>
+            </a:r>
+          </a:p>
+        </p:txBody>
+      </p:sp>
+    </p:spTree>
+  </p:cSld>
+  <p:clrMapOvr>
+    <a:masterClrMapping/>
+  </p:clrMapOvr>
+</p:sld>
+</file>
+
+<file path=ppt/slides/slide21.xml><?xml version="1.0" encoding="utf-8"?>
+<p:sld xmlns:a="http://schemas.openxmlformats.org/drawingml/2006/main" xmlns:p="http://schemas.openxmlformats.org/presentationml/2006/main" xmlns:r="http://schemas.openxmlformats.org/officeDocument/2006/relationships">
+  <p:cSld>
+    <p:spTree>
+      <p:nvGrpSpPr>
+        <p:cNvPr id="1" name=""/>
+        <p:cNvGrpSpPr/>
+        <p:nvPr/>
+      </p:nvGrpSpPr>
+      <p:grpSpPr/>
+      <p:sp>
+        <p:nvSpPr>
+          <p:cNvPr id="2" name="Rectangle 1"/>
+          <p:cNvSpPr/>
+          <p:nvPr/>
+        </p:nvSpPr>
+        <p:spPr>
+          <a:xfrm>
+            <a:off x="0" y="0"/>
+            <a:ext cx="12191695" cy="6858000"/>
+          </a:xfrm>
+          <a:prstGeom prst="rect">
+            <a:avLst/>
+          </a:prstGeom>
+          <a:solidFill>
+            <a:srgbClr val="FFFFFF"/>
+          </a:solidFill>
+          <a:ln>
+            <a:noFill/>
+          </a:ln>
+          <a:effectLst/>
+        </p:spPr>
+        <p:style>
+          <a:lnRef idx="1">
+            <a:schemeClr val="accent1"/>
+          </a:lnRef>
+          <a:fillRef idx="3">
+            <a:schemeClr val="accent1"/>
+          </a:fillRef>
+          <a:effectRef idx="2">
+            <a:schemeClr val="accent1"/>
+          </a:effectRef>
+          <a:fontRef idx="minor">
+            <a:schemeClr val="lt1"/>
+          </a:fontRef>
+        </p:style>
+        <p:txBody>
+          <a:bodyPr rtlCol="0" anchor="ctr"/>
+          <a:lstStyle/>
+          <a:p>
+            <a:pPr algn="ctr"/>
+          </a:p>
+        </p:txBody>
+      </p:sp>
+      <p:sp>
+        <p:nvSpPr>
+          <p:cNvPr id="3" name="Rectangle 2"/>
+          <p:cNvSpPr/>
+          <p:nvPr/>
+        </p:nvSpPr>
+        <p:spPr>
+          <a:xfrm>
+            <a:off x="0" y="0"/>
+            <a:ext cx="164592" cy="6858000"/>
+          </a:xfrm>
+          <a:prstGeom prst="rect">
+            <a:avLst/>
+          </a:prstGeom>
+          <a:solidFill>
+            <a:srgbClr val="6366F1"/>
+          </a:solidFill>
+          <a:ln>
+            <a:noFill/>
+          </a:ln>
+          <a:effectLst/>
+        </p:spPr>
+        <p:style>
+          <a:lnRef idx="1">
+            <a:schemeClr val="accent1"/>
+          </a:lnRef>
+          <a:fillRef idx="3">
+            <a:schemeClr val="accent1"/>
+          </a:fillRef>
+          <a:effectRef idx="2">
+            <a:schemeClr val="accent1"/>
+          </a:effectRef>
+          <a:fontRef idx="minor">
+            <a:schemeClr val="lt1"/>
+          </a:fontRef>
+        </p:style>
+        <p:txBody>
+          <a:bodyPr rtlCol="0" anchor="ctr"/>
+          <a:lstStyle/>
+          <a:p>
+            <a:pPr algn="ctr"/>
+          </a:p>
+        </p:txBody>
+      </p:sp>
+      <p:sp>
+        <p:nvSpPr>
+          <p:cNvPr id="4" name="TextBox 3"/>
+          <p:cNvSpPr txBox="1"/>
+          <p:nvPr/>
+        </p:nvSpPr>
+        <p:spPr>
+          <a:xfrm>
+            <a:off x="502920" y="384048"/>
+            <a:ext cx="10058400" cy="320040"/>
+          </a:xfrm>
+          <a:prstGeom prst="rect">
+            <a:avLst/>
+          </a:prstGeom>
+          <a:noFill/>
+        </p:spPr>
+        <p:txBody>
+          <a:bodyPr wrap="square" anchor="t" lIns="0" rIns="0" tIns="0" bIns="0">
+            <a:spAutoFit/>
+          </a:bodyPr>
+          <a:lstStyle/>
+          <a:p>
+            <a:pPr algn="l">
+              <a:lnSpc>
+                <a:spcPct val="100000"/>
+              </a:lnSpc>
+              <a:spcBef>
+                <a:spcPts val="0"/>
+              </a:spcBef>
+              <a:spcAft>
+                <a:spcPts val="600"/>
+              </a:spcAft>
+            </a:pPr>
+            <a:r>
+              <a:rPr sz="1200" b="1">
+                <a:solidFill>
+                  <a:srgbClr val="6366F1"/>
+                </a:solidFill>
+                <a:latin typeface="NanumGothic"/>
+                <a:ea typeface="NanumGothic"/>
+                <a:cs typeface="NanumGothic"/>
+              </a:rPr>
+              <a:t>SUMMARY</a:t>
+            </a:r>
+          </a:p>
+        </p:txBody>
+      </p:sp>
+      <p:sp>
+        <p:nvSpPr>
+          <p:cNvPr id="5" name="TextBox 4"/>
+          <p:cNvSpPr txBox="1"/>
+          <p:nvPr/>
+        </p:nvSpPr>
+        <p:spPr>
+          <a:xfrm>
+            <a:off x="502920" y="713232"/>
+            <a:ext cx="11155680" cy="731520"/>
+          </a:xfrm>
+          <a:prstGeom prst="rect">
+            <a:avLst/>
+          </a:prstGeom>
+          <a:noFill/>
+        </p:spPr>
+        <p:txBody>
+          <a:bodyPr wrap="square" anchor="t" lIns="0" rIns="0" tIns="0" bIns="0">
+            <a:spAutoFit/>
+          </a:bodyPr>
+          <a:lstStyle/>
+          <a:p>
+            <a:pPr algn="l">
+              <a:lnSpc>
+                <a:spcPct val="100000"/>
+              </a:lnSpc>
+              <a:spcBef>
+                <a:spcPts val="0"/>
+              </a:spcBef>
+              <a:spcAft>
+                <a:spcPts val="600"/>
+              </a:spcAft>
+            </a:pPr>
+            <a:r>
+              <a:rPr sz="2700" b="1">
+                <a:solidFill>
+                  <a:srgbClr val="0F172A"/>
+                </a:solidFill>
+                <a:latin typeface="NanumSquare"/>
+                <a:ea typeface="NanumSquare"/>
+                <a:cs typeface="NanumSquare"/>
+              </a:rPr>
+              <a:t>핵심 정리 및 다음 과정</a:t>
+            </a:r>
+          </a:p>
+        </p:txBody>
+      </p:sp>
+      <p:sp>
+        <p:nvSpPr>
+          <p:cNvPr id="6" name="Rectangle 5"/>
+          <p:cNvSpPr/>
+          <p:nvPr/>
+        </p:nvSpPr>
+        <p:spPr>
+          <a:xfrm>
+            <a:off x="521207" y="1417320"/>
+            <a:ext cx="1005840" cy="45720"/>
+          </a:xfrm>
+          <a:prstGeom prst="rect">
+            <a:avLst/>
+          </a:prstGeom>
+          <a:solidFill>
+            <a:srgbClr val="6366F1"/>
+          </a:solidFill>
+          <a:ln>
+            <a:noFill/>
+          </a:ln>
+          <a:effectLst/>
+        </p:spPr>
+        <p:style>
+          <a:lnRef idx="1">
+            <a:schemeClr val="accent1"/>
+          </a:lnRef>
+          <a:fillRef idx="3">
+            <a:schemeClr val="accent1"/>
+          </a:fillRef>
+          <a:effectRef idx="2">
+            <a:schemeClr val="accent1"/>
+          </a:effectRef>
+          <a:fontRef idx="minor">
+            <a:schemeClr val="lt1"/>
+          </a:fontRef>
+        </p:style>
+        <p:txBody>
+          <a:bodyPr rtlCol="0" anchor="ctr"/>
+          <a:lstStyle/>
+          <a:p>
+            <a:pPr algn="ctr"/>
+          </a:p>
+        </p:txBody>
+      </p:sp>
+      <p:sp>
+        <p:nvSpPr>
+          <p:cNvPr id="7" name="TextBox 6"/>
+          <p:cNvSpPr txBox="1"/>
+          <p:nvPr/>
+        </p:nvSpPr>
+        <p:spPr>
+          <a:xfrm>
+            <a:off x="502920" y="6419088"/>
+            <a:ext cx="7315200" cy="365760"/>
+          </a:xfrm>
+          <a:prstGeom prst="rect">
+            <a:avLst/>
+          </a:prstGeom>
+          <a:noFill/>
+        </p:spPr>
+        <p:txBody>
+          <a:bodyPr wrap="square" anchor="ctr" lIns="0" rIns="0" tIns="0" bIns="0">
+            <a:spAutoFit/>
+          </a:bodyPr>
+          <a:lstStyle/>
+          <a:p>
+            <a:pPr algn="l">
+              <a:lnSpc>
+                <a:spcPct val="100000"/>
+              </a:lnSpc>
+              <a:spcBef>
+                <a:spcPts val="0"/>
+              </a:spcBef>
+              <a:spcAft>
+                <a:spcPts val="600"/>
+              </a:spcAft>
+            </a:pPr>
+            <a:r>
+              <a:rPr sz="900" b="0">
+                <a:solidFill>
+                  <a:srgbClr val="64748B"/>
+                </a:solidFill>
+                <a:latin typeface="NanumGothic"/>
+                <a:ea typeface="NanumGothic"/>
+                <a:cs typeface="NanumGothic"/>
+              </a:rPr>
+              <a:t>AI 에이전트와 응용  ·  원광대학교 5일 교육</a:t>
+            </a:r>
+          </a:p>
+        </p:txBody>
+      </p:sp>
+      <p:sp>
+        <p:nvSpPr>
+          <p:cNvPr id="8" name="TextBox 7"/>
+          <p:cNvSpPr txBox="1"/>
+          <p:nvPr/>
+        </p:nvSpPr>
+        <p:spPr>
+          <a:xfrm>
+            <a:off x="10241280" y="6419088"/>
+            <a:ext cx="1463040" cy="365760"/>
+          </a:xfrm>
+          <a:prstGeom prst="rect">
+            <a:avLst/>
+          </a:prstGeom>
+          <a:noFill/>
+        </p:spPr>
+        <p:txBody>
+          <a:bodyPr wrap="square" anchor="ctr" lIns="0" rIns="0" tIns="0" bIns="0">
+            <a:spAutoFit/>
+          </a:bodyPr>
+          <a:lstStyle/>
+          <a:p>
+            <a:pPr algn="r">
+              <a:lnSpc>
+                <a:spcPct val="100000"/>
+              </a:lnSpc>
+              <a:spcBef>
+                <a:spcPts val="0"/>
+              </a:spcBef>
+              <a:spcAft>
+                <a:spcPts val="600"/>
+              </a:spcAft>
+            </a:pPr>
+            <a:r>
+              <a:rPr sz="900" b="1">
+                <a:solidFill>
+                  <a:srgbClr val="6366F1"/>
+                </a:solidFill>
+                <a:latin typeface="NanumGothic"/>
+                <a:ea typeface="NanumGothic"/>
+                <a:cs typeface="NanumGothic"/>
+              </a:rPr>
+              <a:t>Day 1 · 월</a:t>
+            </a:r>
+          </a:p>
+        </p:txBody>
+      </p:sp>
+      <p:sp>
+        <p:nvSpPr>
+          <p:cNvPr id="9" name="TextBox 8"/>
+          <p:cNvSpPr txBox="1"/>
+          <p:nvPr/>
+        </p:nvSpPr>
+        <p:spPr>
+          <a:xfrm>
+            <a:off x="548640" y="1783080"/>
+            <a:ext cx="6400800" cy="365760"/>
+          </a:xfrm>
+          <a:prstGeom prst="rect">
+            <a:avLst/>
+          </a:prstGeom>
+          <a:noFill/>
+        </p:spPr>
+        <p:txBody>
+          <a:bodyPr wrap="square" anchor="t" lIns="0" rIns="0" tIns="0" bIns="0">
+            <a:spAutoFit/>
+          </a:bodyPr>
+          <a:lstStyle/>
+          <a:p>
+            <a:pPr algn="l">
+              <a:lnSpc>
+                <a:spcPct val="100000"/>
+              </a:lnSpc>
+              <a:spcBef>
+                <a:spcPts val="0"/>
+              </a:spcBef>
+              <a:spcAft>
+                <a:spcPts val="600"/>
+              </a:spcAft>
+            </a:pPr>
+            <a:r>
+              <a:rPr sz="1500" b="1">
+                <a:solidFill>
+                  <a:srgbClr val="6366F1"/>
+                </a:solidFill>
+                <a:latin typeface="NanumSquare"/>
+                <a:ea typeface="NanumSquare"/>
+                <a:cs typeface="NanumSquare"/>
+              </a:rPr>
+              <a:t>핵심 정리</a:t>
+            </a:r>
+          </a:p>
+        </p:txBody>
+      </p:sp>
+      <p:sp>
+        <p:nvSpPr>
+          <p:cNvPr id="10" name="Oval 9"/>
+          <p:cNvSpPr/>
+          <p:nvPr/>
+        </p:nvSpPr>
+        <p:spPr>
+          <a:xfrm>
+            <a:off x="566928" y="2359152"/>
+            <a:ext cx="146304" cy="146304"/>
+          </a:xfrm>
+          <a:prstGeom prst="ellipse">
+            <a:avLst/>
+          </a:prstGeom>
+          <a:solidFill>
+            <a:srgbClr val="6366F1"/>
+          </a:solidFill>
+          <a:ln>
+            <a:noFill/>
+          </a:ln>
+          <a:effectLst/>
+        </p:spPr>
+        <p:style>
+          <a:lnRef idx="1">
+            <a:schemeClr val="accent1"/>
+          </a:lnRef>
+          <a:fillRef idx="3">
+            <a:schemeClr val="accent1"/>
+          </a:fillRef>
+          <a:effectRef idx="2">
+            <a:schemeClr val="accent1"/>
+          </a:effectRef>
+          <a:fontRef idx="minor">
+            <a:schemeClr val="lt1"/>
+          </a:fontRef>
+        </p:style>
+        <p:txBody>
+          <a:bodyPr rtlCol="0" anchor="ctr"/>
+          <a:lstStyle/>
+          <a:p>
+            <a:pPr algn="ctr"/>
+          </a:p>
+        </p:txBody>
+      </p:sp>
+      <p:sp>
+        <p:nvSpPr>
+          <p:cNvPr id="11" name="TextBox 10"/>
+          <p:cNvSpPr txBox="1"/>
+          <p:nvPr/>
+        </p:nvSpPr>
+        <p:spPr>
+          <a:xfrm>
+            <a:off x="868680" y="2286000"/>
+            <a:ext cx="6400800" cy="548640"/>
+          </a:xfrm>
+          <a:prstGeom prst="rect">
+            <a:avLst/>
+          </a:prstGeom>
+          <a:noFill/>
+        </p:spPr>
+        <p:txBody>
+          <a:bodyPr wrap="square" anchor="t" lIns="0" rIns="0" tIns="0" bIns="0">
+            <a:spAutoFit/>
+          </a:bodyPr>
+          <a:lstStyle/>
+          <a:p>
+            <a:pPr algn="l">
+              <a:lnSpc>
+                <a:spcPct val="105000"/>
+              </a:lnSpc>
+              <a:spcBef>
+                <a:spcPts val="0"/>
+              </a:spcBef>
+              <a:spcAft>
+                <a:spcPts val="600"/>
+              </a:spcAft>
+            </a:pPr>
+            <a:r>
+              <a:rPr sz="1500" b="0">
+                <a:solidFill>
+                  <a:srgbClr val="0F172A"/>
+                </a:solidFill>
+                <a:latin typeface="NanumGothic"/>
+                <a:ea typeface="NanumGothic"/>
+                <a:cs typeface="NanumGothic"/>
+              </a:rPr>
+              <a:t>LLM의 핵심은 '다음 토큰 예측' — 확률적 생성이다</a:t>
+            </a:r>
+          </a:p>
+        </p:txBody>
+      </p:sp>
+      <p:sp>
+        <p:nvSpPr>
+          <p:cNvPr id="12" name="Oval 11"/>
+          <p:cNvSpPr/>
+          <p:nvPr/>
+        </p:nvSpPr>
+        <p:spPr>
+          <a:xfrm>
+            <a:off x="566928" y="2999232"/>
+            <a:ext cx="146304" cy="146304"/>
+          </a:xfrm>
+          <a:prstGeom prst="ellipse">
+            <a:avLst/>
+          </a:prstGeom>
+          <a:solidFill>
+            <a:srgbClr val="6366F1"/>
+          </a:solidFill>
+          <a:ln>
+            <a:noFill/>
+          </a:ln>
+          <a:effectLst/>
+        </p:spPr>
+        <p:style>
+          <a:lnRef idx="1">
+            <a:schemeClr val="accent1"/>
+          </a:lnRef>
+          <a:fillRef idx="3">
+            <a:schemeClr val="accent1"/>
+          </a:fillRef>
+          <a:effectRef idx="2">
+            <a:schemeClr val="accent1"/>
+          </a:effectRef>
+          <a:fontRef idx="minor">
+            <a:schemeClr val="lt1"/>
+          </a:fontRef>
+        </p:style>
+        <p:txBody>
+          <a:bodyPr rtlCol="0" anchor="ctr"/>
+          <a:lstStyle/>
+          <a:p>
+            <a:pPr algn="ctr"/>
+          </a:p>
+        </p:txBody>
+      </p:sp>
+      <p:sp>
+        <p:nvSpPr>
+          <p:cNvPr id="13" name="TextBox 12"/>
+          <p:cNvSpPr txBox="1"/>
+          <p:nvPr/>
+        </p:nvSpPr>
+        <p:spPr>
+          <a:xfrm>
+            <a:off x="868680" y="2926080"/>
+            <a:ext cx="6400800" cy="548640"/>
+          </a:xfrm>
+          <a:prstGeom prst="rect">
+            <a:avLst/>
+          </a:prstGeom>
+          <a:noFill/>
+        </p:spPr>
+        <p:txBody>
+          <a:bodyPr wrap="square" anchor="t" lIns="0" rIns="0" tIns="0" bIns="0">
+            <a:spAutoFit/>
+          </a:bodyPr>
+          <a:lstStyle/>
+          <a:p>
+            <a:pPr algn="l">
+              <a:lnSpc>
+                <a:spcPct val="105000"/>
+              </a:lnSpc>
+              <a:spcBef>
+                <a:spcPts val="0"/>
+              </a:spcBef>
+              <a:spcAft>
+                <a:spcPts val="600"/>
+              </a:spcAft>
+            </a:pPr>
+            <a:r>
+              <a:rPr sz="1500" b="0">
+                <a:solidFill>
+                  <a:srgbClr val="0F172A"/>
+                </a:solidFill>
+                <a:latin typeface="NanumGothic"/>
+                <a:ea typeface="NanumGothic"/>
+                <a:cs typeface="NanumGothic"/>
+              </a:rPr>
+              <a:t>임베딩·RAG로 외부 지식과 결합하면 환각↓·최신성↑ (리서치 에이전트의 토대)</a:t>
+            </a:r>
+          </a:p>
+        </p:txBody>
+      </p:sp>
+      <p:sp>
+        <p:nvSpPr>
+          <p:cNvPr id="14" name="Oval 13"/>
+          <p:cNvSpPr/>
+          <p:nvPr/>
+        </p:nvSpPr>
+        <p:spPr>
+          <a:xfrm>
+            <a:off x="566928" y="3639312"/>
+            <a:ext cx="146304" cy="146304"/>
+          </a:xfrm>
+          <a:prstGeom prst="ellipse">
+            <a:avLst/>
+          </a:prstGeom>
+          <a:solidFill>
+            <a:srgbClr val="6366F1"/>
+          </a:solidFill>
+          <a:ln>
+            <a:noFill/>
+          </a:ln>
+          <a:effectLst/>
+        </p:spPr>
+        <p:style>
+          <a:lnRef idx="1">
+            <a:schemeClr val="accent1"/>
+          </a:lnRef>
+          <a:fillRef idx="3">
+            <a:schemeClr val="accent1"/>
+          </a:fillRef>
+          <a:effectRef idx="2">
+            <a:schemeClr val="accent1"/>
+          </a:effectRef>
+          <a:fontRef idx="minor">
+            <a:schemeClr val="lt1"/>
+          </a:fontRef>
+        </p:style>
+        <p:txBody>
+          <a:bodyPr rtlCol="0" anchor="ctr"/>
+          <a:lstStyle/>
+          <a:p>
+            <a:pPr algn="ctr"/>
+          </a:p>
+        </p:txBody>
+      </p:sp>
+      <p:sp>
+        <p:nvSpPr>
+          <p:cNvPr id="15" name="TextBox 14"/>
+          <p:cNvSpPr txBox="1"/>
+          <p:nvPr/>
+        </p:nvSpPr>
+        <p:spPr>
+          <a:xfrm>
+            <a:off x="868680" y="3566160"/>
+            <a:ext cx="6400800" cy="548640"/>
+          </a:xfrm>
+          <a:prstGeom prst="rect">
+            <a:avLst/>
+          </a:prstGeom>
+          <a:noFill/>
+        </p:spPr>
+        <p:txBody>
+          <a:bodyPr wrap="square" anchor="t" lIns="0" rIns="0" tIns="0" bIns="0">
+            <a:spAutoFit/>
+          </a:bodyPr>
+          <a:lstStyle/>
+          <a:p>
+            <a:pPr algn="l">
+              <a:lnSpc>
+                <a:spcPct val="105000"/>
+              </a:lnSpc>
+              <a:spcBef>
+                <a:spcPts val="0"/>
+              </a:spcBef>
+              <a:spcAft>
+                <a:spcPts val="600"/>
+              </a:spcAft>
+            </a:pPr>
+            <a:r>
+              <a:rPr sz="1500" b="0">
+                <a:solidFill>
+                  <a:srgbClr val="0F172A"/>
+                </a:solidFill>
+                <a:latin typeface="NanumGothic"/>
+                <a:ea typeface="NanumGothic"/>
+                <a:cs typeface="NanumGothic"/>
+              </a:rPr>
+              <a:t>LLM은 한계가 있다 → 도구·검색·반복(에이전트)이 필요하다</a:t>
+            </a:r>
+          </a:p>
+        </p:txBody>
+      </p:sp>
+      <p:sp>
+        <p:nvSpPr>
+          <p:cNvPr id="16" name="Rounded Rectangle 15"/>
+          <p:cNvSpPr/>
+          <p:nvPr/>
+        </p:nvSpPr>
+        <p:spPr>
+          <a:xfrm>
+            <a:off x="7589520" y="1783080"/>
+            <a:ext cx="4069080" cy="4023360"/>
+          </a:xfrm>
+          <a:prstGeom prst="roundRect">
+            <a:avLst/>
+          </a:prstGeom>
+          <a:solidFill>
+            <a:srgbClr val="F8FAFC"/>
+          </a:solidFill>
+          <a:ln w="12700">
+            <a:solidFill>
+              <a:srgbClr val="E2E8F0"/>
+            </a:solidFill>
+          </a:ln>
+          <a:effectLst/>
+        </p:spPr>
+        <p:style>
+          <a:lnRef idx="1">
+            <a:schemeClr val="accent1"/>
+          </a:lnRef>
+          <a:fillRef idx="3">
+            <a:schemeClr val="accent1"/>
+          </a:fillRef>
+          <a:effectRef idx="2">
+            <a:schemeClr val="accent1"/>
+          </a:effectRef>
+          <a:fontRef idx="minor">
+            <a:schemeClr val="lt1"/>
+          </a:fontRef>
+        </p:style>
+        <p:txBody>
+          <a:bodyPr rtlCol="0" anchor="ctr"/>
+          <a:lstStyle/>
+          <a:p>
+            <a:pPr algn="ctr"/>
+          </a:p>
+        </p:txBody>
+      </p:sp>
+      <p:sp>
+        <p:nvSpPr>
+          <p:cNvPr id="17" name="TextBox 16"/>
+          <p:cNvSpPr txBox="1"/>
+          <p:nvPr/>
+        </p:nvSpPr>
+        <p:spPr>
+          <a:xfrm>
+            <a:off x="7863840" y="2011680"/>
+            <a:ext cx="3566160" cy="457200"/>
+          </a:xfrm>
+          <a:prstGeom prst="rect">
+            <a:avLst/>
+          </a:prstGeom>
+          <a:noFill/>
+        </p:spPr>
+        <p:txBody>
+          <a:bodyPr wrap="square" anchor="t" lIns="0" rIns="0" tIns="0" bIns="0">
+            <a:spAutoFit/>
+          </a:bodyPr>
+          <a:lstStyle/>
+          <a:p>
+            <a:pPr algn="l">
+              <a:lnSpc>
+                <a:spcPct val="100000"/>
+              </a:lnSpc>
+              <a:spcBef>
+                <a:spcPts val="0"/>
+              </a:spcBef>
+              <a:spcAft>
+                <a:spcPts val="600"/>
+              </a:spcAft>
+            </a:pPr>
+            <a:r>
+              <a:rPr sz="1500" b="1">
+                <a:solidFill>
+                  <a:srgbClr val="0EA5E9"/>
+                </a:solidFill>
+                <a:latin typeface="NanumSquare"/>
+                <a:ea typeface="NanumSquare"/>
+                <a:cs typeface="NanumSquare"/>
+              </a:rPr>
+              <a:t>다음 과정 — Day 2</a:t>
+            </a:r>
+          </a:p>
+        </p:txBody>
+      </p:sp>
+      <p:sp>
+        <p:nvSpPr>
+          <p:cNvPr id="18" name="TextBox 17"/>
+          <p:cNvSpPr txBox="1"/>
+          <p:nvPr/>
+        </p:nvSpPr>
+        <p:spPr>
+          <a:xfrm>
+            <a:off x="7863840" y="2606040"/>
+            <a:ext cx="3520440" cy="3017520"/>
+          </a:xfrm>
+          <a:prstGeom prst="rect">
+            <a:avLst/>
+          </a:prstGeom>
+          <a:noFill/>
+        </p:spPr>
+        <p:txBody>
+          <a:bodyPr wrap="square" anchor="t" lIns="0" rIns="0" tIns="0" bIns="0">
+            <a:spAutoFit/>
+          </a:bodyPr>
+          <a:lstStyle/>
+          <a:p>
+            <a:pPr algn="l">
+              <a:lnSpc>
+                <a:spcPct val="125000"/>
+              </a:lnSpc>
+              <a:spcBef>
+                <a:spcPts val="0"/>
+              </a:spcBef>
+              <a:spcAft>
+                <a:spcPts val="600"/>
+              </a:spcAft>
+            </a:pPr>
+            <a:r>
+              <a:rPr sz="1400" b="0">
+                <a:solidFill>
+                  <a:srgbClr val="0F172A"/>
+                </a:solidFill>
+                <a:latin typeface="NanumGothic"/>
+                <a:ea typeface="NanumGothic"/>
+                <a:cs typeface="NanumGothic"/>
+              </a:rPr>
+              <a:t>AI 에이전트의 정의(LLM+tools+loop)와 리서치 에이전트 개요를 배우고, Python과 Claude Code를 설치·설정합니다.</a:t>
+            </a:r>
+          </a:p>
+        </p:txBody>
+      </p:sp>
+    </p:spTree>
+  </p:cSld>
+  <p:clrMapOvr>
+    <a:masterClrMapping/>
+  </p:clrMapOvr>
+</p:sld>
+</file>
+
 <file path=ppt/slides/slide3.xml><?xml version="1.0" encoding="utf-8"?>
 <p:sld xmlns:a="http://schemas.openxmlformats.org/drawingml/2006/main" xmlns:p="http://schemas.openxmlformats.org/presentationml/2006/main" xmlns:r="http://schemas.openxmlformats.org/officeDocument/2006/relationships">
   <p:cSld>
@@ -12319,7 +16190,7 @@
                 <a:ea typeface="NanumGothic"/>
                 <a:cs typeface="NanumGothic"/>
               </a:rPr>
-              <a:t>LLM이란 무엇인가</a:t>
+              <a:t>LLM이란 + 토큰·예측</a:t>
             </a:r>
           </a:p>
         </p:txBody>
@@ -12503,7 +16374,7 @@
                 <a:ea typeface="NanumGothic"/>
                 <a:cs typeface="NanumGothic"/>
               </a:rPr>
-              <a:t>토큰화·예측·생성</a:t>
+              <a:t>학습: 사전학습 · 정렬</a:t>
             </a:r>
           </a:p>
         </p:txBody>
@@ -12687,7 +16558,7 @@
                 <a:ea typeface="NanumGothic"/>
                 <a:cs typeface="NanumGothic"/>
               </a:rPr>
-              <a:t>학습 ① 사전학습</a:t>
+              <a:t>추론(사고) 모델</a:t>
             </a:r>
           </a:p>
         </p:txBody>
@@ -12871,7 +16742,7 @@
                 <a:ea typeface="NanumGothic"/>
                 <a:cs typeface="NanumGothic"/>
               </a:rPr>
-              <a:t>학습 ② 정렬(alignment)</a:t>
+              <a:t>임베딩 &amp; 의미 검색</a:t>
             </a:r>
           </a:p>
         </p:txBody>
@@ -13055,7 +16926,7 @@
                 <a:ea typeface="NanumGothic"/>
                 <a:cs typeface="NanumGothic"/>
               </a:rPr>
-              <a:t>생성 제어 — 같은 모델, 다른 출력</a:t>
+              <a:t>RAG — 검색 증강 생성</a:t>
             </a:r>
           </a:p>
         </p:txBody>
@@ -13239,7 +17110,7 @@
                 <a:ea typeface="NanumGothic"/>
                 <a:cs typeface="NanumGothic"/>
               </a:rPr>
-              <a:t>프롬프트가 동작을 바꾼다</a:t>
+              <a:t>프롬프트 엔지니어링</a:t>
             </a:r>
           </a:p>
         </p:txBody>
@@ -13423,7 +17294,7 @@
                 <a:ea typeface="NanumGothic"/>
                 <a:cs typeface="NanumGothic"/>
               </a:rPr>
-              <a:t>프롬프트 기법</a:t>
+              <a:t>생성 제어 · 컨텍스트 윈도우</a:t>
             </a:r>
           </a:p>
         </p:txBody>
@@ -13607,7 +17478,7 @@
                 <a:ea typeface="NanumGothic"/>
                 <a:cs typeface="NanumGothic"/>
               </a:rPr>
-              <a:t>컨텍스트 윈도우</a:t>
+              <a:t>능력과 한계 · 환각</a:t>
             </a:r>
           </a:p>
         </p:txBody>
@@ -13791,7 +17662,7 @@
                 <a:ea typeface="NanumGothic"/>
                 <a:cs typeface="NanumGothic"/>
               </a:rPr>
-              <a:t>능력과 한계 / 환각</a:t>
+              <a:t>모델 선택</a:t>
             </a:r>
           </a:p>
         </p:txBody>
@@ -14404,7 +18275,7 @@
                 <a:ea typeface="NanumGothic"/>
                 <a:cs typeface="NanumGothic"/>
               </a:rPr>
-              <a:t>LLM이 '무엇을' 하는지</a:t>
+              <a:t>LLM의 작동 원리</a:t>
             </a:r>
           </a:p>
         </p:txBody>
@@ -14451,7 +18322,7 @@
                 <a:ea typeface="NanumGothic"/>
                 <a:cs typeface="NanumGothic"/>
               </a:rPr>
-              <a:t>다음 토큰 예측이라는 단순한 원리</a:t>
+              <a:t>토큰 예측 · 학습 · 추론</a:t>
             </a:r>
           </a:p>
         </p:txBody>
@@ -14542,7 +18413,7 @@
                 <a:ea typeface="NanumGothic"/>
                 <a:cs typeface="NanumGothic"/>
               </a:rPr>
-              <a:t>'어떻게' 동작을 바꾸는지</a:t>
+              <a:t>외부 지식과 결합</a:t>
             </a:r>
           </a:p>
         </p:txBody>
@@ -14589,7 +18460,7 @@
                 <a:ea typeface="NanumGothic"/>
                 <a:cs typeface="NanumGothic"/>
               </a:rPr>
-              <a:t>프롬프트와 컨텍스트로 출력을 제어</a:t>
+              <a:t>임베딩·의미 검색·RAG → 리서치 에이전트의 토대</a:t>
             </a:r>
           </a:p>
         </p:txBody>
@@ -14680,7 +18551,7 @@
                 <a:ea typeface="NanumGothic"/>
                 <a:cs typeface="NanumGothic"/>
               </a:rPr>
-              <a:t>능력과 한계를 구분</a:t>
+              <a:t>제어와 한계</a:t>
             </a:r>
           </a:p>
         </p:txBody>
@@ -14727,7 +18598,7 @@
                 <a:ea typeface="NanumGothic"/>
                 <a:cs typeface="NanumGothic"/>
               </a:rPr>
-              <a:t>환각·최신성 등 실무에서 주의할 점</a:t>
+              <a:t>프롬프트 · 모델 선택 · 환각 등 주의점</a:t>
             </a:r>
           </a:p>
         </p:txBody>

--- a/slides/day1.pptx
+++ b/slides/day1.pptx
@@ -7480,6 +7480,110 @@
           </a:p>
         </p:txBody>
       </p:sp>
+      <p:sp>
+        <p:nvSpPr>
+          <p:cNvPr id="18" name="Rounded Rectangle 17"/>
+          <p:cNvSpPr/>
+          <p:nvPr/>
+        </p:nvSpPr>
+        <p:spPr>
+          <a:xfrm>
+            <a:off x="502920" y="5532120"/>
+            <a:ext cx="11155680" cy="658368"/>
+          </a:xfrm>
+          <a:prstGeom prst="roundRect">
+            <a:avLst/>
+          </a:prstGeom>
+          <a:solidFill>
+            <a:srgbClr val="F1F5F9"/>
+          </a:solidFill>
+          <a:ln w="12700">
+            <a:solidFill>
+              <a:srgbClr val="E2E8F0"/>
+            </a:solidFill>
+          </a:ln>
+          <a:effectLst/>
+        </p:spPr>
+        <p:style>
+          <a:lnRef idx="1">
+            <a:schemeClr val="accent1"/>
+          </a:lnRef>
+          <a:fillRef idx="3">
+            <a:schemeClr val="accent1"/>
+          </a:fillRef>
+          <a:effectRef idx="2">
+            <a:schemeClr val="accent1"/>
+          </a:effectRef>
+          <a:fontRef idx="minor">
+            <a:schemeClr val="lt1"/>
+          </a:fontRef>
+        </p:style>
+        <p:txBody>
+          <a:bodyPr rtlCol="0" anchor="ctr"/>
+          <a:lstStyle/>
+          <a:p>
+            <a:pPr algn="ctr"/>
+          </a:p>
+        </p:txBody>
+      </p:sp>
+      <p:sp>
+        <p:nvSpPr>
+          <p:cNvPr id="19" name="TextBox 18"/>
+          <p:cNvSpPr txBox="1"/>
+          <p:nvPr/>
+        </p:nvSpPr>
+        <p:spPr>
+          <a:xfrm>
+            <a:off x="777240" y="5532120"/>
+            <a:ext cx="10607040" cy="658368"/>
+          </a:xfrm>
+          <a:prstGeom prst="rect">
+            <a:avLst/>
+          </a:prstGeom>
+          <a:noFill/>
+        </p:spPr>
+        <p:txBody>
+          <a:bodyPr wrap="square" anchor="ctr" lIns="0" rIns="0" tIns="0" bIns="0">
+            <a:spAutoFit/>
+          </a:bodyPr>
+          <a:lstStyle/>
+          <a:p>
+            <a:pPr algn="l">
+              <a:lnSpc>
+                <a:spcPct val="100000"/>
+              </a:lnSpc>
+              <a:spcBef>
+                <a:spcPts val="0"/>
+              </a:spcBef>
+              <a:spcAft>
+                <a:spcPts val="600"/>
+              </a:spcAft>
+            </a:pPr>
+            <a:r>
+              <a:rPr sz="1200" b="1">
+                <a:solidFill>
+                  <a:srgbClr val="6366F1"/>
+                </a:solidFill>
+                <a:latin typeface="NanumGothic"/>
+                <a:ea typeface="NanumGothic"/>
+                <a:cs typeface="NanumGothic"/>
+              </a:rPr>
+              <a:t>NOTE   </a:t>
+            </a:r>
+            <a:r>
+              <a:rPr sz="1300" b="0">
+                <a:solidFill>
+                  <a:srgbClr val="0F172A"/>
+                </a:solidFill>
+                <a:latin typeface="NanumGothic"/>
+                <a:ea typeface="NanumGothic"/>
+                <a:cs typeface="NanumGothic"/>
+              </a:rPr>
+              <a:t>비교: '코딩 도와줘' vs 'CSV 항목별 합계 코드 만들고 실행·확인해줘'</a:t>
+            </a:r>
+          </a:p>
+        </p:txBody>
+      </p:sp>
     </p:spTree>
   </p:cSld>
   <p:clrMapOvr>
@@ -9736,6 +9840,110 @@
           </a:p>
         </p:txBody>
       </p:sp>
+      <p:sp>
+        <p:nvSpPr>
+          <p:cNvPr id="18" name="Rounded Rectangle 17"/>
+          <p:cNvSpPr/>
+          <p:nvPr/>
+        </p:nvSpPr>
+        <p:spPr>
+          <a:xfrm>
+            <a:off x="502920" y="5532120"/>
+            <a:ext cx="11155680" cy="658368"/>
+          </a:xfrm>
+          <a:prstGeom prst="roundRect">
+            <a:avLst/>
+          </a:prstGeom>
+          <a:solidFill>
+            <a:srgbClr val="F1F5F9"/>
+          </a:solidFill>
+          <a:ln w="12700">
+            <a:solidFill>
+              <a:srgbClr val="E2E8F0"/>
+            </a:solidFill>
+          </a:ln>
+          <a:effectLst/>
+        </p:spPr>
+        <p:style>
+          <a:lnRef idx="1">
+            <a:schemeClr val="accent1"/>
+          </a:lnRef>
+          <a:fillRef idx="3">
+            <a:schemeClr val="accent1"/>
+          </a:fillRef>
+          <a:effectRef idx="2">
+            <a:schemeClr val="accent1"/>
+          </a:effectRef>
+          <a:fontRef idx="minor">
+            <a:schemeClr val="lt1"/>
+          </a:fontRef>
+        </p:style>
+        <p:txBody>
+          <a:bodyPr rtlCol="0" anchor="ctr"/>
+          <a:lstStyle/>
+          <a:p>
+            <a:pPr algn="ctr"/>
+          </a:p>
+        </p:txBody>
+      </p:sp>
+      <p:sp>
+        <p:nvSpPr>
+          <p:cNvPr id="19" name="TextBox 18"/>
+          <p:cNvSpPr txBox="1"/>
+          <p:nvPr/>
+        </p:nvSpPr>
+        <p:spPr>
+          <a:xfrm>
+            <a:off x="777240" y="5532120"/>
+            <a:ext cx="10607040" cy="658368"/>
+          </a:xfrm>
+          <a:prstGeom prst="rect">
+            <a:avLst/>
+          </a:prstGeom>
+          <a:noFill/>
+        </p:spPr>
+        <p:txBody>
+          <a:bodyPr wrap="square" anchor="ctr" lIns="0" rIns="0" tIns="0" bIns="0">
+            <a:spAutoFit/>
+          </a:bodyPr>
+          <a:lstStyle/>
+          <a:p>
+            <a:pPr algn="l">
+              <a:lnSpc>
+                <a:spcPct val="100000"/>
+              </a:lnSpc>
+              <a:spcBef>
+                <a:spcPts val="0"/>
+              </a:spcBef>
+              <a:spcAft>
+                <a:spcPts val="600"/>
+              </a:spcAft>
+            </a:pPr>
+            <a:r>
+              <a:rPr sz="1200" b="1">
+                <a:solidFill>
+                  <a:srgbClr val="6366F1"/>
+                </a:solidFill>
+                <a:latin typeface="NanumGothic"/>
+                <a:ea typeface="NanumGothic"/>
+                <a:cs typeface="NanumGothic"/>
+              </a:rPr>
+              <a:t>NOTE   </a:t>
+            </a:r>
+            <a:r>
+              <a:rPr sz="1300" b="0">
+                <a:solidFill>
+                  <a:srgbClr val="0F172A"/>
+                </a:solidFill>
+                <a:latin typeface="NanumGothic"/>
+                <a:ea typeface="NanumGothic"/>
+                <a:cs typeface="NanumGothic"/>
+              </a:rPr>
+              <a:t>긴 문서를 통째로 넣기보다, 검색으로 필요한 부분만 → RAG의 이유</a:t>
+            </a:r>
+          </a:p>
+        </p:txBody>
+      </p:sp>
     </p:spTree>
   </p:cSld>
   <p:clrMapOvr>
@@ -11564,6 +11772,110 @@
           </a:p>
         </p:txBody>
       </p:sp>
+      <p:sp>
+        <p:nvSpPr>
+          <p:cNvPr id="18" name="Rounded Rectangle 17"/>
+          <p:cNvSpPr/>
+          <p:nvPr/>
+        </p:nvSpPr>
+        <p:spPr>
+          <a:xfrm>
+            <a:off x="502920" y="5532120"/>
+            <a:ext cx="11155680" cy="658368"/>
+          </a:xfrm>
+          <a:prstGeom prst="roundRect">
+            <a:avLst/>
+          </a:prstGeom>
+          <a:solidFill>
+            <a:srgbClr val="F1F5F9"/>
+          </a:solidFill>
+          <a:ln w="12700">
+            <a:solidFill>
+              <a:srgbClr val="E2E8F0"/>
+            </a:solidFill>
+          </a:ln>
+          <a:effectLst/>
+        </p:spPr>
+        <p:style>
+          <a:lnRef idx="1">
+            <a:schemeClr val="accent1"/>
+          </a:lnRef>
+          <a:fillRef idx="3">
+            <a:schemeClr val="accent1"/>
+          </a:fillRef>
+          <a:effectRef idx="2">
+            <a:schemeClr val="accent1"/>
+          </a:effectRef>
+          <a:fontRef idx="minor">
+            <a:schemeClr val="lt1"/>
+          </a:fontRef>
+        </p:style>
+        <p:txBody>
+          <a:bodyPr rtlCol="0" anchor="ctr"/>
+          <a:lstStyle/>
+          <a:p>
+            <a:pPr algn="ctr"/>
+          </a:p>
+        </p:txBody>
+      </p:sp>
+      <p:sp>
+        <p:nvSpPr>
+          <p:cNvPr id="19" name="TextBox 18"/>
+          <p:cNvSpPr txBox="1"/>
+          <p:nvPr/>
+        </p:nvSpPr>
+        <p:spPr>
+          <a:xfrm>
+            <a:off x="777240" y="5532120"/>
+            <a:ext cx="10607040" cy="658368"/>
+          </a:xfrm>
+          <a:prstGeom prst="rect">
+            <a:avLst/>
+          </a:prstGeom>
+          <a:noFill/>
+        </p:spPr>
+        <p:txBody>
+          <a:bodyPr wrap="square" anchor="ctr" lIns="0" rIns="0" tIns="0" bIns="0">
+            <a:spAutoFit/>
+          </a:bodyPr>
+          <a:lstStyle/>
+          <a:p>
+            <a:pPr algn="l">
+              <a:lnSpc>
+                <a:spcPct val="100000"/>
+              </a:lnSpc>
+              <a:spcBef>
+                <a:spcPts val="0"/>
+              </a:spcBef>
+              <a:spcAft>
+                <a:spcPts val="600"/>
+              </a:spcAft>
+            </a:pPr>
+            <a:r>
+              <a:rPr sz="1200" b="1">
+                <a:solidFill>
+                  <a:srgbClr val="6366F1"/>
+                </a:solidFill>
+                <a:latin typeface="NanumGothic"/>
+                <a:ea typeface="NanumGothic"/>
+                <a:cs typeface="NanumGothic"/>
+              </a:rPr>
+              <a:t>NOTE   </a:t>
+            </a:r>
+            <a:r>
+              <a:rPr sz="1300" b="0">
+                <a:solidFill>
+                  <a:srgbClr val="0F172A"/>
+                </a:solidFill>
+                <a:latin typeface="NanumGothic"/>
+                <a:ea typeface="NanumGothic"/>
+                <a:cs typeface="NanumGothic"/>
+              </a:rPr>
+              <a:t>특히 출처·인용·수치를 지어낼 때 위험 — 반드시 교차확인</a:t>
+            </a:r>
+          </a:p>
+        </p:txBody>
+      </p:sp>
     </p:spTree>
   </p:cSld>
   <p:clrMapOvr>
@@ -19355,6 +19667,110 @@
           </a:p>
         </p:txBody>
       </p:sp>
+      <p:sp>
+        <p:nvSpPr>
+          <p:cNvPr id="18" name="Rounded Rectangle 17"/>
+          <p:cNvSpPr/>
+          <p:nvPr/>
+        </p:nvSpPr>
+        <p:spPr>
+          <a:xfrm>
+            <a:off x="502920" y="5532120"/>
+            <a:ext cx="11155680" cy="658368"/>
+          </a:xfrm>
+          <a:prstGeom prst="roundRect">
+            <a:avLst/>
+          </a:prstGeom>
+          <a:solidFill>
+            <a:srgbClr val="F1F5F9"/>
+          </a:solidFill>
+          <a:ln w="12700">
+            <a:solidFill>
+              <a:srgbClr val="E2E8F0"/>
+            </a:solidFill>
+          </a:ln>
+          <a:effectLst/>
+        </p:spPr>
+        <p:style>
+          <a:lnRef idx="1">
+            <a:schemeClr val="accent1"/>
+          </a:lnRef>
+          <a:fillRef idx="3">
+            <a:schemeClr val="accent1"/>
+          </a:fillRef>
+          <a:effectRef idx="2">
+            <a:schemeClr val="accent1"/>
+          </a:effectRef>
+          <a:fontRef idx="minor">
+            <a:schemeClr val="lt1"/>
+          </a:fontRef>
+        </p:style>
+        <p:txBody>
+          <a:bodyPr rtlCol="0" anchor="ctr"/>
+          <a:lstStyle/>
+          <a:p>
+            <a:pPr algn="ctr"/>
+          </a:p>
+        </p:txBody>
+      </p:sp>
+      <p:sp>
+        <p:nvSpPr>
+          <p:cNvPr id="19" name="TextBox 18"/>
+          <p:cNvSpPr txBox="1"/>
+          <p:nvPr/>
+        </p:nvSpPr>
+        <p:spPr>
+          <a:xfrm>
+            <a:off x="777240" y="5532120"/>
+            <a:ext cx="10607040" cy="658368"/>
+          </a:xfrm>
+          <a:prstGeom prst="rect">
+            <a:avLst/>
+          </a:prstGeom>
+          <a:noFill/>
+        </p:spPr>
+        <p:txBody>
+          <a:bodyPr wrap="square" anchor="ctr" lIns="0" rIns="0" tIns="0" bIns="0">
+            <a:spAutoFit/>
+          </a:bodyPr>
+          <a:lstStyle/>
+          <a:p>
+            <a:pPr algn="l">
+              <a:lnSpc>
+                <a:spcPct val="100000"/>
+              </a:lnSpc>
+              <a:spcBef>
+                <a:spcPts val="0"/>
+              </a:spcBef>
+              <a:spcAft>
+                <a:spcPts val="600"/>
+              </a:spcAft>
+            </a:pPr>
+            <a:r>
+              <a:rPr sz="1200" b="1">
+                <a:solidFill>
+                  <a:srgbClr val="6366F1"/>
+                </a:solidFill>
+                <a:latin typeface="NanumGothic"/>
+                <a:ea typeface="NanumGothic"/>
+                <a:cs typeface="NanumGothic"/>
+              </a:rPr>
+              <a:t>NOTE   </a:t>
+            </a:r>
+            <a:r>
+              <a:rPr sz="1300" b="0">
+                <a:solidFill>
+                  <a:srgbClr val="0F172A"/>
+                </a:solidFill>
+                <a:latin typeface="NanumGothic"/>
+                <a:ea typeface="NanumGothic"/>
+                <a:cs typeface="NanumGothic"/>
+              </a:rPr>
+              <a:t>예: '커피를 마시면 잠이 ___' 다음에 올 토큰을 확률로 고른다</a:t>
+            </a:r>
+          </a:p>
+        </p:txBody>
+      </p:sp>
     </p:spTree>
   </p:cSld>
   <p:clrMapOvr>
@@ -21614,6 +22030,110 @@
           </a:p>
         </p:txBody>
       </p:sp>
+      <p:sp>
+        <p:nvSpPr>
+          <p:cNvPr id="18" name="Rounded Rectangle 17"/>
+          <p:cNvSpPr/>
+          <p:nvPr/>
+        </p:nvSpPr>
+        <p:spPr>
+          <a:xfrm>
+            <a:off x="502920" y="5532120"/>
+            <a:ext cx="11155680" cy="658368"/>
+          </a:xfrm>
+          <a:prstGeom prst="roundRect">
+            <a:avLst/>
+          </a:prstGeom>
+          <a:solidFill>
+            <a:srgbClr val="F1F5F9"/>
+          </a:solidFill>
+          <a:ln w="12700">
+            <a:solidFill>
+              <a:srgbClr val="E2E8F0"/>
+            </a:solidFill>
+          </a:ln>
+          <a:effectLst/>
+        </p:spPr>
+        <p:style>
+          <a:lnRef idx="1">
+            <a:schemeClr val="accent1"/>
+          </a:lnRef>
+          <a:fillRef idx="3">
+            <a:schemeClr val="accent1"/>
+          </a:fillRef>
+          <a:effectRef idx="2">
+            <a:schemeClr val="accent1"/>
+          </a:effectRef>
+          <a:fontRef idx="minor">
+            <a:schemeClr val="lt1"/>
+          </a:fontRef>
+        </p:style>
+        <p:txBody>
+          <a:bodyPr rtlCol="0" anchor="ctr"/>
+          <a:lstStyle/>
+          <a:p>
+            <a:pPr algn="ctr"/>
+          </a:p>
+        </p:txBody>
+      </p:sp>
+      <p:sp>
+        <p:nvSpPr>
+          <p:cNvPr id="19" name="TextBox 18"/>
+          <p:cNvSpPr txBox="1"/>
+          <p:nvPr/>
+        </p:nvSpPr>
+        <p:spPr>
+          <a:xfrm>
+            <a:off x="777240" y="5532120"/>
+            <a:ext cx="10607040" cy="658368"/>
+          </a:xfrm>
+          <a:prstGeom prst="rect">
+            <a:avLst/>
+          </a:prstGeom>
+          <a:noFill/>
+        </p:spPr>
+        <p:txBody>
+          <a:bodyPr wrap="square" anchor="ctr" lIns="0" rIns="0" tIns="0" bIns="0">
+            <a:spAutoFit/>
+          </a:bodyPr>
+          <a:lstStyle/>
+          <a:p>
+            <a:pPr algn="l">
+              <a:lnSpc>
+                <a:spcPct val="100000"/>
+              </a:lnSpc>
+              <a:spcBef>
+                <a:spcPts val="0"/>
+              </a:spcBef>
+              <a:spcAft>
+                <a:spcPts val="600"/>
+              </a:spcAft>
+            </a:pPr>
+            <a:r>
+              <a:rPr sz="1200" b="1">
+                <a:solidFill>
+                  <a:srgbClr val="6366F1"/>
+                </a:solidFill>
+                <a:latin typeface="NanumGothic"/>
+                <a:ea typeface="NanumGothic"/>
+                <a:cs typeface="NanumGothic"/>
+              </a:rPr>
+              <a:t>NOTE   </a:t>
+            </a:r>
+            <a:r>
+              <a:rPr sz="1300" b="0">
+                <a:solidFill>
+                  <a:srgbClr val="0F172A"/>
+                </a:solidFill>
+                <a:latin typeface="NanumGothic"/>
+                <a:ea typeface="NanumGothic"/>
+                <a:cs typeface="NanumGothic"/>
+              </a:rPr>
+              <a:t>비유: 거대한 빈칸 채우기를 수십억 번 — 그 과정에서 지식이 '딸려' 학습된다</a:t>
+            </a:r>
+          </a:p>
+        </p:txBody>
+      </p:sp>
     </p:spTree>
   </p:cSld>
   <p:clrMapOvr>
@@ -22362,6 +22882,110 @@
                 <a:cs typeface="NanumGothic"/>
               </a:rPr>
               <a:t>사람이 선호하는 답을 강화 — 도움되고 해롭지 않게</a:t>
+            </a:r>
+          </a:p>
+        </p:txBody>
+      </p:sp>
+      <p:sp>
+        <p:nvSpPr>
+          <p:cNvPr id="18" name="Rounded Rectangle 17"/>
+          <p:cNvSpPr/>
+          <p:nvPr/>
+        </p:nvSpPr>
+        <p:spPr>
+          <a:xfrm>
+            <a:off x="502920" y="5532120"/>
+            <a:ext cx="11155680" cy="658368"/>
+          </a:xfrm>
+          <a:prstGeom prst="roundRect">
+            <a:avLst/>
+          </a:prstGeom>
+          <a:solidFill>
+            <a:srgbClr val="F1F5F9"/>
+          </a:solidFill>
+          <a:ln w="12700">
+            <a:solidFill>
+              <a:srgbClr val="E2E8F0"/>
+            </a:solidFill>
+          </a:ln>
+          <a:effectLst/>
+        </p:spPr>
+        <p:style>
+          <a:lnRef idx="1">
+            <a:schemeClr val="accent1"/>
+          </a:lnRef>
+          <a:fillRef idx="3">
+            <a:schemeClr val="accent1"/>
+          </a:fillRef>
+          <a:effectRef idx="2">
+            <a:schemeClr val="accent1"/>
+          </a:effectRef>
+          <a:fontRef idx="minor">
+            <a:schemeClr val="lt1"/>
+          </a:fontRef>
+        </p:style>
+        <p:txBody>
+          <a:bodyPr rtlCol="0" anchor="ctr"/>
+          <a:lstStyle/>
+          <a:p>
+            <a:pPr algn="ctr"/>
+          </a:p>
+        </p:txBody>
+      </p:sp>
+      <p:sp>
+        <p:nvSpPr>
+          <p:cNvPr id="19" name="TextBox 18"/>
+          <p:cNvSpPr txBox="1"/>
+          <p:nvPr/>
+        </p:nvSpPr>
+        <p:spPr>
+          <a:xfrm>
+            <a:off x="777240" y="5532120"/>
+            <a:ext cx="10607040" cy="658368"/>
+          </a:xfrm>
+          <a:prstGeom prst="rect">
+            <a:avLst/>
+          </a:prstGeom>
+          <a:noFill/>
+        </p:spPr>
+        <p:txBody>
+          <a:bodyPr wrap="square" anchor="ctr" lIns="0" rIns="0" tIns="0" bIns="0">
+            <a:spAutoFit/>
+          </a:bodyPr>
+          <a:lstStyle/>
+          <a:p>
+            <a:pPr algn="l">
+              <a:lnSpc>
+                <a:spcPct val="100000"/>
+              </a:lnSpc>
+              <a:spcBef>
+                <a:spcPts val="0"/>
+              </a:spcBef>
+              <a:spcAft>
+                <a:spcPts val="600"/>
+              </a:spcAft>
+            </a:pPr>
+            <a:r>
+              <a:rPr sz="1200" b="1">
+                <a:solidFill>
+                  <a:srgbClr val="6366F1"/>
+                </a:solidFill>
+                <a:latin typeface="NanumGothic"/>
+                <a:ea typeface="NanumGothic"/>
+                <a:cs typeface="NanumGothic"/>
+              </a:rPr>
+              <a:t>NOTE   </a:t>
+            </a:r>
+            <a:r>
+              <a:rPr sz="1300" b="0">
+                <a:solidFill>
+                  <a:srgbClr val="0F172A"/>
+                </a:solidFill>
+                <a:latin typeface="NanumGothic"/>
+                <a:ea typeface="NanumGothic"/>
+                <a:cs typeface="NanumGothic"/>
+              </a:rPr>
+              <a:t>사전학습=박학다식 / 정렬=지시 잘 따르는 조수로 길들이기</a:t>
             </a:r>
           </a:p>
         </p:txBody>

--- a/slides/day1.pptx
+++ b/slides/day1.pptx
@@ -12623,7 +12623,7 @@
                 <a:ea typeface="NanumGothic"/>
                 <a:cs typeface="NanumGothic"/>
               </a:rPr>
-              <a:t>Opus(최상) · Sonnet(균형) · Haiku(빠름) (placeholder)</a:t>
+              <a:t>Opus(최상위) · Sonnet(균형) · Haiku(빠름·저비용)</a:t>
             </a:r>
           </a:p>
         </p:txBody>

--- a/slides/day1.pptx
+++ b/slides/day1.pptx
@@ -4365,6 +4365,110 @@
           </a:p>
         </p:txBody>
       </p:sp>
+      <p:sp>
+        <p:nvSpPr>
+          <p:cNvPr id="18" name="Rounded Rectangle 17"/>
+          <p:cNvSpPr/>
+          <p:nvPr/>
+        </p:nvSpPr>
+        <p:spPr>
+          <a:xfrm>
+            <a:off x="502920" y="5532120"/>
+            <a:ext cx="11155680" cy="658368"/>
+          </a:xfrm>
+          <a:prstGeom prst="roundRect">
+            <a:avLst/>
+          </a:prstGeom>
+          <a:solidFill>
+            <a:srgbClr val="F1F5F9"/>
+          </a:solidFill>
+          <a:ln w="12700">
+            <a:solidFill>
+              <a:srgbClr val="E2E8F0"/>
+            </a:solidFill>
+          </a:ln>
+          <a:effectLst/>
+        </p:spPr>
+        <p:style>
+          <a:lnRef idx="1">
+            <a:schemeClr val="accent1"/>
+          </a:lnRef>
+          <a:fillRef idx="3">
+            <a:schemeClr val="accent1"/>
+          </a:fillRef>
+          <a:effectRef idx="2">
+            <a:schemeClr val="accent1"/>
+          </a:effectRef>
+          <a:fontRef idx="minor">
+            <a:schemeClr val="lt1"/>
+          </a:fontRef>
+        </p:style>
+        <p:txBody>
+          <a:bodyPr rtlCol="0" anchor="ctr"/>
+          <a:lstStyle/>
+          <a:p>
+            <a:pPr algn="ctr"/>
+          </a:p>
+        </p:txBody>
+      </p:sp>
+      <p:sp>
+        <p:nvSpPr>
+          <p:cNvPr id="19" name="TextBox 18"/>
+          <p:cNvSpPr txBox="1"/>
+          <p:nvPr/>
+        </p:nvSpPr>
+        <p:spPr>
+          <a:xfrm>
+            <a:off x="777240" y="5532120"/>
+            <a:ext cx="10607040" cy="658368"/>
+          </a:xfrm>
+          <a:prstGeom prst="rect">
+            <a:avLst/>
+          </a:prstGeom>
+          <a:noFill/>
+        </p:spPr>
+        <p:txBody>
+          <a:bodyPr wrap="square" anchor="ctr" lIns="0" rIns="0" tIns="0" bIns="0">
+            <a:spAutoFit/>
+          </a:bodyPr>
+          <a:lstStyle/>
+          <a:p>
+            <a:pPr algn="l">
+              <a:lnSpc>
+                <a:spcPct val="100000"/>
+              </a:lnSpc>
+              <a:spcBef>
+                <a:spcPts val="0"/>
+              </a:spcBef>
+              <a:spcAft>
+                <a:spcPts val="600"/>
+              </a:spcAft>
+            </a:pPr>
+            <a:r>
+              <a:rPr sz="1200" b="1">
+                <a:solidFill>
+                  <a:srgbClr val="6366F1"/>
+                </a:solidFill>
+                <a:latin typeface="NanumGothic"/>
+                <a:ea typeface="NanumGothic"/>
+                <a:cs typeface="NanumGothic"/>
+              </a:rPr>
+              <a:t>NOTE   </a:t>
+            </a:r>
+            <a:r>
+              <a:rPr sz="1300" b="0">
+                <a:solidFill>
+                  <a:srgbClr val="0F172A"/>
+                </a:solidFill>
+                <a:latin typeface="NanumGothic"/>
+                <a:ea typeface="NanumGothic"/>
+                <a:cs typeface="NanumGothic"/>
+              </a:rPr>
+              <a:t>사례: DeepSeek-R1(2025·오픈)·OpenAI o1→o3 — AIME 78%→96.7% (벤치마크는 빠르게 바뀜)</a:t>
+            </a:r>
+          </a:p>
+        </p:txBody>
+      </p:sp>
     </p:spTree>
   </p:cSld>
   <p:clrMapOvr>
@@ -5216,7 +5320,7 @@
                 <a:ea typeface="NanumGothic"/>
                 <a:cs typeface="NanumGothic"/>
               </a:rPr>
-              <a:t>키워드가 아니라 '의미'로 찾는다</a:t>
+              <a:t>키워드가 아니라 '의미'로 찾는다 · 사례: Etsy·Spotify 검색/추천이 임베딩 기반</a:t>
             </a:r>
           </a:p>
         </p:txBody>
@@ -6723,7 +6827,7 @@
                 <a:ea typeface="NanumGothic"/>
                 <a:cs typeface="NanumGothic"/>
               </a:rPr>
-              <a:t>외부 지식을 붙여 환각↓·최신성↑ — 리서치 에이전트의 핵심 패턴</a:t>
+              <a:t>사례: OpenEvidence — 동료심사 문헌(NEJM·JAMA) 기반 의사용 Q&amp;A (약학 RAG 예)</a:t>
             </a:r>
           </a:p>
         </p:txBody>
@@ -8336,6 +8440,110 @@
           </a:p>
         </p:txBody>
       </p:sp>
+      <p:sp>
+        <p:nvSpPr>
+          <p:cNvPr id="18" name="Rounded Rectangle 17"/>
+          <p:cNvSpPr/>
+          <p:nvPr/>
+        </p:nvSpPr>
+        <p:spPr>
+          <a:xfrm>
+            <a:off x="502920" y="5532120"/>
+            <a:ext cx="11155680" cy="658368"/>
+          </a:xfrm>
+          <a:prstGeom prst="roundRect">
+            <a:avLst/>
+          </a:prstGeom>
+          <a:solidFill>
+            <a:srgbClr val="F1F5F9"/>
+          </a:solidFill>
+          <a:ln w="12700">
+            <a:solidFill>
+              <a:srgbClr val="E2E8F0"/>
+            </a:solidFill>
+          </a:ln>
+          <a:effectLst/>
+        </p:spPr>
+        <p:style>
+          <a:lnRef idx="1">
+            <a:schemeClr val="accent1"/>
+          </a:lnRef>
+          <a:fillRef idx="3">
+            <a:schemeClr val="accent1"/>
+          </a:fillRef>
+          <a:effectRef idx="2">
+            <a:schemeClr val="accent1"/>
+          </a:effectRef>
+          <a:fontRef idx="minor">
+            <a:schemeClr val="lt1"/>
+          </a:fontRef>
+        </p:style>
+        <p:txBody>
+          <a:bodyPr rtlCol="0" anchor="ctr"/>
+          <a:lstStyle/>
+          <a:p>
+            <a:pPr algn="ctr"/>
+          </a:p>
+        </p:txBody>
+      </p:sp>
+      <p:sp>
+        <p:nvSpPr>
+          <p:cNvPr id="19" name="TextBox 18"/>
+          <p:cNvSpPr txBox="1"/>
+          <p:nvPr/>
+        </p:nvSpPr>
+        <p:spPr>
+          <a:xfrm>
+            <a:off x="777240" y="5532120"/>
+            <a:ext cx="10607040" cy="658368"/>
+          </a:xfrm>
+          <a:prstGeom prst="rect">
+            <a:avLst/>
+          </a:prstGeom>
+          <a:noFill/>
+        </p:spPr>
+        <p:txBody>
+          <a:bodyPr wrap="square" anchor="ctr" lIns="0" rIns="0" tIns="0" bIns="0">
+            <a:spAutoFit/>
+          </a:bodyPr>
+          <a:lstStyle/>
+          <a:p>
+            <a:pPr algn="l">
+              <a:lnSpc>
+                <a:spcPct val="100000"/>
+              </a:lnSpc>
+              <a:spcBef>
+                <a:spcPts val="0"/>
+              </a:spcBef>
+              <a:spcAft>
+                <a:spcPts val="600"/>
+              </a:spcAft>
+            </a:pPr>
+            <a:r>
+              <a:rPr sz="1200" b="1">
+                <a:solidFill>
+                  <a:srgbClr val="6366F1"/>
+                </a:solidFill>
+                <a:latin typeface="NanumGothic"/>
+                <a:ea typeface="NanumGothic"/>
+                <a:cs typeface="NanumGothic"/>
+              </a:rPr>
+              <a:t>NOTE   </a:t>
+            </a:r>
+            <a:r>
+              <a:rPr sz="1300" b="0">
+                <a:solidFill>
+                  <a:srgbClr val="0F172A"/>
+                </a:solidFill>
+                <a:latin typeface="NanumGothic"/>
+                <a:ea typeface="NanumGothic"/>
+                <a:cs typeface="NanumGothic"/>
+              </a:rPr>
+              <a:t>사례: GPT-3(2020) — 예시 몇 개(few-shot)만으로 번역·Q&amp;A 수행</a:t>
+            </a:r>
+          </a:p>
+        </p:txBody>
+      </p:sp>
     </p:spTree>
   </p:cSld>
   <p:clrMapOvr>
@@ -9939,7 +10147,7 @@
                 <a:ea typeface="NanumGothic"/>
                 <a:cs typeface="NanumGothic"/>
               </a:rPr>
-              <a:t>긴 문서를 통째로 넣기보다, 검색으로 필요한 부분만 → RAG의 이유</a:t>
+              <a:t>현재 Claude 최대 1M 토큰(≈책 여러 권) — 긴 문서·코드 통째 분석 (단 lost in the middle 주의)</a:t>
             </a:r>
           </a:p>
         </p:txBody>
@@ -11871,7 +12079,7 @@
                 <a:ea typeface="NanumGothic"/>
                 <a:cs typeface="NanumGothic"/>
               </a:rPr>
-              <a:t>특히 출처·인용·수치를 지어낼 때 위험 — 반드시 교차확인</a:t>
+              <a:t>실제 사례: 변호사가 ChatGPT 가짜 판례 인용→벌금(Mata v. Avianca, 2023) · 에어캐나다 챗봇이 없는 환불정책 지어내 배상(2024)</a:t>
             </a:r>
           </a:p>
         </p:txBody>
@@ -12628,6 +12836,110 @@
           </a:p>
         </p:txBody>
       </p:sp>
+      <p:sp>
+        <p:nvSpPr>
+          <p:cNvPr id="18" name="Rounded Rectangle 17"/>
+          <p:cNvSpPr/>
+          <p:nvPr/>
+        </p:nvSpPr>
+        <p:spPr>
+          <a:xfrm>
+            <a:off x="502920" y="5532120"/>
+            <a:ext cx="11155680" cy="658368"/>
+          </a:xfrm>
+          <a:prstGeom prst="roundRect">
+            <a:avLst/>
+          </a:prstGeom>
+          <a:solidFill>
+            <a:srgbClr val="F1F5F9"/>
+          </a:solidFill>
+          <a:ln w="12700">
+            <a:solidFill>
+              <a:srgbClr val="E2E8F0"/>
+            </a:solidFill>
+          </a:ln>
+          <a:effectLst/>
+        </p:spPr>
+        <p:style>
+          <a:lnRef idx="1">
+            <a:schemeClr val="accent1"/>
+          </a:lnRef>
+          <a:fillRef idx="3">
+            <a:schemeClr val="accent1"/>
+          </a:fillRef>
+          <a:effectRef idx="2">
+            <a:schemeClr val="accent1"/>
+          </a:effectRef>
+          <a:fontRef idx="minor">
+            <a:schemeClr val="lt1"/>
+          </a:fontRef>
+        </p:style>
+        <p:txBody>
+          <a:bodyPr rtlCol="0" anchor="ctr"/>
+          <a:lstStyle/>
+          <a:p>
+            <a:pPr algn="ctr"/>
+          </a:p>
+        </p:txBody>
+      </p:sp>
+      <p:sp>
+        <p:nvSpPr>
+          <p:cNvPr id="19" name="TextBox 18"/>
+          <p:cNvSpPr txBox="1"/>
+          <p:nvPr/>
+        </p:nvSpPr>
+        <p:spPr>
+          <a:xfrm>
+            <a:off x="777240" y="5532120"/>
+            <a:ext cx="10607040" cy="658368"/>
+          </a:xfrm>
+          <a:prstGeom prst="rect">
+            <a:avLst/>
+          </a:prstGeom>
+          <a:noFill/>
+        </p:spPr>
+        <p:txBody>
+          <a:bodyPr wrap="square" anchor="ctr" lIns="0" rIns="0" tIns="0" bIns="0">
+            <a:spAutoFit/>
+          </a:bodyPr>
+          <a:lstStyle/>
+          <a:p>
+            <a:pPr algn="l">
+              <a:lnSpc>
+                <a:spcPct val="100000"/>
+              </a:lnSpc>
+              <a:spcBef>
+                <a:spcPts val="0"/>
+              </a:spcBef>
+              <a:spcAft>
+                <a:spcPts val="600"/>
+              </a:spcAft>
+            </a:pPr>
+            <a:r>
+              <a:rPr sz="1200" b="1">
+                <a:solidFill>
+                  <a:srgbClr val="6366F1"/>
+                </a:solidFill>
+                <a:latin typeface="NanumGothic"/>
+                <a:ea typeface="NanumGothic"/>
+                <a:cs typeface="NanumGothic"/>
+              </a:rPr>
+              <a:t>NOTE   </a:t>
+            </a:r>
+            <a:r>
+              <a:rPr sz="1300" b="0">
+                <a:solidFill>
+                  <a:srgbClr val="0F172A"/>
+                </a:solidFill>
+                <a:latin typeface="NanumGothic"/>
+                <a:ea typeface="NanumGothic"/>
+                <a:cs typeface="NanumGothic"/>
+              </a:rPr>
+              <a:t>참고 가격(~2026.6, 1M토큰 입력/출력): Opus $5/$25 · Sonnet $3/$15 · Haiku $1/$5 (변동)</a:t>
+            </a:r>
+          </a:p>
+        </p:txBody>
+      </p:sp>
     </p:spTree>
   </p:cSld>
   <p:clrMapOvr>
@@ -22985,7 +23297,7 @@
                 <a:ea typeface="NanumGothic"/>
                 <a:cs typeface="NanumGothic"/>
               </a:rPr>
-              <a:t>사전학습=박학다식 / 정렬=지시 잘 따르는 조수로 길들이기</a:t>
+              <a:t>사례: InstructGPT(2022) — 정렬한 1.3B 답을 175B GPT-3보다 사람이 선호(~71%)</a:t>
             </a:r>
           </a:p>
         </p:txBody>

--- a/slides/day1.pptx
+++ b/slides/day1.pptx
@@ -26,6 +26,7 @@
     <p:sldId id="274" r:id="rId25"/>
     <p:sldId id="275" r:id="rId26"/>
     <p:sldId id="276" r:id="rId27"/>
+    <p:sldId id="277" r:id="rId28"/>
   </p:sldIdLst>
   <p:sldSz cx="12191695" cy="6858000" type="screen4x3"/>
   <p:notesSz cx="6858000" cy="9144000"/>
@@ -3761,7 +3762,7 @@
                 <a:ea typeface="NanumGothic"/>
                 <a:cs typeface="NanumGothic"/>
               </a:rPr>
-              <a:t>추론 모델</a:t>
+              <a:t>학습 ②</a:t>
             </a:r>
           </a:p>
         </p:txBody>
@@ -3808,7 +3809,7 @@
                 <a:ea typeface="NanumSquare"/>
                 <a:cs typeface="NanumSquare"/>
               </a:rPr>
-              <a:t>추론(사고)하는 모델</a:t>
+              <a:t>정렬 (Alignment)</a:t>
             </a:r>
           </a:p>
         </p:txBody>
@@ -4037,7 +4038,7 @@
                 <a:ea typeface="NanumGothic"/>
                 <a:cs typeface="NanumGothic"/>
               </a:rPr>
-              <a:t>일반 생성 vs 추론</a:t>
+              <a:t>사전학습만으론 부족</a:t>
             </a:r>
           </a:p>
         </p:txBody>
@@ -4084,7 +4085,7 @@
                 <a:ea typeface="NanumGothic"/>
                 <a:cs typeface="NanumGothic"/>
               </a:rPr>
-              <a:t>바로 답하지 않고, 단계적으로 '생각'한 뒤 답한다</a:t>
+              <a:t>'유용하고·안전하게·지시를 따르도록' 추가로 다듬음</a:t>
             </a:r>
           </a:p>
         </p:txBody>
@@ -4175,7 +4176,7 @@
                 <a:ea typeface="NanumGothic"/>
                 <a:cs typeface="NanumGothic"/>
               </a:rPr>
-              <a:t>언제 강한가</a:t>
+              <a:t>instruction tuning</a:t>
             </a:r>
           </a:p>
         </p:txBody>
@@ -4222,7 +4223,7 @@
                 <a:ea typeface="NanumGothic"/>
                 <a:cs typeface="NanumGothic"/>
               </a:rPr>
-              <a:t>복잡한 문제 · 다단계 추론 · 코딩</a:t>
+              <a:t>지시–응답 예시로 '시키는 대로' 하도록 미세조정</a:t>
             </a:r>
           </a:p>
         </p:txBody>
@@ -4313,7 +4314,7 @@
                 <a:ea typeface="NanumGothic"/>
                 <a:cs typeface="NanumGothic"/>
               </a:rPr>
-              <a:t>트레이드오프</a:t>
+              <a:t>인간 피드백 (RLHF 등)</a:t>
             </a:r>
           </a:p>
         </p:txBody>
@@ -4360,7 +4361,7 @@
                 <a:ea typeface="NanumGothic"/>
                 <a:cs typeface="NanumGothic"/>
               </a:rPr>
-              <a:t>더 정확하지만 더 느리고 비싸다</a:t>
+              <a:t>사람이 선호하는 답을 강화 — 도움되고 해롭지 않게</a:t>
             </a:r>
           </a:p>
         </p:txBody>
@@ -4464,7 +4465,7 @@
                 <a:ea typeface="NanumGothic"/>
                 <a:cs typeface="NanumGothic"/>
               </a:rPr>
-              <a:t>사례: DeepSeek-R1(2025·오픈)·OpenAI o1→o3 — AIME 78%→96.7% (벤치마크는 빠르게 바뀜)</a:t>
+              <a:t>사례: InstructGPT(2022) — 정렬한 1.3B 답을 175B GPT-3보다 사람이 선호(~71%)</a:t>
             </a:r>
           </a:p>
         </p:txBody>
@@ -4617,7 +4618,7 @@
                 <a:ea typeface="NanumGothic"/>
                 <a:cs typeface="NanumGothic"/>
               </a:rPr>
-              <a:t>임베딩</a:t>
+              <a:t>추론 모델</a:t>
             </a:r>
           </a:p>
         </p:txBody>
@@ -4664,7 +4665,7 @@
                 <a:ea typeface="NanumSquare"/>
                 <a:cs typeface="NanumSquare"/>
               </a:rPr>
-              <a:t>임베딩 &amp; 의미 검색</a:t>
+              <a:t>추론(사고)하는 모델</a:t>
             </a:r>
           </a:p>
         </p:txBody>
@@ -4893,7 +4894,7 @@
                 <a:ea typeface="NanumGothic"/>
                 <a:cs typeface="NanumGothic"/>
               </a:rPr>
-              <a:t>임베딩이란</a:t>
+              <a:t>일반 생성 vs 추론</a:t>
             </a:r>
           </a:p>
         </p:txBody>
@@ -4940,7 +4941,7 @@
                 <a:ea typeface="NanumGothic"/>
                 <a:cs typeface="NanumGothic"/>
               </a:rPr>
-              <a:t>텍스트를 의미를 담은 숫자 벡터로 변환</a:t>
+              <a:t>바로 답하지 않고, 단계적으로 '생각'한 뒤 답한다</a:t>
             </a:r>
           </a:p>
         </p:txBody>
@@ -5031,7 +5032,7 @@
                 <a:ea typeface="NanumGothic"/>
                 <a:cs typeface="NanumGothic"/>
               </a:rPr>
-              <a:t>의미 검색</a:t>
+              <a:t>언제 강한가</a:t>
             </a:r>
           </a:p>
         </p:txBody>
@@ -5078,7 +5079,7 @@
                 <a:ea typeface="NanumGothic"/>
                 <a:cs typeface="NanumGothic"/>
               </a:rPr>
-              <a:t>글자가 달라도 '뜻이 비슷한' 문서를 찾음 (키워드 매칭의 한계 극복)</a:t>
+              <a:t>복잡한 문제 · 다단계 추론 · 코딩</a:t>
             </a:r>
           </a:p>
         </p:txBody>
@@ -5169,7 +5170,7 @@
                 <a:ea typeface="NanumGothic"/>
                 <a:cs typeface="NanumGothic"/>
               </a:rPr>
-              <a:t>어디에 쓰나</a:t>
+              <a:t>트레이드오프</a:t>
             </a:r>
           </a:p>
         </p:txBody>
@@ -5216,7 +5217,7 @@
                 <a:ea typeface="NanumGothic"/>
                 <a:cs typeface="NanumGothic"/>
               </a:rPr>
-              <a:t>방대한 문헌에서 관련 자료 검색 — 리서치 에이전트의 토대</a:t>
+              <a:t>더 정확하지만 더 느리고 비싸다</a:t>
             </a:r>
           </a:p>
         </p:txBody>
@@ -5320,7 +5321,7 @@
                 <a:ea typeface="NanumGothic"/>
                 <a:cs typeface="NanumGothic"/>
               </a:rPr>
-              <a:t>키워드가 아니라 '의미'로 찾는다 · 사례: Etsy·Spotify 검색/추천이 임베딩 기반</a:t>
+              <a:t>사례: DeepSeek-R1(2025·오픈)·OpenAI o1→o3 — AIME 78%→96.7% (벤치마크는 빠르게 바뀜)</a:t>
             </a:r>
           </a:p>
         </p:txBody>
@@ -5473,7 +5474,7 @@
                 <a:ea typeface="NanumGothic"/>
                 <a:cs typeface="NanumGothic"/>
               </a:rPr>
-              <a:t>RAG</a:t>
+              <a:t>임베딩</a:t>
             </a:r>
           </a:p>
         </p:txBody>
@@ -5520,7 +5521,7 @@
                 <a:ea typeface="NanumSquare"/>
                 <a:cs typeface="NanumSquare"/>
               </a:rPr>
-              <a:t>검색 증강 생성 (RAG)</a:t>
+              <a:t>임베딩 &amp; 의미 검색</a:t>
             </a:r>
           </a:p>
         </p:txBody>
@@ -5665,62 +5666,16 @@
       </p:sp>
       <p:sp>
         <p:nvSpPr>
-          <p:cNvPr id="9" name="Rounded Rectangle 8"/>
+          <p:cNvPr id="9" name="Oval 8"/>
           <p:cNvSpPr/>
           <p:nvPr/>
         </p:nvSpPr>
         <p:spPr>
           <a:xfrm>
-            <a:off x="502920" y="2651760"/>
-            <a:ext cx="2548890" cy="1737360"/>
-          </a:xfrm>
-          <a:prstGeom prst="roundRect">
-            <a:avLst/>
-          </a:prstGeom>
-          <a:solidFill>
-            <a:srgbClr val="F8FAFC"/>
-          </a:solidFill>
-          <a:ln w="12700">
-            <a:solidFill>
-              <a:srgbClr val="E2E8F0"/>
-            </a:solidFill>
-          </a:ln>
-          <a:effectLst/>
-        </p:spPr>
-        <p:style>
-          <a:lnRef idx="1">
-            <a:schemeClr val="accent1"/>
-          </a:lnRef>
-          <a:fillRef idx="3">
-            <a:schemeClr val="accent1"/>
-          </a:fillRef>
-          <a:effectRef idx="2">
-            <a:schemeClr val="accent1"/>
-          </a:effectRef>
-          <a:fontRef idx="minor">
-            <a:schemeClr val="lt1"/>
-          </a:fontRef>
-        </p:style>
-        <p:txBody>
-          <a:bodyPr rtlCol="0" anchor="ctr"/>
-          <a:lstStyle/>
-          <a:p>
-            <a:pPr algn="ctr"/>
-          </a:p>
-        </p:txBody>
-      </p:sp>
-      <p:sp>
-        <p:nvSpPr>
-          <p:cNvPr id="10" name="Rectangle 9"/>
-          <p:cNvSpPr/>
-          <p:nvPr/>
-        </p:nvSpPr>
-        <p:spPr>
-          <a:xfrm>
-            <a:off x="502920" y="2651760"/>
-            <a:ext cx="2548890" cy="109728"/>
-          </a:xfrm>
-          <a:prstGeom prst="rect">
+            <a:off x="548640" y="1911096"/>
+            <a:ext cx="146304" cy="146304"/>
+          </a:xfrm>
+          <a:prstGeom prst="ellipse">
             <a:avLst/>
           </a:prstGeom>
           <a:solidFill>
@@ -5755,14 +5710,14 @@
       </p:sp>
       <p:sp>
         <p:nvSpPr>
-          <p:cNvPr id="11" name="TextBox 10"/>
-          <p:cNvSpPr txBox="1"/>
-          <p:nvPr/>
-        </p:nvSpPr>
-        <p:spPr>
-          <a:xfrm>
-            <a:off x="640080" y="2944368"/>
-            <a:ext cx="2274570" cy="365760"/>
+          <p:cNvPr id="10" name="TextBox 9"/>
+          <p:cNvSpPr txBox="1"/>
+          <p:nvPr/>
+        </p:nvSpPr>
+        <p:spPr>
+          <a:xfrm>
+            <a:off x="868680" y="1828800"/>
+            <a:ext cx="10607040" cy="457200"/>
           </a:xfrm>
           <a:prstGeom prst="rect">
             <a:avLst/>
@@ -5787,54 +5742,7 @@
               </a:spcAft>
             </a:pPr>
             <a:r>
-              <a:rPr sz="1300" b="1">
-                <a:solidFill>
-                  <a:srgbClr val="6366F1"/>
-                </a:solidFill>
-                <a:latin typeface="NanumSquare"/>
-                <a:ea typeface="NanumSquare"/>
-                <a:cs typeface="NanumSquare"/>
-              </a:rPr>
-              <a:t>1</a:t>
-            </a:r>
-          </a:p>
-        </p:txBody>
-      </p:sp>
-      <p:sp>
-        <p:nvSpPr>
-          <p:cNvPr id="12" name="TextBox 11"/>
-          <p:cNvSpPr txBox="1"/>
-          <p:nvPr/>
-        </p:nvSpPr>
-        <p:spPr>
-          <a:xfrm>
-            <a:off x="640080" y="3310128"/>
-            <a:ext cx="2274570" cy="548640"/>
-          </a:xfrm>
-          <a:prstGeom prst="rect">
-            <a:avLst/>
-          </a:prstGeom>
-          <a:noFill/>
-        </p:spPr>
-        <p:txBody>
-          <a:bodyPr wrap="square" anchor="t" lIns="0" rIns="0" tIns="0" bIns="0">
-            <a:spAutoFit/>
-          </a:bodyPr>
-          <a:lstStyle/>
-          <a:p>
-            <a:pPr algn="l">
-              <a:lnSpc>
-                <a:spcPct val="100000"/>
-              </a:lnSpc>
-              <a:spcBef>
-                <a:spcPts val="0"/>
-              </a:spcBef>
-              <a:spcAft>
-                <a:spcPts val="600"/>
-              </a:spcAft>
-            </a:pPr>
-            <a:r>
-              <a:rPr sz="1500" b="1">
+              <a:rPr sz="1600" b="1">
                 <a:solidFill>
                   <a:srgbClr val="0F172A"/>
                 </a:solidFill>
@@ -5842,21 +5750,21 @@
                 <a:ea typeface="NanumGothic"/>
                 <a:cs typeface="NanumGothic"/>
               </a:rPr>
-              <a:t>질문</a:t>
-            </a:r>
-          </a:p>
-        </p:txBody>
-      </p:sp>
-      <p:sp>
-        <p:nvSpPr>
-          <p:cNvPr id="13" name="TextBox 12"/>
-          <p:cNvSpPr txBox="1"/>
-          <p:nvPr/>
-        </p:nvSpPr>
-        <p:spPr>
-          <a:xfrm>
-            <a:off x="640080" y="3822192"/>
-            <a:ext cx="2274570" cy="457200"/>
+              <a:t>임베딩이란</a:t>
+            </a:r>
+          </a:p>
+        </p:txBody>
+      </p:sp>
+      <p:sp>
+        <p:nvSpPr>
+          <p:cNvPr id="11" name="TextBox 10"/>
+          <p:cNvSpPr txBox="1"/>
+          <p:nvPr/>
+        </p:nvSpPr>
+        <p:spPr>
+          <a:xfrm>
+            <a:off x="868680" y="2212848"/>
+            <a:ext cx="10607040" cy="457200"/>
           </a:xfrm>
           <a:prstGeom prst="rect">
             <a:avLst/>
@@ -5881,7 +5789,7 @@
               </a:spcAft>
             </a:pPr>
             <a:r>
-              <a:rPr sz="1100" b="0">
+              <a:rPr sz="1300" b="0">
                 <a:solidFill>
                   <a:srgbClr val="64748B"/>
                 </a:solidFill>
@@ -5889,116 +5797,23 @@
                 <a:ea typeface="NanumGothic"/>
                 <a:cs typeface="NanumGothic"/>
               </a:rPr>
-              <a:t>사용자 질문</a:t>
-            </a:r>
-          </a:p>
-        </p:txBody>
-      </p:sp>
-      <p:sp>
-        <p:nvSpPr>
-          <p:cNvPr id="14" name="TextBox 13"/>
-          <p:cNvSpPr txBox="1"/>
-          <p:nvPr/>
-        </p:nvSpPr>
-        <p:spPr>
-          <a:xfrm>
-            <a:off x="3097530" y="3154680"/>
-            <a:ext cx="274320" cy="548640"/>
-          </a:xfrm>
-          <a:prstGeom prst="rect">
-            <a:avLst/>
-          </a:prstGeom>
-          <a:noFill/>
-        </p:spPr>
-        <p:txBody>
-          <a:bodyPr wrap="square" anchor="ctr" lIns="0" rIns="0" tIns="0" bIns="0">
-            <a:spAutoFit/>
-          </a:bodyPr>
-          <a:lstStyle/>
-          <a:p>
-            <a:pPr algn="ctr">
-              <a:lnSpc>
-                <a:spcPct val="100000"/>
-              </a:lnSpc>
-              <a:spcBef>
-                <a:spcPts val="0"/>
-              </a:spcBef>
-              <a:spcAft>
-                <a:spcPts val="600"/>
-              </a:spcAft>
-            </a:pPr>
-            <a:r>
-              <a:rPr sz="2200" b="1">
-                <a:solidFill>
-                  <a:srgbClr val="6366F1"/>
-                </a:solidFill>
-                <a:latin typeface="NanumSquare"/>
-                <a:ea typeface="NanumSquare"/>
-                <a:cs typeface="NanumSquare"/>
-              </a:rPr>
-              <a:t>→</a:t>
-            </a:r>
-          </a:p>
-        </p:txBody>
-      </p:sp>
-      <p:sp>
-        <p:nvSpPr>
-          <p:cNvPr id="15" name="Rounded Rectangle 14"/>
+              <a:t>텍스트를 의미를 담은 숫자 벡터로 변환</a:t>
+            </a:r>
+          </a:p>
+        </p:txBody>
+      </p:sp>
+      <p:sp>
+        <p:nvSpPr>
+          <p:cNvPr id="12" name="Oval 11"/>
           <p:cNvSpPr/>
           <p:nvPr/>
         </p:nvSpPr>
         <p:spPr>
           <a:xfrm>
-            <a:off x="3371850" y="2651760"/>
-            <a:ext cx="2548890" cy="1737360"/>
-          </a:xfrm>
-          <a:prstGeom prst="roundRect">
-            <a:avLst/>
-          </a:prstGeom>
-          <a:solidFill>
-            <a:srgbClr val="F8FAFC"/>
-          </a:solidFill>
-          <a:ln w="12700">
-            <a:solidFill>
-              <a:srgbClr val="E2E8F0"/>
-            </a:solidFill>
-          </a:ln>
-          <a:effectLst/>
-        </p:spPr>
-        <p:style>
-          <a:lnRef idx="1">
-            <a:schemeClr val="accent1"/>
-          </a:lnRef>
-          <a:fillRef idx="3">
-            <a:schemeClr val="accent1"/>
-          </a:fillRef>
-          <a:effectRef idx="2">
-            <a:schemeClr val="accent1"/>
-          </a:effectRef>
-          <a:fontRef idx="minor">
-            <a:schemeClr val="lt1"/>
-          </a:fontRef>
-        </p:style>
-        <p:txBody>
-          <a:bodyPr rtlCol="0" anchor="ctr"/>
-          <a:lstStyle/>
-          <a:p>
-            <a:pPr algn="ctr"/>
-          </a:p>
-        </p:txBody>
-      </p:sp>
-      <p:sp>
-        <p:nvSpPr>
-          <p:cNvPr id="16" name="Rectangle 15"/>
-          <p:cNvSpPr/>
-          <p:nvPr/>
-        </p:nvSpPr>
-        <p:spPr>
-          <a:xfrm>
-            <a:off x="3371850" y="2651760"/>
-            <a:ext cx="2548890" cy="109728"/>
-          </a:xfrm>
-          <a:prstGeom prst="rect">
+            <a:off x="548640" y="2779776"/>
+            <a:ext cx="146304" cy="146304"/>
+          </a:xfrm>
+          <a:prstGeom prst="ellipse">
             <a:avLst/>
           </a:prstGeom>
           <a:solidFill>
@@ -6033,14 +5848,14 @@
       </p:sp>
       <p:sp>
         <p:nvSpPr>
-          <p:cNvPr id="17" name="TextBox 16"/>
-          <p:cNvSpPr txBox="1"/>
-          <p:nvPr/>
-        </p:nvSpPr>
-        <p:spPr>
-          <a:xfrm>
-            <a:off x="3509010" y="2944368"/>
-            <a:ext cx="2274570" cy="365760"/>
+          <p:cNvPr id="13" name="TextBox 12"/>
+          <p:cNvSpPr txBox="1"/>
+          <p:nvPr/>
+        </p:nvSpPr>
+        <p:spPr>
+          <a:xfrm>
+            <a:off x="868680" y="2697480"/>
+            <a:ext cx="10607040" cy="457200"/>
           </a:xfrm>
           <a:prstGeom prst="rect">
             <a:avLst/>
@@ -6065,54 +5880,7 @@
               </a:spcAft>
             </a:pPr>
             <a:r>
-              <a:rPr sz="1300" b="1">
-                <a:solidFill>
-                  <a:srgbClr val="6366F1"/>
-                </a:solidFill>
-                <a:latin typeface="NanumSquare"/>
-                <a:ea typeface="NanumSquare"/>
-                <a:cs typeface="NanumSquare"/>
-              </a:rPr>
-              <a:t>2</a:t>
-            </a:r>
-          </a:p>
-        </p:txBody>
-      </p:sp>
-      <p:sp>
-        <p:nvSpPr>
-          <p:cNvPr id="18" name="TextBox 17"/>
-          <p:cNvSpPr txBox="1"/>
-          <p:nvPr/>
-        </p:nvSpPr>
-        <p:spPr>
-          <a:xfrm>
-            <a:off x="3509010" y="3310128"/>
-            <a:ext cx="2274570" cy="548640"/>
-          </a:xfrm>
-          <a:prstGeom prst="rect">
-            <a:avLst/>
-          </a:prstGeom>
-          <a:noFill/>
-        </p:spPr>
-        <p:txBody>
-          <a:bodyPr wrap="square" anchor="t" lIns="0" rIns="0" tIns="0" bIns="0">
-            <a:spAutoFit/>
-          </a:bodyPr>
-          <a:lstStyle/>
-          <a:p>
-            <a:pPr algn="l">
-              <a:lnSpc>
-                <a:spcPct val="100000"/>
-              </a:lnSpc>
-              <a:spcBef>
-                <a:spcPts val="0"/>
-              </a:spcBef>
-              <a:spcAft>
-                <a:spcPts val="600"/>
-              </a:spcAft>
-            </a:pPr>
-            <a:r>
-              <a:rPr sz="1500" b="1">
+              <a:rPr sz="1600" b="1">
                 <a:solidFill>
                   <a:srgbClr val="0F172A"/>
                 </a:solidFill>
@@ -6120,21 +5888,21 @@
                 <a:ea typeface="NanumGothic"/>
                 <a:cs typeface="NanumGothic"/>
               </a:rPr>
-              <a:t>검색</a:t>
-            </a:r>
-          </a:p>
-        </p:txBody>
-      </p:sp>
-      <p:sp>
-        <p:nvSpPr>
-          <p:cNvPr id="19" name="TextBox 18"/>
-          <p:cNvSpPr txBox="1"/>
-          <p:nvPr/>
-        </p:nvSpPr>
-        <p:spPr>
-          <a:xfrm>
-            <a:off x="3509010" y="3822192"/>
-            <a:ext cx="2274570" cy="457200"/>
+              <a:t>의미 검색</a:t>
+            </a:r>
+          </a:p>
+        </p:txBody>
+      </p:sp>
+      <p:sp>
+        <p:nvSpPr>
+          <p:cNvPr id="14" name="TextBox 13"/>
+          <p:cNvSpPr txBox="1"/>
+          <p:nvPr/>
+        </p:nvSpPr>
+        <p:spPr>
+          <a:xfrm>
+            <a:off x="868680" y="3081528"/>
+            <a:ext cx="10607040" cy="457200"/>
           </a:xfrm>
           <a:prstGeom prst="rect">
             <a:avLst/>
@@ -6159,7 +5927,7 @@
               </a:spcAft>
             </a:pPr>
             <a:r>
-              <a:rPr sz="1100" b="0">
+              <a:rPr sz="1300" b="0">
                 <a:solidFill>
                   <a:srgbClr val="64748B"/>
                 </a:solidFill>
@@ -6167,116 +5935,23 @@
                 <a:ea typeface="NanumGothic"/>
                 <a:cs typeface="NanumGothic"/>
               </a:rPr>
-              <a:t>관련 문서 찾기(임베딩)</a:t>
-            </a:r>
-          </a:p>
-        </p:txBody>
-      </p:sp>
-      <p:sp>
-        <p:nvSpPr>
-          <p:cNvPr id="20" name="TextBox 19"/>
-          <p:cNvSpPr txBox="1"/>
-          <p:nvPr/>
-        </p:nvSpPr>
-        <p:spPr>
-          <a:xfrm>
-            <a:off x="5966460" y="3154680"/>
-            <a:ext cx="274320" cy="548640"/>
-          </a:xfrm>
-          <a:prstGeom prst="rect">
-            <a:avLst/>
-          </a:prstGeom>
-          <a:noFill/>
-        </p:spPr>
-        <p:txBody>
-          <a:bodyPr wrap="square" anchor="ctr" lIns="0" rIns="0" tIns="0" bIns="0">
-            <a:spAutoFit/>
-          </a:bodyPr>
-          <a:lstStyle/>
-          <a:p>
-            <a:pPr algn="ctr">
-              <a:lnSpc>
-                <a:spcPct val="100000"/>
-              </a:lnSpc>
-              <a:spcBef>
-                <a:spcPts val="0"/>
-              </a:spcBef>
-              <a:spcAft>
-                <a:spcPts val="600"/>
-              </a:spcAft>
-            </a:pPr>
-            <a:r>
-              <a:rPr sz="2200" b="1">
-                <a:solidFill>
-                  <a:srgbClr val="6366F1"/>
-                </a:solidFill>
-                <a:latin typeface="NanumSquare"/>
-                <a:ea typeface="NanumSquare"/>
-                <a:cs typeface="NanumSquare"/>
-              </a:rPr>
-              <a:t>→</a:t>
-            </a:r>
-          </a:p>
-        </p:txBody>
-      </p:sp>
-      <p:sp>
-        <p:nvSpPr>
-          <p:cNvPr id="21" name="Rounded Rectangle 20"/>
+              <a:t>글자가 달라도 '뜻이 비슷한' 문서를 찾음 (키워드 매칭의 한계 극복)</a:t>
+            </a:r>
+          </a:p>
+        </p:txBody>
+      </p:sp>
+      <p:sp>
+        <p:nvSpPr>
+          <p:cNvPr id="15" name="Oval 14"/>
           <p:cNvSpPr/>
           <p:nvPr/>
         </p:nvSpPr>
         <p:spPr>
           <a:xfrm>
-            <a:off x="6240780" y="2651760"/>
-            <a:ext cx="2548890" cy="1737360"/>
-          </a:xfrm>
-          <a:prstGeom prst="roundRect">
-            <a:avLst/>
-          </a:prstGeom>
-          <a:solidFill>
-            <a:srgbClr val="F8FAFC"/>
-          </a:solidFill>
-          <a:ln w="12700">
-            <a:solidFill>
-              <a:srgbClr val="E2E8F0"/>
-            </a:solidFill>
-          </a:ln>
-          <a:effectLst/>
-        </p:spPr>
-        <p:style>
-          <a:lnRef idx="1">
-            <a:schemeClr val="accent1"/>
-          </a:lnRef>
-          <a:fillRef idx="3">
-            <a:schemeClr val="accent1"/>
-          </a:fillRef>
-          <a:effectRef idx="2">
-            <a:schemeClr val="accent1"/>
-          </a:effectRef>
-          <a:fontRef idx="minor">
-            <a:schemeClr val="lt1"/>
-          </a:fontRef>
-        </p:style>
-        <p:txBody>
-          <a:bodyPr rtlCol="0" anchor="ctr"/>
-          <a:lstStyle/>
-          <a:p>
-            <a:pPr algn="ctr"/>
-          </a:p>
-        </p:txBody>
-      </p:sp>
-      <p:sp>
-        <p:nvSpPr>
-          <p:cNvPr id="22" name="Rectangle 21"/>
-          <p:cNvSpPr/>
-          <p:nvPr/>
-        </p:nvSpPr>
-        <p:spPr>
-          <a:xfrm>
-            <a:off x="6240780" y="2651760"/>
-            <a:ext cx="2548890" cy="109728"/>
-          </a:xfrm>
-          <a:prstGeom prst="rect">
+            <a:off x="548640" y="3648456"/>
+            <a:ext cx="146304" cy="146304"/>
+          </a:xfrm>
+          <a:prstGeom prst="ellipse">
             <a:avLst/>
           </a:prstGeom>
           <a:solidFill>
@@ -6311,14 +5986,14 @@
       </p:sp>
       <p:sp>
         <p:nvSpPr>
-          <p:cNvPr id="23" name="TextBox 22"/>
-          <p:cNvSpPr txBox="1"/>
-          <p:nvPr/>
-        </p:nvSpPr>
-        <p:spPr>
-          <a:xfrm>
-            <a:off x="6377940" y="2944368"/>
-            <a:ext cx="2274570" cy="365760"/>
+          <p:cNvPr id="16" name="TextBox 15"/>
+          <p:cNvSpPr txBox="1"/>
+          <p:nvPr/>
+        </p:nvSpPr>
+        <p:spPr>
+          <a:xfrm>
+            <a:off x="868680" y="3566160"/>
+            <a:ext cx="10607040" cy="457200"/>
           </a:xfrm>
           <a:prstGeom prst="rect">
             <a:avLst/>
@@ -6343,54 +6018,7 @@
               </a:spcAft>
             </a:pPr>
             <a:r>
-              <a:rPr sz="1300" b="1">
-                <a:solidFill>
-                  <a:srgbClr val="6366F1"/>
-                </a:solidFill>
-                <a:latin typeface="NanumSquare"/>
-                <a:ea typeface="NanumSquare"/>
-                <a:cs typeface="NanumSquare"/>
-              </a:rPr>
-              <a:t>3</a:t>
-            </a:r>
-          </a:p>
-        </p:txBody>
-      </p:sp>
-      <p:sp>
-        <p:nvSpPr>
-          <p:cNvPr id="24" name="TextBox 23"/>
-          <p:cNvSpPr txBox="1"/>
-          <p:nvPr/>
-        </p:nvSpPr>
-        <p:spPr>
-          <a:xfrm>
-            <a:off x="6377940" y="3310128"/>
-            <a:ext cx="2274570" cy="548640"/>
-          </a:xfrm>
-          <a:prstGeom prst="rect">
-            <a:avLst/>
-          </a:prstGeom>
-          <a:noFill/>
-        </p:spPr>
-        <p:txBody>
-          <a:bodyPr wrap="square" anchor="t" lIns="0" rIns="0" tIns="0" bIns="0">
-            <a:spAutoFit/>
-          </a:bodyPr>
-          <a:lstStyle/>
-          <a:p>
-            <a:pPr algn="l">
-              <a:lnSpc>
-                <a:spcPct val="100000"/>
-              </a:lnSpc>
-              <a:spcBef>
-                <a:spcPts val="0"/>
-              </a:spcBef>
-              <a:spcAft>
-                <a:spcPts val="600"/>
-              </a:spcAft>
-            </a:pPr>
-            <a:r>
-              <a:rPr sz="1500" b="1">
+              <a:rPr sz="1600" b="1">
                 <a:solidFill>
                   <a:srgbClr val="0F172A"/>
                 </a:solidFill>
@@ -6398,21 +6026,21 @@
                 <a:ea typeface="NanumGothic"/>
                 <a:cs typeface="NanumGothic"/>
               </a:rPr>
-              <a:t>주입</a:t>
-            </a:r>
-          </a:p>
-        </p:txBody>
-      </p:sp>
-      <p:sp>
-        <p:nvSpPr>
-          <p:cNvPr id="25" name="TextBox 24"/>
-          <p:cNvSpPr txBox="1"/>
-          <p:nvPr/>
-        </p:nvSpPr>
-        <p:spPr>
-          <a:xfrm>
-            <a:off x="6377940" y="3822192"/>
-            <a:ext cx="2274570" cy="457200"/>
+              <a:t>어디에 쓰나</a:t>
+            </a:r>
+          </a:p>
+        </p:txBody>
+      </p:sp>
+      <p:sp>
+        <p:nvSpPr>
+          <p:cNvPr id="17" name="TextBox 16"/>
+          <p:cNvSpPr txBox="1"/>
+          <p:nvPr/>
+        </p:nvSpPr>
+        <p:spPr>
+          <a:xfrm>
+            <a:off x="868680" y="3950208"/>
+            <a:ext cx="10607040" cy="457200"/>
           </a:xfrm>
           <a:prstGeom prst="rect">
             <a:avLst/>
@@ -6437,7 +6065,7 @@
               </a:spcAft>
             </a:pPr>
             <a:r>
-              <a:rPr sz="1100" b="0">
+              <a:rPr sz="1300" b="0">
                 <a:solidFill>
                   <a:srgbClr val="64748B"/>
                 </a:solidFill>
@@ -6445,298 +6073,20 @@
                 <a:ea typeface="NanumGothic"/>
                 <a:cs typeface="NanumGothic"/>
               </a:rPr>
-              <a:t>찾은 근거를 프롬프트에</a:t>
-            </a:r>
-          </a:p>
-        </p:txBody>
-      </p:sp>
-      <p:sp>
-        <p:nvSpPr>
-          <p:cNvPr id="26" name="TextBox 25"/>
-          <p:cNvSpPr txBox="1"/>
-          <p:nvPr/>
-        </p:nvSpPr>
-        <p:spPr>
-          <a:xfrm>
-            <a:off x="8835390" y="3154680"/>
-            <a:ext cx="274320" cy="548640"/>
-          </a:xfrm>
-          <a:prstGeom prst="rect">
-            <a:avLst/>
-          </a:prstGeom>
-          <a:noFill/>
-        </p:spPr>
-        <p:txBody>
-          <a:bodyPr wrap="square" anchor="ctr" lIns="0" rIns="0" tIns="0" bIns="0">
-            <a:spAutoFit/>
-          </a:bodyPr>
-          <a:lstStyle/>
-          <a:p>
-            <a:pPr algn="ctr">
-              <a:lnSpc>
-                <a:spcPct val="100000"/>
-              </a:lnSpc>
-              <a:spcBef>
-                <a:spcPts val="0"/>
-              </a:spcBef>
-              <a:spcAft>
-                <a:spcPts val="600"/>
-              </a:spcAft>
-            </a:pPr>
-            <a:r>
-              <a:rPr sz="2200" b="1">
-                <a:solidFill>
-                  <a:srgbClr val="6366F1"/>
-                </a:solidFill>
-                <a:latin typeface="NanumSquare"/>
-                <a:ea typeface="NanumSquare"/>
-                <a:cs typeface="NanumSquare"/>
-              </a:rPr>
-              <a:t>→</a:t>
-            </a:r>
-          </a:p>
-        </p:txBody>
-      </p:sp>
-      <p:sp>
-        <p:nvSpPr>
-          <p:cNvPr id="27" name="Rounded Rectangle 26"/>
+              <a:t>방대한 문헌에서 관련 자료 검색 — 리서치 에이전트의 토대</a:t>
+            </a:r>
+          </a:p>
+        </p:txBody>
+      </p:sp>
+      <p:sp>
+        <p:nvSpPr>
+          <p:cNvPr id="18" name="Rounded Rectangle 17"/>
           <p:cNvSpPr/>
           <p:nvPr/>
         </p:nvSpPr>
         <p:spPr>
           <a:xfrm>
-            <a:off x="9109710" y="2651760"/>
-            <a:ext cx="2548890" cy="1737360"/>
-          </a:xfrm>
-          <a:prstGeom prst="roundRect">
-            <a:avLst/>
-          </a:prstGeom>
-          <a:solidFill>
-            <a:srgbClr val="F8FAFC"/>
-          </a:solidFill>
-          <a:ln w="12700">
-            <a:solidFill>
-              <a:srgbClr val="E2E8F0"/>
-            </a:solidFill>
-          </a:ln>
-          <a:effectLst/>
-        </p:spPr>
-        <p:style>
-          <a:lnRef idx="1">
-            <a:schemeClr val="accent1"/>
-          </a:lnRef>
-          <a:fillRef idx="3">
-            <a:schemeClr val="accent1"/>
-          </a:fillRef>
-          <a:effectRef idx="2">
-            <a:schemeClr val="accent1"/>
-          </a:effectRef>
-          <a:fontRef idx="minor">
-            <a:schemeClr val="lt1"/>
-          </a:fontRef>
-        </p:style>
-        <p:txBody>
-          <a:bodyPr rtlCol="0" anchor="ctr"/>
-          <a:lstStyle/>
-          <a:p>
-            <a:pPr algn="ctr"/>
-          </a:p>
-        </p:txBody>
-      </p:sp>
-      <p:sp>
-        <p:nvSpPr>
-          <p:cNvPr id="28" name="Rectangle 27"/>
-          <p:cNvSpPr/>
-          <p:nvPr/>
-        </p:nvSpPr>
-        <p:spPr>
-          <a:xfrm>
-            <a:off x="9109710" y="2651760"/>
-            <a:ext cx="2548890" cy="109728"/>
-          </a:xfrm>
-          <a:prstGeom prst="rect">
-            <a:avLst/>
-          </a:prstGeom>
-          <a:solidFill>
-            <a:srgbClr val="6366F1"/>
-          </a:solidFill>
-          <a:ln>
-            <a:noFill/>
-          </a:ln>
-          <a:effectLst/>
-        </p:spPr>
-        <p:style>
-          <a:lnRef idx="1">
-            <a:schemeClr val="accent1"/>
-          </a:lnRef>
-          <a:fillRef idx="3">
-            <a:schemeClr val="accent1"/>
-          </a:fillRef>
-          <a:effectRef idx="2">
-            <a:schemeClr val="accent1"/>
-          </a:effectRef>
-          <a:fontRef idx="minor">
-            <a:schemeClr val="lt1"/>
-          </a:fontRef>
-        </p:style>
-        <p:txBody>
-          <a:bodyPr rtlCol="0" anchor="ctr"/>
-          <a:lstStyle/>
-          <a:p>
-            <a:pPr algn="ctr"/>
-          </a:p>
-        </p:txBody>
-      </p:sp>
-      <p:sp>
-        <p:nvSpPr>
-          <p:cNvPr id="29" name="TextBox 28"/>
-          <p:cNvSpPr txBox="1"/>
-          <p:nvPr/>
-        </p:nvSpPr>
-        <p:spPr>
-          <a:xfrm>
-            <a:off x="9246870" y="2944368"/>
-            <a:ext cx="2274570" cy="365760"/>
-          </a:xfrm>
-          <a:prstGeom prst="rect">
-            <a:avLst/>
-          </a:prstGeom>
-          <a:noFill/>
-        </p:spPr>
-        <p:txBody>
-          <a:bodyPr wrap="square" anchor="t" lIns="0" rIns="0" tIns="0" bIns="0">
-            <a:spAutoFit/>
-          </a:bodyPr>
-          <a:lstStyle/>
-          <a:p>
-            <a:pPr algn="l">
-              <a:lnSpc>
-                <a:spcPct val="100000"/>
-              </a:lnSpc>
-              <a:spcBef>
-                <a:spcPts val="0"/>
-              </a:spcBef>
-              <a:spcAft>
-                <a:spcPts val="600"/>
-              </a:spcAft>
-            </a:pPr>
-            <a:r>
-              <a:rPr sz="1300" b="1">
-                <a:solidFill>
-                  <a:srgbClr val="6366F1"/>
-                </a:solidFill>
-                <a:latin typeface="NanumSquare"/>
-                <a:ea typeface="NanumSquare"/>
-                <a:cs typeface="NanumSquare"/>
-              </a:rPr>
-              <a:t>4</a:t>
-            </a:r>
-          </a:p>
-        </p:txBody>
-      </p:sp>
-      <p:sp>
-        <p:nvSpPr>
-          <p:cNvPr id="30" name="TextBox 29"/>
-          <p:cNvSpPr txBox="1"/>
-          <p:nvPr/>
-        </p:nvSpPr>
-        <p:spPr>
-          <a:xfrm>
-            <a:off x="9246870" y="3310128"/>
-            <a:ext cx="2274570" cy="548640"/>
-          </a:xfrm>
-          <a:prstGeom prst="rect">
-            <a:avLst/>
-          </a:prstGeom>
-          <a:noFill/>
-        </p:spPr>
-        <p:txBody>
-          <a:bodyPr wrap="square" anchor="t" lIns="0" rIns="0" tIns="0" bIns="0">
-            <a:spAutoFit/>
-          </a:bodyPr>
-          <a:lstStyle/>
-          <a:p>
-            <a:pPr algn="l">
-              <a:lnSpc>
-                <a:spcPct val="100000"/>
-              </a:lnSpc>
-              <a:spcBef>
-                <a:spcPts val="0"/>
-              </a:spcBef>
-              <a:spcAft>
-                <a:spcPts val="600"/>
-              </a:spcAft>
-            </a:pPr>
-            <a:r>
-              <a:rPr sz="1500" b="1">
-                <a:solidFill>
-                  <a:srgbClr val="0F172A"/>
-                </a:solidFill>
-                <a:latin typeface="NanumGothic"/>
-                <a:ea typeface="NanumGothic"/>
-                <a:cs typeface="NanumGothic"/>
-              </a:rPr>
-              <a:t>생성</a:t>
-            </a:r>
-          </a:p>
-        </p:txBody>
-      </p:sp>
-      <p:sp>
-        <p:nvSpPr>
-          <p:cNvPr id="31" name="TextBox 30"/>
-          <p:cNvSpPr txBox="1"/>
-          <p:nvPr/>
-        </p:nvSpPr>
-        <p:spPr>
-          <a:xfrm>
-            <a:off x="9246870" y="3822192"/>
-            <a:ext cx="2274570" cy="457200"/>
-          </a:xfrm>
-          <a:prstGeom prst="rect">
-            <a:avLst/>
-          </a:prstGeom>
-          <a:noFill/>
-        </p:spPr>
-        <p:txBody>
-          <a:bodyPr wrap="square" anchor="t" lIns="0" rIns="0" tIns="0" bIns="0">
-            <a:spAutoFit/>
-          </a:bodyPr>
-          <a:lstStyle/>
-          <a:p>
-            <a:pPr algn="l">
-              <a:lnSpc>
-                <a:spcPct val="100000"/>
-              </a:lnSpc>
-              <a:spcBef>
-                <a:spcPts val="0"/>
-              </a:spcBef>
-              <a:spcAft>
-                <a:spcPts val="600"/>
-              </a:spcAft>
-            </a:pPr>
-            <a:r>
-              <a:rPr sz="1100" b="0">
-                <a:solidFill>
-                  <a:srgbClr val="64748B"/>
-                </a:solidFill>
-                <a:latin typeface="NanumGothic"/>
-                <a:ea typeface="NanumGothic"/>
-                <a:cs typeface="NanumGothic"/>
-              </a:rPr>
-              <a:t>근거 기반으로 답</a:t>
-            </a:r>
-          </a:p>
-        </p:txBody>
-      </p:sp>
-      <p:sp>
-        <p:nvSpPr>
-          <p:cNvPr id="32" name="Rounded Rectangle 31"/>
-          <p:cNvSpPr/>
-          <p:nvPr/>
-        </p:nvSpPr>
-        <p:spPr>
-          <a:xfrm>
-            <a:off x="502920" y="5029200"/>
+            <a:off x="502920" y="5532120"/>
             <a:ext cx="11155680" cy="658368"/>
           </a:xfrm>
           <a:prstGeom prst="roundRect">
@@ -6776,13 +6126,13 @@
       </p:sp>
       <p:sp>
         <p:nvSpPr>
-          <p:cNvPr id="33" name="TextBox 32"/>
-          <p:cNvSpPr txBox="1"/>
-          <p:nvPr/>
-        </p:nvSpPr>
-        <p:spPr>
-          <a:xfrm>
-            <a:off x="777240" y="5029200"/>
+          <p:cNvPr id="19" name="TextBox 18"/>
+          <p:cNvSpPr txBox="1"/>
+          <p:nvPr/>
+        </p:nvSpPr>
+        <p:spPr>
+          <a:xfrm>
+            <a:off x="777240" y="5532120"/>
             <a:ext cx="10607040" cy="658368"/>
           </a:xfrm>
           <a:prstGeom prst="rect">
@@ -6827,7 +6177,7 @@
                 <a:ea typeface="NanumGothic"/>
                 <a:cs typeface="NanumGothic"/>
               </a:rPr>
-              <a:t>사례: OpenEvidence — 동료심사 문헌(NEJM·JAMA) 기반 의사용 Q&amp;A (약학 RAG 예)</a:t>
+              <a:t>키워드가 아니라 '의미'로 찾는다 · 사례: Etsy·Spotify 검색/추천이 임베딩 기반</a:t>
             </a:r>
           </a:p>
         </p:txBody>
@@ -6980,7 +6330,7 @@
                 <a:ea typeface="NanumGothic"/>
                 <a:cs typeface="NanumGothic"/>
               </a:rPr>
-              <a:t>프롬프트</a:t>
+              <a:t>RAG</a:t>
             </a:r>
           </a:p>
         </p:txBody>
@@ -7027,7 +6377,7 @@
                 <a:ea typeface="NanumSquare"/>
                 <a:cs typeface="NanumSquare"/>
               </a:rPr>
-              <a:t>프롬프트가 동작을 바꾼다</a:t>
+              <a:t>검색 증강 생성 (RAG)</a:t>
             </a:r>
           </a:p>
         </p:txBody>
@@ -7172,16 +6522,62 @@
       </p:sp>
       <p:sp>
         <p:nvSpPr>
-          <p:cNvPr id="9" name="Oval 8"/>
+          <p:cNvPr id="9" name="Rounded Rectangle 8"/>
           <p:cNvSpPr/>
           <p:nvPr/>
         </p:nvSpPr>
         <p:spPr>
           <a:xfrm>
-            <a:off x="548640" y="1911096"/>
-            <a:ext cx="146304" cy="146304"/>
-          </a:xfrm>
-          <a:prstGeom prst="ellipse">
+            <a:off x="502920" y="2651760"/>
+            <a:ext cx="2548890" cy="1737360"/>
+          </a:xfrm>
+          <a:prstGeom prst="roundRect">
+            <a:avLst/>
+          </a:prstGeom>
+          <a:solidFill>
+            <a:srgbClr val="F8FAFC"/>
+          </a:solidFill>
+          <a:ln w="12700">
+            <a:solidFill>
+              <a:srgbClr val="E2E8F0"/>
+            </a:solidFill>
+          </a:ln>
+          <a:effectLst/>
+        </p:spPr>
+        <p:style>
+          <a:lnRef idx="1">
+            <a:schemeClr val="accent1"/>
+          </a:lnRef>
+          <a:fillRef idx="3">
+            <a:schemeClr val="accent1"/>
+          </a:fillRef>
+          <a:effectRef idx="2">
+            <a:schemeClr val="accent1"/>
+          </a:effectRef>
+          <a:fontRef idx="minor">
+            <a:schemeClr val="lt1"/>
+          </a:fontRef>
+        </p:style>
+        <p:txBody>
+          <a:bodyPr rtlCol="0" anchor="ctr"/>
+          <a:lstStyle/>
+          <a:p>
+            <a:pPr algn="ctr"/>
+          </a:p>
+        </p:txBody>
+      </p:sp>
+      <p:sp>
+        <p:nvSpPr>
+          <p:cNvPr id="10" name="Rectangle 9"/>
+          <p:cNvSpPr/>
+          <p:nvPr/>
+        </p:nvSpPr>
+        <p:spPr>
+          <a:xfrm>
+            <a:off x="502920" y="2651760"/>
+            <a:ext cx="2548890" cy="109728"/>
+          </a:xfrm>
+          <a:prstGeom prst="rect">
             <a:avLst/>
           </a:prstGeom>
           <a:solidFill>
@@ -7216,14 +6612,14 @@
       </p:sp>
       <p:sp>
         <p:nvSpPr>
-          <p:cNvPr id="10" name="TextBox 9"/>
-          <p:cNvSpPr txBox="1"/>
-          <p:nvPr/>
-        </p:nvSpPr>
-        <p:spPr>
-          <a:xfrm>
-            <a:off x="868680" y="1828800"/>
-            <a:ext cx="10607040" cy="457200"/>
+          <p:cNvPr id="11" name="TextBox 10"/>
+          <p:cNvSpPr txBox="1"/>
+          <p:nvPr/>
+        </p:nvSpPr>
+        <p:spPr>
+          <a:xfrm>
+            <a:off x="640080" y="2944368"/>
+            <a:ext cx="2274570" cy="365760"/>
           </a:xfrm>
           <a:prstGeom prst="rect">
             <a:avLst/>
@@ -7248,7 +6644,54 @@
               </a:spcAft>
             </a:pPr>
             <a:r>
-              <a:rPr sz="1600" b="1">
+              <a:rPr sz="1300" b="1">
+                <a:solidFill>
+                  <a:srgbClr val="6366F1"/>
+                </a:solidFill>
+                <a:latin typeface="NanumSquare"/>
+                <a:ea typeface="NanumSquare"/>
+                <a:cs typeface="NanumSquare"/>
+              </a:rPr>
+              <a:t>1</a:t>
+            </a:r>
+          </a:p>
+        </p:txBody>
+      </p:sp>
+      <p:sp>
+        <p:nvSpPr>
+          <p:cNvPr id="12" name="TextBox 11"/>
+          <p:cNvSpPr txBox="1"/>
+          <p:nvPr/>
+        </p:nvSpPr>
+        <p:spPr>
+          <a:xfrm>
+            <a:off x="640080" y="3310128"/>
+            <a:ext cx="2274570" cy="548640"/>
+          </a:xfrm>
+          <a:prstGeom prst="rect">
+            <a:avLst/>
+          </a:prstGeom>
+          <a:noFill/>
+        </p:spPr>
+        <p:txBody>
+          <a:bodyPr wrap="square" anchor="t" lIns="0" rIns="0" tIns="0" bIns="0">
+            <a:spAutoFit/>
+          </a:bodyPr>
+          <a:lstStyle/>
+          <a:p>
+            <a:pPr algn="l">
+              <a:lnSpc>
+                <a:spcPct val="100000"/>
+              </a:lnSpc>
+              <a:spcBef>
+                <a:spcPts val="0"/>
+              </a:spcBef>
+              <a:spcAft>
+                <a:spcPts val="600"/>
+              </a:spcAft>
+            </a:pPr>
+            <a:r>
+              <a:rPr sz="1500" b="1">
                 <a:solidFill>
                   <a:srgbClr val="0F172A"/>
                 </a:solidFill>
@@ -7256,21 +6699,21 @@
                 <a:ea typeface="NanumGothic"/>
                 <a:cs typeface="NanumGothic"/>
               </a:rPr>
-              <a:t>프롬프트 = 모델에 주는 입력 전체</a:t>
-            </a:r>
-          </a:p>
-        </p:txBody>
-      </p:sp>
-      <p:sp>
-        <p:nvSpPr>
-          <p:cNvPr id="11" name="TextBox 10"/>
-          <p:cNvSpPr txBox="1"/>
-          <p:nvPr/>
-        </p:nvSpPr>
-        <p:spPr>
-          <a:xfrm>
-            <a:off x="868680" y="2212848"/>
-            <a:ext cx="10607040" cy="457200"/>
+              <a:t>질문</a:t>
+            </a:r>
+          </a:p>
+        </p:txBody>
+      </p:sp>
+      <p:sp>
+        <p:nvSpPr>
+          <p:cNvPr id="13" name="TextBox 12"/>
+          <p:cNvSpPr txBox="1"/>
+          <p:nvPr/>
+        </p:nvSpPr>
+        <p:spPr>
+          <a:xfrm>
+            <a:off x="640080" y="3822192"/>
+            <a:ext cx="2274570" cy="457200"/>
           </a:xfrm>
           <a:prstGeom prst="rect">
             <a:avLst/>
@@ -7295,7 +6738,7 @@
               </a:spcAft>
             </a:pPr>
             <a:r>
-              <a:rPr sz="1300" b="0">
+              <a:rPr sz="1100" b="0">
                 <a:solidFill>
                   <a:srgbClr val="64748B"/>
                 </a:solidFill>
@@ -7303,23 +6746,116 @@
                 <a:ea typeface="NanumGothic"/>
                 <a:cs typeface="NanumGothic"/>
               </a:rPr>
-              <a:t>지시 + 맥락 + 예시 + 데이터</a:t>
-            </a:r>
-          </a:p>
-        </p:txBody>
-      </p:sp>
-      <p:sp>
-        <p:nvSpPr>
-          <p:cNvPr id="12" name="Oval 11"/>
+              <a:t>사용자 질문</a:t>
+            </a:r>
+          </a:p>
+        </p:txBody>
+      </p:sp>
+      <p:sp>
+        <p:nvSpPr>
+          <p:cNvPr id="14" name="TextBox 13"/>
+          <p:cNvSpPr txBox="1"/>
+          <p:nvPr/>
+        </p:nvSpPr>
+        <p:spPr>
+          <a:xfrm>
+            <a:off x="3097530" y="3154680"/>
+            <a:ext cx="274320" cy="548640"/>
+          </a:xfrm>
+          <a:prstGeom prst="rect">
+            <a:avLst/>
+          </a:prstGeom>
+          <a:noFill/>
+        </p:spPr>
+        <p:txBody>
+          <a:bodyPr wrap="square" anchor="ctr" lIns="0" rIns="0" tIns="0" bIns="0">
+            <a:spAutoFit/>
+          </a:bodyPr>
+          <a:lstStyle/>
+          <a:p>
+            <a:pPr algn="ctr">
+              <a:lnSpc>
+                <a:spcPct val="100000"/>
+              </a:lnSpc>
+              <a:spcBef>
+                <a:spcPts val="0"/>
+              </a:spcBef>
+              <a:spcAft>
+                <a:spcPts val="600"/>
+              </a:spcAft>
+            </a:pPr>
+            <a:r>
+              <a:rPr sz="2200" b="1">
+                <a:solidFill>
+                  <a:srgbClr val="6366F1"/>
+                </a:solidFill>
+                <a:latin typeface="NanumSquare"/>
+                <a:ea typeface="NanumSquare"/>
+                <a:cs typeface="NanumSquare"/>
+              </a:rPr>
+              <a:t>→</a:t>
+            </a:r>
+          </a:p>
+        </p:txBody>
+      </p:sp>
+      <p:sp>
+        <p:nvSpPr>
+          <p:cNvPr id="15" name="Rounded Rectangle 14"/>
           <p:cNvSpPr/>
           <p:nvPr/>
         </p:nvSpPr>
         <p:spPr>
           <a:xfrm>
-            <a:off x="548640" y="2779776"/>
-            <a:ext cx="146304" cy="146304"/>
-          </a:xfrm>
-          <a:prstGeom prst="ellipse">
+            <a:off x="3371850" y="2651760"/>
+            <a:ext cx="2548890" cy="1737360"/>
+          </a:xfrm>
+          <a:prstGeom prst="roundRect">
+            <a:avLst/>
+          </a:prstGeom>
+          <a:solidFill>
+            <a:srgbClr val="F8FAFC"/>
+          </a:solidFill>
+          <a:ln w="12700">
+            <a:solidFill>
+              <a:srgbClr val="E2E8F0"/>
+            </a:solidFill>
+          </a:ln>
+          <a:effectLst/>
+        </p:spPr>
+        <p:style>
+          <a:lnRef idx="1">
+            <a:schemeClr val="accent1"/>
+          </a:lnRef>
+          <a:fillRef idx="3">
+            <a:schemeClr val="accent1"/>
+          </a:fillRef>
+          <a:effectRef idx="2">
+            <a:schemeClr val="accent1"/>
+          </a:effectRef>
+          <a:fontRef idx="minor">
+            <a:schemeClr val="lt1"/>
+          </a:fontRef>
+        </p:style>
+        <p:txBody>
+          <a:bodyPr rtlCol="0" anchor="ctr"/>
+          <a:lstStyle/>
+          <a:p>
+            <a:pPr algn="ctr"/>
+          </a:p>
+        </p:txBody>
+      </p:sp>
+      <p:sp>
+        <p:nvSpPr>
+          <p:cNvPr id="16" name="Rectangle 15"/>
+          <p:cNvSpPr/>
+          <p:nvPr/>
+        </p:nvSpPr>
+        <p:spPr>
+          <a:xfrm>
+            <a:off x="3371850" y="2651760"/>
+            <a:ext cx="2548890" cy="109728"/>
+          </a:xfrm>
+          <a:prstGeom prst="rect">
             <a:avLst/>
           </a:prstGeom>
           <a:solidFill>
@@ -7354,14 +6890,14 @@
       </p:sp>
       <p:sp>
         <p:nvSpPr>
-          <p:cNvPr id="13" name="TextBox 12"/>
-          <p:cNvSpPr txBox="1"/>
-          <p:nvPr/>
-        </p:nvSpPr>
-        <p:spPr>
-          <a:xfrm>
-            <a:off x="868680" y="2697480"/>
-            <a:ext cx="10607040" cy="457200"/>
+          <p:cNvPr id="17" name="TextBox 16"/>
+          <p:cNvSpPr txBox="1"/>
+          <p:nvPr/>
+        </p:nvSpPr>
+        <p:spPr>
+          <a:xfrm>
+            <a:off x="3509010" y="2944368"/>
+            <a:ext cx="2274570" cy="365760"/>
           </a:xfrm>
           <a:prstGeom prst="rect">
             <a:avLst/>
@@ -7386,7 +6922,54 @@
               </a:spcAft>
             </a:pPr>
             <a:r>
-              <a:rPr sz="1600" b="1">
+              <a:rPr sz="1300" b="1">
+                <a:solidFill>
+                  <a:srgbClr val="6366F1"/>
+                </a:solidFill>
+                <a:latin typeface="NanumSquare"/>
+                <a:ea typeface="NanumSquare"/>
+                <a:cs typeface="NanumSquare"/>
+              </a:rPr>
+              <a:t>2</a:t>
+            </a:r>
+          </a:p>
+        </p:txBody>
+      </p:sp>
+      <p:sp>
+        <p:nvSpPr>
+          <p:cNvPr id="18" name="TextBox 17"/>
+          <p:cNvSpPr txBox="1"/>
+          <p:nvPr/>
+        </p:nvSpPr>
+        <p:spPr>
+          <a:xfrm>
+            <a:off x="3509010" y="3310128"/>
+            <a:ext cx="2274570" cy="548640"/>
+          </a:xfrm>
+          <a:prstGeom prst="rect">
+            <a:avLst/>
+          </a:prstGeom>
+          <a:noFill/>
+        </p:spPr>
+        <p:txBody>
+          <a:bodyPr wrap="square" anchor="t" lIns="0" rIns="0" tIns="0" bIns="0">
+            <a:spAutoFit/>
+          </a:bodyPr>
+          <a:lstStyle/>
+          <a:p>
+            <a:pPr algn="l">
+              <a:lnSpc>
+                <a:spcPct val="100000"/>
+              </a:lnSpc>
+              <a:spcBef>
+                <a:spcPts val="0"/>
+              </a:spcBef>
+              <a:spcAft>
+                <a:spcPts val="600"/>
+              </a:spcAft>
+            </a:pPr>
+            <a:r>
+              <a:rPr sz="1500" b="1">
                 <a:solidFill>
                   <a:srgbClr val="0F172A"/>
                 </a:solidFill>
@@ -7394,21 +6977,21 @@
                 <a:ea typeface="NanumGothic"/>
                 <a:cs typeface="NanumGothic"/>
               </a:rPr>
-              <a:t>좋은 프롬프트</a:t>
-            </a:r>
-          </a:p>
-        </p:txBody>
-      </p:sp>
-      <p:sp>
-        <p:nvSpPr>
-          <p:cNvPr id="14" name="TextBox 13"/>
-          <p:cNvSpPr txBox="1"/>
-          <p:nvPr/>
-        </p:nvSpPr>
-        <p:spPr>
-          <a:xfrm>
-            <a:off x="868680" y="3081528"/>
-            <a:ext cx="10607040" cy="457200"/>
+              <a:t>검색</a:t>
+            </a:r>
+          </a:p>
+        </p:txBody>
+      </p:sp>
+      <p:sp>
+        <p:nvSpPr>
+          <p:cNvPr id="19" name="TextBox 18"/>
+          <p:cNvSpPr txBox="1"/>
+          <p:nvPr/>
+        </p:nvSpPr>
+        <p:spPr>
+          <a:xfrm>
+            <a:off x="3509010" y="3822192"/>
+            <a:ext cx="2274570" cy="457200"/>
           </a:xfrm>
           <a:prstGeom prst="rect">
             <a:avLst/>
@@ -7433,7 +7016,7 @@
               </a:spcAft>
             </a:pPr>
             <a:r>
-              <a:rPr sz="1300" b="0">
+              <a:rPr sz="1100" b="0">
                 <a:solidFill>
                   <a:srgbClr val="64748B"/>
                 </a:solidFill>
@@ -7441,23 +7024,116 @@
                 <a:ea typeface="NanumGothic"/>
                 <a:cs typeface="NanumGothic"/>
               </a:rPr>
-              <a:t>명확한 목표 · 충분한 맥락 · 원하는 형식 명시</a:t>
-            </a:r>
-          </a:p>
-        </p:txBody>
-      </p:sp>
-      <p:sp>
-        <p:nvSpPr>
-          <p:cNvPr id="15" name="Oval 14"/>
+              <a:t>관련 문서 찾기(임베딩)</a:t>
+            </a:r>
+          </a:p>
+        </p:txBody>
+      </p:sp>
+      <p:sp>
+        <p:nvSpPr>
+          <p:cNvPr id="20" name="TextBox 19"/>
+          <p:cNvSpPr txBox="1"/>
+          <p:nvPr/>
+        </p:nvSpPr>
+        <p:spPr>
+          <a:xfrm>
+            <a:off x="5966460" y="3154680"/>
+            <a:ext cx="274320" cy="548640"/>
+          </a:xfrm>
+          <a:prstGeom prst="rect">
+            <a:avLst/>
+          </a:prstGeom>
+          <a:noFill/>
+        </p:spPr>
+        <p:txBody>
+          <a:bodyPr wrap="square" anchor="ctr" lIns="0" rIns="0" tIns="0" bIns="0">
+            <a:spAutoFit/>
+          </a:bodyPr>
+          <a:lstStyle/>
+          <a:p>
+            <a:pPr algn="ctr">
+              <a:lnSpc>
+                <a:spcPct val="100000"/>
+              </a:lnSpc>
+              <a:spcBef>
+                <a:spcPts val="0"/>
+              </a:spcBef>
+              <a:spcAft>
+                <a:spcPts val="600"/>
+              </a:spcAft>
+            </a:pPr>
+            <a:r>
+              <a:rPr sz="2200" b="1">
+                <a:solidFill>
+                  <a:srgbClr val="6366F1"/>
+                </a:solidFill>
+                <a:latin typeface="NanumSquare"/>
+                <a:ea typeface="NanumSquare"/>
+                <a:cs typeface="NanumSquare"/>
+              </a:rPr>
+              <a:t>→</a:t>
+            </a:r>
+          </a:p>
+        </p:txBody>
+      </p:sp>
+      <p:sp>
+        <p:nvSpPr>
+          <p:cNvPr id="21" name="Rounded Rectangle 20"/>
           <p:cNvSpPr/>
           <p:nvPr/>
         </p:nvSpPr>
         <p:spPr>
           <a:xfrm>
-            <a:off x="548640" y="3648456"/>
-            <a:ext cx="146304" cy="146304"/>
-          </a:xfrm>
-          <a:prstGeom prst="ellipse">
+            <a:off x="6240780" y="2651760"/>
+            <a:ext cx="2548890" cy="1737360"/>
+          </a:xfrm>
+          <a:prstGeom prst="roundRect">
+            <a:avLst/>
+          </a:prstGeom>
+          <a:solidFill>
+            <a:srgbClr val="F8FAFC"/>
+          </a:solidFill>
+          <a:ln w="12700">
+            <a:solidFill>
+              <a:srgbClr val="E2E8F0"/>
+            </a:solidFill>
+          </a:ln>
+          <a:effectLst/>
+        </p:spPr>
+        <p:style>
+          <a:lnRef idx="1">
+            <a:schemeClr val="accent1"/>
+          </a:lnRef>
+          <a:fillRef idx="3">
+            <a:schemeClr val="accent1"/>
+          </a:fillRef>
+          <a:effectRef idx="2">
+            <a:schemeClr val="accent1"/>
+          </a:effectRef>
+          <a:fontRef idx="minor">
+            <a:schemeClr val="lt1"/>
+          </a:fontRef>
+        </p:style>
+        <p:txBody>
+          <a:bodyPr rtlCol="0" anchor="ctr"/>
+          <a:lstStyle/>
+          <a:p>
+            <a:pPr algn="ctr"/>
+          </a:p>
+        </p:txBody>
+      </p:sp>
+      <p:sp>
+        <p:nvSpPr>
+          <p:cNvPr id="22" name="Rectangle 21"/>
+          <p:cNvSpPr/>
+          <p:nvPr/>
+        </p:nvSpPr>
+        <p:spPr>
+          <a:xfrm>
+            <a:off x="6240780" y="2651760"/>
+            <a:ext cx="2548890" cy="109728"/>
+          </a:xfrm>
+          <a:prstGeom prst="rect">
             <a:avLst/>
           </a:prstGeom>
           <a:solidFill>
@@ -7492,14 +7168,14 @@
       </p:sp>
       <p:sp>
         <p:nvSpPr>
-          <p:cNvPr id="16" name="TextBox 15"/>
-          <p:cNvSpPr txBox="1"/>
-          <p:nvPr/>
-        </p:nvSpPr>
-        <p:spPr>
-          <a:xfrm>
-            <a:off x="868680" y="3566160"/>
-            <a:ext cx="10607040" cy="457200"/>
+          <p:cNvPr id="23" name="TextBox 22"/>
+          <p:cNvSpPr txBox="1"/>
+          <p:nvPr/>
+        </p:nvSpPr>
+        <p:spPr>
+          <a:xfrm>
+            <a:off x="6377940" y="2944368"/>
+            <a:ext cx="2274570" cy="365760"/>
           </a:xfrm>
           <a:prstGeom prst="rect">
             <a:avLst/>
@@ -7524,7 +7200,54 @@
               </a:spcAft>
             </a:pPr>
             <a:r>
-              <a:rPr sz="1600" b="1">
+              <a:rPr sz="1300" b="1">
+                <a:solidFill>
+                  <a:srgbClr val="6366F1"/>
+                </a:solidFill>
+                <a:latin typeface="NanumSquare"/>
+                <a:ea typeface="NanumSquare"/>
+                <a:cs typeface="NanumSquare"/>
+              </a:rPr>
+              <a:t>3</a:t>
+            </a:r>
+          </a:p>
+        </p:txBody>
+      </p:sp>
+      <p:sp>
+        <p:nvSpPr>
+          <p:cNvPr id="24" name="TextBox 23"/>
+          <p:cNvSpPr txBox="1"/>
+          <p:nvPr/>
+        </p:nvSpPr>
+        <p:spPr>
+          <a:xfrm>
+            <a:off x="6377940" y="3310128"/>
+            <a:ext cx="2274570" cy="548640"/>
+          </a:xfrm>
+          <a:prstGeom prst="rect">
+            <a:avLst/>
+          </a:prstGeom>
+          <a:noFill/>
+        </p:spPr>
+        <p:txBody>
+          <a:bodyPr wrap="square" anchor="t" lIns="0" rIns="0" tIns="0" bIns="0">
+            <a:spAutoFit/>
+          </a:bodyPr>
+          <a:lstStyle/>
+          <a:p>
+            <a:pPr algn="l">
+              <a:lnSpc>
+                <a:spcPct val="100000"/>
+              </a:lnSpc>
+              <a:spcBef>
+                <a:spcPts val="0"/>
+              </a:spcBef>
+              <a:spcAft>
+                <a:spcPts val="600"/>
+              </a:spcAft>
+            </a:pPr>
+            <a:r>
+              <a:rPr sz="1500" b="1">
                 <a:solidFill>
                   <a:srgbClr val="0F172A"/>
                 </a:solidFill>
@@ -7532,21 +7255,21 @@
                 <a:ea typeface="NanumGothic"/>
                 <a:cs typeface="NanumGothic"/>
               </a:rPr>
-              <a:t>나쁜 프롬프트</a:t>
-            </a:r>
-          </a:p>
-        </p:txBody>
-      </p:sp>
-      <p:sp>
-        <p:nvSpPr>
-          <p:cNvPr id="17" name="TextBox 16"/>
-          <p:cNvSpPr txBox="1"/>
-          <p:nvPr/>
-        </p:nvSpPr>
-        <p:spPr>
-          <a:xfrm>
-            <a:off x="868680" y="3950208"/>
-            <a:ext cx="10607040" cy="457200"/>
+              <a:t>주입</a:t>
+            </a:r>
+          </a:p>
+        </p:txBody>
+      </p:sp>
+      <p:sp>
+        <p:nvSpPr>
+          <p:cNvPr id="25" name="TextBox 24"/>
+          <p:cNvSpPr txBox="1"/>
+          <p:nvPr/>
+        </p:nvSpPr>
+        <p:spPr>
+          <a:xfrm>
+            <a:off x="6377940" y="3822192"/>
+            <a:ext cx="2274570" cy="457200"/>
           </a:xfrm>
           <a:prstGeom prst="rect">
             <a:avLst/>
@@ -7571,7 +7294,7 @@
               </a:spcAft>
             </a:pPr>
             <a:r>
-              <a:rPr sz="1300" b="0">
+              <a:rPr sz="1100" b="0">
                 <a:solidFill>
                   <a:srgbClr val="64748B"/>
                 </a:solidFill>
@@ -7579,20 +7302,298 @@
                 <a:ea typeface="NanumGothic"/>
                 <a:cs typeface="NanumGothic"/>
               </a:rPr>
-              <a:t>모호·맥락 부족 → 엉뚱하거나 일반적인 답</a:t>
-            </a:r>
-          </a:p>
-        </p:txBody>
-      </p:sp>
-      <p:sp>
-        <p:nvSpPr>
-          <p:cNvPr id="18" name="Rounded Rectangle 17"/>
+              <a:t>찾은 근거를 프롬프트에</a:t>
+            </a:r>
+          </a:p>
+        </p:txBody>
+      </p:sp>
+      <p:sp>
+        <p:nvSpPr>
+          <p:cNvPr id="26" name="TextBox 25"/>
+          <p:cNvSpPr txBox="1"/>
+          <p:nvPr/>
+        </p:nvSpPr>
+        <p:spPr>
+          <a:xfrm>
+            <a:off x="8835390" y="3154680"/>
+            <a:ext cx="274320" cy="548640"/>
+          </a:xfrm>
+          <a:prstGeom prst="rect">
+            <a:avLst/>
+          </a:prstGeom>
+          <a:noFill/>
+        </p:spPr>
+        <p:txBody>
+          <a:bodyPr wrap="square" anchor="ctr" lIns="0" rIns="0" tIns="0" bIns="0">
+            <a:spAutoFit/>
+          </a:bodyPr>
+          <a:lstStyle/>
+          <a:p>
+            <a:pPr algn="ctr">
+              <a:lnSpc>
+                <a:spcPct val="100000"/>
+              </a:lnSpc>
+              <a:spcBef>
+                <a:spcPts val="0"/>
+              </a:spcBef>
+              <a:spcAft>
+                <a:spcPts val="600"/>
+              </a:spcAft>
+            </a:pPr>
+            <a:r>
+              <a:rPr sz="2200" b="1">
+                <a:solidFill>
+                  <a:srgbClr val="6366F1"/>
+                </a:solidFill>
+                <a:latin typeface="NanumSquare"/>
+                <a:ea typeface="NanumSquare"/>
+                <a:cs typeface="NanumSquare"/>
+              </a:rPr>
+              <a:t>→</a:t>
+            </a:r>
+          </a:p>
+        </p:txBody>
+      </p:sp>
+      <p:sp>
+        <p:nvSpPr>
+          <p:cNvPr id="27" name="Rounded Rectangle 26"/>
           <p:cNvSpPr/>
           <p:nvPr/>
         </p:nvSpPr>
         <p:spPr>
           <a:xfrm>
-            <a:off x="502920" y="5532120"/>
+            <a:off x="9109710" y="2651760"/>
+            <a:ext cx="2548890" cy="1737360"/>
+          </a:xfrm>
+          <a:prstGeom prst="roundRect">
+            <a:avLst/>
+          </a:prstGeom>
+          <a:solidFill>
+            <a:srgbClr val="F8FAFC"/>
+          </a:solidFill>
+          <a:ln w="12700">
+            <a:solidFill>
+              <a:srgbClr val="E2E8F0"/>
+            </a:solidFill>
+          </a:ln>
+          <a:effectLst/>
+        </p:spPr>
+        <p:style>
+          <a:lnRef idx="1">
+            <a:schemeClr val="accent1"/>
+          </a:lnRef>
+          <a:fillRef idx="3">
+            <a:schemeClr val="accent1"/>
+          </a:fillRef>
+          <a:effectRef idx="2">
+            <a:schemeClr val="accent1"/>
+          </a:effectRef>
+          <a:fontRef idx="minor">
+            <a:schemeClr val="lt1"/>
+          </a:fontRef>
+        </p:style>
+        <p:txBody>
+          <a:bodyPr rtlCol="0" anchor="ctr"/>
+          <a:lstStyle/>
+          <a:p>
+            <a:pPr algn="ctr"/>
+          </a:p>
+        </p:txBody>
+      </p:sp>
+      <p:sp>
+        <p:nvSpPr>
+          <p:cNvPr id="28" name="Rectangle 27"/>
+          <p:cNvSpPr/>
+          <p:nvPr/>
+        </p:nvSpPr>
+        <p:spPr>
+          <a:xfrm>
+            <a:off x="9109710" y="2651760"/>
+            <a:ext cx="2548890" cy="109728"/>
+          </a:xfrm>
+          <a:prstGeom prst="rect">
+            <a:avLst/>
+          </a:prstGeom>
+          <a:solidFill>
+            <a:srgbClr val="6366F1"/>
+          </a:solidFill>
+          <a:ln>
+            <a:noFill/>
+          </a:ln>
+          <a:effectLst/>
+        </p:spPr>
+        <p:style>
+          <a:lnRef idx="1">
+            <a:schemeClr val="accent1"/>
+          </a:lnRef>
+          <a:fillRef idx="3">
+            <a:schemeClr val="accent1"/>
+          </a:fillRef>
+          <a:effectRef idx="2">
+            <a:schemeClr val="accent1"/>
+          </a:effectRef>
+          <a:fontRef idx="minor">
+            <a:schemeClr val="lt1"/>
+          </a:fontRef>
+        </p:style>
+        <p:txBody>
+          <a:bodyPr rtlCol="0" anchor="ctr"/>
+          <a:lstStyle/>
+          <a:p>
+            <a:pPr algn="ctr"/>
+          </a:p>
+        </p:txBody>
+      </p:sp>
+      <p:sp>
+        <p:nvSpPr>
+          <p:cNvPr id="29" name="TextBox 28"/>
+          <p:cNvSpPr txBox="1"/>
+          <p:nvPr/>
+        </p:nvSpPr>
+        <p:spPr>
+          <a:xfrm>
+            <a:off x="9246870" y="2944368"/>
+            <a:ext cx="2274570" cy="365760"/>
+          </a:xfrm>
+          <a:prstGeom prst="rect">
+            <a:avLst/>
+          </a:prstGeom>
+          <a:noFill/>
+        </p:spPr>
+        <p:txBody>
+          <a:bodyPr wrap="square" anchor="t" lIns="0" rIns="0" tIns="0" bIns="0">
+            <a:spAutoFit/>
+          </a:bodyPr>
+          <a:lstStyle/>
+          <a:p>
+            <a:pPr algn="l">
+              <a:lnSpc>
+                <a:spcPct val="100000"/>
+              </a:lnSpc>
+              <a:spcBef>
+                <a:spcPts val="0"/>
+              </a:spcBef>
+              <a:spcAft>
+                <a:spcPts val="600"/>
+              </a:spcAft>
+            </a:pPr>
+            <a:r>
+              <a:rPr sz="1300" b="1">
+                <a:solidFill>
+                  <a:srgbClr val="6366F1"/>
+                </a:solidFill>
+                <a:latin typeface="NanumSquare"/>
+                <a:ea typeface="NanumSquare"/>
+                <a:cs typeface="NanumSquare"/>
+              </a:rPr>
+              <a:t>4</a:t>
+            </a:r>
+          </a:p>
+        </p:txBody>
+      </p:sp>
+      <p:sp>
+        <p:nvSpPr>
+          <p:cNvPr id="30" name="TextBox 29"/>
+          <p:cNvSpPr txBox="1"/>
+          <p:nvPr/>
+        </p:nvSpPr>
+        <p:spPr>
+          <a:xfrm>
+            <a:off x="9246870" y="3310128"/>
+            <a:ext cx="2274570" cy="548640"/>
+          </a:xfrm>
+          <a:prstGeom prst="rect">
+            <a:avLst/>
+          </a:prstGeom>
+          <a:noFill/>
+        </p:spPr>
+        <p:txBody>
+          <a:bodyPr wrap="square" anchor="t" lIns="0" rIns="0" tIns="0" bIns="0">
+            <a:spAutoFit/>
+          </a:bodyPr>
+          <a:lstStyle/>
+          <a:p>
+            <a:pPr algn="l">
+              <a:lnSpc>
+                <a:spcPct val="100000"/>
+              </a:lnSpc>
+              <a:spcBef>
+                <a:spcPts val="0"/>
+              </a:spcBef>
+              <a:spcAft>
+                <a:spcPts val="600"/>
+              </a:spcAft>
+            </a:pPr>
+            <a:r>
+              <a:rPr sz="1500" b="1">
+                <a:solidFill>
+                  <a:srgbClr val="0F172A"/>
+                </a:solidFill>
+                <a:latin typeface="NanumGothic"/>
+                <a:ea typeface="NanumGothic"/>
+                <a:cs typeface="NanumGothic"/>
+              </a:rPr>
+              <a:t>생성</a:t>
+            </a:r>
+          </a:p>
+        </p:txBody>
+      </p:sp>
+      <p:sp>
+        <p:nvSpPr>
+          <p:cNvPr id="31" name="TextBox 30"/>
+          <p:cNvSpPr txBox="1"/>
+          <p:nvPr/>
+        </p:nvSpPr>
+        <p:spPr>
+          <a:xfrm>
+            <a:off x="9246870" y="3822192"/>
+            <a:ext cx="2274570" cy="457200"/>
+          </a:xfrm>
+          <a:prstGeom prst="rect">
+            <a:avLst/>
+          </a:prstGeom>
+          <a:noFill/>
+        </p:spPr>
+        <p:txBody>
+          <a:bodyPr wrap="square" anchor="t" lIns="0" rIns="0" tIns="0" bIns="0">
+            <a:spAutoFit/>
+          </a:bodyPr>
+          <a:lstStyle/>
+          <a:p>
+            <a:pPr algn="l">
+              <a:lnSpc>
+                <a:spcPct val="100000"/>
+              </a:lnSpc>
+              <a:spcBef>
+                <a:spcPts val="0"/>
+              </a:spcBef>
+              <a:spcAft>
+                <a:spcPts val="600"/>
+              </a:spcAft>
+            </a:pPr>
+            <a:r>
+              <a:rPr sz="1100" b="0">
+                <a:solidFill>
+                  <a:srgbClr val="64748B"/>
+                </a:solidFill>
+                <a:latin typeface="NanumGothic"/>
+                <a:ea typeface="NanumGothic"/>
+                <a:cs typeface="NanumGothic"/>
+              </a:rPr>
+              <a:t>근거 기반으로 답</a:t>
+            </a:r>
+          </a:p>
+        </p:txBody>
+      </p:sp>
+      <p:sp>
+        <p:nvSpPr>
+          <p:cNvPr id="32" name="Rounded Rectangle 31"/>
+          <p:cNvSpPr/>
+          <p:nvPr/>
+        </p:nvSpPr>
+        <p:spPr>
+          <a:xfrm>
+            <a:off x="502920" y="5029200"/>
             <a:ext cx="11155680" cy="658368"/>
           </a:xfrm>
           <a:prstGeom prst="roundRect">
@@ -7632,13 +7633,13 @@
       </p:sp>
       <p:sp>
         <p:nvSpPr>
-          <p:cNvPr id="19" name="TextBox 18"/>
-          <p:cNvSpPr txBox="1"/>
-          <p:nvPr/>
-        </p:nvSpPr>
-        <p:spPr>
-          <a:xfrm>
-            <a:off x="777240" y="5532120"/>
+          <p:cNvPr id="33" name="TextBox 32"/>
+          <p:cNvSpPr txBox="1"/>
+          <p:nvPr/>
+        </p:nvSpPr>
+        <p:spPr>
+          <a:xfrm>
+            <a:off x="777240" y="5029200"/>
             <a:ext cx="10607040" cy="658368"/>
           </a:xfrm>
           <a:prstGeom prst="rect">
@@ -7683,7 +7684,7 @@
                 <a:ea typeface="NanumGothic"/>
                 <a:cs typeface="NanumGothic"/>
               </a:rPr>
-              <a:t>비교: '코딩 도와줘' vs 'CSV 항목별 합계 코드 만들고 실행·확인해줘'</a:t>
+              <a:t>사례: OpenEvidence — 동료심사 문헌(NEJM·JAMA) 기반 의사용 Q&amp;A (약학 RAG 예)</a:t>
             </a:r>
           </a:p>
         </p:txBody>
@@ -7836,7 +7837,7 @@
                 <a:ea typeface="NanumGothic"/>
                 <a:cs typeface="NanumGothic"/>
               </a:rPr>
-              <a:t>프롬프트 기법</a:t>
+              <a:t>프롬프트</a:t>
             </a:r>
           </a:p>
         </p:txBody>
@@ -7883,7 +7884,7 @@
                 <a:ea typeface="NanumSquare"/>
                 <a:cs typeface="NanumSquare"/>
               </a:rPr>
-              <a:t>자주 쓰는 패턴</a:t>
+              <a:t>프롬프트가 동작을 바꾼다</a:t>
             </a:r>
           </a:p>
         </p:txBody>
@@ -8112,7 +8113,7 @@
                 <a:ea typeface="NanumGothic"/>
                 <a:cs typeface="NanumGothic"/>
               </a:rPr>
-              <a:t>역할·맥락 부여</a:t>
+              <a:t>프롬프트 = 모델에 주는 입력 전체</a:t>
             </a:r>
           </a:p>
         </p:txBody>
@@ -8159,7 +8160,7 @@
                 <a:ea typeface="NanumGothic"/>
                 <a:cs typeface="NanumGothic"/>
               </a:rPr>
-              <a:t>'너는 ~전문가' + 배경 → 답의 톤·깊이 조정</a:t>
+              <a:t>지시 + 맥락 + 예시 + 데이터</a:t>
             </a:r>
           </a:p>
         </p:txBody>
@@ -8250,7 +8251,7 @@
                 <a:ea typeface="NanumGothic"/>
                 <a:cs typeface="NanumGothic"/>
               </a:rPr>
-              <a:t>예시 제공 (few-shot)</a:t>
+              <a:t>좋은 프롬프트</a:t>
             </a:r>
           </a:p>
         </p:txBody>
@@ -8297,7 +8298,7 @@
                 <a:ea typeface="NanumGothic"/>
                 <a:cs typeface="NanumGothic"/>
               </a:rPr>
-              <a:t>원하는 입출력 예 2~3개 → 형식이 안정</a:t>
+              <a:t>명확한 목표 · 충분한 맥락 · 원하는 형식 명시</a:t>
             </a:r>
           </a:p>
         </p:txBody>
@@ -8388,7 +8389,7 @@
                 <a:ea typeface="NanumGothic"/>
                 <a:cs typeface="NanumGothic"/>
               </a:rPr>
-              <a:t>단계적 사고 (CoT)</a:t>
+              <a:t>나쁜 프롬프트</a:t>
             </a:r>
           </a:p>
         </p:txBody>
@@ -8435,7 +8436,7 @@
                 <a:ea typeface="NanumGothic"/>
                 <a:cs typeface="NanumGothic"/>
               </a:rPr>
-              <a:t>'단계별로 생각해줘' → 복잡한 추론 정확도↑</a:t>
+              <a:t>모호·맥락 부족 → 엉뚱하거나 일반적인 답</a:t>
             </a:r>
           </a:p>
         </p:txBody>
@@ -8539,7 +8540,7 @@
                 <a:ea typeface="NanumGothic"/>
                 <a:cs typeface="NanumGothic"/>
               </a:rPr>
-              <a:t>사례: GPT-3(2020) — 예시 몇 개(few-shot)만으로 번역·Q&amp;A 수행</a:t>
+              <a:t>비교: '코딩 도와줘' vs 'CSV 항목별 합계 코드 만들고 실행·확인해줘'</a:t>
             </a:r>
           </a:p>
         </p:txBody>
@@ -8692,7 +8693,7 @@
                 <a:ea typeface="NanumGothic"/>
                 <a:cs typeface="NanumGothic"/>
               </a:rPr>
-              <a:t>생성 제어</a:t>
+              <a:t>프롬프트 기법</a:t>
             </a:r>
           </a:p>
         </p:txBody>
@@ -8739,7 +8740,7 @@
                 <a:ea typeface="NanumSquare"/>
                 <a:cs typeface="NanumSquare"/>
               </a:rPr>
-              <a:t>같은 모델, 다른 출력</a:t>
+              <a:t>자주 쓰는 패턴</a:t>
             </a:r>
           </a:p>
         </p:txBody>
@@ -8968,7 +8969,7 @@
                 <a:ea typeface="NanumGothic"/>
                 <a:cs typeface="NanumGothic"/>
               </a:rPr>
-              <a:t>temperature</a:t>
+              <a:t>역할·맥락 부여</a:t>
             </a:r>
           </a:p>
         </p:txBody>
@@ -9015,7 +9016,7 @@
                 <a:ea typeface="NanumGothic"/>
                 <a:cs typeface="NanumGothic"/>
               </a:rPr>
-              <a:t>낮으면 결정적·일관, 높으면 다양·창의(불안정)</a:t>
+              <a:t>'너는 ~전문가' + 배경 → 답의 톤·깊이 조정</a:t>
             </a:r>
           </a:p>
         </p:txBody>
@@ -9106,7 +9107,7 @@
                 <a:ea typeface="NanumGothic"/>
                 <a:cs typeface="NanumGothic"/>
               </a:rPr>
-              <a:t>확률적 생성</a:t>
+              <a:t>예시 제공 (few-shot)</a:t>
             </a:r>
           </a:p>
         </p:txBody>
@@ -9153,7 +9154,7 @@
                 <a:ea typeface="NanumGothic"/>
                 <a:cs typeface="NanumGothic"/>
               </a:rPr>
-              <a:t>같은 질문도 매번 다른 답이 나올 수 있다</a:t>
+              <a:t>원하는 입출력 예 2~3개 → 형식이 안정</a:t>
             </a:r>
           </a:p>
         </p:txBody>
@@ -9244,7 +9245,7 @@
                 <a:ea typeface="NanumGothic"/>
                 <a:cs typeface="NanumGothic"/>
               </a:rPr>
-              <a:t>재현성에의 함의</a:t>
+              <a:t>단계적 사고 (CoT)</a:t>
             </a:r>
           </a:p>
         </p:txBody>
@@ -9291,7 +9292,111 @@
                 <a:ea typeface="NanumGothic"/>
                 <a:cs typeface="NanumGothic"/>
               </a:rPr>
-              <a:t>리서치엔 낮은 temperature가 유리 — 결과 안정</a:t>
+              <a:t>'단계별로 생각해줘' → 복잡한 추론 정확도↑</a:t>
+            </a:r>
+          </a:p>
+        </p:txBody>
+      </p:sp>
+      <p:sp>
+        <p:nvSpPr>
+          <p:cNvPr id="18" name="Rounded Rectangle 17"/>
+          <p:cNvSpPr/>
+          <p:nvPr/>
+        </p:nvSpPr>
+        <p:spPr>
+          <a:xfrm>
+            <a:off x="502920" y="5532120"/>
+            <a:ext cx="11155680" cy="658368"/>
+          </a:xfrm>
+          <a:prstGeom prst="roundRect">
+            <a:avLst/>
+          </a:prstGeom>
+          <a:solidFill>
+            <a:srgbClr val="F1F5F9"/>
+          </a:solidFill>
+          <a:ln w="12700">
+            <a:solidFill>
+              <a:srgbClr val="E2E8F0"/>
+            </a:solidFill>
+          </a:ln>
+          <a:effectLst/>
+        </p:spPr>
+        <p:style>
+          <a:lnRef idx="1">
+            <a:schemeClr val="accent1"/>
+          </a:lnRef>
+          <a:fillRef idx="3">
+            <a:schemeClr val="accent1"/>
+          </a:fillRef>
+          <a:effectRef idx="2">
+            <a:schemeClr val="accent1"/>
+          </a:effectRef>
+          <a:fontRef idx="minor">
+            <a:schemeClr val="lt1"/>
+          </a:fontRef>
+        </p:style>
+        <p:txBody>
+          <a:bodyPr rtlCol="0" anchor="ctr"/>
+          <a:lstStyle/>
+          <a:p>
+            <a:pPr algn="ctr"/>
+          </a:p>
+        </p:txBody>
+      </p:sp>
+      <p:sp>
+        <p:nvSpPr>
+          <p:cNvPr id="19" name="TextBox 18"/>
+          <p:cNvSpPr txBox="1"/>
+          <p:nvPr/>
+        </p:nvSpPr>
+        <p:spPr>
+          <a:xfrm>
+            <a:off x="777240" y="5532120"/>
+            <a:ext cx="10607040" cy="658368"/>
+          </a:xfrm>
+          <a:prstGeom prst="rect">
+            <a:avLst/>
+          </a:prstGeom>
+          <a:noFill/>
+        </p:spPr>
+        <p:txBody>
+          <a:bodyPr wrap="square" anchor="ctr" lIns="0" rIns="0" tIns="0" bIns="0">
+            <a:spAutoFit/>
+          </a:bodyPr>
+          <a:lstStyle/>
+          <a:p>
+            <a:pPr algn="l">
+              <a:lnSpc>
+                <a:spcPct val="100000"/>
+              </a:lnSpc>
+              <a:spcBef>
+                <a:spcPts val="0"/>
+              </a:spcBef>
+              <a:spcAft>
+                <a:spcPts val="600"/>
+              </a:spcAft>
+            </a:pPr>
+            <a:r>
+              <a:rPr sz="1200" b="1">
+                <a:solidFill>
+                  <a:srgbClr val="6366F1"/>
+                </a:solidFill>
+                <a:latin typeface="NanumGothic"/>
+                <a:ea typeface="NanumGothic"/>
+                <a:cs typeface="NanumGothic"/>
+              </a:rPr>
+              <a:t>NOTE   </a:t>
+            </a:r>
+            <a:r>
+              <a:rPr sz="1300" b="0">
+                <a:solidFill>
+                  <a:srgbClr val="0F172A"/>
+                </a:solidFill>
+                <a:latin typeface="NanumGothic"/>
+                <a:ea typeface="NanumGothic"/>
+                <a:cs typeface="NanumGothic"/>
+              </a:rPr>
+              <a:t>사례: GPT-3(2020) — 예시 몇 개(few-shot)만으로 번역·Q&amp;A 수행</a:t>
             </a:r>
           </a:p>
         </p:txBody>
@@ -9444,7 +9549,7 @@
                 <a:ea typeface="NanumGothic"/>
                 <a:cs typeface="NanumGothic"/>
               </a:rPr>
-              <a:t>컨텍스트</a:t>
+              <a:t>생성 제어</a:t>
             </a:r>
           </a:p>
         </p:txBody>
@@ -9491,7 +9596,7 @@
                 <a:ea typeface="NanumSquare"/>
                 <a:cs typeface="NanumSquare"/>
               </a:rPr>
-              <a:t>컨텍스트 윈도우</a:t>
+              <a:t>같은 모델, 다른 출력</a:t>
             </a:r>
           </a:p>
         </p:txBody>
@@ -9720,7 +9825,7 @@
                 <a:ea typeface="NanumGothic"/>
                 <a:cs typeface="NanumGothic"/>
               </a:rPr>
-              <a:t>한 번에 볼 수 있는 토큰 한계</a:t>
+              <a:t>temperature</a:t>
             </a:r>
           </a:p>
         </p:txBody>
@@ -9767,7 +9872,7 @@
                 <a:ea typeface="NanumGothic"/>
                 <a:cs typeface="NanumGothic"/>
               </a:rPr>
-              <a:t>프롬프트+대화+자료가 이 한도 안에 들어가야</a:t>
+              <a:t>낮으면 결정적·일관, 높으면 다양·창의(불안정)</a:t>
             </a:r>
           </a:p>
         </p:txBody>
@@ -9858,7 +9963,7 @@
                 <a:ea typeface="NanumGothic"/>
                 <a:cs typeface="NanumGothic"/>
               </a:rPr>
-              <a:t>길어지면</a:t>
+              <a:t>확률적 생성</a:t>
             </a:r>
           </a:p>
         </p:txBody>
@@ -9905,7 +10010,7 @@
                 <a:ea typeface="NanumGothic"/>
                 <a:cs typeface="NanumGothic"/>
               </a:rPr>
-              <a:t>비용↑·속도↓·중간 내용 놓침(lost in the middle)</a:t>
+              <a:t>같은 질문도 매번 다른 답이 나올 수 있다</a:t>
             </a:r>
           </a:p>
         </p:txBody>
@@ -9996,7 +10101,7 @@
                 <a:ea typeface="NanumGothic"/>
                 <a:cs typeface="NanumGothic"/>
               </a:rPr>
-              <a:t>에이전트와의 관련</a:t>
+              <a:t>재현성에의 함의</a:t>
             </a:r>
           </a:p>
         </p:txBody>
@@ -10043,111 +10148,7 @@
                 <a:ea typeface="NanumGothic"/>
                 <a:cs typeface="NanumGothic"/>
               </a:rPr>
-              <a:t>외부 메모리·검색·도구로 한계를 보완</a:t>
-            </a:r>
-          </a:p>
-        </p:txBody>
-      </p:sp>
-      <p:sp>
-        <p:nvSpPr>
-          <p:cNvPr id="18" name="Rounded Rectangle 17"/>
-          <p:cNvSpPr/>
-          <p:nvPr/>
-        </p:nvSpPr>
-        <p:spPr>
-          <a:xfrm>
-            <a:off x="502920" y="5532120"/>
-            <a:ext cx="11155680" cy="658368"/>
-          </a:xfrm>
-          <a:prstGeom prst="roundRect">
-            <a:avLst/>
-          </a:prstGeom>
-          <a:solidFill>
-            <a:srgbClr val="F1F5F9"/>
-          </a:solidFill>
-          <a:ln w="12700">
-            <a:solidFill>
-              <a:srgbClr val="E2E8F0"/>
-            </a:solidFill>
-          </a:ln>
-          <a:effectLst/>
-        </p:spPr>
-        <p:style>
-          <a:lnRef idx="1">
-            <a:schemeClr val="accent1"/>
-          </a:lnRef>
-          <a:fillRef idx="3">
-            <a:schemeClr val="accent1"/>
-          </a:fillRef>
-          <a:effectRef idx="2">
-            <a:schemeClr val="accent1"/>
-          </a:effectRef>
-          <a:fontRef idx="minor">
-            <a:schemeClr val="lt1"/>
-          </a:fontRef>
-        </p:style>
-        <p:txBody>
-          <a:bodyPr rtlCol="0" anchor="ctr"/>
-          <a:lstStyle/>
-          <a:p>
-            <a:pPr algn="ctr"/>
-          </a:p>
-        </p:txBody>
-      </p:sp>
-      <p:sp>
-        <p:nvSpPr>
-          <p:cNvPr id="19" name="TextBox 18"/>
-          <p:cNvSpPr txBox="1"/>
-          <p:nvPr/>
-        </p:nvSpPr>
-        <p:spPr>
-          <a:xfrm>
-            <a:off x="777240" y="5532120"/>
-            <a:ext cx="10607040" cy="658368"/>
-          </a:xfrm>
-          <a:prstGeom prst="rect">
-            <a:avLst/>
-          </a:prstGeom>
-          <a:noFill/>
-        </p:spPr>
-        <p:txBody>
-          <a:bodyPr wrap="square" anchor="ctr" lIns="0" rIns="0" tIns="0" bIns="0">
-            <a:spAutoFit/>
-          </a:bodyPr>
-          <a:lstStyle/>
-          <a:p>
-            <a:pPr algn="l">
-              <a:lnSpc>
-                <a:spcPct val="100000"/>
-              </a:lnSpc>
-              <a:spcBef>
-                <a:spcPts val="0"/>
-              </a:spcBef>
-              <a:spcAft>
-                <a:spcPts val="600"/>
-              </a:spcAft>
-            </a:pPr>
-            <a:r>
-              <a:rPr sz="1200" b="1">
-                <a:solidFill>
-                  <a:srgbClr val="6366F1"/>
-                </a:solidFill>
-                <a:latin typeface="NanumGothic"/>
-                <a:ea typeface="NanumGothic"/>
-                <a:cs typeface="NanumGothic"/>
-              </a:rPr>
-              <a:t>NOTE   </a:t>
-            </a:r>
-            <a:r>
-              <a:rPr sz="1300" b="0">
-                <a:solidFill>
-                  <a:srgbClr val="0F172A"/>
-                </a:solidFill>
-                <a:latin typeface="NanumGothic"/>
-                <a:ea typeface="NanumGothic"/>
-                <a:cs typeface="NanumGothic"/>
-              </a:rPr>
-              <a:t>현재 Claude 최대 1M 토큰(≈책 여러 권) — 긴 문서·코드 통째 분석 (단 lost in the middle 주의)</a:t>
+              <a:t>리서치엔 낮은 temperature가 유리 — 결과 안정</a:t>
             </a:r>
           </a:p>
         </p:txBody>
@@ -10300,7 +10301,7 @@
                 <a:ea typeface="NanumGothic"/>
                 <a:cs typeface="NanumGothic"/>
               </a:rPr>
-              <a:t>핵심 균형</a:t>
+              <a:t>컨텍스트</a:t>
             </a:r>
           </a:p>
         </p:txBody>
@@ -10347,7 +10348,7 @@
                 <a:ea typeface="NanumSquare"/>
                 <a:cs typeface="NanumSquare"/>
               </a:rPr>
-              <a:t>LLM의 능력과 한계</a:t>
+              <a:t>컨텍스트 윈도우</a:t>
             </a:r>
           </a:p>
         </p:txBody>
@@ -10492,20 +10493,434 @@
       </p:sp>
       <p:sp>
         <p:nvSpPr>
-          <p:cNvPr id="9" name="Rounded Rectangle 8"/>
+          <p:cNvPr id="9" name="Oval 8"/>
           <p:cNvSpPr/>
           <p:nvPr/>
         </p:nvSpPr>
         <p:spPr>
           <a:xfrm>
-            <a:off x="502920" y="1828800"/>
-            <a:ext cx="5440680" cy="4023360"/>
+            <a:off x="548640" y="1911096"/>
+            <a:ext cx="146304" cy="146304"/>
+          </a:xfrm>
+          <a:prstGeom prst="ellipse">
+            <a:avLst/>
+          </a:prstGeom>
+          <a:solidFill>
+            <a:srgbClr val="6366F1"/>
+          </a:solidFill>
+          <a:ln>
+            <a:noFill/>
+          </a:ln>
+          <a:effectLst/>
+        </p:spPr>
+        <p:style>
+          <a:lnRef idx="1">
+            <a:schemeClr val="accent1"/>
+          </a:lnRef>
+          <a:fillRef idx="3">
+            <a:schemeClr val="accent1"/>
+          </a:fillRef>
+          <a:effectRef idx="2">
+            <a:schemeClr val="accent1"/>
+          </a:effectRef>
+          <a:fontRef idx="minor">
+            <a:schemeClr val="lt1"/>
+          </a:fontRef>
+        </p:style>
+        <p:txBody>
+          <a:bodyPr rtlCol="0" anchor="ctr"/>
+          <a:lstStyle/>
+          <a:p>
+            <a:pPr algn="ctr"/>
+          </a:p>
+        </p:txBody>
+      </p:sp>
+      <p:sp>
+        <p:nvSpPr>
+          <p:cNvPr id="10" name="TextBox 9"/>
+          <p:cNvSpPr txBox="1"/>
+          <p:nvPr/>
+        </p:nvSpPr>
+        <p:spPr>
+          <a:xfrm>
+            <a:off x="868680" y="1828800"/>
+            <a:ext cx="10607040" cy="457200"/>
+          </a:xfrm>
+          <a:prstGeom prst="rect">
+            <a:avLst/>
+          </a:prstGeom>
+          <a:noFill/>
+        </p:spPr>
+        <p:txBody>
+          <a:bodyPr wrap="square" anchor="t" lIns="0" rIns="0" tIns="0" bIns="0">
+            <a:spAutoFit/>
+          </a:bodyPr>
+          <a:lstStyle/>
+          <a:p>
+            <a:pPr algn="l">
+              <a:lnSpc>
+                <a:spcPct val="100000"/>
+              </a:lnSpc>
+              <a:spcBef>
+                <a:spcPts val="0"/>
+              </a:spcBef>
+              <a:spcAft>
+                <a:spcPts val="600"/>
+              </a:spcAft>
+            </a:pPr>
+            <a:r>
+              <a:rPr sz="1600" b="1">
+                <a:solidFill>
+                  <a:srgbClr val="0F172A"/>
+                </a:solidFill>
+                <a:latin typeface="NanumGothic"/>
+                <a:ea typeface="NanumGothic"/>
+                <a:cs typeface="NanumGothic"/>
+              </a:rPr>
+              <a:t>한 번에 볼 수 있는 토큰 한계</a:t>
+            </a:r>
+          </a:p>
+        </p:txBody>
+      </p:sp>
+      <p:sp>
+        <p:nvSpPr>
+          <p:cNvPr id="11" name="TextBox 10"/>
+          <p:cNvSpPr txBox="1"/>
+          <p:nvPr/>
+        </p:nvSpPr>
+        <p:spPr>
+          <a:xfrm>
+            <a:off x="868680" y="2212848"/>
+            <a:ext cx="10607040" cy="457200"/>
+          </a:xfrm>
+          <a:prstGeom prst="rect">
+            <a:avLst/>
+          </a:prstGeom>
+          <a:noFill/>
+        </p:spPr>
+        <p:txBody>
+          <a:bodyPr wrap="square" anchor="t" lIns="0" rIns="0" tIns="0" bIns="0">
+            <a:spAutoFit/>
+          </a:bodyPr>
+          <a:lstStyle/>
+          <a:p>
+            <a:pPr algn="l">
+              <a:lnSpc>
+                <a:spcPct val="100000"/>
+              </a:lnSpc>
+              <a:spcBef>
+                <a:spcPts val="0"/>
+              </a:spcBef>
+              <a:spcAft>
+                <a:spcPts val="600"/>
+              </a:spcAft>
+            </a:pPr>
+            <a:r>
+              <a:rPr sz="1300" b="0">
+                <a:solidFill>
+                  <a:srgbClr val="64748B"/>
+                </a:solidFill>
+                <a:latin typeface="NanumGothic"/>
+                <a:ea typeface="NanumGothic"/>
+                <a:cs typeface="NanumGothic"/>
+              </a:rPr>
+              <a:t>프롬프트+대화+자료가 이 한도 안에 들어가야</a:t>
+            </a:r>
+          </a:p>
+        </p:txBody>
+      </p:sp>
+      <p:sp>
+        <p:nvSpPr>
+          <p:cNvPr id="12" name="Oval 11"/>
+          <p:cNvSpPr/>
+          <p:nvPr/>
+        </p:nvSpPr>
+        <p:spPr>
+          <a:xfrm>
+            <a:off x="548640" y="2779776"/>
+            <a:ext cx="146304" cy="146304"/>
+          </a:xfrm>
+          <a:prstGeom prst="ellipse">
+            <a:avLst/>
+          </a:prstGeom>
+          <a:solidFill>
+            <a:srgbClr val="6366F1"/>
+          </a:solidFill>
+          <a:ln>
+            <a:noFill/>
+          </a:ln>
+          <a:effectLst/>
+        </p:spPr>
+        <p:style>
+          <a:lnRef idx="1">
+            <a:schemeClr val="accent1"/>
+          </a:lnRef>
+          <a:fillRef idx="3">
+            <a:schemeClr val="accent1"/>
+          </a:fillRef>
+          <a:effectRef idx="2">
+            <a:schemeClr val="accent1"/>
+          </a:effectRef>
+          <a:fontRef idx="minor">
+            <a:schemeClr val="lt1"/>
+          </a:fontRef>
+        </p:style>
+        <p:txBody>
+          <a:bodyPr rtlCol="0" anchor="ctr"/>
+          <a:lstStyle/>
+          <a:p>
+            <a:pPr algn="ctr"/>
+          </a:p>
+        </p:txBody>
+      </p:sp>
+      <p:sp>
+        <p:nvSpPr>
+          <p:cNvPr id="13" name="TextBox 12"/>
+          <p:cNvSpPr txBox="1"/>
+          <p:nvPr/>
+        </p:nvSpPr>
+        <p:spPr>
+          <a:xfrm>
+            <a:off x="868680" y="2697480"/>
+            <a:ext cx="10607040" cy="457200"/>
+          </a:xfrm>
+          <a:prstGeom prst="rect">
+            <a:avLst/>
+          </a:prstGeom>
+          <a:noFill/>
+        </p:spPr>
+        <p:txBody>
+          <a:bodyPr wrap="square" anchor="t" lIns="0" rIns="0" tIns="0" bIns="0">
+            <a:spAutoFit/>
+          </a:bodyPr>
+          <a:lstStyle/>
+          <a:p>
+            <a:pPr algn="l">
+              <a:lnSpc>
+                <a:spcPct val="100000"/>
+              </a:lnSpc>
+              <a:spcBef>
+                <a:spcPts val="0"/>
+              </a:spcBef>
+              <a:spcAft>
+                <a:spcPts val="600"/>
+              </a:spcAft>
+            </a:pPr>
+            <a:r>
+              <a:rPr sz="1600" b="1">
+                <a:solidFill>
+                  <a:srgbClr val="0F172A"/>
+                </a:solidFill>
+                <a:latin typeface="NanumGothic"/>
+                <a:ea typeface="NanumGothic"/>
+                <a:cs typeface="NanumGothic"/>
+              </a:rPr>
+              <a:t>길어지면</a:t>
+            </a:r>
+          </a:p>
+        </p:txBody>
+      </p:sp>
+      <p:sp>
+        <p:nvSpPr>
+          <p:cNvPr id="14" name="TextBox 13"/>
+          <p:cNvSpPr txBox="1"/>
+          <p:nvPr/>
+        </p:nvSpPr>
+        <p:spPr>
+          <a:xfrm>
+            <a:off x="868680" y="3081528"/>
+            <a:ext cx="10607040" cy="457200"/>
+          </a:xfrm>
+          <a:prstGeom prst="rect">
+            <a:avLst/>
+          </a:prstGeom>
+          <a:noFill/>
+        </p:spPr>
+        <p:txBody>
+          <a:bodyPr wrap="square" anchor="t" lIns="0" rIns="0" tIns="0" bIns="0">
+            <a:spAutoFit/>
+          </a:bodyPr>
+          <a:lstStyle/>
+          <a:p>
+            <a:pPr algn="l">
+              <a:lnSpc>
+                <a:spcPct val="100000"/>
+              </a:lnSpc>
+              <a:spcBef>
+                <a:spcPts val="0"/>
+              </a:spcBef>
+              <a:spcAft>
+                <a:spcPts val="600"/>
+              </a:spcAft>
+            </a:pPr>
+            <a:r>
+              <a:rPr sz="1300" b="0">
+                <a:solidFill>
+                  <a:srgbClr val="64748B"/>
+                </a:solidFill>
+                <a:latin typeface="NanumGothic"/>
+                <a:ea typeface="NanumGothic"/>
+                <a:cs typeface="NanumGothic"/>
+              </a:rPr>
+              <a:t>비용↑·속도↓·중간 내용 놓침(lost in the middle)</a:t>
+            </a:r>
+          </a:p>
+        </p:txBody>
+      </p:sp>
+      <p:sp>
+        <p:nvSpPr>
+          <p:cNvPr id="15" name="Oval 14"/>
+          <p:cNvSpPr/>
+          <p:nvPr/>
+        </p:nvSpPr>
+        <p:spPr>
+          <a:xfrm>
+            <a:off x="548640" y="3648456"/>
+            <a:ext cx="146304" cy="146304"/>
+          </a:xfrm>
+          <a:prstGeom prst="ellipse">
+            <a:avLst/>
+          </a:prstGeom>
+          <a:solidFill>
+            <a:srgbClr val="6366F1"/>
+          </a:solidFill>
+          <a:ln>
+            <a:noFill/>
+          </a:ln>
+          <a:effectLst/>
+        </p:spPr>
+        <p:style>
+          <a:lnRef idx="1">
+            <a:schemeClr val="accent1"/>
+          </a:lnRef>
+          <a:fillRef idx="3">
+            <a:schemeClr val="accent1"/>
+          </a:fillRef>
+          <a:effectRef idx="2">
+            <a:schemeClr val="accent1"/>
+          </a:effectRef>
+          <a:fontRef idx="minor">
+            <a:schemeClr val="lt1"/>
+          </a:fontRef>
+        </p:style>
+        <p:txBody>
+          <a:bodyPr rtlCol="0" anchor="ctr"/>
+          <a:lstStyle/>
+          <a:p>
+            <a:pPr algn="ctr"/>
+          </a:p>
+        </p:txBody>
+      </p:sp>
+      <p:sp>
+        <p:nvSpPr>
+          <p:cNvPr id="16" name="TextBox 15"/>
+          <p:cNvSpPr txBox="1"/>
+          <p:nvPr/>
+        </p:nvSpPr>
+        <p:spPr>
+          <a:xfrm>
+            <a:off x="868680" y="3566160"/>
+            <a:ext cx="10607040" cy="457200"/>
+          </a:xfrm>
+          <a:prstGeom prst="rect">
+            <a:avLst/>
+          </a:prstGeom>
+          <a:noFill/>
+        </p:spPr>
+        <p:txBody>
+          <a:bodyPr wrap="square" anchor="t" lIns="0" rIns="0" tIns="0" bIns="0">
+            <a:spAutoFit/>
+          </a:bodyPr>
+          <a:lstStyle/>
+          <a:p>
+            <a:pPr algn="l">
+              <a:lnSpc>
+                <a:spcPct val="100000"/>
+              </a:lnSpc>
+              <a:spcBef>
+                <a:spcPts val="0"/>
+              </a:spcBef>
+              <a:spcAft>
+                <a:spcPts val="600"/>
+              </a:spcAft>
+            </a:pPr>
+            <a:r>
+              <a:rPr sz="1600" b="1">
+                <a:solidFill>
+                  <a:srgbClr val="0F172A"/>
+                </a:solidFill>
+                <a:latin typeface="NanumGothic"/>
+                <a:ea typeface="NanumGothic"/>
+                <a:cs typeface="NanumGothic"/>
+              </a:rPr>
+              <a:t>에이전트와의 관련</a:t>
+            </a:r>
+          </a:p>
+        </p:txBody>
+      </p:sp>
+      <p:sp>
+        <p:nvSpPr>
+          <p:cNvPr id="17" name="TextBox 16"/>
+          <p:cNvSpPr txBox="1"/>
+          <p:nvPr/>
+        </p:nvSpPr>
+        <p:spPr>
+          <a:xfrm>
+            <a:off x="868680" y="3950208"/>
+            <a:ext cx="10607040" cy="457200"/>
+          </a:xfrm>
+          <a:prstGeom prst="rect">
+            <a:avLst/>
+          </a:prstGeom>
+          <a:noFill/>
+        </p:spPr>
+        <p:txBody>
+          <a:bodyPr wrap="square" anchor="t" lIns="0" rIns="0" tIns="0" bIns="0">
+            <a:spAutoFit/>
+          </a:bodyPr>
+          <a:lstStyle/>
+          <a:p>
+            <a:pPr algn="l">
+              <a:lnSpc>
+                <a:spcPct val="100000"/>
+              </a:lnSpc>
+              <a:spcBef>
+                <a:spcPts val="0"/>
+              </a:spcBef>
+              <a:spcAft>
+                <a:spcPts val="600"/>
+              </a:spcAft>
+            </a:pPr>
+            <a:r>
+              <a:rPr sz="1300" b="0">
+                <a:solidFill>
+                  <a:srgbClr val="64748B"/>
+                </a:solidFill>
+                <a:latin typeface="NanumGothic"/>
+                <a:ea typeface="NanumGothic"/>
+                <a:cs typeface="NanumGothic"/>
+              </a:rPr>
+              <a:t>외부 메모리·검색·도구로 한계를 보완</a:t>
+            </a:r>
+          </a:p>
+        </p:txBody>
+      </p:sp>
+      <p:sp>
+        <p:nvSpPr>
+          <p:cNvPr id="18" name="Rounded Rectangle 17"/>
+          <p:cNvSpPr/>
+          <p:nvPr/>
+        </p:nvSpPr>
+        <p:spPr>
+          <a:xfrm>
+            <a:off x="502920" y="5532120"/>
+            <a:ext cx="11155680" cy="658368"/>
           </a:xfrm>
           <a:prstGeom prst="roundRect">
             <a:avLst/>
           </a:prstGeom>
           <a:solidFill>
-            <a:srgbClr val="F8FAFC"/>
+            <a:srgbClr val="F1F5F9"/>
           </a:solidFill>
           <a:ln w="12700">
             <a:solidFill>
@@ -10538,58 +10953,14 @@
       </p:sp>
       <p:sp>
         <p:nvSpPr>
-          <p:cNvPr id="10" name="Rounded Rectangle 9"/>
-          <p:cNvSpPr/>
-          <p:nvPr/>
-        </p:nvSpPr>
-        <p:spPr>
-          <a:xfrm>
-            <a:off x="502920" y="1828800"/>
-            <a:ext cx="5440680" cy="640080"/>
-          </a:xfrm>
-          <a:prstGeom prst="roundRect">
-            <a:avLst/>
-          </a:prstGeom>
-          <a:solidFill>
-            <a:srgbClr val="6366F1"/>
-          </a:solidFill>
-          <a:ln>
-            <a:noFill/>
-          </a:ln>
-          <a:effectLst/>
-        </p:spPr>
-        <p:style>
-          <a:lnRef idx="1">
-            <a:schemeClr val="accent1"/>
-          </a:lnRef>
-          <a:fillRef idx="3">
-            <a:schemeClr val="accent1"/>
-          </a:fillRef>
-          <a:effectRef idx="2">
-            <a:schemeClr val="accent1"/>
-          </a:effectRef>
-          <a:fontRef idx="minor">
-            <a:schemeClr val="lt1"/>
-          </a:fontRef>
-        </p:style>
-        <p:txBody>
-          <a:bodyPr rtlCol="0" anchor="ctr"/>
-          <a:lstStyle/>
-          <a:p>
-            <a:pPr algn="ctr"/>
-          </a:p>
-        </p:txBody>
-      </p:sp>
-      <p:sp>
-        <p:nvSpPr>
-          <p:cNvPr id="11" name="TextBox 10"/>
-          <p:cNvSpPr txBox="1"/>
-          <p:nvPr/>
-        </p:nvSpPr>
-        <p:spPr>
-          <a:xfrm>
-            <a:off x="777240" y="1828800"/>
-            <a:ext cx="4937760" cy="640080"/>
+          <p:cNvPr id="19" name="TextBox 18"/>
+          <p:cNvSpPr txBox="1"/>
+          <p:nvPr/>
+        </p:nvSpPr>
+        <p:spPr>
+          <a:xfrm>
+            <a:off x="777240" y="5532120"/>
+            <a:ext cx="10607040" cy="658368"/>
           </a:xfrm>
           <a:prstGeom prst="rect">
             <a:avLst/>
@@ -10614,54 +10985,7 @@
               </a:spcAft>
             </a:pPr>
             <a:r>
-              <a:rPr sz="1600" b="1">
-                <a:solidFill>
-                  <a:srgbClr val="FFFFFF"/>
-                </a:solidFill>
-                <a:latin typeface="NanumSquare"/>
-                <a:ea typeface="NanumSquare"/>
-                <a:cs typeface="NanumSquare"/>
-              </a:rPr>
-              <a:t>잘하는 것</a:t>
-            </a:r>
-          </a:p>
-        </p:txBody>
-      </p:sp>
-      <p:sp>
-        <p:nvSpPr>
-          <p:cNvPr id="12" name="TextBox 11"/>
-          <p:cNvSpPr txBox="1"/>
-          <p:nvPr/>
-        </p:nvSpPr>
-        <p:spPr>
-          <a:xfrm>
-            <a:off x="822960" y="2697480"/>
-            <a:ext cx="4846320" cy="548640"/>
-          </a:xfrm>
-          <a:prstGeom prst="rect">
-            <a:avLst/>
-          </a:prstGeom>
-          <a:noFill/>
-        </p:spPr>
-        <p:txBody>
-          <a:bodyPr wrap="square" anchor="t" lIns="0" rIns="0" tIns="0" bIns="0">
-            <a:spAutoFit/>
-          </a:bodyPr>
-          <a:lstStyle/>
-          <a:p>
-            <a:pPr algn="l">
-              <a:lnSpc>
-                <a:spcPct val="100000"/>
-              </a:lnSpc>
-              <a:spcBef>
-                <a:spcPts val="0"/>
-              </a:spcBef>
-              <a:spcAft>
-                <a:spcPts val="600"/>
-              </a:spcAft>
-            </a:pPr>
-            <a:r>
-              <a:rPr sz="1400" b="1">
+              <a:rPr sz="1200" b="1">
                 <a:solidFill>
                   <a:srgbClr val="6366F1"/>
                 </a:solidFill>
@@ -10669,10 +10993,10 @@
                 <a:ea typeface="NanumGothic"/>
                 <a:cs typeface="NanumGothic"/>
               </a:rPr>
-              <a:t>•  </a:t>
-            </a:r>
-            <a:r>
-              <a:rPr sz="1400" b="0">
+              <a:t>NOTE   </a:t>
+            </a:r>
+            <a:r>
+              <a:rPr sz="1300" b="0">
                 <a:solidFill>
                   <a:srgbClr val="0F172A"/>
                 </a:solidFill>
@@ -10680,550 +11004,7 @@
                 <a:ea typeface="NanumGothic"/>
                 <a:cs typeface="NanumGothic"/>
               </a:rPr>
-              <a:t>요약·번역·분류</a:t>
-            </a:r>
-          </a:p>
-        </p:txBody>
-      </p:sp>
-      <p:sp>
-        <p:nvSpPr>
-          <p:cNvPr id="13" name="TextBox 12"/>
-          <p:cNvSpPr txBox="1"/>
-          <p:nvPr/>
-        </p:nvSpPr>
-        <p:spPr>
-          <a:xfrm>
-            <a:off x="822960" y="3264408"/>
-            <a:ext cx="4846320" cy="548640"/>
-          </a:xfrm>
-          <a:prstGeom prst="rect">
-            <a:avLst/>
-          </a:prstGeom>
-          <a:noFill/>
-        </p:spPr>
-        <p:txBody>
-          <a:bodyPr wrap="square" anchor="t" lIns="0" rIns="0" tIns="0" bIns="0">
-            <a:spAutoFit/>
-          </a:bodyPr>
-          <a:lstStyle/>
-          <a:p>
-            <a:pPr algn="l">
-              <a:lnSpc>
-                <a:spcPct val="100000"/>
-              </a:lnSpc>
-              <a:spcBef>
-                <a:spcPts val="0"/>
-              </a:spcBef>
-              <a:spcAft>
-                <a:spcPts val="600"/>
-              </a:spcAft>
-            </a:pPr>
-            <a:r>
-              <a:rPr sz="1400" b="1">
-                <a:solidFill>
-                  <a:srgbClr val="6366F1"/>
-                </a:solidFill>
-                <a:latin typeface="NanumGothic"/>
-                <a:ea typeface="NanumGothic"/>
-                <a:cs typeface="NanumGothic"/>
-              </a:rPr>
-              <a:t>•  </a:t>
-            </a:r>
-            <a:r>
-              <a:rPr sz="1400" b="0">
-                <a:solidFill>
-                  <a:srgbClr val="0F172A"/>
-                </a:solidFill>
-                <a:latin typeface="NanumGothic"/>
-                <a:ea typeface="NanumGothic"/>
-                <a:cs typeface="NanumGothic"/>
-              </a:rPr>
-              <a:t>코드 생성·설명</a:t>
-            </a:r>
-          </a:p>
-        </p:txBody>
-      </p:sp>
-      <p:sp>
-        <p:nvSpPr>
-          <p:cNvPr id="14" name="TextBox 13"/>
-          <p:cNvSpPr txBox="1"/>
-          <p:nvPr/>
-        </p:nvSpPr>
-        <p:spPr>
-          <a:xfrm>
-            <a:off x="822960" y="3831336"/>
-            <a:ext cx="4846320" cy="548640"/>
-          </a:xfrm>
-          <a:prstGeom prst="rect">
-            <a:avLst/>
-          </a:prstGeom>
-          <a:noFill/>
-        </p:spPr>
-        <p:txBody>
-          <a:bodyPr wrap="square" anchor="t" lIns="0" rIns="0" tIns="0" bIns="0">
-            <a:spAutoFit/>
-          </a:bodyPr>
-          <a:lstStyle/>
-          <a:p>
-            <a:pPr algn="l">
-              <a:lnSpc>
-                <a:spcPct val="100000"/>
-              </a:lnSpc>
-              <a:spcBef>
-                <a:spcPts val="0"/>
-              </a:spcBef>
-              <a:spcAft>
-                <a:spcPts val="600"/>
-              </a:spcAft>
-            </a:pPr>
-            <a:r>
-              <a:rPr sz="1400" b="1">
-                <a:solidFill>
-                  <a:srgbClr val="6366F1"/>
-                </a:solidFill>
-                <a:latin typeface="NanumGothic"/>
-                <a:ea typeface="NanumGothic"/>
-                <a:cs typeface="NanumGothic"/>
-              </a:rPr>
-              <a:t>•  </a:t>
-            </a:r>
-            <a:r>
-              <a:rPr sz="1400" b="0">
-                <a:solidFill>
-                  <a:srgbClr val="0F172A"/>
-                </a:solidFill>
-                <a:latin typeface="NanumGothic"/>
-                <a:ea typeface="NanumGothic"/>
-                <a:cs typeface="NanumGothic"/>
-              </a:rPr>
-              <a:t>텍스트 추출·재구성</a:t>
-            </a:r>
-          </a:p>
-        </p:txBody>
-      </p:sp>
-      <p:sp>
-        <p:nvSpPr>
-          <p:cNvPr id="15" name="TextBox 14"/>
-          <p:cNvSpPr txBox="1"/>
-          <p:nvPr/>
-        </p:nvSpPr>
-        <p:spPr>
-          <a:xfrm>
-            <a:off x="822960" y="4398264"/>
-            <a:ext cx="4846320" cy="548640"/>
-          </a:xfrm>
-          <a:prstGeom prst="rect">
-            <a:avLst/>
-          </a:prstGeom>
-          <a:noFill/>
-        </p:spPr>
-        <p:txBody>
-          <a:bodyPr wrap="square" anchor="t" lIns="0" rIns="0" tIns="0" bIns="0">
-            <a:spAutoFit/>
-          </a:bodyPr>
-          <a:lstStyle/>
-          <a:p>
-            <a:pPr algn="l">
-              <a:lnSpc>
-                <a:spcPct val="100000"/>
-              </a:lnSpc>
-              <a:spcBef>
-                <a:spcPts val="0"/>
-              </a:spcBef>
-              <a:spcAft>
-                <a:spcPts val="600"/>
-              </a:spcAft>
-            </a:pPr>
-            <a:r>
-              <a:rPr sz="1400" b="1">
-                <a:solidFill>
-                  <a:srgbClr val="6366F1"/>
-                </a:solidFill>
-                <a:latin typeface="NanumGothic"/>
-                <a:ea typeface="NanumGothic"/>
-                <a:cs typeface="NanumGothic"/>
-              </a:rPr>
-              <a:t>•  </a:t>
-            </a:r>
-            <a:r>
-              <a:rPr sz="1400" b="0">
-                <a:solidFill>
-                  <a:srgbClr val="0F172A"/>
-                </a:solidFill>
-                <a:latin typeface="NanumGothic"/>
-                <a:ea typeface="NanumGothic"/>
-                <a:cs typeface="NanumGothic"/>
-              </a:rPr>
-              <a:t>브레인스토밍</a:t>
-            </a:r>
-          </a:p>
-        </p:txBody>
-      </p:sp>
-      <p:sp>
-        <p:nvSpPr>
-          <p:cNvPr id="16" name="Rounded Rectangle 15"/>
-          <p:cNvSpPr/>
-          <p:nvPr/>
-        </p:nvSpPr>
-        <p:spPr>
-          <a:xfrm>
-            <a:off x="6172200" y="1828800"/>
-            <a:ext cx="5440680" cy="4023360"/>
-          </a:xfrm>
-          <a:prstGeom prst="roundRect">
-            <a:avLst/>
-          </a:prstGeom>
-          <a:solidFill>
-            <a:srgbClr val="F8FAFC"/>
-          </a:solidFill>
-          <a:ln w="12700">
-            <a:solidFill>
-              <a:srgbClr val="E2E8F0"/>
-            </a:solidFill>
-          </a:ln>
-          <a:effectLst/>
-        </p:spPr>
-        <p:style>
-          <a:lnRef idx="1">
-            <a:schemeClr val="accent1"/>
-          </a:lnRef>
-          <a:fillRef idx="3">
-            <a:schemeClr val="accent1"/>
-          </a:fillRef>
-          <a:effectRef idx="2">
-            <a:schemeClr val="accent1"/>
-          </a:effectRef>
-          <a:fontRef idx="minor">
-            <a:schemeClr val="lt1"/>
-          </a:fontRef>
-        </p:style>
-        <p:txBody>
-          <a:bodyPr rtlCol="0" anchor="ctr"/>
-          <a:lstStyle/>
-          <a:p>
-            <a:pPr algn="ctr"/>
-          </a:p>
-        </p:txBody>
-      </p:sp>
-      <p:sp>
-        <p:nvSpPr>
-          <p:cNvPr id="17" name="Rounded Rectangle 16"/>
-          <p:cNvSpPr/>
-          <p:nvPr/>
-        </p:nvSpPr>
-        <p:spPr>
-          <a:xfrm>
-            <a:off x="6172200" y="1828800"/>
-            <a:ext cx="5440680" cy="640080"/>
-          </a:xfrm>
-          <a:prstGeom prst="roundRect">
-            <a:avLst/>
-          </a:prstGeom>
-          <a:solidFill>
-            <a:srgbClr val="12203C"/>
-          </a:solidFill>
-          <a:ln>
-            <a:noFill/>
-          </a:ln>
-          <a:effectLst/>
-        </p:spPr>
-        <p:style>
-          <a:lnRef idx="1">
-            <a:schemeClr val="accent1"/>
-          </a:lnRef>
-          <a:fillRef idx="3">
-            <a:schemeClr val="accent1"/>
-          </a:fillRef>
-          <a:effectRef idx="2">
-            <a:schemeClr val="accent1"/>
-          </a:effectRef>
-          <a:fontRef idx="minor">
-            <a:schemeClr val="lt1"/>
-          </a:fontRef>
-        </p:style>
-        <p:txBody>
-          <a:bodyPr rtlCol="0" anchor="ctr"/>
-          <a:lstStyle/>
-          <a:p>
-            <a:pPr algn="ctr"/>
-          </a:p>
-        </p:txBody>
-      </p:sp>
-      <p:sp>
-        <p:nvSpPr>
-          <p:cNvPr id="18" name="TextBox 17"/>
-          <p:cNvSpPr txBox="1"/>
-          <p:nvPr/>
-        </p:nvSpPr>
-        <p:spPr>
-          <a:xfrm>
-            <a:off x="6446520" y="1828800"/>
-            <a:ext cx="4937760" cy="640080"/>
-          </a:xfrm>
-          <a:prstGeom prst="rect">
-            <a:avLst/>
-          </a:prstGeom>
-          <a:noFill/>
-        </p:spPr>
-        <p:txBody>
-          <a:bodyPr wrap="square" anchor="ctr" lIns="0" rIns="0" tIns="0" bIns="0">
-            <a:spAutoFit/>
-          </a:bodyPr>
-          <a:lstStyle/>
-          <a:p>
-            <a:pPr algn="l">
-              <a:lnSpc>
-                <a:spcPct val="100000"/>
-              </a:lnSpc>
-              <a:spcBef>
-                <a:spcPts val="0"/>
-              </a:spcBef>
-              <a:spcAft>
-                <a:spcPts val="600"/>
-              </a:spcAft>
-            </a:pPr>
-            <a:r>
-              <a:rPr sz="1600" b="1">
-                <a:solidFill>
-                  <a:srgbClr val="FFFFFF"/>
-                </a:solidFill>
-                <a:latin typeface="NanumSquare"/>
-                <a:ea typeface="NanumSquare"/>
-                <a:cs typeface="NanumSquare"/>
-              </a:rPr>
-              <a:t>주의할 것</a:t>
-            </a:r>
-          </a:p>
-        </p:txBody>
-      </p:sp>
-      <p:sp>
-        <p:nvSpPr>
-          <p:cNvPr id="19" name="TextBox 18"/>
-          <p:cNvSpPr txBox="1"/>
-          <p:nvPr/>
-        </p:nvSpPr>
-        <p:spPr>
-          <a:xfrm>
-            <a:off x="6492240" y="2697480"/>
-            <a:ext cx="4846320" cy="548640"/>
-          </a:xfrm>
-          <a:prstGeom prst="rect">
-            <a:avLst/>
-          </a:prstGeom>
-          <a:noFill/>
-        </p:spPr>
-        <p:txBody>
-          <a:bodyPr wrap="square" anchor="t" lIns="0" rIns="0" tIns="0" bIns="0">
-            <a:spAutoFit/>
-          </a:bodyPr>
-          <a:lstStyle/>
-          <a:p>
-            <a:pPr algn="l">
-              <a:lnSpc>
-                <a:spcPct val="100000"/>
-              </a:lnSpc>
-              <a:spcBef>
-                <a:spcPts val="0"/>
-              </a:spcBef>
-              <a:spcAft>
-                <a:spcPts val="600"/>
-              </a:spcAft>
-            </a:pPr>
-            <a:r>
-              <a:rPr sz="1400" b="1">
-                <a:solidFill>
-                  <a:srgbClr val="12203C"/>
-                </a:solidFill>
-                <a:latin typeface="NanumGothic"/>
-                <a:ea typeface="NanumGothic"/>
-                <a:cs typeface="NanumGothic"/>
-              </a:rPr>
-              <a:t>•  </a:t>
-            </a:r>
-            <a:r>
-              <a:rPr sz="1400" b="0">
-                <a:solidFill>
-                  <a:srgbClr val="0F172A"/>
-                </a:solidFill>
-                <a:latin typeface="NanumGothic"/>
-                <a:ea typeface="NanumGothic"/>
-                <a:cs typeface="NanumGothic"/>
-              </a:rPr>
-              <a:t>환각 — 없는 사실 지어냄</a:t>
-            </a:r>
-          </a:p>
-        </p:txBody>
-      </p:sp>
-      <p:sp>
-        <p:nvSpPr>
-          <p:cNvPr id="20" name="TextBox 19"/>
-          <p:cNvSpPr txBox="1"/>
-          <p:nvPr/>
-        </p:nvSpPr>
-        <p:spPr>
-          <a:xfrm>
-            <a:off x="6492240" y="3264408"/>
-            <a:ext cx="4846320" cy="548640"/>
-          </a:xfrm>
-          <a:prstGeom prst="rect">
-            <a:avLst/>
-          </a:prstGeom>
-          <a:noFill/>
-        </p:spPr>
-        <p:txBody>
-          <a:bodyPr wrap="square" anchor="t" lIns="0" rIns="0" tIns="0" bIns="0">
-            <a:spAutoFit/>
-          </a:bodyPr>
-          <a:lstStyle/>
-          <a:p>
-            <a:pPr algn="l">
-              <a:lnSpc>
-                <a:spcPct val="100000"/>
-              </a:lnSpc>
-              <a:spcBef>
-                <a:spcPts val="0"/>
-              </a:spcBef>
-              <a:spcAft>
-                <a:spcPts val="600"/>
-              </a:spcAft>
-            </a:pPr>
-            <a:r>
-              <a:rPr sz="1400" b="1">
-                <a:solidFill>
-                  <a:srgbClr val="12203C"/>
-                </a:solidFill>
-                <a:latin typeface="NanumGothic"/>
-                <a:ea typeface="NanumGothic"/>
-                <a:cs typeface="NanumGothic"/>
-              </a:rPr>
-              <a:t>•  </a:t>
-            </a:r>
-            <a:r>
-              <a:rPr sz="1400" b="0">
-                <a:solidFill>
-                  <a:srgbClr val="0F172A"/>
-                </a:solidFill>
-                <a:latin typeface="NanumGothic"/>
-                <a:ea typeface="NanumGothic"/>
-                <a:cs typeface="NanumGothic"/>
-              </a:rPr>
-              <a:t>최신·실시간 정보</a:t>
-            </a:r>
-          </a:p>
-        </p:txBody>
-      </p:sp>
-      <p:sp>
-        <p:nvSpPr>
-          <p:cNvPr id="21" name="TextBox 20"/>
-          <p:cNvSpPr txBox="1"/>
-          <p:nvPr/>
-        </p:nvSpPr>
-        <p:spPr>
-          <a:xfrm>
-            <a:off x="6492240" y="3831336"/>
-            <a:ext cx="4846320" cy="548640"/>
-          </a:xfrm>
-          <a:prstGeom prst="rect">
-            <a:avLst/>
-          </a:prstGeom>
-          <a:noFill/>
-        </p:spPr>
-        <p:txBody>
-          <a:bodyPr wrap="square" anchor="t" lIns="0" rIns="0" tIns="0" bIns="0">
-            <a:spAutoFit/>
-          </a:bodyPr>
-          <a:lstStyle/>
-          <a:p>
-            <a:pPr algn="l">
-              <a:lnSpc>
-                <a:spcPct val="100000"/>
-              </a:lnSpc>
-              <a:spcBef>
-                <a:spcPts val="0"/>
-              </a:spcBef>
-              <a:spcAft>
-                <a:spcPts val="600"/>
-              </a:spcAft>
-            </a:pPr>
-            <a:r>
-              <a:rPr sz="1400" b="1">
-                <a:solidFill>
-                  <a:srgbClr val="12203C"/>
-                </a:solidFill>
-                <a:latin typeface="NanumGothic"/>
-                <a:ea typeface="NanumGothic"/>
-                <a:cs typeface="NanumGothic"/>
-              </a:rPr>
-              <a:t>•  </a:t>
-            </a:r>
-            <a:r>
-              <a:rPr sz="1400" b="0">
-                <a:solidFill>
-                  <a:srgbClr val="0F172A"/>
-                </a:solidFill>
-                <a:latin typeface="NanumGothic"/>
-                <a:ea typeface="NanumGothic"/>
-                <a:cs typeface="NanumGothic"/>
-              </a:rPr>
-              <a:t>정확한 계산·셈</a:t>
-            </a:r>
-          </a:p>
-        </p:txBody>
-      </p:sp>
-      <p:sp>
-        <p:nvSpPr>
-          <p:cNvPr id="22" name="TextBox 21"/>
-          <p:cNvSpPr txBox="1"/>
-          <p:nvPr/>
-        </p:nvSpPr>
-        <p:spPr>
-          <a:xfrm>
-            <a:off x="6492240" y="4398264"/>
-            <a:ext cx="4846320" cy="548640"/>
-          </a:xfrm>
-          <a:prstGeom prst="rect">
-            <a:avLst/>
-          </a:prstGeom>
-          <a:noFill/>
-        </p:spPr>
-        <p:txBody>
-          <a:bodyPr wrap="square" anchor="t" lIns="0" rIns="0" tIns="0" bIns="0">
-            <a:spAutoFit/>
-          </a:bodyPr>
-          <a:lstStyle/>
-          <a:p>
-            <a:pPr algn="l">
-              <a:lnSpc>
-                <a:spcPct val="100000"/>
-              </a:lnSpc>
-              <a:spcBef>
-                <a:spcPts val="0"/>
-              </a:spcBef>
-              <a:spcAft>
-                <a:spcPts val="600"/>
-              </a:spcAft>
-            </a:pPr>
-            <a:r>
-              <a:rPr sz="1400" b="1">
-                <a:solidFill>
-                  <a:srgbClr val="12203C"/>
-                </a:solidFill>
-                <a:latin typeface="NanumGothic"/>
-                <a:ea typeface="NanumGothic"/>
-                <a:cs typeface="NanumGothic"/>
-              </a:rPr>
-              <a:t>•  </a:t>
-            </a:r>
-            <a:r>
-              <a:rPr sz="1400" b="0">
-                <a:solidFill>
-                  <a:srgbClr val="0F172A"/>
-                </a:solidFill>
-                <a:latin typeface="NanumGothic"/>
-                <a:ea typeface="NanumGothic"/>
-                <a:cs typeface="NanumGothic"/>
-              </a:rPr>
-              <a:t>일관된 장기 추론</a:t>
+              <a:t>현재 Claude 최대 1M 토큰(≈책 여러 권) — 긴 문서·코드 통째 분석 (단 lost in the middle 주의)</a:t>
             </a:r>
           </a:p>
         </p:txBody>
@@ -11376,7 +11157,7 @@
                 <a:ea typeface="NanumGothic"/>
                 <a:cs typeface="NanumGothic"/>
               </a:rPr>
-              <a:t>주의</a:t>
+              <a:t>핵심 균형</a:t>
             </a:r>
           </a:p>
         </p:txBody>
@@ -11423,7 +11204,7 @@
                 <a:ea typeface="NanumSquare"/>
                 <a:cs typeface="NanumSquare"/>
               </a:rPr>
-              <a:t>환각(hallucination) 바로 알기</a:t>
+              <a:t>LLM의 능력과 한계</a:t>
             </a:r>
           </a:p>
         </p:txBody>
@@ -11568,16 +11349,62 @@
       </p:sp>
       <p:sp>
         <p:nvSpPr>
-          <p:cNvPr id="9" name="Oval 8"/>
+          <p:cNvPr id="9" name="Rounded Rectangle 8"/>
           <p:cNvSpPr/>
           <p:nvPr/>
         </p:nvSpPr>
         <p:spPr>
           <a:xfrm>
-            <a:off x="548640" y="1911096"/>
-            <a:ext cx="146304" cy="146304"/>
-          </a:xfrm>
-          <a:prstGeom prst="ellipse">
+            <a:off x="502920" y="1828800"/>
+            <a:ext cx="5440680" cy="4023360"/>
+          </a:xfrm>
+          <a:prstGeom prst="roundRect">
+            <a:avLst/>
+          </a:prstGeom>
+          <a:solidFill>
+            <a:srgbClr val="F8FAFC"/>
+          </a:solidFill>
+          <a:ln w="12700">
+            <a:solidFill>
+              <a:srgbClr val="E2E8F0"/>
+            </a:solidFill>
+          </a:ln>
+          <a:effectLst/>
+        </p:spPr>
+        <p:style>
+          <a:lnRef idx="1">
+            <a:schemeClr val="accent1"/>
+          </a:lnRef>
+          <a:fillRef idx="3">
+            <a:schemeClr val="accent1"/>
+          </a:fillRef>
+          <a:effectRef idx="2">
+            <a:schemeClr val="accent1"/>
+          </a:effectRef>
+          <a:fontRef idx="minor">
+            <a:schemeClr val="lt1"/>
+          </a:fontRef>
+        </p:style>
+        <p:txBody>
+          <a:bodyPr rtlCol="0" anchor="ctr"/>
+          <a:lstStyle/>
+          <a:p>
+            <a:pPr algn="ctr"/>
+          </a:p>
+        </p:txBody>
+      </p:sp>
+      <p:sp>
+        <p:nvSpPr>
+          <p:cNvPr id="10" name="Rounded Rectangle 9"/>
+          <p:cNvSpPr/>
+          <p:nvPr/>
+        </p:nvSpPr>
+        <p:spPr>
+          <a:xfrm>
+            <a:off x="502920" y="1828800"/>
+            <a:ext cx="5440680" cy="640080"/>
+          </a:xfrm>
+          <a:prstGeom prst="roundRect">
             <a:avLst/>
           </a:prstGeom>
           <a:solidFill>
@@ -11612,14 +11439,61 @@
       </p:sp>
       <p:sp>
         <p:nvSpPr>
-          <p:cNvPr id="10" name="TextBox 9"/>
-          <p:cNvSpPr txBox="1"/>
-          <p:nvPr/>
-        </p:nvSpPr>
-        <p:spPr>
-          <a:xfrm>
-            <a:off x="868680" y="1828800"/>
-            <a:ext cx="10607040" cy="457200"/>
+          <p:cNvPr id="11" name="TextBox 10"/>
+          <p:cNvSpPr txBox="1"/>
+          <p:nvPr/>
+        </p:nvSpPr>
+        <p:spPr>
+          <a:xfrm>
+            <a:off x="777240" y="1828800"/>
+            <a:ext cx="4937760" cy="640080"/>
+          </a:xfrm>
+          <a:prstGeom prst="rect">
+            <a:avLst/>
+          </a:prstGeom>
+          <a:noFill/>
+        </p:spPr>
+        <p:txBody>
+          <a:bodyPr wrap="square" anchor="ctr" lIns="0" rIns="0" tIns="0" bIns="0">
+            <a:spAutoFit/>
+          </a:bodyPr>
+          <a:lstStyle/>
+          <a:p>
+            <a:pPr algn="l">
+              <a:lnSpc>
+                <a:spcPct val="100000"/>
+              </a:lnSpc>
+              <a:spcBef>
+                <a:spcPts val="0"/>
+              </a:spcBef>
+              <a:spcAft>
+                <a:spcPts val="600"/>
+              </a:spcAft>
+            </a:pPr>
+            <a:r>
+              <a:rPr sz="1600" b="1">
+                <a:solidFill>
+                  <a:srgbClr val="FFFFFF"/>
+                </a:solidFill>
+                <a:latin typeface="NanumSquare"/>
+                <a:ea typeface="NanumSquare"/>
+                <a:cs typeface="NanumSquare"/>
+              </a:rPr>
+              <a:t>잘하는 것</a:t>
+            </a:r>
+          </a:p>
+        </p:txBody>
+      </p:sp>
+      <p:sp>
+        <p:nvSpPr>
+          <p:cNvPr id="12" name="TextBox 11"/>
+          <p:cNvSpPr txBox="1"/>
+          <p:nvPr/>
+        </p:nvSpPr>
+        <p:spPr>
+          <a:xfrm>
+            <a:off x="822960" y="2697480"/>
+            <a:ext cx="4846320" cy="548640"/>
           </a:xfrm>
           <a:prstGeom prst="rect">
             <a:avLst/>
@@ -11644,107 +11518,27 @@
               </a:spcAft>
             </a:pPr>
             <a:r>
-              <a:rPr sz="1600" b="1">
-                <a:solidFill>
-                  <a:srgbClr val="0F172A"/>
+              <a:rPr sz="1400" b="1">
+                <a:solidFill>
+                  <a:srgbClr val="6366F1"/>
                 </a:solidFill>
                 <a:latin typeface="NanumGothic"/>
                 <a:ea typeface="NanumGothic"/>
                 <a:cs typeface="NanumGothic"/>
               </a:rPr>
-              <a:t>그럴듯하지만 틀린 출력</a:t>
-            </a:r>
-          </a:p>
-        </p:txBody>
-      </p:sp>
-      <p:sp>
-        <p:nvSpPr>
-          <p:cNvPr id="11" name="TextBox 10"/>
-          <p:cNvSpPr txBox="1"/>
-          <p:nvPr/>
-        </p:nvSpPr>
-        <p:spPr>
-          <a:xfrm>
-            <a:off x="868680" y="2212848"/>
-            <a:ext cx="10607040" cy="457200"/>
-          </a:xfrm>
-          <a:prstGeom prst="rect">
-            <a:avLst/>
-          </a:prstGeom>
-          <a:noFill/>
-        </p:spPr>
-        <p:txBody>
-          <a:bodyPr wrap="square" anchor="t" lIns="0" rIns="0" tIns="0" bIns="0">
-            <a:spAutoFit/>
-          </a:bodyPr>
-          <a:lstStyle/>
-          <a:p>
-            <a:pPr algn="l">
-              <a:lnSpc>
-                <a:spcPct val="100000"/>
-              </a:lnSpc>
-              <a:spcBef>
-                <a:spcPts val="0"/>
-              </a:spcBef>
-              <a:spcAft>
-                <a:spcPts val="600"/>
-              </a:spcAft>
-            </a:pPr>
-            <a:r>
-              <a:rPr sz="1300" b="0">
-                <a:solidFill>
-                  <a:srgbClr val="64748B"/>
+              <a:t>•  </a:t>
+            </a:r>
+            <a:r>
+              <a:rPr sz="1400" b="0">
+                <a:solidFill>
+                  <a:srgbClr val="0F172A"/>
                 </a:solidFill>
                 <a:latin typeface="NanumGothic"/>
                 <a:ea typeface="NanumGothic"/>
                 <a:cs typeface="NanumGothic"/>
               </a:rPr>
-              <a:t>출처·인용·수치를 자신있게 지어내기도</a:t>
-            </a:r>
-          </a:p>
-        </p:txBody>
-      </p:sp>
-      <p:sp>
-        <p:nvSpPr>
-          <p:cNvPr id="12" name="Oval 11"/>
-          <p:cNvSpPr/>
-          <p:nvPr/>
-        </p:nvSpPr>
-        <p:spPr>
-          <a:xfrm>
-            <a:off x="548640" y="2779776"/>
-            <a:ext cx="146304" cy="146304"/>
-          </a:xfrm>
-          <a:prstGeom prst="ellipse">
-            <a:avLst/>
-          </a:prstGeom>
-          <a:solidFill>
-            <a:srgbClr val="6366F1"/>
-          </a:solidFill>
-          <a:ln>
-            <a:noFill/>
-          </a:ln>
-          <a:effectLst/>
-        </p:spPr>
-        <p:style>
-          <a:lnRef idx="1">
-            <a:schemeClr val="accent1"/>
-          </a:lnRef>
-          <a:fillRef idx="3">
-            <a:schemeClr val="accent1"/>
-          </a:fillRef>
-          <a:effectRef idx="2">
-            <a:schemeClr val="accent1"/>
-          </a:effectRef>
-          <a:fontRef idx="minor">
-            <a:schemeClr val="lt1"/>
-          </a:fontRef>
-        </p:style>
-        <p:txBody>
-          <a:bodyPr rtlCol="0" anchor="ctr"/>
-          <a:lstStyle/>
-          <a:p>
-            <a:pPr algn="ctr"/>
+              <a:t>요약·번역·분류</a:t>
+            </a:r>
           </a:p>
         </p:txBody>
       </p:sp>
@@ -11756,8 +11550,8 @@
         </p:nvSpPr>
         <p:spPr>
           <a:xfrm>
-            <a:off x="868680" y="2697480"/>
-            <a:ext cx="10607040" cy="457200"/>
+            <a:off x="822960" y="3264408"/>
+            <a:ext cx="4846320" cy="548640"/>
           </a:xfrm>
           <a:prstGeom prst="rect">
             <a:avLst/>
@@ -11782,120 +11576,40 @@
               </a:spcAft>
             </a:pPr>
             <a:r>
-              <a:rPr sz="1600" b="1">
-                <a:solidFill>
-                  <a:srgbClr val="0F172A"/>
+              <a:rPr sz="1400" b="1">
+                <a:solidFill>
+                  <a:srgbClr val="6366F1"/>
                 </a:solidFill>
                 <a:latin typeface="NanumGothic"/>
                 <a:ea typeface="NanumGothic"/>
                 <a:cs typeface="NanumGothic"/>
               </a:rPr>
-              <a:t>왜 생기나</a:t>
-            </a:r>
-          </a:p>
-        </p:txBody>
-      </p:sp>
-      <p:sp>
-        <p:nvSpPr>
-          <p:cNvPr id="14" name="TextBox 13"/>
-          <p:cNvSpPr txBox="1"/>
-          <p:nvPr/>
-        </p:nvSpPr>
-        <p:spPr>
-          <a:xfrm>
-            <a:off x="868680" y="3081528"/>
-            <a:ext cx="10607040" cy="457200"/>
-          </a:xfrm>
-          <a:prstGeom prst="rect">
-            <a:avLst/>
-          </a:prstGeom>
-          <a:noFill/>
-        </p:spPr>
-        <p:txBody>
-          <a:bodyPr wrap="square" anchor="t" lIns="0" rIns="0" tIns="0" bIns="0">
-            <a:spAutoFit/>
-          </a:bodyPr>
-          <a:lstStyle/>
-          <a:p>
-            <a:pPr algn="l">
-              <a:lnSpc>
-                <a:spcPct val="100000"/>
-              </a:lnSpc>
-              <a:spcBef>
-                <a:spcPts val="0"/>
-              </a:spcBef>
-              <a:spcAft>
-                <a:spcPts val="600"/>
-              </a:spcAft>
-            </a:pPr>
-            <a:r>
-              <a:rPr sz="1300" b="0">
-                <a:solidFill>
-                  <a:srgbClr val="64748B"/>
+              <a:t>•  </a:t>
+            </a:r>
+            <a:r>
+              <a:rPr sz="1400" b="0">
+                <a:solidFill>
+                  <a:srgbClr val="0F172A"/>
                 </a:solidFill>
                 <a:latin typeface="NanumGothic"/>
                 <a:ea typeface="NanumGothic"/>
                 <a:cs typeface="NanumGothic"/>
               </a:rPr>
-              <a:t>'그럴듯한 다음 토큰'을 생성할 뿐 사실 검증을 안 함</a:t>
-            </a:r>
-          </a:p>
-        </p:txBody>
-      </p:sp>
-      <p:sp>
-        <p:nvSpPr>
-          <p:cNvPr id="15" name="Oval 14"/>
-          <p:cNvSpPr/>
-          <p:nvPr/>
-        </p:nvSpPr>
-        <p:spPr>
-          <a:xfrm>
-            <a:off x="548640" y="3648456"/>
-            <a:ext cx="146304" cy="146304"/>
-          </a:xfrm>
-          <a:prstGeom prst="ellipse">
-            <a:avLst/>
-          </a:prstGeom>
-          <a:solidFill>
-            <a:srgbClr val="6366F1"/>
-          </a:solidFill>
-          <a:ln>
-            <a:noFill/>
-          </a:ln>
-          <a:effectLst/>
-        </p:spPr>
-        <p:style>
-          <a:lnRef idx="1">
-            <a:schemeClr val="accent1"/>
-          </a:lnRef>
-          <a:fillRef idx="3">
-            <a:schemeClr val="accent1"/>
-          </a:fillRef>
-          <a:effectRef idx="2">
-            <a:schemeClr val="accent1"/>
-          </a:effectRef>
-          <a:fontRef idx="minor">
-            <a:schemeClr val="lt1"/>
-          </a:fontRef>
-        </p:style>
-        <p:txBody>
-          <a:bodyPr rtlCol="0" anchor="ctr"/>
-          <a:lstStyle/>
-          <a:p>
-            <a:pPr algn="ctr"/>
-          </a:p>
-        </p:txBody>
-      </p:sp>
-      <p:sp>
-        <p:nvSpPr>
-          <p:cNvPr id="16" name="TextBox 15"/>
-          <p:cNvSpPr txBox="1"/>
-          <p:nvPr/>
-        </p:nvSpPr>
-        <p:spPr>
-          <a:xfrm>
-            <a:off x="868680" y="3566160"/>
-            <a:ext cx="10607040" cy="457200"/>
+              <a:t>코드 생성·설명</a:t>
+            </a:r>
+          </a:p>
+        </p:txBody>
+      </p:sp>
+      <p:sp>
+        <p:nvSpPr>
+          <p:cNvPr id="14" name="TextBox 13"/>
+          <p:cNvSpPr txBox="1"/>
+          <p:nvPr/>
+        </p:nvSpPr>
+        <p:spPr>
+          <a:xfrm>
+            <a:off x="822960" y="3831336"/>
+            <a:ext cx="4846320" cy="548640"/>
           </a:xfrm>
           <a:prstGeom prst="rect">
             <a:avLst/>
@@ -11920,82 +11634,104 @@
               </a:spcAft>
             </a:pPr>
             <a:r>
-              <a:rPr sz="1600" b="1">
-                <a:solidFill>
-                  <a:srgbClr val="0F172A"/>
+              <a:rPr sz="1400" b="1">
+                <a:solidFill>
+                  <a:srgbClr val="6366F1"/>
                 </a:solidFill>
                 <a:latin typeface="NanumGothic"/>
                 <a:ea typeface="NanumGothic"/>
                 <a:cs typeface="NanumGothic"/>
               </a:rPr>
-              <a:t>대응</a:t>
-            </a:r>
-          </a:p>
-        </p:txBody>
-      </p:sp>
-      <p:sp>
-        <p:nvSpPr>
-          <p:cNvPr id="17" name="TextBox 16"/>
-          <p:cNvSpPr txBox="1"/>
-          <p:nvPr/>
-        </p:nvSpPr>
-        <p:spPr>
-          <a:xfrm>
-            <a:off x="868680" y="3950208"/>
-            <a:ext cx="10607040" cy="457200"/>
-          </a:xfrm>
-          <a:prstGeom prst="rect">
-            <a:avLst/>
-          </a:prstGeom>
-          <a:noFill/>
-        </p:spPr>
-        <p:txBody>
-          <a:bodyPr wrap="square" anchor="t" lIns="0" rIns="0" tIns="0" bIns="0">
-            <a:spAutoFit/>
-          </a:bodyPr>
-          <a:lstStyle/>
-          <a:p>
-            <a:pPr algn="l">
-              <a:lnSpc>
-                <a:spcPct val="100000"/>
-              </a:lnSpc>
-              <a:spcBef>
-                <a:spcPts val="0"/>
-              </a:spcBef>
-              <a:spcAft>
-                <a:spcPts val="600"/>
-              </a:spcAft>
-            </a:pPr>
-            <a:r>
-              <a:rPr sz="1300" b="0">
-                <a:solidFill>
-                  <a:srgbClr val="64748B"/>
+              <a:t>•  </a:t>
+            </a:r>
+            <a:r>
+              <a:rPr sz="1400" b="0">
+                <a:solidFill>
+                  <a:srgbClr val="0F172A"/>
                 </a:solidFill>
                 <a:latin typeface="NanumGothic"/>
                 <a:ea typeface="NanumGothic"/>
                 <a:cs typeface="NanumGothic"/>
               </a:rPr>
-              <a:t>출처 확인·검색 연동(RAG)·교차검증 → 리서치 에이전트의 존재 이유</a:t>
-            </a:r>
-          </a:p>
-        </p:txBody>
-      </p:sp>
-      <p:sp>
-        <p:nvSpPr>
-          <p:cNvPr id="18" name="Rounded Rectangle 17"/>
+              <a:t>텍스트 추출·재구성</a:t>
+            </a:r>
+          </a:p>
+        </p:txBody>
+      </p:sp>
+      <p:sp>
+        <p:nvSpPr>
+          <p:cNvPr id="15" name="TextBox 14"/>
+          <p:cNvSpPr txBox="1"/>
+          <p:nvPr/>
+        </p:nvSpPr>
+        <p:spPr>
+          <a:xfrm>
+            <a:off x="822960" y="4398264"/>
+            <a:ext cx="4846320" cy="548640"/>
+          </a:xfrm>
+          <a:prstGeom prst="rect">
+            <a:avLst/>
+          </a:prstGeom>
+          <a:noFill/>
+        </p:spPr>
+        <p:txBody>
+          <a:bodyPr wrap="square" anchor="t" lIns="0" rIns="0" tIns="0" bIns="0">
+            <a:spAutoFit/>
+          </a:bodyPr>
+          <a:lstStyle/>
+          <a:p>
+            <a:pPr algn="l">
+              <a:lnSpc>
+                <a:spcPct val="100000"/>
+              </a:lnSpc>
+              <a:spcBef>
+                <a:spcPts val="0"/>
+              </a:spcBef>
+              <a:spcAft>
+                <a:spcPts val="600"/>
+              </a:spcAft>
+            </a:pPr>
+            <a:r>
+              <a:rPr sz="1400" b="1">
+                <a:solidFill>
+                  <a:srgbClr val="6366F1"/>
+                </a:solidFill>
+                <a:latin typeface="NanumGothic"/>
+                <a:ea typeface="NanumGothic"/>
+                <a:cs typeface="NanumGothic"/>
+              </a:rPr>
+              <a:t>•  </a:t>
+            </a:r>
+            <a:r>
+              <a:rPr sz="1400" b="0">
+                <a:solidFill>
+                  <a:srgbClr val="0F172A"/>
+                </a:solidFill>
+                <a:latin typeface="NanumGothic"/>
+                <a:ea typeface="NanumGothic"/>
+                <a:cs typeface="NanumGothic"/>
+              </a:rPr>
+              <a:t>브레인스토밍</a:t>
+            </a:r>
+          </a:p>
+        </p:txBody>
+      </p:sp>
+      <p:sp>
+        <p:nvSpPr>
+          <p:cNvPr id="16" name="Rounded Rectangle 15"/>
           <p:cNvSpPr/>
           <p:nvPr/>
         </p:nvSpPr>
         <p:spPr>
           <a:xfrm>
-            <a:off x="502920" y="5532120"/>
-            <a:ext cx="11155680" cy="658368"/>
+            <a:off x="6172200" y="1828800"/>
+            <a:ext cx="5440680" cy="4023360"/>
           </a:xfrm>
           <a:prstGeom prst="roundRect">
             <a:avLst/>
           </a:prstGeom>
           <a:solidFill>
-            <a:srgbClr val="F1F5F9"/>
+            <a:srgbClr val="F8FAFC"/>
           </a:solidFill>
           <a:ln w="12700">
             <a:solidFill>
@@ -12028,22 +11764,113 @@
       </p:sp>
       <p:sp>
         <p:nvSpPr>
+          <p:cNvPr id="17" name="Rounded Rectangle 16"/>
+          <p:cNvSpPr/>
+          <p:nvPr/>
+        </p:nvSpPr>
+        <p:spPr>
+          <a:xfrm>
+            <a:off x="6172200" y="1828800"/>
+            <a:ext cx="5440680" cy="640080"/>
+          </a:xfrm>
+          <a:prstGeom prst="roundRect">
+            <a:avLst/>
+          </a:prstGeom>
+          <a:solidFill>
+            <a:srgbClr val="12203C"/>
+          </a:solidFill>
+          <a:ln>
+            <a:noFill/>
+          </a:ln>
+          <a:effectLst/>
+        </p:spPr>
+        <p:style>
+          <a:lnRef idx="1">
+            <a:schemeClr val="accent1"/>
+          </a:lnRef>
+          <a:fillRef idx="3">
+            <a:schemeClr val="accent1"/>
+          </a:fillRef>
+          <a:effectRef idx="2">
+            <a:schemeClr val="accent1"/>
+          </a:effectRef>
+          <a:fontRef idx="minor">
+            <a:schemeClr val="lt1"/>
+          </a:fontRef>
+        </p:style>
+        <p:txBody>
+          <a:bodyPr rtlCol="0" anchor="ctr"/>
+          <a:lstStyle/>
+          <a:p>
+            <a:pPr algn="ctr"/>
+          </a:p>
+        </p:txBody>
+      </p:sp>
+      <p:sp>
+        <p:nvSpPr>
+          <p:cNvPr id="18" name="TextBox 17"/>
+          <p:cNvSpPr txBox="1"/>
+          <p:nvPr/>
+        </p:nvSpPr>
+        <p:spPr>
+          <a:xfrm>
+            <a:off x="6446520" y="1828800"/>
+            <a:ext cx="4937760" cy="640080"/>
+          </a:xfrm>
+          <a:prstGeom prst="rect">
+            <a:avLst/>
+          </a:prstGeom>
+          <a:noFill/>
+        </p:spPr>
+        <p:txBody>
+          <a:bodyPr wrap="square" anchor="ctr" lIns="0" rIns="0" tIns="0" bIns="0">
+            <a:spAutoFit/>
+          </a:bodyPr>
+          <a:lstStyle/>
+          <a:p>
+            <a:pPr algn="l">
+              <a:lnSpc>
+                <a:spcPct val="100000"/>
+              </a:lnSpc>
+              <a:spcBef>
+                <a:spcPts val="0"/>
+              </a:spcBef>
+              <a:spcAft>
+                <a:spcPts val="600"/>
+              </a:spcAft>
+            </a:pPr>
+            <a:r>
+              <a:rPr sz="1600" b="1">
+                <a:solidFill>
+                  <a:srgbClr val="FFFFFF"/>
+                </a:solidFill>
+                <a:latin typeface="NanumSquare"/>
+                <a:ea typeface="NanumSquare"/>
+                <a:cs typeface="NanumSquare"/>
+              </a:rPr>
+              <a:t>주의할 것</a:t>
+            </a:r>
+          </a:p>
+        </p:txBody>
+      </p:sp>
+      <p:sp>
+        <p:nvSpPr>
           <p:cNvPr id="19" name="TextBox 18"/>
           <p:cNvSpPr txBox="1"/>
           <p:nvPr/>
         </p:nvSpPr>
         <p:spPr>
           <a:xfrm>
-            <a:off x="777240" y="5532120"/>
-            <a:ext cx="10607040" cy="658368"/>
-          </a:xfrm>
-          <a:prstGeom prst="rect">
-            <a:avLst/>
-          </a:prstGeom>
-          <a:noFill/>
-        </p:spPr>
-        <p:txBody>
-          <a:bodyPr wrap="square" anchor="ctr" lIns="0" rIns="0" tIns="0" bIns="0">
+            <a:off x="6492240" y="2697480"/>
+            <a:ext cx="4846320" cy="548640"/>
+          </a:xfrm>
+          <a:prstGeom prst="rect">
+            <a:avLst/>
+          </a:prstGeom>
+          <a:noFill/>
+        </p:spPr>
+        <p:txBody>
+          <a:bodyPr wrap="square" anchor="t" lIns="0" rIns="0" tIns="0" bIns="0">
             <a:spAutoFit/>
           </a:bodyPr>
           <a:lstStyle/>
@@ -12060,18 +11887,18 @@
               </a:spcAft>
             </a:pPr>
             <a:r>
-              <a:rPr sz="1200" b="1">
-                <a:solidFill>
-                  <a:srgbClr val="6366F1"/>
+              <a:rPr sz="1400" b="1">
+                <a:solidFill>
+                  <a:srgbClr val="12203C"/>
                 </a:solidFill>
                 <a:latin typeface="NanumGothic"/>
                 <a:ea typeface="NanumGothic"/>
                 <a:cs typeface="NanumGothic"/>
               </a:rPr>
-              <a:t>NOTE   </a:t>
-            </a:r>
-            <a:r>
-              <a:rPr sz="1300" b="0">
+              <a:t>•  </a:t>
+            </a:r>
+            <a:r>
+              <a:rPr sz="1400" b="0">
                 <a:solidFill>
                   <a:srgbClr val="0F172A"/>
                 </a:solidFill>
@@ -12079,7 +11906,181 @@
                 <a:ea typeface="NanumGothic"/>
                 <a:cs typeface="NanumGothic"/>
               </a:rPr>
-              <a:t>실제 사례: 변호사가 ChatGPT 가짜 판례 인용→벌금(Mata v. Avianca, 2023) · 에어캐나다 챗봇이 없는 환불정책 지어내 배상(2024)</a:t>
+              <a:t>환각 — 없는 사실 지어냄</a:t>
+            </a:r>
+          </a:p>
+        </p:txBody>
+      </p:sp>
+      <p:sp>
+        <p:nvSpPr>
+          <p:cNvPr id="20" name="TextBox 19"/>
+          <p:cNvSpPr txBox="1"/>
+          <p:nvPr/>
+        </p:nvSpPr>
+        <p:spPr>
+          <a:xfrm>
+            <a:off x="6492240" y="3264408"/>
+            <a:ext cx="4846320" cy="548640"/>
+          </a:xfrm>
+          <a:prstGeom prst="rect">
+            <a:avLst/>
+          </a:prstGeom>
+          <a:noFill/>
+        </p:spPr>
+        <p:txBody>
+          <a:bodyPr wrap="square" anchor="t" lIns="0" rIns="0" tIns="0" bIns="0">
+            <a:spAutoFit/>
+          </a:bodyPr>
+          <a:lstStyle/>
+          <a:p>
+            <a:pPr algn="l">
+              <a:lnSpc>
+                <a:spcPct val="100000"/>
+              </a:lnSpc>
+              <a:spcBef>
+                <a:spcPts val="0"/>
+              </a:spcBef>
+              <a:spcAft>
+                <a:spcPts val="600"/>
+              </a:spcAft>
+            </a:pPr>
+            <a:r>
+              <a:rPr sz="1400" b="1">
+                <a:solidFill>
+                  <a:srgbClr val="12203C"/>
+                </a:solidFill>
+                <a:latin typeface="NanumGothic"/>
+                <a:ea typeface="NanumGothic"/>
+                <a:cs typeface="NanumGothic"/>
+              </a:rPr>
+              <a:t>•  </a:t>
+            </a:r>
+            <a:r>
+              <a:rPr sz="1400" b="0">
+                <a:solidFill>
+                  <a:srgbClr val="0F172A"/>
+                </a:solidFill>
+                <a:latin typeface="NanumGothic"/>
+                <a:ea typeface="NanumGothic"/>
+                <a:cs typeface="NanumGothic"/>
+              </a:rPr>
+              <a:t>최신·실시간 정보</a:t>
+            </a:r>
+          </a:p>
+        </p:txBody>
+      </p:sp>
+      <p:sp>
+        <p:nvSpPr>
+          <p:cNvPr id="21" name="TextBox 20"/>
+          <p:cNvSpPr txBox="1"/>
+          <p:nvPr/>
+        </p:nvSpPr>
+        <p:spPr>
+          <a:xfrm>
+            <a:off x="6492240" y="3831336"/>
+            <a:ext cx="4846320" cy="548640"/>
+          </a:xfrm>
+          <a:prstGeom prst="rect">
+            <a:avLst/>
+          </a:prstGeom>
+          <a:noFill/>
+        </p:spPr>
+        <p:txBody>
+          <a:bodyPr wrap="square" anchor="t" lIns="0" rIns="0" tIns="0" bIns="0">
+            <a:spAutoFit/>
+          </a:bodyPr>
+          <a:lstStyle/>
+          <a:p>
+            <a:pPr algn="l">
+              <a:lnSpc>
+                <a:spcPct val="100000"/>
+              </a:lnSpc>
+              <a:spcBef>
+                <a:spcPts val="0"/>
+              </a:spcBef>
+              <a:spcAft>
+                <a:spcPts val="600"/>
+              </a:spcAft>
+            </a:pPr>
+            <a:r>
+              <a:rPr sz="1400" b="1">
+                <a:solidFill>
+                  <a:srgbClr val="12203C"/>
+                </a:solidFill>
+                <a:latin typeface="NanumGothic"/>
+                <a:ea typeface="NanumGothic"/>
+                <a:cs typeface="NanumGothic"/>
+              </a:rPr>
+              <a:t>•  </a:t>
+            </a:r>
+            <a:r>
+              <a:rPr sz="1400" b="0">
+                <a:solidFill>
+                  <a:srgbClr val="0F172A"/>
+                </a:solidFill>
+                <a:latin typeface="NanumGothic"/>
+                <a:ea typeface="NanumGothic"/>
+                <a:cs typeface="NanumGothic"/>
+              </a:rPr>
+              <a:t>정확한 계산·셈</a:t>
+            </a:r>
+          </a:p>
+        </p:txBody>
+      </p:sp>
+      <p:sp>
+        <p:nvSpPr>
+          <p:cNvPr id="22" name="TextBox 21"/>
+          <p:cNvSpPr txBox="1"/>
+          <p:nvPr/>
+        </p:nvSpPr>
+        <p:spPr>
+          <a:xfrm>
+            <a:off x="6492240" y="4398264"/>
+            <a:ext cx="4846320" cy="548640"/>
+          </a:xfrm>
+          <a:prstGeom prst="rect">
+            <a:avLst/>
+          </a:prstGeom>
+          <a:noFill/>
+        </p:spPr>
+        <p:txBody>
+          <a:bodyPr wrap="square" anchor="t" lIns="0" rIns="0" tIns="0" bIns="0">
+            <a:spAutoFit/>
+          </a:bodyPr>
+          <a:lstStyle/>
+          <a:p>
+            <a:pPr algn="l">
+              <a:lnSpc>
+                <a:spcPct val="100000"/>
+              </a:lnSpc>
+              <a:spcBef>
+                <a:spcPts val="0"/>
+              </a:spcBef>
+              <a:spcAft>
+                <a:spcPts val="600"/>
+              </a:spcAft>
+            </a:pPr>
+            <a:r>
+              <a:rPr sz="1400" b="1">
+                <a:solidFill>
+                  <a:srgbClr val="12203C"/>
+                </a:solidFill>
+                <a:latin typeface="NanumGothic"/>
+                <a:ea typeface="NanumGothic"/>
+                <a:cs typeface="NanumGothic"/>
+              </a:rPr>
+              <a:t>•  </a:t>
+            </a:r>
+            <a:r>
+              <a:rPr sz="1400" b="0">
+                <a:solidFill>
+                  <a:srgbClr val="0F172A"/>
+                </a:solidFill>
+                <a:latin typeface="NanumGothic"/>
+                <a:ea typeface="NanumGothic"/>
+                <a:cs typeface="NanumGothic"/>
+              </a:rPr>
+              <a:t>일관된 장기 추론</a:t>
             </a:r>
           </a:p>
         </p:txBody>
@@ -12232,7 +12233,7 @@
                 <a:ea typeface="NanumGothic"/>
                 <a:cs typeface="NanumGothic"/>
               </a:rPr>
-              <a:t>모델 선택</a:t>
+              <a:t>주의</a:t>
             </a:r>
           </a:p>
         </p:txBody>
@@ -12279,7 +12280,7 @@
                 <a:ea typeface="NanumSquare"/>
                 <a:cs typeface="NanumSquare"/>
               </a:rPr>
-              <a:t>어떤 모델을 쓸까</a:t>
+              <a:t>환각(hallucination) 바로 알기</a:t>
             </a:r>
           </a:p>
         </p:txBody>
@@ -12508,7 +12509,7 @@
                 <a:ea typeface="NanumGothic"/>
                 <a:cs typeface="NanumGothic"/>
               </a:rPr>
-              <a:t>크기 ↔ 성능</a:t>
+              <a:t>그럴듯하지만 틀린 출력</a:t>
             </a:r>
           </a:p>
         </p:txBody>
@@ -12555,7 +12556,7 @@
                 <a:ea typeface="NanumGothic"/>
                 <a:cs typeface="NanumGothic"/>
               </a:rPr>
-              <a:t>큰 모델 = 똑똑하지만 느리고 비쌈</a:t>
+              <a:t>출처·인용·수치를 자신있게 지어내기도</a:t>
             </a:r>
           </a:p>
         </p:txBody>
@@ -12646,7 +12647,7 @@
                 <a:ea typeface="NanumGothic"/>
                 <a:cs typeface="NanumGothic"/>
               </a:rPr>
-              <a:t>작업에 맞게</a:t>
+              <a:t>왜 생기나</a:t>
             </a:r>
           </a:p>
         </p:txBody>
@@ -12693,7 +12694,7 @@
                 <a:ea typeface="NanumGothic"/>
                 <a:cs typeface="NanumGothic"/>
               </a:rPr>
-              <a:t>간단한 작업엔 작고 빠른 모델, 어려운 작업엔 크고/추론 모델</a:t>
+              <a:t>'그럴듯한 다음 토큰'을 생성할 뿐 사실 검증을 안 함</a:t>
             </a:r>
           </a:p>
         </p:txBody>
@@ -12784,7 +12785,7 @@
                 <a:ea typeface="NanumGothic"/>
                 <a:cs typeface="NanumGothic"/>
               </a:rPr>
-              <a:t>Claude 예</a:t>
+              <a:t>대응</a:t>
             </a:r>
           </a:p>
         </p:txBody>
@@ -12831,7 +12832,7 @@
                 <a:ea typeface="NanumGothic"/>
                 <a:cs typeface="NanumGothic"/>
               </a:rPr>
-              <a:t>Opus(최상위) · Sonnet(균형) · Haiku(빠름·저비용)</a:t>
+              <a:t>출처 확인·검색 연동(RAG)·교차검증 → 리서치 에이전트의 존재 이유</a:t>
             </a:r>
           </a:p>
         </p:txBody>
@@ -12935,7 +12936,7 @@
                 <a:ea typeface="NanumGothic"/>
                 <a:cs typeface="NanumGothic"/>
               </a:rPr>
-              <a:t>참고 가격(~2026.6, 1M토큰 입력/출력): Opus $5/$25 · Sonnet $3/$15 · Haiku $1/$5 (변동)</a:t>
+              <a:t>실제 사례: 변호사가 ChatGPT 가짜 판례 인용→벌금(Mata v. Avianca, 2023) · 에어캐나다 챗봇이 없는 환불정책 지어내 배상(2024)</a:t>
             </a:r>
           </a:p>
         </p:txBody>
@@ -14349,7 +14350,7 @@
                 <a:ea typeface="NanumGothic"/>
                 <a:cs typeface="NanumGothic"/>
               </a:rPr>
-              <a:t>브릿지</a:t>
+              <a:t>모델 선택</a:t>
             </a:r>
           </a:p>
         </p:txBody>
@@ -14396,7 +14397,7 @@
                 <a:ea typeface="NanumSquare"/>
                 <a:cs typeface="NanumSquare"/>
               </a:rPr>
-              <a:t>LLM → 에이전트로 가는 길</a:t>
+              <a:t>어떤 모델을 쓸까</a:t>
             </a:r>
           </a:p>
         </p:txBody>
@@ -14625,7 +14626,7 @@
                 <a:ea typeface="NanumGothic"/>
                 <a:cs typeface="NanumGothic"/>
               </a:rPr>
-              <a:t>LLM 단독의 한계</a:t>
+              <a:t>크기 ↔ 성능</a:t>
             </a:r>
           </a:p>
         </p:txBody>
@@ -14672,7 +14673,7 @@
                 <a:ea typeface="NanumGothic"/>
                 <a:cs typeface="NanumGothic"/>
               </a:rPr>
-              <a:t>도구 없음 · 기억 없음 · 한 번의 응답으로 끝</a:t>
+              <a:t>큰 모델 = 똑똑하지만 느리고 비쌈</a:t>
             </a:r>
           </a:p>
         </p:txBody>
@@ -14763,7 +14764,7 @@
                 <a:ea typeface="NanumGothic"/>
                 <a:cs typeface="NanumGothic"/>
               </a:rPr>
-              <a:t>RAG·검색을 루프로 = 에이전트</a:t>
+              <a:t>작업에 맞게</a:t>
             </a:r>
           </a:p>
         </p:txBody>
@@ -14810,7 +14811,7 @@
                 <a:ea typeface="NanumGothic"/>
                 <a:cs typeface="NanumGothic"/>
               </a:rPr>
-              <a:t>찾고 → 검증하고 → 종합 — 리서치 에이전트로</a:t>
+              <a:t>간단한 작업엔 작고 빠른 모델, 어려운 작업엔 크고/추론 모델</a:t>
             </a:r>
           </a:p>
         </p:txBody>
@@ -14901,7 +14902,7 @@
                 <a:ea typeface="NanumGothic"/>
                 <a:cs typeface="NanumGothic"/>
               </a:rPr>
-              <a:t>다음: Day 2</a:t>
+              <a:t>Claude 예</a:t>
             </a:r>
           </a:p>
         </p:txBody>
@@ -14948,7 +14949,7 @@
                 <a:ea typeface="NanumGothic"/>
                 <a:cs typeface="NanumGothic"/>
               </a:rPr>
-              <a:t>에이전트의 정의와 Claude Code 실습</a:t>
+              <a:t>Opus(최상위) · Sonnet(균형) · Haiku(빠름·저비용)</a:t>
             </a:r>
           </a:p>
         </p:txBody>
@@ -15052,7 +15053,7 @@
                 <a:ea typeface="NanumGothic"/>
                 <a:cs typeface="NanumGothic"/>
               </a:rPr>
-              <a:t>오늘의 임베딩·RAG가 리서치 에이전트의 토대다</a:t>
+              <a:t>참고 가격(~2026.6, 1M토큰 입력/출력): Opus $5/$25 · Sonnet $3/$15 · Haiku $1/$5 (변동)</a:t>
             </a:r>
           </a:p>
         </p:txBody>
@@ -15205,6 +15206,862 @@
                 <a:ea typeface="NanumGothic"/>
                 <a:cs typeface="NanumGothic"/>
               </a:rPr>
+              <a:t>브릿지</a:t>
+            </a:r>
+          </a:p>
+        </p:txBody>
+      </p:sp>
+      <p:sp>
+        <p:nvSpPr>
+          <p:cNvPr id="5" name="TextBox 4"/>
+          <p:cNvSpPr txBox="1"/>
+          <p:nvPr/>
+        </p:nvSpPr>
+        <p:spPr>
+          <a:xfrm>
+            <a:off x="502920" y="713232"/>
+            <a:ext cx="11155680" cy="731520"/>
+          </a:xfrm>
+          <a:prstGeom prst="rect">
+            <a:avLst/>
+          </a:prstGeom>
+          <a:noFill/>
+        </p:spPr>
+        <p:txBody>
+          <a:bodyPr wrap="square" anchor="t" lIns="0" rIns="0" tIns="0" bIns="0">
+            <a:spAutoFit/>
+          </a:bodyPr>
+          <a:lstStyle/>
+          <a:p>
+            <a:pPr algn="l">
+              <a:lnSpc>
+                <a:spcPct val="100000"/>
+              </a:lnSpc>
+              <a:spcBef>
+                <a:spcPts val="0"/>
+              </a:spcBef>
+              <a:spcAft>
+                <a:spcPts val="600"/>
+              </a:spcAft>
+            </a:pPr>
+            <a:r>
+              <a:rPr sz="2700" b="1">
+                <a:solidFill>
+                  <a:srgbClr val="0F172A"/>
+                </a:solidFill>
+                <a:latin typeface="NanumSquare"/>
+                <a:ea typeface="NanumSquare"/>
+                <a:cs typeface="NanumSquare"/>
+              </a:rPr>
+              <a:t>LLM → 에이전트로 가는 길</a:t>
+            </a:r>
+          </a:p>
+        </p:txBody>
+      </p:sp>
+      <p:sp>
+        <p:nvSpPr>
+          <p:cNvPr id="6" name="Rectangle 5"/>
+          <p:cNvSpPr/>
+          <p:nvPr/>
+        </p:nvSpPr>
+        <p:spPr>
+          <a:xfrm>
+            <a:off x="521207" y="1417320"/>
+            <a:ext cx="1005840" cy="45720"/>
+          </a:xfrm>
+          <a:prstGeom prst="rect">
+            <a:avLst/>
+          </a:prstGeom>
+          <a:solidFill>
+            <a:srgbClr val="6366F1"/>
+          </a:solidFill>
+          <a:ln>
+            <a:noFill/>
+          </a:ln>
+          <a:effectLst/>
+        </p:spPr>
+        <p:style>
+          <a:lnRef idx="1">
+            <a:schemeClr val="accent1"/>
+          </a:lnRef>
+          <a:fillRef idx="3">
+            <a:schemeClr val="accent1"/>
+          </a:fillRef>
+          <a:effectRef idx="2">
+            <a:schemeClr val="accent1"/>
+          </a:effectRef>
+          <a:fontRef idx="minor">
+            <a:schemeClr val="lt1"/>
+          </a:fontRef>
+        </p:style>
+        <p:txBody>
+          <a:bodyPr rtlCol="0" anchor="ctr"/>
+          <a:lstStyle/>
+          <a:p>
+            <a:pPr algn="ctr"/>
+          </a:p>
+        </p:txBody>
+      </p:sp>
+      <p:sp>
+        <p:nvSpPr>
+          <p:cNvPr id="7" name="TextBox 6"/>
+          <p:cNvSpPr txBox="1"/>
+          <p:nvPr/>
+        </p:nvSpPr>
+        <p:spPr>
+          <a:xfrm>
+            <a:off x="502920" y="6419088"/>
+            <a:ext cx="7315200" cy="365760"/>
+          </a:xfrm>
+          <a:prstGeom prst="rect">
+            <a:avLst/>
+          </a:prstGeom>
+          <a:noFill/>
+        </p:spPr>
+        <p:txBody>
+          <a:bodyPr wrap="square" anchor="ctr" lIns="0" rIns="0" tIns="0" bIns="0">
+            <a:spAutoFit/>
+          </a:bodyPr>
+          <a:lstStyle/>
+          <a:p>
+            <a:pPr algn="l">
+              <a:lnSpc>
+                <a:spcPct val="100000"/>
+              </a:lnSpc>
+              <a:spcBef>
+                <a:spcPts val="0"/>
+              </a:spcBef>
+              <a:spcAft>
+                <a:spcPts val="600"/>
+              </a:spcAft>
+            </a:pPr>
+            <a:r>
+              <a:rPr sz="900" b="0">
+                <a:solidFill>
+                  <a:srgbClr val="64748B"/>
+                </a:solidFill>
+                <a:latin typeface="NanumGothic"/>
+                <a:ea typeface="NanumGothic"/>
+                <a:cs typeface="NanumGothic"/>
+              </a:rPr>
+              <a:t>AI 에이전트와 응용  ·  원광대학교 5일 교육</a:t>
+            </a:r>
+          </a:p>
+        </p:txBody>
+      </p:sp>
+      <p:sp>
+        <p:nvSpPr>
+          <p:cNvPr id="8" name="TextBox 7"/>
+          <p:cNvSpPr txBox="1"/>
+          <p:nvPr/>
+        </p:nvSpPr>
+        <p:spPr>
+          <a:xfrm>
+            <a:off x="10241280" y="6419088"/>
+            <a:ext cx="1463040" cy="365760"/>
+          </a:xfrm>
+          <a:prstGeom prst="rect">
+            <a:avLst/>
+          </a:prstGeom>
+          <a:noFill/>
+        </p:spPr>
+        <p:txBody>
+          <a:bodyPr wrap="square" anchor="ctr" lIns="0" rIns="0" tIns="0" bIns="0">
+            <a:spAutoFit/>
+          </a:bodyPr>
+          <a:lstStyle/>
+          <a:p>
+            <a:pPr algn="r">
+              <a:lnSpc>
+                <a:spcPct val="100000"/>
+              </a:lnSpc>
+              <a:spcBef>
+                <a:spcPts val="0"/>
+              </a:spcBef>
+              <a:spcAft>
+                <a:spcPts val="600"/>
+              </a:spcAft>
+            </a:pPr>
+            <a:r>
+              <a:rPr sz="900" b="1">
+                <a:solidFill>
+                  <a:srgbClr val="6366F1"/>
+                </a:solidFill>
+                <a:latin typeface="NanumGothic"/>
+                <a:ea typeface="NanumGothic"/>
+                <a:cs typeface="NanumGothic"/>
+              </a:rPr>
+              <a:t>Day 1 · 월</a:t>
+            </a:r>
+          </a:p>
+        </p:txBody>
+      </p:sp>
+      <p:sp>
+        <p:nvSpPr>
+          <p:cNvPr id="9" name="Oval 8"/>
+          <p:cNvSpPr/>
+          <p:nvPr/>
+        </p:nvSpPr>
+        <p:spPr>
+          <a:xfrm>
+            <a:off x="548640" y="1911096"/>
+            <a:ext cx="146304" cy="146304"/>
+          </a:xfrm>
+          <a:prstGeom prst="ellipse">
+            <a:avLst/>
+          </a:prstGeom>
+          <a:solidFill>
+            <a:srgbClr val="6366F1"/>
+          </a:solidFill>
+          <a:ln>
+            <a:noFill/>
+          </a:ln>
+          <a:effectLst/>
+        </p:spPr>
+        <p:style>
+          <a:lnRef idx="1">
+            <a:schemeClr val="accent1"/>
+          </a:lnRef>
+          <a:fillRef idx="3">
+            <a:schemeClr val="accent1"/>
+          </a:fillRef>
+          <a:effectRef idx="2">
+            <a:schemeClr val="accent1"/>
+          </a:effectRef>
+          <a:fontRef idx="minor">
+            <a:schemeClr val="lt1"/>
+          </a:fontRef>
+        </p:style>
+        <p:txBody>
+          <a:bodyPr rtlCol="0" anchor="ctr"/>
+          <a:lstStyle/>
+          <a:p>
+            <a:pPr algn="ctr"/>
+          </a:p>
+        </p:txBody>
+      </p:sp>
+      <p:sp>
+        <p:nvSpPr>
+          <p:cNvPr id="10" name="TextBox 9"/>
+          <p:cNvSpPr txBox="1"/>
+          <p:nvPr/>
+        </p:nvSpPr>
+        <p:spPr>
+          <a:xfrm>
+            <a:off x="868680" y="1828800"/>
+            <a:ext cx="10607040" cy="457200"/>
+          </a:xfrm>
+          <a:prstGeom prst="rect">
+            <a:avLst/>
+          </a:prstGeom>
+          <a:noFill/>
+        </p:spPr>
+        <p:txBody>
+          <a:bodyPr wrap="square" anchor="t" lIns="0" rIns="0" tIns="0" bIns="0">
+            <a:spAutoFit/>
+          </a:bodyPr>
+          <a:lstStyle/>
+          <a:p>
+            <a:pPr algn="l">
+              <a:lnSpc>
+                <a:spcPct val="100000"/>
+              </a:lnSpc>
+              <a:spcBef>
+                <a:spcPts val="0"/>
+              </a:spcBef>
+              <a:spcAft>
+                <a:spcPts val="600"/>
+              </a:spcAft>
+            </a:pPr>
+            <a:r>
+              <a:rPr sz="1600" b="1">
+                <a:solidFill>
+                  <a:srgbClr val="0F172A"/>
+                </a:solidFill>
+                <a:latin typeface="NanumGothic"/>
+                <a:ea typeface="NanumGothic"/>
+                <a:cs typeface="NanumGothic"/>
+              </a:rPr>
+              <a:t>LLM 단독의 한계</a:t>
+            </a:r>
+          </a:p>
+        </p:txBody>
+      </p:sp>
+      <p:sp>
+        <p:nvSpPr>
+          <p:cNvPr id="11" name="TextBox 10"/>
+          <p:cNvSpPr txBox="1"/>
+          <p:nvPr/>
+        </p:nvSpPr>
+        <p:spPr>
+          <a:xfrm>
+            <a:off x="868680" y="2212848"/>
+            <a:ext cx="10607040" cy="457200"/>
+          </a:xfrm>
+          <a:prstGeom prst="rect">
+            <a:avLst/>
+          </a:prstGeom>
+          <a:noFill/>
+        </p:spPr>
+        <p:txBody>
+          <a:bodyPr wrap="square" anchor="t" lIns="0" rIns="0" tIns="0" bIns="0">
+            <a:spAutoFit/>
+          </a:bodyPr>
+          <a:lstStyle/>
+          <a:p>
+            <a:pPr algn="l">
+              <a:lnSpc>
+                <a:spcPct val="100000"/>
+              </a:lnSpc>
+              <a:spcBef>
+                <a:spcPts val="0"/>
+              </a:spcBef>
+              <a:spcAft>
+                <a:spcPts val="600"/>
+              </a:spcAft>
+            </a:pPr>
+            <a:r>
+              <a:rPr sz="1300" b="0">
+                <a:solidFill>
+                  <a:srgbClr val="64748B"/>
+                </a:solidFill>
+                <a:latin typeface="NanumGothic"/>
+                <a:ea typeface="NanumGothic"/>
+                <a:cs typeface="NanumGothic"/>
+              </a:rPr>
+              <a:t>도구 없음 · 기억 없음 · 한 번의 응답으로 끝</a:t>
+            </a:r>
+          </a:p>
+        </p:txBody>
+      </p:sp>
+      <p:sp>
+        <p:nvSpPr>
+          <p:cNvPr id="12" name="Oval 11"/>
+          <p:cNvSpPr/>
+          <p:nvPr/>
+        </p:nvSpPr>
+        <p:spPr>
+          <a:xfrm>
+            <a:off x="548640" y="2779776"/>
+            <a:ext cx="146304" cy="146304"/>
+          </a:xfrm>
+          <a:prstGeom prst="ellipse">
+            <a:avLst/>
+          </a:prstGeom>
+          <a:solidFill>
+            <a:srgbClr val="6366F1"/>
+          </a:solidFill>
+          <a:ln>
+            <a:noFill/>
+          </a:ln>
+          <a:effectLst/>
+        </p:spPr>
+        <p:style>
+          <a:lnRef idx="1">
+            <a:schemeClr val="accent1"/>
+          </a:lnRef>
+          <a:fillRef idx="3">
+            <a:schemeClr val="accent1"/>
+          </a:fillRef>
+          <a:effectRef idx="2">
+            <a:schemeClr val="accent1"/>
+          </a:effectRef>
+          <a:fontRef idx="minor">
+            <a:schemeClr val="lt1"/>
+          </a:fontRef>
+        </p:style>
+        <p:txBody>
+          <a:bodyPr rtlCol="0" anchor="ctr"/>
+          <a:lstStyle/>
+          <a:p>
+            <a:pPr algn="ctr"/>
+          </a:p>
+        </p:txBody>
+      </p:sp>
+      <p:sp>
+        <p:nvSpPr>
+          <p:cNvPr id="13" name="TextBox 12"/>
+          <p:cNvSpPr txBox="1"/>
+          <p:nvPr/>
+        </p:nvSpPr>
+        <p:spPr>
+          <a:xfrm>
+            <a:off x="868680" y="2697480"/>
+            <a:ext cx="10607040" cy="457200"/>
+          </a:xfrm>
+          <a:prstGeom prst="rect">
+            <a:avLst/>
+          </a:prstGeom>
+          <a:noFill/>
+        </p:spPr>
+        <p:txBody>
+          <a:bodyPr wrap="square" anchor="t" lIns="0" rIns="0" tIns="0" bIns="0">
+            <a:spAutoFit/>
+          </a:bodyPr>
+          <a:lstStyle/>
+          <a:p>
+            <a:pPr algn="l">
+              <a:lnSpc>
+                <a:spcPct val="100000"/>
+              </a:lnSpc>
+              <a:spcBef>
+                <a:spcPts val="0"/>
+              </a:spcBef>
+              <a:spcAft>
+                <a:spcPts val="600"/>
+              </a:spcAft>
+            </a:pPr>
+            <a:r>
+              <a:rPr sz="1600" b="1">
+                <a:solidFill>
+                  <a:srgbClr val="0F172A"/>
+                </a:solidFill>
+                <a:latin typeface="NanumGothic"/>
+                <a:ea typeface="NanumGothic"/>
+                <a:cs typeface="NanumGothic"/>
+              </a:rPr>
+              <a:t>RAG·검색을 루프로 = 에이전트</a:t>
+            </a:r>
+          </a:p>
+        </p:txBody>
+      </p:sp>
+      <p:sp>
+        <p:nvSpPr>
+          <p:cNvPr id="14" name="TextBox 13"/>
+          <p:cNvSpPr txBox="1"/>
+          <p:nvPr/>
+        </p:nvSpPr>
+        <p:spPr>
+          <a:xfrm>
+            <a:off x="868680" y="3081528"/>
+            <a:ext cx="10607040" cy="457200"/>
+          </a:xfrm>
+          <a:prstGeom prst="rect">
+            <a:avLst/>
+          </a:prstGeom>
+          <a:noFill/>
+        </p:spPr>
+        <p:txBody>
+          <a:bodyPr wrap="square" anchor="t" lIns="0" rIns="0" tIns="0" bIns="0">
+            <a:spAutoFit/>
+          </a:bodyPr>
+          <a:lstStyle/>
+          <a:p>
+            <a:pPr algn="l">
+              <a:lnSpc>
+                <a:spcPct val="100000"/>
+              </a:lnSpc>
+              <a:spcBef>
+                <a:spcPts val="0"/>
+              </a:spcBef>
+              <a:spcAft>
+                <a:spcPts val="600"/>
+              </a:spcAft>
+            </a:pPr>
+            <a:r>
+              <a:rPr sz="1300" b="0">
+                <a:solidFill>
+                  <a:srgbClr val="64748B"/>
+                </a:solidFill>
+                <a:latin typeface="NanumGothic"/>
+                <a:ea typeface="NanumGothic"/>
+                <a:cs typeface="NanumGothic"/>
+              </a:rPr>
+              <a:t>찾고 → 검증하고 → 종합 — 리서치 에이전트로</a:t>
+            </a:r>
+          </a:p>
+        </p:txBody>
+      </p:sp>
+      <p:sp>
+        <p:nvSpPr>
+          <p:cNvPr id="15" name="Oval 14"/>
+          <p:cNvSpPr/>
+          <p:nvPr/>
+        </p:nvSpPr>
+        <p:spPr>
+          <a:xfrm>
+            <a:off x="548640" y="3648456"/>
+            <a:ext cx="146304" cy="146304"/>
+          </a:xfrm>
+          <a:prstGeom prst="ellipse">
+            <a:avLst/>
+          </a:prstGeom>
+          <a:solidFill>
+            <a:srgbClr val="6366F1"/>
+          </a:solidFill>
+          <a:ln>
+            <a:noFill/>
+          </a:ln>
+          <a:effectLst/>
+        </p:spPr>
+        <p:style>
+          <a:lnRef idx="1">
+            <a:schemeClr val="accent1"/>
+          </a:lnRef>
+          <a:fillRef idx="3">
+            <a:schemeClr val="accent1"/>
+          </a:fillRef>
+          <a:effectRef idx="2">
+            <a:schemeClr val="accent1"/>
+          </a:effectRef>
+          <a:fontRef idx="minor">
+            <a:schemeClr val="lt1"/>
+          </a:fontRef>
+        </p:style>
+        <p:txBody>
+          <a:bodyPr rtlCol="0" anchor="ctr"/>
+          <a:lstStyle/>
+          <a:p>
+            <a:pPr algn="ctr"/>
+          </a:p>
+        </p:txBody>
+      </p:sp>
+      <p:sp>
+        <p:nvSpPr>
+          <p:cNvPr id="16" name="TextBox 15"/>
+          <p:cNvSpPr txBox="1"/>
+          <p:nvPr/>
+        </p:nvSpPr>
+        <p:spPr>
+          <a:xfrm>
+            <a:off x="868680" y="3566160"/>
+            <a:ext cx="10607040" cy="457200"/>
+          </a:xfrm>
+          <a:prstGeom prst="rect">
+            <a:avLst/>
+          </a:prstGeom>
+          <a:noFill/>
+        </p:spPr>
+        <p:txBody>
+          <a:bodyPr wrap="square" anchor="t" lIns="0" rIns="0" tIns="0" bIns="0">
+            <a:spAutoFit/>
+          </a:bodyPr>
+          <a:lstStyle/>
+          <a:p>
+            <a:pPr algn="l">
+              <a:lnSpc>
+                <a:spcPct val="100000"/>
+              </a:lnSpc>
+              <a:spcBef>
+                <a:spcPts val="0"/>
+              </a:spcBef>
+              <a:spcAft>
+                <a:spcPts val="600"/>
+              </a:spcAft>
+            </a:pPr>
+            <a:r>
+              <a:rPr sz="1600" b="1">
+                <a:solidFill>
+                  <a:srgbClr val="0F172A"/>
+                </a:solidFill>
+                <a:latin typeface="NanumGothic"/>
+                <a:ea typeface="NanumGothic"/>
+                <a:cs typeface="NanumGothic"/>
+              </a:rPr>
+              <a:t>다음: Day 2</a:t>
+            </a:r>
+          </a:p>
+        </p:txBody>
+      </p:sp>
+      <p:sp>
+        <p:nvSpPr>
+          <p:cNvPr id="17" name="TextBox 16"/>
+          <p:cNvSpPr txBox="1"/>
+          <p:nvPr/>
+        </p:nvSpPr>
+        <p:spPr>
+          <a:xfrm>
+            <a:off x="868680" y="3950208"/>
+            <a:ext cx="10607040" cy="457200"/>
+          </a:xfrm>
+          <a:prstGeom prst="rect">
+            <a:avLst/>
+          </a:prstGeom>
+          <a:noFill/>
+        </p:spPr>
+        <p:txBody>
+          <a:bodyPr wrap="square" anchor="t" lIns="0" rIns="0" tIns="0" bIns="0">
+            <a:spAutoFit/>
+          </a:bodyPr>
+          <a:lstStyle/>
+          <a:p>
+            <a:pPr algn="l">
+              <a:lnSpc>
+                <a:spcPct val="100000"/>
+              </a:lnSpc>
+              <a:spcBef>
+                <a:spcPts val="0"/>
+              </a:spcBef>
+              <a:spcAft>
+                <a:spcPts val="600"/>
+              </a:spcAft>
+            </a:pPr>
+            <a:r>
+              <a:rPr sz="1300" b="0">
+                <a:solidFill>
+                  <a:srgbClr val="64748B"/>
+                </a:solidFill>
+                <a:latin typeface="NanumGothic"/>
+                <a:ea typeface="NanumGothic"/>
+                <a:cs typeface="NanumGothic"/>
+              </a:rPr>
+              <a:t>에이전트의 정의와 Claude Code 실습</a:t>
+            </a:r>
+          </a:p>
+        </p:txBody>
+      </p:sp>
+      <p:sp>
+        <p:nvSpPr>
+          <p:cNvPr id="18" name="Rounded Rectangle 17"/>
+          <p:cNvSpPr/>
+          <p:nvPr/>
+        </p:nvSpPr>
+        <p:spPr>
+          <a:xfrm>
+            <a:off x="502920" y="5532120"/>
+            <a:ext cx="11155680" cy="658368"/>
+          </a:xfrm>
+          <a:prstGeom prst="roundRect">
+            <a:avLst/>
+          </a:prstGeom>
+          <a:solidFill>
+            <a:srgbClr val="F1F5F9"/>
+          </a:solidFill>
+          <a:ln w="12700">
+            <a:solidFill>
+              <a:srgbClr val="E2E8F0"/>
+            </a:solidFill>
+          </a:ln>
+          <a:effectLst/>
+        </p:spPr>
+        <p:style>
+          <a:lnRef idx="1">
+            <a:schemeClr val="accent1"/>
+          </a:lnRef>
+          <a:fillRef idx="3">
+            <a:schemeClr val="accent1"/>
+          </a:fillRef>
+          <a:effectRef idx="2">
+            <a:schemeClr val="accent1"/>
+          </a:effectRef>
+          <a:fontRef idx="minor">
+            <a:schemeClr val="lt1"/>
+          </a:fontRef>
+        </p:style>
+        <p:txBody>
+          <a:bodyPr rtlCol="0" anchor="ctr"/>
+          <a:lstStyle/>
+          <a:p>
+            <a:pPr algn="ctr"/>
+          </a:p>
+        </p:txBody>
+      </p:sp>
+      <p:sp>
+        <p:nvSpPr>
+          <p:cNvPr id="19" name="TextBox 18"/>
+          <p:cNvSpPr txBox="1"/>
+          <p:nvPr/>
+        </p:nvSpPr>
+        <p:spPr>
+          <a:xfrm>
+            <a:off x="777240" y="5532120"/>
+            <a:ext cx="10607040" cy="658368"/>
+          </a:xfrm>
+          <a:prstGeom prst="rect">
+            <a:avLst/>
+          </a:prstGeom>
+          <a:noFill/>
+        </p:spPr>
+        <p:txBody>
+          <a:bodyPr wrap="square" anchor="ctr" lIns="0" rIns="0" tIns="0" bIns="0">
+            <a:spAutoFit/>
+          </a:bodyPr>
+          <a:lstStyle/>
+          <a:p>
+            <a:pPr algn="l">
+              <a:lnSpc>
+                <a:spcPct val="100000"/>
+              </a:lnSpc>
+              <a:spcBef>
+                <a:spcPts val="0"/>
+              </a:spcBef>
+              <a:spcAft>
+                <a:spcPts val="600"/>
+              </a:spcAft>
+            </a:pPr>
+            <a:r>
+              <a:rPr sz="1200" b="1">
+                <a:solidFill>
+                  <a:srgbClr val="6366F1"/>
+                </a:solidFill>
+                <a:latin typeface="NanumGothic"/>
+                <a:ea typeface="NanumGothic"/>
+                <a:cs typeface="NanumGothic"/>
+              </a:rPr>
+              <a:t>NOTE   </a:t>
+            </a:r>
+            <a:r>
+              <a:rPr sz="1300" b="0">
+                <a:solidFill>
+                  <a:srgbClr val="0F172A"/>
+                </a:solidFill>
+                <a:latin typeface="NanumGothic"/>
+                <a:ea typeface="NanumGothic"/>
+                <a:cs typeface="NanumGothic"/>
+              </a:rPr>
+              <a:t>오늘의 임베딩·RAG가 리서치 에이전트의 토대다</a:t>
+            </a:r>
+          </a:p>
+        </p:txBody>
+      </p:sp>
+    </p:spTree>
+  </p:cSld>
+  <p:clrMapOvr>
+    <a:masterClrMapping/>
+  </p:clrMapOvr>
+</p:sld>
+</file>
+
+<file path=ppt/slides/slide22.xml><?xml version="1.0" encoding="utf-8"?>
+<p:sld xmlns:a="http://schemas.openxmlformats.org/drawingml/2006/main" xmlns:p="http://schemas.openxmlformats.org/presentationml/2006/main" xmlns:r="http://schemas.openxmlformats.org/officeDocument/2006/relationships">
+  <p:cSld>
+    <p:spTree>
+      <p:nvGrpSpPr>
+        <p:cNvPr id="1" name=""/>
+        <p:cNvGrpSpPr/>
+        <p:nvPr/>
+      </p:nvGrpSpPr>
+      <p:grpSpPr/>
+      <p:sp>
+        <p:nvSpPr>
+          <p:cNvPr id="2" name="Rectangle 1"/>
+          <p:cNvSpPr/>
+          <p:nvPr/>
+        </p:nvSpPr>
+        <p:spPr>
+          <a:xfrm>
+            <a:off x="0" y="0"/>
+            <a:ext cx="12191695" cy="6858000"/>
+          </a:xfrm>
+          <a:prstGeom prst="rect">
+            <a:avLst/>
+          </a:prstGeom>
+          <a:solidFill>
+            <a:srgbClr val="FFFFFF"/>
+          </a:solidFill>
+          <a:ln>
+            <a:noFill/>
+          </a:ln>
+          <a:effectLst/>
+        </p:spPr>
+        <p:style>
+          <a:lnRef idx="1">
+            <a:schemeClr val="accent1"/>
+          </a:lnRef>
+          <a:fillRef idx="3">
+            <a:schemeClr val="accent1"/>
+          </a:fillRef>
+          <a:effectRef idx="2">
+            <a:schemeClr val="accent1"/>
+          </a:effectRef>
+          <a:fontRef idx="minor">
+            <a:schemeClr val="lt1"/>
+          </a:fontRef>
+        </p:style>
+        <p:txBody>
+          <a:bodyPr rtlCol="0" anchor="ctr"/>
+          <a:lstStyle/>
+          <a:p>
+            <a:pPr algn="ctr"/>
+          </a:p>
+        </p:txBody>
+      </p:sp>
+      <p:sp>
+        <p:nvSpPr>
+          <p:cNvPr id="3" name="Rectangle 2"/>
+          <p:cNvSpPr/>
+          <p:nvPr/>
+        </p:nvSpPr>
+        <p:spPr>
+          <a:xfrm>
+            <a:off x="0" y="0"/>
+            <a:ext cx="164592" cy="6858000"/>
+          </a:xfrm>
+          <a:prstGeom prst="rect">
+            <a:avLst/>
+          </a:prstGeom>
+          <a:solidFill>
+            <a:srgbClr val="6366F1"/>
+          </a:solidFill>
+          <a:ln>
+            <a:noFill/>
+          </a:ln>
+          <a:effectLst/>
+        </p:spPr>
+        <p:style>
+          <a:lnRef idx="1">
+            <a:schemeClr val="accent1"/>
+          </a:lnRef>
+          <a:fillRef idx="3">
+            <a:schemeClr val="accent1"/>
+          </a:fillRef>
+          <a:effectRef idx="2">
+            <a:schemeClr val="accent1"/>
+          </a:effectRef>
+          <a:fontRef idx="minor">
+            <a:schemeClr val="lt1"/>
+          </a:fontRef>
+        </p:style>
+        <p:txBody>
+          <a:bodyPr rtlCol="0" anchor="ctr"/>
+          <a:lstStyle/>
+          <a:p>
+            <a:pPr algn="ctr"/>
+          </a:p>
+        </p:txBody>
+      </p:sp>
+      <p:sp>
+        <p:nvSpPr>
+          <p:cNvPr id="4" name="TextBox 3"/>
+          <p:cNvSpPr txBox="1"/>
+          <p:nvPr/>
+        </p:nvSpPr>
+        <p:spPr>
+          <a:xfrm>
+            <a:off x="502920" y="384048"/>
+            <a:ext cx="10058400" cy="320040"/>
+          </a:xfrm>
+          <a:prstGeom prst="rect">
+            <a:avLst/>
+          </a:prstGeom>
+          <a:noFill/>
+        </p:spPr>
+        <p:txBody>
+          <a:bodyPr wrap="square" anchor="t" lIns="0" rIns="0" tIns="0" bIns="0">
+            <a:spAutoFit/>
+          </a:bodyPr>
+          <a:lstStyle/>
+          <a:p>
+            <a:pPr algn="l">
+              <a:lnSpc>
+                <a:spcPct val="100000"/>
+              </a:lnSpc>
+              <a:spcBef>
+                <a:spcPts val="0"/>
+              </a:spcBef>
+              <a:spcAft>
+                <a:spcPts val="600"/>
+              </a:spcAft>
+            </a:pPr>
+            <a:r>
+              <a:rPr sz="1200" b="1">
+                <a:solidFill>
+                  <a:srgbClr val="6366F1"/>
+                </a:solidFill>
+                <a:latin typeface="NanumGothic"/>
+                <a:ea typeface="NanumGothic"/>
+                <a:cs typeface="NanumGothic"/>
+              </a:rPr>
               <a:t>SUMMARY</a:t>
             </a:r>
           </a:p>
@@ -16583,7 +17440,7 @@
                 <a:ea typeface="NanumGothic"/>
                 <a:cs typeface="NanumGothic"/>
               </a:rPr>
-              <a:t>90분 · 10 파트</a:t>
+              <a:t>90분 · 11 파트</a:t>
             </a:r>
           </a:p>
         </p:txBody>
@@ -16814,7 +17671,7 @@
                 <a:ea typeface="NanumGothic"/>
                 <a:cs typeface="NanumGothic"/>
               </a:rPr>
-              <a:t>LLM이란 + 토큰·예측</a:t>
+              <a:t>언어 모델 간단 역사</a:t>
             </a:r>
           </a:p>
         </p:txBody>
@@ -16998,7 +17855,7 @@
                 <a:ea typeface="NanumGothic"/>
                 <a:cs typeface="NanumGothic"/>
               </a:rPr>
-              <a:t>학습: 사전학습 · 정렬</a:t>
+              <a:t>LLM이란 + 토큰·예측</a:t>
             </a:r>
           </a:p>
         </p:txBody>
@@ -17182,7 +18039,7 @@
                 <a:ea typeface="NanumGothic"/>
                 <a:cs typeface="NanumGothic"/>
               </a:rPr>
-              <a:t>추론(사고) 모델</a:t>
+              <a:t>학습: 사전학습 · 정렬</a:t>
             </a:r>
           </a:p>
         </p:txBody>
@@ -17366,7 +18223,7 @@
                 <a:ea typeface="NanumGothic"/>
                 <a:cs typeface="NanumGothic"/>
               </a:rPr>
-              <a:t>임베딩 &amp; 의미 검색</a:t>
+              <a:t>추론(사고) 모델</a:t>
             </a:r>
           </a:p>
         </p:txBody>
@@ -17550,7 +18407,7 @@
                 <a:ea typeface="NanumGothic"/>
                 <a:cs typeface="NanumGothic"/>
               </a:rPr>
-              <a:t>RAG — 검색 증강 생성</a:t>
+              <a:t>임베딩 &amp; 의미 검색</a:t>
             </a:r>
           </a:p>
         </p:txBody>
@@ -17563,7 +18420,7 @@
         </p:nvSpPr>
         <p:spPr>
           <a:xfrm>
-            <a:off x="6217920" y="2148840"/>
+            <a:off x="502920" y="5532120"/>
             <a:ext cx="5440680" cy="566928"/>
           </a:xfrm>
           <a:prstGeom prst="roundRect">
@@ -17609,7 +18466,7 @@
         </p:nvSpPr>
         <p:spPr>
           <a:xfrm>
-            <a:off x="6364224" y="2267712"/>
+            <a:off x="649224" y="5650992"/>
             <a:ext cx="384048" cy="384048"/>
           </a:xfrm>
           <a:prstGeom prst="ellipse">
@@ -17653,7 +18510,7 @@
         </p:nvSpPr>
         <p:spPr>
           <a:xfrm>
-            <a:off x="6364224" y="2267712"/>
+            <a:off x="649224" y="5650992"/>
             <a:ext cx="384048" cy="384048"/>
           </a:xfrm>
           <a:prstGeom prst="rect">
@@ -17700,7 +18557,7 @@
         </p:nvSpPr>
         <p:spPr>
           <a:xfrm>
-            <a:off x="6931152" y="2148840"/>
+            <a:off x="1216152" y="5532120"/>
             <a:ext cx="4572000" cy="566928"/>
           </a:xfrm>
           <a:prstGeom prst="rect">
@@ -17734,7 +18591,7 @@
                 <a:ea typeface="NanumGothic"/>
                 <a:cs typeface="NanumGothic"/>
               </a:rPr>
-              <a:t>프롬프트 엔지니어링</a:t>
+              <a:t>RAG — 검색 증강 생성</a:t>
             </a:r>
           </a:p>
         </p:txBody>
@@ -17747,7 +18604,7 @@
         </p:nvSpPr>
         <p:spPr>
           <a:xfrm>
-            <a:off x="6217920" y="2825496"/>
+            <a:off x="6217920" y="2148840"/>
             <a:ext cx="5440680" cy="566928"/>
           </a:xfrm>
           <a:prstGeom prst="roundRect">
@@ -17793,7 +18650,7 @@
         </p:nvSpPr>
         <p:spPr>
           <a:xfrm>
-            <a:off x="6364224" y="2944368"/>
+            <a:off x="6364224" y="2267712"/>
             <a:ext cx="384048" cy="384048"/>
           </a:xfrm>
           <a:prstGeom prst="ellipse">
@@ -17837,7 +18694,7 @@
         </p:nvSpPr>
         <p:spPr>
           <a:xfrm>
-            <a:off x="6364224" y="2944368"/>
+            <a:off x="6364224" y="2267712"/>
             <a:ext cx="384048" cy="384048"/>
           </a:xfrm>
           <a:prstGeom prst="rect">
@@ -17884,7 +18741,7 @@
         </p:nvSpPr>
         <p:spPr>
           <a:xfrm>
-            <a:off x="6931152" y="2825496"/>
+            <a:off x="6931152" y="2148840"/>
             <a:ext cx="4572000" cy="566928"/>
           </a:xfrm>
           <a:prstGeom prst="rect">
@@ -17918,7 +18775,7 @@
                 <a:ea typeface="NanumGothic"/>
                 <a:cs typeface="NanumGothic"/>
               </a:rPr>
-              <a:t>생성 제어 · 컨텍스트 윈도우</a:t>
+              <a:t>프롬프트 엔지니어링</a:t>
             </a:r>
           </a:p>
         </p:txBody>
@@ -17931,7 +18788,7 @@
         </p:nvSpPr>
         <p:spPr>
           <a:xfrm>
-            <a:off x="6217920" y="3502152"/>
+            <a:off x="6217920" y="2825496"/>
             <a:ext cx="5440680" cy="566928"/>
           </a:xfrm>
           <a:prstGeom prst="roundRect">
@@ -17977,7 +18834,7 @@
         </p:nvSpPr>
         <p:spPr>
           <a:xfrm>
-            <a:off x="6364224" y="3621024"/>
+            <a:off x="6364224" y="2944368"/>
             <a:ext cx="384048" cy="384048"/>
           </a:xfrm>
           <a:prstGeom prst="ellipse">
@@ -18021,7 +18878,7 @@
         </p:nvSpPr>
         <p:spPr>
           <a:xfrm>
-            <a:off x="6364224" y="3621024"/>
+            <a:off x="6364224" y="2944368"/>
             <a:ext cx="384048" cy="384048"/>
           </a:xfrm>
           <a:prstGeom prst="rect">
@@ -18068,7 +18925,7 @@
         </p:nvSpPr>
         <p:spPr>
           <a:xfrm>
-            <a:off x="6931152" y="3502152"/>
+            <a:off x="6931152" y="2825496"/>
             <a:ext cx="4572000" cy="566928"/>
           </a:xfrm>
           <a:prstGeom prst="rect">
@@ -18102,7 +18959,7 @@
                 <a:ea typeface="NanumGothic"/>
                 <a:cs typeface="NanumGothic"/>
               </a:rPr>
-              <a:t>능력과 한계 · 환각</a:t>
+              <a:t>생성 제어 · 컨텍스트 윈도우</a:t>
             </a:r>
           </a:p>
         </p:txBody>
@@ -18115,7 +18972,7 @@
         </p:nvSpPr>
         <p:spPr>
           <a:xfrm>
-            <a:off x="6217920" y="4178808"/>
+            <a:off x="6217920" y="3502152"/>
             <a:ext cx="5440680" cy="566928"/>
           </a:xfrm>
           <a:prstGeom prst="roundRect">
@@ -18161,7 +19018,7 @@
         </p:nvSpPr>
         <p:spPr>
           <a:xfrm>
-            <a:off x="6364224" y="4297680"/>
+            <a:off x="6364224" y="3621024"/>
             <a:ext cx="384048" cy="384048"/>
           </a:xfrm>
           <a:prstGeom prst="ellipse">
@@ -18205,7 +19062,7 @@
         </p:nvSpPr>
         <p:spPr>
           <a:xfrm>
-            <a:off x="6364224" y="4297680"/>
+            <a:off x="6364224" y="3621024"/>
             <a:ext cx="384048" cy="384048"/>
           </a:xfrm>
           <a:prstGeom prst="rect">
@@ -18252,7 +19109,7 @@
         </p:nvSpPr>
         <p:spPr>
           <a:xfrm>
-            <a:off x="6931152" y="4178808"/>
+            <a:off x="6931152" y="3502152"/>
             <a:ext cx="4572000" cy="566928"/>
           </a:xfrm>
           <a:prstGeom prst="rect">
@@ -18286,7 +19143,7 @@
                 <a:ea typeface="NanumGothic"/>
                 <a:cs typeface="NanumGothic"/>
               </a:rPr>
-              <a:t>모델 선택</a:t>
+              <a:t>능력과 한계 · 환각</a:t>
             </a:r>
           </a:p>
         </p:txBody>
@@ -18299,7 +19156,7 @@
         </p:nvSpPr>
         <p:spPr>
           <a:xfrm>
-            <a:off x="6217920" y="4855464"/>
+            <a:off x="6217920" y="4178808"/>
             <a:ext cx="5440680" cy="566928"/>
           </a:xfrm>
           <a:prstGeom prst="roundRect">
@@ -18345,7 +19202,7 @@
         </p:nvSpPr>
         <p:spPr>
           <a:xfrm>
-            <a:off x="6364224" y="4974336"/>
+            <a:off x="6364224" y="4297680"/>
             <a:ext cx="384048" cy="384048"/>
           </a:xfrm>
           <a:prstGeom prst="ellipse">
@@ -18389,7 +19246,7 @@
         </p:nvSpPr>
         <p:spPr>
           <a:xfrm>
-            <a:off x="6364224" y="4974336"/>
+            <a:off x="6364224" y="4297680"/>
             <a:ext cx="384048" cy="384048"/>
           </a:xfrm>
           <a:prstGeom prst="rect">
@@ -18431,6 +19288,190 @@
       <p:sp>
         <p:nvSpPr>
           <p:cNvPr id="51" name="TextBox 50"/>
+          <p:cNvSpPr txBox="1"/>
+          <p:nvPr/>
+        </p:nvSpPr>
+        <p:spPr>
+          <a:xfrm>
+            <a:off x="6931152" y="4178808"/>
+            <a:ext cx="4572000" cy="566928"/>
+          </a:xfrm>
+          <a:prstGeom prst="rect">
+            <a:avLst/>
+          </a:prstGeom>
+          <a:noFill/>
+        </p:spPr>
+        <p:txBody>
+          <a:bodyPr wrap="square" anchor="ctr" lIns="0" rIns="0" tIns="0" bIns="0">
+            <a:spAutoFit/>
+          </a:bodyPr>
+          <a:lstStyle/>
+          <a:p>
+            <a:pPr algn="l">
+              <a:lnSpc>
+                <a:spcPct val="100000"/>
+              </a:lnSpc>
+              <a:spcBef>
+                <a:spcPts val="0"/>
+              </a:spcBef>
+              <a:spcAft>
+                <a:spcPts val="600"/>
+              </a:spcAft>
+            </a:pPr>
+            <a:r>
+              <a:rPr sz="1400" b="1">
+                <a:solidFill>
+                  <a:srgbClr val="0F172A"/>
+                </a:solidFill>
+                <a:latin typeface="NanumGothic"/>
+                <a:ea typeface="NanumGothic"/>
+                <a:cs typeface="NanumGothic"/>
+              </a:rPr>
+              <a:t>모델 선택</a:t>
+            </a:r>
+          </a:p>
+        </p:txBody>
+      </p:sp>
+      <p:sp>
+        <p:nvSpPr>
+          <p:cNvPr id="52" name="Rounded Rectangle 51"/>
+          <p:cNvSpPr/>
+          <p:nvPr/>
+        </p:nvSpPr>
+        <p:spPr>
+          <a:xfrm>
+            <a:off x="6217920" y="4855464"/>
+            <a:ext cx="5440680" cy="566928"/>
+          </a:xfrm>
+          <a:prstGeom prst="roundRect">
+            <a:avLst/>
+          </a:prstGeom>
+          <a:solidFill>
+            <a:srgbClr val="F8FAFC"/>
+          </a:solidFill>
+          <a:ln w="12700">
+            <a:solidFill>
+              <a:srgbClr val="E2E8F0"/>
+            </a:solidFill>
+          </a:ln>
+          <a:effectLst/>
+        </p:spPr>
+        <p:style>
+          <a:lnRef idx="1">
+            <a:schemeClr val="accent1"/>
+          </a:lnRef>
+          <a:fillRef idx="3">
+            <a:schemeClr val="accent1"/>
+          </a:fillRef>
+          <a:effectRef idx="2">
+            <a:schemeClr val="accent1"/>
+          </a:effectRef>
+          <a:fontRef idx="minor">
+            <a:schemeClr val="lt1"/>
+          </a:fontRef>
+        </p:style>
+        <p:txBody>
+          <a:bodyPr rtlCol="0" anchor="ctr"/>
+          <a:lstStyle/>
+          <a:p>
+            <a:pPr algn="ctr"/>
+          </a:p>
+        </p:txBody>
+      </p:sp>
+      <p:sp>
+        <p:nvSpPr>
+          <p:cNvPr id="53" name="Oval 52"/>
+          <p:cNvSpPr/>
+          <p:nvPr/>
+        </p:nvSpPr>
+        <p:spPr>
+          <a:xfrm>
+            <a:off x="6364224" y="4974336"/>
+            <a:ext cx="384048" cy="384048"/>
+          </a:xfrm>
+          <a:prstGeom prst="ellipse">
+            <a:avLst/>
+          </a:prstGeom>
+          <a:solidFill>
+            <a:srgbClr val="6366F1"/>
+          </a:solidFill>
+          <a:ln>
+            <a:noFill/>
+          </a:ln>
+          <a:effectLst/>
+        </p:spPr>
+        <p:style>
+          <a:lnRef idx="1">
+            <a:schemeClr val="accent1"/>
+          </a:lnRef>
+          <a:fillRef idx="3">
+            <a:schemeClr val="accent1"/>
+          </a:fillRef>
+          <a:effectRef idx="2">
+            <a:schemeClr val="accent1"/>
+          </a:effectRef>
+          <a:fontRef idx="minor">
+            <a:schemeClr val="lt1"/>
+          </a:fontRef>
+        </p:style>
+        <p:txBody>
+          <a:bodyPr rtlCol="0" anchor="ctr"/>
+          <a:lstStyle/>
+          <a:p>
+            <a:pPr algn="ctr"/>
+          </a:p>
+        </p:txBody>
+      </p:sp>
+      <p:sp>
+        <p:nvSpPr>
+          <p:cNvPr id="54" name="TextBox 53"/>
+          <p:cNvSpPr txBox="1"/>
+          <p:nvPr/>
+        </p:nvSpPr>
+        <p:spPr>
+          <a:xfrm>
+            <a:off x="6364224" y="4974336"/>
+            <a:ext cx="384048" cy="384048"/>
+          </a:xfrm>
+          <a:prstGeom prst="rect">
+            <a:avLst/>
+          </a:prstGeom>
+          <a:noFill/>
+        </p:spPr>
+        <p:txBody>
+          <a:bodyPr wrap="square" anchor="ctr" lIns="0" rIns="0" tIns="0" bIns="0">
+            <a:spAutoFit/>
+          </a:bodyPr>
+          <a:lstStyle/>
+          <a:p>
+            <a:pPr algn="ctr">
+              <a:lnSpc>
+                <a:spcPct val="100000"/>
+              </a:lnSpc>
+              <a:spcBef>
+                <a:spcPts val="0"/>
+              </a:spcBef>
+              <a:spcAft>
+                <a:spcPts val="600"/>
+              </a:spcAft>
+            </a:pPr>
+            <a:r>
+              <a:rPr sz="1300" b="1">
+                <a:solidFill>
+                  <a:srgbClr val="FFFFFF"/>
+                </a:solidFill>
+                <a:latin typeface="NanumSquare"/>
+                <a:ea typeface="NanumSquare"/>
+                <a:cs typeface="NanumSquare"/>
+              </a:rPr>
+              <a:t>11</a:t>
+            </a:r>
+          </a:p>
+        </p:txBody>
+      </p:sp>
+      <p:sp>
+        <p:nvSpPr>
+          <p:cNvPr id="55" name="TextBox 54"/>
           <p:cNvSpPr txBox="1"/>
           <p:nvPr/>
         </p:nvSpPr>
@@ -19375,7 +20416,7 @@
                 <a:ea typeface="NanumGothic"/>
                 <a:cs typeface="NanumGothic"/>
               </a:rPr>
-              <a:t>개념</a:t>
+              <a:t>역사</a:t>
             </a:r>
           </a:p>
         </p:txBody>
@@ -19422,7 +20463,7 @@
                 <a:ea typeface="NanumSquare"/>
                 <a:cs typeface="NanumSquare"/>
               </a:rPr>
-              <a:t>LLM이란 무엇인가</a:t>
+              <a:t>언어 모델 간단 역사</a:t>
             </a:r>
           </a:p>
         </p:txBody>
@@ -19567,16 +20608,62 @@
       </p:sp>
       <p:sp>
         <p:nvSpPr>
-          <p:cNvPr id="9" name="Oval 8"/>
+          <p:cNvPr id="9" name="Rounded Rectangle 8"/>
           <p:cNvSpPr/>
           <p:nvPr/>
         </p:nvSpPr>
         <p:spPr>
           <a:xfrm>
-            <a:off x="548640" y="1911096"/>
-            <a:ext cx="146304" cy="146304"/>
-          </a:xfrm>
-          <a:prstGeom prst="ellipse">
+            <a:off x="502920" y="2651760"/>
+            <a:ext cx="1975104" cy="1737360"/>
+          </a:xfrm>
+          <a:prstGeom prst="roundRect">
+            <a:avLst/>
+          </a:prstGeom>
+          <a:solidFill>
+            <a:srgbClr val="F8FAFC"/>
+          </a:solidFill>
+          <a:ln w="12700">
+            <a:solidFill>
+              <a:srgbClr val="E2E8F0"/>
+            </a:solidFill>
+          </a:ln>
+          <a:effectLst/>
+        </p:spPr>
+        <p:style>
+          <a:lnRef idx="1">
+            <a:schemeClr val="accent1"/>
+          </a:lnRef>
+          <a:fillRef idx="3">
+            <a:schemeClr val="accent1"/>
+          </a:fillRef>
+          <a:effectRef idx="2">
+            <a:schemeClr val="accent1"/>
+          </a:effectRef>
+          <a:fontRef idx="minor">
+            <a:schemeClr val="lt1"/>
+          </a:fontRef>
+        </p:style>
+        <p:txBody>
+          <a:bodyPr rtlCol="0" anchor="ctr"/>
+          <a:lstStyle/>
+          <a:p>
+            <a:pPr algn="ctr"/>
+          </a:p>
+        </p:txBody>
+      </p:sp>
+      <p:sp>
+        <p:nvSpPr>
+          <p:cNvPr id="10" name="Rectangle 9"/>
+          <p:cNvSpPr/>
+          <p:nvPr/>
+        </p:nvSpPr>
+        <p:spPr>
+          <a:xfrm>
+            <a:off x="502920" y="2651760"/>
+            <a:ext cx="1975104" cy="109728"/>
+          </a:xfrm>
+          <a:prstGeom prst="rect">
             <a:avLst/>
           </a:prstGeom>
           <a:solidFill>
@@ -19611,14 +20698,14 @@
       </p:sp>
       <p:sp>
         <p:nvSpPr>
-          <p:cNvPr id="10" name="TextBox 9"/>
-          <p:cNvSpPr txBox="1"/>
-          <p:nvPr/>
-        </p:nvSpPr>
-        <p:spPr>
-          <a:xfrm>
-            <a:off x="868680" y="1828800"/>
-            <a:ext cx="10607040" cy="457200"/>
+          <p:cNvPr id="11" name="TextBox 10"/>
+          <p:cNvSpPr txBox="1"/>
+          <p:nvPr/>
+        </p:nvSpPr>
+        <p:spPr>
+          <a:xfrm>
+            <a:off x="640080" y="2944368"/>
+            <a:ext cx="1700784" cy="365760"/>
           </a:xfrm>
           <a:prstGeom prst="rect">
             <a:avLst/>
@@ -19643,7 +20730,54 @@
               </a:spcAft>
             </a:pPr>
             <a:r>
-              <a:rPr sz="1600" b="1">
+              <a:rPr sz="1300" b="1">
+                <a:solidFill>
+                  <a:srgbClr val="6366F1"/>
+                </a:solidFill>
+                <a:latin typeface="NanumSquare"/>
+                <a:ea typeface="NanumSquare"/>
+                <a:cs typeface="NanumSquare"/>
+              </a:rPr>
+              <a:t>1</a:t>
+            </a:r>
+          </a:p>
+        </p:txBody>
+      </p:sp>
+      <p:sp>
+        <p:nvSpPr>
+          <p:cNvPr id="12" name="TextBox 11"/>
+          <p:cNvSpPr txBox="1"/>
+          <p:nvPr/>
+        </p:nvSpPr>
+        <p:spPr>
+          <a:xfrm>
+            <a:off x="640080" y="3310128"/>
+            <a:ext cx="1700784" cy="548640"/>
+          </a:xfrm>
+          <a:prstGeom prst="rect">
+            <a:avLst/>
+          </a:prstGeom>
+          <a:noFill/>
+        </p:spPr>
+        <p:txBody>
+          <a:bodyPr wrap="square" anchor="t" lIns="0" rIns="0" tIns="0" bIns="0">
+            <a:spAutoFit/>
+          </a:bodyPr>
+          <a:lstStyle/>
+          <a:p>
+            <a:pPr algn="l">
+              <a:lnSpc>
+                <a:spcPct val="100000"/>
+              </a:lnSpc>
+              <a:spcBef>
+                <a:spcPts val="0"/>
+              </a:spcBef>
+              <a:spcAft>
+                <a:spcPts val="600"/>
+              </a:spcAft>
+            </a:pPr>
+            <a:r>
+              <a:rPr sz="1500" b="1">
                 <a:solidFill>
                   <a:srgbClr val="0F172A"/>
                 </a:solidFill>
@@ -19651,21 +20785,21 @@
                 <a:ea typeface="NanumGothic"/>
                 <a:cs typeface="NanumGothic"/>
               </a:rPr>
-              <a:t>Large Language Model</a:t>
-            </a:r>
-          </a:p>
-        </p:txBody>
-      </p:sp>
-      <p:sp>
-        <p:nvSpPr>
-          <p:cNvPr id="11" name="TextBox 10"/>
-          <p:cNvSpPr txBox="1"/>
-          <p:nvPr/>
-        </p:nvSpPr>
-        <p:spPr>
-          <a:xfrm>
-            <a:off x="868680" y="2212848"/>
-            <a:ext cx="10607040" cy="457200"/>
+              <a:t>word2vec (2013)</a:t>
+            </a:r>
+          </a:p>
+        </p:txBody>
+      </p:sp>
+      <p:sp>
+        <p:nvSpPr>
+          <p:cNvPr id="13" name="TextBox 12"/>
+          <p:cNvSpPr txBox="1"/>
+          <p:nvPr/>
+        </p:nvSpPr>
+        <p:spPr>
+          <a:xfrm>
+            <a:off x="640080" y="3822192"/>
+            <a:ext cx="1700784" cy="457200"/>
           </a:xfrm>
           <a:prstGeom prst="rect">
             <a:avLst/>
@@ -19690,7 +20824,7 @@
               </a:spcAft>
             </a:pPr>
             <a:r>
-              <a:rPr sz="1300" b="0">
+              <a:rPr sz="1100" b="0">
                 <a:solidFill>
                   <a:srgbClr val="64748B"/>
                 </a:solidFill>
@@ -19698,23 +20832,116 @@
                 <a:ea typeface="NanumGothic"/>
                 <a:cs typeface="NanumGothic"/>
               </a:rPr>
-              <a:t>방대한 텍스트로 학습한 대규모 신경망 — 언어를 생성·처리</a:t>
-            </a:r>
-          </a:p>
-        </p:txBody>
-      </p:sp>
-      <p:sp>
-        <p:nvSpPr>
-          <p:cNvPr id="12" name="Oval 11"/>
+              <a:t>단어를 벡터로 — 임베딩 시작</a:t>
+            </a:r>
+          </a:p>
+        </p:txBody>
+      </p:sp>
+      <p:sp>
+        <p:nvSpPr>
+          <p:cNvPr id="14" name="TextBox 13"/>
+          <p:cNvSpPr txBox="1"/>
+          <p:nvPr/>
+        </p:nvSpPr>
+        <p:spPr>
+          <a:xfrm>
+            <a:off x="2523744" y="3154680"/>
+            <a:ext cx="274320" cy="548640"/>
+          </a:xfrm>
+          <a:prstGeom prst="rect">
+            <a:avLst/>
+          </a:prstGeom>
+          <a:noFill/>
+        </p:spPr>
+        <p:txBody>
+          <a:bodyPr wrap="square" anchor="ctr" lIns="0" rIns="0" tIns="0" bIns="0">
+            <a:spAutoFit/>
+          </a:bodyPr>
+          <a:lstStyle/>
+          <a:p>
+            <a:pPr algn="ctr">
+              <a:lnSpc>
+                <a:spcPct val="100000"/>
+              </a:lnSpc>
+              <a:spcBef>
+                <a:spcPts val="0"/>
+              </a:spcBef>
+              <a:spcAft>
+                <a:spcPts val="600"/>
+              </a:spcAft>
+            </a:pPr>
+            <a:r>
+              <a:rPr sz="2200" b="1">
+                <a:solidFill>
+                  <a:srgbClr val="6366F1"/>
+                </a:solidFill>
+                <a:latin typeface="NanumSquare"/>
+                <a:ea typeface="NanumSquare"/>
+                <a:cs typeface="NanumSquare"/>
+              </a:rPr>
+              <a:t>→</a:t>
+            </a:r>
+          </a:p>
+        </p:txBody>
+      </p:sp>
+      <p:sp>
+        <p:nvSpPr>
+          <p:cNvPr id="15" name="Rounded Rectangle 14"/>
           <p:cNvSpPr/>
           <p:nvPr/>
         </p:nvSpPr>
         <p:spPr>
           <a:xfrm>
-            <a:off x="548640" y="2779776"/>
-            <a:ext cx="146304" cy="146304"/>
-          </a:xfrm>
-          <a:prstGeom prst="ellipse">
+            <a:off x="2798064" y="2651760"/>
+            <a:ext cx="1975104" cy="1737360"/>
+          </a:xfrm>
+          <a:prstGeom prst="roundRect">
+            <a:avLst/>
+          </a:prstGeom>
+          <a:solidFill>
+            <a:srgbClr val="F8FAFC"/>
+          </a:solidFill>
+          <a:ln w="12700">
+            <a:solidFill>
+              <a:srgbClr val="E2E8F0"/>
+            </a:solidFill>
+          </a:ln>
+          <a:effectLst/>
+        </p:spPr>
+        <p:style>
+          <a:lnRef idx="1">
+            <a:schemeClr val="accent1"/>
+          </a:lnRef>
+          <a:fillRef idx="3">
+            <a:schemeClr val="accent1"/>
+          </a:fillRef>
+          <a:effectRef idx="2">
+            <a:schemeClr val="accent1"/>
+          </a:effectRef>
+          <a:fontRef idx="minor">
+            <a:schemeClr val="lt1"/>
+          </a:fontRef>
+        </p:style>
+        <p:txBody>
+          <a:bodyPr rtlCol="0" anchor="ctr"/>
+          <a:lstStyle/>
+          <a:p>
+            <a:pPr algn="ctr"/>
+          </a:p>
+        </p:txBody>
+      </p:sp>
+      <p:sp>
+        <p:nvSpPr>
+          <p:cNvPr id="16" name="Rectangle 15"/>
+          <p:cNvSpPr/>
+          <p:nvPr/>
+        </p:nvSpPr>
+        <p:spPr>
+          <a:xfrm>
+            <a:off x="2798064" y="2651760"/>
+            <a:ext cx="1975104" cy="109728"/>
+          </a:xfrm>
+          <a:prstGeom prst="rect">
             <a:avLst/>
           </a:prstGeom>
           <a:solidFill>
@@ -19749,14 +20976,14 @@
       </p:sp>
       <p:sp>
         <p:nvSpPr>
-          <p:cNvPr id="13" name="TextBox 12"/>
-          <p:cNvSpPr txBox="1"/>
-          <p:nvPr/>
-        </p:nvSpPr>
-        <p:spPr>
-          <a:xfrm>
-            <a:off x="868680" y="2697480"/>
-            <a:ext cx="10607040" cy="457200"/>
+          <p:cNvPr id="17" name="TextBox 16"/>
+          <p:cNvSpPr txBox="1"/>
+          <p:nvPr/>
+        </p:nvSpPr>
+        <p:spPr>
+          <a:xfrm>
+            <a:off x="2935224" y="2944368"/>
+            <a:ext cx="1700784" cy="365760"/>
           </a:xfrm>
           <a:prstGeom prst="rect">
             <a:avLst/>
@@ -19781,7 +21008,54 @@
               </a:spcAft>
             </a:pPr>
             <a:r>
-              <a:rPr sz="1600" b="1">
+              <a:rPr sz="1300" b="1">
+                <a:solidFill>
+                  <a:srgbClr val="6366F1"/>
+                </a:solidFill>
+                <a:latin typeface="NanumSquare"/>
+                <a:ea typeface="NanumSquare"/>
+                <a:cs typeface="NanumSquare"/>
+              </a:rPr>
+              <a:t>2</a:t>
+            </a:r>
+          </a:p>
+        </p:txBody>
+      </p:sp>
+      <p:sp>
+        <p:nvSpPr>
+          <p:cNvPr id="18" name="TextBox 17"/>
+          <p:cNvSpPr txBox="1"/>
+          <p:nvPr/>
+        </p:nvSpPr>
+        <p:spPr>
+          <a:xfrm>
+            <a:off x="2935224" y="3310128"/>
+            <a:ext cx="1700784" cy="548640"/>
+          </a:xfrm>
+          <a:prstGeom prst="rect">
+            <a:avLst/>
+          </a:prstGeom>
+          <a:noFill/>
+        </p:spPr>
+        <p:txBody>
+          <a:bodyPr wrap="square" anchor="t" lIns="0" rIns="0" tIns="0" bIns="0">
+            <a:spAutoFit/>
+          </a:bodyPr>
+          <a:lstStyle/>
+          <a:p>
+            <a:pPr algn="l">
+              <a:lnSpc>
+                <a:spcPct val="100000"/>
+              </a:lnSpc>
+              <a:spcBef>
+                <a:spcPts val="0"/>
+              </a:spcBef>
+              <a:spcAft>
+                <a:spcPts val="600"/>
+              </a:spcAft>
+            </a:pPr>
+            <a:r>
+              <a:rPr sz="1500" b="1">
                 <a:solidFill>
                   <a:srgbClr val="0F172A"/>
                 </a:solidFill>
@@ -19789,21 +21063,21 @@
                 <a:ea typeface="NanumGothic"/>
                 <a:cs typeface="NanumGothic"/>
               </a:rPr>
-              <a:t>핵심 동작</a:t>
-            </a:r>
-          </a:p>
-        </p:txBody>
-      </p:sp>
-      <p:sp>
-        <p:nvSpPr>
-          <p:cNvPr id="14" name="TextBox 13"/>
-          <p:cNvSpPr txBox="1"/>
-          <p:nvPr/>
-        </p:nvSpPr>
-        <p:spPr>
-          <a:xfrm>
-            <a:off x="868680" y="3081528"/>
-            <a:ext cx="10607040" cy="457200"/>
+              <a:t>Transformer (2017)</a:t>
+            </a:r>
+          </a:p>
+        </p:txBody>
+      </p:sp>
+      <p:sp>
+        <p:nvSpPr>
+          <p:cNvPr id="19" name="TextBox 18"/>
+          <p:cNvSpPr txBox="1"/>
+          <p:nvPr/>
+        </p:nvSpPr>
+        <p:spPr>
+          <a:xfrm>
+            <a:off x="2935224" y="3822192"/>
+            <a:ext cx="1700784" cy="457200"/>
           </a:xfrm>
           <a:prstGeom prst="rect">
             <a:avLst/>
@@ -19828,7 +21102,7 @@
               </a:spcAft>
             </a:pPr>
             <a:r>
-              <a:rPr sz="1300" b="0">
+              <a:rPr sz="1100" b="0">
                 <a:solidFill>
                   <a:srgbClr val="64748B"/>
                 </a:solidFill>
@@ -19836,23 +21110,116 @@
                 <a:ea typeface="NanumGothic"/>
                 <a:cs typeface="NanumGothic"/>
               </a:rPr>
-              <a:t>지금까지의 텍스트로 '다음에 올 토큰'을 확률로 예측</a:t>
-            </a:r>
-          </a:p>
-        </p:txBody>
-      </p:sp>
-      <p:sp>
-        <p:nvSpPr>
-          <p:cNvPr id="15" name="Oval 14"/>
+              <a:t>'Attention is All You Need' — 현대 LLM 구조</a:t>
+            </a:r>
+          </a:p>
+        </p:txBody>
+      </p:sp>
+      <p:sp>
+        <p:nvSpPr>
+          <p:cNvPr id="20" name="TextBox 19"/>
+          <p:cNvSpPr txBox="1"/>
+          <p:nvPr/>
+        </p:nvSpPr>
+        <p:spPr>
+          <a:xfrm>
+            <a:off x="4818888" y="3154680"/>
+            <a:ext cx="274320" cy="548640"/>
+          </a:xfrm>
+          <a:prstGeom prst="rect">
+            <a:avLst/>
+          </a:prstGeom>
+          <a:noFill/>
+        </p:spPr>
+        <p:txBody>
+          <a:bodyPr wrap="square" anchor="ctr" lIns="0" rIns="0" tIns="0" bIns="0">
+            <a:spAutoFit/>
+          </a:bodyPr>
+          <a:lstStyle/>
+          <a:p>
+            <a:pPr algn="ctr">
+              <a:lnSpc>
+                <a:spcPct val="100000"/>
+              </a:lnSpc>
+              <a:spcBef>
+                <a:spcPts val="0"/>
+              </a:spcBef>
+              <a:spcAft>
+                <a:spcPts val="600"/>
+              </a:spcAft>
+            </a:pPr>
+            <a:r>
+              <a:rPr sz="2200" b="1">
+                <a:solidFill>
+                  <a:srgbClr val="6366F1"/>
+                </a:solidFill>
+                <a:latin typeface="NanumSquare"/>
+                <a:ea typeface="NanumSquare"/>
+                <a:cs typeface="NanumSquare"/>
+              </a:rPr>
+              <a:t>→</a:t>
+            </a:r>
+          </a:p>
+        </p:txBody>
+      </p:sp>
+      <p:sp>
+        <p:nvSpPr>
+          <p:cNvPr id="21" name="Rounded Rectangle 20"/>
           <p:cNvSpPr/>
           <p:nvPr/>
         </p:nvSpPr>
         <p:spPr>
           <a:xfrm>
-            <a:off x="548640" y="3648456"/>
-            <a:ext cx="146304" cy="146304"/>
-          </a:xfrm>
-          <a:prstGeom prst="ellipse">
+            <a:off x="5093208" y="2651760"/>
+            <a:ext cx="1975104" cy="1737360"/>
+          </a:xfrm>
+          <a:prstGeom prst="roundRect">
+            <a:avLst/>
+          </a:prstGeom>
+          <a:solidFill>
+            <a:srgbClr val="F8FAFC"/>
+          </a:solidFill>
+          <a:ln w="12700">
+            <a:solidFill>
+              <a:srgbClr val="E2E8F0"/>
+            </a:solidFill>
+          </a:ln>
+          <a:effectLst/>
+        </p:spPr>
+        <p:style>
+          <a:lnRef idx="1">
+            <a:schemeClr val="accent1"/>
+          </a:lnRef>
+          <a:fillRef idx="3">
+            <a:schemeClr val="accent1"/>
+          </a:fillRef>
+          <a:effectRef idx="2">
+            <a:schemeClr val="accent1"/>
+          </a:effectRef>
+          <a:fontRef idx="minor">
+            <a:schemeClr val="lt1"/>
+          </a:fontRef>
+        </p:style>
+        <p:txBody>
+          <a:bodyPr rtlCol="0" anchor="ctr"/>
+          <a:lstStyle/>
+          <a:p>
+            <a:pPr algn="ctr"/>
+          </a:p>
+        </p:txBody>
+      </p:sp>
+      <p:sp>
+        <p:nvSpPr>
+          <p:cNvPr id="22" name="Rectangle 21"/>
+          <p:cNvSpPr/>
+          <p:nvPr/>
+        </p:nvSpPr>
+        <p:spPr>
+          <a:xfrm>
+            <a:off x="5093208" y="2651760"/>
+            <a:ext cx="1975104" cy="109728"/>
+          </a:xfrm>
+          <a:prstGeom prst="rect">
             <a:avLst/>
           </a:prstGeom>
           <a:solidFill>
@@ -19887,14 +21254,14 @@
       </p:sp>
       <p:sp>
         <p:nvSpPr>
-          <p:cNvPr id="16" name="TextBox 15"/>
-          <p:cNvSpPr txBox="1"/>
-          <p:nvPr/>
-        </p:nvSpPr>
-        <p:spPr>
-          <a:xfrm>
-            <a:off x="868680" y="3566160"/>
-            <a:ext cx="10607040" cy="457200"/>
+          <p:cNvPr id="23" name="TextBox 22"/>
+          <p:cNvSpPr txBox="1"/>
+          <p:nvPr/>
+        </p:nvSpPr>
+        <p:spPr>
+          <a:xfrm>
+            <a:off x="5230368" y="2944368"/>
+            <a:ext cx="1700784" cy="365760"/>
           </a:xfrm>
           <a:prstGeom prst="rect">
             <a:avLst/>
@@ -19919,7 +21286,54 @@
               </a:spcAft>
             </a:pPr>
             <a:r>
-              <a:rPr sz="1600" b="1">
+              <a:rPr sz="1300" b="1">
+                <a:solidFill>
+                  <a:srgbClr val="6366F1"/>
+                </a:solidFill>
+                <a:latin typeface="NanumSquare"/>
+                <a:ea typeface="NanumSquare"/>
+                <a:cs typeface="NanumSquare"/>
+              </a:rPr>
+              <a:t>3</a:t>
+            </a:r>
+          </a:p>
+        </p:txBody>
+      </p:sp>
+      <p:sp>
+        <p:nvSpPr>
+          <p:cNvPr id="24" name="TextBox 23"/>
+          <p:cNvSpPr txBox="1"/>
+          <p:nvPr/>
+        </p:nvSpPr>
+        <p:spPr>
+          <a:xfrm>
+            <a:off x="5230368" y="3310128"/>
+            <a:ext cx="1700784" cy="548640"/>
+          </a:xfrm>
+          <a:prstGeom prst="rect">
+            <a:avLst/>
+          </a:prstGeom>
+          <a:noFill/>
+        </p:spPr>
+        <p:txBody>
+          <a:bodyPr wrap="square" anchor="t" lIns="0" rIns="0" tIns="0" bIns="0">
+            <a:spAutoFit/>
+          </a:bodyPr>
+          <a:lstStyle/>
+          <a:p>
+            <a:pPr algn="l">
+              <a:lnSpc>
+                <a:spcPct val="100000"/>
+              </a:lnSpc>
+              <a:spcBef>
+                <a:spcPts val="0"/>
+              </a:spcBef>
+              <a:spcAft>
+                <a:spcPts val="600"/>
+              </a:spcAft>
+            </a:pPr>
+            <a:r>
+              <a:rPr sz="1500" b="1">
                 <a:solidFill>
                   <a:srgbClr val="0F172A"/>
                 </a:solidFill>
@@ -19927,21 +21341,21 @@
                 <a:ea typeface="NanumGothic"/>
                 <a:cs typeface="NanumGothic"/>
               </a:rPr>
-              <a:t>'이해'가 아니라 '패턴'</a:t>
-            </a:r>
-          </a:p>
-        </p:txBody>
-      </p:sp>
-      <p:sp>
-        <p:nvSpPr>
-          <p:cNvPr id="17" name="TextBox 16"/>
-          <p:cNvSpPr txBox="1"/>
-          <p:nvPr/>
-        </p:nvSpPr>
-        <p:spPr>
-          <a:xfrm>
-            <a:off x="868680" y="3950208"/>
-            <a:ext cx="10607040" cy="457200"/>
+              <a:t>GPT·BERT (2018~)</a:t>
+            </a:r>
+          </a:p>
+        </p:txBody>
+      </p:sp>
+      <p:sp>
+        <p:nvSpPr>
+          <p:cNvPr id="25" name="TextBox 24"/>
+          <p:cNvSpPr txBox="1"/>
+          <p:nvPr/>
+        </p:nvSpPr>
+        <p:spPr>
+          <a:xfrm>
+            <a:off x="5230368" y="3822192"/>
+            <a:ext cx="1700784" cy="457200"/>
           </a:xfrm>
           <a:prstGeom prst="rect">
             <a:avLst/>
@@ -19966,7 +21380,7 @@
               </a:spcAft>
             </a:pPr>
             <a:r>
-              <a:rPr sz="1300" b="0">
+              <a:rPr sz="1100" b="0">
                 <a:solidFill>
                   <a:srgbClr val="64748B"/>
                 </a:solidFill>
@@ -19974,20 +21388,576 @@
                 <a:ea typeface="NanumGothic"/>
                 <a:cs typeface="NanumGothic"/>
               </a:rPr>
-              <a:t>의미를 아는 게 아니라 통계적 패턴을 재현하는 것</a:t>
-            </a:r>
-          </a:p>
-        </p:txBody>
-      </p:sp>
-      <p:sp>
-        <p:nvSpPr>
-          <p:cNvPr id="18" name="Rounded Rectangle 17"/>
+              <a:t>사전학습 대형화</a:t>
+            </a:r>
+          </a:p>
+        </p:txBody>
+      </p:sp>
+      <p:sp>
+        <p:nvSpPr>
+          <p:cNvPr id="26" name="TextBox 25"/>
+          <p:cNvSpPr txBox="1"/>
+          <p:nvPr/>
+        </p:nvSpPr>
+        <p:spPr>
+          <a:xfrm>
+            <a:off x="7114032" y="3154680"/>
+            <a:ext cx="274320" cy="548640"/>
+          </a:xfrm>
+          <a:prstGeom prst="rect">
+            <a:avLst/>
+          </a:prstGeom>
+          <a:noFill/>
+        </p:spPr>
+        <p:txBody>
+          <a:bodyPr wrap="square" anchor="ctr" lIns="0" rIns="0" tIns="0" bIns="0">
+            <a:spAutoFit/>
+          </a:bodyPr>
+          <a:lstStyle/>
+          <a:p>
+            <a:pPr algn="ctr">
+              <a:lnSpc>
+                <a:spcPct val="100000"/>
+              </a:lnSpc>
+              <a:spcBef>
+                <a:spcPts val="0"/>
+              </a:spcBef>
+              <a:spcAft>
+                <a:spcPts val="600"/>
+              </a:spcAft>
+            </a:pPr>
+            <a:r>
+              <a:rPr sz="2200" b="1">
+                <a:solidFill>
+                  <a:srgbClr val="6366F1"/>
+                </a:solidFill>
+                <a:latin typeface="NanumSquare"/>
+                <a:ea typeface="NanumSquare"/>
+                <a:cs typeface="NanumSquare"/>
+              </a:rPr>
+              <a:t>→</a:t>
+            </a:r>
+          </a:p>
+        </p:txBody>
+      </p:sp>
+      <p:sp>
+        <p:nvSpPr>
+          <p:cNvPr id="27" name="Rounded Rectangle 26"/>
           <p:cNvSpPr/>
           <p:nvPr/>
         </p:nvSpPr>
         <p:spPr>
           <a:xfrm>
-            <a:off x="502920" y="5532120"/>
+            <a:off x="7388352" y="2651760"/>
+            <a:ext cx="1975104" cy="1737360"/>
+          </a:xfrm>
+          <a:prstGeom prst="roundRect">
+            <a:avLst/>
+          </a:prstGeom>
+          <a:solidFill>
+            <a:srgbClr val="F8FAFC"/>
+          </a:solidFill>
+          <a:ln w="12700">
+            <a:solidFill>
+              <a:srgbClr val="E2E8F0"/>
+            </a:solidFill>
+          </a:ln>
+          <a:effectLst/>
+        </p:spPr>
+        <p:style>
+          <a:lnRef idx="1">
+            <a:schemeClr val="accent1"/>
+          </a:lnRef>
+          <a:fillRef idx="3">
+            <a:schemeClr val="accent1"/>
+          </a:fillRef>
+          <a:effectRef idx="2">
+            <a:schemeClr val="accent1"/>
+          </a:effectRef>
+          <a:fontRef idx="minor">
+            <a:schemeClr val="lt1"/>
+          </a:fontRef>
+        </p:style>
+        <p:txBody>
+          <a:bodyPr rtlCol="0" anchor="ctr"/>
+          <a:lstStyle/>
+          <a:p>
+            <a:pPr algn="ctr"/>
+          </a:p>
+        </p:txBody>
+      </p:sp>
+      <p:sp>
+        <p:nvSpPr>
+          <p:cNvPr id="28" name="Rectangle 27"/>
+          <p:cNvSpPr/>
+          <p:nvPr/>
+        </p:nvSpPr>
+        <p:spPr>
+          <a:xfrm>
+            <a:off x="7388352" y="2651760"/>
+            <a:ext cx="1975104" cy="109728"/>
+          </a:xfrm>
+          <a:prstGeom prst="rect">
+            <a:avLst/>
+          </a:prstGeom>
+          <a:solidFill>
+            <a:srgbClr val="6366F1"/>
+          </a:solidFill>
+          <a:ln>
+            <a:noFill/>
+          </a:ln>
+          <a:effectLst/>
+        </p:spPr>
+        <p:style>
+          <a:lnRef idx="1">
+            <a:schemeClr val="accent1"/>
+          </a:lnRef>
+          <a:fillRef idx="3">
+            <a:schemeClr val="accent1"/>
+          </a:fillRef>
+          <a:effectRef idx="2">
+            <a:schemeClr val="accent1"/>
+          </a:effectRef>
+          <a:fontRef idx="minor">
+            <a:schemeClr val="lt1"/>
+          </a:fontRef>
+        </p:style>
+        <p:txBody>
+          <a:bodyPr rtlCol="0" anchor="ctr"/>
+          <a:lstStyle/>
+          <a:p>
+            <a:pPr algn="ctr"/>
+          </a:p>
+        </p:txBody>
+      </p:sp>
+      <p:sp>
+        <p:nvSpPr>
+          <p:cNvPr id="29" name="TextBox 28"/>
+          <p:cNvSpPr txBox="1"/>
+          <p:nvPr/>
+        </p:nvSpPr>
+        <p:spPr>
+          <a:xfrm>
+            <a:off x="7525512" y="2944368"/>
+            <a:ext cx="1700784" cy="365760"/>
+          </a:xfrm>
+          <a:prstGeom prst="rect">
+            <a:avLst/>
+          </a:prstGeom>
+          <a:noFill/>
+        </p:spPr>
+        <p:txBody>
+          <a:bodyPr wrap="square" anchor="t" lIns="0" rIns="0" tIns="0" bIns="0">
+            <a:spAutoFit/>
+          </a:bodyPr>
+          <a:lstStyle/>
+          <a:p>
+            <a:pPr algn="l">
+              <a:lnSpc>
+                <a:spcPct val="100000"/>
+              </a:lnSpc>
+              <a:spcBef>
+                <a:spcPts val="0"/>
+              </a:spcBef>
+              <a:spcAft>
+                <a:spcPts val="600"/>
+              </a:spcAft>
+            </a:pPr>
+            <a:r>
+              <a:rPr sz="1300" b="1">
+                <a:solidFill>
+                  <a:srgbClr val="6366F1"/>
+                </a:solidFill>
+                <a:latin typeface="NanumSquare"/>
+                <a:ea typeface="NanumSquare"/>
+                <a:cs typeface="NanumSquare"/>
+              </a:rPr>
+              <a:t>4</a:t>
+            </a:r>
+          </a:p>
+        </p:txBody>
+      </p:sp>
+      <p:sp>
+        <p:nvSpPr>
+          <p:cNvPr id="30" name="TextBox 29"/>
+          <p:cNvSpPr txBox="1"/>
+          <p:nvPr/>
+        </p:nvSpPr>
+        <p:spPr>
+          <a:xfrm>
+            <a:off x="7525512" y="3310128"/>
+            <a:ext cx="1700784" cy="548640"/>
+          </a:xfrm>
+          <a:prstGeom prst="rect">
+            <a:avLst/>
+          </a:prstGeom>
+          <a:noFill/>
+        </p:spPr>
+        <p:txBody>
+          <a:bodyPr wrap="square" anchor="t" lIns="0" rIns="0" tIns="0" bIns="0">
+            <a:spAutoFit/>
+          </a:bodyPr>
+          <a:lstStyle/>
+          <a:p>
+            <a:pPr algn="l">
+              <a:lnSpc>
+                <a:spcPct val="100000"/>
+              </a:lnSpc>
+              <a:spcBef>
+                <a:spcPts val="0"/>
+              </a:spcBef>
+              <a:spcAft>
+                <a:spcPts val="600"/>
+              </a:spcAft>
+            </a:pPr>
+            <a:r>
+              <a:rPr sz="1500" b="1">
+                <a:solidFill>
+                  <a:srgbClr val="0F172A"/>
+                </a:solidFill>
+                <a:latin typeface="NanumGothic"/>
+                <a:ea typeface="NanumGothic"/>
+                <a:cs typeface="NanumGothic"/>
+              </a:rPr>
+              <a:t>GPT-3→ChatGPT (2020·2022)</a:t>
+            </a:r>
+          </a:p>
+        </p:txBody>
+      </p:sp>
+      <p:sp>
+        <p:nvSpPr>
+          <p:cNvPr id="31" name="TextBox 30"/>
+          <p:cNvSpPr txBox="1"/>
+          <p:nvPr/>
+        </p:nvSpPr>
+        <p:spPr>
+          <a:xfrm>
+            <a:off x="7525512" y="3822192"/>
+            <a:ext cx="1700784" cy="457200"/>
+          </a:xfrm>
+          <a:prstGeom prst="rect">
+            <a:avLst/>
+          </a:prstGeom>
+          <a:noFill/>
+        </p:spPr>
+        <p:txBody>
+          <a:bodyPr wrap="square" anchor="t" lIns="0" rIns="0" tIns="0" bIns="0">
+            <a:spAutoFit/>
+          </a:bodyPr>
+          <a:lstStyle/>
+          <a:p>
+            <a:pPr algn="l">
+              <a:lnSpc>
+                <a:spcPct val="100000"/>
+              </a:lnSpc>
+              <a:spcBef>
+                <a:spcPts val="0"/>
+              </a:spcBef>
+              <a:spcAft>
+                <a:spcPts val="600"/>
+              </a:spcAft>
+            </a:pPr>
+            <a:r>
+              <a:rPr sz="1100" b="0">
+                <a:solidFill>
+                  <a:srgbClr val="64748B"/>
+                </a:solidFill>
+                <a:latin typeface="NanumGothic"/>
+                <a:ea typeface="NanumGothic"/>
+                <a:cs typeface="NanumGothic"/>
+              </a:rPr>
+              <a:t>규모 + 정렬로 대중화</a:t>
+            </a:r>
+          </a:p>
+        </p:txBody>
+      </p:sp>
+      <p:sp>
+        <p:nvSpPr>
+          <p:cNvPr id="32" name="TextBox 31"/>
+          <p:cNvSpPr txBox="1"/>
+          <p:nvPr/>
+        </p:nvSpPr>
+        <p:spPr>
+          <a:xfrm>
+            <a:off x="9409176" y="3154680"/>
+            <a:ext cx="274320" cy="548640"/>
+          </a:xfrm>
+          <a:prstGeom prst="rect">
+            <a:avLst/>
+          </a:prstGeom>
+          <a:noFill/>
+        </p:spPr>
+        <p:txBody>
+          <a:bodyPr wrap="square" anchor="ctr" lIns="0" rIns="0" tIns="0" bIns="0">
+            <a:spAutoFit/>
+          </a:bodyPr>
+          <a:lstStyle/>
+          <a:p>
+            <a:pPr algn="ctr">
+              <a:lnSpc>
+                <a:spcPct val="100000"/>
+              </a:lnSpc>
+              <a:spcBef>
+                <a:spcPts val="0"/>
+              </a:spcBef>
+              <a:spcAft>
+                <a:spcPts val="600"/>
+              </a:spcAft>
+            </a:pPr>
+            <a:r>
+              <a:rPr sz="2200" b="1">
+                <a:solidFill>
+                  <a:srgbClr val="6366F1"/>
+                </a:solidFill>
+                <a:latin typeface="NanumSquare"/>
+                <a:ea typeface="NanumSquare"/>
+                <a:cs typeface="NanumSquare"/>
+              </a:rPr>
+              <a:t>→</a:t>
+            </a:r>
+          </a:p>
+        </p:txBody>
+      </p:sp>
+      <p:sp>
+        <p:nvSpPr>
+          <p:cNvPr id="33" name="Rounded Rectangle 32"/>
+          <p:cNvSpPr/>
+          <p:nvPr/>
+        </p:nvSpPr>
+        <p:spPr>
+          <a:xfrm>
+            <a:off x="9683496" y="2651760"/>
+            <a:ext cx="1975104" cy="1737360"/>
+          </a:xfrm>
+          <a:prstGeom prst="roundRect">
+            <a:avLst/>
+          </a:prstGeom>
+          <a:solidFill>
+            <a:srgbClr val="F8FAFC"/>
+          </a:solidFill>
+          <a:ln w="12700">
+            <a:solidFill>
+              <a:srgbClr val="E2E8F0"/>
+            </a:solidFill>
+          </a:ln>
+          <a:effectLst/>
+        </p:spPr>
+        <p:style>
+          <a:lnRef idx="1">
+            <a:schemeClr val="accent1"/>
+          </a:lnRef>
+          <a:fillRef idx="3">
+            <a:schemeClr val="accent1"/>
+          </a:fillRef>
+          <a:effectRef idx="2">
+            <a:schemeClr val="accent1"/>
+          </a:effectRef>
+          <a:fontRef idx="minor">
+            <a:schemeClr val="lt1"/>
+          </a:fontRef>
+        </p:style>
+        <p:txBody>
+          <a:bodyPr rtlCol="0" anchor="ctr"/>
+          <a:lstStyle/>
+          <a:p>
+            <a:pPr algn="ctr"/>
+          </a:p>
+        </p:txBody>
+      </p:sp>
+      <p:sp>
+        <p:nvSpPr>
+          <p:cNvPr id="34" name="Rectangle 33"/>
+          <p:cNvSpPr/>
+          <p:nvPr/>
+        </p:nvSpPr>
+        <p:spPr>
+          <a:xfrm>
+            <a:off x="9683496" y="2651760"/>
+            <a:ext cx="1975104" cy="109728"/>
+          </a:xfrm>
+          <a:prstGeom prst="rect">
+            <a:avLst/>
+          </a:prstGeom>
+          <a:solidFill>
+            <a:srgbClr val="6366F1"/>
+          </a:solidFill>
+          <a:ln>
+            <a:noFill/>
+          </a:ln>
+          <a:effectLst/>
+        </p:spPr>
+        <p:style>
+          <a:lnRef idx="1">
+            <a:schemeClr val="accent1"/>
+          </a:lnRef>
+          <a:fillRef idx="3">
+            <a:schemeClr val="accent1"/>
+          </a:fillRef>
+          <a:effectRef idx="2">
+            <a:schemeClr val="accent1"/>
+          </a:effectRef>
+          <a:fontRef idx="minor">
+            <a:schemeClr val="lt1"/>
+          </a:fontRef>
+        </p:style>
+        <p:txBody>
+          <a:bodyPr rtlCol="0" anchor="ctr"/>
+          <a:lstStyle/>
+          <a:p>
+            <a:pPr algn="ctr"/>
+          </a:p>
+        </p:txBody>
+      </p:sp>
+      <p:sp>
+        <p:nvSpPr>
+          <p:cNvPr id="35" name="TextBox 34"/>
+          <p:cNvSpPr txBox="1"/>
+          <p:nvPr/>
+        </p:nvSpPr>
+        <p:spPr>
+          <a:xfrm>
+            <a:off x="9820656" y="2944368"/>
+            <a:ext cx="1700784" cy="365760"/>
+          </a:xfrm>
+          <a:prstGeom prst="rect">
+            <a:avLst/>
+          </a:prstGeom>
+          <a:noFill/>
+        </p:spPr>
+        <p:txBody>
+          <a:bodyPr wrap="square" anchor="t" lIns="0" rIns="0" tIns="0" bIns="0">
+            <a:spAutoFit/>
+          </a:bodyPr>
+          <a:lstStyle/>
+          <a:p>
+            <a:pPr algn="l">
+              <a:lnSpc>
+                <a:spcPct val="100000"/>
+              </a:lnSpc>
+              <a:spcBef>
+                <a:spcPts val="0"/>
+              </a:spcBef>
+              <a:spcAft>
+                <a:spcPts val="600"/>
+              </a:spcAft>
+            </a:pPr>
+            <a:r>
+              <a:rPr sz="1300" b="1">
+                <a:solidFill>
+                  <a:srgbClr val="6366F1"/>
+                </a:solidFill>
+                <a:latin typeface="NanumSquare"/>
+                <a:ea typeface="NanumSquare"/>
+                <a:cs typeface="NanumSquare"/>
+              </a:rPr>
+              <a:t>5</a:t>
+            </a:r>
+          </a:p>
+        </p:txBody>
+      </p:sp>
+      <p:sp>
+        <p:nvSpPr>
+          <p:cNvPr id="36" name="TextBox 35"/>
+          <p:cNvSpPr txBox="1"/>
+          <p:nvPr/>
+        </p:nvSpPr>
+        <p:spPr>
+          <a:xfrm>
+            <a:off x="9820656" y="3310128"/>
+            <a:ext cx="1700784" cy="548640"/>
+          </a:xfrm>
+          <a:prstGeom prst="rect">
+            <a:avLst/>
+          </a:prstGeom>
+          <a:noFill/>
+        </p:spPr>
+        <p:txBody>
+          <a:bodyPr wrap="square" anchor="t" lIns="0" rIns="0" tIns="0" bIns="0">
+            <a:spAutoFit/>
+          </a:bodyPr>
+          <a:lstStyle/>
+          <a:p>
+            <a:pPr algn="l">
+              <a:lnSpc>
+                <a:spcPct val="100000"/>
+              </a:lnSpc>
+              <a:spcBef>
+                <a:spcPts val="0"/>
+              </a:spcBef>
+              <a:spcAft>
+                <a:spcPts val="600"/>
+              </a:spcAft>
+            </a:pPr>
+            <a:r>
+              <a:rPr sz="1500" b="1">
+                <a:solidFill>
+                  <a:srgbClr val="0F172A"/>
+                </a:solidFill>
+                <a:latin typeface="NanumGothic"/>
+                <a:ea typeface="NanumGothic"/>
+                <a:cs typeface="NanumGothic"/>
+              </a:rPr>
+              <a:t>추론·멀티모달 (2024~)</a:t>
+            </a:r>
+          </a:p>
+        </p:txBody>
+      </p:sp>
+      <p:sp>
+        <p:nvSpPr>
+          <p:cNvPr id="37" name="TextBox 36"/>
+          <p:cNvSpPr txBox="1"/>
+          <p:nvPr/>
+        </p:nvSpPr>
+        <p:spPr>
+          <a:xfrm>
+            <a:off x="9820656" y="3822192"/>
+            <a:ext cx="1700784" cy="457200"/>
+          </a:xfrm>
+          <a:prstGeom prst="rect">
+            <a:avLst/>
+          </a:prstGeom>
+          <a:noFill/>
+        </p:spPr>
+        <p:txBody>
+          <a:bodyPr wrap="square" anchor="t" lIns="0" rIns="0" tIns="0" bIns="0">
+            <a:spAutoFit/>
+          </a:bodyPr>
+          <a:lstStyle/>
+          <a:p>
+            <a:pPr algn="l">
+              <a:lnSpc>
+                <a:spcPct val="100000"/>
+              </a:lnSpc>
+              <a:spcBef>
+                <a:spcPts val="0"/>
+              </a:spcBef>
+              <a:spcAft>
+                <a:spcPts val="600"/>
+              </a:spcAft>
+            </a:pPr>
+            <a:r>
+              <a:rPr sz="1100" b="0">
+                <a:solidFill>
+                  <a:srgbClr val="64748B"/>
+                </a:solidFill>
+                <a:latin typeface="NanumGothic"/>
+                <a:ea typeface="NanumGothic"/>
+                <a:cs typeface="NanumGothic"/>
+              </a:rPr>
+              <a:t>o1·DeepSeek-R1 등</a:t>
+            </a:r>
+          </a:p>
+        </p:txBody>
+      </p:sp>
+      <p:sp>
+        <p:nvSpPr>
+          <p:cNvPr id="38" name="Rounded Rectangle 37"/>
+          <p:cNvSpPr/>
+          <p:nvPr/>
+        </p:nvSpPr>
+        <p:spPr>
+          <a:xfrm>
+            <a:off x="502920" y="5029200"/>
             <a:ext cx="11155680" cy="658368"/>
           </a:xfrm>
           <a:prstGeom prst="roundRect">
@@ -20027,13 +21997,13 @@
       </p:sp>
       <p:sp>
         <p:nvSpPr>
-          <p:cNvPr id="19" name="TextBox 18"/>
-          <p:cNvSpPr txBox="1"/>
-          <p:nvPr/>
-        </p:nvSpPr>
-        <p:spPr>
-          <a:xfrm>
-            <a:off x="777240" y="5532120"/>
+          <p:cNvPr id="39" name="TextBox 38"/>
+          <p:cNvSpPr txBox="1"/>
+          <p:nvPr/>
+        </p:nvSpPr>
+        <p:spPr>
+          <a:xfrm>
+            <a:off x="777240" y="5029200"/>
             <a:ext cx="10607040" cy="658368"/>
           </a:xfrm>
           <a:prstGeom prst="rect">
@@ -20078,7 +22048,7 @@
                 <a:ea typeface="NanumGothic"/>
                 <a:cs typeface="NanumGothic"/>
               </a:rPr>
-              <a:t>예: '커피를 마시면 잠이 ___' 다음에 올 토큰을 확률로 고른다</a:t>
+              <a:t>초기 통계(n-gram) → 신경망 → Transformer로 도약 — 오늘 배울 개념들의 등장 순서</a:t>
             </a:r>
           </a:p>
         </p:txBody>
@@ -20231,7 +22201,7 @@
                 <a:ea typeface="NanumGothic"/>
                 <a:cs typeface="NanumGothic"/>
               </a:rPr>
-              <a:t>동작 원리</a:t>
+              <a:t>개념</a:t>
             </a:r>
           </a:p>
         </p:txBody>
@@ -20278,7 +22248,7 @@
                 <a:ea typeface="NanumSquare"/>
                 <a:cs typeface="NanumSquare"/>
               </a:rPr>
-              <a:t>입력에서 출력까지</a:t>
+              <a:t>LLM이란 무엇인가</a:t>
             </a:r>
           </a:p>
         </p:txBody>
@@ -20423,62 +22393,16 @@
       </p:sp>
       <p:sp>
         <p:nvSpPr>
-          <p:cNvPr id="9" name="Rounded Rectangle 8"/>
+          <p:cNvPr id="9" name="Oval 8"/>
           <p:cNvSpPr/>
           <p:nvPr/>
         </p:nvSpPr>
         <p:spPr>
           <a:xfrm>
-            <a:off x="502920" y="2651760"/>
-            <a:ext cx="2548890" cy="1737360"/>
-          </a:xfrm>
-          <a:prstGeom prst="roundRect">
-            <a:avLst/>
-          </a:prstGeom>
-          <a:solidFill>
-            <a:srgbClr val="F8FAFC"/>
-          </a:solidFill>
-          <a:ln w="12700">
-            <a:solidFill>
-              <a:srgbClr val="E2E8F0"/>
-            </a:solidFill>
-          </a:ln>
-          <a:effectLst/>
-        </p:spPr>
-        <p:style>
-          <a:lnRef idx="1">
-            <a:schemeClr val="accent1"/>
-          </a:lnRef>
-          <a:fillRef idx="3">
-            <a:schemeClr val="accent1"/>
-          </a:fillRef>
-          <a:effectRef idx="2">
-            <a:schemeClr val="accent1"/>
-          </a:effectRef>
-          <a:fontRef idx="minor">
-            <a:schemeClr val="lt1"/>
-          </a:fontRef>
-        </p:style>
-        <p:txBody>
-          <a:bodyPr rtlCol="0" anchor="ctr"/>
-          <a:lstStyle/>
-          <a:p>
-            <a:pPr algn="ctr"/>
-          </a:p>
-        </p:txBody>
-      </p:sp>
-      <p:sp>
-        <p:nvSpPr>
-          <p:cNvPr id="10" name="Rectangle 9"/>
-          <p:cNvSpPr/>
-          <p:nvPr/>
-        </p:nvSpPr>
-        <p:spPr>
-          <a:xfrm>
-            <a:off x="502920" y="2651760"/>
-            <a:ext cx="2548890" cy="109728"/>
-          </a:xfrm>
-          <a:prstGeom prst="rect">
+            <a:off x="548640" y="1911096"/>
+            <a:ext cx="146304" cy="146304"/>
+          </a:xfrm>
+          <a:prstGeom prst="ellipse">
             <a:avLst/>
           </a:prstGeom>
           <a:solidFill>
@@ -20513,14 +22437,14 @@
       </p:sp>
       <p:sp>
         <p:nvSpPr>
-          <p:cNvPr id="11" name="TextBox 10"/>
-          <p:cNvSpPr txBox="1"/>
-          <p:nvPr/>
-        </p:nvSpPr>
-        <p:spPr>
-          <a:xfrm>
-            <a:off x="640080" y="2944368"/>
-            <a:ext cx="2274570" cy="365760"/>
+          <p:cNvPr id="10" name="TextBox 9"/>
+          <p:cNvSpPr txBox="1"/>
+          <p:nvPr/>
+        </p:nvSpPr>
+        <p:spPr>
+          <a:xfrm>
+            <a:off x="868680" y="1828800"/>
+            <a:ext cx="10607040" cy="457200"/>
           </a:xfrm>
           <a:prstGeom prst="rect">
             <a:avLst/>
@@ -20545,54 +22469,7 @@
               </a:spcAft>
             </a:pPr>
             <a:r>
-              <a:rPr sz="1300" b="1">
-                <a:solidFill>
-                  <a:srgbClr val="6366F1"/>
-                </a:solidFill>
-                <a:latin typeface="NanumSquare"/>
-                <a:ea typeface="NanumSquare"/>
-                <a:cs typeface="NanumSquare"/>
-              </a:rPr>
-              <a:t>1</a:t>
-            </a:r>
-          </a:p>
-        </p:txBody>
-      </p:sp>
-      <p:sp>
-        <p:nvSpPr>
-          <p:cNvPr id="12" name="TextBox 11"/>
-          <p:cNvSpPr txBox="1"/>
-          <p:nvPr/>
-        </p:nvSpPr>
-        <p:spPr>
-          <a:xfrm>
-            <a:off x="640080" y="3310128"/>
-            <a:ext cx="2274570" cy="548640"/>
-          </a:xfrm>
-          <a:prstGeom prst="rect">
-            <a:avLst/>
-          </a:prstGeom>
-          <a:noFill/>
-        </p:spPr>
-        <p:txBody>
-          <a:bodyPr wrap="square" anchor="t" lIns="0" rIns="0" tIns="0" bIns="0">
-            <a:spAutoFit/>
-          </a:bodyPr>
-          <a:lstStyle/>
-          <a:p>
-            <a:pPr algn="l">
-              <a:lnSpc>
-                <a:spcPct val="100000"/>
-              </a:lnSpc>
-              <a:spcBef>
-                <a:spcPts val="0"/>
-              </a:spcBef>
-              <a:spcAft>
-                <a:spcPts val="600"/>
-              </a:spcAft>
-            </a:pPr>
-            <a:r>
-              <a:rPr sz="1500" b="1">
+              <a:rPr sz="1600" b="1">
                 <a:solidFill>
                   <a:srgbClr val="0F172A"/>
                 </a:solidFill>
@@ -20600,21 +22477,21 @@
                 <a:ea typeface="NanumGothic"/>
                 <a:cs typeface="NanumGothic"/>
               </a:rPr>
-              <a:t>토큰화</a:t>
-            </a:r>
-          </a:p>
-        </p:txBody>
-      </p:sp>
-      <p:sp>
-        <p:nvSpPr>
-          <p:cNvPr id="13" name="TextBox 12"/>
-          <p:cNvSpPr txBox="1"/>
-          <p:nvPr/>
-        </p:nvSpPr>
-        <p:spPr>
-          <a:xfrm>
-            <a:off x="640080" y="3822192"/>
-            <a:ext cx="2274570" cy="457200"/>
+              <a:t>Large Language Model</a:t>
+            </a:r>
+          </a:p>
+        </p:txBody>
+      </p:sp>
+      <p:sp>
+        <p:nvSpPr>
+          <p:cNvPr id="11" name="TextBox 10"/>
+          <p:cNvSpPr txBox="1"/>
+          <p:nvPr/>
+        </p:nvSpPr>
+        <p:spPr>
+          <a:xfrm>
+            <a:off x="868680" y="2212848"/>
+            <a:ext cx="10607040" cy="457200"/>
           </a:xfrm>
           <a:prstGeom prst="rect">
             <a:avLst/>
@@ -20639,7 +22516,7 @@
               </a:spcAft>
             </a:pPr>
             <a:r>
-              <a:rPr sz="1100" b="0">
+              <a:rPr sz="1300" b="0">
                 <a:solidFill>
                   <a:srgbClr val="64748B"/>
                 </a:solidFill>
@@ -20647,116 +22524,23 @@
                 <a:ea typeface="NanumGothic"/>
                 <a:cs typeface="NanumGothic"/>
               </a:rPr>
-              <a:t>문장을 토큰(단어 조각)으로 분해</a:t>
-            </a:r>
-          </a:p>
-        </p:txBody>
-      </p:sp>
-      <p:sp>
-        <p:nvSpPr>
-          <p:cNvPr id="14" name="TextBox 13"/>
-          <p:cNvSpPr txBox="1"/>
-          <p:nvPr/>
-        </p:nvSpPr>
-        <p:spPr>
-          <a:xfrm>
-            <a:off x="3097530" y="3154680"/>
-            <a:ext cx="274320" cy="548640"/>
-          </a:xfrm>
-          <a:prstGeom prst="rect">
-            <a:avLst/>
-          </a:prstGeom>
-          <a:noFill/>
-        </p:spPr>
-        <p:txBody>
-          <a:bodyPr wrap="square" anchor="ctr" lIns="0" rIns="0" tIns="0" bIns="0">
-            <a:spAutoFit/>
-          </a:bodyPr>
-          <a:lstStyle/>
-          <a:p>
-            <a:pPr algn="ctr">
-              <a:lnSpc>
-                <a:spcPct val="100000"/>
-              </a:lnSpc>
-              <a:spcBef>
-                <a:spcPts val="0"/>
-              </a:spcBef>
-              <a:spcAft>
-                <a:spcPts val="600"/>
-              </a:spcAft>
-            </a:pPr>
-            <a:r>
-              <a:rPr sz="2200" b="1">
-                <a:solidFill>
-                  <a:srgbClr val="6366F1"/>
-                </a:solidFill>
-                <a:latin typeface="NanumSquare"/>
-                <a:ea typeface="NanumSquare"/>
-                <a:cs typeface="NanumSquare"/>
-              </a:rPr>
-              <a:t>→</a:t>
-            </a:r>
-          </a:p>
-        </p:txBody>
-      </p:sp>
-      <p:sp>
-        <p:nvSpPr>
-          <p:cNvPr id="15" name="Rounded Rectangle 14"/>
+              <a:t>방대한 텍스트로 학습한 대규모 신경망 — 언어를 생성·처리</a:t>
+            </a:r>
+          </a:p>
+        </p:txBody>
+      </p:sp>
+      <p:sp>
+        <p:nvSpPr>
+          <p:cNvPr id="12" name="Oval 11"/>
           <p:cNvSpPr/>
           <p:nvPr/>
         </p:nvSpPr>
         <p:spPr>
           <a:xfrm>
-            <a:off x="3371850" y="2651760"/>
-            <a:ext cx="2548890" cy="1737360"/>
-          </a:xfrm>
-          <a:prstGeom prst="roundRect">
-            <a:avLst/>
-          </a:prstGeom>
-          <a:solidFill>
-            <a:srgbClr val="F8FAFC"/>
-          </a:solidFill>
-          <a:ln w="12700">
-            <a:solidFill>
-              <a:srgbClr val="E2E8F0"/>
-            </a:solidFill>
-          </a:ln>
-          <a:effectLst/>
-        </p:spPr>
-        <p:style>
-          <a:lnRef idx="1">
-            <a:schemeClr val="accent1"/>
-          </a:lnRef>
-          <a:fillRef idx="3">
-            <a:schemeClr val="accent1"/>
-          </a:fillRef>
-          <a:effectRef idx="2">
-            <a:schemeClr val="accent1"/>
-          </a:effectRef>
-          <a:fontRef idx="minor">
-            <a:schemeClr val="lt1"/>
-          </a:fontRef>
-        </p:style>
-        <p:txBody>
-          <a:bodyPr rtlCol="0" anchor="ctr"/>
-          <a:lstStyle/>
-          <a:p>
-            <a:pPr algn="ctr"/>
-          </a:p>
-        </p:txBody>
-      </p:sp>
-      <p:sp>
-        <p:nvSpPr>
-          <p:cNvPr id="16" name="Rectangle 15"/>
-          <p:cNvSpPr/>
-          <p:nvPr/>
-        </p:nvSpPr>
-        <p:spPr>
-          <a:xfrm>
-            <a:off x="3371850" y="2651760"/>
-            <a:ext cx="2548890" cy="109728"/>
-          </a:xfrm>
-          <a:prstGeom prst="rect">
+            <a:off x="548640" y="2779776"/>
+            <a:ext cx="146304" cy="146304"/>
+          </a:xfrm>
+          <a:prstGeom prst="ellipse">
             <a:avLst/>
           </a:prstGeom>
           <a:solidFill>
@@ -20791,14 +22575,14 @@
       </p:sp>
       <p:sp>
         <p:nvSpPr>
-          <p:cNvPr id="17" name="TextBox 16"/>
-          <p:cNvSpPr txBox="1"/>
-          <p:nvPr/>
-        </p:nvSpPr>
-        <p:spPr>
-          <a:xfrm>
-            <a:off x="3509010" y="2944368"/>
-            <a:ext cx="2274570" cy="365760"/>
+          <p:cNvPr id="13" name="TextBox 12"/>
+          <p:cNvSpPr txBox="1"/>
+          <p:nvPr/>
+        </p:nvSpPr>
+        <p:spPr>
+          <a:xfrm>
+            <a:off x="868680" y="2697480"/>
+            <a:ext cx="10607040" cy="457200"/>
           </a:xfrm>
           <a:prstGeom prst="rect">
             <a:avLst/>
@@ -20823,54 +22607,7 @@
               </a:spcAft>
             </a:pPr>
             <a:r>
-              <a:rPr sz="1300" b="1">
-                <a:solidFill>
-                  <a:srgbClr val="6366F1"/>
-                </a:solidFill>
-                <a:latin typeface="NanumSquare"/>
-                <a:ea typeface="NanumSquare"/>
-                <a:cs typeface="NanumSquare"/>
-              </a:rPr>
-              <a:t>2</a:t>
-            </a:r>
-          </a:p>
-        </p:txBody>
-      </p:sp>
-      <p:sp>
-        <p:nvSpPr>
-          <p:cNvPr id="18" name="TextBox 17"/>
-          <p:cNvSpPr txBox="1"/>
-          <p:nvPr/>
-        </p:nvSpPr>
-        <p:spPr>
-          <a:xfrm>
-            <a:off x="3509010" y="3310128"/>
-            <a:ext cx="2274570" cy="548640"/>
-          </a:xfrm>
-          <a:prstGeom prst="rect">
-            <a:avLst/>
-          </a:prstGeom>
-          <a:noFill/>
-        </p:spPr>
-        <p:txBody>
-          <a:bodyPr wrap="square" anchor="t" lIns="0" rIns="0" tIns="0" bIns="0">
-            <a:spAutoFit/>
-          </a:bodyPr>
-          <a:lstStyle/>
-          <a:p>
-            <a:pPr algn="l">
-              <a:lnSpc>
-                <a:spcPct val="100000"/>
-              </a:lnSpc>
-              <a:spcBef>
-                <a:spcPts val="0"/>
-              </a:spcBef>
-              <a:spcAft>
-                <a:spcPts val="600"/>
-              </a:spcAft>
-            </a:pPr>
-            <a:r>
-              <a:rPr sz="1500" b="1">
+              <a:rPr sz="1600" b="1">
                 <a:solidFill>
                   <a:srgbClr val="0F172A"/>
                 </a:solidFill>
@@ -20878,21 +22615,21 @@
                 <a:ea typeface="NanumGothic"/>
                 <a:cs typeface="NanumGothic"/>
               </a:rPr>
-              <a:t>예측</a:t>
-            </a:r>
-          </a:p>
-        </p:txBody>
-      </p:sp>
-      <p:sp>
-        <p:nvSpPr>
-          <p:cNvPr id="19" name="TextBox 18"/>
-          <p:cNvSpPr txBox="1"/>
-          <p:nvPr/>
-        </p:nvSpPr>
-        <p:spPr>
-          <a:xfrm>
-            <a:off x="3509010" y="3822192"/>
-            <a:ext cx="2274570" cy="457200"/>
+              <a:t>핵심 동작</a:t>
+            </a:r>
+          </a:p>
+        </p:txBody>
+      </p:sp>
+      <p:sp>
+        <p:nvSpPr>
+          <p:cNvPr id="14" name="TextBox 13"/>
+          <p:cNvSpPr txBox="1"/>
+          <p:nvPr/>
+        </p:nvSpPr>
+        <p:spPr>
+          <a:xfrm>
+            <a:off x="868680" y="3081528"/>
+            <a:ext cx="10607040" cy="457200"/>
           </a:xfrm>
           <a:prstGeom prst="rect">
             <a:avLst/>
@@ -20917,7 +22654,7 @@
               </a:spcAft>
             </a:pPr>
             <a:r>
-              <a:rPr sz="1100" b="0">
+              <a:rPr sz="1300" b="0">
                 <a:solidFill>
                   <a:srgbClr val="64748B"/>
                 </a:solidFill>
@@ -20925,116 +22662,23 @@
                 <a:ea typeface="NanumGothic"/>
                 <a:cs typeface="NanumGothic"/>
               </a:rPr>
-              <a:t>다음 토큰의 확률 분포 계산</a:t>
-            </a:r>
-          </a:p>
-        </p:txBody>
-      </p:sp>
-      <p:sp>
-        <p:nvSpPr>
-          <p:cNvPr id="20" name="TextBox 19"/>
-          <p:cNvSpPr txBox="1"/>
-          <p:nvPr/>
-        </p:nvSpPr>
-        <p:spPr>
-          <a:xfrm>
-            <a:off x="5966460" y="3154680"/>
-            <a:ext cx="274320" cy="548640"/>
-          </a:xfrm>
-          <a:prstGeom prst="rect">
-            <a:avLst/>
-          </a:prstGeom>
-          <a:noFill/>
-        </p:spPr>
-        <p:txBody>
-          <a:bodyPr wrap="square" anchor="ctr" lIns="0" rIns="0" tIns="0" bIns="0">
-            <a:spAutoFit/>
-          </a:bodyPr>
-          <a:lstStyle/>
-          <a:p>
-            <a:pPr algn="ctr">
-              <a:lnSpc>
-                <a:spcPct val="100000"/>
-              </a:lnSpc>
-              <a:spcBef>
-                <a:spcPts val="0"/>
-              </a:spcBef>
-              <a:spcAft>
-                <a:spcPts val="600"/>
-              </a:spcAft>
-            </a:pPr>
-            <a:r>
-              <a:rPr sz="2200" b="1">
-                <a:solidFill>
-                  <a:srgbClr val="6366F1"/>
-                </a:solidFill>
-                <a:latin typeface="NanumSquare"/>
-                <a:ea typeface="NanumSquare"/>
-                <a:cs typeface="NanumSquare"/>
-              </a:rPr>
-              <a:t>→</a:t>
-            </a:r>
-          </a:p>
-        </p:txBody>
-      </p:sp>
-      <p:sp>
-        <p:nvSpPr>
-          <p:cNvPr id="21" name="Rounded Rectangle 20"/>
+              <a:t>지금까지의 텍스트로 '다음에 올 토큰'을 확률로 예측</a:t>
+            </a:r>
+          </a:p>
+        </p:txBody>
+      </p:sp>
+      <p:sp>
+        <p:nvSpPr>
+          <p:cNvPr id="15" name="Oval 14"/>
           <p:cNvSpPr/>
           <p:nvPr/>
         </p:nvSpPr>
         <p:spPr>
           <a:xfrm>
-            <a:off x="6240780" y="2651760"/>
-            <a:ext cx="2548890" cy="1737360"/>
-          </a:xfrm>
-          <a:prstGeom prst="roundRect">
-            <a:avLst/>
-          </a:prstGeom>
-          <a:solidFill>
-            <a:srgbClr val="F8FAFC"/>
-          </a:solidFill>
-          <a:ln w="12700">
-            <a:solidFill>
-              <a:srgbClr val="E2E8F0"/>
-            </a:solidFill>
-          </a:ln>
-          <a:effectLst/>
-        </p:spPr>
-        <p:style>
-          <a:lnRef idx="1">
-            <a:schemeClr val="accent1"/>
-          </a:lnRef>
-          <a:fillRef idx="3">
-            <a:schemeClr val="accent1"/>
-          </a:fillRef>
-          <a:effectRef idx="2">
-            <a:schemeClr val="accent1"/>
-          </a:effectRef>
-          <a:fontRef idx="minor">
-            <a:schemeClr val="lt1"/>
-          </a:fontRef>
-        </p:style>
-        <p:txBody>
-          <a:bodyPr rtlCol="0" anchor="ctr"/>
-          <a:lstStyle/>
-          <a:p>
-            <a:pPr algn="ctr"/>
-          </a:p>
-        </p:txBody>
-      </p:sp>
-      <p:sp>
-        <p:nvSpPr>
-          <p:cNvPr id="22" name="Rectangle 21"/>
-          <p:cNvSpPr/>
-          <p:nvPr/>
-        </p:nvSpPr>
-        <p:spPr>
-          <a:xfrm>
-            <a:off x="6240780" y="2651760"/>
-            <a:ext cx="2548890" cy="109728"/>
-          </a:xfrm>
-          <a:prstGeom prst="rect">
+            <a:off x="548640" y="3648456"/>
+            <a:ext cx="146304" cy="146304"/>
+          </a:xfrm>
+          <a:prstGeom prst="ellipse">
             <a:avLst/>
           </a:prstGeom>
           <a:solidFill>
@@ -21069,14 +22713,14 @@
       </p:sp>
       <p:sp>
         <p:nvSpPr>
-          <p:cNvPr id="23" name="TextBox 22"/>
-          <p:cNvSpPr txBox="1"/>
-          <p:nvPr/>
-        </p:nvSpPr>
-        <p:spPr>
-          <a:xfrm>
-            <a:off x="6377940" y="2944368"/>
-            <a:ext cx="2274570" cy="365760"/>
+          <p:cNvPr id="16" name="TextBox 15"/>
+          <p:cNvSpPr txBox="1"/>
+          <p:nvPr/>
+        </p:nvSpPr>
+        <p:spPr>
+          <a:xfrm>
+            <a:off x="868680" y="3566160"/>
+            <a:ext cx="10607040" cy="457200"/>
           </a:xfrm>
           <a:prstGeom prst="rect">
             <a:avLst/>
@@ -21101,54 +22745,7 @@
               </a:spcAft>
             </a:pPr>
             <a:r>
-              <a:rPr sz="1300" b="1">
-                <a:solidFill>
-                  <a:srgbClr val="6366F1"/>
-                </a:solidFill>
-                <a:latin typeface="NanumSquare"/>
-                <a:ea typeface="NanumSquare"/>
-                <a:cs typeface="NanumSquare"/>
-              </a:rPr>
-              <a:t>3</a:t>
-            </a:r>
-          </a:p>
-        </p:txBody>
-      </p:sp>
-      <p:sp>
-        <p:nvSpPr>
-          <p:cNvPr id="24" name="TextBox 23"/>
-          <p:cNvSpPr txBox="1"/>
-          <p:nvPr/>
-        </p:nvSpPr>
-        <p:spPr>
-          <a:xfrm>
-            <a:off x="6377940" y="3310128"/>
-            <a:ext cx="2274570" cy="548640"/>
-          </a:xfrm>
-          <a:prstGeom prst="rect">
-            <a:avLst/>
-          </a:prstGeom>
-          <a:noFill/>
-        </p:spPr>
-        <p:txBody>
-          <a:bodyPr wrap="square" anchor="t" lIns="0" rIns="0" tIns="0" bIns="0">
-            <a:spAutoFit/>
-          </a:bodyPr>
-          <a:lstStyle/>
-          <a:p>
-            <a:pPr algn="l">
-              <a:lnSpc>
-                <a:spcPct val="100000"/>
-              </a:lnSpc>
-              <a:spcBef>
-                <a:spcPts val="0"/>
-              </a:spcBef>
-              <a:spcAft>
-                <a:spcPts val="600"/>
-              </a:spcAft>
-            </a:pPr>
-            <a:r>
-              <a:rPr sz="1500" b="1">
+              <a:rPr sz="1600" b="1">
                 <a:solidFill>
                   <a:srgbClr val="0F172A"/>
                 </a:solidFill>
@@ -21156,21 +22753,21 @@
                 <a:ea typeface="NanumGothic"/>
                 <a:cs typeface="NanumGothic"/>
               </a:rPr>
-              <a:t>샘플링</a:t>
-            </a:r>
-          </a:p>
-        </p:txBody>
-      </p:sp>
-      <p:sp>
-        <p:nvSpPr>
-          <p:cNvPr id="25" name="TextBox 24"/>
-          <p:cNvSpPr txBox="1"/>
-          <p:nvPr/>
-        </p:nvSpPr>
-        <p:spPr>
-          <a:xfrm>
-            <a:off x="6377940" y="3822192"/>
-            <a:ext cx="2274570" cy="457200"/>
+              <a:t>'이해'가 아니라 '패턴'</a:t>
+            </a:r>
+          </a:p>
+        </p:txBody>
+      </p:sp>
+      <p:sp>
+        <p:nvSpPr>
+          <p:cNvPr id="17" name="TextBox 16"/>
+          <p:cNvSpPr txBox="1"/>
+          <p:nvPr/>
+        </p:nvSpPr>
+        <p:spPr>
+          <a:xfrm>
+            <a:off x="868680" y="3950208"/>
+            <a:ext cx="10607040" cy="457200"/>
           </a:xfrm>
           <a:prstGeom prst="rect">
             <a:avLst/>
@@ -21195,7 +22792,7 @@
               </a:spcAft>
             </a:pPr>
             <a:r>
-              <a:rPr sz="1100" b="0">
+              <a:rPr sz="1300" b="0">
                 <a:solidFill>
                   <a:srgbClr val="64748B"/>
                 </a:solidFill>
@@ -21203,298 +22800,20 @@
                 <a:ea typeface="NanumGothic"/>
                 <a:cs typeface="NanumGothic"/>
               </a:rPr>
-              <a:t>확률에 따라 토큰 1개 선택</a:t>
-            </a:r>
-          </a:p>
-        </p:txBody>
-      </p:sp>
-      <p:sp>
-        <p:nvSpPr>
-          <p:cNvPr id="26" name="TextBox 25"/>
-          <p:cNvSpPr txBox="1"/>
-          <p:nvPr/>
-        </p:nvSpPr>
-        <p:spPr>
-          <a:xfrm>
-            <a:off x="8835390" y="3154680"/>
-            <a:ext cx="274320" cy="548640"/>
-          </a:xfrm>
-          <a:prstGeom prst="rect">
-            <a:avLst/>
-          </a:prstGeom>
-          <a:noFill/>
-        </p:spPr>
-        <p:txBody>
-          <a:bodyPr wrap="square" anchor="ctr" lIns="0" rIns="0" tIns="0" bIns="0">
-            <a:spAutoFit/>
-          </a:bodyPr>
-          <a:lstStyle/>
-          <a:p>
-            <a:pPr algn="ctr">
-              <a:lnSpc>
-                <a:spcPct val="100000"/>
-              </a:lnSpc>
-              <a:spcBef>
-                <a:spcPts val="0"/>
-              </a:spcBef>
-              <a:spcAft>
-                <a:spcPts val="600"/>
-              </a:spcAft>
-            </a:pPr>
-            <a:r>
-              <a:rPr sz="2200" b="1">
-                <a:solidFill>
-                  <a:srgbClr val="6366F1"/>
-                </a:solidFill>
-                <a:latin typeface="NanumSquare"/>
-                <a:ea typeface="NanumSquare"/>
-                <a:cs typeface="NanumSquare"/>
-              </a:rPr>
-              <a:t>→</a:t>
-            </a:r>
-          </a:p>
-        </p:txBody>
-      </p:sp>
-      <p:sp>
-        <p:nvSpPr>
-          <p:cNvPr id="27" name="Rounded Rectangle 26"/>
+              <a:t>의미를 아는 게 아니라 통계적 패턴을 재현하는 것</a:t>
+            </a:r>
+          </a:p>
+        </p:txBody>
+      </p:sp>
+      <p:sp>
+        <p:nvSpPr>
+          <p:cNvPr id="18" name="Rounded Rectangle 17"/>
           <p:cNvSpPr/>
           <p:nvPr/>
         </p:nvSpPr>
         <p:spPr>
           <a:xfrm>
-            <a:off x="9109710" y="2651760"/>
-            <a:ext cx="2548890" cy="1737360"/>
-          </a:xfrm>
-          <a:prstGeom prst="roundRect">
-            <a:avLst/>
-          </a:prstGeom>
-          <a:solidFill>
-            <a:srgbClr val="F8FAFC"/>
-          </a:solidFill>
-          <a:ln w="12700">
-            <a:solidFill>
-              <a:srgbClr val="E2E8F0"/>
-            </a:solidFill>
-          </a:ln>
-          <a:effectLst/>
-        </p:spPr>
-        <p:style>
-          <a:lnRef idx="1">
-            <a:schemeClr val="accent1"/>
-          </a:lnRef>
-          <a:fillRef idx="3">
-            <a:schemeClr val="accent1"/>
-          </a:fillRef>
-          <a:effectRef idx="2">
-            <a:schemeClr val="accent1"/>
-          </a:effectRef>
-          <a:fontRef idx="minor">
-            <a:schemeClr val="lt1"/>
-          </a:fontRef>
-        </p:style>
-        <p:txBody>
-          <a:bodyPr rtlCol="0" anchor="ctr"/>
-          <a:lstStyle/>
-          <a:p>
-            <a:pPr algn="ctr"/>
-          </a:p>
-        </p:txBody>
-      </p:sp>
-      <p:sp>
-        <p:nvSpPr>
-          <p:cNvPr id="28" name="Rectangle 27"/>
-          <p:cNvSpPr/>
-          <p:nvPr/>
-        </p:nvSpPr>
-        <p:spPr>
-          <a:xfrm>
-            <a:off x="9109710" y="2651760"/>
-            <a:ext cx="2548890" cy="109728"/>
-          </a:xfrm>
-          <a:prstGeom prst="rect">
-            <a:avLst/>
-          </a:prstGeom>
-          <a:solidFill>
-            <a:srgbClr val="6366F1"/>
-          </a:solidFill>
-          <a:ln>
-            <a:noFill/>
-          </a:ln>
-          <a:effectLst/>
-        </p:spPr>
-        <p:style>
-          <a:lnRef idx="1">
-            <a:schemeClr val="accent1"/>
-          </a:lnRef>
-          <a:fillRef idx="3">
-            <a:schemeClr val="accent1"/>
-          </a:fillRef>
-          <a:effectRef idx="2">
-            <a:schemeClr val="accent1"/>
-          </a:effectRef>
-          <a:fontRef idx="minor">
-            <a:schemeClr val="lt1"/>
-          </a:fontRef>
-        </p:style>
-        <p:txBody>
-          <a:bodyPr rtlCol="0" anchor="ctr"/>
-          <a:lstStyle/>
-          <a:p>
-            <a:pPr algn="ctr"/>
-          </a:p>
-        </p:txBody>
-      </p:sp>
-      <p:sp>
-        <p:nvSpPr>
-          <p:cNvPr id="29" name="TextBox 28"/>
-          <p:cNvSpPr txBox="1"/>
-          <p:nvPr/>
-        </p:nvSpPr>
-        <p:spPr>
-          <a:xfrm>
-            <a:off x="9246870" y="2944368"/>
-            <a:ext cx="2274570" cy="365760"/>
-          </a:xfrm>
-          <a:prstGeom prst="rect">
-            <a:avLst/>
-          </a:prstGeom>
-          <a:noFill/>
-        </p:spPr>
-        <p:txBody>
-          <a:bodyPr wrap="square" anchor="t" lIns="0" rIns="0" tIns="0" bIns="0">
-            <a:spAutoFit/>
-          </a:bodyPr>
-          <a:lstStyle/>
-          <a:p>
-            <a:pPr algn="l">
-              <a:lnSpc>
-                <a:spcPct val="100000"/>
-              </a:lnSpc>
-              <a:spcBef>
-                <a:spcPts val="0"/>
-              </a:spcBef>
-              <a:spcAft>
-                <a:spcPts val="600"/>
-              </a:spcAft>
-            </a:pPr>
-            <a:r>
-              <a:rPr sz="1300" b="1">
-                <a:solidFill>
-                  <a:srgbClr val="6366F1"/>
-                </a:solidFill>
-                <a:latin typeface="NanumSquare"/>
-                <a:ea typeface="NanumSquare"/>
-                <a:cs typeface="NanumSquare"/>
-              </a:rPr>
-              <a:t>4</a:t>
-            </a:r>
-          </a:p>
-        </p:txBody>
-      </p:sp>
-      <p:sp>
-        <p:nvSpPr>
-          <p:cNvPr id="30" name="TextBox 29"/>
-          <p:cNvSpPr txBox="1"/>
-          <p:nvPr/>
-        </p:nvSpPr>
-        <p:spPr>
-          <a:xfrm>
-            <a:off x="9246870" y="3310128"/>
-            <a:ext cx="2274570" cy="548640"/>
-          </a:xfrm>
-          <a:prstGeom prst="rect">
-            <a:avLst/>
-          </a:prstGeom>
-          <a:noFill/>
-        </p:spPr>
-        <p:txBody>
-          <a:bodyPr wrap="square" anchor="t" lIns="0" rIns="0" tIns="0" bIns="0">
-            <a:spAutoFit/>
-          </a:bodyPr>
-          <a:lstStyle/>
-          <a:p>
-            <a:pPr algn="l">
-              <a:lnSpc>
-                <a:spcPct val="100000"/>
-              </a:lnSpc>
-              <a:spcBef>
-                <a:spcPts val="0"/>
-              </a:spcBef>
-              <a:spcAft>
-                <a:spcPts val="600"/>
-              </a:spcAft>
-            </a:pPr>
-            <a:r>
-              <a:rPr sz="1500" b="1">
-                <a:solidFill>
-                  <a:srgbClr val="0F172A"/>
-                </a:solidFill>
-                <a:latin typeface="NanumGothic"/>
-                <a:ea typeface="NanumGothic"/>
-                <a:cs typeface="NanumGothic"/>
-              </a:rPr>
-              <a:t>반복</a:t>
-            </a:r>
-          </a:p>
-        </p:txBody>
-      </p:sp>
-      <p:sp>
-        <p:nvSpPr>
-          <p:cNvPr id="31" name="TextBox 30"/>
-          <p:cNvSpPr txBox="1"/>
-          <p:nvPr/>
-        </p:nvSpPr>
-        <p:spPr>
-          <a:xfrm>
-            <a:off x="9246870" y="3822192"/>
-            <a:ext cx="2274570" cy="457200"/>
-          </a:xfrm>
-          <a:prstGeom prst="rect">
-            <a:avLst/>
-          </a:prstGeom>
-          <a:noFill/>
-        </p:spPr>
-        <p:txBody>
-          <a:bodyPr wrap="square" anchor="t" lIns="0" rIns="0" tIns="0" bIns="0">
-            <a:spAutoFit/>
-          </a:bodyPr>
-          <a:lstStyle/>
-          <a:p>
-            <a:pPr algn="l">
-              <a:lnSpc>
-                <a:spcPct val="100000"/>
-              </a:lnSpc>
-              <a:spcBef>
-                <a:spcPts val="0"/>
-              </a:spcBef>
-              <a:spcAft>
-                <a:spcPts val="600"/>
-              </a:spcAft>
-            </a:pPr>
-            <a:r>
-              <a:rPr sz="1100" b="0">
-                <a:solidFill>
-                  <a:srgbClr val="64748B"/>
-                </a:solidFill>
-                <a:latin typeface="NanumGothic"/>
-                <a:ea typeface="NanumGothic"/>
-                <a:cs typeface="NanumGothic"/>
-              </a:rPr>
-              <a:t>붙이고 다시 예측 — 끝까지</a:t>
-            </a:r>
-          </a:p>
-        </p:txBody>
-      </p:sp>
-      <p:sp>
-        <p:nvSpPr>
-          <p:cNvPr id="32" name="Rounded Rectangle 31"/>
-          <p:cNvSpPr/>
-          <p:nvPr/>
-        </p:nvSpPr>
-        <p:spPr>
-          <a:xfrm>
-            <a:off x="502920" y="5029200"/>
+            <a:off x="502920" y="5532120"/>
             <a:ext cx="11155680" cy="658368"/>
           </a:xfrm>
           <a:prstGeom prst="roundRect">
@@ -21534,13 +22853,13 @@
       </p:sp>
       <p:sp>
         <p:nvSpPr>
-          <p:cNvPr id="33" name="TextBox 32"/>
-          <p:cNvSpPr txBox="1"/>
-          <p:nvPr/>
-        </p:nvSpPr>
-        <p:spPr>
-          <a:xfrm>
-            <a:off x="777240" y="5029200"/>
+          <p:cNvPr id="19" name="TextBox 18"/>
+          <p:cNvSpPr txBox="1"/>
+          <p:nvPr/>
+        </p:nvSpPr>
+        <p:spPr>
+          <a:xfrm>
+            <a:off x="777240" y="5532120"/>
             <a:ext cx="10607040" cy="658368"/>
           </a:xfrm>
           <a:prstGeom prst="rect">
@@ -21585,7 +22904,7 @@
                 <a:ea typeface="NanumGothic"/>
                 <a:cs typeface="NanumGothic"/>
               </a:rPr>
-              <a:t>한 번에 한 토큰씩, 반복해서 생성한다 (autoregressive)</a:t>
+              <a:t>예: '커피를 마시면 잠이 ___' 다음에 올 토큰을 확률로 고른다</a:t>
             </a:r>
           </a:p>
         </p:txBody>
@@ -21738,7 +23057,7 @@
                 <a:ea typeface="NanumGothic"/>
                 <a:cs typeface="NanumGothic"/>
               </a:rPr>
-              <a:t>학습 ①</a:t>
+              <a:t>동작 원리</a:t>
             </a:r>
           </a:p>
         </p:txBody>
@@ -21785,7 +23104,7 @@
                 <a:ea typeface="NanumSquare"/>
                 <a:cs typeface="NanumSquare"/>
               </a:rPr>
-              <a:t>사전학습 (Pre-training)</a:t>
+              <a:t>입력에서 출력까지</a:t>
             </a:r>
           </a:p>
         </p:txBody>
@@ -21930,16 +23249,62 @@
       </p:sp>
       <p:sp>
         <p:nvSpPr>
-          <p:cNvPr id="9" name="Oval 8"/>
+          <p:cNvPr id="9" name="Rounded Rectangle 8"/>
           <p:cNvSpPr/>
           <p:nvPr/>
         </p:nvSpPr>
         <p:spPr>
           <a:xfrm>
-            <a:off x="548640" y="1911096"/>
-            <a:ext cx="146304" cy="146304"/>
-          </a:xfrm>
-          <a:prstGeom prst="ellipse">
+            <a:off x="502920" y="2651760"/>
+            <a:ext cx="2548890" cy="1737360"/>
+          </a:xfrm>
+          <a:prstGeom prst="roundRect">
+            <a:avLst/>
+          </a:prstGeom>
+          <a:solidFill>
+            <a:srgbClr val="F8FAFC"/>
+          </a:solidFill>
+          <a:ln w="12700">
+            <a:solidFill>
+              <a:srgbClr val="E2E8F0"/>
+            </a:solidFill>
+          </a:ln>
+          <a:effectLst/>
+        </p:spPr>
+        <p:style>
+          <a:lnRef idx="1">
+            <a:schemeClr val="accent1"/>
+          </a:lnRef>
+          <a:fillRef idx="3">
+            <a:schemeClr val="accent1"/>
+          </a:fillRef>
+          <a:effectRef idx="2">
+            <a:schemeClr val="accent1"/>
+          </a:effectRef>
+          <a:fontRef idx="minor">
+            <a:schemeClr val="lt1"/>
+          </a:fontRef>
+        </p:style>
+        <p:txBody>
+          <a:bodyPr rtlCol="0" anchor="ctr"/>
+          <a:lstStyle/>
+          <a:p>
+            <a:pPr algn="ctr"/>
+          </a:p>
+        </p:txBody>
+      </p:sp>
+      <p:sp>
+        <p:nvSpPr>
+          <p:cNvPr id="10" name="Rectangle 9"/>
+          <p:cNvSpPr/>
+          <p:nvPr/>
+        </p:nvSpPr>
+        <p:spPr>
+          <a:xfrm>
+            <a:off x="502920" y="2651760"/>
+            <a:ext cx="2548890" cy="109728"/>
+          </a:xfrm>
+          <a:prstGeom prst="rect">
             <a:avLst/>
           </a:prstGeom>
           <a:solidFill>
@@ -21974,14 +23339,14 @@
       </p:sp>
       <p:sp>
         <p:nvSpPr>
-          <p:cNvPr id="10" name="TextBox 9"/>
-          <p:cNvSpPr txBox="1"/>
-          <p:nvPr/>
-        </p:nvSpPr>
-        <p:spPr>
-          <a:xfrm>
-            <a:off x="868680" y="1828800"/>
-            <a:ext cx="10607040" cy="457200"/>
+          <p:cNvPr id="11" name="TextBox 10"/>
+          <p:cNvSpPr txBox="1"/>
+          <p:nvPr/>
+        </p:nvSpPr>
+        <p:spPr>
+          <a:xfrm>
+            <a:off x="640080" y="2944368"/>
+            <a:ext cx="2274570" cy="365760"/>
           </a:xfrm>
           <a:prstGeom prst="rect">
             <a:avLst/>
@@ -22006,7 +23371,54 @@
               </a:spcAft>
             </a:pPr>
             <a:r>
-              <a:rPr sz="1600" b="1">
+              <a:rPr sz="1300" b="1">
+                <a:solidFill>
+                  <a:srgbClr val="6366F1"/>
+                </a:solidFill>
+                <a:latin typeface="NanumSquare"/>
+                <a:ea typeface="NanumSquare"/>
+                <a:cs typeface="NanumSquare"/>
+              </a:rPr>
+              <a:t>1</a:t>
+            </a:r>
+          </a:p>
+        </p:txBody>
+      </p:sp>
+      <p:sp>
+        <p:nvSpPr>
+          <p:cNvPr id="12" name="TextBox 11"/>
+          <p:cNvSpPr txBox="1"/>
+          <p:nvPr/>
+        </p:nvSpPr>
+        <p:spPr>
+          <a:xfrm>
+            <a:off x="640080" y="3310128"/>
+            <a:ext cx="2274570" cy="548640"/>
+          </a:xfrm>
+          <a:prstGeom prst="rect">
+            <a:avLst/>
+          </a:prstGeom>
+          <a:noFill/>
+        </p:spPr>
+        <p:txBody>
+          <a:bodyPr wrap="square" anchor="t" lIns="0" rIns="0" tIns="0" bIns="0">
+            <a:spAutoFit/>
+          </a:bodyPr>
+          <a:lstStyle/>
+          <a:p>
+            <a:pPr algn="l">
+              <a:lnSpc>
+                <a:spcPct val="100000"/>
+              </a:lnSpc>
+              <a:spcBef>
+                <a:spcPts val="0"/>
+              </a:spcBef>
+              <a:spcAft>
+                <a:spcPts val="600"/>
+              </a:spcAft>
+            </a:pPr>
+            <a:r>
+              <a:rPr sz="1500" b="1">
                 <a:solidFill>
                   <a:srgbClr val="0F172A"/>
                 </a:solidFill>
@@ -22014,21 +23426,21 @@
                 <a:ea typeface="NanumGothic"/>
                 <a:cs typeface="NanumGothic"/>
               </a:rPr>
-              <a:t>방대한 텍스트로 자기지도 학습</a:t>
-            </a:r>
-          </a:p>
-        </p:txBody>
-      </p:sp>
-      <p:sp>
-        <p:nvSpPr>
-          <p:cNvPr id="11" name="TextBox 10"/>
-          <p:cNvSpPr txBox="1"/>
-          <p:nvPr/>
-        </p:nvSpPr>
-        <p:spPr>
-          <a:xfrm>
-            <a:off x="868680" y="2212848"/>
-            <a:ext cx="10607040" cy="457200"/>
+              <a:t>토큰화</a:t>
+            </a:r>
+          </a:p>
+        </p:txBody>
+      </p:sp>
+      <p:sp>
+        <p:nvSpPr>
+          <p:cNvPr id="13" name="TextBox 12"/>
+          <p:cNvSpPr txBox="1"/>
+          <p:nvPr/>
+        </p:nvSpPr>
+        <p:spPr>
+          <a:xfrm>
+            <a:off x="640080" y="3822192"/>
+            <a:ext cx="2274570" cy="457200"/>
           </a:xfrm>
           <a:prstGeom prst="rect">
             <a:avLst/>
@@ -22053,7 +23465,7 @@
               </a:spcAft>
             </a:pPr>
             <a:r>
-              <a:rPr sz="1300" b="0">
+              <a:rPr sz="1100" b="0">
                 <a:solidFill>
                   <a:srgbClr val="64748B"/>
                 </a:solidFill>
@@ -22061,23 +23473,116 @@
                 <a:ea typeface="NanumGothic"/>
                 <a:cs typeface="NanumGothic"/>
               </a:rPr>
-              <a:t>웹·책·코드에서 '다음 토큰 맞히기'를 반복</a:t>
-            </a:r>
-          </a:p>
-        </p:txBody>
-      </p:sp>
-      <p:sp>
-        <p:nvSpPr>
-          <p:cNvPr id="12" name="Oval 11"/>
+              <a:t>문장을 토큰(단어 조각)으로 분해</a:t>
+            </a:r>
+          </a:p>
+        </p:txBody>
+      </p:sp>
+      <p:sp>
+        <p:nvSpPr>
+          <p:cNvPr id="14" name="TextBox 13"/>
+          <p:cNvSpPr txBox="1"/>
+          <p:nvPr/>
+        </p:nvSpPr>
+        <p:spPr>
+          <a:xfrm>
+            <a:off x="3097530" y="3154680"/>
+            <a:ext cx="274320" cy="548640"/>
+          </a:xfrm>
+          <a:prstGeom prst="rect">
+            <a:avLst/>
+          </a:prstGeom>
+          <a:noFill/>
+        </p:spPr>
+        <p:txBody>
+          <a:bodyPr wrap="square" anchor="ctr" lIns="0" rIns="0" tIns="0" bIns="0">
+            <a:spAutoFit/>
+          </a:bodyPr>
+          <a:lstStyle/>
+          <a:p>
+            <a:pPr algn="ctr">
+              <a:lnSpc>
+                <a:spcPct val="100000"/>
+              </a:lnSpc>
+              <a:spcBef>
+                <a:spcPts val="0"/>
+              </a:spcBef>
+              <a:spcAft>
+                <a:spcPts val="600"/>
+              </a:spcAft>
+            </a:pPr>
+            <a:r>
+              <a:rPr sz="2200" b="1">
+                <a:solidFill>
+                  <a:srgbClr val="6366F1"/>
+                </a:solidFill>
+                <a:latin typeface="NanumSquare"/>
+                <a:ea typeface="NanumSquare"/>
+                <a:cs typeface="NanumSquare"/>
+              </a:rPr>
+              <a:t>→</a:t>
+            </a:r>
+          </a:p>
+        </p:txBody>
+      </p:sp>
+      <p:sp>
+        <p:nvSpPr>
+          <p:cNvPr id="15" name="Rounded Rectangle 14"/>
           <p:cNvSpPr/>
           <p:nvPr/>
         </p:nvSpPr>
         <p:spPr>
           <a:xfrm>
-            <a:off x="548640" y="2779776"/>
-            <a:ext cx="146304" cy="146304"/>
-          </a:xfrm>
-          <a:prstGeom prst="ellipse">
+            <a:off x="3371850" y="2651760"/>
+            <a:ext cx="2548890" cy="1737360"/>
+          </a:xfrm>
+          <a:prstGeom prst="roundRect">
+            <a:avLst/>
+          </a:prstGeom>
+          <a:solidFill>
+            <a:srgbClr val="F8FAFC"/>
+          </a:solidFill>
+          <a:ln w="12700">
+            <a:solidFill>
+              <a:srgbClr val="E2E8F0"/>
+            </a:solidFill>
+          </a:ln>
+          <a:effectLst/>
+        </p:spPr>
+        <p:style>
+          <a:lnRef idx="1">
+            <a:schemeClr val="accent1"/>
+          </a:lnRef>
+          <a:fillRef idx="3">
+            <a:schemeClr val="accent1"/>
+          </a:fillRef>
+          <a:effectRef idx="2">
+            <a:schemeClr val="accent1"/>
+          </a:effectRef>
+          <a:fontRef idx="minor">
+            <a:schemeClr val="lt1"/>
+          </a:fontRef>
+        </p:style>
+        <p:txBody>
+          <a:bodyPr rtlCol="0" anchor="ctr"/>
+          <a:lstStyle/>
+          <a:p>
+            <a:pPr algn="ctr"/>
+          </a:p>
+        </p:txBody>
+      </p:sp>
+      <p:sp>
+        <p:nvSpPr>
+          <p:cNvPr id="16" name="Rectangle 15"/>
+          <p:cNvSpPr/>
+          <p:nvPr/>
+        </p:nvSpPr>
+        <p:spPr>
+          <a:xfrm>
+            <a:off x="3371850" y="2651760"/>
+            <a:ext cx="2548890" cy="109728"/>
+          </a:xfrm>
+          <a:prstGeom prst="rect">
             <a:avLst/>
           </a:prstGeom>
           <a:solidFill>
@@ -22112,14 +23617,14 @@
       </p:sp>
       <p:sp>
         <p:nvSpPr>
-          <p:cNvPr id="13" name="TextBox 12"/>
-          <p:cNvSpPr txBox="1"/>
-          <p:nvPr/>
-        </p:nvSpPr>
-        <p:spPr>
-          <a:xfrm>
-            <a:off x="868680" y="2697480"/>
-            <a:ext cx="10607040" cy="457200"/>
+          <p:cNvPr id="17" name="TextBox 16"/>
+          <p:cNvSpPr txBox="1"/>
+          <p:nvPr/>
+        </p:nvSpPr>
+        <p:spPr>
+          <a:xfrm>
+            <a:off x="3509010" y="2944368"/>
+            <a:ext cx="2274570" cy="365760"/>
           </a:xfrm>
           <a:prstGeom prst="rect">
             <a:avLst/>
@@ -22144,7 +23649,54 @@
               </a:spcAft>
             </a:pPr>
             <a:r>
-              <a:rPr sz="1600" b="1">
+              <a:rPr sz="1300" b="1">
+                <a:solidFill>
+                  <a:srgbClr val="6366F1"/>
+                </a:solidFill>
+                <a:latin typeface="NanumSquare"/>
+                <a:ea typeface="NanumSquare"/>
+                <a:cs typeface="NanumSquare"/>
+              </a:rPr>
+              <a:t>2</a:t>
+            </a:r>
+          </a:p>
+        </p:txBody>
+      </p:sp>
+      <p:sp>
+        <p:nvSpPr>
+          <p:cNvPr id="18" name="TextBox 17"/>
+          <p:cNvSpPr txBox="1"/>
+          <p:nvPr/>
+        </p:nvSpPr>
+        <p:spPr>
+          <a:xfrm>
+            <a:off x="3509010" y="3310128"/>
+            <a:ext cx="2274570" cy="548640"/>
+          </a:xfrm>
+          <a:prstGeom prst="rect">
+            <a:avLst/>
+          </a:prstGeom>
+          <a:noFill/>
+        </p:spPr>
+        <p:txBody>
+          <a:bodyPr wrap="square" anchor="t" lIns="0" rIns="0" tIns="0" bIns="0">
+            <a:spAutoFit/>
+          </a:bodyPr>
+          <a:lstStyle/>
+          <a:p>
+            <a:pPr algn="l">
+              <a:lnSpc>
+                <a:spcPct val="100000"/>
+              </a:lnSpc>
+              <a:spcBef>
+                <a:spcPts val="0"/>
+              </a:spcBef>
+              <a:spcAft>
+                <a:spcPts val="600"/>
+              </a:spcAft>
+            </a:pPr>
+            <a:r>
+              <a:rPr sz="1500" b="1">
                 <a:solidFill>
                   <a:srgbClr val="0F172A"/>
                 </a:solidFill>
@@ -22152,21 +23704,21 @@
                 <a:ea typeface="NanumGothic"/>
                 <a:cs typeface="NanumGothic"/>
               </a:rPr>
-              <a:t>무엇을 배우나</a:t>
-            </a:r>
-          </a:p>
-        </p:txBody>
-      </p:sp>
-      <p:sp>
-        <p:nvSpPr>
-          <p:cNvPr id="14" name="TextBox 13"/>
-          <p:cNvSpPr txBox="1"/>
-          <p:nvPr/>
-        </p:nvSpPr>
-        <p:spPr>
-          <a:xfrm>
-            <a:off x="868680" y="3081528"/>
-            <a:ext cx="10607040" cy="457200"/>
+              <a:t>예측</a:t>
+            </a:r>
+          </a:p>
+        </p:txBody>
+      </p:sp>
+      <p:sp>
+        <p:nvSpPr>
+          <p:cNvPr id="19" name="TextBox 18"/>
+          <p:cNvSpPr txBox="1"/>
+          <p:nvPr/>
+        </p:nvSpPr>
+        <p:spPr>
+          <a:xfrm>
+            <a:off x="3509010" y="3822192"/>
+            <a:ext cx="2274570" cy="457200"/>
           </a:xfrm>
           <a:prstGeom prst="rect">
             <a:avLst/>
@@ -22191,7 +23743,7 @@
               </a:spcAft>
             </a:pPr>
             <a:r>
-              <a:rPr sz="1300" b="0">
+              <a:rPr sz="1100" b="0">
                 <a:solidFill>
                   <a:srgbClr val="64748B"/>
                 </a:solidFill>
@@ -22199,23 +23751,116 @@
                 <a:ea typeface="NanumGothic"/>
                 <a:cs typeface="NanumGothic"/>
               </a:rPr>
-              <a:t>문법·세상 지식·추론 패턴·문체까지 광범위하게</a:t>
-            </a:r>
-          </a:p>
-        </p:txBody>
-      </p:sp>
-      <p:sp>
-        <p:nvSpPr>
-          <p:cNvPr id="15" name="Oval 14"/>
+              <a:t>다음 토큰의 확률 분포 계산</a:t>
+            </a:r>
+          </a:p>
+        </p:txBody>
+      </p:sp>
+      <p:sp>
+        <p:nvSpPr>
+          <p:cNvPr id="20" name="TextBox 19"/>
+          <p:cNvSpPr txBox="1"/>
+          <p:nvPr/>
+        </p:nvSpPr>
+        <p:spPr>
+          <a:xfrm>
+            <a:off x="5966460" y="3154680"/>
+            <a:ext cx="274320" cy="548640"/>
+          </a:xfrm>
+          <a:prstGeom prst="rect">
+            <a:avLst/>
+          </a:prstGeom>
+          <a:noFill/>
+        </p:spPr>
+        <p:txBody>
+          <a:bodyPr wrap="square" anchor="ctr" lIns="0" rIns="0" tIns="0" bIns="0">
+            <a:spAutoFit/>
+          </a:bodyPr>
+          <a:lstStyle/>
+          <a:p>
+            <a:pPr algn="ctr">
+              <a:lnSpc>
+                <a:spcPct val="100000"/>
+              </a:lnSpc>
+              <a:spcBef>
+                <a:spcPts val="0"/>
+              </a:spcBef>
+              <a:spcAft>
+                <a:spcPts val="600"/>
+              </a:spcAft>
+            </a:pPr>
+            <a:r>
+              <a:rPr sz="2200" b="1">
+                <a:solidFill>
+                  <a:srgbClr val="6366F1"/>
+                </a:solidFill>
+                <a:latin typeface="NanumSquare"/>
+                <a:ea typeface="NanumSquare"/>
+                <a:cs typeface="NanumSquare"/>
+              </a:rPr>
+              <a:t>→</a:t>
+            </a:r>
+          </a:p>
+        </p:txBody>
+      </p:sp>
+      <p:sp>
+        <p:nvSpPr>
+          <p:cNvPr id="21" name="Rounded Rectangle 20"/>
           <p:cNvSpPr/>
           <p:nvPr/>
         </p:nvSpPr>
         <p:spPr>
           <a:xfrm>
-            <a:off x="548640" y="3648456"/>
-            <a:ext cx="146304" cy="146304"/>
-          </a:xfrm>
-          <a:prstGeom prst="ellipse">
+            <a:off x="6240780" y="2651760"/>
+            <a:ext cx="2548890" cy="1737360"/>
+          </a:xfrm>
+          <a:prstGeom prst="roundRect">
+            <a:avLst/>
+          </a:prstGeom>
+          <a:solidFill>
+            <a:srgbClr val="F8FAFC"/>
+          </a:solidFill>
+          <a:ln w="12700">
+            <a:solidFill>
+              <a:srgbClr val="E2E8F0"/>
+            </a:solidFill>
+          </a:ln>
+          <a:effectLst/>
+        </p:spPr>
+        <p:style>
+          <a:lnRef idx="1">
+            <a:schemeClr val="accent1"/>
+          </a:lnRef>
+          <a:fillRef idx="3">
+            <a:schemeClr val="accent1"/>
+          </a:fillRef>
+          <a:effectRef idx="2">
+            <a:schemeClr val="accent1"/>
+          </a:effectRef>
+          <a:fontRef idx="minor">
+            <a:schemeClr val="lt1"/>
+          </a:fontRef>
+        </p:style>
+        <p:txBody>
+          <a:bodyPr rtlCol="0" anchor="ctr"/>
+          <a:lstStyle/>
+          <a:p>
+            <a:pPr algn="ctr"/>
+          </a:p>
+        </p:txBody>
+      </p:sp>
+      <p:sp>
+        <p:nvSpPr>
+          <p:cNvPr id="22" name="Rectangle 21"/>
+          <p:cNvSpPr/>
+          <p:nvPr/>
+        </p:nvSpPr>
+        <p:spPr>
+          <a:xfrm>
+            <a:off x="6240780" y="2651760"/>
+            <a:ext cx="2548890" cy="109728"/>
+          </a:xfrm>
+          <a:prstGeom prst="rect">
             <a:avLst/>
           </a:prstGeom>
           <a:solidFill>
@@ -22250,14 +23895,14 @@
       </p:sp>
       <p:sp>
         <p:nvSpPr>
-          <p:cNvPr id="16" name="TextBox 15"/>
-          <p:cNvSpPr txBox="1"/>
-          <p:nvPr/>
-        </p:nvSpPr>
-        <p:spPr>
-          <a:xfrm>
-            <a:off x="868680" y="3566160"/>
-            <a:ext cx="10607040" cy="457200"/>
+          <p:cNvPr id="23" name="TextBox 22"/>
+          <p:cNvSpPr txBox="1"/>
+          <p:nvPr/>
+        </p:nvSpPr>
+        <p:spPr>
+          <a:xfrm>
+            <a:off x="6377940" y="2944368"/>
+            <a:ext cx="2274570" cy="365760"/>
           </a:xfrm>
           <a:prstGeom prst="rect">
             <a:avLst/>
@@ -22282,7 +23927,54 @@
               </a:spcAft>
             </a:pPr>
             <a:r>
-              <a:rPr sz="1600" b="1">
+              <a:rPr sz="1300" b="1">
+                <a:solidFill>
+                  <a:srgbClr val="6366F1"/>
+                </a:solidFill>
+                <a:latin typeface="NanumSquare"/>
+                <a:ea typeface="NanumSquare"/>
+                <a:cs typeface="NanumSquare"/>
+              </a:rPr>
+              <a:t>3</a:t>
+            </a:r>
+          </a:p>
+        </p:txBody>
+      </p:sp>
+      <p:sp>
+        <p:nvSpPr>
+          <p:cNvPr id="24" name="TextBox 23"/>
+          <p:cNvSpPr txBox="1"/>
+          <p:nvPr/>
+        </p:nvSpPr>
+        <p:spPr>
+          <a:xfrm>
+            <a:off x="6377940" y="3310128"/>
+            <a:ext cx="2274570" cy="548640"/>
+          </a:xfrm>
+          <a:prstGeom prst="rect">
+            <a:avLst/>
+          </a:prstGeom>
+          <a:noFill/>
+        </p:spPr>
+        <p:txBody>
+          <a:bodyPr wrap="square" anchor="t" lIns="0" rIns="0" tIns="0" bIns="0">
+            <a:spAutoFit/>
+          </a:bodyPr>
+          <a:lstStyle/>
+          <a:p>
+            <a:pPr algn="l">
+              <a:lnSpc>
+                <a:spcPct val="100000"/>
+              </a:lnSpc>
+              <a:spcBef>
+                <a:spcPts val="0"/>
+              </a:spcBef>
+              <a:spcAft>
+                <a:spcPts val="600"/>
+              </a:spcAft>
+            </a:pPr>
+            <a:r>
+              <a:rPr sz="1500" b="1">
                 <a:solidFill>
                   <a:srgbClr val="0F172A"/>
                 </a:solidFill>
@@ -22290,21 +23982,21 @@
                 <a:ea typeface="NanumGothic"/>
                 <a:cs typeface="NanumGothic"/>
               </a:rPr>
-              <a:t>한계의 씨앗</a:t>
-            </a:r>
-          </a:p>
-        </p:txBody>
-      </p:sp>
-      <p:sp>
-        <p:nvSpPr>
-          <p:cNvPr id="17" name="TextBox 16"/>
-          <p:cNvSpPr txBox="1"/>
-          <p:nvPr/>
-        </p:nvSpPr>
-        <p:spPr>
-          <a:xfrm>
-            <a:off x="868680" y="3950208"/>
-            <a:ext cx="10607040" cy="457200"/>
+              <a:t>샘플링</a:t>
+            </a:r>
+          </a:p>
+        </p:txBody>
+      </p:sp>
+      <p:sp>
+        <p:nvSpPr>
+          <p:cNvPr id="25" name="TextBox 24"/>
+          <p:cNvSpPr txBox="1"/>
+          <p:nvPr/>
+        </p:nvSpPr>
+        <p:spPr>
+          <a:xfrm>
+            <a:off x="6377940" y="3822192"/>
+            <a:ext cx="2274570" cy="457200"/>
           </a:xfrm>
           <a:prstGeom prst="rect">
             <a:avLst/>
@@ -22329,7 +24021,7 @@
               </a:spcAft>
             </a:pPr>
             <a:r>
-              <a:rPr sz="1300" b="0">
+              <a:rPr sz="1100" b="0">
                 <a:solidFill>
                   <a:srgbClr val="64748B"/>
                 </a:solidFill>
@@ -22337,20 +24029,298 @@
                 <a:ea typeface="NanumGothic"/>
                 <a:cs typeface="NanumGothic"/>
               </a:rPr>
-              <a:t>학습 시점 이후 정보는 모름 · 데이터 편향을 흡수</a:t>
-            </a:r>
-          </a:p>
-        </p:txBody>
-      </p:sp>
-      <p:sp>
-        <p:nvSpPr>
-          <p:cNvPr id="18" name="Rounded Rectangle 17"/>
+              <a:t>확률에 따라 토큰 1개 선택</a:t>
+            </a:r>
+          </a:p>
+        </p:txBody>
+      </p:sp>
+      <p:sp>
+        <p:nvSpPr>
+          <p:cNvPr id="26" name="TextBox 25"/>
+          <p:cNvSpPr txBox="1"/>
+          <p:nvPr/>
+        </p:nvSpPr>
+        <p:spPr>
+          <a:xfrm>
+            <a:off x="8835390" y="3154680"/>
+            <a:ext cx="274320" cy="548640"/>
+          </a:xfrm>
+          <a:prstGeom prst="rect">
+            <a:avLst/>
+          </a:prstGeom>
+          <a:noFill/>
+        </p:spPr>
+        <p:txBody>
+          <a:bodyPr wrap="square" anchor="ctr" lIns="0" rIns="0" tIns="0" bIns="0">
+            <a:spAutoFit/>
+          </a:bodyPr>
+          <a:lstStyle/>
+          <a:p>
+            <a:pPr algn="ctr">
+              <a:lnSpc>
+                <a:spcPct val="100000"/>
+              </a:lnSpc>
+              <a:spcBef>
+                <a:spcPts val="0"/>
+              </a:spcBef>
+              <a:spcAft>
+                <a:spcPts val="600"/>
+              </a:spcAft>
+            </a:pPr>
+            <a:r>
+              <a:rPr sz="2200" b="1">
+                <a:solidFill>
+                  <a:srgbClr val="6366F1"/>
+                </a:solidFill>
+                <a:latin typeface="NanumSquare"/>
+                <a:ea typeface="NanumSquare"/>
+                <a:cs typeface="NanumSquare"/>
+              </a:rPr>
+              <a:t>→</a:t>
+            </a:r>
+          </a:p>
+        </p:txBody>
+      </p:sp>
+      <p:sp>
+        <p:nvSpPr>
+          <p:cNvPr id="27" name="Rounded Rectangle 26"/>
           <p:cNvSpPr/>
           <p:nvPr/>
         </p:nvSpPr>
         <p:spPr>
           <a:xfrm>
-            <a:off x="502920" y="5532120"/>
+            <a:off x="9109710" y="2651760"/>
+            <a:ext cx="2548890" cy="1737360"/>
+          </a:xfrm>
+          <a:prstGeom prst="roundRect">
+            <a:avLst/>
+          </a:prstGeom>
+          <a:solidFill>
+            <a:srgbClr val="F8FAFC"/>
+          </a:solidFill>
+          <a:ln w="12700">
+            <a:solidFill>
+              <a:srgbClr val="E2E8F0"/>
+            </a:solidFill>
+          </a:ln>
+          <a:effectLst/>
+        </p:spPr>
+        <p:style>
+          <a:lnRef idx="1">
+            <a:schemeClr val="accent1"/>
+          </a:lnRef>
+          <a:fillRef idx="3">
+            <a:schemeClr val="accent1"/>
+          </a:fillRef>
+          <a:effectRef idx="2">
+            <a:schemeClr val="accent1"/>
+          </a:effectRef>
+          <a:fontRef idx="minor">
+            <a:schemeClr val="lt1"/>
+          </a:fontRef>
+        </p:style>
+        <p:txBody>
+          <a:bodyPr rtlCol="0" anchor="ctr"/>
+          <a:lstStyle/>
+          <a:p>
+            <a:pPr algn="ctr"/>
+          </a:p>
+        </p:txBody>
+      </p:sp>
+      <p:sp>
+        <p:nvSpPr>
+          <p:cNvPr id="28" name="Rectangle 27"/>
+          <p:cNvSpPr/>
+          <p:nvPr/>
+        </p:nvSpPr>
+        <p:spPr>
+          <a:xfrm>
+            <a:off x="9109710" y="2651760"/>
+            <a:ext cx="2548890" cy="109728"/>
+          </a:xfrm>
+          <a:prstGeom prst="rect">
+            <a:avLst/>
+          </a:prstGeom>
+          <a:solidFill>
+            <a:srgbClr val="6366F1"/>
+          </a:solidFill>
+          <a:ln>
+            <a:noFill/>
+          </a:ln>
+          <a:effectLst/>
+        </p:spPr>
+        <p:style>
+          <a:lnRef idx="1">
+            <a:schemeClr val="accent1"/>
+          </a:lnRef>
+          <a:fillRef idx="3">
+            <a:schemeClr val="accent1"/>
+          </a:fillRef>
+          <a:effectRef idx="2">
+            <a:schemeClr val="accent1"/>
+          </a:effectRef>
+          <a:fontRef idx="minor">
+            <a:schemeClr val="lt1"/>
+          </a:fontRef>
+        </p:style>
+        <p:txBody>
+          <a:bodyPr rtlCol="0" anchor="ctr"/>
+          <a:lstStyle/>
+          <a:p>
+            <a:pPr algn="ctr"/>
+          </a:p>
+        </p:txBody>
+      </p:sp>
+      <p:sp>
+        <p:nvSpPr>
+          <p:cNvPr id="29" name="TextBox 28"/>
+          <p:cNvSpPr txBox="1"/>
+          <p:nvPr/>
+        </p:nvSpPr>
+        <p:spPr>
+          <a:xfrm>
+            <a:off x="9246870" y="2944368"/>
+            <a:ext cx="2274570" cy="365760"/>
+          </a:xfrm>
+          <a:prstGeom prst="rect">
+            <a:avLst/>
+          </a:prstGeom>
+          <a:noFill/>
+        </p:spPr>
+        <p:txBody>
+          <a:bodyPr wrap="square" anchor="t" lIns="0" rIns="0" tIns="0" bIns="0">
+            <a:spAutoFit/>
+          </a:bodyPr>
+          <a:lstStyle/>
+          <a:p>
+            <a:pPr algn="l">
+              <a:lnSpc>
+                <a:spcPct val="100000"/>
+              </a:lnSpc>
+              <a:spcBef>
+                <a:spcPts val="0"/>
+              </a:spcBef>
+              <a:spcAft>
+                <a:spcPts val="600"/>
+              </a:spcAft>
+            </a:pPr>
+            <a:r>
+              <a:rPr sz="1300" b="1">
+                <a:solidFill>
+                  <a:srgbClr val="6366F1"/>
+                </a:solidFill>
+                <a:latin typeface="NanumSquare"/>
+                <a:ea typeface="NanumSquare"/>
+                <a:cs typeface="NanumSquare"/>
+              </a:rPr>
+              <a:t>4</a:t>
+            </a:r>
+          </a:p>
+        </p:txBody>
+      </p:sp>
+      <p:sp>
+        <p:nvSpPr>
+          <p:cNvPr id="30" name="TextBox 29"/>
+          <p:cNvSpPr txBox="1"/>
+          <p:nvPr/>
+        </p:nvSpPr>
+        <p:spPr>
+          <a:xfrm>
+            <a:off x="9246870" y="3310128"/>
+            <a:ext cx="2274570" cy="548640"/>
+          </a:xfrm>
+          <a:prstGeom prst="rect">
+            <a:avLst/>
+          </a:prstGeom>
+          <a:noFill/>
+        </p:spPr>
+        <p:txBody>
+          <a:bodyPr wrap="square" anchor="t" lIns="0" rIns="0" tIns="0" bIns="0">
+            <a:spAutoFit/>
+          </a:bodyPr>
+          <a:lstStyle/>
+          <a:p>
+            <a:pPr algn="l">
+              <a:lnSpc>
+                <a:spcPct val="100000"/>
+              </a:lnSpc>
+              <a:spcBef>
+                <a:spcPts val="0"/>
+              </a:spcBef>
+              <a:spcAft>
+                <a:spcPts val="600"/>
+              </a:spcAft>
+            </a:pPr>
+            <a:r>
+              <a:rPr sz="1500" b="1">
+                <a:solidFill>
+                  <a:srgbClr val="0F172A"/>
+                </a:solidFill>
+                <a:latin typeface="NanumGothic"/>
+                <a:ea typeface="NanumGothic"/>
+                <a:cs typeface="NanumGothic"/>
+              </a:rPr>
+              <a:t>반복</a:t>
+            </a:r>
+          </a:p>
+        </p:txBody>
+      </p:sp>
+      <p:sp>
+        <p:nvSpPr>
+          <p:cNvPr id="31" name="TextBox 30"/>
+          <p:cNvSpPr txBox="1"/>
+          <p:nvPr/>
+        </p:nvSpPr>
+        <p:spPr>
+          <a:xfrm>
+            <a:off x="9246870" y="3822192"/>
+            <a:ext cx="2274570" cy="457200"/>
+          </a:xfrm>
+          <a:prstGeom prst="rect">
+            <a:avLst/>
+          </a:prstGeom>
+          <a:noFill/>
+        </p:spPr>
+        <p:txBody>
+          <a:bodyPr wrap="square" anchor="t" lIns="0" rIns="0" tIns="0" bIns="0">
+            <a:spAutoFit/>
+          </a:bodyPr>
+          <a:lstStyle/>
+          <a:p>
+            <a:pPr algn="l">
+              <a:lnSpc>
+                <a:spcPct val="100000"/>
+              </a:lnSpc>
+              <a:spcBef>
+                <a:spcPts val="0"/>
+              </a:spcBef>
+              <a:spcAft>
+                <a:spcPts val="600"/>
+              </a:spcAft>
+            </a:pPr>
+            <a:r>
+              <a:rPr sz="1100" b="0">
+                <a:solidFill>
+                  <a:srgbClr val="64748B"/>
+                </a:solidFill>
+                <a:latin typeface="NanumGothic"/>
+                <a:ea typeface="NanumGothic"/>
+                <a:cs typeface="NanumGothic"/>
+              </a:rPr>
+              <a:t>붙이고 다시 예측 — 끝까지</a:t>
+            </a:r>
+          </a:p>
+        </p:txBody>
+      </p:sp>
+      <p:sp>
+        <p:nvSpPr>
+          <p:cNvPr id="32" name="Rounded Rectangle 31"/>
+          <p:cNvSpPr/>
+          <p:nvPr/>
+        </p:nvSpPr>
+        <p:spPr>
+          <a:xfrm>
+            <a:off x="502920" y="5029200"/>
             <a:ext cx="11155680" cy="658368"/>
           </a:xfrm>
           <a:prstGeom prst="roundRect">
@@ -22390,13 +24360,13 @@
       </p:sp>
       <p:sp>
         <p:nvSpPr>
-          <p:cNvPr id="19" name="TextBox 18"/>
-          <p:cNvSpPr txBox="1"/>
-          <p:nvPr/>
-        </p:nvSpPr>
-        <p:spPr>
-          <a:xfrm>
-            <a:off x="777240" y="5532120"/>
+          <p:cNvPr id="33" name="TextBox 32"/>
+          <p:cNvSpPr txBox="1"/>
+          <p:nvPr/>
+        </p:nvSpPr>
+        <p:spPr>
+          <a:xfrm>
+            <a:off x="777240" y="5029200"/>
             <a:ext cx="10607040" cy="658368"/>
           </a:xfrm>
           <a:prstGeom prst="rect">
@@ -22441,7 +24411,7 @@
                 <a:ea typeface="NanumGothic"/>
                 <a:cs typeface="NanumGothic"/>
               </a:rPr>
-              <a:t>비유: 거대한 빈칸 채우기를 수십억 번 — 그 과정에서 지식이 '딸려' 학습된다</a:t>
+              <a:t>한 번에 한 토큰씩, 반복해서 생성한다 (autoregressive)</a:t>
             </a:r>
           </a:p>
         </p:txBody>
@@ -22594,7 +24564,7 @@
                 <a:ea typeface="NanumGothic"/>
                 <a:cs typeface="NanumGothic"/>
               </a:rPr>
-              <a:t>학습 ②</a:t>
+              <a:t>학습 ①</a:t>
             </a:r>
           </a:p>
         </p:txBody>
@@ -22641,7 +24611,7 @@
                 <a:ea typeface="NanumSquare"/>
                 <a:cs typeface="NanumSquare"/>
               </a:rPr>
-              <a:t>정렬 (Alignment)</a:t>
+              <a:t>사전학습 (Pre-training)</a:t>
             </a:r>
           </a:p>
         </p:txBody>
@@ -22870,7 +24840,7 @@
                 <a:ea typeface="NanumGothic"/>
                 <a:cs typeface="NanumGothic"/>
               </a:rPr>
-              <a:t>사전학습만으론 부족</a:t>
+              <a:t>방대한 텍스트로 자기지도 학습</a:t>
             </a:r>
           </a:p>
         </p:txBody>
@@ -22917,7 +24887,7 @@
                 <a:ea typeface="NanumGothic"/>
                 <a:cs typeface="NanumGothic"/>
               </a:rPr>
-              <a:t>'유용하고·안전하게·지시를 따르도록' 추가로 다듬음</a:t>
+              <a:t>웹·책·코드에서 '다음 토큰 맞히기'를 반복</a:t>
             </a:r>
           </a:p>
         </p:txBody>
@@ -23008,7 +24978,7 @@
                 <a:ea typeface="NanumGothic"/>
                 <a:cs typeface="NanumGothic"/>
               </a:rPr>
-              <a:t>instruction tuning</a:t>
+              <a:t>무엇을 배우나</a:t>
             </a:r>
           </a:p>
         </p:txBody>
@@ -23055,7 +25025,7 @@
                 <a:ea typeface="NanumGothic"/>
                 <a:cs typeface="NanumGothic"/>
               </a:rPr>
-              <a:t>지시–응답 예시로 '시키는 대로' 하도록 미세조정</a:t>
+              <a:t>문법·세상 지식·추론 패턴·문체까지 광범위하게</a:t>
             </a:r>
           </a:p>
         </p:txBody>
@@ -23146,7 +25116,7 @@
                 <a:ea typeface="NanumGothic"/>
                 <a:cs typeface="NanumGothic"/>
               </a:rPr>
-              <a:t>인간 피드백 (RLHF 등)</a:t>
+              <a:t>한계의 씨앗</a:t>
             </a:r>
           </a:p>
         </p:txBody>
@@ -23193,7 +25163,7 @@
                 <a:ea typeface="NanumGothic"/>
                 <a:cs typeface="NanumGothic"/>
               </a:rPr>
-              <a:t>사람이 선호하는 답을 강화 — 도움되고 해롭지 않게</a:t>
+              <a:t>학습 시점 이후 정보는 모름 · 데이터 편향을 흡수</a:t>
             </a:r>
           </a:p>
         </p:txBody>
@@ -23297,7 +25267,7 @@
                 <a:ea typeface="NanumGothic"/>
                 <a:cs typeface="NanumGothic"/>
               </a:rPr>
-              <a:t>사례: InstructGPT(2022) — 정렬한 1.3B 답을 175B GPT-3보다 사람이 선호(~71%)</a:t>
+              <a:t>비유: 거대한 빈칸 채우기를 수십억 번 — 그 과정에서 지식이 '딸려' 학습된다</a:t>
             </a:r>
           </a:p>
         </p:txBody>

--- a/slides/day1.pptx
+++ b/slides/day1.pptx
@@ -3634,6 +3634,64 @@
           </a:p>
         </p:txBody>
       </p:sp>
+      <p:sp>
+        <p:nvSpPr>
+          <p:cNvPr id="13" name="TextBox 12"/>
+          <p:cNvSpPr txBox="1"/>
+          <p:nvPr/>
+        </p:nvSpPr>
+        <p:spPr>
+          <a:xfrm>
+            <a:off x="8988552" y="6419088"/>
+            <a:ext cx="2697480" cy="365760"/>
+          </a:xfrm>
+          <a:prstGeom prst="rect">
+            <a:avLst/>
+          </a:prstGeom>
+          <a:noFill/>
+        </p:spPr>
+        <p:txBody>
+          <a:bodyPr wrap="square" anchor="ctr" lIns="0" rIns="0" tIns="0" bIns="0">
+            <a:spAutoFit/>
+          </a:bodyPr>
+          <a:lstStyle/>
+          <a:p>
+            <a:pPr algn="r">
+              <a:lnSpc>
+                <a:spcPct val="100000"/>
+              </a:lnSpc>
+              <a:spcBef>
+                <a:spcPts val="0"/>
+              </a:spcBef>
+              <a:spcAft>
+                <a:spcPts val="600"/>
+              </a:spcAft>
+            </a:pPr>
+            <a:r>
+              <a:rPr sz="900" b="1">
+                <a:solidFill>
+                  <a:srgbClr val="6366F1"/>
+                </a:solidFill>
+                <a:latin typeface="NanumGothic"/>
+                <a:ea typeface="NanumGothic"/>
+                <a:cs typeface="NanumGothic"/>
+              </a:rPr>
+              <a:t>Day 1 · 월</a:t>
+            </a:r>
+            <a:r>
+              <a:rPr sz="900" b="1">
+                <a:solidFill>
+                  <a:srgbClr val="CBD5E1"/>
+                </a:solidFill>
+                <a:latin typeface="NanumGothic"/>
+                <a:ea typeface="NanumGothic"/>
+                <a:cs typeface="NanumGothic"/>
+              </a:rPr>
+              <a:t>   ·   1 / 42</a:t>
+            </a:r>
+          </a:p>
+        </p:txBody>
+      </p:sp>
     </p:spTree>
   </p:cSld>
   <p:clrMapOvr>
@@ -3927,54 +3985,7 @@
       </p:sp>
       <p:sp>
         <p:nvSpPr>
-          <p:cNvPr id="8" name="TextBox 7"/>
-          <p:cNvSpPr txBox="1"/>
-          <p:nvPr/>
-        </p:nvSpPr>
-        <p:spPr>
-          <a:xfrm>
-            <a:off x="10241280" y="6419088"/>
-            <a:ext cx="1463040" cy="365760"/>
-          </a:xfrm>
-          <a:prstGeom prst="rect">
-            <a:avLst/>
-          </a:prstGeom>
-          <a:noFill/>
-        </p:spPr>
-        <p:txBody>
-          <a:bodyPr wrap="square" anchor="ctr" lIns="0" rIns="0" tIns="0" bIns="0">
-            <a:spAutoFit/>
-          </a:bodyPr>
-          <a:lstStyle/>
-          <a:p>
-            <a:pPr algn="r">
-              <a:lnSpc>
-                <a:spcPct val="100000"/>
-              </a:lnSpc>
-              <a:spcBef>
-                <a:spcPts val="0"/>
-              </a:spcBef>
-              <a:spcAft>
-                <a:spcPts val="600"/>
-              </a:spcAft>
-            </a:pPr>
-            <a:r>
-              <a:rPr sz="900" b="1">
-                <a:solidFill>
-                  <a:srgbClr val="6366F1"/>
-                </a:solidFill>
-                <a:latin typeface="NanumGothic"/>
-                <a:ea typeface="NanumGothic"/>
-                <a:cs typeface="NanumGothic"/>
-              </a:rPr>
-              <a:t>Day 1 · 월</a:t>
-            </a:r>
-          </a:p>
-        </p:txBody>
-      </p:sp>
-      <p:sp>
-        <p:nvSpPr>
-          <p:cNvPr id="9" name="Oval 8"/>
+          <p:cNvPr id="8" name="Oval 7"/>
           <p:cNvSpPr/>
           <p:nvPr/>
         </p:nvSpPr>
@@ -4018,7 +4029,7 @@
       </p:sp>
       <p:sp>
         <p:nvSpPr>
-          <p:cNvPr id="10" name="TextBox 9"/>
+          <p:cNvPr id="9" name="TextBox 8"/>
           <p:cNvSpPr txBox="1"/>
           <p:nvPr/>
         </p:nvSpPr>
@@ -4065,7 +4076,7 @@
       </p:sp>
       <p:sp>
         <p:nvSpPr>
-          <p:cNvPr id="11" name="TextBox 10"/>
+          <p:cNvPr id="10" name="TextBox 9"/>
           <p:cNvSpPr txBox="1"/>
           <p:nvPr/>
         </p:nvSpPr>
@@ -4112,7 +4123,7 @@
       </p:sp>
       <p:sp>
         <p:nvSpPr>
-          <p:cNvPr id="12" name="Oval 11"/>
+          <p:cNvPr id="11" name="Oval 10"/>
           <p:cNvSpPr/>
           <p:nvPr/>
         </p:nvSpPr>
@@ -4156,7 +4167,7 @@
       </p:sp>
       <p:sp>
         <p:nvSpPr>
-          <p:cNvPr id="13" name="TextBox 12"/>
+          <p:cNvPr id="12" name="TextBox 11"/>
           <p:cNvSpPr txBox="1"/>
           <p:nvPr/>
         </p:nvSpPr>
@@ -4203,7 +4214,7 @@
       </p:sp>
       <p:sp>
         <p:nvSpPr>
-          <p:cNvPr id="14" name="TextBox 13"/>
+          <p:cNvPr id="13" name="TextBox 12"/>
           <p:cNvSpPr txBox="1"/>
           <p:nvPr/>
         </p:nvSpPr>
@@ -4250,7 +4261,7 @@
       </p:sp>
       <p:sp>
         <p:nvSpPr>
-          <p:cNvPr id="15" name="Oval 14"/>
+          <p:cNvPr id="14" name="Oval 13"/>
           <p:cNvSpPr/>
           <p:nvPr/>
         </p:nvSpPr>
@@ -4294,7 +4305,7 @@
       </p:sp>
       <p:sp>
         <p:nvSpPr>
-          <p:cNvPr id="16" name="TextBox 15"/>
+          <p:cNvPr id="15" name="TextBox 14"/>
           <p:cNvSpPr txBox="1"/>
           <p:nvPr/>
         </p:nvSpPr>
@@ -4341,7 +4352,7 @@
       </p:sp>
       <p:sp>
         <p:nvSpPr>
-          <p:cNvPr id="17" name="TextBox 16"/>
+          <p:cNvPr id="16" name="TextBox 15"/>
           <p:cNvSpPr txBox="1"/>
           <p:nvPr/>
         </p:nvSpPr>
@@ -4388,7 +4399,7 @@
       </p:sp>
       <p:sp>
         <p:nvSpPr>
-          <p:cNvPr id="18" name="Rounded Rectangle 17"/>
+          <p:cNvPr id="17" name="Rounded Rectangle 16"/>
           <p:cNvSpPr/>
           <p:nvPr/>
         </p:nvSpPr>
@@ -4434,7 +4445,7 @@
       </p:sp>
       <p:sp>
         <p:nvSpPr>
-          <p:cNvPr id="19" name="TextBox 18"/>
+          <p:cNvPr id="18" name="TextBox 17"/>
           <p:cNvSpPr txBox="1"/>
           <p:nvPr/>
         </p:nvSpPr>
@@ -4486,6 +4497,64 @@
                 <a:cs typeface="NanumGothic"/>
               </a:rPr>
               <a:t>능력(사전학습)과 말귀(정렬)가 합쳐진 순간</a:t>
+            </a:r>
+          </a:p>
+        </p:txBody>
+      </p:sp>
+      <p:sp>
+        <p:nvSpPr>
+          <p:cNvPr id="19" name="TextBox 18"/>
+          <p:cNvSpPr txBox="1"/>
+          <p:nvPr/>
+        </p:nvSpPr>
+        <p:spPr>
+          <a:xfrm>
+            <a:off x="8988552" y="6419088"/>
+            <a:ext cx="2697480" cy="365760"/>
+          </a:xfrm>
+          <a:prstGeom prst="rect">
+            <a:avLst/>
+          </a:prstGeom>
+          <a:noFill/>
+        </p:spPr>
+        <p:txBody>
+          <a:bodyPr wrap="square" anchor="ctr" lIns="0" rIns="0" tIns="0" bIns="0">
+            <a:spAutoFit/>
+          </a:bodyPr>
+          <a:lstStyle/>
+          <a:p>
+            <a:pPr algn="r">
+              <a:lnSpc>
+                <a:spcPct val="100000"/>
+              </a:lnSpc>
+              <a:spcBef>
+                <a:spcPts val="0"/>
+              </a:spcBef>
+              <a:spcAft>
+                <a:spcPts val="600"/>
+              </a:spcAft>
+            </a:pPr>
+            <a:r>
+              <a:rPr sz="900" b="1">
+                <a:solidFill>
+                  <a:srgbClr val="6366F1"/>
+                </a:solidFill>
+                <a:latin typeface="NanumGothic"/>
+                <a:ea typeface="NanumGothic"/>
+                <a:cs typeface="NanumGothic"/>
+              </a:rPr>
+              <a:t>Day 1 · 월</a:t>
+            </a:r>
+            <a:r>
+              <a:rPr sz="900" b="1">
+                <a:solidFill>
+                  <a:srgbClr val="64748B"/>
+                </a:solidFill>
+                <a:latin typeface="NanumGothic"/>
+                <a:ea typeface="NanumGothic"/>
+                <a:cs typeface="NanumGothic"/>
+              </a:rPr>
+              <a:t>   ·   10 / 42</a:t>
             </a:r>
           </a:p>
         </p:txBody>
@@ -4783,54 +4852,7 @@
       </p:sp>
       <p:sp>
         <p:nvSpPr>
-          <p:cNvPr id="8" name="TextBox 7"/>
-          <p:cNvSpPr txBox="1"/>
-          <p:nvPr/>
-        </p:nvSpPr>
-        <p:spPr>
-          <a:xfrm>
-            <a:off x="10241280" y="6419088"/>
-            <a:ext cx="1463040" cy="365760"/>
-          </a:xfrm>
-          <a:prstGeom prst="rect">
-            <a:avLst/>
-          </a:prstGeom>
-          <a:noFill/>
-        </p:spPr>
-        <p:txBody>
-          <a:bodyPr wrap="square" anchor="ctr" lIns="0" rIns="0" tIns="0" bIns="0">
-            <a:spAutoFit/>
-          </a:bodyPr>
-          <a:lstStyle/>
-          <a:p>
-            <a:pPr algn="r">
-              <a:lnSpc>
-                <a:spcPct val="100000"/>
-              </a:lnSpc>
-              <a:spcBef>
-                <a:spcPts val="0"/>
-              </a:spcBef>
-              <a:spcAft>
-                <a:spcPts val="600"/>
-              </a:spcAft>
-            </a:pPr>
-            <a:r>
-              <a:rPr sz="900" b="1">
-                <a:solidFill>
-                  <a:srgbClr val="6366F1"/>
-                </a:solidFill>
-                <a:latin typeface="NanumGothic"/>
-                <a:ea typeface="NanumGothic"/>
-                <a:cs typeface="NanumGothic"/>
-              </a:rPr>
-              <a:t>Day 1 · 월</a:t>
-            </a:r>
-          </a:p>
-        </p:txBody>
-      </p:sp>
-      <p:sp>
-        <p:nvSpPr>
-          <p:cNvPr id="9" name="Oval 8"/>
+          <p:cNvPr id="8" name="Oval 7"/>
           <p:cNvSpPr/>
           <p:nvPr/>
         </p:nvSpPr>
@@ -4874,7 +4896,7 @@
       </p:sp>
       <p:sp>
         <p:nvSpPr>
-          <p:cNvPr id="10" name="TextBox 9"/>
+          <p:cNvPr id="9" name="TextBox 8"/>
           <p:cNvSpPr txBox="1"/>
           <p:nvPr/>
         </p:nvSpPr>
@@ -4921,7 +4943,7 @@
       </p:sp>
       <p:sp>
         <p:nvSpPr>
-          <p:cNvPr id="11" name="TextBox 10"/>
+          <p:cNvPr id="10" name="TextBox 9"/>
           <p:cNvSpPr txBox="1"/>
           <p:nvPr/>
         </p:nvSpPr>
@@ -4968,7 +4990,7 @@
       </p:sp>
       <p:sp>
         <p:nvSpPr>
-          <p:cNvPr id="12" name="Oval 11"/>
+          <p:cNvPr id="11" name="Oval 10"/>
           <p:cNvSpPr/>
           <p:nvPr/>
         </p:nvSpPr>
@@ -5012,7 +5034,7 @@
       </p:sp>
       <p:sp>
         <p:nvSpPr>
-          <p:cNvPr id="13" name="TextBox 12"/>
+          <p:cNvPr id="12" name="TextBox 11"/>
           <p:cNvSpPr txBox="1"/>
           <p:nvPr/>
         </p:nvSpPr>
@@ -5059,7 +5081,7 @@
       </p:sp>
       <p:sp>
         <p:nvSpPr>
-          <p:cNvPr id="14" name="TextBox 13"/>
+          <p:cNvPr id="13" name="TextBox 12"/>
           <p:cNvSpPr txBox="1"/>
           <p:nvPr/>
         </p:nvSpPr>
@@ -5106,7 +5128,7 @@
       </p:sp>
       <p:sp>
         <p:nvSpPr>
-          <p:cNvPr id="15" name="Oval 14"/>
+          <p:cNvPr id="14" name="Oval 13"/>
           <p:cNvSpPr/>
           <p:nvPr/>
         </p:nvSpPr>
@@ -5150,7 +5172,7 @@
       </p:sp>
       <p:sp>
         <p:nvSpPr>
-          <p:cNvPr id="16" name="TextBox 15"/>
+          <p:cNvPr id="15" name="TextBox 14"/>
           <p:cNvSpPr txBox="1"/>
           <p:nvPr/>
         </p:nvSpPr>
@@ -5197,7 +5219,7 @@
       </p:sp>
       <p:sp>
         <p:nvSpPr>
-          <p:cNvPr id="17" name="TextBox 16"/>
+          <p:cNvPr id="16" name="TextBox 15"/>
           <p:cNvSpPr txBox="1"/>
           <p:nvPr/>
         </p:nvSpPr>
@@ -5244,7 +5266,7 @@
       </p:sp>
       <p:sp>
         <p:nvSpPr>
-          <p:cNvPr id="18" name="Rounded Rectangle 17"/>
+          <p:cNvPr id="17" name="Rounded Rectangle 16"/>
           <p:cNvSpPr/>
           <p:nvPr/>
         </p:nvSpPr>
@@ -5290,7 +5312,7 @@
       </p:sp>
       <p:sp>
         <p:nvSpPr>
-          <p:cNvPr id="19" name="TextBox 18"/>
+          <p:cNvPr id="18" name="TextBox 17"/>
           <p:cNvSpPr txBox="1"/>
           <p:nvPr/>
         </p:nvSpPr>
@@ -5342,6 +5364,64 @@
                 <a:cs typeface="NanumGothic"/>
               </a:rPr>
               <a:t>오늘 우리가 쓰는 모델들이 여기</a:t>
+            </a:r>
+          </a:p>
+        </p:txBody>
+      </p:sp>
+      <p:sp>
+        <p:nvSpPr>
+          <p:cNvPr id="19" name="TextBox 18"/>
+          <p:cNvSpPr txBox="1"/>
+          <p:nvPr/>
+        </p:nvSpPr>
+        <p:spPr>
+          <a:xfrm>
+            <a:off x="8988552" y="6419088"/>
+            <a:ext cx="2697480" cy="365760"/>
+          </a:xfrm>
+          <a:prstGeom prst="rect">
+            <a:avLst/>
+          </a:prstGeom>
+          <a:noFill/>
+        </p:spPr>
+        <p:txBody>
+          <a:bodyPr wrap="square" anchor="ctr" lIns="0" rIns="0" tIns="0" bIns="0">
+            <a:spAutoFit/>
+          </a:bodyPr>
+          <a:lstStyle/>
+          <a:p>
+            <a:pPr algn="r">
+              <a:lnSpc>
+                <a:spcPct val="100000"/>
+              </a:lnSpc>
+              <a:spcBef>
+                <a:spcPts val="0"/>
+              </a:spcBef>
+              <a:spcAft>
+                <a:spcPts val="600"/>
+              </a:spcAft>
+            </a:pPr>
+            <a:r>
+              <a:rPr sz="900" b="1">
+                <a:solidFill>
+                  <a:srgbClr val="6366F1"/>
+                </a:solidFill>
+                <a:latin typeface="NanumGothic"/>
+                <a:ea typeface="NanumGothic"/>
+                <a:cs typeface="NanumGothic"/>
+              </a:rPr>
+              <a:t>Day 1 · 월</a:t>
+            </a:r>
+            <a:r>
+              <a:rPr sz="900" b="1">
+                <a:solidFill>
+                  <a:srgbClr val="64748B"/>
+                </a:solidFill>
+                <a:latin typeface="NanumGothic"/>
+                <a:ea typeface="NanumGothic"/>
+                <a:cs typeface="NanumGothic"/>
+              </a:rPr>
+              <a:t>   ·   11 / 42</a:t>
             </a:r>
           </a:p>
         </p:txBody>
@@ -5639,54 +5719,7 @@
       </p:sp>
       <p:sp>
         <p:nvSpPr>
-          <p:cNvPr id="8" name="TextBox 7"/>
-          <p:cNvSpPr txBox="1"/>
-          <p:nvPr/>
-        </p:nvSpPr>
-        <p:spPr>
-          <a:xfrm>
-            <a:off x="10241280" y="6419088"/>
-            <a:ext cx="1463040" cy="365760"/>
-          </a:xfrm>
-          <a:prstGeom prst="rect">
-            <a:avLst/>
-          </a:prstGeom>
-          <a:noFill/>
-        </p:spPr>
-        <p:txBody>
-          <a:bodyPr wrap="square" anchor="ctr" lIns="0" rIns="0" tIns="0" bIns="0">
-            <a:spAutoFit/>
-          </a:bodyPr>
-          <a:lstStyle/>
-          <a:p>
-            <a:pPr algn="r">
-              <a:lnSpc>
-                <a:spcPct val="100000"/>
-              </a:lnSpc>
-              <a:spcBef>
-                <a:spcPts val="0"/>
-              </a:spcBef>
-              <a:spcAft>
-                <a:spcPts val="600"/>
-              </a:spcAft>
-            </a:pPr>
-            <a:r>
-              <a:rPr sz="900" b="1">
-                <a:solidFill>
-                  <a:srgbClr val="6366F1"/>
-                </a:solidFill>
-                <a:latin typeface="NanumGothic"/>
-                <a:ea typeface="NanumGothic"/>
-                <a:cs typeface="NanumGothic"/>
-              </a:rPr>
-              <a:t>Day 1 · 월</a:t>
-            </a:r>
-          </a:p>
-        </p:txBody>
-      </p:sp>
-      <p:sp>
-        <p:nvSpPr>
-          <p:cNvPr id="9" name="Oval 8"/>
+          <p:cNvPr id="8" name="Oval 7"/>
           <p:cNvSpPr/>
           <p:nvPr/>
         </p:nvSpPr>
@@ -5730,7 +5763,7 @@
       </p:sp>
       <p:sp>
         <p:nvSpPr>
-          <p:cNvPr id="10" name="TextBox 9"/>
+          <p:cNvPr id="9" name="TextBox 8"/>
           <p:cNvSpPr txBox="1"/>
           <p:nvPr/>
         </p:nvSpPr>
@@ -5777,7 +5810,7 @@
       </p:sp>
       <p:sp>
         <p:nvSpPr>
-          <p:cNvPr id="11" name="TextBox 10"/>
+          <p:cNvPr id="10" name="TextBox 9"/>
           <p:cNvSpPr txBox="1"/>
           <p:nvPr/>
         </p:nvSpPr>
@@ -5824,7 +5857,7 @@
       </p:sp>
       <p:sp>
         <p:nvSpPr>
-          <p:cNvPr id="12" name="Oval 11"/>
+          <p:cNvPr id="11" name="Oval 10"/>
           <p:cNvSpPr/>
           <p:nvPr/>
         </p:nvSpPr>
@@ -5868,7 +5901,7 @@
       </p:sp>
       <p:sp>
         <p:nvSpPr>
-          <p:cNvPr id="13" name="TextBox 12"/>
+          <p:cNvPr id="12" name="TextBox 11"/>
           <p:cNvSpPr txBox="1"/>
           <p:nvPr/>
         </p:nvSpPr>
@@ -5915,7 +5948,7 @@
       </p:sp>
       <p:sp>
         <p:nvSpPr>
-          <p:cNvPr id="14" name="TextBox 13"/>
+          <p:cNvPr id="13" name="TextBox 12"/>
           <p:cNvSpPr txBox="1"/>
           <p:nvPr/>
         </p:nvSpPr>
@@ -5962,7 +5995,7 @@
       </p:sp>
       <p:sp>
         <p:nvSpPr>
-          <p:cNvPr id="15" name="Oval 14"/>
+          <p:cNvPr id="14" name="Oval 13"/>
           <p:cNvSpPr/>
           <p:nvPr/>
         </p:nvSpPr>
@@ -6006,7 +6039,7 @@
       </p:sp>
       <p:sp>
         <p:nvSpPr>
-          <p:cNvPr id="16" name="TextBox 15"/>
+          <p:cNvPr id="15" name="TextBox 14"/>
           <p:cNvSpPr txBox="1"/>
           <p:nvPr/>
         </p:nvSpPr>
@@ -6053,7 +6086,7 @@
       </p:sp>
       <p:sp>
         <p:nvSpPr>
-          <p:cNvPr id="17" name="TextBox 16"/>
+          <p:cNvPr id="16" name="TextBox 15"/>
           <p:cNvSpPr txBox="1"/>
           <p:nvPr/>
         </p:nvSpPr>
@@ -6100,7 +6133,7 @@
       </p:sp>
       <p:sp>
         <p:nvSpPr>
-          <p:cNvPr id="18" name="Oval 17"/>
+          <p:cNvPr id="17" name="Oval 16"/>
           <p:cNvSpPr/>
           <p:nvPr/>
         </p:nvSpPr>
@@ -6144,7 +6177,7 @@
       </p:sp>
       <p:sp>
         <p:nvSpPr>
-          <p:cNvPr id="19" name="TextBox 18"/>
+          <p:cNvPr id="18" name="TextBox 17"/>
           <p:cNvSpPr txBox="1"/>
           <p:nvPr/>
         </p:nvSpPr>
@@ -6191,7 +6224,7 @@
       </p:sp>
       <p:sp>
         <p:nvSpPr>
-          <p:cNvPr id="20" name="TextBox 19"/>
+          <p:cNvPr id="19" name="TextBox 18"/>
           <p:cNvSpPr txBox="1"/>
           <p:nvPr/>
         </p:nvSpPr>
@@ -6238,7 +6271,7 @@
       </p:sp>
       <p:sp>
         <p:nvSpPr>
-          <p:cNvPr id="21" name="Rounded Rectangle 20"/>
+          <p:cNvPr id="20" name="Rounded Rectangle 19"/>
           <p:cNvSpPr/>
           <p:nvPr/>
         </p:nvSpPr>
@@ -6284,7 +6317,7 @@
       </p:sp>
       <p:sp>
         <p:nvSpPr>
-          <p:cNvPr id="22" name="TextBox 21"/>
+          <p:cNvPr id="21" name="TextBox 20"/>
           <p:cNvSpPr txBox="1"/>
           <p:nvPr/>
         </p:nvSpPr>
@@ -6336,6 +6369,64 @@
                 <a:cs typeface="NanumGothic"/>
               </a:rPr>
               <a:t>의미를 아는 게 아니라 통계로 '다음 토큰'을 맞히는 것</a:t>
+            </a:r>
+          </a:p>
+        </p:txBody>
+      </p:sp>
+      <p:sp>
+        <p:nvSpPr>
+          <p:cNvPr id="22" name="TextBox 21"/>
+          <p:cNvSpPr txBox="1"/>
+          <p:nvPr/>
+        </p:nvSpPr>
+        <p:spPr>
+          <a:xfrm>
+            <a:off x="8988552" y="6419088"/>
+            <a:ext cx="2697480" cy="365760"/>
+          </a:xfrm>
+          <a:prstGeom prst="rect">
+            <a:avLst/>
+          </a:prstGeom>
+          <a:noFill/>
+        </p:spPr>
+        <p:txBody>
+          <a:bodyPr wrap="square" anchor="ctr" lIns="0" rIns="0" tIns="0" bIns="0">
+            <a:spAutoFit/>
+          </a:bodyPr>
+          <a:lstStyle/>
+          <a:p>
+            <a:pPr algn="r">
+              <a:lnSpc>
+                <a:spcPct val="100000"/>
+              </a:lnSpc>
+              <a:spcBef>
+                <a:spcPts val="0"/>
+              </a:spcBef>
+              <a:spcAft>
+                <a:spcPts val="600"/>
+              </a:spcAft>
+            </a:pPr>
+            <a:r>
+              <a:rPr sz="900" b="1">
+                <a:solidFill>
+                  <a:srgbClr val="6366F1"/>
+                </a:solidFill>
+                <a:latin typeface="NanumGothic"/>
+                <a:ea typeface="NanumGothic"/>
+                <a:cs typeface="NanumGothic"/>
+              </a:rPr>
+              <a:t>Day 1 · 월</a:t>
+            </a:r>
+            <a:r>
+              <a:rPr sz="900" b="1">
+                <a:solidFill>
+                  <a:srgbClr val="64748B"/>
+                </a:solidFill>
+                <a:latin typeface="NanumGothic"/>
+                <a:ea typeface="NanumGothic"/>
+                <a:cs typeface="NanumGothic"/>
+              </a:rPr>
+              <a:t>   ·   12 / 42</a:t>
             </a:r>
           </a:p>
         </p:txBody>
@@ -6633,54 +6724,7 @@
       </p:sp>
       <p:sp>
         <p:nvSpPr>
-          <p:cNvPr id="8" name="TextBox 7"/>
-          <p:cNvSpPr txBox="1"/>
-          <p:nvPr/>
-        </p:nvSpPr>
-        <p:spPr>
-          <a:xfrm>
-            <a:off x="10241280" y="6419088"/>
-            <a:ext cx="1463040" cy="365760"/>
-          </a:xfrm>
-          <a:prstGeom prst="rect">
-            <a:avLst/>
-          </a:prstGeom>
-          <a:noFill/>
-        </p:spPr>
-        <p:txBody>
-          <a:bodyPr wrap="square" anchor="ctr" lIns="0" rIns="0" tIns="0" bIns="0">
-            <a:spAutoFit/>
-          </a:bodyPr>
-          <a:lstStyle/>
-          <a:p>
-            <a:pPr algn="r">
-              <a:lnSpc>
-                <a:spcPct val="100000"/>
-              </a:lnSpc>
-              <a:spcBef>
-                <a:spcPts val="0"/>
-              </a:spcBef>
-              <a:spcAft>
-                <a:spcPts val="600"/>
-              </a:spcAft>
-            </a:pPr>
-            <a:r>
-              <a:rPr sz="900" b="1">
-                <a:solidFill>
-                  <a:srgbClr val="6366F1"/>
-                </a:solidFill>
-                <a:latin typeface="NanumGothic"/>
-                <a:ea typeface="NanumGothic"/>
-                <a:cs typeface="NanumGothic"/>
-              </a:rPr>
-              <a:t>Day 1 · 월</a:t>
-            </a:r>
-          </a:p>
-        </p:txBody>
-      </p:sp>
-      <p:sp>
-        <p:nvSpPr>
-          <p:cNvPr id="9" name="Rounded Rectangle 8"/>
+          <p:cNvPr id="8" name="Rounded Rectangle 7"/>
           <p:cNvSpPr/>
           <p:nvPr/>
         </p:nvSpPr>
@@ -6726,7 +6770,7 @@
       </p:sp>
       <p:sp>
         <p:nvSpPr>
-          <p:cNvPr id="10" name="Rectangle 9"/>
+          <p:cNvPr id="9" name="Rectangle 8"/>
           <p:cNvSpPr/>
           <p:nvPr/>
         </p:nvSpPr>
@@ -6770,7 +6814,7 @@
       </p:sp>
       <p:sp>
         <p:nvSpPr>
-          <p:cNvPr id="11" name="TextBox 10"/>
+          <p:cNvPr id="10" name="TextBox 9"/>
           <p:cNvSpPr txBox="1"/>
           <p:nvPr/>
         </p:nvSpPr>
@@ -6817,7 +6861,7 @@
       </p:sp>
       <p:sp>
         <p:nvSpPr>
-          <p:cNvPr id="12" name="TextBox 11"/>
+          <p:cNvPr id="11" name="TextBox 10"/>
           <p:cNvSpPr txBox="1"/>
           <p:nvPr/>
         </p:nvSpPr>
@@ -6864,7 +6908,7 @@
       </p:sp>
       <p:sp>
         <p:nvSpPr>
-          <p:cNvPr id="13" name="TextBox 12"/>
+          <p:cNvPr id="12" name="TextBox 11"/>
           <p:cNvSpPr txBox="1"/>
           <p:nvPr/>
         </p:nvSpPr>
@@ -6911,7 +6955,7 @@
       </p:sp>
       <p:sp>
         <p:nvSpPr>
-          <p:cNvPr id="14" name="TextBox 13"/>
+          <p:cNvPr id="13" name="TextBox 12"/>
           <p:cNvSpPr txBox="1"/>
           <p:nvPr/>
         </p:nvSpPr>
@@ -6958,7 +7002,7 @@
       </p:sp>
       <p:sp>
         <p:nvSpPr>
-          <p:cNvPr id="15" name="Rounded Rectangle 14"/>
+          <p:cNvPr id="14" name="Rounded Rectangle 13"/>
           <p:cNvSpPr/>
           <p:nvPr/>
         </p:nvSpPr>
@@ -7004,7 +7048,7 @@
       </p:sp>
       <p:sp>
         <p:nvSpPr>
-          <p:cNvPr id="16" name="Rectangle 15"/>
+          <p:cNvPr id="15" name="Rectangle 14"/>
           <p:cNvSpPr/>
           <p:nvPr/>
         </p:nvSpPr>
@@ -7048,7 +7092,7 @@
       </p:sp>
       <p:sp>
         <p:nvSpPr>
-          <p:cNvPr id="17" name="TextBox 16"/>
+          <p:cNvPr id="16" name="TextBox 15"/>
           <p:cNvSpPr txBox="1"/>
           <p:nvPr/>
         </p:nvSpPr>
@@ -7095,7 +7139,7 @@
       </p:sp>
       <p:sp>
         <p:nvSpPr>
-          <p:cNvPr id="18" name="TextBox 17"/>
+          <p:cNvPr id="17" name="TextBox 16"/>
           <p:cNvSpPr txBox="1"/>
           <p:nvPr/>
         </p:nvSpPr>
@@ -7142,7 +7186,7 @@
       </p:sp>
       <p:sp>
         <p:nvSpPr>
-          <p:cNvPr id="19" name="TextBox 18"/>
+          <p:cNvPr id="18" name="TextBox 17"/>
           <p:cNvSpPr txBox="1"/>
           <p:nvPr/>
         </p:nvSpPr>
@@ -7189,7 +7233,7 @@
       </p:sp>
       <p:sp>
         <p:nvSpPr>
-          <p:cNvPr id="20" name="TextBox 19"/>
+          <p:cNvPr id="19" name="TextBox 18"/>
           <p:cNvSpPr txBox="1"/>
           <p:nvPr/>
         </p:nvSpPr>
@@ -7236,7 +7280,7 @@
       </p:sp>
       <p:sp>
         <p:nvSpPr>
-          <p:cNvPr id="21" name="Rounded Rectangle 20"/>
+          <p:cNvPr id="20" name="Rounded Rectangle 19"/>
           <p:cNvSpPr/>
           <p:nvPr/>
         </p:nvSpPr>
@@ -7282,7 +7326,7 @@
       </p:sp>
       <p:sp>
         <p:nvSpPr>
-          <p:cNvPr id="22" name="Rectangle 21"/>
+          <p:cNvPr id="21" name="Rectangle 20"/>
           <p:cNvSpPr/>
           <p:nvPr/>
         </p:nvSpPr>
@@ -7326,7 +7370,7 @@
       </p:sp>
       <p:sp>
         <p:nvSpPr>
-          <p:cNvPr id="23" name="TextBox 22"/>
+          <p:cNvPr id="22" name="TextBox 21"/>
           <p:cNvSpPr txBox="1"/>
           <p:nvPr/>
         </p:nvSpPr>
@@ -7373,7 +7417,7 @@
       </p:sp>
       <p:sp>
         <p:nvSpPr>
-          <p:cNvPr id="24" name="TextBox 23"/>
+          <p:cNvPr id="23" name="TextBox 22"/>
           <p:cNvSpPr txBox="1"/>
           <p:nvPr/>
         </p:nvSpPr>
@@ -7420,7 +7464,7 @@
       </p:sp>
       <p:sp>
         <p:nvSpPr>
-          <p:cNvPr id="25" name="TextBox 24"/>
+          <p:cNvPr id="24" name="TextBox 23"/>
           <p:cNvSpPr txBox="1"/>
           <p:nvPr/>
         </p:nvSpPr>
@@ -7467,7 +7511,7 @@
       </p:sp>
       <p:sp>
         <p:nvSpPr>
-          <p:cNvPr id="26" name="TextBox 25"/>
+          <p:cNvPr id="25" name="TextBox 24"/>
           <p:cNvSpPr txBox="1"/>
           <p:nvPr/>
         </p:nvSpPr>
@@ -7514,7 +7558,7 @@
       </p:sp>
       <p:sp>
         <p:nvSpPr>
-          <p:cNvPr id="27" name="Rounded Rectangle 26"/>
+          <p:cNvPr id="26" name="Rounded Rectangle 25"/>
           <p:cNvSpPr/>
           <p:nvPr/>
         </p:nvSpPr>
@@ -7560,7 +7604,7 @@
       </p:sp>
       <p:sp>
         <p:nvSpPr>
-          <p:cNvPr id="28" name="Rectangle 27"/>
+          <p:cNvPr id="27" name="Rectangle 26"/>
           <p:cNvSpPr/>
           <p:nvPr/>
         </p:nvSpPr>
@@ -7604,7 +7648,7 @@
       </p:sp>
       <p:sp>
         <p:nvSpPr>
-          <p:cNvPr id="29" name="TextBox 28"/>
+          <p:cNvPr id="28" name="TextBox 27"/>
           <p:cNvSpPr txBox="1"/>
           <p:nvPr/>
         </p:nvSpPr>
@@ -7651,7 +7695,7 @@
       </p:sp>
       <p:sp>
         <p:nvSpPr>
-          <p:cNvPr id="30" name="TextBox 29"/>
+          <p:cNvPr id="29" name="TextBox 28"/>
           <p:cNvSpPr txBox="1"/>
           <p:nvPr/>
         </p:nvSpPr>
@@ -7698,7 +7742,7 @@
       </p:sp>
       <p:sp>
         <p:nvSpPr>
-          <p:cNvPr id="31" name="TextBox 30"/>
+          <p:cNvPr id="30" name="TextBox 29"/>
           <p:cNvSpPr txBox="1"/>
           <p:nvPr/>
         </p:nvSpPr>
@@ -7745,7 +7789,7 @@
       </p:sp>
       <p:sp>
         <p:nvSpPr>
-          <p:cNvPr id="32" name="Rounded Rectangle 31"/>
+          <p:cNvPr id="31" name="Rounded Rectangle 30"/>
           <p:cNvSpPr/>
           <p:nvPr/>
         </p:nvSpPr>
@@ -7791,7 +7835,7 @@
       </p:sp>
       <p:sp>
         <p:nvSpPr>
-          <p:cNvPr id="33" name="TextBox 32"/>
+          <p:cNvPr id="32" name="TextBox 31"/>
           <p:cNvSpPr txBox="1"/>
           <p:nvPr/>
         </p:nvSpPr>
@@ -7843,6 +7887,64 @@
                 <a:cs typeface="NanumGothic"/>
               </a:rPr>
               <a:t>한 번에 한 토큰씩, 반복해서 생성 (autoregressive) — 이제 각 단계를 하나씩</a:t>
+            </a:r>
+          </a:p>
+        </p:txBody>
+      </p:sp>
+      <p:sp>
+        <p:nvSpPr>
+          <p:cNvPr id="33" name="TextBox 32"/>
+          <p:cNvSpPr txBox="1"/>
+          <p:nvPr/>
+        </p:nvSpPr>
+        <p:spPr>
+          <a:xfrm>
+            <a:off x="8988552" y="6419088"/>
+            <a:ext cx="2697480" cy="365760"/>
+          </a:xfrm>
+          <a:prstGeom prst="rect">
+            <a:avLst/>
+          </a:prstGeom>
+          <a:noFill/>
+        </p:spPr>
+        <p:txBody>
+          <a:bodyPr wrap="square" anchor="ctr" lIns="0" rIns="0" tIns="0" bIns="0">
+            <a:spAutoFit/>
+          </a:bodyPr>
+          <a:lstStyle/>
+          <a:p>
+            <a:pPr algn="r">
+              <a:lnSpc>
+                <a:spcPct val="100000"/>
+              </a:lnSpc>
+              <a:spcBef>
+                <a:spcPts val="0"/>
+              </a:spcBef>
+              <a:spcAft>
+                <a:spcPts val="600"/>
+              </a:spcAft>
+            </a:pPr>
+            <a:r>
+              <a:rPr sz="900" b="1">
+                <a:solidFill>
+                  <a:srgbClr val="6366F1"/>
+                </a:solidFill>
+                <a:latin typeface="NanumGothic"/>
+                <a:ea typeface="NanumGothic"/>
+                <a:cs typeface="NanumGothic"/>
+              </a:rPr>
+              <a:t>Day 1 · 월</a:t>
+            </a:r>
+            <a:r>
+              <a:rPr sz="900" b="1">
+                <a:solidFill>
+                  <a:srgbClr val="64748B"/>
+                </a:solidFill>
+                <a:latin typeface="NanumGothic"/>
+                <a:ea typeface="NanumGothic"/>
+                <a:cs typeface="NanumGothic"/>
+              </a:rPr>
+              <a:t>   ·   13 / 42</a:t>
             </a:r>
           </a:p>
         </p:txBody>
@@ -8140,54 +8242,7 @@
       </p:sp>
       <p:sp>
         <p:nvSpPr>
-          <p:cNvPr id="8" name="TextBox 7"/>
-          <p:cNvSpPr txBox="1"/>
-          <p:nvPr/>
-        </p:nvSpPr>
-        <p:spPr>
-          <a:xfrm>
-            <a:off x="10241280" y="6419088"/>
-            <a:ext cx="1463040" cy="365760"/>
-          </a:xfrm>
-          <a:prstGeom prst="rect">
-            <a:avLst/>
-          </a:prstGeom>
-          <a:noFill/>
-        </p:spPr>
-        <p:txBody>
-          <a:bodyPr wrap="square" anchor="ctr" lIns="0" rIns="0" tIns="0" bIns="0">
-            <a:spAutoFit/>
-          </a:bodyPr>
-          <a:lstStyle/>
-          <a:p>
-            <a:pPr algn="r">
-              <a:lnSpc>
-                <a:spcPct val="100000"/>
-              </a:lnSpc>
-              <a:spcBef>
-                <a:spcPts val="0"/>
-              </a:spcBef>
-              <a:spcAft>
-                <a:spcPts val="600"/>
-              </a:spcAft>
-            </a:pPr>
-            <a:r>
-              <a:rPr sz="900" b="1">
-                <a:solidFill>
-                  <a:srgbClr val="6366F1"/>
-                </a:solidFill>
-                <a:latin typeface="NanumGothic"/>
-                <a:ea typeface="NanumGothic"/>
-                <a:cs typeface="NanumGothic"/>
-              </a:rPr>
-              <a:t>Day 1 · 월</a:t>
-            </a:r>
-          </a:p>
-        </p:txBody>
-      </p:sp>
-      <p:sp>
-        <p:nvSpPr>
-          <p:cNvPr id="9" name="Oval 8"/>
+          <p:cNvPr id="8" name="Oval 7"/>
           <p:cNvSpPr/>
           <p:nvPr/>
         </p:nvSpPr>
@@ -8231,7 +8286,7 @@
       </p:sp>
       <p:sp>
         <p:nvSpPr>
-          <p:cNvPr id="10" name="TextBox 9"/>
+          <p:cNvPr id="9" name="TextBox 8"/>
           <p:cNvSpPr txBox="1"/>
           <p:nvPr/>
         </p:nvSpPr>
@@ -8278,7 +8333,7 @@
       </p:sp>
       <p:sp>
         <p:nvSpPr>
-          <p:cNvPr id="11" name="TextBox 10"/>
+          <p:cNvPr id="10" name="TextBox 9"/>
           <p:cNvSpPr txBox="1"/>
           <p:nvPr/>
         </p:nvSpPr>
@@ -8325,7 +8380,7 @@
       </p:sp>
       <p:sp>
         <p:nvSpPr>
-          <p:cNvPr id="12" name="Oval 11"/>
+          <p:cNvPr id="11" name="Oval 10"/>
           <p:cNvSpPr/>
           <p:nvPr/>
         </p:nvSpPr>
@@ -8369,7 +8424,7 @@
       </p:sp>
       <p:sp>
         <p:nvSpPr>
-          <p:cNvPr id="13" name="TextBox 12"/>
+          <p:cNvPr id="12" name="TextBox 11"/>
           <p:cNvSpPr txBox="1"/>
           <p:nvPr/>
         </p:nvSpPr>
@@ -8416,7 +8471,7 @@
       </p:sp>
       <p:sp>
         <p:nvSpPr>
-          <p:cNvPr id="14" name="TextBox 13"/>
+          <p:cNvPr id="13" name="TextBox 12"/>
           <p:cNvSpPr txBox="1"/>
           <p:nvPr/>
         </p:nvSpPr>
@@ -8463,7 +8518,7 @@
       </p:sp>
       <p:sp>
         <p:nvSpPr>
-          <p:cNvPr id="15" name="Oval 14"/>
+          <p:cNvPr id="14" name="Oval 13"/>
           <p:cNvSpPr/>
           <p:nvPr/>
         </p:nvSpPr>
@@ -8507,7 +8562,7 @@
       </p:sp>
       <p:sp>
         <p:nvSpPr>
-          <p:cNvPr id="16" name="TextBox 15"/>
+          <p:cNvPr id="15" name="TextBox 14"/>
           <p:cNvSpPr txBox="1"/>
           <p:nvPr/>
         </p:nvSpPr>
@@ -8554,7 +8609,7 @@
       </p:sp>
       <p:sp>
         <p:nvSpPr>
-          <p:cNvPr id="17" name="TextBox 16"/>
+          <p:cNvPr id="16" name="TextBox 15"/>
           <p:cNvSpPr txBox="1"/>
           <p:nvPr/>
         </p:nvSpPr>
@@ -8601,7 +8656,7 @@
       </p:sp>
       <p:sp>
         <p:nvSpPr>
-          <p:cNvPr id="18" name="Oval 17"/>
+          <p:cNvPr id="17" name="Oval 16"/>
           <p:cNvSpPr/>
           <p:nvPr/>
         </p:nvSpPr>
@@ -8645,7 +8700,7 @@
       </p:sp>
       <p:sp>
         <p:nvSpPr>
-          <p:cNvPr id="19" name="TextBox 18"/>
+          <p:cNvPr id="18" name="TextBox 17"/>
           <p:cNvSpPr txBox="1"/>
           <p:nvPr/>
         </p:nvSpPr>
@@ -8692,7 +8747,7 @@
       </p:sp>
       <p:sp>
         <p:nvSpPr>
-          <p:cNvPr id="20" name="TextBox 19"/>
+          <p:cNvPr id="19" name="TextBox 18"/>
           <p:cNvSpPr txBox="1"/>
           <p:nvPr/>
         </p:nvSpPr>
@@ -8739,7 +8794,7 @@
       </p:sp>
       <p:sp>
         <p:nvSpPr>
-          <p:cNvPr id="21" name="Rounded Rectangle 20"/>
+          <p:cNvPr id="20" name="Rounded Rectangle 19"/>
           <p:cNvSpPr/>
           <p:nvPr/>
         </p:nvSpPr>
@@ -8785,7 +8840,7 @@
       </p:sp>
       <p:sp>
         <p:nvSpPr>
-          <p:cNvPr id="22" name="TextBox 21"/>
+          <p:cNvPr id="21" name="TextBox 20"/>
           <p:cNvSpPr txBox="1"/>
           <p:nvPr/>
         </p:nvSpPr>
@@ -8837,6 +8892,64 @@
                 <a:cs typeface="NanumGothic"/>
               </a:rPr>
               <a:t>토큰 수가 곧 길이·비용 — 한글이 더 많이 든다</a:t>
+            </a:r>
+          </a:p>
+        </p:txBody>
+      </p:sp>
+      <p:sp>
+        <p:nvSpPr>
+          <p:cNvPr id="22" name="TextBox 21"/>
+          <p:cNvSpPr txBox="1"/>
+          <p:nvPr/>
+        </p:nvSpPr>
+        <p:spPr>
+          <a:xfrm>
+            <a:off x="8988552" y="6419088"/>
+            <a:ext cx="2697480" cy="365760"/>
+          </a:xfrm>
+          <a:prstGeom prst="rect">
+            <a:avLst/>
+          </a:prstGeom>
+          <a:noFill/>
+        </p:spPr>
+        <p:txBody>
+          <a:bodyPr wrap="square" anchor="ctr" lIns="0" rIns="0" tIns="0" bIns="0">
+            <a:spAutoFit/>
+          </a:bodyPr>
+          <a:lstStyle/>
+          <a:p>
+            <a:pPr algn="r">
+              <a:lnSpc>
+                <a:spcPct val="100000"/>
+              </a:lnSpc>
+              <a:spcBef>
+                <a:spcPts val="0"/>
+              </a:spcBef>
+              <a:spcAft>
+                <a:spcPts val="600"/>
+              </a:spcAft>
+            </a:pPr>
+            <a:r>
+              <a:rPr sz="900" b="1">
+                <a:solidFill>
+                  <a:srgbClr val="6366F1"/>
+                </a:solidFill>
+                <a:latin typeface="NanumGothic"/>
+                <a:ea typeface="NanumGothic"/>
+                <a:cs typeface="NanumGothic"/>
+              </a:rPr>
+              <a:t>Day 1 · 월</a:t>
+            </a:r>
+            <a:r>
+              <a:rPr sz="900" b="1">
+                <a:solidFill>
+                  <a:srgbClr val="64748B"/>
+                </a:solidFill>
+                <a:latin typeface="NanumGothic"/>
+                <a:ea typeface="NanumGothic"/>
+                <a:cs typeface="NanumGothic"/>
+              </a:rPr>
+              <a:t>   ·   14 / 42</a:t>
             </a:r>
           </a:p>
         </p:txBody>
@@ -9134,54 +9247,7 @@
       </p:sp>
       <p:sp>
         <p:nvSpPr>
-          <p:cNvPr id="8" name="TextBox 7"/>
-          <p:cNvSpPr txBox="1"/>
-          <p:nvPr/>
-        </p:nvSpPr>
-        <p:spPr>
-          <a:xfrm>
-            <a:off x="10241280" y="6419088"/>
-            <a:ext cx="1463040" cy="365760"/>
-          </a:xfrm>
-          <a:prstGeom prst="rect">
-            <a:avLst/>
-          </a:prstGeom>
-          <a:noFill/>
-        </p:spPr>
-        <p:txBody>
-          <a:bodyPr wrap="square" anchor="ctr" lIns="0" rIns="0" tIns="0" bIns="0">
-            <a:spAutoFit/>
-          </a:bodyPr>
-          <a:lstStyle/>
-          <a:p>
-            <a:pPr algn="r">
-              <a:lnSpc>
-                <a:spcPct val="100000"/>
-              </a:lnSpc>
-              <a:spcBef>
-                <a:spcPts val="0"/>
-              </a:spcBef>
-              <a:spcAft>
-                <a:spcPts val="600"/>
-              </a:spcAft>
-            </a:pPr>
-            <a:r>
-              <a:rPr sz="900" b="1">
-                <a:solidFill>
-                  <a:srgbClr val="6366F1"/>
-                </a:solidFill>
-                <a:latin typeface="NanumGothic"/>
-                <a:ea typeface="NanumGothic"/>
-                <a:cs typeface="NanumGothic"/>
-              </a:rPr>
-              <a:t>Day 1 · 월</a:t>
-            </a:r>
-          </a:p>
-        </p:txBody>
-      </p:sp>
-      <p:sp>
-        <p:nvSpPr>
-          <p:cNvPr id="9" name="Oval 8"/>
+          <p:cNvPr id="8" name="Oval 7"/>
           <p:cNvSpPr/>
           <p:nvPr/>
         </p:nvSpPr>
@@ -9225,7 +9291,7 @@
       </p:sp>
       <p:sp>
         <p:nvSpPr>
-          <p:cNvPr id="10" name="TextBox 9"/>
+          <p:cNvPr id="9" name="TextBox 8"/>
           <p:cNvSpPr txBox="1"/>
           <p:nvPr/>
         </p:nvSpPr>
@@ -9272,7 +9338,7 @@
       </p:sp>
       <p:sp>
         <p:nvSpPr>
-          <p:cNvPr id="11" name="TextBox 10"/>
+          <p:cNvPr id="10" name="TextBox 9"/>
           <p:cNvSpPr txBox="1"/>
           <p:nvPr/>
         </p:nvSpPr>
@@ -9319,7 +9385,7 @@
       </p:sp>
       <p:sp>
         <p:nvSpPr>
-          <p:cNvPr id="12" name="Oval 11"/>
+          <p:cNvPr id="11" name="Oval 10"/>
           <p:cNvSpPr/>
           <p:nvPr/>
         </p:nvSpPr>
@@ -9363,7 +9429,7 @@
       </p:sp>
       <p:sp>
         <p:nvSpPr>
-          <p:cNvPr id="13" name="TextBox 12"/>
+          <p:cNvPr id="12" name="TextBox 11"/>
           <p:cNvSpPr txBox="1"/>
           <p:nvPr/>
         </p:nvSpPr>
@@ -9410,7 +9476,7 @@
       </p:sp>
       <p:sp>
         <p:nvSpPr>
-          <p:cNvPr id="14" name="TextBox 13"/>
+          <p:cNvPr id="13" name="TextBox 12"/>
           <p:cNvSpPr txBox="1"/>
           <p:nvPr/>
         </p:nvSpPr>
@@ -9457,7 +9523,7 @@
       </p:sp>
       <p:sp>
         <p:nvSpPr>
-          <p:cNvPr id="15" name="Oval 14"/>
+          <p:cNvPr id="14" name="Oval 13"/>
           <p:cNvSpPr/>
           <p:nvPr/>
         </p:nvSpPr>
@@ -9501,7 +9567,7 @@
       </p:sp>
       <p:sp>
         <p:nvSpPr>
-          <p:cNvPr id="16" name="TextBox 15"/>
+          <p:cNvPr id="15" name="TextBox 14"/>
           <p:cNvSpPr txBox="1"/>
           <p:nvPr/>
         </p:nvSpPr>
@@ -9548,7 +9614,7 @@
       </p:sp>
       <p:sp>
         <p:nvSpPr>
-          <p:cNvPr id="17" name="TextBox 16"/>
+          <p:cNvPr id="16" name="TextBox 15"/>
           <p:cNvSpPr txBox="1"/>
           <p:nvPr/>
         </p:nvSpPr>
@@ -9595,7 +9661,7 @@
       </p:sp>
       <p:sp>
         <p:nvSpPr>
-          <p:cNvPr id="18" name="Rounded Rectangle 17"/>
+          <p:cNvPr id="17" name="Rounded Rectangle 16"/>
           <p:cNvSpPr/>
           <p:nvPr/>
         </p:nvSpPr>
@@ -9641,7 +9707,7 @@
       </p:sp>
       <p:sp>
         <p:nvSpPr>
-          <p:cNvPr id="19" name="TextBox 18"/>
+          <p:cNvPr id="18" name="TextBox 17"/>
           <p:cNvSpPr txBox="1"/>
           <p:nvPr/>
         </p:nvSpPr>
@@ -9693,6 +9759,64 @@
                 <a:cs typeface="NanumGothic"/>
               </a:rPr>
               <a:t>모델이 아는 건 사실이 아니라 '그럴듯함' — 환각의 뿌리</a:t>
+            </a:r>
+          </a:p>
+        </p:txBody>
+      </p:sp>
+      <p:sp>
+        <p:nvSpPr>
+          <p:cNvPr id="19" name="TextBox 18"/>
+          <p:cNvSpPr txBox="1"/>
+          <p:nvPr/>
+        </p:nvSpPr>
+        <p:spPr>
+          <a:xfrm>
+            <a:off x="8988552" y="6419088"/>
+            <a:ext cx="2697480" cy="365760"/>
+          </a:xfrm>
+          <a:prstGeom prst="rect">
+            <a:avLst/>
+          </a:prstGeom>
+          <a:noFill/>
+        </p:spPr>
+        <p:txBody>
+          <a:bodyPr wrap="square" anchor="ctr" lIns="0" rIns="0" tIns="0" bIns="0">
+            <a:spAutoFit/>
+          </a:bodyPr>
+          <a:lstStyle/>
+          <a:p>
+            <a:pPr algn="r">
+              <a:lnSpc>
+                <a:spcPct val="100000"/>
+              </a:lnSpc>
+              <a:spcBef>
+                <a:spcPts val="0"/>
+              </a:spcBef>
+              <a:spcAft>
+                <a:spcPts val="600"/>
+              </a:spcAft>
+            </a:pPr>
+            <a:r>
+              <a:rPr sz="900" b="1">
+                <a:solidFill>
+                  <a:srgbClr val="6366F1"/>
+                </a:solidFill>
+                <a:latin typeface="NanumGothic"/>
+                <a:ea typeface="NanumGothic"/>
+                <a:cs typeface="NanumGothic"/>
+              </a:rPr>
+              <a:t>Day 1 · 월</a:t>
+            </a:r>
+            <a:r>
+              <a:rPr sz="900" b="1">
+                <a:solidFill>
+                  <a:srgbClr val="64748B"/>
+                </a:solidFill>
+                <a:latin typeface="NanumGothic"/>
+                <a:ea typeface="NanumGothic"/>
+                <a:cs typeface="NanumGothic"/>
+              </a:rPr>
+              <a:t>   ·   15 / 42</a:t>
             </a:r>
           </a:p>
         </p:txBody>
@@ -9990,54 +10114,7 @@
       </p:sp>
       <p:sp>
         <p:nvSpPr>
-          <p:cNvPr id="8" name="TextBox 7"/>
-          <p:cNvSpPr txBox="1"/>
-          <p:nvPr/>
-        </p:nvSpPr>
-        <p:spPr>
-          <a:xfrm>
-            <a:off x="10241280" y="6419088"/>
-            <a:ext cx="1463040" cy="365760"/>
-          </a:xfrm>
-          <a:prstGeom prst="rect">
-            <a:avLst/>
-          </a:prstGeom>
-          <a:noFill/>
-        </p:spPr>
-        <p:txBody>
-          <a:bodyPr wrap="square" anchor="ctr" lIns="0" rIns="0" tIns="0" bIns="0">
-            <a:spAutoFit/>
-          </a:bodyPr>
-          <a:lstStyle/>
-          <a:p>
-            <a:pPr algn="r">
-              <a:lnSpc>
-                <a:spcPct val="100000"/>
-              </a:lnSpc>
-              <a:spcBef>
-                <a:spcPts val="0"/>
-              </a:spcBef>
-              <a:spcAft>
-                <a:spcPts val="600"/>
-              </a:spcAft>
-            </a:pPr>
-            <a:r>
-              <a:rPr sz="900" b="1">
-                <a:solidFill>
-                  <a:srgbClr val="6366F1"/>
-                </a:solidFill>
-                <a:latin typeface="NanumGothic"/>
-                <a:ea typeface="NanumGothic"/>
-                <a:cs typeface="NanumGothic"/>
-              </a:rPr>
-              <a:t>Day 1 · 월</a:t>
-            </a:r>
-          </a:p>
-        </p:txBody>
-      </p:sp>
-      <p:sp>
-        <p:nvSpPr>
-          <p:cNvPr id="9" name="Oval 8"/>
+          <p:cNvPr id="8" name="Oval 7"/>
           <p:cNvSpPr/>
           <p:nvPr/>
         </p:nvSpPr>
@@ -10081,7 +10158,7 @@
       </p:sp>
       <p:sp>
         <p:nvSpPr>
-          <p:cNvPr id="10" name="TextBox 9"/>
+          <p:cNvPr id="9" name="TextBox 8"/>
           <p:cNvSpPr txBox="1"/>
           <p:nvPr/>
         </p:nvSpPr>
@@ -10128,7 +10205,7 @@
       </p:sp>
       <p:sp>
         <p:nvSpPr>
-          <p:cNvPr id="11" name="TextBox 10"/>
+          <p:cNvPr id="10" name="TextBox 9"/>
           <p:cNvSpPr txBox="1"/>
           <p:nvPr/>
         </p:nvSpPr>
@@ -10175,7 +10252,7 @@
       </p:sp>
       <p:sp>
         <p:nvSpPr>
-          <p:cNvPr id="12" name="Oval 11"/>
+          <p:cNvPr id="11" name="Oval 10"/>
           <p:cNvSpPr/>
           <p:nvPr/>
         </p:nvSpPr>
@@ -10219,7 +10296,7 @@
       </p:sp>
       <p:sp>
         <p:nvSpPr>
-          <p:cNvPr id="13" name="TextBox 12"/>
+          <p:cNvPr id="12" name="TextBox 11"/>
           <p:cNvSpPr txBox="1"/>
           <p:nvPr/>
         </p:nvSpPr>
@@ -10266,7 +10343,7 @@
       </p:sp>
       <p:sp>
         <p:nvSpPr>
-          <p:cNvPr id="14" name="TextBox 13"/>
+          <p:cNvPr id="13" name="TextBox 12"/>
           <p:cNvSpPr txBox="1"/>
           <p:nvPr/>
         </p:nvSpPr>
@@ -10313,7 +10390,7 @@
       </p:sp>
       <p:sp>
         <p:nvSpPr>
-          <p:cNvPr id="15" name="Oval 14"/>
+          <p:cNvPr id="14" name="Oval 13"/>
           <p:cNvSpPr/>
           <p:nvPr/>
         </p:nvSpPr>
@@ -10357,7 +10434,7 @@
       </p:sp>
       <p:sp>
         <p:nvSpPr>
-          <p:cNvPr id="16" name="TextBox 15"/>
+          <p:cNvPr id="15" name="TextBox 14"/>
           <p:cNvSpPr txBox="1"/>
           <p:nvPr/>
         </p:nvSpPr>
@@ -10404,7 +10481,7 @@
       </p:sp>
       <p:sp>
         <p:nvSpPr>
-          <p:cNvPr id="17" name="TextBox 16"/>
+          <p:cNvPr id="16" name="TextBox 15"/>
           <p:cNvSpPr txBox="1"/>
           <p:nvPr/>
         </p:nvSpPr>
@@ -10451,7 +10528,7 @@
       </p:sp>
       <p:sp>
         <p:nvSpPr>
-          <p:cNvPr id="18" name="Rounded Rectangle 17"/>
+          <p:cNvPr id="17" name="Rounded Rectangle 16"/>
           <p:cNvSpPr/>
           <p:nvPr/>
         </p:nvSpPr>
@@ -10497,7 +10574,7 @@
       </p:sp>
       <p:sp>
         <p:nvSpPr>
-          <p:cNvPr id="19" name="TextBox 18"/>
+          <p:cNvPr id="18" name="TextBox 17"/>
           <p:cNvSpPr txBox="1"/>
           <p:nvPr/>
         </p:nvSpPr>
@@ -10549,6 +10626,64 @@
                 <a:cs typeface="NanumGothic"/>
               </a:rPr>
               <a:t>같은 질문에 매번 다른 답이 나오는 이유</a:t>
+            </a:r>
+          </a:p>
+        </p:txBody>
+      </p:sp>
+      <p:sp>
+        <p:nvSpPr>
+          <p:cNvPr id="19" name="TextBox 18"/>
+          <p:cNvSpPr txBox="1"/>
+          <p:nvPr/>
+        </p:nvSpPr>
+        <p:spPr>
+          <a:xfrm>
+            <a:off x="8988552" y="6419088"/>
+            <a:ext cx="2697480" cy="365760"/>
+          </a:xfrm>
+          <a:prstGeom prst="rect">
+            <a:avLst/>
+          </a:prstGeom>
+          <a:noFill/>
+        </p:spPr>
+        <p:txBody>
+          <a:bodyPr wrap="square" anchor="ctr" lIns="0" rIns="0" tIns="0" bIns="0">
+            <a:spAutoFit/>
+          </a:bodyPr>
+          <a:lstStyle/>
+          <a:p>
+            <a:pPr algn="r">
+              <a:lnSpc>
+                <a:spcPct val="100000"/>
+              </a:lnSpc>
+              <a:spcBef>
+                <a:spcPts val="0"/>
+              </a:spcBef>
+              <a:spcAft>
+                <a:spcPts val="600"/>
+              </a:spcAft>
+            </a:pPr>
+            <a:r>
+              <a:rPr sz="900" b="1">
+                <a:solidFill>
+                  <a:srgbClr val="6366F1"/>
+                </a:solidFill>
+                <a:latin typeface="NanumGothic"/>
+                <a:ea typeface="NanumGothic"/>
+                <a:cs typeface="NanumGothic"/>
+              </a:rPr>
+              <a:t>Day 1 · 월</a:t>
+            </a:r>
+            <a:r>
+              <a:rPr sz="900" b="1">
+                <a:solidFill>
+                  <a:srgbClr val="64748B"/>
+                </a:solidFill>
+                <a:latin typeface="NanumGothic"/>
+                <a:ea typeface="NanumGothic"/>
+                <a:cs typeface="NanumGothic"/>
+              </a:rPr>
+              <a:t>   ·   16 / 42</a:t>
             </a:r>
           </a:p>
         </p:txBody>
@@ -10846,54 +10981,7 @@
       </p:sp>
       <p:sp>
         <p:nvSpPr>
-          <p:cNvPr id="8" name="TextBox 7"/>
-          <p:cNvSpPr txBox="1"/>
-          <p:nvPr/>
-        </p:nvSpPr>
-        <p:spPr>
-          <a:xfrm>
-            <a:off x="10241280" y="6419088"/>
-            <a:ext cx="1463040" cy="365760"/>
-          </a:xfrm>
-          <a:prstGeom prst="rect">
-            <a:avLst/>
-          </a:prstGeom>
-          <a:noFill/>
-        </p:spPr>
-        <p:txBody>
-          <a:bodyPr wrap="square" anchor="ctr" lIns="0" rIns="0" tIns="0" bIns="0">
-            <a:spAutoFit/>
-          </a:bodyPr>
-          <a:lstStyle/>
-          <a:p>
-            <a:pPr algn="r">
-              <a:lnSpc>
-                <a:spcPct val="100000"/>
-              </a:lnSpc>
-              <a:spcBef>
-                <a:spcPts val="0"/>
-              </a:spcBef>
-              <a:spcAft>
-                <a:spcPts val="600"/>
-              </a:spcAft>
-            </a:pPr>
-            <a:r>
-              <a:rPr sz="900" b="1">
-                <a:solidFill>
-                  <a:srgbClr val="6366F1"/>
-                </a:solidFill>
-                <a:latin typeface="NanumGothic"/>
-                <a:ea typeface="NanumGothic"/>
-                <a:cs typeface="NanumGothic"/>
-              </a:rPr>
-              <a:t>Day 1 · 월</a:t>
-            </a:r>
-          </a:p>
-        </p:txBody>
-      </p:sp>
-      <p:sp>
-        <p:nvSpPr>
-          <p:cNvPr id="9" name="Oval 8"/>
+          <p:cNvPr id="8" name="Oval 7"/>
           <p:cNvSpPr/>
           <p:nvPr/>
         </p:nvSpPr>
@@ -10937,7 +11025,7 @@
       </p:sp>
       <p:sp>
         <p:nvSpPr>
-          <p:cNvPr id="10" name="TextBox 9"/>
+          <p:cNvPr id="9" name="TextBox 8"/>
           <p:cNvSpPr txBox="1"/>
           <p:nvPr/>
         </p:nvSpPr>
@@ -10984,7 +11072,7 @@
       </p:sp>
       <p:sp>
         <p:nvSpPr>
-          <p:cNvPr id="11" name="TextBox 10"/>
+          <p:cNvPr id="10" name="TextBox 9"/>
           <p:cNvSpPr txBox="1"/>
           <p:nvPr/>
         </p:nvSpPr>
@@ -11031,7 +11119,7 @@
       </p:sp>
       <p:sp>
         <p:nvSpPr>
-          <p:cNvPr id="12" name="Oval 11"/>
+          <p:cNvPr id="11" name="Oval 10"/>
           <p:cNvSpPr/>
           <p:nvPr/>
         </p:nvSpPr>
@@ -11075,7 +11163,7 @@
       </p:sp>
       <p:sp>
         <p:nvSpPr>
-          <p:cNvPr id="13" name="TextBox 12"/>
+          <p:cNvPr id="12" name="TextBox 11"/>
           <p:cNvSpPr txBox="1"/>
           <p:nvPr/>
         </p:nvSpPr>
@@ -11122,7 +11210,7 @@
       </p:sp>
       <p:sp>
         <p:nvSpPr>
-          <p:cNvPr id="14" name="TextBox 13"/>
+          <p:cNvPr id="13" name="TextBox 12"/>
           <p:cNvSpPr txBox="1"/>
           <p:nvPr/>
         </p:nvSpPr>
@@ -11169,7 +11257,7 @@
       </p:sp>
       <p:sp>
         <p:nvSpPr>
-          <p:cNvPr id="15" name="Oval 14"/>
+          <p:cNvPr id="14" name="Oval 13"/>
           <p:cNvSpPr/>
           <p:nvPr/>
         </p:nvSpPr>
@@ -11213,7 +11301,7 @@
       </p:sp>
       <p:sp>
         <p:nvSpPr>
-          <p:cNvPr id="16" name="TextBox 15"/>
+          <p:cNvPr id="15" name="TextBox 14"/>
           <p:cNvSpPr txBox="1"/>
           <p:nvPr/>
         </p:nvSpPr>
@@ -11260,7 +11348,7 @@
       </p:sp>
       <p:sp>
         <p:nvSpPr>
-          <p:cNvPr id="17" name="TextBox 16"/>
+          <p:cNvPr id="16" name="TextBox 15"/>
           <p:cNvSpPr txBox="1"/>
           <p:nvPr/>
         </p:nvSpPr>
@@ -11307,7 +11395,7 @@
       </p:sp>
       <p:sp>
         <p:nvSpPr>
-          <p:cNvPr id="18" name="Rounded Rectangle 17"/>
+          <p:cNvPr id="17" name="Rounded Rectangle 16"/>
           <p:cNvSpPr/>
           <p:nvPr/>
         </p:nvSpPr>
@@ -11353,7 +11441,7 @@
       </p:sp>
       <p:sp>
         <p:nvSpPr>
-          <p:cNvPr id="19" name="TextBox 18"/>
+          <p:cNvPr id="18" name="TextBox 17"/>
           <p:cNvSpPr txBox="1"/>
           <p:nvPr/>
         </p:nvSpPr>
@@ -11405,6 +11493,64 @@
                 <a:cs typeface="NanumGothic"/>
               </a:rPr>
               <a:t>그래서 긴 출력은 중간 점검·검증이 중요</a:t>
+            </a:r>
+          </a:p>
+        </p:txBody>
+      </p:sp>
+      <p:sp>
+        <p:nvSpPr>
+          <p:cNvPr id="19" name="TextBox 18"/>
+          <p:cNvSpPr txBox="1"/>
+          <p:nvPr/>
+        </p:nvSpPr>
+        <p:spPr>
+          <a:xfrm>
+            <a:off x="8988552" y="6419088"/>
+            <a:ext cx="2697480" cy="365760"/>
+          </a:xfrm>
+          <a:prstGeom prst="rect">
+            <a:avLst/>
+          </a:prstGeom>
+          <a:noFill/>
+        </p:spPr>
+        <p:txBody>
+          <a:bodyPr wrap="square" anchor="ctr" lIns="0" rIns="0" tIns="0" bIns="0">
+            <a:spAutoFit/>
+          </a:bodyPr>
+          <a:lstStyle/>
+          <a:p>
+            <a:pPr algn="r">
+              <a:lnSpc>
+                <a:spcPct val="100000"/>
+              </a:lnSpc>
+              <a:spcBef>
+                <a:spcPts val="0"/>
+              </a:spcBef>
+              <a:spcAft>
+                <a:spcPts val="600"/>
+              </a:spcAft>
+            </a:pPr>
+            <a:r>
+              <a:rPr sz="900" b="1">
+                <a:solidFill>
+                  <a:srgbClr val="6366F1"/>
+                </a:solidFill>
+                <a:latin typeface="NanumGothic"/>
+                <a:ea typeface="NanumGothic"/>
+                <a:cs typeface="NanumGothic"/>
+              </a:rPr>
+              <a:t>Day 1 · 월</a:t>
+            </a:r>
+            <a:r>
+              <a:rPr sz="900" b="1">
+                <a:solidFill>
+                  <a:srgbClr val="64748B"/>
+                </a:solidFill>
+                <a:latin typeface="NanumGothic"/>
+                <a:ea typeface="NanumGothic"/>
+                <a:cs typeface="NanumGothic"/>
+              </a:rPr>
+              <a:t>   ·   17 / 42</a:t>
             </a:r>
           </a:p>
         </p:txBody>
@@ -11702,54 +11848,7 @@
       </p:sp>
       <p:sp>
         <p:nvSpPr>
-          <p:cNvPr id="8" name="TextBox 7"/>
-          <p:cNvSpPr txBox="1"/>
-          <p:nvPr/>
-        </p:nvSpPr>
-        <p:spPr>
-          <a:xfrm>
-            <a:off x="10241280" y="6419088"/>
-            <a:ext cx="1463040" cy="365760"/>
-          </a:xfrm>
-          <a:prstGeom prst="rect">
-            <a:avLst/>
-          </a:prstGeom>
-          <a:noFill/>
-        </p:spPr>
-        <p:txBody>
-          <a:bodyPr wrap="square" anchor="ctr" lIns="0" rIns="0" tIns="0" bIns="0">
-            <a:spAutoFit/>
-          </a:bodyPr>
-          <a:lstStyle/>
-          <a:p>
-            <a:pPr algn="r">
-              <a:lnSpc>
-                <a:spcPct val="100000"/>
-              </a:lnSpc>
-              <a:spcBef>
-                <a:spcPts val="0"/>
-              </a:spcBef>
-              <a:spcAft>
-                <a:spcPts val="600"/>
-              </a:spcAft>
-            </a:pPr>
-            <a:r>
-              <a:rPr sz="900" b="1">
-                <a:solidFill>
-                  <a:srgbClr val="6366F1"/>
-                </a:solidFill>
-                <a:latin typeface="NanumGothic"/>
-                <a:ea typeface="NanumGothic"/>
-                <a:cs typeface="NanumGothic"/>
-              </a:rPr>
-              <a:t>Day 1 · 월</a:t>
-            </a:r>
-          </a:p>
-        </p:txBody>
-      </p:sp>
-      <p:sp>
-        <p:nvSpPr>
-          <p:cNvPr id="9" name="Oval 8"/>
+          <p:cNvPr id="8" name="Oval 7"/>
           <p:cNvSpPr/>
           <p:nvPr/>
         </p:nvSpPr>
@@ -11793,7 +11892,7 @@
       </p:sp>
       <p:sp>
         <p:nvSpPr>
-          <p:cNvPr id="10" name="TextBox 9"/>
+          <p:cNvPr id="9" name="TextBox 8"/>
           <p:cNvSpPr txBox="1"/>
           <p:nvPr/>
         </p:nvSpPr>
@@ -11840,7 +11939,7 @@
       </p:sp>
       <p:sp>
         <p:nvSpPr>
-          <p:cNvPr id="11" name="TextBox 10"/>
+          <p:cNvPr id="10" name="TextBox 9"/>
           <p:cNvSpPr txBox="1"/>
           <p:nvPr/>
         </p:nvSpPr>
@@ -11887,7 +11986,7 @@
       </p:sp>
       <p:sp>
         <p:nvSpPr>
-          <p:cNvPr id="12" name="Oval 11"/>
+          <p:cNvPr id="11" name="Oval 10"/>
           <p:cNvSpPr/>
           <p:nvPr/>
         </p:nvSpPr>
@@ -11931,7 +12030,7 @@
       </p:sp>
       <p:sp>
         <p:nvSpPr>
-          <p:cNvPr id="13" name="TextBox 12"/>
+          <p:cNvPr id="12" name="TextBox 11"/>
           <p:cNvSpPr txBox="1"/>
           <p:nvPr/>
         </p:nvSpPr>
@@ -11978,7 +12077,7 @@
       </p:sp>
       <p:sp>
         <p:nvSpPr>
-          <p:cNvPr id="14" name="TextBox 13"/>
+          <p:cNvPr id="13" name="TextBox 12"/>
           <p:cNvSpPr txBox="1"/>
           <p:nvPr/>
         </p:nvSpPr>
@@ -12025,7 +12124,7 @@
       </p:sp>
       <p:sp>
         <p:nvSpPr>
-          <p:cNvPr id="15" name="Oval 14"/>
+          <p:cNvPr id="14" name="Oval 13"/>
           <p:cNvSpPr/>
           <p:nvPr/>
         </p:nvSpPr>
@@ -12069,7 +12168,7 @@
       </p:sp>
       <p:sp>
         <p:nvSpPr>
-          <p:cNvPr id="16" name="TextBox 15"/>
+          <p:cNvPr id="15" name="TextBox 14"/>
           <p:cNvSpPr txBox="1"/>
           <p:nvPr/>
         </p:nvSpPr>
@@ -12116,7 +12215,7 @@
       </p:sp>
       <p:sp>
         <p:nvSpPr>
-          <p:cNvPr id="17" name="TextBox 16"/>
+          <p:cNvPr id="16" name="TextBox 15"/>
           <p:cNvSpPr txBox="1"/>
           <p:nvPr/>
         </p:nvSpPr>
@@ -12163,7 +12262,7 @@
       </p:sp>
       <p:sp>
         <p:nvSpPr>
-          <p:cNvPr id="18" name="Oval 17"/>
+          <p:cNvPr id="17" name="Oval 16"/>
           <p:cNvSpPr/>
           <p:nvPr/>
         </p:nvSpPr>
@@ -12207,7 +12306,7 @@
       </p:sp>
       <p:sp>
         <p:nvSpPr>
-          <p:cNvPr id="19" name="TextBox 18"/>
+          <p:cNvPr id="18" name="TextBox 17"/>
           <p:cNvSpPr txBox="1"/>
           <p:nvPr/>
         </p:nvSpPr>
@@ -12254,7 +12353,7 @@
       </p:sp>
       <p:sp>
         <p:nvSpPr>
-          <p:cNvPr id="20" name="TextBox 19"/>
+          <p:cNvPr id="19" name="TextBox 18"/>
           <p:cNvSpPr txBox="1"/>
           <p:nvPr/>
         </p:nvSpPr>
@@ -12301,7 +12400,7 @@
       </p:sp>
       <p:sp>
         <p:nvSpPr>
-          <p:cNvPr id="21" name="Rounded Rectangle 20"/>
+          <p:cNvPr id="20" name="Rounded Rectangle 19"/>
           <p:cNvSpPr/>
           <p:nvPr/>
         </p:nvSpPr>
@@ -12347,7 +12446,7 @@
       </p:sp>
       <p:sp>
         <p:nvSpPr>
-          <p:cNvPr id="22" name="TextBox 21"/>
+          <p:cNvPr id="21" name="TextBox 20"/>
           <p:cNvSpPr txBox="1"/>
           <p:nvPr/>
         </p:nvSpPr>
@@ -12399,6 +12498,64 @@
                 <a:cs typeface="NanumGothic"/>
               </a:rPr>
               <a:t>학습 시점·편향이 그대로 한계로 남는다</a:t>
+            </a:r>
+          </a:p>
+        </p:txBody>
+      </p:sp>
+      <p:sp>
+        <p:nvSpPr>
+          <p:cNvPr id="22" name="TextBox 21"/>
+          <p:cNvSpPr txBox="1"/>
+          <p:nvPr/>
+        </p:nvSpPr>
+        <p:spPr>
+          <a:xfrm>
+            <a:off x="8988552" y="6419088"/>
+            <a:ext cx="2697480" cy="365760"/>
+          </a:xfrm>
+          <a:prstGeom prst="rect">
+            <a:avLst/>
+          </a:prstGeom>
+          <a:noFill/>
+        </p:spPr>
+        <p:txBody>
+          <a:bodyPr wrap="square" anchor="ctr" lIns="0" rIns="0" tIns="0" bIns="0">
+            <a:spAutoFit/>
+          </a:bodyPr>
+          <a:lstStyle/>
+          <a:p>
+            <a:pPr algn="r">
+              <a:lnSpc>
+                <a:spcPct val="100000"/>
+              </a:lnSpc>
+              <a:spcBef>
+                <a:spcPts val="0"/>
+              </a:spcBef>
+              <a:spcAft>
+                <a:spcPts val="600"/>
+              </a:spcAft>
+            </a:pPr>
+            <a:r>
+              <a:rPr sz="900" b="1">
+                <a:solidFill>
+                  <a:srgbClr val="6366F1"/>
+                </a:solidFill>
+                <a:latin typeface="NanumGothic"/>
+                <a:ea typeface="NanumGothic"/>
+                <a:cs typeface="NanumGothic"/>
+              </a:rPr>
+              <a:t>Day 1 · 월</a:t>
+            </a:r>
+            <a:r>
+              <a:rPr sz="900" b="1">
+                <a:solidFill>
+                  <a:srgbClr val="64748B"/>
+                </a:solidFill>
+                <a:latin typeface="NanumGothic"/>
+                <a:ea typeface="NanumGothic"/>
+                <a:cs typeface="NanumGothic"/>
+              </a:rPr>
+              <a:t>   ·   18 / 42</a:t>
             </a:r>
           </a:p>
         </p:txBody>
@@ -12696,54 +12853,7 @@
       </p:sp>
       <p:sp>
         <p:nvSpPr>
-          <p:cNvPr id="8" name="TextBox 7"/>
-          <p:cNvSpPr txBox="1"/>
-          <p:nvPr/>
-        </p:nvSpPr>
-        <p:spPr>
-          <a:xfrm>
-            <a:off x="10241280" y="6419088"/>
-            <a:ext cx="1463040" cy="365760"/>
-          </a:xfrm>
-          <a:prstGeom prst="rect">
-            <a:avLst/>
-          </a:prstGeom>
-          <a:noFill/>
-        </p:spPr>
-        <p:txBody>
-          <a:bodyPr wrap="square" anchor="ctr" lIns="0" rIns="0" tIns="0" bIns="0">
-            <a:spAutoFit/>
-          </a:bodyPr>
-          <a:lstStyle/>
-          <a:p>
-            <a:pPr algn="r">
-              <a:lnSpc>
-                <a:spcPct val="100000"/>
-              </a:lnSpc>
-              <a:spcBef>
-                <a:spcPts val="0"/>
-              </a:spcBef>
-              <a:spcAft>
-                <a:spcPts val="600"/>
-              </a:spcAft>
-            </a:pPr>
-            <a:r>
-              <a:rPr sz="900" b="1">
-                <a:solidFill>
-                  <a:srgbClr val="6366F1"/>
-                </a:solidFill>
-                <a:latin typeface="NanumGothic"/>
-                <a:ea typeface="NanumGothic"/>
-                <a:cs typeface="NanumGothic"/>
-              </a:rPr>
-              <a:t>Day 1 · 월</a:t>
-            </a:r>
-          </a:p>
-        </p:txBody>
-      </p:sp>
-      <p:sp>
-        <p:nvSpPr>
-          <p:cNvPr id="9" name="Oval 8"/>
+          <p:cNvPr id="8" name="Oval 7"/>
           <p:cNvSpPr/>
           <p:nvPr/>
         </p:nvSpPr>
@@ -12787,7 +12897,7 @@
       </p:sp>
       <p:sp>
         <p:nvSpPr>
-          <p:cNvPr id="10" name="TextBox 9"/>
+          <p:cNvPr id="9" name="TextBox 8"/>
           <p:cNvSpPr txBox="1"/>
           <p:nvPr/>
         </p:nvSpPr>
@@ -12834,7 +12944,7 @@
       </p:sp>
       <p:sp>
         <p:nvSpPr>
-          <p:cNvPr id="11" name="TextBox 10"/>
+          <p:cNvPr id="10" name="TextBox 9"/>
           <p:cNvSpPr txBox="1"/>
           <p:nvPr/>
         </p:nvSpPr>
@@ -12881,7 +12991,7 @@
       </p:sp>
       <p:sp>
         <p:nvSpPr>
-          <p:cNvPr id="12" name="Oval 11"/>
+          <p:cNvPr id="11" name="Oval 10"/>
           <p:cNvSpPr/>
           <p:nvPr/>
         </p:nvSpPr>
@@ -12925,7 +13035,7 @@
       </p:sp>
       <p:sp>
         <p:nvSpPr>
-          <p:cNvPr id="13" name="TextBox 12"/>
+          <p:cNvPr id="12" name="TextBox 11"/>
           <p:cNvSpPr txBox="1"/>
           <p:nvPr/>
         </p:nvSpPr>
@@ -12972,7 +13082,7 @@
       </p:sp>
       <p:sp>
         <p:nvSpPr>
-          <p:cNvPr id="14" name="TextBox 13"/>
+          <p:cNvPr id="13" name="TextBox 12"/>
           <p:cNvSpPr txBox="1"/>
           <p:nvPr/>
         </p:nvSpPr>
@@ -13019,7 +13129,7 @@
       </p:sp>
       <p:sp>
         <p:nvSpPr>
-          <p:cNvPr id="15" name="Oval 14"/>
+          <p:cNvPr id="14" name="Oval 13"/>
           <p:cNvSpPr/>
           <p:nvPr/>
         </p:nvSpPr>
@@ -13063,7 +13173,7 @@
       </p:sp>
       <p:sp>
         <p:nvSpPr>
-          <p:cNvPr id="16" name="TextBox 15"/>
+          <p:cNvPr id="15" name="TextBox 14"/>
           <p:cNvSpPr txBox="1"/>
           <p:nvPr/>
         </p:nvSpPr>
@@ -13110,7 +13220,7 @@
       </p:sp>
       <p:sp>
         <p:nvSpPr>
-          <p:cNvPr id="17" name="TextBox 16"/>
+          <p:cNvPr id="16" name="TextBox 15"/>
           <p:cNvSpPr txBox="1"/>
           <p:nvPr/>
         </p:nvSpPr>
@@ -13157,7 +13267,7 @@
       </p:sp>
       <p:sp>
         <p:nvSpPr>
-          <p:cNvPr id="18" name="Oval 17"/>
+          <p:cNvPr id="17" name="Oval 16"/>
           <p:cNvSpPr/>
           <p:nvPr/>
         </p:nvSpPr>
@@ -13201,7 +13311,7 @@
       </p:sp>
       <p:sp>
         <p:nvSpPr>
-          <p:cNvPr id="19" name="TextBox 18"/>
+          <p:cNvPr id="18" name="TextBox 17"/>
           <p:cNvSpPr txBox="1"/>
           <p:nvPr/>
         </p:nvSpPr>
@@ -13248,7 +13358,7 @@
       </p:sp>
       <p:sp>
         <p:nvSpPr>
-          <p:cNvPr id="20" name="TextBox 19"/>
+          <p:cNvPr id="19" name="TextBox 18"/>
           <p:cNvSpPr txBox="1"/>
           <p:nvPr/>
         </p:nvSpPr>
@@ -13295,7 +13405,7 @@
       </p:sp>
       <p:sp>
         <p:nvSpPr>
-          <p:cNvPr id="21" name="Rounded Rectangle 20"/>
+          <p:cNvPr id="20" name="Rounded Rectangle 19"/>
           <p:cNvSpPr/>
           <p:nvPr/>
         </p:nvSpPr>
@@ -13341,7 +13451,7 @@
       </p:sp>
       <p:sp>
         <p:nvSpPr>
-          <p:cNvPr id="22" name="TextBox 21"/>
+          <p:cNvPr id="21" name="TextBox 20"/>
           <p:cNvSpPr txBox="1"/>
           <p:nvPr/>
         </p:nvSpPr>
@@ -13393,6 +13503,64 @@
                 <a:cs typeface="NanumGothic"/>
               </a:rPr>
               <a:t>능력은 같아도 정렬이 '지시 이행'을 만든다</a:t>
+            </a:r>
+          </a:p>
+        </p:txBody>
+      </p:sp>
+      <p:sp>
+        <p:nvSpPr>
+          <p:cNvPr id="22" name="TextBox 21"/>
+          <p:cNvSpPr txBox="1"/>
+          <p:nvPr/>
+        </p:nvSpPr>
+        <p:spPr>
+          <a:xfrm>
+            <a:off x="8988552" y="6419088"/>
+            <a:ext cx="2697480" cy="365760"/>
+          </a:xfrm>
+          <a:prstGeom prst="rect">
+            <a:avLst/>
+          </a:prstGeom>
+          <a:noFill/>
+        </p:spPr>
+        <p:txBody>
+          <a:bodyPr wrap="square" anchor="ctr" lIns="0" rIns="0" tIns="0" bIns="0">
+            <a:spAutoFit/>
+          </a:bodyPr>
+          <a:lstStyle/>
+          <a:p>
+            <a:pPr algn="r">
+              <a:lnSpc>
+                <a:spcPct val="100000"/>
+              </a:lnSpc>
+              <a:spcBef>
+                <a:spcPts val="0"/>
+              </a:spcBef>
+              <a:spcAft>
+                <a:spcPts val="600"/>
+              </a:spcAft>
+            </a:pPr>
+            <a:r>
+              <a:rPr sz="900" b="1">
+                <a:solidFill>
+                  <a:srgbClr val="6366F1"/>
+                </a:solidFill>
+                <a:latin typeface="NanumGothic"/>
+                <a:ea typeface="NanumGothic"/>
+                <a:cs typeface="NanumGothic"/>
+              </a:rPr>
+              <a:t>Day 1 · 월</a:t>
+            </a:r>
+            <a:r>
+              <a:rPr sz="900" b="1">
+                <a:solidFill>
+                  <a:srgbClr val="64748B"/>
+                </a:solidFill>
+                <a:latin typeface="NanumGothic"/>
+                <a:ea typeface="NanumGothic"/>
+                <a:cs typeface="NanumGothic"/>
+              </a:rPr>
+              <a:t>   ·   19 / 42</a:t>
             </a:r>
           </a:p>
         </p:txBody>
@@ -13690,54 +13858,7 @@
       </p:sp>
       <p:sp>
         <p:nvSpPr>
-          <p:cNvPr id="8" name="TextBox 7"/>
-          <p:cNvSpPr txBox="1"/>
-          <p:nvPr/>
-        </p:nvSpPr>
-        <p:spPr>
-          <a:xfrm>
-            <a:off x="10241280" y="6419088"/>
-            <a:ext cx="1463040" cy="365760"/>
-          </a:xfrm>
-          <a:prstGeom prst="rect">
-            <a:avLst/>
-          </a:prstGeom>
-          <a:noFill/>
-        </p:spPr>
-        <p:txBody>
-          <a:bodyPr wrap="square" anchor="ctr" lIns="0" rIns="0" tIns="0" bIns="0">
-            <a:spAutoFit/>
-          </a:bodyPr>
-          <a:lstStyle/>
-          <a:p>
-            <a:pPr algn="r">
-              <a:lnSpc>
-                <a:spcPct val="100000"/>
-              </a:lnSpc>
-              <a:spcBef>
-                <a:spcPts val="0"/>
-              </a:spcBef>
-              <a:spcAft>
-                <a:spcPts val="600"/>
-              </a:spcAft>
-            </a:pPr>
-            <a:r>
-              <a:rPr sz="900" b="1">
-                <a:solidFill>
-                  <a:srgbClr val="6366F1"/>
-                </a:solidFill>
-                <a:latin typeface="NanumGothic"/>
-                <a:ea typeface="NanumGothic"/>
-                <a:cs typeface="NanumGothic"/>
-              </a:rPr>
-              <a:t>Day 1 · 월</a:t>
-            </a:r>
-          </a:p>
-        </p:txBody>
-      </p:sp>
-      <p:sp>
-        <p:nvSpPr>
-          <p:cNvPr id="9" name="Rounded Rectangle 8"/>
+          <p:cNvPr id="8" name="Rounded Rectangle 7"/>
           <p:cNvSpPr/>
           <p:nvPr/>
         </p:nvSpPr>
@@ -13781,7 +13902,7 @@
       </p:sp>
       <p:sp>
         <p:nvSpPr>
-          <p:cNvPr id="10" name="TextBox 9"/>
+          <p:cNvPr id="9" name="TextBox 8"/>
           <p:cNvSpPr txBox="1"/>
           <p:nvPr/>
         </p:nvSpPr>
@@ -13852,7 +13973,7 @@
       </p:sp>
       <p:sp>
         <p:nvSpPr>
-          <p:cNvPr id="11" name="TextBox 10"/>
+          <p:cNvPr id="10" name="TextBox 9"/>
           <p:cNvSpPr txBox="1"/>
           <p:nvPr/>
         </p:nvSpPr>
@@ -13899,7 +14020,7 @@
       </p:sp>
       <p:sp>
         <p:nvSpPr>
-          <p:cNvPr id="12" name="TextBox 11"/>
+          <p:cNvPr id="11" name="TextBox 10"/>
           <p:cNvSpPr txBox="1"/>
           <p:nvPr/>
         </p:nvSpPr>
@@ -13946,7 +14067,7 @@
       </p:sp>
       <p:sp>
         <p:nvSpPr>
-          <p:cNvPr id="13" name="Rounded Rectangle 12"/>
+          <p:cNvPr id="12" name="Rounded Rectangle 11"/>
           <p:cNvSpPr/>
           <p:nvPr/>
         </p:nvSpPr>
@@ -13992,7 +14113,7 @@
       </p:sp>
       <p:sp>
         <p:nvSpPr>
-          <p:cNvPr id="14" name="TextBox 13"/>
+          <p:cNvPr id="13" name="TextBox 12"/>
           <p:cNvSpPr txBox="1"/>
           <p:nvPr/>
         </p:nvSpPr>
@@ -14063,7 +14184,7 @@
       </p:sp>
       <p:sp>
         <p:nvSpPr>
-          <p:cNvPr id="15" name="TextBox 14"/>
+          <p:cNvPr id="14" name="TextBox 13"/>
           <p:cNvSpPr txBox="1"/>
           <p:nvPr/>
         </p:nvSpPr>
@@ -14110,7 +14231,7 @@
       </p:sp>
       <p:sp>
         <p:nvSpPr>
-          <p:cNvPr id="16" name="Rounded Rectangle 15"/>
+          <p:cNvPr id="15" name="Rounded Rectangle 14"/>
           <p:cNvSpPr/>
           <p:nvPr/>
         </p:nvSpPr>
@@ -14156,7 +14277,7 @@
       </p:sp>
       <p:sp>
         <p:nvSpPr>
-          <p:cNvPr id="17" name="TextBox 16"/>
+          <p:cNvPr id="16" name="TextBox 15"/>
           <p:cNvSpPr txBox="1"/>
           <p:nvPr/>
         </p:nvSpPr>
@@ -14227,7 +14348,7 @@
       </p:sp>
       <p:sp>
         <p:nvSpPr>
-          <p:cNvPr id="18" name="TextBox 17"/>
+          <p:cNvPr id="17" name="TextBox 16"/>
           <p:cNvSpPr txBox="1"/>
           <p:nvPr/>
         </p:nvSpPr>
@@ -14274,7 +14395,7 @@
       </p:sp>
       <p:sp>
         <p:nvSpPr>
-          <p:cNvPr id="19" name="Rounded Rectangle 18"/>
+          <p:cNvPr id="18" name="Rounded Rectangle 17"/>
           <p:cNvSpPr/>
           <p:nvPr/>
         </p:nvSpPr>
@@ -14320,7 +14441,7 @@
       </p:sp>
       <p:sp>
         <p:nvSpPr>
-          <p:cNvPr id="20" name="TextBox 19"/>
+          <p:cNvPr id="19" name="TextBox 18"/>
           <p:cNvSpPr txBox="1"/>
           <p:nvPr/>
         </p:nvSpPr>
@@ -14391,7 +14512,7 @@
       </p:sp>
       <p:sp>
         <p:nvSpPr>
-          <p:cNvPr id="21" name="TextBox 20"/>
+          <p:cNvPr id="20" name="TextBox 19"/>
           <p:cNvSpPr txBox="1"/>
           <p:nvPr/>
         </p:nvSpPr>
@@ -14438,7 +14559,7 @@
       </p:sp>
       <p:sp>
         <p:nvSpPr>
-          <p:cNvPr id="22" name="Rounded Rectangle 21"/>
+          <p:cNvPr id="21" name="Rounded Rectangle 20"/>
           <p:cNvSpPr/>
           <p:nvPr/>
         </p:nvSpPr>
@@ -14484,7 +14605,7 @@
       </p:sp>
       <p:sp>
         <p:nvSpPr>
-          <p:cNvPr id="23" name="TextBox 22"/>
+          <p:cNvPr id="22" name="TextBox 21"/>
           <p:cNvSpPr txBox="1"/>
           <p:nvPr/>
         </p:nvSpPr>
@@ -14555,7 +14676,7 @@
       </p:sp>
       <p:sp>
         <p:nvSpPr>
-          <p:cNvPr id="24" name="TextBox 23"/>
+          <p:cNvPr id="23" name="TextBox 22"/>
           <p:cNvSpPr txBox="1"/>
           <p:nvPr/>
         </p:nvSpPr>
@@ -14602,7 +14723,7 @@
       </p:sp>
       <p:sp>
         <p:nvSpPr>
-          <p:cNvPr id="25" name="TextBox 24"/>
+          <p:cNvPr id="24" name="TextBox 23"/>
           <p:cNvSpPr txBox="1"/>
           <p:nvPr/>
         </p:nvSpPr>
@@ -14654,6 +14775,64 @@
                 <a:cs typeface="NanumGothic"/>
               </a:rPr>
               <a:t>이론 → 도구 → 실전 → 결과 → 발표</a:t>
+            </a:r>
+          </a:p>
+        </p:txBody>
+      </p:sp>
+      <p:sp>
+        <p:nvSpPr>
+          <p:cNvPr id="25" name="TextBox 24"/>
+          <p:cNvSpPr txBox="1"/>
+          <p:nvPr/>
+        </p:nvSpPr>
+        <p:spPr>
+          <a:xfrm>
+            <a:off x="8988552" y="6419088"/>
+            <a:ext cx="2697480" cy="365760"/>
+          </a:xfrm>
+          <a:prstGeom prst="rect">
+            <a:avLst/>
+          </a:prstGeom>
+          <a:noFill/>
+        </p:spPr>
+        <p:txBody>
+          <a:bodyPr wrap="square" anchor="ctr" lIns="0" rIns="0" tIns="0" bIns="0">
+            <a:spAutoFit/>
+          </a:bodyPr>
+          <a:lstStyle/>
+          <a:p>
+            <a:pPr algn="r">
+              <a:lnSpc>
+                <a:spcPct val="100000"/>
+              </a:lnSpc>
+              <a:spcBef>
+                <a:spcPts val="0"/>
+              </a:spcBef>
+              <a:spcAft>
+                <a:spcPts val="600"/>
+              </a:spcAft>
+            </a:pPr>
+            <a:r>
+              <a:rPr sz="900" b="1">
+                <a:solidFill>
+                  <a:srgbClr val="6366F1"/>
+                </a:solidFill>
+                <a:latin typeface="NanumGothic"/>
+                <a:ea typeface="NanumGothic"/>
+                <a:cs typeface="NanumGothic"/>
+              </a:rPr>
+              <a:t>Day 1 · 월</a:t>
+            </a:r>
+            <a:r>
+              <a:rPr sz="900" b="1">
+                <a:solidFill>
+                  <a:srgbClr val="64748B"/>
+                </a:solidFill>
+                <a:latin typeface="NanumGothic"/>
+                <a:ea typeface="NanumGothic"/>
+                <a:cs typeface="NanumGothic"/>
+              </a:rPr>
+              <a:t>   ·   2 / 42</a:t>
             </a:r>
           </a:p>
         </p:txBody>
@@ -14951,54 +15130,7 @@
       </p:sp>
       <p:sp>
         <p:nvSpPr>
-          <p:cNvPr id="8" name="TextBox 7"/>
-          <p:cNvSpPr txBox="1"/>
-          <p:nvPr/>
-        </p:nvSpPr>
-        <p:spPr>
-          <a:xfrm>
-            <a:off x="10241280" y="6419088"/>
-            <a:ext cx="1463040" cy="365760"/>
-          </a:xfrm>
-          <a:prstGeom prst="rect">
-            <a:avLst/>
-          </a:prstGeom>
-          <a:noFill/>
-        </p:spPr>
-        <p:txBody>
-          <a:bodyPr wrap="square" anchor="ctr" lIns="0" rIns="0" tIns="0" bIns="0">
-            <a:spAutoFit/>
-          </a:bodyPr>
-          <a:lstStyle/>
-          <a:p>
-            <a:pPr algn="r">
-              <a:lnSpc>
-                <a:spcPct val="100000"/>
-              </a:lnSpc>
-              <a:spcBef>
-                <a:spcPts val="0"/>
-              </a:spcBef>
-              <a:spcAft>
-                <a:spcPts val="600"/>
-              </a:spcAft>
-            </a:pPr>
-            <a:r>
-              <a:rPr sz="900" b="1">
-                <a:solidFill>
-                  <a:srgbClr val="6366F1"/>
-                </a:solidFill>
-                <a:latin typeface="NanumGothic"/>
-                <a:ea typeface="NanumGothic"/>
-                <a:cs typeface="NanumGothic"/>
-              </a:rPr>
-              <a:t>Day 1 · 월</a:t>
-            </a:r>
-          </a:p>
-        </p:txBody>
-      </p:sp>
-      <p:sp>
-        <p:nvSpPr>
-          <p:cNvPr id="9" name="Rounded Rectangle 8"/>
+          <p:cNvPr id="8" name="Rounded Rectangle 7"/>
           <p:cNvSpPr/>
           <p:nvPr/>
         </p:nvSpPr>
@@ -15044,7 +15176,7 @@
       </p:sp>
       <p:sp>
         <p:nvSpPr>
-          <p:cNvPr id="10" name="Rectangle 9"/>
+          <p:cNvPr id="9" name="Rectangle 8"/>
           <p:cNvSpPr/>
           <p:nvPr/>
         </p:nvSpPr>
@@ -15088,7 +15220,7 @@
       </p:sp>
       <p:sp>
         <p:nvSpPr>
-          <p:cNvPr id="11" name="TextBox 10"/>
+          <p:cNvPr id="10" name="TextBox 9"/>
           <p:cNvSpPr txBox="1"/>
           <p:nvPr/>
         </p:nvSpPr>
@@ -15135,7 +15267,7 @@
       </p:sp>
       <p:sp>
         <p:nvSpPr>
-          <p:cNvPr id="12" name="TextBox 11"/>
+          <p:cNvPr id="11" name="TextBox 10"/>
           <p:cNvSpPr txBox="1"/>
           <p:nvPr/>
         </p:nvSpPr>
@@ -15182,7 +15314,7 @@
       </p:sp>
       <p:sp>
         <p:nvSpPr>
-          <p:cNvPr id="13" name="TextBox 12"/>
+          <p:cNvPr id="12" name="TextBox 11"/>
           <p:cNvSpPr txBox="1"/>
           <p:nvPr/>
         </p:nvSpPr>
@@ -15229,7 +15361,7 @@
       </p:sp>
       <p:sp>
         <p:nvSpPr>
-          <p:cNvPr id="14" name="TextBox 13"/>
+          <p:cNvPr id="13" name="TextBox 12"/>
           <p:cNvSpPr txBox="1"/>
           <p:nvPr/>
         </p:nvSpPr>
@@ -15276,7 +15408,7 @@
       </p:sp>
       <p:sp>
         <p:nvSpPr>
-          <p:cNvPr id="15" name="Rounded Rectangle 14"/>
+          <p:cNvPr id="14" name="Rounded Rectangle 13"/>
           <p:cNvSpPr/>
           <p:nvPr/>
         </p:nvSpPr>
@@ -15322,7 +15454,7 @@
       </p:sp>
       <p:sp>
         <p:nvSpPr>
-          <p:cNvPr id="16" name="Rectangle 15"/>
+          <p:cNvPr id="15" name="Rectangle 14"/>
           <p:cNvSpPr/>
           <p:nvPr/>
         </p:nvSpPr>
@@ -15366,7 +15498,7 @@
       </p:sp>
       <p:sp>
         <p:nvSpPr>
-          <p:cNvPr id="17" name="TextBox 16"/>
+          <p:cNvPr id="16" name="TextBox 15"/>
           <p:cNvSpPr txBox="1"/>
           <p:nvPr/>
         </p:nvSpPr>
@@ -15413,7 +15545,7 @@
       </p:sp>
       <p:sp>
         <p:nvSpPr>
-          <p:cNvPr id="18" name="TextBox 17"/>
+          <p:cNvPr id="17" name="TextBox 16"/>
           <p:cNvSpPr txBox="1"/>
           <p:nvPr/>
         </p:nvSpPr>
@@ -15460,7 +15592,7 @@
       </p:sp>
       <p:sp>
         <p:nvSpPr>
-          <p:cNvPr id="19" name="TextBox 18"/>
+          <p:cNvPr id="18" name="TextBox 17"/>
           <p:cNvSpPr txBox="1"/>
           <p:nvPr/>
         </p:nvSpPr>
@@ -15507,7 +15639,7 @@
       </p:sp>
       <p:sp>
         <p:nvSpPr>
-          <p:cNvPr id="20" name="TextBox 19"/>
+          <p:cNvPr id="19" name="TextBox 18"/>
           <p:cNvSpPr txBox="1"/>
           <p:nvPr/>
         </p:nvSpPr>
@@ -15554,7 +15686,7 @@
       </p:sp>
       <p:sp>
         <p:nvSpPr>
-          <p:cNvPr id="21" name="Rounded Rectangle 20"/>
+          <p:cNvPr id="20" name="Rounded Rectangle 19"/>
           <p:cNvSpPr/>
           <p:nvPr/>
         </p:nvSpPr>
@@ -15600,7 +15732,7 @@
       </p:sp>
       <p:sp>
         <p:nvSpPr>
-          <p:cNvPr id="22" name="Rectangle 21"/>
+          <p:cNvPr id="21" name="Rectangle 20"/>
           <p:cNvSpPr/>
           <p:nvPr/>
         </p:nvSpPr>
@@ -15644,7 +15776,7 @@
       </p:sp>
       <p:sp>
         <p:nvSpPr>
-          <p:cNvPr id="23" name="TextBox 22"/>
+          <p:cNvPr id="22" name="TextBox 21"/>
           <p:cNvSpPr txBox="1"/>
           <p:nvPr/>
         </p:nvSpPr>
@@ -15691,7 +15823,7 @@
       </p:sp>
       <p:sp>
         <p:nvSpPr>
-          <p:cNvPr id="24" name="TextBox 23"/>
+          <p:cNvPr id="23" name="TextBox 22"/>
           <p:cNvSpPr txBox="1"/>
           <p:nvPr/>
         </p:nvSpPr>
@@ -15738,7 +15870,7 @@
       </p:sp>
       <p:sp>
         <p:nvSpPr>
-          <p:cNvPr id="25" name="TextBox 24"/>
+          <p:cNvPr id="24" name="TextBox 23"/>
           <p:cNvSpPr txBox="1"/>
           <p:nvPr/>
         </p:nvSpPr>
@@ -15785,7 +15917,7 @@
       </p:sp>
       <p:sp>
         <p:nvSpPr>
-          <p:cNvPr id="26" name="Rounded Rectangle 25"/>
+          <p:cNvPr id="25" name="Rounded Rectangle 24"/>
           <p:cNvSpPr/>
           <p:nvPr/>
         </p:nvSpPr>
@@ -15831,7 +15963,7 @@
       </p:sp>
       <p:sp>
         <p:nvSpPr>
-          <p:cNvPr id="27" name="TextBox 26"/>
+          <p:cNvPr id="26" name="TextBox 25"/>
           <p:cNvSpPr txBox="1"/>
           <p:nvPr/>
         </p:nvSpPr>
@@ -15883,6 +16015,64 @@
                 <a:cs typeface="NanumGothic"/>
               </a:rPr>
               <a:t>이제 각 단계를 하나씩</a:t>
+            </a:r>
+          </a:p>
+        </p:txBody>
+      </p:sp>
+      <p:sp>
+        <p:nvSpPr>
+          <p:cNvPr id="27" name="TextBox 26"/>
+          <p:cNvSpPr txBox="1"/>
+          <p:nvPr/>
+        </p:nvSpPr>
+        <p:spPr>
+          <a:xfrm>
+            <a:off x="8988552" y="6419088"/>
+            <a:ext cx="2697480" cy="365760"/>
+          </a:xfrm>
+          <a:prstGeom prst="rect">
+            <a:avLst/>
+          </a:prstGeom>
+          <a:noFill/>
+        </p:spPr>
+        <p:txBody>
+          <a:bodyPr wrap="square" anchor="ctr" lIns="0" rIns="0" tIns="0" bIns="0">
+            <a:spAutoFit/>
+          </a:bodyPr>
+          <a:lstStyle/>
+          <a:p>
+            <a:pPr algn="r">
+              <a:lnSpc>
+                <a:spcPct val="100000"/>
+              </a:lnSpc>
+              <a:spcBef>
+                <a:spcPts val="0"/>
+              </a:spcBef>
+              <a:spcAft>
+                <a:spcPts val="600"/>
+              </a:spcAft>
+            </a:pPr>
+            <a:r>
+              <a:rPr sz="900" b="1">
+                <a:solidFill>
+                  <a:srgbClr val="6366F1"/>
+                </a:solidFill>
+                <a:latin typeface="NanumGothic"/>
+                <a:ea typeface="NanumGothic"/>
+                <a:cs typeface="NanumGothic"/>
+              </a:rPr>
+              <a:t>Day 1 · 월</a:t>
+            </a:r>
+            <a:r>
+              <a:rPr sz="900" b="1">
+                <a:solidFill>
+                  <a:srgbClr val="64748B"/>
+                </a:solidFill>
+                <a:latin typeface="NanumGothic"/>
+                <a:ea typeface="NanumGothic"/>
+                <a:cs typeface="NanumGothic"/>
+              </a:rPr>
+              <a:t>   ·   20 / 42</a:t>
             </a:r>
           </a:p>
         </p:txBody>
@@ -16180,54 +16370,7 @@
       </p:sp>
       <p:sp>
         <p:nvSpPr>
-          <p:cNvPr id="8" name="TextBox 7"/>
-          <p:cNvSpPr txBox="1"/>
-          <p:nvPr/>
-        </p:nvSpPr>
-        <p:spPr>
-          <a:xfrm>
-            <a:off x="10241280" y="6419088"/>
-            <a:ext cx="1463040" cy="365760"/>
-          </a:xfrm>
-          <a:prstGeom prst="rect">
-            <a:avLst/>
-          </a:prstGeom>
-          <a:noFill/>
-        </p:spPr>
-        <p:txBody>
-          <a:bodyPr wrap="square" anchor="ctr" lIns="0" rIns="0" tIns="0" bIns="0">
-            <a:spAutoFit/>
-          </a:bodyPr>
-          <a:lstStyle/>
-          <a:p>
-            <a:pPr algn="r">
-              <a:lnSpc>
-                <a:spcPct val="100000"/>
-              </a:lnSpc>
-              <a:spcBef>
-                <a:spcPts val="0"/>
-              </a:spcBef>
-              <a:spcAft>
-                <a:spcPts val="600"/>
-              </a:spcAft>
-            </a:pPr>
-            <a:r>
-              <a:rPr sz="900" b="1">
-                <a:solidFill>
-                  <a:srgbClr val="6366F1"/>
-                </a:solidFill>
-                <a:latin typeface="NanumGothic"/>
-                <a:ea typeface="NanumGothic"/>
-                <a:cs typeface="NanumGothic"/>
-              </a:rPr>
-              <a:t>Day 1 · 월</a:t>
-            </a:r>
-          </a:p>
-        </p:txBody>
-      </p:sp>
-      <p:sp>
-        <p:nvSpPr>
-          <p:cNvPr id="9" name="Oval 8"/>
+          <p:cNvPr id="8" name="Oval 7"/>
           <p:cNvSpPr/>
           <p:nvPr/>
         </p:nvSpPr>
@@ -16271,7 +16414,7 @@
       </p:sp>
       <p:sp>
         <p:nvSpPr>
-          <p:cNvPr id="10" name="TextBox 9"/>
+          <p:cNvPr id="9" name="TextBox 8"/>
           <p:cNvSpPr txBox="1"/>
           <p:nvPr/>
         </p:nvSpPr>
@@ -16318,7 +16461,7 @@
       </p:sp>
       <p:sp>
         <p:nvSpPr>
-          <p:cNvPr id="11" name="TextBox 10"/>
+          <p:cNvPr id="10" name="TextBox 9"/>
           <p:cNvSpPr txBox="1"/>
           <p:nvPr/>
         </p:nvSpPr>
@@ -16365,7 +16508,7 @@
       </p:sp>
       <p:sp>
         <p:nvSpPr>
-          <p:cNvPr id="12" name="Oval 11"/>
+          <p:cNvPr id="11" name="Oval 10"/>
           <p:cNvSpPr/>
           <p:nvPr/>
         </p:nvSpPr>
@@ -16409,7 +16552,7 @@
       </p:sp>
       <p:sp>
         <p:nvSpPr>
-          <p:cNvPr id="13" name="TextBox 12"/>
+          <p:cNvPr id="12" name="TextBox 11"/>
           <p:cNvSpPr txBox="1"/>
           <p:nvPr/>
         </p:nvSpPr>
@@ -16456,7 +16599,7 @@
       </p:sp>
       <p:sp>
         <p:nvSpPr>
-          <p:cNvPr id="14" name="TextBox 13"/>
+          <p:cNvPr id="13" name="TextBox 12"/>
           <p:cNvSpPr txBox="1"/>
           <p:nvPr/>
         </p:nvSpPr>
@@ -16503,7 +16646,7 @@
       </p:sp>
       <p:sp>
         <p:nvSpPr>
-          <p:cNvPr id="15" name="Oval 14"/>
+          <p:cNvPr id="14" name="Oval 13"/>
           <p:cNvSpPr/>
           <p:nvPr/>
         </p:nvSpPr>
@@ -16547,7 +16690,7 @@
       </p:sp>
       <p:sp>
         <p:nvSpPr>
-          <p:cNvPr id="16" name="TextBox 15"/>
+          <p:cNvPr id="15" name="TextBox 14"/>
           <p:cNvSpPr txBox="1"/>
           <p:nvPr/>
         </p:nvSpPr>
@@ -16594,7 +16737,7 @@
       </p:sp>
       <p:sp>
         <p:nvSpPr>
-          <p:cNvPr id="17" name="TextBox 16"/>
+          <p:cNvPr id="16" name="TextBox 15"/>
           <p:cNvSpPr txBox="1"/>
           <p:nvPr/>
         </p:nvSpPr>
@@ -16635,6 +16778,64 @@
                 <a:cs typeface="NanumGothic"/>
               </a:rPr>
               <a:t>모범답안을 따라 쓰며 배우는 단계</a:t>
+            </a:r>
+          </a:p>
+        </p:txBody>
+      </p:sp>
+      <p:sp>
+        <p:nvSpPr>
+          <p:cNvPr id="17" name="TextBox 16"/>
+          <p:cNvSpPr txBox="1"/>
+          <p:nvPr/>
+        </p:nvSpPr>
+        <p:spPr>
+          <a:xfrm>
+            <a:off x="8988552" y="6419088"/>
+            <a:ext cx="2697480" cy="365760"/>
+          </a:xfrm>
+          <a:prstGeom prst="rect">
+            <a:avLst/>
+          </a:prstGeom>
+          <a:noFill/>
+        </p:spPr>
+        <p:txBody>
+          <a:bodyPr wrap="square" anchor="ctr" lIns="0" rIns="0" tIns="0" bIns="0">
+            <a:spAutoFit/>
+          </a:bodyPr>
+          <a:lstStyle/>
+          <a:p>
+            <a:pPr algn="r">
+              <a:lnSpc>
+                <a:spcPct val="100000"/>
+              </a:lnSpc>
+              <a:spcBef>
+                <a:spcPts val="0"/>
+              </a:spcBef>
+              <a:spcAft>
+                <a:spcPts val="600"/>
+              </a:spcAft>
+            </a:pPr>
+            <a:r>
+              <a:rPr sz="900" b="1">
+                <a:solidFill>
+                  <a:srgbClr val="6366F1"/>
+                </a:solidFill>
+                <a:latin typeface="NanumGothic"/>
+                <a:ea typeface="NanumGothic"/>
+                <a:cs typeface="NanumGothic"/>
+              </a:rPr>
+              <a:t>Day 1 · 월</a:t>
+            </a:r>
+            <a:r>
+              <a:rPr sz="900" b="1">
+                <a:solidFill>
+                  <a:srgbClr val="64748B"/>
+                </a:solidFill>
+                <a:latin typeface="NanumGothic"/>
+                <a:ea typeface="NanumGothic"/>
+                <a:cs typeface="NanumGothic"/>
+              </a:rPr>
+              <a:t>   ·   21 / 42</a:t>
             </a:r>
           </a:p>
         </p:txBody>
@@ -16932,54 +17133,7 @@
       </p:sp>
       <p:sp>
         <p:nvSpPr>
-          <p:cNvPr id="8" name="TextBox 7"/>
-          <p:cNvSpPr txBox="1"/>
-          <p:nvPr/>
-        </p:nvSpPr>
-        <p:spPr>
-          <a:xfrm>
-            <a:off x="10241280" y="6419088"/>
-            <a:ext cx="1463040" cy="365760"/>
-          </a:xfrm>
-          <a:prstGeom prst="rect">
-            <a:avLst/>
-          </a:prstGeom>
-          <a:noFill/>
-        </p:spPr>
-        <p:txBody>
-          <a:bodyPr wrap="square" anchor="ctr" lIns="0" rIns="0" tIns="0" bIns="0">
-            <a:spAutoFit/>
-          </a:bodyPr>
-          <a:lstStyle/>
-          <a:p>
-            <a:pPr algn="r">
-              <a:lnSpc>
-                <a:spcPct val="100000"/>
-              </a:lnSpc>
-              <a:spcBef>
-                <a:spcPts val="0"/>
-              </a:spcBef>
-              <a:spcAft>
-                <a:spcPts val="600"/>
-              </a:spcAft>
-            </a:pPr>
-            <a:r>
-              <a:rPr sz="900" b="1">
-                <a:solidFill>
-                  <a:srgbClr val="6366F1"/>
-                </a:solidFill>
-                <a:latin typeface="NanumGothic"/>
-                <a:ea typeface="NanumGothic"/>
-                <a:cs typeface="NanumGothic"/>
-              </a:rPr>
-              <a:t>Day 1 · 월</a:t>
-            </a:r>
-          </a:p>
-        </p:txBody>
-      </p:sp>
-      <p:sp>
-        <p:nvSpPr>
-          <p:cNvPr id="9" name="Oval 8"/>
+          <p:cNvPr id="8" name="Oval 7"/>
           <p:cNvSpPr/>
           <p:nvPr/>
         </p:nvSpPr>
@@ -17023,7 +17177,7 @@
       </p:sp>
       <p:sp>
         <p:nvSpPr>
-          <p:cNvPr id="10" name="TextBox 9"/>
+          <p:cNvPr id="9" name="TextBox 8"/>
           <p:cNvSpPr txBox="1"/>
           <p:nvPr/>
         </p:nvSpPr>
@@ -17070,7 +17224,7 @@
       </p:sp>
       <p:sp>
         <p:nvSpPr>
-          <p:cNvPr id="11" name="TextBox 10"/>
+          <p:cNvPr id="10" name="TextBox 9"/>
           <p:cNvSpPr txBox="1"/>
           <p:nvPr/>
         </p:nvSpPr>
@@ -17117,7 +17271,7 @@
       </p:sp>
       <p:sp>
         <p:nvSpPr>
-          <p:cNvPr id="12" name="Oval 11"/>
+          <p:cNvPr id="11" name="Oval 10"/>
           <p:cNvSpPr/>
           <p:nvPr/>
         </p:nvSpPr>
@@ -17161,7 +17315,7 @@
       </p:sp>
       <p:sp>
         <p:nvSpPr>
-          <p:cNvPr id="13" name="TextBox 12"/>
+          <p:cNvPr id="12" name="TextBox 11"/>
           <p:cNvSpPr txBox="1"/>
           <p:nvPr/>
         </p:nvSpPr>
@@ -17208,7 +17362,7 @@
       </p:sp>
       <p:sp>
         <p:nvSpPr>
-          <p:cNvPr id="14" name="TextBox 13"/>
+          <p:cNvPr id="13" name="TextBox 12"/>
           <p:cNvSpPr txBox="1"/>
           <p:nvPr/>
         </p:nvSpPr>
@@ -17255,7 +17409,7 @@
       </p:sp>
       <p:sp>
         <p:nvSpPr>
-          <p:cNvPr id="15" name="Oval 14"/>
+          <p:cNvPr id="14" name="Oval 13"/>
           <p:cNvSpPr/>
           <p:nvPr/>
         </p:nvSpPr>
@@ -17299,7 +17453,7 @@
       </p:sp>
       <p:sp>
         <p:nvSpPr>
-          <p:cNvPr id="16" name="TextBox 15"/>
+          <p:cNvPr id="15" name="TextBox 14"/>
           <p:cNvSpPr txBox="1"/>
           <p:nvPr/>
         </p:nvSpPr>
@@ -17346,7 +17500,7 @@
       </p:sp>
       <p:sp>
         <p:nvSpPr>
-          <p:cNvPr id="17" name="TextBox 16"/>
+          <p:cNvPr id="16" name="TextBox 15"/>
           <p:cNvSpPr txBox="1"/>
           <p:nvPr/>
         </p:nvSpPr>
@@ -17387,6 +17541,64 @@
                 <a:cs typeface="NanumGothic"/>
               </a:rPr>
               <a:t>사람이 매번 평가할 수 없으니 자동 채점기를 만든다</a:t>
+            </a:r>
+          </a:p>
+        </p:txBody>
+      </p:sp>
+      <p:sp>
+        <p:nvSpPr>
+          <p:cNvPr id="17" name="TextBox 16"/>
+          <p:cNvSpPr txBox="1"/>
+          <p:nvPr/>
+        </p:nvSpPr>
+        <p:spPr>
+          <a:xfrm>
+            <a:off x="8988552" y="6419088"/>
+            <a:ext cx="2697480" cy="365760"/>
+          </a:xfrm>
+          <a:prstGeom prst="rect">
+            <a:avLst/>
+          </a:prstGeom>
+          <a:noFill/>
+        </p:spPr>
+        <p:txBody>
+          <a:bodyPr wrap="square" anchor="ctr" lIns="0" rIns="0" tIns="0" bIns="0">
+            <a:spAutoFit/>
+          </a:bodyPr>
+          <a:lstStyle/>
+          <a:p>
+            <a:pPr algn="r">
+              <a:lnSpc>
+                <a:spcPct val="100000"/>
+              </a:lnSpc>
+              <a:spcBef>
+                <a:spcPts val="0"/>
+              </a:spcBef>
+              <a:spcAft>
+                <a:spcPts val="600"/>
+              </a:spcAft>
+            </a:pPr>
+            <a:r>
+              <a:rPr sz="900" b="1">
+                <a:solidFill>
+                  <a:srgbClr val="6366F1"/>
+                </a:solidFill>
+                <a:latin typeface="NanumGothic"/>
+                <a:ea typeface="NanumGothic"/>
+                <a:cs typeface="NanumGothic"/>
+              </a:rPr>
+              <a:t>Day 1 · 월</a:t>
+            </a:r>
+            <a:r>
+              <a:rPr sz="900" b="1">
+                <a:solidFill>
+                  <a:srgbClr val="64748B"/>
+                </a:solidFill>
+                <a:latin typeface="NanumGothic"/>
+                <a:ea typeface="NanumGothic"/>
+                <a:cs typeface="NanumGothic"/>
+              </a:rPr>
+              <a:t>   ·   22 / 42</a:t>
             </a:r>
           </a:p>
         </p:txBody>
@@ -17684,54 +17896,7 @@
       </p:sp>
       <p:sp>
         <p:nvSpPr>
-          <p:cNvPr id="8" name="TextBox 7"/>
-          <p:cNvSpPr txBox="1"/>
-          <p:nvPr/>
-        </p:nvSpPr>
-        <p:spPr>
-          <a:xfrm>
-            <a:off x="10241280" y="6419088"/>
-            <a:ext cx="1463040" cy="365760"/>
-          </a:xfrm>
-          <a:prstGeom prst="rect">
-            <a:avLst/>
-          </a:prstGeom>
-          <a:noFill/>
-        </p:spPr>
-        <p:txBody>
-          <a:bodyPr wrap="square" anchor="ctr" lIns="0" rIns="0" tIns="0" bIns="0">
-            <a:spAutoFit/>
-          </a:bodyPr>
-          <a:lstStyle/>
-          <a:p>
-            <a:pPr algn="r">
-              <a:lnSpc>
-                <a:spcPct val="100000"/>
-              </a:lnSpc>
-              <a:spcBef>
-                <a:spcPts val="0"/>
-              </a:spcBef>
-              <a:spcAft>
-                <a:spcPts val="600"/>
-              </a:spcAft>
-            </a:pPr>
-            <a:r>
-              <a:rPr sz="900" b="1">
-                <a:solidFill>
-                  <a:srgbClr val="6366F1"/>
-                </a:solidFill>
-                <a:latin typeface="NanumGothic"/>
-                <a:ea typeface="NanumGothic"/>
-                <a:cs typeface="NanumGothic"/>
-              </a:rPr>
-              <a:t>Day 1 · 월</a:t>
-            </a:r>
-          </a:p>
-        </p:txBody>
-      </p:sp>
-      <p:sp>
-        <p:nvSpPr>
-          <p:cNvPr id="9" name="Oval 8"/>
+          <p:cNvPr id="8" name="Oval 7"/>
           <p:cNvSpPr/>
           <p:nvPr/>
         </p:nvSpPr>
@@ -17775,7 +17940,7 @@
       </p:sp>
       <p:sp>
         <p:nvSpPr>
-          <p:cNvPr id="10" name="TextBox 9"/>
+          <p:cNvPr id="9" name="TextBox 8"/>
           <p:cNvSpPr txBox="1"/>
           <p:nvPr/>
         </p:nvSpPr>
@@ -17822,7 +17987,7 @@
       </p:sp>
       <p:sp>
         <p:nvSpPr>
-          <p:cNvPr id="11" name="TextBox 10"/>
+          <p:cNvPr id="10" name="TextBox 9"/>
           <p:cNvSpPr txBox="1"/>
           <p:nvPr/>
         </p:nvSpPr>
@@ -17869,7 +18034,7 @@
       </p:sp>
       <p:sp>
         <p:nvSpPr>
-          <p:cNvPr id="12" name="Oval 11"/>
+          <p:cNvPr id="11" name="Oval 10"/>
           <p:cNvSpPr/>
           <p:nvPr/>
         </p:nvSpPr>
@@ -17913,7 +18078,7 @@
       </p:sp>
       <p:sp>
         <p:nvSpPr>
-          <p:cNvPr id="13" name="TextBox 12"/>
+          <p:cNvPr id="12" name="TextBox 11"/>
           <p:cNvSpPr txBox="1"/>
           <p:nvPr/>
         </p:nvSpPr>
@@ -17960,7 +18125,7 @@
       </p:sp>
       <p:sp>
         <p:nvSpPr>
-          <p:cNvPr id="14" name="TextBox 13"/>
+          <p:cNvPr id="13" name="TextBox 12"/>
           <p:cNvSpPr txBox="1"/>
           <p:nvPr/>
         </p:nvSpPr>
@@ -18007,7 +18172,7 @@
       </p:sp>
       <p:sp>
         <p:nvSpPr>
-          <p:cNvPr id="15" name="Oval 14"/>
+          <p:cNvPr id="14" name="Oval 13"/>
           <p:cNvSpPr/>
           <p:nvPr/>
         </p:nvSpPr>
@@ -18051,7 +18216,7 @@
       </p:sp>
       <p:sp>
         <p:nvSpPr>
-          <p:cNvPr id="16" name="TextBox 15"/>
+          <p:cNvPr id="15" name="TextBox 14"/>
           <p:cNvSpPr txBox="1"/>
           <p:nvPr/>
         </p:nvSpPr>
@@ -18098,7 +18263,7 @@
       </p:sp>
       <p:sp>
         <p:nvSpPr>
-          <p:cNvPr id="17" name="TextBox 16"/>
+          <p:cNvPr id="16" name="TextBox 15"/>
           <p:cNvSpPr txBox="1"/>
           <p:nvPr/>
         </p:nvSpPr>
@@ -18139,6 +18304,64 @@
                 <a:cs typeface="NanumGothic"/>
               </a:rPr>
               <a:t>과하면 아부하거나 뻔한 답만 — 균형 필요</a:t>
+            </a:r>
+          </a:p>
+        </p:txBody>
+      </p:sp>
+      <p:sp>
+        <p:nvSpPr>
+          <p:cNvPr id="17" name="TextBox 16"/>
+          <p:cNvSpPr txBox="1"/>
+          <p:nvPr/>
+        </p:nvSpPr>
+        <p:spPr>
+          <a:xfrm>
+            <a:off x="8988552" y="6419088"/>
+            <a:ext cx="2697480" cy="365760"/>
+          </a:xfrm>
+          <a:prstGeom prst="rect">
+            <a:avLst/>
+          </a:prstGeom>
+          <a:noFill/>
+        </p:spPr>
+        <p:txBody>
+          <a:bodyPr wrap="square" anchor="ctr" lIns="0" rIns="0" tIns="0" bIns="0">
+            <a:spAutoFit/>
+          </a:bodyPr>
+          <a:lstStyle/>
+          <a:p>
+            <a:pPr algn="r">
+              <a:lnSpc>
+                <a:spcPct val="100000"/>
+              </a:lnSpc>
+              <a:spcBef>
+                <a:spcPts val="0"/>
+              </a:spcBef>
+              <a:spcAft>
+                <a:spcPts val="600"/>
+              </a:spcAft>
+            </a:pPr>
+            <a:r>
+              <a:rPr sz="900" b="1">
+                <a:solidFill>
+                  <a:srgbClr val="6366F1"/>
+                </a:solidFill>
+                <a:latin typeface="NanumGothic"/>
+                <a:ea typeface="NanumGothic"/>
+                <a:cs typeface="NanumGothic"/>
+              </a:rPr>
+              <a:t>Day 1 · 월</a:t>
+            </a:r>
+            <a:r>
+              <a:rPr sz="900" b="1">
+                <a:solidFill>
+                  <a:srgbClr val="64748B"/>
+                </a:solidFill>
+                <a:latin typeface="NanumGothic"/>
+                <a:ea typeface="NanumGothic"/>
+                <a:cs typeface="NanumGothic"/>
+              </a:rPr>
+              <a:t>   ·   23 / 42</a:t>
             </a:r>
           </a:p>
         </p:txBody>
@@ -18436,54 +18659,7 @@
       </p:sp>
       <p:sp>
         <p:nvSpPr>
-          <p:cNvPr id="8" name="TextBox 7"/>
-          <p:cNvSpPr txBox="1"/>
-          <p:nvPr/>
-        </p:nvSpPr>
-        <p:spPr>
-          <a:xfrm>
-            <a:off x="10241280" y="6419088"/>
-            <a:ext cx="1463040" cy="365760"/>
-          </a:xfrm>
-          <a:prstGeom prst="rect">
-            <a:avLst/>
-          </a:prstGeom>
-          <a:noFill/>
-        </p:spPr>
-        <p:txBody>
-          <a:bodyPr wrap="square" anchor="ctr" lIns="0" rIns="0" tIns="0" bIns="0">
-            <a:spAutoFit/>
-          </a:bodyPr>
-          <a:lstStyle/>
-          <a:p>
-            <a:pPr algn="r">
-              <a:lnSpc>
-                <a:spcPct val="100000"/>
-              </a:lnSpc>
-              <a:spcBef>
-                <a:spcPts val="0"/>
-              </a:spcBef>
-              <a:spcAft>
-                <a:spcPts val="600"/>
-              </a:spcAft>
-            </a:pPr>
-            <a:r>
-              <a:rPr sz="900" b="1">
-                <a:solidFill>
-                  <a:srgbClr val="6366F1"/>
-                </a:solidFill>
-                <a:latin typeface="NanumGothic"/>
-                <a:ea typeface="NanumGothic"/>
-                <a:cs typeface="NanumGothic"/>
-              </a:rPr>
-              <a:t>Day 1 · 월</a:t>
-            </a:r>
-          </a:p>
-        </p:txBody>
-      </p:sp>
-      <p:sp>
-        <p:nvSpPr>
-          <p:cNvPr id="9" name="Oval 8"/>
+          <p:cNvPr id="8" name="Oval 7"/>
           <p:cNvSpPr/>
           <p:nvPr/>
         </p:nvSpPr>
@@ -18527,7 +18703,7 @@
       </p:sp>
       <p:sp>
         <p:nvSpPr>
-          <p:cNvPr id="10" name="TextBox 9"/>
+          <p:cNvPr id="9" name="TextBox 8"/>
           <p:cNvSpPr txBox="1"/>
           <p:nvPr/>
         </p:nvSpPr>
@@ -18574,7 +18750,7 @@
       </p:sp>
       <p:sp>
         <p:nvSpPr>
-          <p:cNvPr id="11" name="TextBox 10"/>
+          <p:cNvPr id="10" name="TextBox 9"/>
           <p:cNvSpPr txBox="1"/>
           <p:nvPr/>
         </p:nvSpPr>
@@ -18621,7 +18797,7 @@
       </p:sp>
       <p:sp>
         <p:nvSpPr>
-          <p:cNvPr id="12" name="Oval 11"/>
+          <p:cNvPr id="11" name="Oval 10"/>
           <p:cNvSpPr/>
           <p:nvPr/>
         </p:nvSpPr>
@@ -18665,7 +18841,7 @@
       </p:sp>
       <p:sp>
         <p:nvSpPr>
-          <p:cNvPr id="13" name="TextBox 12"/>
+          <p:cNvPr id="12" name="TextBox 11"/>
           <p:cNvSpPr txBox="1"/>
           <p:nvPr/>
         </p:nvSpPr>
@@ -18712,7 +18888,7 @@
       </p:sp>
       <p:sp>
         <p:nvSpPr>
-          <p:cNvPr id="14" name="TextBox 13"/>
+          <p:cNvPr id="13" name="TextBox 12"/>
           <p:cNvSpPr txBox="1"/>
           <p:nvPr/>
         </p:nvSpPr>
@@ -18759,7 +18935,7 @@
       </p:sp>
       <p:sp>
         <p:nvSpPr>
-          <p:cNvPr id="15" name="Oval 14"/>
+          <p:cNvPr id="14" name="Oval 13"/>
           <p:cNvSpPr/>
           <p:nvPr/>
         </p:nvSpPr>
@@ -18803,7 +18979,7 @@
       </p:sp>
       <p:sp>
         <p:nvSpPr>
-          <p:cNvPr id="16" name="TextBox 15"/>
+          <p:cNvPr id="15" name="TextBox 14"/>
           <p:cNvSpPr txBox="1"/>
           <p:nvPr/>
         </p:nvSpPr>
@@ -18850,7 +19026,7 @@
       </p:sp>
       <p:sp>
         <p:nvSpPr>
-          <p:cNvPr id="17" name="TextBox 16"/>
+          <p:cNvPr id="16" name="TextBox 15"/>
           <p:cNvSpPr txBox="1"/>
           <p:nvPr/>
         </p:nvSpPr>
@@ -18897,7 +19073,7 @@
       </p:sp>
       <p:sp>
         <p:nvSpPr>
-          <p:cNvPr id="18" name="Oval 17"/>
+          <p:cNvPr id="17" name="Oval 16"/>
           <p:cNvSpPr/>
           <p:nvPr/>
         </p:nvSpPr>
@@ -18941,7 +19117,7 @@
       </p:sp>
       <p:sp>
         <p:nvSpPr>
-          <p:cNvPr id="19" name="TextBox 18"/>
+          <p:cNvPr id="18" name="TextBox 17"/>
           <p:cNvSpPr txBox="1"/>
           <p:nvPr/>
         </p:nvSpPr>
@@ -18988,7 +19164,7 @@
       </p:sp>
       <p:sp>
         <p:nvSpPr>
-          <p:cNvPr id="20" name="TextBox 19"/>
+          <p:cNvPr id="19" name="TextBox 18"/>
           <p:cNvSpPr txBox="1"/>
           <p:nvPr/>
         </p:nvSpPr>
@@ -19035,7 +19211,7 @@
       </p:sp>
       <p:sp>
         <p:nvSpPr>
-          <p:cNvPr id="21" name="Rounded Rectangle 20"/>
+          <p:cNvPr id="20" name="Rounded Rectangle 19"/>
           <p:cNvSpPr/>
           <p:nvPr/>
         </p:nvSpPr>
@@ -19081,7 +19257,7 @@
       </p:sp>
       <p:sp>
         <p:nvSpPr>
-          <p:cNvPr id="22" name="TextBox 21"/>
+          <p:cNvPr id="21" name="TextBox 20"/>
           <p:cNvSpPr txBox="1"/>
           <p:nvPr/>
         </p:nvSpPr>
@@ -19133,6 +19309,64 @@
                 <a:cs typeface="NanumGothic"/>
               </a:rPr>
               <a:t>벤치마크 수치는 빠르게 바뀜 — 강의 주에 재확인</a:t>
+            </a:r>
+          </a:p>
+        </p:txBody>
+      </p:sp>
+      <p:sp>
+        <p:nvSpPr>
+          <p:cNvPr id="22" name="TextBox 21"/>
+          <p:cNvSpPr txBox="1"/>
+          <p:nvPr/>
+        </p:nvSpPr>
+        <p:spPr>
+          <a:xfrm>
+            <a:off x="8988552" y="6419088"/>
+            <a:ext cx="2697480" cy="365760"/>
+          </a:xfrm>
+          <a:prstGeom prst="rect">
+            <a:avLst/>
+          </a:prstGeom>
+          <a:noFill/>
+        </p:spPr>
+        <p:txBody>
+          <a:bodyPr wrap="square" anchor="ctr" lIns="0" rIns="0" tIns="0" bIns="0">
+            <a:spAutoFit/>
+          </a:bodyPr>
+          <a:lstStyle/>
+          <a:p>
+            <a:pPr algn="r">
+              <a:lnSpc>
+                <a:spcPct val="100000"/>
+              </a:lnSpc>
+              <a:spcBef>
+                <a:spcPts val="0"/>
+              </a:spcBef>
+              <a:spcAft>
+                <a:spcPts val="600"/>
+              </a:spcAft>
+            </a:pPr>
+            <a:r>
+              <a:rPr sz="900" b="1">
+                <a:solidFill>
+                  <a:srgbClr val="6366F1"/>
+                </a:solidFill>
+                <a:latin typeface="NanumGothic"/>
+                <a:ea typeface="NanumGothic"/>
+                <a:cs typeface="NanumGothic"/>
+              </a:rPr>
+              <a:t>Day 1 · 월</a:t>
+            </a:r>
+            <a:r>
+              <a:rPr sz="900" b="1">
+                <a:solidFill>
+                  <a:srgbClr val="64748B"/>
+                </a:solidFill>
+                <a:latin typeface="NanumGothic"/>
+                <a:ea typeface="NanumGothic"/>
+                <a:cs typeface="NanumGothic"/>
+              </a:rPr>
+              <a:t>   ·   24 / 42</a:t>
             </a:r>
           </a:p>
         </p:txBody>
@@ -19430,54 +19664,7 @@
       </p:sp>
       <p:sp>
         <p:nvSpPr>
-          <p:cNvPr id="8" name="TextBox 7"/>
-          <p:cNvSpPr txBox="1"/>
-          <p:nvPr/>
-        </p:nvSpPr>
-        <p:spPr>
-          <a:xfrm>
-            <a:off x="10241280" y="6419088"/>
-            <a:ext cx="1463040" cy="365760"/>
-          </a:xfrm>
-          <a:prstGeom prst="rect">
-            <a:avLst/>
-          </a:prstGeom>
-          <a:noFill/>
-        </p:spPr>
-        <p:txBody>
-          <a:bodyPr wrap="square" anchor="ctr" lIns="0" rIns="0" tIns="0" bIns="0">
-            <a:spAutoFit/>
-          </a:bodyPr>
-          <a:lstStyle/>
-          <a:p>
-            <a:pPr algn="r">
-              <a:lnSpc>
-                <a:spcPct val="100000"/>
-              </a:lnSpc>
-              <a:spcBef>
-                <a:spcPts val="0"/>
-              </a:spcBef>
-              <a:spcAft>
-                <a:spcPts val="600"/>
-              </a:spcAft>
-            </a:pPr>
-            <a:r>
-              <a:rPr sz="900" b="1">
-                <a:solidFill>
-                  <a:srgbClr val="6366F1"/>
-                </a:solidFill>
-                <a:latin typeface="NanumGothic"/>
-                <a:ea typeface="NanumGothic"/>
-                <a:cs typeface="NanumGothic"/>
-              </a:rPr>
-              <a:t>Day 1 · 월</a:t>
-            </a:r>
-          </a:p>
-        </p:txBody>
-      </p:sp>
-      <p:sp>
-        <p:nvSpPr>
-          <p:cNvPr id="9" name="Oval 8"/>
+          <p:cNvPr id="8" name="Oval 7"/>
           <p:cNvSpPr/>
           <p:nvPr/>
         </p:nvSpPr>
@@ -19521,7 +19708,7 @@
       </p:sp>
       <p:sp>
         <p:nvSpPr>
-          <p:cNvPr id="10" name="TextBox 9"/>
+          <p:cNvPr id="9" name="TextBox 8"/>
           <p:cNvSpPr txBox="1"/>
           <p:nvPr/>
         </p:nvSpPr>
@@ -19568,7 +19755,7 @@
       </p:sp>
       <p:sp>
         <p:nvSpPr>
-          <p:cNvPr id="11" name="TextBox 10"/>
+          <p:cNvPr id="10" name="TextBox 9"/>
           <p:cNvSpPr txBox="1"/>
           <p:nvPr/>
         </p:nvSpPr>
@@ -19615,7 +19802,7 @@
       </p:sp>
       <p:sp>
         <p:nvSpPr>
-          <p:cNvPr id="12" name="Oval 11"/>
+          <p:cNvPr id="11" name="Oval 10"/>
           <p:cNvSpPr/>
           <p:nvPr/>
         </p:nvSpPr>
@@ -19659,7 +19846,7 @@
       </p:sp>
       <p:sp>
         <p:nvSpPr>
-          <p:cNvPr id="13" name="TextBox 12"/>
+          <p:cNvPr id="12" name="TextBox 11"/>
           <p:cNvSpPr txBox="1"/>
           <p:nvPr/>
         </p:nvSpPr>
@@ -19706,7 +19893,7 @@
       </p:sp>
       <p:sp>
         <p:nvSpPr>
-          <p:cNvPr id="14" name="TextBox 13"/>
+          <p:cNvPr id="13" name="TextBox 12"/>
           <p:cNvSpPr txBox="1"/>
           <p:nvPr/>
         </p:nvSpPr>
@@ -19753,7 +19940,7 @@
       </p:sp>
       <p:sp>
         <p:nvSpPr>
-          <p:cNvPr id="15" name="Oval 14"/>
+          <p:cNvPr id="14" name="Oval 13"/>
           <p:cNvSpPr/>
           <p:nvPr/>
         </p:nvSpPr>
@@ -19797,7 +19984,7 @@
       </p:sp>
       <p:sp>
         <p:nvSpPr>
-          <p:cNvPr id="16" name="TextBox 15"/>
+          <p:cNvPr id="15" name="TextBox 14"/>
           <p:cNvSpPr txBox="1"/>
           <p:nvPr/>
         </p:nvSpPr>
@@ -19844,7 +20031,7 @@
       </p:sp>
       <p:sp>
         <p:nvSpPr>
-          <p:cNvPr id="17" name="TextBox 16"/>
+          <p:cNvPr id="16" name="TextBox 15"/>
           <p:cNvSpPr txBox="1"/>
           <p:nvPr/>
         </p:nvSpPr>
@@ -19891,7 +20078,7 @@
       </p:sp>
       <p:sp>
         <p:nvSpPr>
-          <p:cNvPr id="18" name="Oval 17"/>
+          <p:cNvPr id="17" name="Oval 16"/>
           <p:cNvSpPr/>
           <p:nvPr/>
         </p:nvSpPr>
@@ -19935,7 +20122,7 @@
       </p:sp>
       <p:sp>
         <p:nvSpPr>
-          <p:cNvPr id="19" name="TextBox 18"/>
+          <p:cNvPr id="18" name="TextBox 17"/>
           <p:cNvSpPr txBox="1"/>
           <p:nvPr/>
         </p:nvSpPr>
@@ -19982,7 +20169,7 @@
       </p:sp>
       <p:sp>
         <p:nvSpPr>
-          <p:cNvPr id="20" name="TextBox 19"/>
+          <p:cNvPr id="19" name="TextBox 18"/>
           <p:cNvSpPr txBox="1"/>
           <p:nvPr/>
         </p:nvSpPr>
@@ -20029,7 +20216,7 @@
       </p:sp>
       <p:sp>
         <p:nvSpPr>
-          <p:cNvPr id="21" name="Rounded Rectangle 20"/>
+          <p:cNvPr id="20" name="Rounded Rectangle 19"/>
           <p:cNvSpPr/>
           <p:nvPr/>
         </p:nvSpPr>
@@ -20075,7 +20262,7 @@
       </p:sp>
       <p:sp>
         <p:nvSpPr>
-          <p:cNvPr id="22" name="TextBox 21"/>
+          <p:cNvPr id="21" name="TextBox 20"/>
           <p:cNvSpPr txBox="1"/>
           <p:nvPr/>
         </p:nvSpPr>
@@ -20127,6 +20314,64 @@
                 <a:cs typeface="NanumGothic"/>
               </a:rPr>
               <a:t>키워드가 아니라 '의미'로 찾는다</a:t>
+            </a:r>
+          </a:p>
+        </p:txBody>
+      </p:sp>
+      <p:sp>
+        <p:nvSpPr>
+          <p:cNvPr id="22" name="TextBox 21"/>
+          <p:cNvSpPr txBox="1"/>
+          <p:nvPr/>
+        </p:nvSpPr>
+        <p:spPr>
+          <a:xfrm>
+            <a:off x="8988552" y="6419088"/>
+            <a:ext cx="2697480" cy="365760"/>
+          </a:xfrm>
+          <a:prstGeom prst="rect">
+            <a:avLst/>
+          </a:prstGeom>
+          <a:noFill/>
+        </p:spPr>
+        <p:txBody>
+          <a:bodyPr wrap="square" anchor="ctr" lIns="0" rIns="0" tIns="0" bIns="0">
+            <a:spAutoFit/>
+          </a:bodyPr>
+          <a:lstStyle/>
+          <a:p>
+            <a:pPr algn="r">
+              <a:lnSpc>
+                <a:spcPct val="100000"/>
+              </a:lnSpc>
+              <a:spcBef>
+                <a:spcPts val="0"/>
+              </a:spcBef>
+              <a:spcAft>
+                <a:spcPts val="600"/>
+              </a:spcAft>
+            </a:pPr>
+            <a:r>
+              <a:rPr sz="900" b="1">
+                <a:solidFill>
+                  <a:srgbClr val="6366F1"/>
+                </a:solidFill>
+                <a:latin typeface="NanumGothic"/>
+                <a:ea typeface="NanumGothic"/>
+                <a:cs typeface="NanumGothic"/>
+              </a:rPr>
+              <a:t>Day 1 · 월</a:t>
+            </a:r>
+            <a:r>
+              <a:rPr sz="900" b="1">
+                <a:solidFill>
+                  <a:srgbClr val="64748B"/>
+                </a:solidFill>
+                <a:latin typeface="NanumGothic"/>
+                <a:ea typeface="NanumGothic"/>
+                <a:cs typeface="NanumGothic"/>
+              </a:rPr>
+              <a:t>   ·   25 / 42</a:t>
             </a:r>
           </a:p>
         </p:txBody>
@@ -20424,54 +20669,7 @@
       </p:sp>
       <p:sp>
         <p:nvSpPr>
-          <p:cNvPr id="8" name="TextBox 7"/>
-          <p:cNvSpPr txBox="1"/>
-          <p:nvPr/>
-        </p:nvSpPr>
-        <p:spPr>
-          <a:xfrm>
-            <a:off x="10241280" y="6419088"/>
-            <a:ext cx="1463040" cy="365760"/>
-          </a:xfrm>
-          <a:prstGeom prst="rect">
-            <a:avLst/>
-          </a:prstGeom>
-          <a:noFill/>
-        </p:spPr>
-        <p:txBody>
-          <a:bodyPr wrap="square" anchor="ctr" lIns="0" rIns="0" tIns="0" bIns="0">
-            <a:spAutoFit/>
-          </a:bodyPr>
-          <a:lstStyle/>
-          <a:p>
-            <a:pPr algn="r">
-              <a:lnSpc>
-                <a:spcPct val="100000"/>
-              </a:lnSpc>
-              <a:spcBef>
-                <a:spcPts val="0"/>
-              </a:spcBef>
-              <a:spcAft>
-                <a:spcPts val="600"/>
-              </a:spcAft>
-            </a:pPr>
-            <a:r>
-              <a:rPr sz="900" b="1">
-                <a:solidFill>
-                  <a:srgbClr val="6366F1"/>
-                </a:solidFill>
-                <a:latin typeface="NanumGothic"/>
-                <a:ea typeface="NanumGothic"/>
-                <a:cs typeface="NanumGothic"/>
-              </a:rPr>
-              <a:t>Day 1 · 월</a:t>
-            </a:r>
-          </a:p>
-        </p:txBody>
-      </p:sp>
-      <p:sp>
-        <p:nvSpPr>
-          <p:cNvPr id="9" name="Rounded Rectangle 8"/>
+          <p:cNvPr id="8" name="Rounded Rectangle 7"/>
           <p:cNvSpPr/>
           <p:nvPr/>
         </p:nvSpPr>
@@ -20517,7 +20715,7 @@
       </p:sp>
       <p:sp>
         <p:nvSpPr>
-          <p:cNvPr id="10" name="Rectangle 9"/>
+          <p:cNvPr id="9" name="Rectangle 8"/>
           <p:cNvSpPr/>
           <p:nvPr/>
         </p:nvSpPr>
@@ -20561,7 +20759,7 @@
       </p:sp>
       <p:sp>
         <p:nvSpPr>
-          <p:cNvPr id="11" name="TextBox 10"/>
+          <p:cNvPr id="10" name="TextBox 9"/>
           <p:cNvSpPr txBox="1"/>
           <p:nvPr/>
         </p:nvSpPr>
@@ -20608,7 +20806,7 @@
       </p:sp>
       <p:sp>
         <p:nvSpPr>
-          <p:cNvPr id="12" name="TextBox 11"/>
+          <p:cNvPr id="11" name="TextBox 10"/>
           <p:cNvSpPr txBox="1"/>
           <p:nvPr/>
         </p:nvSpPr>
@@ -20655,7 +20853,7 @@
       </p:sp>
       <p:sp>
         <p:nvSpPr>
-          <p:cNvPr id="13" name="TextBox 12"/>
+          <p:cNvPr id="12" name="TextBox 11"/>
           <p:cNvSpPr txBox="1"/>
           <p:nvPr/>
         </p:nvSpPr>
@@ -20702,7 +20900,7 @@
       </p:sp>
       <p:sp>
         <p:nvSpPr>
-          <p:cNvPr id="14" name="TextBox 13"/>
+          <p:cNvPr id="13" name="TextBox 12"/>
           <p:cNvSpPr txBox="1"/>
           <p:nvPr/>
         </p:nvSpPr>
@@ -20749,7 +20947,7 @@
       </p:sp>
       <p:sp>
         <p:nvSpPr>
-          <p:cNvPr id="15" name="Rounded Rectangle 14"/>
+          <p:cNvPr id="14" name="Rounded Rectangle 13"/>
           <p:cNvSpPr/>
           <p:nvPr/>
         </p:nvSpPr>
@@ -20795,7 +20993,7 @@
       </p:sp>
       <p:sp>
         <p:nvSpPr>
-          <p:cNvPr id="16" name="Rectangle 15"/>
+          <p:cNvPr id="15" name="Rectangle 14"/>
           <p:cNvSpPr/>
           <p:nvPr/>
         </p:nvSpPr>
@@ -20839,7 +21037,7 @@
       </p:sp>
       <p:sp>
         <p:nvSpPr>
-          <p:cNvPr id="17" name="TextBox 16"/>
+          <p:cNvPr id="16" name="TextBox 15"/>
           <p:cNvSpPr txBox="1"/>
           <p:nvPr/>
         </p:nvSpPr>
@@ -20886,7 +21084,7 @@
       </p:sp>
       <p:sp>
         <p:nvSpPr>
-          <p:cNvPr id="18" name="TextBox 17"/>
+          <p:cNvPr id="17" name="TextBox 16"/>
           <p:cNvSpPr txBox="1"/>
           <p:nvPr/>
         </p:nvSpPr>
@@ -20933,7 +21131,7 @@
       </p:sp>
       <p:sp>
         <p:nvSpPr>
-          <p:cNvPr id="19" name="TextBox 18"/>
+          <p:cNvPr id="18" name="TextBox 17"/>
           <p:cNvSpPr txBox="1"/>
           <p:nvPr/>
         </p:nvSpPr>
@@ -20980,7 +21178,7 @@
       </p:sp>
       <p:sp>
         <p:nvSpPr>
-          <p:cNvPr id="20" name="TextBox 19"/>
+          <p:cNvPr id="19" name="TextBox 18"/>
           <p:cNvSpPr txBox="1"/>
           <p:nvPr/>
         </p:nvSpPr>
@@ -21027,7 +21225,7 @@
       </p:sp>
       <p:sp>
         <p:nvSpPr>
-          <p:cNvPr id="21" name="Rounded Rectangle 20"/>
+          <p:cNvPr id="20" name="Rounded Rectangle 19"/>
           <p:cNvSpPr/>
           <p:nvPr/>
         </p:nvSpPr>
@@ -21073,7 +21271,7 @@
       </p:sp>
       <p:sp>
         <p:nvSpPr>
-          <p:cNvPr id="22" name="Rectangle 21"/>
+          <p:cNvPr id="21" name="Rectangle 20"/>
           <p:cNvSpPr/>
           <p:nvPr/>
         </p:nvSpPr>
@@ -21117,7 +21315,7 @@
       </p:sp>
       <p:sp>
         <p:nvSpPr>
-          <p:cNvPr id="23" name="TextBox 22"/>
+          <p:cNvPr id="22" name="TextBox 21"/>
           <p:cNvSpPr txBox="1"/>
           <p:nvPr/>
         </p:nvSpPr>
@@ -21164,7 +21362,7 @@
       </p:sp>
       <p:sp>
         <p:nvSpPr>
-          <p:cNvPr id="24" name="TextBox 23"/>
+          <p:cNvPr id="23" name="TextBox 22"/>
           <p:cNvSpPr txBox="1"/>
           <p:nvPr/>
         </p:nvSpPr>
@@ -21211,7 +21409,7 @@
       </p:sp>
       <p:sp>
         <p:nvSpPr>
-          <p:cNvPr id="25" name="TextBox 24"/>
+          <p:cNvPr id="24" name="TextBox 23"/>
           <p:cNvSpPr txBox="1"/>
           <p:nvPr/>
         </p:nvSpPr>
@@ -21258,7 +21456,7 @@
       </p:sp>
       <p:sp>
         <p:nvSpPr>
-          <p:cNvPr id="26" name="TextBox 25"/>
+          <p:cNvPr id="25" name="TextBox 24"/>
           <p:cNvSpPr txBox="1"/>
           <p:nvPr/>
         </p:nvSpPr>
@@ -21305,7 +21503,7 @@
       </p:sp>
       <p:sp>
         <p:nvSpPr>
-          <p:cNvPr id="27" name="Rounded Rectangle 26"/>
+          <p:cNvPr id="26" name="Rounded Rectangle 25"/>
           <p:cNvSpPr/>
           <p:nvPr/>
         </p:nvSpPr>
@@ -21351,7 +21549,7 @@
       </p:sp>
       <p:sp>
         <p:nvSpPr>
-          <p:cNvPr id="28" name="Rectangle 27"/>
+          <p:cNvPr id="27" name="Rectangle 26"/>
           <p:cNvSpPr/>
           <p:nvPr/>
         </p:nvSpPr>
@@ -21395,7 +21593,7 @@
       </p:sp>
       <p:sp>
         <p:nvSpPr>
-          <p:cNvPr id="29" name="TextBox 28"/>
+          <p:cNvPr id="28" name="TextBox 27"/>
           <p:cNvSpPr txBox="1"/>
           <p:nvPr/>
         </p:nvSpPr>
@@ -21442,7 +21640,7 @@
       </p:sp>
       <p:sp>
         <p:nvSpPr>
-          <p:cNvPr id="30" name="TextBox 29"/>
+          <p:cNvPr id="29" name="TextBox 28"/>
           <p:cNvSpPr txBox="1"/>
           <p:nvPr/>
         </p:nvSpPr>
@@ -21489,7 +21687,7 @@
       </p:sp>
       <p:sp>
         <p:nvSpPr>
-          <p:cNvPr id="31" name="TextBox 30"/>
+          <p:cNvPr id="30" name="TextBox 29"/>
           <p:cNvSpPr txBox="1"/>
           <p:nvPr/>
         </p:nvSpPr>
@@ -21536,7 +21734,7 @@
       </p:sp>
       <p:sp>
         <p:nvSpPr>
-          <p:cNvPr id="32" name="Rounded Rectangle 31"/>
+          <p:cNvPr id="31" name="Rounded Rectangle 30"/>
           <p:cNvSpPr/>
           <p:nvPr/>
         </p:nvSpPr>
@@ -21582,7 +21780,7 @@
       </p:sp>
       <p:sp>
         <p:nvSpPr>
-          <p:cNvPr id="33" name="TextBox 32"/>
+          <p:cNvPr id="32" name="TextBox 31"/>
           <p:cNvSpPr txBox="1"/>
           <p:nvPr/>
         </p:nvSpPr>
@@ -21634,6 +21832,64 @@
                 <a:cs typeface="NanumGothic"/>
               </a:rPr>
               <a:t>외부 지식을 붙여 환각↓·최신성↑ — 이제 각 단계를 하나씩</a:t>
+            </a:r>
+          </a:p>
+        </p:txBody>
+      </p:sp>
+      <p:sp>
+        <p:nvSpPr>
+          <p:cNvPr id="33" name="TextBox 32"/>
+          <p:cNvSpPr txBox="1"/>
+          <p:nvPr/>
+        </p:nvSpPr>
+        <p:spPr>
+          <a:xfrm>
+            <a:off x="8988552" y="6419088"/>
+            <a:ext cx="2697480" cy="365760"/>
+          </a:xfrm>
+          <a:prstGeom prst="rect">
+            <a:avLst/>
+          </a:prstGeom>
+          <a:noFill/>
+        </p:spPr>
+        <p:txBody>
+          <a:bodyPr wrap="square" anchor="ctr" lIns="0" rIns="0" tIns="0" bIns="0">
+            <a:spAutoFit/>
+          </a:bodyPr>
+          <a:lstStyle/>
+          <a:p>
+            <a:pPr algn="r">
+              <a:lnSpc>
+                <a:spcPct val="100000"/>
+              </a:lnSpc>
+              <a:spcBef>
+                <a:spcPts val="0"/>
+              </a:spcBef>
+              <a:spcAft>
+                <a:spcPts val="600"/>
+              </a:spcAft>
+            </a:pPr>
+            <a:r>
+              <a:rPr sz="900" b="1">
+                <a:solidFill>
+                  <a:srgbClr val="6366F1"/>
+                </a:solidFill>
+                <a:latin typeface="NanumGothic"/>
+                <a:ea typeface="NanumGothic"/>
+                <a:cs typeface="NanumGothic"/>
+              </a:rPr>
+              <a:t>Day 1 · 월</a:t>
+            </a:r>
+            <a:r>
+              <a:rPr sz="900" b="1">
+                <a:solidFill>
+                  <a:srgbClr val="64748B"/>
+                </a:solidFill>
+                <a:latin typeface="NanumGothic"/>
+                <a:ea typeface="NanumGothic"/>
+                <a:cs typeface="NanumGothic"/>
+              </a:rPr>
+              <a:t>   ·   26 / 42</a:t>
             </a:r>
           </a:p>
         </p:txBody>
@@ -21931,54 +22187,7 @@
       </p:sp>
       <p:sp>
         <p:nvSpPr>
-          <p:cNvPr id="8" name="TextBox 7"/>
-          <p:cNvSpPr txBox="1"/>
-          <p:nvPr/>
-        </p:nvSpPr>
-        <p:spPr>
-          <a:xfrm>
-            <a:off x="10241280" y="6419088"/>
-            <a:ext cx="1463040" cy="365760"/>
-          </a:xfrm>
-          <a:prstGeom prst="rect">
-            <a:avLst/>
-          </a:prstGeom>
-          <a:noFill/>
-        </p:spPr>
-        <p:txBody>
-          <a:bodyPr wrap="square" anchor="ctr" lIns="0" rIns="0" tIns="0" bIns="0">
-            <a:spAutoFit/>
-          </a:bodyPr>
-          <a:lstStyle/>
-          <a:p>
-            <a:pPr algn="r">
-              <a:lnSpc>
-                <a:spcPct val="100000"/>
-              </a:lnSpc>
-              <a:spcBef>
-                <a:spcPts val="0"/>
-              </a:spcBef>
-              <a:spcAft>
-                <a:spcPts val="600"/>
-              </a:spcAft>
-            </a:pPr>
-            <a:r>
-              <a:rPr sz="900" b="1">
-                <a:solidFill>
-                  <a:srgbClr val="6366F1"/>
-                </a:solidFill>
-                <a:latin typeface="NanumGothic"/>
-                <a:ea typeface="NanumGothic"/>
-                <a:cs typeface="NanumGothic"/>
-              </a:rPr>
-              <a:t>Day 1 · 월</a:t>
-            </a:r>
-          </a:p>
-        </p:txBody>
-      </p:sp>
-      <p:sp>
-        <p:nvSpPr>
-          <p:cNvPr id="9" name="Oval 8"/>
+          <p:cNvPr id="8" name="Oval 7"/>
           <p:cNvSpPr/>
           <p:nvPr/>
         </p:nvSpPr>
@@ -22022,7 +22231,7 @@
       </p:sp>
       <p:sp>
         <p:nvSpPr>
-          <p:cNvPr id="10" name="TextBox 9"/>
+          <p:cNvPr id="9" name="TextBox 8"/>
           <p:cNvSpPr txBox="1"/>
           <p:nvPr/>
         </p:nvSpPr>
@@ -22069,7 +22278,7 @@
       </p:sp>
       <p:sp>
         <p:nvSpPr>
-          <p:cNvPr id="11" name="TextBox 10"/>
+          <p:cNvPr id="10" name="TextBox 9"/>
           <p:cNvSpPr txBox="1"/>
           <p:nvPr/>
         </p:nvSpPr>
@@ -22116,7 +22325,7 @@
       </p:sp>
       <p:sp>
         <p:nvSpPr>
-          <p:cNvPr id="12" name="Oval 11"/>
+          <p:cNvPr id="11" name="Oval 10"/>
           <p:cNvSpPr/>
           <p:nvPr/>
         </p:nvSpPr>
@@ -22160,7 +22369,7 @@
       </p:sp>
       <p:sp>
         <p:nvSpPr>
-          <p:cNvPr id="13" name="TextBox 12"/>
+          <p:cNvPr id="12" name="TextBox 11"/>
           <p:cNvSpPr txBox="1"/>
           <p:nvPr/>
         </p:nvSpPr>
@@ -22207,7 +22416,7 @@
       </p:sp>
       <p:sp>
         <p:nvSpPr>
-          <p:cNvPr id="14" name="TextBox 13"/>
+          <p:cNvPr id="13" name="TextBox 12"/>
           <p:cNvSpPr txBox="1"/>
           <p:nvPr/>
         </p:nvSpPr>
@@ -22254,7 +22463,7 @@
       </p:sp>
       <p:sp>
         <p:nvSpPr>
-          <p:cNvPr id="15" name="Oval 14"/>
+          <p:cNvPr id="14" name="Oval 13"/>
           <p:cNvSpPr/>
           <p:nvPr/>
         </p:nvSpPr>
@@ -22298,7 +22507,7 @@
       </p:sp>
       <p:sp>
         <p:nvSpPr>
-          <p:cNvPr id="16" name="TextBox 15"/>
+          <p:cNvPr id="15" name="TextBox 14"/>
           <p:cNvSpPr txBox="1"/>
           <p:nvPr/>
         </p:nvSpPr>
@@ -22345,7 +22554,7 @@
       </p:sp>
       <p:sp>
         <p:nvSpPr>
-          <p:cNvPr id="17" name="TextBox 16"/>
+          <p:cNvPr id="16" name="TextBox 15"/>
           <p:cNvSpPr txBox="1"/>
           <p:nvPr/>
         </p:nvSpPr>
@@ -22386,6 +22595,64 @@
                 <a:cs typeface="NanumGothic"/>
               </a:rPr>
               <a:t>'무슨 근거를 찾아야 하나'를 정한다</a:t>
+            </a:r>
+          </a:p>
+        </p:txBody>
+      </p:sp>
+      <p:sp>
+        <p:nvSpPr>
+          <p:cNvPr id="17" name="TextBox 16"/>
+          <p:cNvSpPr txBox="1"/>
+          <p:nvPr/>
+        </p:nvSpPr>
+        <p:spPr>
+          <a:xfrm>
+            <a:off x="8988552" y="6419088"/>
+            <a:ext cx="2697480" cy="365760"/>
+          </a:xfrm>
+          <a:prstGeom prst="rect">
+            <a:avLst/>
+          </a:prstGeom>
+          <a:noFill/>
+        </p:spPr>
+        <p:txBody>
+          <a:bodyPr wrap="square" anchor="ctr" lIns="0" rIns="0" tIns="0" bIns="0">
+            <a:spAutoFit/>
+          </a:bodyPr>
+          <a:lstStyle/>
+          <a:p>
+            <a:pPr algn="r">
+              <a:lnSpc>
+                <a:spcPct val="100000"/>
+              </a:lnSpc>
+              <a:spcBef>
+                <a:spcPts val="0"/>
+              </a:spcBef>
+              <a:spcAft>
+                <a:spcPts val="600"/>
+              </a:spcAft>
+            </a:pPr>
+            <a:r>
+              <a:rPr sz="900" b="1">
+                <a:solidFill>
+                  <a:srgbClr val="6366F1"/>
+                </a:solidFill>
+                <a:latin typeface="NanumGothic"/>
+                <a:ea typeface="NanumGothic"/>
+                <a:cs typeface="NanumGothic"/>
+              </a:rPr>
+              <a:t>Day 1 · 월</a:t>
+            </a:r>
+            <a:r>
+              <a:rPr sz="900" b="1">
+                <a:solidFill>
+                  <a:srgbClr val="64748B"/>
+                </a:solidFill>
+                <a:latin typeface="NanumGothic"/>
+                <a:ea typeface="NanumGothic"/>
+                <a:cs typeface="NanumGothic"/>
+              </a:rPr>
+              <a:t>   ·   27 / 42</a:t>
             </a:r>
           </a:p>
         </p:txBody>
@@ -22683,54 +22950,7 @@
       </p:sp>
       <p:sp>
         <p:nvSpPr>
-          <p:cNvPr id="8" name="TextBox 7"/>
-          <p:cNvSpPr txBox="1"/>
-          <p:nvPr/>
-        </p:nvSpPr>
-        <p:spPr>
-          <a:xfrm>
-            <a:off x="10241280" y="6419088"/>
-            <a:ext cx="1463040" cy="365760"/>
-          </a:xfrm>
-          <a:prstGeom prst="rect">
-            <a:avLst/>
-          </a:prstGeom>
-          <a:noFill/>
-        </p:spPr>
-        <p:txBody>
-          <a:bodyPr wrap="square" anchor="ctr" lIns="0" rIns="0" tIns="0" bIns="0">
-            <a:spAutoFit/>
-          </a:bodyPr>
-          <a:lstStyle/>
-          <a:p>
-            <a:pPr algn="r">
-              <a:lnSpc>
-                <a:spcPct val="100000"/>
-              </a:lnSpc>
-              <a:spcBef>
-                <a:spcPts val="0"/>
-              </a:spcBef>
-              <a:spcAft>
-                <a:spcPts val="600"/>
-              </a:spcAft>
-            </a:pPr>
-            <a:r>
-              <a:rPr sz="900" b="1">
-                <a:solidFill>
-                  <a:srgbClr val="6366F1"/>
-                </a:solidFill>
-                <a:latin typeface="NanumGothic"/>
-                <a:ea typeface="NanumGothic"/>
-                <a:cs typeface="NanumGothic"/>
-              </a:rPr>
-              <a:t>Day 1 · 월</a:t>
-            </a:r>
-          </a:p>
-        </p:txBody>
-      </p:sp>
-      <p:sp>
-        <p:nvSpPr>
-          <p:cNvPr id="9" name="Oval 8"/>
+          <p:cNvPr id="8" name="Oval 7"/>
           <p:cNvSpPr/>
           <p:nvPr/>
         </p:nvSpPr>
@@ -22774,7 +22994,7 @@
       </p:sp>
       <p:sp>
         <p:nvSpPr>
-          <p:cNvPr id="10" name="TextBox 9"/>
+          <p:cNvPr id="9" name="TextBox 8"/>
           <p:cNvSpPr txBox="1"/>
           <p:nvPr/>
         </p:nvSpPr>
@@ -22821,7 +23041,7 @@
       </p:sp>
       <p:sp>
         <p:nvSpPr>
-          <p:cNvPr id="11" name="TextBox 10"/>
+          <p:cNvPr id="10" name="TextBox 9"/>
           <p:cNvSpPr txBox="1"/>
           <p:nvPr/>
         </p:nvSpPr>
@@ -22868,7 +23088,7 @@
       </p:sp>
       <p:sp>
         <p:nvSpPr>
-          <p:cNvPr id="12" name="Oval 11"/>
+          <p:cNvPr id="11" name="Oval 10"/>
           <p:cNvSpPr/>
           <p:nvPr/>
         </p:nvSpPr>
@@ -22912,7 +23132,7 @@
       </p:sp>
       <p:sp>
         <p:nvSpPr>
-          <p:cNvPr id="13" name="TextBox 12"/>
+          <p:cNvPr id="12" name="TextBox 11"/>
           <p:cNvSpPr txBox="1"/>
           <p:nvPr/>
         </p:nvSpPr>
@@ -22959,7 +23179,7 @@
       </p:sp>
       <p:sp>
         <p:nvSpPr>
-          <p:cNvPr id="14" name="TextBox 13"/>
+          <p:cNvPr id="13" name="TextBox 12"/>
           <p:cNvSpPr txBox="1"/>
           <p:nvPr/>
         </p:nvSpPr>
@@ -23006,7 +23226,7 @@
       </p:sp>
       <p:sp>
         <p:nvSpPr>
-          <p:cNvPr id="15" name="Oval 14"/>
+          <p:cNvPr id="14" name="Oval 13"/>
           <p:cNvSpPr/>
           <p:nvPr/>
         </p:nvSpPr>
@@ -23050,7 +23270,7 @@
       </p:sp>
       <p:sp>
         <p:nvSpPr>
-          <p:cNvPr id="16" name="TextBox 15"/>
+          <p:cNvPr id="15" name="TextBox 14"/>
           <p:cNvSpPr txBox="1"/>
           <p:nvPr/>
         </p:nvSpPr>
@@ -23097,7 +23317,7 @@
       </p:sp>
       <p:sp>
         <p:nvSpPr>
-          <p:cNvPr id="17" name="TextBox 16"/>
+          <p:cNvPr id="16" name="TextBox 15"/>
           <p:cNvSpPr txBox="1"/>
           <p:nvPr/>
         </p:nvSpPr>
@@ -23144,7 +23364,7 @@
       </p:sp>
       <p:sp>
         <p:nvSpPr>
-          <p:cNvPr id="18" name="Rounded Rectangle 17"/>
+          <p:cNvPr id="17" name="Rounded Rectangle 16"/>
           <p:cNvSpPr/>
           <p:nvPr/>
         </p:nvSpPr>
@@ -23190,7 +23410,7 @@
       </p:sp>
       <p:sp>
         <p:nvSpPr>
-          <p:cNvPr id="19" name="TextBox 18"/>
+          <p:cNvPr id="18" name="TextBox 17"/>
           <p:cNvSpPr txBox="1"/>
           <p:nvPr/>
         </p:nvSpPr>
@@ -23242,6 +23462,64 @@
                 <a:cs typeface="NanumGothic"/>
               </a:rPr>
               <a:t>Day 1 임베딩이 여기서 쓰인다</a:t>
+            </a:r>
+          </a:p>
+        </p:txBody>
+      </p:sp>
+      <p:sp>
+        <p:nvSpPr>
+          <p:cNvPr id="19" name="TextBox 18"/>
+          <p:cNvSpPr txBox="1"/>
+          <p:nvPr/>
+        </p:nvSpPr>
+        <p:spPr>
+          <a:xfrm>
+            <a:off x="8988552" y="6419088"/>
+            <a:ext cx="2697480" cy="365760"/>
+          </a:xfrm>
+          <a:prstGeom prst="rect">
+            <a:avLst/>
+          </a:prstGeom>
+          <a:noFill/>
+        </p:spPr>
+        <p:txBody>
+          <a:bodyPr wrap="square" anchor="ctr" lIns="0" rIns="0" tIns="0" bIns="0">
+            <a:spAutoFit/>
+          </a:bodyPr>
+          <a:lstStyle/>
+          <a:p>
+            <a:pPr algn="r">
+              <a:lnSpc>
+                <a:spcPct val="100000"/>
+              </a:lnSpc>
+              <a:spcBef>
+                <a:spcPts val="0"/>
+              </a:spcBef>
+              <a:spcAft>
+                <a:spcPts val="600"/>
+              </a:spcAft>
+            </a:pPr>
+            <a:r>
+              <a:rPr sz="900" b="1">
+                <a:solidFill>
+                  <a:srgbClr val="6366F1"/>
+                </a:solidFill>
+                <a:latin typeface="NanumGothic"/>
+                <a:ea typeface="NanumGothic"/>
+                <a:cs typeface="NanumGothic"/>
+              </a:rPr>
+              <a:t>Day 1 · 월</a:t>
+            </a:r>
+            <a:r>
+              <a:rPr sz="900" b="1">
+                <a:solidFill>
+                  <a:srgbClr val="64748B"/>
+                </a:solidFill>
+                <a:latin typeface="NanumGothic"/>
+                <a:ea typeface="NanumGothic"/>
+                <a:cs typeface="NanumGothic"/>
+              </a:rPr>
+              <a:t>   ·   28 / 42</a:t>
             </a:r>
           </a:p>
         </p:txBody>
@@ -23539,54 +23817,7 @@
       </p:sp>
       <p:sp>
         <p:nvSpPr>
-          <p:cNvPr id="8" name="TextBox 7"/>
-          <p:cNvSpPr txBox="1"/>
-          <p:nvPr/>
-        </p:nvSpPr>
-        <p:spPr>
-          <a:xfrm>
-            <a:off x="10241280" y="6419088"/>
-            <a:ext cx="1463040" cy="365760"/>
-          </a:xfrm>
-          <a:prstGeom prst="rect">
-            <a:avLst/>
-          </a:prstGeom>
-          <a:noFill/>
-        </p:spPr>
-        <p:txBody>
-          <a:bodyPr wrap="square" anchor="ctr" lIns="0" rIns="0" tIns="0" bIns="0">
-            <a:spAutoFit/>
-          </a:bodyPr>
-          <a:lstStyle/>
-          <a:p>
-            <a:pPr algn="r">
-              <a:lnSpc>
-                <a:spcPct val="100000"/>
-              </a:lnSpc>
-              <a:spcBef>
-                <a:spcPts val="0"/>
-              </a:spcBef>
-              <a:spcAft>
-                <a:spcPts val="600"/>
-              </a:spcAft>
-            </a:pPr>
-            <a:r>
-              <a:rPr sz="900" b="1">
-                <a:solidFill>
-                  <a:srgbClr val="6366F1"/>
-                </a:solidFill>
-                <a:latin typeface="NanumGothic"/>
-                <a:ea typeface="NanumGothic"/>
-                <a:cs typeface="NanumGothic"/>
-              </a:rPr>
-              <a:t>Day 1 · 월</a:t>
-            </a:r>
-          </a:p>
-        </p:txBody>
-      </p:sp>
-      <p:sp>
-        <p:nvSpPr>
-          <p:cNvPr id="9" name="Oval 8"/>
+          <p:cNvPr id="8" name="Oval 7"/>
           <p:cNvSpPr/>
           <p:nvPr/>
         </p:nvSpPr>
@@ -23630,7 +23861,7 @@
       </p:sp>
       <p:sp>
         <p:nvSpPr>
-          <p:cNvPr id="10" name="TextBox 9"/>
+          <p:cNvPr id="9" name="TextBox 8"/>
           <p:cNvSpPr txBox="1"/>
           <p:nvPr/>
         </p:nvSpPr>
@@ -23677,7 +23908,7 @@
       </p:sp>
       <p:sp>
         <p:nvSpPr>
-          <p:cNvPr id="11" name="TextBox 10"/>
+          <p:cNvPr id="10" name="TextBox 9"/>
           <p:cNvSpPr txBox="1"/>
           <p:nvPr/>
         </p:nvSpPr>
@@ -23724,7 +23955,7 @@
       </p:sp>
       <p:sp>
         <p:nvSpPr>
-          <p:cNvPr id="12" name="Oval 11"/>
+          <p:cNvPr id="11" name="Oval 10"/>
           <p:cNvSpPr/>
           <p:nvPr/>
         </p:nvSpPr>
@@ -23768,7 +23999,7 @@
       </p:sp>
       <p:sp>
         <p:nvSpPr>
-          <p:cNvPr id="13" name="TextBox 12"/>
+          <p:cNvPr id="12" name="TextBox 11"/>
           <p:cNvSpPr txBox="1"/>
           <p:nvPr/>
         </p:nvSpPr>
@@ -23815,7 +24046,7 @@
       </p:sp>
       <p:sp>
         <p:nvSpPr>
-          <p:cNvPr id="14" name="TextBox 13"/>
+          <p:cNvPr id="13" name="TextBox 12"/>
           <p:cNvSpPr txBox="1"/>
           <p:nvPr/>
         </p:nvSpPr>
@@ -23862,7 +24093,7 @@
       </p:sp>
       <p:sp>
         <p:nvSpPr>
-          <p:cNvPr id="15" name="Oval 14"/>
+          <p:cNvPr id="14" name="Oval 13"/>
           <p:cNvSpPr/>
           <p:nvPr/>
         </p:nvSpPr>
@@ -23906,7 +24137,7 @@
       </p:sp>
       <p:sp>
         <p:nvSpPr>
-          <p:cNvPr id="16" name="TextBox 15"/>
+          <p:cNvPr id="15" name="TextBox 14"/>
           <p:cNvSpPr txBox="1"/>
           <p:nvPr/>
         </p:nvSpPr>
@@ -23953,7 +24184,7 @@
       </p:sp>
       <p:sp>
         <p:nvSpPr>
-          <p:cNvPr id="17" name="TextBox 16"/>
+          <p:cNvPr id="16" name="TextBox 15"/>
           <p:cNvSpPr txBox="1"/>
           <p:nvPr/>
         </p:nvSpPr>
@@ -23994,6 +24225,64 @@
                 <a:cs typeface="NanumGothic"/>
               </a:rPr>
               <a:t>너무 많이 넣으면 컨텍스트 한계·비용↑</a:t>
+            </a:r>
+          </a:p>
+        </p:txBody>
+      </p:sp>
+      <p:sp>
+        <p:nvSpPr>
+          <p:cNvPr id="17" name="TextBox 16"/>
+          <p:cNvSpPr txBox="1"/>
+          <p:nvPr/>
+        </p:nvSpPr>
+        <p:spPr>
+          <a:xfrm>
+            <a:off x="8988552" y="6419088"/>
+            <a:ext cx="2697480" cy="365760"/>
+          </a:xfrm>
+          <a:prstGeom prst="rect">
+            <a:avLst/>
+          </a:prstGeom>
+          <a:noFill/>
+        </p:spPr>
+        <p:txBody>
+          <a:bodyPr wrap="square" anchor="ctr" lIns="0" rIns="0" tIns="0" bIns="0">
+            <a:spAutoFit/>
+          </a:bodyPr>
+          <a:lstStyle/>
+          <a:p>
+            <a:pPr algn="r">
+              <a:lnSpc>
+                <a:spcPct val="100000"/>
+              </a:lnSpc>
+              <a:spcBef>
+                <a:spcPts val="0"/>
+              </a:spcBef>
+              <a:spcAft>
+                <a:spcPts val="600"/>
+              </a:spcAft>
+            </a:pPr>
+            <a:r>
+              <a:rPr sz="900" b="1">
+                <a:solidFill>
+                  <a:srgbClr val="6366F1"/>
+                </a:solidFill>
+                <a:latin typeface="NanumGothic"/>
+                <a:ea typeface="NanumGothic"/>
+                <a:cs typeface="NanumGothic"/>
+              </a:rPr>
+              <a:t>Day 1 · 월</a:t>
+            </a:r>
+            <a:r>
+              <a:rPr sz="900" b="1">
+                <a:solidFill>
+                  <a:srgbClr val="64748B"/>
+                </a:solidFill>
+                <a:latin typeface="NanumGothic"/>
+                <a:ea typeface="NanumGothic"/>
+                <a:cs typeface="NanumGothic"/>
+              </a:rPr>
+              <a:t>   ·   29 / 42</a:t>
             </a:r>
           </a:p>
         </p:txBody>
@@ -24300,6 +24589,64 @@
           </a:p>
         </p:txBody>
       </p:sp>
+      <p:sp>
+        <p:nvSpPr>
+          <p:cNvPr id="8" name="TextBox 7"/>
+          <p:cNvSpPr txBox="1"/>
+          <p:nvPr/>
+        </p:nvSpPr>
+        <p:spPr>
+          <a:xfrm>
+            <a:off x="8988552" y="6419088"/>
+            <a:ext cx="2697480" cy="365760"/>
+          </a:xfrm>
+          <a:prstGeom prst="rect">
+            <a:avLst/>
+          </a:prstGeom>
+          <a:noFill/>
+        </p:spPr>
+        <p:txBody>
+          <a:bodyPr wrap="square" anchor="ctr" lIns="0" rIns="0" tIns="0" bIns="0">
+            <a:spAutoFit/>
+          </a:bodyPr>
+          <a:lstStyle/>
+          <a:p>
+            <a:pPr algn="r">
+              <a:lnSpc>
+                <a:spcPct val="100000"/>
+              </a:lnSpc>
+              <a:spcBef>
+                <a:spcPts val="0"/>
+              </a:spcBef>
+              <a:spcAft>
+                <a:spcPts val="600"/>
+              </a:spcAft>
+            </a:pPr>
+            <a:r>
+              <a:rPr sz="900" b="1">
+                <a:solidFill>
+                  <a:srgbClr val="6366F1"/>
+                </a:solidFill>
+                <a:latin typeface="NanumGothic"/>
+                <a:ea typeface="NanumGothic"/>
+                <a:cs typeface="NanumGothic"/>
+              </a:rPr>
+              <a:t>Day 1 · 월</a:t>
+            </a:r>
+            <a:r>
+              <a:rPr sz="900" b="1">
+                <a:solidFill>
+                  <a:srgbClr val="CBD5E1"/>
+                </a:solidFill>
+                <a:latin typeface="NanumGothic"/>
+                <a:ea typeface="NanumGothic"/>
+                <a:cs typeface="NanumGothic"/>
+              </a:rPr>
+              <a:t>   ·   3 / 42</a:t>
+            </a:r>
+          </a:p>
+        </p:txBody>
+      </p:sp>
     </p:spTree>
   </p:cSld>
   <p:clrMapOvr>
@@ -24593,54 +24940,7 @@
       </p:sp>
       <p:sp>
         <p:nvSpPr>
-          <p:cNvPr id="8" name="TextBox 7"/>
-          <p:cNvSpPr txBox="1"/>
-          <p:nvPr/>
-        </p:nvSpPr>
-        <p:spPr>
-          <a:xfrm>
-            <a:off x="10241280" y="6419088"/>
-            <a:ext cx="1463040" cy="365760"/>
-          </a:xfrm>
-          <a:prstGeom prst="rect">
-            <a:avLst/>
-          </a:prstGeom>
-          <a:noFill/>
-        </p:spPr>
-        <p:txBody>
-          <a:bodyPr wrap="square" anchor="ctr" lIns="0" rIns="0" tIns="0" bIns="0">
-            <a:spAutoFit/>
-          </a:bodyPr>
-          <a:lstStyle/>
-          <a:p>
-            <a:pPr algn="r">
-              <a:lnSpc>
-                <a:spcPct val="100000"/>
-              </a:lnSpc>
-              <a:spcBef>
-                <a:spcPts val="0"/>
-              </a:spcBef>
-              <a:spcAft>
-                <a:spcPts val="600"/>
-              </a:spcAft>
-            </a:pPr>
-            <a:r>
-              <a:rPr sz="900" b="1">
-                <a:solidFill>
-                  <a:srgbClr val="6366F1"/>
-                </a:solidFill>
-                <a:latin typeface="NanumGothic"/>
-                <a:ea typeface="NanumGothic"/>
-                <a:cs typeface="NanumGothic"/>
-              </a:rPr>
-              <a:t>Day 1 · 월</a:t>
-            </a:r>
-          </a:p>
-        </p:txBody>
-      </p:sp>
-      <p:sp>
-        <p:nvSpPr>
-          <p:cNvPr id="9" name="Oval 8"/>
+          <p:cNvPr id="8" name="Oval 7"/>
           <p:cNvSpPr/>
           <p:nvPr/>
         </p:nvSpPr>
@@ -24684,7 +24984,7 @@
       </p:sp>
       <p:sp>
         <p:nvSpPr>
-          <p:cNvPr id="10" name="TextBox 9"/>
+          <p:cNvPr id="9" name="TextBox 8"/>
           <p:cNvSpPr txBox="1"/>
           <p:nvPr/>
         </p:nvSpPr>
@@ -24731,7 +25031,7 @@
       </p:sp>
       <p:sp>
         <p:nvSpPr>
-          <p:cNvPr id="11" name="TextBox 10"/>
+          <p:cNvPr id="10" name="TextBox 9"/>
           <p:cNvSpPr txBox="1"/>
           <p:nvPr/>
         </p:nvSpPr>
@@ -24778,7 +25078,7 @@
       </p:sp>
       <p:sp>
         <p:nvSpPr>
-          <p:cNvPr id="12" name="Oval 11"/>
+          <p:cNvPr id="11" name="Oval 10"/>
           <p:cNvSpPr/>
           <p:nvPr/>
         </p:nvSpPr>
@@ -24822,7 +25122,7 @@
       </p:sp>
       <p:sp>
         <p:nvSpPr>
-          <p:cNvPr id="13" name="TextBox 12"/>
+          <p:cNvPr id="12" name="TextBox 11"/>
           <p:cNvSpPr txBox="1"/>
           <p:nvPr/>
         </p:nvSpPr>
@@ -24869,7 +25169,7 @@
       </p:sp>
       <p:sp>
         <p:nvSpPr>
-          <p:cNvPr id="14" name="TextBox 13"/>
+          <p:cNvPr id="13" name="TextBox 12"/>
           <p:cNvSpPr txBox="1"/>
           <p:nvPr/>
         </p:nvSpPr>
@@ -24916,7 +25216,7 @@
       </p:sp>
       <p:sp>
         <p:nvSpPr>
-          <p:cNvPr id="15" name="Oval 14"/>
+          <p:cNvPr id="14" name="Oval 13"/>
           <p:cNvSpPr/>
           <p:nvPr/>
         </p:nvSpPr>
@@ -24960,7 +25260,7 @@
       </p:sp>
       <p:sp>
         <p:nvSpPr>
-          <p:cNvPr id="16" name="TextBox 15"/>
+          <p:cNvPr id="15" name="TextBox 14"/>
           <p:cNvSpPr txBox="1"/>
           <p:nvPr/>
         </p:nvSpPr>
@@ -25007,7 +25307,7 @@
       </p:sp>
       <p:sp>
         <p:nvSpPr>
-          <p:cNvPr id="17" name="TextBox 16"/>
+          <p:cNvPr id="16" name="TextBox 15"/>
           <p:cNvSpPr txBox="1"/>
           <p:nvPr/>
         </p:nvSpPr>
@@ -25054,7 +25354,7 @@
       </p:sp>
       <p:sp>
         <p:nvSpPr>
-          <p:cNvPr id="18" name="Oval 17"/>
+          <p:cNvPr id="17" name="Oval 16"/>
           <p:cNvSpPr/>
           <p:nvPr/>
         </p:nvSpPr>
@@ -25098,7 +25398,7 @@
       </p:sp>
       <p:sp>
         <p:nvSpPr>
-          <p:cNvPr id="19" name="TextBox 18"/>
+          <p:cNvPr id="18" name="TextBox 17"/>
           <p:cNvSpPr txBox="1"/>
           <p:nvPr/>
         </p:nvSpPr>
@@ -25145,7 +25445,7 @@
       </p:sp>
       <p:sp>
         <p:nvSpPr>
-          <p:cNvPr id="20" name="TextBox 19"/>
+          <p:cNvPr id="19" name="TextBox 18"/>
           <p:cNvSpPr txBox="1"/>
           <p:nvPr/>
         </p:nvSpPr>
@@ -25192,7 +25492,7 @@
       </p:sp>
       <p:sp>
         <p:nvSpPr>
-          <p:cNvPr id="21" name="Rounded Rectangle 20"/>
+          <p:cNvPr id="20" name="Rounded Rectangle 19"/>
           <p:cNvSpPr/>
           <p:nvPr/>
         </p:nvSpPr>
@@ -25238,7 +25538,7 @@
       </p:sp>
       <p:sp>
         <p:nvSpPr>
-          <p:cNvPr id="22" name="TextBox 21"/>
+          <p:cNvPr id="21" name="TextBox 20"/>
           <p:cNvSpPr txBox="1"/>
           <p:nvPr/>
         </p:nvSpPr>
@@ -25290,6 +25590,64 @@
                 <a:cs typeface="NanumGothic"/>
               </a:rPr>
               <a:t>리서치 에이전트의 핵심 패턴</a:t>
+            </a:r>
+          </a:p>
+        </p:txBody>
+      </p:sp>
+      <p:sp>
+        <p:nvSpPr>
+          <p:cNvPr id="22" name="TextBox 21"/>
+          <p:cNvSpPr txBox="1"/>
+          <p:nvPr/>
+        </p:nvSpPr>
+        <p:spPr>
+          <a:xfrm>
+            <a:off x="8988552" y="6419088"/>
+            <a:ext cx="2697480" cy="365760"/>
+          </a:xfrm>
+          <a:prstGeom prst="rect">
+            <a:avLst/>
+          </a:prstGeom>
+          <a:noFill/>
+        </p:spPr>
+        <p:txBody>
+          <a:bodyPr wrap="square" anchor="ctr" lIns="0" rIns="0" tIns="0" bIns="0">
+            <a:spAutoFit/>
+          </a:bodyPr>
+          <a:lstStyle/>
+          <a:p>
+            <a:pPr algn="r">
+              <a:lnSpc>
+                <a:spcPct val="100000"/>
+              </a:lnSpc>
+              <a:spcBef>
+                <a:spcPts val="0"/>
+              </a:spcBef>
+              <a:spcAft>
+                <a:spcPts val="600"/>
+              </a:spcAft>
+            </a:pPr>
+            <a:r>
+              <a:rPr sz="900" b="1">
+                <a:solidFill>
+                  <a:srgbClr val="6366F1"/>
+                </a:solidFill>
+                <a:latin typeface="NanumGothic"/>
+                <a:ea typeface="NanumGothic"/>
+                <a:cs typeface="NanumGothic"/>
+              </a:rPr>
+              <a:t>Day 1 · 월</a:t>
+            </a:r>
+            <a:r>
+              <a:rPr sz="900" b="1">
+                <a:solidFill>
+                  <a:srgbClr val="64748B"/>
+                </a:solidFill>
+                <a:latin typeface="NanumGothic"/>
+                <a:ea typeface="NanumGothic"/>
+                <a:cs typeface="NanumGothic"/>
+              </a:rPr>
+              <a:t>   ·   30 / 42</a:t>
             </a:r>
           </a:p>
         </p:txBody>
@@ -25587,54 +25945,7 @@
       </p:sp>
       <p:sp>
         <p:nvSpPr>
-          <p:cNvPr id="8" name="TextBox 7"/>
-          <p:cNvSpPr txBox="1"/>
-          <p:nvPr/>
-        </p:nvSpPr>
-        <p:spPr>
-          <a:xfrm>
-            <a:off x="10241280" y="6419088"/>
-            <a:ext cx="1463040" cy="365760"/>
-          </a:xfrm>
-          <a:prstGeom prst="rect">
-            <a:avLst/>
-          </a:prstGeom>
-          <a:noFill/>
-        </p:spPr>
-        <p:txBody>
-          <a:bodyPr wrap="square" anchor="ctr" lIns="0" rIns="0" tIns="0" bIns="0">
-            <a:spAutoFit/>
-          </a:bodyPr>
-          <a:lstStyle/>
-          <a:p>
-            <a:pPr algn="r">
-              <a:lnSpc>
-                <a:spcPct val="100000"/>
-              </a:lnSpc>
-              <a:spcBef>
-                <a:spcPts val="0"/>
-              </a:spcBef>
-              <a:spcAft>
-                <a:spcPts val="600"/>
-              </a:spcAft>
-            </a:pPr>
-            <a:r>
-              <a:rPr sz="900" b="1">
-                <a:solidFill>
-                  <a:srgbClr val="6366F1"/>
-                </a:solidFill>
-                <a:latin typeface="NanumGothic"/>
-                <a:ea typeface="NanumGothic"/>
-                <a:cs typeface="NanumGothic"/>
-              </a:rPr>
-              <a:t>Day 1 · 월</a:t>
-            </a:r>
-          </a:p>
-        </p:txBody>
-      </p:sp>
-      <p:sp>
-        <p:nvSpPr>
-          <p:cNvPr id="9" name="Oval 8"/>
+          <p:cNvPr id="8" name="Oval 7"/>
           <p:cNvSpPr/>
           <p:nvPr/>
         </p:nvSpPr>
@@ -25678,7 +25989,7 @@
       </p:sp>
       <p:sp>
         <p:nvSpPr>
-          <p:cNvPr id="10" name="TextBox 9"/>
+          <p:cNvPr id="9" name="TextBox 8"/>
           <p:cNvSpPr txBox="1"/>
           <p:nvPr/>
         </p:nvSpPr>
@@ -25725,7 +26036,7 @@
       </p:sp>
       <p:sp>
         <p:nvSpPr>
-          <p:cNvPr id="11" name="TextBox 10"/>
+          <p:cNvPr id="10" name="TextBox 9"/>
           <p:cNvSpPr txBox="1"/>
           <p:nvPr/>
         </p:nvSpPr>
@@ -25772,7 +26083,7 @@
       </p:sp>
       <p:sp>
         <p:nvSpPr>
-          <p:cNvPr id="12" name="Oval 11"/>
+          <p:cNvPr id="11" name="Oval 10"/>
           <p:cNvSpPr/>
           <p:nvPr/>
         </p:nvSpPr>
@@ -25816,7 +26127,7 @@
       </p:sp>
       <p:sp>
         <p:nvSpPr>
-          <p:cNvPr id="13" name="TextBox 12"/>
+          <p:cNvPr id="12" name="TextBox 11"/>
           <p:cNvSpPr txBox="1"/>
           <p:nvPr/>
         </p:nvSpPr>
@@ -25863,7 +26174,7 @@
       </p:sp>
       <p:sp>
         <p:nvSpPr>
-          <p:cNvPr id="14" name="TextBox 13"/>
+          <p:cNvPr id="13" name="TextBox 12"/>
           <p:cNvSpPr txBox="1"/>
           <p:nvPr/>
         </p:nvSpPr>
@@ -25910,7 +26221,7 @@
       </p:sp>
       <p:sp>
         <p:nvSpPr>
-          <p:cNvPr id="15" name="Oval 14"/>
+          <p:cNvPr id="14" name="Oval 13"/>
           <p:cNvSpPr/>
           <p:nvPr/>
         </p:nvSpPr>
@@ -25954,7 +26265,7 @@
       </p:sp>
       <p:sp>
         <p:nvSpPr>
-          <p:cNvPr id="16" name="TextBox 15"/>
+          <p:cNvPr id="15" name="TextBox 14"/>
           <p:cNvSpPr txBox="1"/>
           <p:nvPr/>
         </p:nvSpPr>
@@ -26001,7 +26312,7 @@
       </p:sp>
       <p:sp>
         <p:nvSpPr>
-          <p:cNvPr id="17" name="TextBox 16"/>
+          <p:cNvPr id="16" name="TextBox 15"/>
           <p:cNvSpPr txBox="1"/>
           <p:nvPr/>
         </p:nvSpPr>
@@ -26048,7 +26359,7 @@
       </p:sp>
       <p:sp>
         <p:nvSpPr>
-          <p:cNvPr id="18" name="Oval 17"/>
+          <p:cNvPr id="17" name="Oval 16"/>
           <p:cNvSpPr/>
           <p:nvPr/>
         </p:nvSpPr>
@@ -26092,7 +26403,7 @@
       </p:sp>
       <p:sp>
         <p:nvSpPr>
-          <p:cNvPr id="19" name="TextBox 18"/>
+          <p:cNvPr id="18" name="TextBox 17"/>
           <p:cNvSpPr txBox="1"/>
           <p:nvPr/>
         </p:nvSpPr>
@@ -26139,7 +26450,7 @@
       </p:sp>
       <p:sp>
         <p:nvSpPr>
-          <p:cNvPr id="20" name="TextBox 19"/>
+          <p:cNvPr id="19" name="TextBox 18"/>
           <p:cNvSpPr txBox="1"/>
           <p:nvPr/>
         </p:nvSpPr>
@@ -26186,7 +26497,7 @@
       </p:sp>
       <p:sp>
         <p:nvSpPr>
-          <p:cNvPr id="21" name="Rounded Rectangle 20"/>
+          <p:cNvPr id="20" name="Rounded Rectangle 19"/>
           <p:cNvSpPr/>
           <p:nvPr/>
         </p:nvSpPr>
@@ -26232,7 +26543,7 @@
       </p:sp>
       <p:sp>
         <p:nvSpPr>
-          <p:cNvPr id="22" name="TextBox 21"/>
+          <p:cNvPr id="21" name="TextBox 20"/>
           <p:cNvSpPr txBox="1"/>
           <p:nvPr/>
         </p:nvSpPr>
@@ -26284,6 +26595,64 @@
                 <a:cs typeface="NanumGothic"/>
               </a:rPr>
               <a:t>같은 모델도 프롬프트가 출력을 좌우한다</a:t>
+            </a:r>
+          </a:p>
+        </p:txBody>
+      </p:sp>
+      <p:sp>
+        <p:nvSpPr>
+          <p:cNvPr id="22" name="TextBox 21"/>
+          <p:cNvSpPr txBox="1"/>
+          <p:nvPr/>
+        </p:nvSpPr>
+        <p:spPr>
+          <a:xfrm>
+            <a:off x="8988552" y="6419088"/>
+            <a:ext cx="2697480" cy="365760"/>
+          </a:xfrm>
+          <a:prstGeom prst="rect">
+            <a:avLst/>
+          </a:prstGeom>
+          <a:noFill/>
+        </p:spPr>
+        <p:txBody>
+          <a:bodyPr wrap="square" anchor="ctr" lIns="0" rIns="0" tIns="0" bIns="0">
+            <a:spAutoFit/>
+          </a:bodyPr>
+          <a:lstStyle/>
+          <a:p>
+            <a:pPr algn="r">
+              <a:lnSpc>
+                <a:spcPct val="100000"/>
+              </a:lnSpc>
+              <a:spcBef>
+                <a:spcPts val="0"/>
+              </a:spcBef>
+              <a:spcAft>
+                <a:spcPts val="600"/>
+              </a:spcAft>
+            </a:pPr>
+            <a:r>
+              <a:rPr sz="900" b="1">
+                <a:solidFill>
+                  <a:srgbClr val="6366F1"/>
+                </a:solidFill>
+                <a:latin typeface="NanumGothic"/>
+                <a:ea typeface="NanumGothic"/>
+                <a:cs typeface="NanumGothic"/>
+              </a:rPr>
+              <a:t>Day 1 · 월</a:t>
+            </a:r>
+            <a:r>
+              <a:rPr sz="900" b="1">
+                <a:solidFill>
+                  <a:srgbClr val="64748B"/>
+                </a:solidFill>
+                <a:latin typeface="NanumGothic"/>
+                <a:ea typeface="NanumGothic"/>
+                <a:cs typeface="NanumGothic"/>
+              </a:rPr>
+              <a:t>   ·   31 / 42</a:t>
             </a:r>
           </a:p>
         </p:txBody>
@@ -26581,54 +26950,7 @@
       </p:sp>
       <p:sp>
         <p:nvSpPr>
-          <p:cNvPr id="8" name="TextBox 7"/>
-          <p:cNvSpPr txBox="1"/>
-          <p:nvPr/>
-        </p:nvSpPr>
-        <p:spPr>
-          <a:xfrm>
-            <a:off x="10241280" y="6419088"/>
-            <a:ext cx="1463040" cy="365760"/>
-          </a:xfrm>
-          <a:prstGeom prst="rect">
-            <a:avLst/>
-          </a:prstGeom>
-          <a:noFill/>
-        </p:spPr>
-        <p:txBody>
-          <a:bodyPr wrap="square" anchor="ctr" lIns="0" rIns="0" tIns="0" bIns="0">
-            <a:spAutoFit/>
-          </a:bodyPr>
-          <a:lstStyle/>
-          <a:p>
-            <a:pPr algn="r">
-              <a:lnSpc>
-                <a:spcPct val="100000"/>
-              </a:lnSpc>
-              <a:spcBef>
-                <a:spcPts val="0"/>
-              </a:spcBef>
-              <a:spcAft>
-                <a:spcPts val="600"/>
-              </a:spcAft>
-            </a:pPr>
-            <a:r>
-              <a:rPr sz="900" b="1">
-                <a:solidFill>
-                  <a:srgbClr val="6366F1"/>
-                </a:solidFill>
-                <a:latin typeface="NanumGothic"/>
-                <a:ea typeface="NanumGothic"/>
-                <a:cs typeface="NanumGothic"/>
-              </a:rPr>
-              <a:t>Day 1 · 월</a:t>
-            </a:r>
-          </a:p>
-        </p:txBody>
-      </p:sp>
-      <p:sp>
-        <p:nvSpPr>
-          <p:cNvPr id="9" name="Oval 8"/>
+          <p:cNvPr id="8" name="Oval 7"/>
           <p:cNvSpPr/>
           <p:nvPr/>
         </p:nvSpPr>
@@ -26672,7 +26994,7 @@
       </p:sp>
       <p:sp>
         <p:nvSpPr>
-          <p:cNvPr id="10" name="TextBox 9"/>
+          <p:cNvPr id="9" name="TextBox 8"/>
           <p:cNvSpPr txBox="1"/>
           <p:nvPr/>
         </p:nvSpPr>
@@ -26719,7 +27041,7 @@
       </p:sp>
       <p:sp>
         <p:nvSpPr>
-          <p:cNvPr id="11" name="TextBox 10"/>
+          <p:cNvPr id="10" name="TextBox 9"/>
           <p:cNvSpPr txBox="1"/>
           <p:nvPr/>
         </p:nvSpPr>
@@ -26766,7 +27088,7 @@
       </p:sp>
       <p:sp>
         <p:nvSpPr>
-          <p:cNvPr id="12" name="Oval 11"/>
+          <p:cNvPr id="11" name="Oval 10"/>
           <p:cNvSpPr/>
           <p:nvPr/>
         </p:nvSpPr>
@@ -26810,7 +27132,7 @@
       </p:sp>
       <p:sp>
         <p:nvSpPr>
-          <p:cNvPr id="13" name="TextBox 12"/>
+          <p:cNvPr id="12" name="TextBox 11"/>
           <p:cNvSpPr txBox="1"/>
           <p:nvPr/>
         </p:nvSpPr>
@@ -26857,7 +27179,7 @@
       </p:sp>
       <p:sp>
         <p:nvSpPr>
-          <p:cNvPr id="14" name="TextBox 13"/>
+          <p:cNvPr id="13" name="TextBox 12"/>
           <p:cNvSpPr txBox="1"/>
           <p:nvPr/>
         </p:nvSpPr>
@@ -26904,7 +27226,7 @@
       </p:sp>
       <p:sp>
         <p:nvSpPr>
-          <p:cNvPr id="15" name="Oval 14"/>
+          <p:cNvPr id="14" name="Oval 13"/>
           <p:cNvSpPr/>
           <p:nvPr/>
         </p:nvSpPr>
@@ -26948,7 +27270,7 @@
       </p:sp>
       <p:sp>
         <p:nvSpPr>
-          <p:cNvPr id="16" name="TextBox 15"/>
+          <p:cNvPr id="15" name="TextBox 14"/>
           <p:cNvSpPr txBox="1"/>
           <p:nvPr/>
         </p:nvSpPr>
@@ -26995,7 +27317,7 @@
       </p:sp>
       <p:sp>
         <p:nvSpPr>
-          <p:cNvPr id="17" name="TextBox 16"/>
+          <p:cNvPr id="16" name="TextBox 15"/>
           <p:cNvSpPr txBox="1"/>
           <p:nvPr/>
         </p:nvSpPr>
@@ -27042,7 +27364,7 @@
       </p:sp>
       <p:sp>
         <p:nvSpPr>
-          <p:cNvPr id="18" name="Oval 17"/>
+          <p:cNvPr id="17" name="Oval 16"/>
           <p:cNvSpPr/>
           <p:nvPr/>
         </p:nvSpPr>
@@ -27086,7 +27408,7 @@
       </p:sp>
       <p:sp>
         <p:nvSpPr>
-          <p:cNvPr id="19" name="TextBox 18"/>
+          <p:cNvPr id="18" name="TextBox 17"/>
           <p:cNvSpPr txBox="1"/>
           <p:nvPr/>
         </p:nvSpPr>
@@ -27133,7 +27455,7 @@
       </p:sp>
       <p:sp>
         <p:nvSpPr>
-          <p:cNvPr id="20" name="TextBox 19"/>
+          <p:cNvPr id="19" name="TextBox 18"/>
           <p:cNvSpPr txBox="1"/>
           <p:nvPr/>
         </p:nvSpPr>
@@ -27180,7 +27502,7 @@
       </p:sp>
       <p:sp>
         <p:nvSpPr>
-          <p:cNvPr id="21" name="Rounded Rectangle 20"/>
+          <p:cNvPr id="20" name="Rounded Rectangle 19"/>
           <p:cNvSpPr/>
           <p:nvPr/>
         </p:nvSpPr>
@@ -27226,7 +27548,7 @@
       </p:sp>
       <p:sp>
         <p:nvSpPr>
-          <p:cNvPr id="22" name="TextBox 21"/>
+          <p:cNvPr id="21" name="TextBox 20"/>
           <p:cNvSpPr txBox="1"/>
           <p:nvPr/>
         </p:nvSpPr>
@@ -27278,6 +27600,64 @@
                 <a:cs typeface="NanumGothic"/>
               </a:rPr>
               <a:t>이제 각 기법을 하나씩</a:t>
+            </a:r>
+          </a:p>
+        </p:txBody>
+      </p:sp>
+      <p:sp>
+        <p:nvSpPr>
+          <p:cNvPr id="22" name="TextBox 21"/>
+          <p:cNvSpPr txBox="1"/>
+          <p:nvPr/>
+        </p:nvSpPr>
+        <p:spPr>
+          <a:xfrm>
+            <a:off x="8988552" y="6419088"/>
+            <a:ext cx="2697480" cy="365760"/>
+          </a:xfrm>
+          <a:prstGeom prst="rect">
+            <a:avLst/>
+          </a:prstGeom>
+          <a:noFill/>
+        </p:spPr>
+        <p:txBody>
+          <a:bodyPr wrap="square" anchor="ctr" lIns="0" rIns="0" tIns="0" bIns="0">
+            <a:spAutoFit/>
+          </a:bodyPr>
+          <a:lstStyle/>
+          <a:p>
+            <a:pPr algn="r">
+              <a:lnSpc>
+                <a:spcPct val="100000"/>
+              </a:lnSpc>
+              <a:spcBef>
+                <a:spcPts val="0"/>
+              </a:spcBef>
+              <a:spcAft>
+                <a:spcPts val="600"/>
+              </a:spcAft>
+            </a:pPr>
+            <a:r>
+              <a:rPr sz="900" b="1">
+                <a:solidFill>
+                  <a:srgbClr val="6366F1"/>
+                </a:solidFill>
+                <a:latin typeface="NanumGothic"/>
+                <a:ea typeface="NanumGothic"/>
+                <a:cs typeface="NanumGothic"/>
+              </a:rPr>
+              <a:t>Day 1 · 월</a:t>
+            </a:r>
+            <a:r>
+              <a:rPr sz="900" b="1">
+                <a:solidFill>
+                  <a:srgbClr val="64748B"/>
+                </a:solidFill>
+                <a:latin typeface="NanumGothic"/>
+                <a:ea typeface="NanumGothic"/>
+                <a:cs typeface="NanumGothic"/>
+              </a:rPr>
+              <a:t>   ·   32 / 42</a:t>
             </a:r>
           </a:p>
         </p:txBody>
@@ -27575,54 +27955,7 @@
       </p:sp>
       <p:sp>
         <p:nvSpPr>
-          <p:cNvPr id="8" name="TextBox 7"/>
-          <p:cNvSpPr txBox="1"/>
-          <p:nvPr/>
-        </p:nvSpPr>
-        <p:spPr>
-          <a:xfrm>
-            <a:off x="10241280" y="6419088"/>
-            <a:ext cx="1463040" cy="365760"/>
-          </a:xfrm>
-          <a:prstGeom prst="rect">
-            <a:avLst/>
-          </a:prstGeom>
-          <a:noFill/>
-        </p:spPr>
-        <p:txBody>
-          <a:bodyPr wrap="square" anchor="ctr" lIns="0" rIns="0" tIns="0" bIns="0">
-            <a:spAutoFit/>
-          </a:bodyPr>
-          <a:lstStyle/>
-          <a:p>
-            <a:pPr algn="r">
-              <a:lnSpc>
-                <a:spcPct val="100000"/>
-              </a:lnSpc>
-              <a:spcBef>
-                <a:spcPts val="0"/>
-              </a:spcBef>
-              <a:spcAft>
-                <a:spcPts val="600"/>
-              </a:spcAft>
-            </a:pPr>
-            <a:r>
-              <a:rPr sz="900" b="1">
-                <a:solidFill>
-                  <a:srgbClr val="6366F1"/>
-                </a:solidFill>
-                <a:latin typeface="NanumGothic"/>
-                <a:ea typeface="NanumGothic"/>
-                <a:cs typeface="NanumGothic"/>
-              </a:rPr>
-              <a:t>Day 1 · 월</a:t>
-            </a:r>
-          </a:p>
-        </p:txBody>
-      </p:sp>
-      <p:sp>
-        <p:nvSpPr>
-          <p:cNvPr id="9" name="Oval 8"/>
+          <p:cNvPr id="8" name="Oval 7"/>
           <p:cNvSpPr/>
           <p:nvPr/>
         </p:nvSpPr>
@@ -27666,7 +27999,7 @@
       </p:sp>
       <p:sp>
         <p:nvSpPr>
-          <p:cNvPr id="10" name="TextBox 9"/>
+          <p:cNvPr id="9" name="TextBox 8"/>
           <p:cNvSpPr txBox="1"/>
           <p:nvPr/>
         </p:nvSpPr>
@@ -27713,7 +28046,7 @@
       </p:sp>
       <p:sp>
         <p:nvSpPr>
-          <p:cNvPr id="11" name="TextBox 10"/>
+          <p:cNvPr id="10" name="TextBox 9"/>
           <p:cNvSpPr txBox="1"/>
           <p:nvPr/>
         </p:nvSpPr>
@@ -27760,7 +28093,7 @@
       </p:sp>
       <p:sp>
         <p:nvSpPr>
-          <p:cNvPr id="12" name="Oval 11"/>
+          <p:cNvPr id="11" name="Oval 10"/>
           <p:cNvSpPr/>
           <p:nvPr/>
         </p:nvSpPr>
@@ -27804,7 +28137,7 @@
       </p:sp>
       <p:sp>
         <p:nvSpPr>
-          <p:cNvPr id="13" name="TextBox 12"/>
+          <p:cNvPr id="12" name="TextBox 11"/>
           <p:cNvSpPr txBox="1"/>
           <p:nvPr/>
         </p:nvSpPr>
@@ -27851,7 +28184,7 @@
       </p:sp>
       <p:sp>
         <p:nvSpPr>
-          <p:cNvPr id="14" name="TextBox 13"/>
+          <p:cNvPr id="13" name="TextBox 12"/>
           <p:cNvSpPr txBox="1"/>
           <p:nvPr/>
         </p:nvSpPr>
@@ -27898,7 +28231,7 @@
       </p:sp>
       <p:sp>
         <p:nvSpPr>
-          <p:cNvPr id="15" name="Oval 14"/>
+          <p:cNvPr id="14" name="Oval 13"/>
           <p:cNvSpPr/>
           <p:nvPr/>
         </p:nvSpPr>
@@ -27942,7 +28275,7 @@
       </p:sp>
       <p:sp>
         <p:nvSpPr>
-          <p:cNvPr id="16" name="TextBox 15"/>
+          <p:cNvPr id="15" name="TextBox 14"/>
           <p:cNvSpPr txBox="1"/>
           <p:nvPr/>
         </p:nvSpPr>
@@ -27989,7 +28322,7 @@
       </p:sp>
       <p:sp>
         <p:nvSpPr>
-          <p:cNvPr id="17" name="TextBox 16"/>
+          <p:cNvPr id="16" name="TextBox 15"/>
           <p:cNvSpPr txBox="1"/>
           <p:nvPr/>
         </p:nvSpPr>
@@ -28030,6 +28363,64 @@
                 <a:cs typeface="NanumGothic"/>
               </a:rPr>
               <a:t>'비전공자에게 설명하듯' vs '전문가용으로'</a:t>
+            </a:r>
+          </a:p>
+        </p:txBody>
+      </p:sp>
+      <p:sp>
+        <p:nvSpPr>
+          <p:cNvPr id="17" name="TextBox 16"/>
+          <p:cNvSpPr txBox="1"/>
+          <p:nvPr/>
+        </p:nvSpPr>
+        <p:spPr>
+          <a:xfrm>
+            <a:off x="8988552" y="6419088"/>
+            <a:ext cx="2697480" cy="365760"/>
+          </a:xfrm>
+          <a:prstGeom prst="rect">
+            <a:avLst/>
+          </a:prstGeom>
+          <a:noFill/>
+        </p:spPr>
+        <p:txBody>
+          <a:bodyPr wrap="square" anchor="ctr" lIns="0" rIns="0" tIns="0" bIns="0">
+            <a:spAutoFit/>
+          </a:bodyPr>
+          <a:lstStyle/>
+          <a:p>
+            <a:pPr algn="r">
+              <a:lnSpc>
+                <a:spcPct val="100000"/>
+              </a:lnSpc>
+              <a:spcBef>
+                <a:spcPts val="0"/>
+              </a:spcBef>
+              <a:spcAft>
+                <a:spcPts val="600"/>
+              </a:spcAft>
+            </a:pPr>
+            <a:r>
+              <a:rPr sz="900" b="1">
+                <a:solidFill>
+                  <a:srgbClr val="6366F1"/>
+                </a:solidFill>
+                <a:latin typeface="NanumGothic"/>
+                <a:ea typeface="NanumGothic"/>
+                <a:cs typeface="NanumGothic"/>
+              </a:rPr>
+              <a:t>Day 1 · 월</a:t>
+            </a:r>
+            <a:r>
+              <a:rPr sz="900" b="1">
+                <a:solidFill>
+                  <a:srgbClr val="64748B"/>
+                </a:solidFill>
+                <a:latin typeface="NanumGothic"/>
+                <a:ea typeface="NanumGothic"/>
+                <a:cs typeface="NanumGothic"/>
+              </a:rPr>
+              <a:t>   ·   33 / 42</a:t>
             </a:r>
           </a:p>
         </p:txBody>
@@ -28327,54 +28718,7 @@
       </p:sp>
       <p:sp>
         <p:nvSpPr>
-          <p:cNvPr id="8" name="TextBox 7"/>
-          <p:cNvSpPr txBox="1"/>
-          <p:nvPr/>
-        </p:nvSpPr>
-        <p:spPr>
-          <a:xfrm>
-            <a:off x="10241280" y="6419088"/>
-            <a:ext cx="1463040" cy="365760"/>
-          </a:xfrm>
-          <a:prstGeom prst="rect">
-            <a:avLst/>
-          </a:prstGeom>
-          <a:noFill/>
-        </p:spPr>
-        <p:txBody>
-          <a:bodyPr wrap="square" anchor="ctr" lIns="0" rIns="0" tIns="0" bIns="0">
-            <a:spAutoFit/>
-          </a:bodyPr>
-          <a:lstStyle/>
-          <a:p>
-            <a:pPr algn="r">
-              <a:lnSpc>
-                <a:spcPct val="100000"/>
-              </a:lnSpc>
-              <a:spcBef>
-                <a:spcPts val="0"/>
-              </a:spcBef>
-              <a:spcAft>
-                <a:spcPts val="600"/>
-              </a:spcAft>
-            </a:pPr>
-            <a:r>
-              <a:rPr sz="900" b="1">
-                <a:solidFill>
-                  <a:srgbClr val="6366F1"/>
-                </a:solidFill>
-                <a:latin typeface="NanumGothic"/>
-                <a:ea typeface="NanumGothic"/>
-                <a:cs typeface="NanumGothic"/>
-              </a:rPr>
-              <a:t>Day 1 · 월</a:t>
-            </a:r>
-          </a:p>
-        </p:txBody>
-      </p:sp>
-      <p:sp>
-        <p:nvSpPr>
-          <p:cNvPr id="9" name="Oval 8"/>
+          <p:cNvPr id="8" name="Oval 7"/>
           <p:cNvSpPr/>
           <p:nvPr/>
         </p:nvSpPr>
@@ -28418,7 +28762,7 @@
       </p:sp>
       <p:sp>
         <p:nvSpPr>
-          <p:cNvPr id="10" name="TextBox 9"/>
+          <p:cNvPr id="9" name="TextBox 8"/>
           <p:cNvSpPr txBox="1"/>
           <p:nvPr/>
         </p:nvSpPr>
@@ -28465,7 +28809,7 @@
       </p:sp>
       <p:sp>
         <p:nvSpPr>
-          <p:cNvPr id="11" name="TextBox 10"/>
+          <p:cNvPr id="10" name="TextBox 9"/>
           <p:cNvSpPr txBox="1"/>
           <p:nvPr/>
         </p:nvSpPr>
@@ -28512,7 +28856,7 @@
       </p:sp>
       <p:sp>
         <p:nvSpPr>
-          <p:cNvPr id="12" name="Oval 11"/>
+          <p:cNvPr id="11" name="Oval 10"/>
           <p:cNvSpPr/>
           <p:nvPr/>
         </p:nvSpPr>
@@ -28556,7 +28900,7 @@
       </p:sp>
       <p:sp>
         <p:nvSpPr>
-          <p:cNvPr id="13" name="TextBox 12"/>
+          <p:cNvPr id="12" name="TextBox 11"/>
           <p:cNvSpPr txBox="1"/>
           <p:nvPr/>
         </p:nvSpPr>
@@ -28603,7 +28947,7 @@
       </p:sp>
       <p:sp>
         <p:nvSpPr>
-          <p:cNvPr id="14" name="TextBox 13"/>
+          <p:cNvPr id="13" name="TextBox 12"/>
           <p:cNvSpPr txBox="1"/>
           <p:nvPr/>
         </p:nvSpPr>
@@ -28650,7 +28994,7 @@
       </p:sp>
       <p:sp>
         <p:nvSpPr>
-          <p:cNvPr id="15" name="Oval 14"/>
+          <p:cNvPr id="14" name="Oval 13"/>
           <p:cNvSpPr/>
           <p:nvPr/>
         </p:nvSpPr>
@@ -28694,7 +29038,7 @@
       </p:sp>
       <p:sp>
         <p:nvSpPr>
-          <p:cNvPr id="16" name="TextBox 15"/>
+          <p:cNvPr id="15" name="TextBox 14"/>
           <p:cNvSpPr txBox="1"/>
           <p:nvPr/>
         </p:nvSpPr>
@@ -28741,7 +29085,7 @@
       </p:sp>
       <p:sp>
         <p:nvSpPr>
-          <p:cNvPr id="17" name="TextBox 16"/>
+          <p:cNvPr id="16" name="TextBox 15"/>
           <p:cNvSpPr txBox="1"/>
           <p:nvPr/>
         </p:nvSpPr>
@@ -28782,6 +29126,64 @@
                 <a:cs typeface="NanumGothic"/>
               </a:rPr>
               <a:t>표 형식 예시 2개 → 새 데이터도 같은 표로</a:t>
+            </a:r>
+          </a:p>
+        </p:txBody>
+      </p:sp>
+      <p:sp>
+        <p:nvSpPr>
+          <p:cNvPr id="17" name="TextBox 16"/>
+          <p:cNvSpPr txBox="1"/>
+          <p:nvPr/>
+        </p:nvSpPr>
+        <p:spPr>
+          <a:xfrm>
+            <a:off x="8988552" y="6419088"/>
+            <a:ext cx="2697480" cy="365760"/>
+          </a:xfrm>
+          <a:prstGeom prst="rect">
+            <a:avLst/>
+          </a:prstGeom>
+          <a:noFill/>
+        </p:spPr>
+        <p:txBody>
+          <a:bodyPr wrap="square" anchor="ctr" lIns="0" rIns="0" tIns="0" bIns="0">
+            <a:spAutoFit/>
+          </a:bodyPr>
+          <a:lstStyle/>
+          <a:p>
+            <a:pPr algn="r">
+              <a:lnSpc>
+                <a:spcPct val="100000"/>
+              </a:lnSpc>
+              <a:spcBef>
+                <a:spcPts val="0"/>
+              </a:spcBef>
+              <a:spcAft>
+                <a:spcPts val="600"/>
+              </a:spcAft>
+            </a:pPr>
+            <a:r>
+              <a:rPr sz="900" b="1">
+                <a:solidFill>
+                  <a:srgbClr val="6366F1"/>
+                </a:solidFill>
+                <a:latin typeface="NanumGothic"/>
+                <a:ea typeface="NanumGothic"/>
+                <a:cs typeface="NanumGothic"/>
+              </a:rPr>
+              <a:t>Day 1 · 월</a:t>
+            </a:r>
+            <a:r>
+              <a:rPr sz="900" b="1">
+                <a:solidFill>
+                  <a:srgbClr val="64748B"/>
+                </a:solidFill>
+                <a:latin typeface="NanumGothic"/>
+                <a:ea typeface="NanumGothic"/>
+                <a:cs typeface="NanumGothic"/>
+              </a:rPr>
+              <a:t>   ·   34 / 42</a:t>
             </a:r>
           </a:p>
         </p:txBody>
@@ -29079,54 +29481,7 @@
       </p:sp>
       <p:sp>
         <p:nvSpPr>
-          <p:cNvPr id="8" name="TextBox 7"/>
-          <p:cNvSpPr txBox="1"/>
-          <p:nvPr/>
-        </p:nvSpPr>
-        <p:spPr>
-          <a:xfrm>
-            <a:off x="10241280" y="6419088"/>
-            <a:ext cx="1463040" cy="365760"/>
-          </a:xfrm>
-          <a:prstGeom prst="rect">
-            <a:avLst/>
-          </a:prstGeom>
-          <a:noFill/>
-        </p:spPr>
-        <p:txBody>
-          <a:bodyPr wrap="square" anchor="ctr" lIns="0" rIns="0" tIns="0" bIns="0">
-            <a:spAutoFit/>
-          </a:bodyPr>
-          <a:lstStyle/>
-          <a:p>
-            <a:pPr algn="r">
-              <a:lnSpc>
-                <a:spcPct val="100000"/>
-              </a:lnSpc>
-              <a:spcBef>
-                <a:spcPts val="0"/>
-              </a:spcBef>
-              <a:spcAft>
-                <a:spcPts val="600"/>
-              </a:spcAft>
-            </a:pPr>
-            <a:r>
-              <a:rPr sz="900" b="1">
-                <a:solidFill>
-                  <a:srgbClr val="6366F1"/>
-                </a:solidFill>
-                <a:latin typeface="NanumGothic"/>
-                <a:ea typeface="NanumGothic"/>
-                <a:cs typeface="NanumGothic"/>
-              </a:rPr>
-              <a:t>Day 1 · 월</a:t>
-            </a:r>
-          </a:p>
-        </p:txBody>
-      </p:sp>
-      <p:sp>
-        <p:nvSpPr>
-          <p:cNvPr id="9" name="Oval 8"/>
+          <p:cNvPr id="8" name="Oval 7"/>
           <p:cNvSpPr/>
           <p:nvPr/>
         </p:nvSpPr>
@@ -29170,7 +29525,7 @@
       </p:sp>
       <p:sp>
         <p:nvSpPr>
-          <p:cNvPr id="10" name="TextBox 9"/>
+          <p:cNvPr id="9" name="TextBox 8"/>
           <p:cNvSpPr txBox="1"/>
           <p:nvPr/>
         </p:nvSpPr>
@@ -29217,7 +29572,7 @@
       </p:sp>
       <p:sp>
         <p:nvSpPr>
-          <p:cNvPr id="11" name="TextBox 10"/>
+          <p:cNvPr id="10" name="TextBox 9"/>
           <p:cNvSpPr txBox="1"/>
           <p:nvPr/>
         </p:nvSpPr>
@@ -29264,7 +29619,7 @@
       </p:sp>
       <p:sp>
         <p:nvSpPr>
-          <p:cNvPr id="12" name="Oval 11"/>
+          <p:cNvPr id="11" name="Oval 10"/>
           <p:cNvSpPr/>
           <p:nvPr/>
         </p:nvSpPr>
@@ -29308,7 +29663,7 @@
       </p:sp>
       <p:sp>
         <p:nvSpPr>
-          <p:cNvPr id="13" name="TextBox 12"/>
+          <p:cNvPr id="12" name="TextBox 11"/>
           <p:cNvSpPr txBox="1"/>
           <p:nvPr/>
         </p:nvSpPr>
@@ -29355,7 +29710,7 @@
       </p:sp>
       <p:sp>
         <p:nvSpPr>
-          <p:cNvPr id="14" name="TextBox 13"/>
+          <p:cNvPr id="13" name="TextBox 12"/>
           <p:cNvSpPr txBox="1"/>
           <p:nvPr/>
         </p:nvSpPr>
@@ -29402,7 +29757,7 @@
       </p:sp>
       <p:sp>
         <p:nvSpPr>
-          <p:cNvPr id="15" name="Oval 14"/>
+          <p:cNvPr id="14" name="Oval 13"/>
           <p:cNvSpPr/>
           <p:nvPr/>
         </p:nvSpPr>
@@ -29446,7 +29801,7 @@
       </p:sp>
       <p:sp>
         <p:nvSpPr>
-          <p:cNvPr id="16" name="TextBox 15"/>
+          <p:cNvPr id="15" name="TextBox 14"/>
           <p:cNvSpPr txBox="1"/>
           <p:nvPr/>
         </p:nvSpPr>
@@ -29493,7 +29848,7 @@
       </p:sp>
       <p:sp>
         <p:nvSpPr>
-          <p:cNvPr id="17" name="TextBox 16"/>
+          <p:cNvPr id="16" name="TextBox 15"/>
           <p:cNvSpPr txBox="1"/>
           <p:nvPr/>
         </p:nvSpPr>
@@ -29534,6 +29889,64 @@
                 <a:cs typeface="NanumGothic"/>
               </a:rPr>
               <a:t>간단한 작업엔 굳이 — 길어지고 느려짐</a:t>
+            </a:r>
+          </a:p>
+        </p:txBody>
+      </p:sp>
+      <p:sp>
+        <p:nvSpPr>
+          <p:cNvPr id="17" name="TextBox 16"/>
+          <p:cNvSpPr txBox="1"/>
+          <p:nvPr/>
+        </p:nvSpPr>
+        <p:spPr>
+          <a:xfrm>
+            <a:off x="8988552" y="6419088"/>
+            <a:ext cx="2697480" cy="365760"/>
+          </a:xfrm>
+          <a:prstGeom prst="rect">
+            <a:avLst/>
+          </a:prstGeom>
+          <a:noFill/>
+        </p:spPr>
+        <p:txBody>
+          <a:bodyPr wrap="square" anchor="ctr" lIns="0" rIns="0" tIns="0" bIns="0">
+            <a:spAutoFit/>
+          </a:bodyPr>
+          <a:lstStyle/>
+          <a:p>
+            <a:pPr algn="r">
+              <a:lnSpc>
+                <a:spcPct val="100000"/>
+              </a:lnSpc>
+              <a:spcBef>
+                <a:spcPts val="0"/>
+              </a:spcBef>
+              <a:spcAft>
+                <a:spcPts val="600"/>
+              </a:spcAft>
+            </a:pPr>
+            <a:r>
+              <a:rPr sz="900" b="1">
+                <a:solidFill>
+                  <a:srgbClr val="6366F1"/>
+                </a:solidFill>
+                <a:latin typeface="NanumGothic"/>
+                <a:ea typeface="NanumGothic"/>
+                <a:cs typeface="NanumGothic"/>
+              </a:rPr>
+              <a:t>Day 1 · 월</a:t>
+            </a:r>
+            <a:r>
+              <a:rPr sz="900" b="1">
+                <a:solidFill>
+                  <a:srgbClr val="64748B"/>
+                </a:solidFill>
+                <a:latin typeface="NanumGothic"/>
+                <a:ea typeface="NanumGothic"/>
+                <a:cs typeface="NanumGothic"/>
+              </a:rPr>
+              <a:t>   ·   35 / 42</a:t>
             </a:r>
           </a:p>
         </p:txBody>
@@ -29831,54 +30244,7 @@
       </p:sp>
       <p:sp>
         <p:nvSpPr>
-          <p:cNvPr id="8" name="TextBox 7"/>
-          <p:cNvSpPr txBox="1"/>
-          <p:nvPr/>
-        </p:nvSpPr>
-        <p:spPr>
-          <a:xfrm>
-            <a:off x="10241280" y="6419088"/>
-            <a:ext cx="1463040" cy="365760"/>
-          </a:xfrm>
-          <a:prstGeom prst="rect">
-            <a:avLst/>
-          </a:prstGeom>
-          <a:noFill/>
-        </p:spPr>
-        <p:txBody>
-          <a:bodyPr wrap="square" anchor="ctr" lIns="0" rIns="0" tIns="0" bIns="0">
-            <a:spAutoFit/>
-          </a:bodyPr>
-          <a:lstStyle/>
-          <a:p>
-            <a:pPr algn="r">
-              <a:lnSpc>
-                <a:spcPct val="100000"/>
-              </a:lnSpc>
-              <a:spcBef>
-                <a:spcPts val="0"/>
-              </a:spcBef>
-              <a:spcAft>
-                <a:spcPts val="600"/>
-              </a:spcAft>
-            </a:pPr>
-            <a:r>
-              <a:rPr sz="900" b="1">
-                <a:solidFill>
-                  <a:srgbClr val="6366F1"/>
-                </a:solidFill>
-                <a:latin typeface="NanumGothic"/>
-                <a:ea typeface="NanumGothic"/>
-                <a:cs typeface="NanumGothic"/>
-              </a:rPr>
-              <a:t>Day 1 · 월</a:t>
-            </a:r>
-          </a:p>
-        </p:txBody>
-      </p:sp>
-      <p:sp>
-        <p:nvSpPr>
-          <p:cNvPr id="9" name="Oval 8"/>
+          <p:cNvPr id="8" name="Oval 7"/>
           <p:cNvSpPr/>
           <p:nvPr/>
         </p:nvSpPr>
@@ -29922,7 +30288,7 @@
       </p:sp>
       <p:sp>
         <p:nvSpPr>
-          <p:cNvPr id="10" name="TextBox 9"/>
+          <p:cNvPr id="9" name="TextBox 8"/>
           <p:cNvSpPr txBox="1"/>
           <p:nvPr/>
         </p:nvSpPr>
@@ -29969,7 +30335,7 @@
       </p:sp>
       <p:sp>
         <p:nvSpPr>
-          <p:cNvPr id="11" name="TextBox 10"/>
+          <p:cNvPr id="10" name="TextBox 9"/>
           <p:cNvSpPr txBox="1"/>
           <p:nvPr/>
         </p:nvSpPr>
@@ -30016,7 +30382,7 @@
       </p:sp>
       <p:sp>
         <p:nvSpPr>
-          <p:cNvPr id="12" name="Oval 11"/>
+          <p:cNvPr id="11" name="Oval 10"/>
           <p:cNvSpPr/>
           <p:nvPr/>
         </p:nvSpPr>
@@ -30060,7 +30426,7 @@
       </p:sp>
       <p:sp>
         <p:nvSpPr>
-          <p:cNvPr id="13" name="TextBox 12"/>
+          <p:cNvPr id="12" name="TextBox 11"/>
           <p:cNvSpPr txBox="1"/>
           <p:nvPr/>
         </p:nvSpPr>
@@ -30107,7 +30473,7 @@
       </p:sp>
       <p:sp>
         <p:nvSpPr>
-          <p:cNvPr id="14" name="TextBox 13"/>
+          <p:cNvPr id="13" name="TextBox 12"/>
           <p:cNvSpPr txBox="1"/>
           <p:nvPr/>
         </p:nvSpPr>
@@ -30154,7 +30520,7 @@
       </p:sp>
       <p:sp>
         <p:nvSpPr>
-          <p:cNvPr id="15" name="Oval 14"/>
+          <p:cNvPr id="14" name="Oval 13"/>
           <p:cNvSpPr/>
           <p:nvPr/>
         </p:nvSpPr>
@@ -30198,7 +30564,7 @@
       </p:sp>
       <p:sp>
         <p:nvSpPr>
-          <p:cNvPr id="16" name="TextBox 15"/>
+          <p:cNvPr id="15" name="TextBox 14"/>
           <p:cNvSpPr txBox="1"/>
           <p:nvPr/>
         </p:nvSpPr>
@@ -30245,7 +30611,7 @@
       </p:sp>
       <p:sp>
         <p:nvSpPr>
-          <p:cNvPr id="17" name="TextBox 16"/>
+          <p:cNvPr id="16" name="TextBox 15"/>
           <p:cNvSpPr txBox="1"/>
           <p:nvPr/>
         </p:nvSpPr>
@@ -30286,6 +30652,64 @@
                 <a:cs typeface="NanumGothic"/>
               </a:rPr>
               <a:t>리서치엔 낮은 temperature가 유리 — 결과 안정</a:t>
+            </a:r>
+          </a:p>
+        </p:txBody>
+      </p:sp>
+      <p:sp>
+        <p:nvSpPr>
+          <p:cNvPr id="17" name="TextBox 16"/>
+          <p:cNvSpPr txBox="1"/>
+          <p:nvPr/>
+        </p:nvSpPr>
+        <p:spPr>
+          <a:xfrm>
+            <a:off x="8988552" y="6419088"/>
+            <a:ext cx="2697480" cy="365760"/>
+          </a:xfrm>
+          <a:prstGeom prst="rect">
+            <a:avLst/>
+          </a:prstGeom>
+          <a:noFill/>
+        </p:spPr>
+        <p:txBody>
+          <a:bodyPr wrap="square" anchor="ctr" lIns="0" rIns="0" tIns="0" bIns="0">
+            <a:spAutoFit/>
+          </a:bodyPr>
+          <a:lstStyle/>
+          <a:p>
+            <a:pPr algn="r">
+              <a:lnSpc>
+                <a:spcPct val="100000"/>
+              </a:lnSpc>
+              <a:spcBef>
+                <a:spcPts val="0"/>
+              </a:spcBef>
+              <a:spcAft>
+                <a:spcPts val="600"/>
+              </a:spcAft>
+            </a:pPr>
+            <a:r>
+              <a:rPr sz="900" b="1">
+                <a:solidFill>
+                  <a:srgbClr val="6366F1"/>
+                </a:solidFill>
+                <a:latin typeface="NanumGothic"/>
+                <a:ea typeface="NanumGothic"/>
+                <a:cs typeface="NanumGothic"/>
+              </a:rPr>
+              <a:t>Day 1 · 월</a:t>
+            </a:r>
+            <a:r>
+              <a:rPr sz="900" b="1">
+                <a:solidFill>
+                  <a:srgbClr val="64748B"/>
+                </a:solidFill>
+                <a:latin typeface="NanumGothic"/>
+                <a:ea typeface="NanumGothic"/>
+                <a:cs typeface="NanumGothic"/>
+              </a:rPr>
+              <a:t>   ·   36 / 42</a:t>
             </a:r>
           </a:p>
         </p:txBody>
@@ -30583,54 +31007,7 @@
       </p:sp>
       <p:sp>
         <p:nvSpPr>
-          <p:cNvPr id="8" name="TextBox 7"/>
-          <p:cNvSpPr txBox="1"/>
-          <p:nvPr/>
-        </p:nvSpPr>
-        <p:spPr>
-          <a:xfrm>
-            <a:off x="10241280" y="6419088"/>
-            <a:ext cx="1463040" cy="365760"/>
-          </a:xfrm>
-          <a:prstGeom prst="rect">
-            <a:avLst/>
-          </a:prstGeom>
-          <a:noFill/>
-        </p:spPr>
-        <p:txBody>
-          <a:bodyPr wrap="square" anchor="ctr" lIns="0" rIns="0" tIns="0" bIns="0">
-            <a:spAutoFit/>
-          </a:bodyPr>
-          <a:lstStyle/>
-          <a:p>
-            <a:pPr algn="r">
-              <a:lnSpc>
-                <a:spcPct val="100000"/>
-              </a:lnSpc>
-              <a:spcBef>
-                <a:spcPts val="0"/>
-              </a:spcBef>
-              <a:spcAft>
-                <a:spcPts val="600"/>
-              </a:spcAft>
-            </a:pPr>
-            <a:r>
-              <a:rPr sz="900" b="1">
-                <a:solidFill>
-                  <a:srgbClr val="6366F1"/>
-                </a:solidFill>
-                <a:latin typeface="NanumGothic"/>
-                <a:ea typeface="NanumGothic"/>
-                <a:cs typeface="NanumGothic"/>
-              </a:rPr>
-              <a:t>Day 1 · 월</a:t>
-            </a:r>
-          </a:p>
-        </p:txBody>
-      </p:sp>
-      <p:sp>
-        <p:nvSpPr>
-          <p:cNvPr id="9" name="Oval 8"/>
+          <p:cNvPr id="8" name="Oval 7"/>
           <p:cNvSpPr/>
           <p:nvPr/>
         </p:nvSpPr>
@@ -30674,7 +31051,7 @@
       </p:sp>
       <p:sp>
         <p:nvSpPr>
-          <p:cNvPr id="10" name="TextBox 9"/>
+          <p:cNvPr id="9" name="TextBox 8"/>
           <p:cNvSpPr txBox="1"/>
           <p:nvPr/>
         </p:nvSpPr>
@@ -30721,7 +31098,7 @@
       </p:sp>
       <p:sp>
         <p:nvSpPr>
-          <p:cNvPr id="11" name="TextBox 10"/>
+          <p:cNvPr id="10" name="TextBox 9"/>
           <p:cNvSpPr txBox="1"/>
           <p:nvPr/>
         </p:nvSpPr>
@@ -30768,7 +31145,7 @@
       </p:sp>
       <p:sp>
         <p:nvSpPr>
-          <p:cNvPr id="12" name="Oval 11"/>
+          <p:cNvPr id="11" name="Oval 10"/>
           <p:cNvSpPr/>
           <p:nvPr/>
         </p:nvSpPr>
@@ -30812,7 +31189,7 @@
       </p:sp>
       <p:sp>
         <p:nvSpPr>
-          <p:cNvPr id="13" name="TextBox 12"/>
+          <p:cNvPr id="12" name="TextBox 11"/>
           <p:cNvSpPr txBox="1"/>
           <p:nvPr/>
         </p:nvSpPr>
@@ -30859,7 +31236,7 @@
       </p:sp>
       <p:sp>
         <p:nvSpPr>
-          <p:cNvPr id="14" name="TextBox 13"/>
+          <p:cNvPr id="13" name="TextBox 12"/>
           <p:cNvSpPr txBox="1"/>
           <p:nvPr/>
         </p:nvSpPr>
@@ -30906,7 +31283,7 @@
       </p:sp>
       <p:sp>
         <p:nvSpPr>
-          <p:cNvPr id="15" name="Oval 14"/>
+          <p:cNvPr id="14" name="Oval 13"/>
           <p:cNvSpPr/>
           <p:nvPr/>
         </p:nvSpPr>
@@ -30950,7 +31327,7 @@
       </p:sp>
       <p:sp>
         <p:nvSpPr>
-          <p:cNvPr id="16" name="TextBox 15"/>
+          <p:cNvPr id="15" name="TextBox 14"/>
           <p:cNvSpPr txBox="1"/>
           <p:nvPr/>
         </p:nvSpPr>
@@ -30997,7 +31374,7 @@
       </p:sp>
       <p:sp>
         <p:nvSpPr>
-          <p:cNvPr id="17" name="TextBox 16"/>
+          <p:cNvPr id="16" name="TextBox 15"/>
           <p:cNvSpPr txBox="1"/>
           <p:nvPr/>
         </p:nvSpPr>
@@ -31044,7 +31421,7 @@
       </p:sp>
       <p:sp>
         <p:nvSpPr>
-          <p:cNvPr id="18" name="Rounded Rectangle 17"/>
+          <p:cNvPr id="17" name="Rounded Rectangle 16"/>
           <p:cNvSpPr/>
           <p:nvPr/>
         </p:nvSpPr>
@@ -31090,7 +31467,7 @@
       </p:sp>
       <p:sp>
         <p:nvSpPr>
-          <p:cNvPr id="19" name="TextBox 18"/>
+          <p:cNvPr id="18" name="TextBox 17"/>
           <p:cNvSpPr txBox="1"/>
           <p:nvPr/>
         </p:nvSpPr>
@@ -31142,6 +31519,64 @@
                 <a:cs typeface="NanumGothic"/>
               </a:rPr>
               <a:t>현재 Claude 최대 1M 토큰(≈책 여러 권) — 긴 문서·코드 통째 분석 (단 lost in the middle 주의)</a:t>
+            </a:r>
+          </a:p>
+        </p:txBody>
+      </p:sp>
+      <p:sp>
+        <p:nvSpPr>
+          <p:cNvPr id="19" name="TextBox 18"/>
+          <p:cNvSpPr txBox="1"/>
+          <p:nvPr/>
+        </p:nvSpPr>
+        <p:spPr>
+          <a:xfrm>
+            <a:off x="8988552" y="6419088"/>
+            <a:ext cx="2697480" cy="365760"/>
+          </a:xfrm>
+          <a:prstGeom prst="rect">
+            <a:avLst/>
+          </a:prstGeom>
+          <a:noFill/>
+        </p:spPr>
+        <p:txBody>
+          <a:bodyPr wrap="square" anchor="ctr" lIns="0" rIns="0" tIns="0" bIns="0">
+            <a:spAutoFit/>
+          </a:bodyPr>
+          <a:lstStyle/>
+          <a:p>
+            <a:pPr algn="r">
+              <a:lnSpc>
+                <a:spcPct val="100000"/>
+              </a:lnSpc>
+              <a:spcBef>
+                <a:spcPts val="0"/>
+              </a:spcBef>
+              <a:spcAft>
+                <a:spcPts val="600"/>
+              </a:spcAft>
+            </a:pPr>
+            <a:r>
+              <a:rPr sz="900" b="1">
+                <a:solidFill>
+                  <a:srgbClr val="6366F1"/>
+                </a:solidFill>
+                <a:latin typeface="NanumGothic"/>
+                <a:ea typeface="NanumGothic"/>
+                <a:cs typeface="NanumGothic"/>
+              </a:rPr>
+              <a:t>Day 1 · 월</a:t>
+            </a:r>
+            <a:r>
+              <a:rPr sz="900" b="1">
+                <a:solidFill>
+                  <a:srgbClr val="64748B"/>
+                </a:solidFill>
+                <a:latin typeface="NanumGothic"/>
+                <a:ea typeface="NanumGothic"/>
+                <a:cs typeface="NanumGothic"/>
+              </a:rPr>
+              <a:t>   ·   37 / 42</a:t>
             </a:r>
           </a:p>
         </p:txBody>
@@ -31439,54 +31874,7 @@
       </p:sp>
       <p:sp>
         <p:nvSpPr>
-          <p:cNvPr id="8" name="TextBox 7"/>
-          <p:cNvSpPr txBox="1"/>
-          <p:nvPr/>
-        </p:nvSpPr>
-        <p:spPr>
-          <a:xfrm>
-            <a:off x="10241280" y="6419088"/>
-            <a:ext cx="1463040" cy="365760"/>
-          </a:xfrm>
-          <a:prstGeom prst="rect">
-            <a:avLst/>
-          </a:prstGeom>
-          <a:noFill/>
-        </p:spPr>
-        <p:txBody>
-          <a:bodyPr wrap="square" anchor="ctr" lIns="0" rIns="0" tIns="0" bIns="0">
-            <a:spAutoFit/>
-          </a:bodyPr>
-          <a:lstStyle/>
-          <a:p>
-            <a:pPr algn="r">
-              <a:lnSpc>
-                <a:spcPct val="100000"/>
-              </a:lnSpc>
-              <a:spcBef>
-                <a:spcPts val="0"/>
-              </a:spcBef>
-              <a:spcAft>
-                <a:spcPts val="600"/>
-              </a:spcAft>
-            </a:pPr>
-            <a:r>
-              <a:rPr sz="900" b="1">
-                <a:solidFill>
-                  <a:srgbClr val="6366F1"/>
-                </a:solidFill>
-                <a:latin typeface="NanumGothic"/>
-                <a:ea typeface="NanumGothic"/>
-                <a:cs typeface="NanumGothic"/>
-              </a:rPr>
-              <a:t>Day 1 · 월</a:t>
-            </a:r>
-          </a:p>
-        </p:txBody>
-      </p:sp>
-      <p:sp>
-        <p:nvSpPr>
-          <p:cNvPr id="9" name="Rounded Rectangle 8"/>
+          <p:cNvPr id="8" name="Rounded Rectangle 7"/>
           <p:cNvSpPr/>
           <p:nvPr/>
         </p:nvSpPr>
@@ -31532,7 +31920,7 @@
       </p:sp>
       <p:sp>
         <p:nvSpPr>
-          <p:cNvPr id="10" name="Rounded Rectangle 9"/>
+          <p:cNvPr id="9" name="Rounded Rectangle 8"/>
           <p:cNvSpPr/>
           <p:nvPr/>
         </p:nvSpPr>
@@ -31576,7 +31964,7 @@
       </p:sp>
       <p:sp>
         <p:nvSpPr>
-          <p:cNvPr id="11" name="TextBox 10"/>
+          <p:cNvPr id="10" name="TextBox 9"/>
           <p:cNvSpPr txBox="1"/>
           <p:nvPr/>
         </p:nvSpPr>
@@ -31623,7 +32011,7 @@
       </p:sp>
       <p:sp>
         <p:nvSpPr>
-          <p:cNvPr id="12" name="TextBox 11"/>
+          <p:cNvPr id="11" name="TextBox 10"/>
           <p:cNvSpPr txBox="1"/>
           <p:nvPr/>
         </p:nvSpPr>
@@ -31681,7 +32069,7 @@
       </p:sp>
       <p:sp>
         <p:nvSpPr>
-          <p:cNvPr id="13" name="TextBox 12"/>
+          <p:cNvPr id="12" name="TextBox 11"/>
           <p:cNvSpPr txBox="1"/>
           <p:nvPr/>
         </p:nvSpPr>
@@ -31739,7 +32127,7 @@
       </p:sp>
       <p:sp>
         <p:nvSpPr>
-          <p:cNvPr id="14" name="TextBox 13"/>
+          <p:cNvPr id="13" name="TextBox 12"/>
           <p:cNvSpPr txBox="1"/>
           <p:nvPr/>
         </p:nvSpPr>
@@ -31797,7 +32185,7 @@
       </p:sp>
       <p:sp>
         <p:nvSpPr>
-          <p:cNvPr id="15" name="TextBox 14"/>
+          <p:cNvPr id="14" name="TextBox 13"/>
           <p:cNvSpPr txBox="1"/>
           <p:nvPr/>
         </p:nvSpPr>
@@ -31855,7 +32243,7 @@
       </p:sp>
       <p:sp>
         <p:nvSpPr>
-          <p:cNvPr id="16" name="Rounded Rectangle 15"/>
+          <p:cNvPr id="15" name="Rounded Rectangle 14"/>
           <p:cNvSpPr/>
           <p:nvPr/>
         </p:nvSpPr>
@@ -31901,7 +32289,7 @@
       </p:sp>
       <p:sp>
         <p:nvSpPr>
-          <p:cNvPr id="17" name="Rounded Rectangle 16"/>
+          <p:cNvPr id="16" name="Rounded Rectangle 15"/>
           <p:cNvSpPr/>
           <p:nvPr/>
         </p:nvSpPr>
@@ -31945,7 +32333,7 @@
       </p:sp>
       <p:sp>
         <p:nvSpPr>
-          <p:cNvPr id="18" name="TextBox 17"/>
+          <p:cNvPr id="17" name="TextBox 16"/>
           <p:cNvSpPr txBox="1"/>
           <p:nvPr/>
         </p:nvSpPr>
@@ -31992,7 +32380,7 @@
       </p:sp>
       <p:sp>
         <p:nvSpPr>
-          <p:cNvPr id="19" name="TextBox 18"/>
+          <p:cNvPr id="18" name="TextBox 17"/>
           <p:cNvSpPr txBox="1"/>
           <p:nvPr/>
         </p:nvSpPr>
@@ -32050,7 +32438,7 @@
       </p:sp>
       <p:sp>
         <p:nvSpPr>
-          <p:cNvPr id="20" name="TextBox 19"/>
+          <p:cNvPr id="19" name="TextBox 18"/>
           <p:cNvSpPr txBox="1"/>
           <p:nvPr/>
         </p:nvSpPr>
@@ -32108,7 +32496,7 @@
       </p:sp>
       <p:sp>
         <p:nvSpPr>
-          <p:cNvPr id="21" name="TextBox 20"/>
+          <p:cNvPr id="20" name="TextBox 19"/>
           <p:cNvSpPr txBox="1"/>
           <p:nvPr/>
         </p:nvSpPr>
@@ -32166,7 +32554,7 @@
       </p:sp>
       <p:sp>
         <p:nvSpPr>
-          <p:cNvPr id="22" name="TextBox 21"/>
+          <p:cNvPr id="21" name="TextBox 20"/>
           <p:cNvSpPr txBox="1"/>
           <p:nvPr/>
         </p:nvSpPr>
@@ -32218,6 +32606,64 @@
                 <a:cs typeface="NanumGothic"/>
               </a:rPr>
               <a:t>일관된 장기 추론</a:t>
+            </a:r>
+          </a:p>
+        </p:txBody>
+      </p:sp>
+      <p:sp>
+        <p:nvSpPr>
+          <p:cNvPr id="22" name="TextBox 21"/>
+          <p:cNvSpPr txBox="1"/>
+          <p:nvPr/>
+        </p:nvSpPr>
+        <p:spPr>
+          <a:xfrm>
+            <a:off x="8988552" y="6419088"/>
+            <a:ext cx="2697480" cy="365760"/>
+          </a:xfrm>
+          <a:prstGeom prst="rect">
+            <a:avLst/>
+          </a:prstGeom>
+          <a:noFill/>
+        </p:spPr>
+        <p:txBody>
+          <a:bodyPr wrap="square" anchor="ctr" lIns="0" rIns="0" tIns="0" bIns="0">
+            <a:spAutoFit/>
+          </a:bodyPr>
+          <a:lstStyle/>
+          <a:p>
+            <a:pPr algn="r">
+              <a:lnSpc>
+                <a:spcPct val="100000"/>
+              </a:lnSpc>
+              <a:spcBef>
+                <a:spcPts val="0"/>
+              </a:spcBef>
+              <a:spcAft>
+                <a:spcPts val="600"/>
+              </a:spcAft>
+            </a:pPr>
+            <a:r>
+              <a:rPr sz="900" b="1">
+                <a:solidFill>
+                  <a:srgbClr val="6366F1"/>
+                </a:solidFill>
+                <a:latin typeface="NanumGothic"/>
+                <a:ea typeface="NanumGothic"/>
+                <a:cs typeface="NanumGothic"/>
+              </a:rPr>
+              <a:t>Day 1 · 월</a:t>
+            </a:r>
+            <a:r>
+              <a:rPr sz="900" b="1">
+                <a:solidFill>
+                  <a:srgbClr val="64748B"/>
+                </a:solidFill>
+                <a:latin typeface="NanumGothic"/>
+                <a:ea typeface="NanumGothic"/>
+                <a:cs typeface="NanumGothic"/>
+              </a:rPr>
+              <a:t>   ·   38 / 42</a:t>
             </a:r>
           </a:p>
         </p:txBody>
@@ -32515,54 +32961,7 @@
       </p:sp>
       <p:sp>
         <p:nvSpPr>
-          <p:cNvPr id="8" name="TextBox 7"/>
-          <p:cNvSpPr txBox="1"/>
-          <p:nvPr/>
-        </p:nvSpPr>
-        <p:spPr>
-          <a:xfrm>
-            <a:off x="10241280" y="6419088"/>
-            <a:ext cx="1463040" cy="365760"/>
-          </a:xfrm>
-          <a:prstGeom prst="rect">
-            <a:avLst/>
-          </a:prstGeom>
-          <a:noFill/>
-        </p:spPr>
-        <p:txBody>
-          <a:bodyPr wrap="square" anchor="ctr" lIns="0" rIns="0" tIns="0" bIns="0">
-            <a:spAutoFit/>
-          </a:bodyPr>
-          <a:lstStyle/>
-          <a:p>
-            <a:pPr algn="r">
-              <a:lnSpc>
-                <a:spcPct val="100000"/>
-              </a:lnSpc>
-              <a:spcBef>
-                <a:spcPts val="0"/>
-              </a:spcBef>
-              <a:spcAft>
-                <a:spcPts val="600"/>
-              </a:spcAft>
-            </a:pPr>
-            <a:r>
-              <a:rPr sz="900" b="1">
-                <a:solidFill>
-                  <a:srgbClr val="6366F1"/>
-                </a:solidFill>
-                <a:latin typeface="NanumGothic"/>
-                <a:ea typeface="NanumGothic"/>
-                <a:cs typeface="NanumGothic"/>
-              </a:rPr>
-              <a:t>Day 1 · 월</a:t>
-            </a:r>
-          </a:p>
-        </p:txBody>
-      </p:sp>
-      <p:sp>
-        <p:nvSpPr>
-          <p:cNvPr id="9" name="Oval 8"/>
+          <p:cNvPr id="8" name="Oval 7"/>
           <p:cNvSpPr/>
           <p:nvPr/>
         </p:nvSpPr>
@@ -32606,7 +33005,7 @@
       </p:sp>
       <p:sp>
         <p:nvSpPr>
-          <p:cNvPr id="10" name="TextBox 9"/>
+          <p:cNvPr id="9" name="TextBox 8"/>
           <p:cNvSpPr txBox="1"/>
           <p:nvPr/>
         </p:nvSpPr>
@@ -32653,7 +33052,7 @@
       </p:sp>
       <p:sp>
         <p:nvSpPr>
-          <p:cNvPr id="11" name="TextBox 10"/>
+          <p:cNvPr id="10" name="TextBox 9"/>
           <p:cNvSpPr txBox="1"/>
           <p:nvPr/>
         </p:nvSpPr>
@@ -32700,7 +33099,7 @@
       </p:sp>
       <p:sp>
         <p:nvSpPr>
-          <p:cNvPr id="12" name="Oval 11"/>
+          <p:cNvPr id="11" name="Oval 10"/>
           <p:cNvSpPr/>
           <p:nvPr/>
         </p:nvSpPr>
@@ -32744,7 +33143,7 @@
       </p:sp>
       <p:sp>
         <p:nvSpPr>
-          <p:cNvPr id="13" name="TextBox 12"/>
+          <p:cNvPr id="12" name="TextBox 11"/>
           <p:cNvSpPr txBox="1"/>
           <p:nvPr/>
         </p:nvSpPr>
@@ -32791,7 +33190,7 @@
       </p:sp>
       <p:sp>
         <p:nvSpPr>
-          <p:cNvPr id="14" name="TextBox 13"/>
+          <p:cNvPr id="13" name="TextBox 12"/>
           <p:cNvSpPr txBox="1"/>
           <p:nvPr/>
         </p:nvSpPr>
@@ -32838,7 +33237,7 @@
       </p:sp>
       <p:sp>
         <p:nvSpPr>
-          <p:cNvPr id="15" name="Oval 14"/>
+          <p:cNvPr id="14" name="Oval 13"/>
           <p:cNvSpPr/>
           <p:nvPr/>
         </p:nvSpPr>
@@ -32882,7 +33281,7 @@
       </p:sp>
       <p:sp>
         <p:nvSpPr>
-          <p:cNvPr id="16" name="TextBox 15"/>
+          <p:cNvPr id="15" name="TextBox 14"/>
           <p:cNvSpPr txBox="1"/>
           <p:nvPr/>
         </p:nvSpPr>
@@ -32929,7 +33328,7 @@
       </p:sp>
       <p:sp>
         <p:nvSpPr>
-          <p:cNvPr id="17" name="TextBox 16"/>
+          <p:cNvPr id="16" name="TextBox 15"/>
           <p:cNvSpPr txBox="1"/>
           <p:nvPr/>
         </p:nvSpPr>
@@ -32976,7 +33375,7 @@
       </p:sp>
       <p:sp>
         <p:nvSpPr>
-          <p:cNvPr id="18" name="Oval 17"/>
+          <p:cNvPr id="17" name="Oval 16"/>
           <p:cNvSpPr/>
           <p:nvPr/>
         </p:nvSpPr>
@@ -33020,7 +33419,7 @@
       </p:sp>
       <p:sp>
         <p:nvSpPr>
-          <p:cNvPr id="19" name="TextBox 18"/>
+          <p:cNvPr id="18" name="TextBox 17"/>
           <p:cNvSpPr txBox="1"/>
           <p:nvPr/>
         </p:nvSpPr>
@@ -33067,7 +33466,7 @@
       </p:sp>
       <p:sp>
         <p:nvSpPr>
-          <p:cNvPr id="20" name="TextBox 19"/>
+          <p:cNvPr id="19" name="TextBox 18"/>
           <p:cNvSpPr txBox="1"/>
           <p:nvPr/>
         </p:nvSpPr>
@@ -33114,7 +33513,7 @@
       </p:sp>
       <p:sp>
         <p:nvSpPr>
-          <p:cNvPr id="21" name="Rounded Rectangle 20"/>
+          <p:cNvPr id="20" name="Rounded Rectangle 19"/>
           <p:cNvSpPr/>
           <p:nvPr/>
         </p:nvSpPr>
@@ -33160,7 +33559,7 @@
       </p:sp>
       <p:sp>
         <p:nvSpPr>
-          <p:cNvPr id="22" name="TextBox 21"/>
+          <p:cNvPr id="21" name="TextBox 20"/>
           <p:cNvSpPr txBox="1"/>
           <p:nvPr/>
         </p:nvSpPr>
@@ -33212,6 +33611,64 @@
                 <a:cs typeface="NanumGothic"/>
               </a:rPr>
               <a:t>그럴듯함 ≠ 사실 — 중요한 내용은 반드시 교차확인</a:t>
+            </a:r>
+          </a:p>
+        </p:txBody>
+      </p:sp>
+      <p:sp>
+        <p:nvSpPr>
+          <p:cNvPr id="22" name="TextBox 21"/>
+          <p:cNvSpPr txBox="1"/>
+          <p:nvPr/>
+        </p:nvSpPr>
+        <p:spPr>
+          <a:xfrm>
+            <a:off x="8988552" y="6419088"/>
+            <a:ext cx="2697480" cy="365760"/>
+          </a:xfrm>
+          <a:prstGeom prst="rect">
+            <a:avLst/>
+          </a:prstGeom>
+          <a:noFill/>
+        </p:spPr>
+        <p:txBody>
+          <a:bodyPr wrap="square" anchor="ctr" lIns="0" rIns="0" tIns="0" bIns="0">
+            <a:spAutoFit/>
+          </a:bodyPr>
+          <a:lstStyle/>
+          <a:p>
+            <a:pPr algn="r">
+              <a:lnSpc>
+                <a:spcPct val="100000"/>
+              </a:lnSpc>
+              <a:spcBef>
+                <a:spcPts val="0"/>
+              </a:spcBef>
+              <a:spcAft>
+                <a:spcPts val="600"/>
+              </a:spcAft>
+            </a:pPr>
+            <a:r>
+              <a:rPr sz="900" b="1">
+                <a:solidFill>
+                  <a:srgbClr val="6366F1"/>
+                </a:solidFill>
+                <a:latin typeface="NanumGothic"/>
+                <a:ea typeface="NanumGothic"/>
+                <a:cs typeface="NanumGothic"/>
+              </a:rPr>
+              <a:t>Day 1 · 월</a:t>
+            </a:r>
+            <a:r>
+              <a:rPr sz="900" b="1">
+                <a:solidFill>
+                  <a:srgbClr val="64748B"/>
+                </a:solidFill>
+                <a:latin typeface="NanumGothic"/>
+                <a:ea typeface="NanumGothic"/>
+                <a:cs typeface="NanumGothic"/>
+              </a:rPr>
+              <a:t>   ·   39 / 42</a:t>
             </a:r>
           </a:p>
         </p:txBody>
@@ -33509,54 +33966,7 @@
       </p:sp>
       <p:sp>
         <p:nvSpPr>
-          <p:cNvPr id="8" name="TextBox 7"/>
-          <p:cNvSpPr txBox="1"/>
-          <p:nvPr/>
-        </p:nvSpPr>
-        <p:spPr>
-          <a:xfrm>
-            <a:off x="10241280" y="6419088"/>
-            <a:ext cx="1463040" cy="365760"/>
-          </a:xfrm>
-          <a:prstGeom prst="rect">
-            <a:avLst/>
-          </a:prstGeom>
-          <a:noFill/>
-        </p:spPr>
-        <p:txBody>
-          <a:bodyPr wrap="square" anchor="ctr" lIns="0" rIns="0" tIns="0" bIns="0">
-            <a:spAutoFit/>
-          </a:bodyPr>
-          <a:lstStyle/>
-          <a:p>
-            <a:pPr algn="r">
-              <a:lnSpc>
-                <a:spcPct val="100000"/>
-              </a:lnSpc>
-              <a:spcBef>
-                <a:spcPts val="0"/>
-              </a:spcBef>
-              <a:spcAft>
-                <a:spcPts val="600"/>
-              </a:spcAft>
-            </a:pPr>
-            <a:r>
-              <a:rPr sz="900" b="1">
-                <a:solidFill>
-                  <a:srgbClr val="6366F1"/>
-                </a:solidFill>
-                <a:latin typeface="NanumGothic"/>
-                <a:ea typeface="NanumGothic"/>
-                <a:cs typeface="NanumGothic"/>
-              </a:rPr>
-              <a:t>Day 1 · 월</a:t>
-            </a:r>
-          </a:p>
-        </p:txBody>
-      </p:sp>
-      <p:sp>
-        <p:nvSpPr>
-          <p:cNvPr id="9" name="Rounded Rectangle 8"/>
+          <p:cNvPr id="8" name="Rounded Rectangle 7"/>
           <p:cNvSpPr/>
           <p:nvPr/>
         </p:nvSpPr>
@@ -33602,7 +34012,7 @@
       </p:sp>
       <p:sp>
         <p:nvSpPr>
-          <p:cNvPr id="10" name="TextBox 9"/>
+          <p:cNvPr id="9" name="TextBox 8"/>
           <p:cNvSpPr txBox="1"/>
           <p:nvPr/>
         </p:nvSpPr>
@@ -33649,7 +34059,7 @@
       </p:sp>
       <p:sp>
         <p:nvSpPr>
-          <p:cNvPr id="11" name="TextBox 10"/>
+          <p:cNvPr id="10" name="TextBox 9"/>
           <p:cNvSpPr txBox="1"/>
           <p:nvPr/>
         </p:nvSpPr>
@@ -33696,7 +34106,7 @@
       </p:sp>
       <p:sp>
         <p:nvSpPr>
-          <p:cNvPr id="12" name="Rounded Rectangle 11"/>
+          <p:cNvPr id="11" name="Rounded Rectangle 10"/>
           <p:cNvSpPr/>
           <p:nvPr/>
         </p:nvSpPr>
@@ -33742,7 +34152,7 @@
       </p:sp>
       <p:sp>
         <p:nvSpPr>
-          <p:cNvPr id="13" name="Oval 12"/>
+          <p:cNvPr id="12" name="Oval 11"/>
           <p:cNvSpPr/>
           <p:nvPr/>
         </p:nvSpPr>
@@ -33786,7 +34196,7 @@
       </p:sp>
       <p:sp>
         <p:nvSpPr>
-          <p:cNvPr id="14" name="TextBox 13"/>
+          <p:cNvPr id="13" name="TextBox 12"/>
           <p:cNvSpPr txBox="1"/>
           <p:nvPr/>
         </p:nvSpPr>
@@ -33833,7 +34243,7 @@
       </p:sp>
       <p:sp>
         <p:nvSpPr>
-          <p:cNvPr id="15" name="TextBox 14"/>
+          <p:cNvPr id="14" name="TextBox 13"/>
           <p:cNvSpPr txBox="1"/>
           <p:nvPr/>
         </p:nvSpPr>
@@ -33880,7 +34290,7 @@
       </p:sp>
       <p:sp>
         <p:nvSpPr>
-          <p:cNvPr id="16" name="Rounded Rectangle 15"/>
+          <p:cNvPr id="15" name="Rounded Rectangle 14"/>
           <p:cNvSpPr/>
           <p:nvPr/>
         </p:nvSpPr>
@@ -33926,7 +34336,7 @@
       </p:sp>
       <p:sp>
         <p:nvSpPr>
-          <p:cNvPr id="17" name="Oval 16"/>
+          <p:cNvPr id="16" name="Oval 15"/>
           <p:cNvSpPr/>
           <p:nvPr/>
         </p:nvSpPr>
@@ -33970,7 +34380,7 @@
       </p:sp>
       <p:sp>
         <p:nvSpPr>
-          <p:cNvPr id="18" name="TextBox 17"/>
+          <p:cNvPr id="17" name="TextBox 16"/>
           <p:cNvSpPr txBox="1"/>
           <p:nvPr/>
         </p:nvSpPr>
@@ -34017,7 +34427,7 @@
       </p:sp>
       <p:sp>
         <p:nvSpPr>
-          <p:cNvPr id="19" name="TextBox 18"/>
+          <p:cNvPr id="18" name="TextBox 17"/>
           <p:cNvSpPr txBox="1"/>
           <p:nvPr/>
         </p:nvSpPr>
@@ -34064,7 +34474,7 @@
       </p:sp>
       <p:sp>
         <p:nvSpPr>
-          <p:cNvPr id="20" name="Rounded Rectangle 19"/>
+          <p:cNvPr id="19" name="Rounded Rectangle 18"/>
           <p:cNvSpPr/>
           <p:nvPr/>
         </p:nvSpPr>
@@ -34110,7 +34520,7 @@
       </p:sp>
       <p:sp>
         <p:nvSpPr>
-          <p:cNvPr id="21" name="Oval 20"/>
+          <p:cNvPr id="20" name="Oval 19"/>
           <p:cNvSpPr/>
           <p:nvPr/>
         </p:nvSpPr>
@@ -34154,7 +34564,7 @@
       </p:sp>
       <p:sp>
         <p:nvSpPr>
-          <p:cNvPr id="22" name="TextBox 21"/>
+          <p:cNvPr id="21" name="TextBox 20"/>
           <p:cNvSpPr txBox="1"/>
           <p:nvPr/>
         </p:nvSpPr>
@@ -34201,7 +34611,7 @@
       </p:sp>
       <p:sp>
         <p:nvSpPr>
-          <p:cNvPr id="23" name="TextBox 22"/>
+          <p:cNvPr id="22" name="TextBox 21"/>
           <p:cNvSpPr txBox="1"/>
           <p:nvPr/>
         </p:nvSpPr>
@@ -34248,7 +34658,7 @@
       </p:sp>
       <p:sp>
         <p:nvSpPr>
-          <p:cNvPr id="24" name="Rounded Rectangle 23"/>
+          <p:cNvPr id="23" name="Rounded Rectangle 22"/>
           <p:cNvSpPr/>
           <p:nvPr/>
         </p:nvSpPr>
@@ -34294,7 +34704,7 @@
       </p:sp>
       <p:sp>
         <p:nvSpPr>
-          <p:cNvPr id="25" name="Oval 24"/>
+          <p:cNvPr id="24" name="Oval 23"/>
           <p:cNvSpPr/>
           <p:nvPr/>
         </p:nvSpPr>
@@ -34338,7 +34748,7 @@
       </p:sp>
       <p:sp>
         <p:nvSpPr>
-          <p:cNvPr id="26" name="TextBox 25"/>
+          <p:cNvPr id="25" name="TextBox 24"/>
           <p:cNvSpPr txBox="1"/>
           <p:nvPr/>
         </p:nvSpPr>
@@ -34385,7 +34795,7 @@
       </p:sp>
       <p:sp>
         <p:nvSpPr>
-          <p:cNvPr id="27" name="TextBox 26"/>
+          <p:cNvPr id="26" name="TextBox 25"/>
           <p:cNvSpPr txBox="1"/>
           <p:nvPr/>
         </p:nvSpPr>
@@ -34432,7 +34842,7 @@
       </p:sp>
       <p:sp>
         <p:nvSpPr>
-          <p:cNvPr id="28" name="Rounded Rectangle 27"/>
+          <p:cNvPr id="27" name="Rounded Rectangle 26"/>
           <p:cNvSpPr/>
           <p:nvPr/>
         </p:nvSpPr>
@@ -34478,7 +34888,7 @@
       </p:sp>
       <p:sp>
         <p:nvSpPr>
-          <p:cNvPr id="29" name="Oval 28"/>
+          <p:cNvPr id="28" name="Oval 27"/>
           <p:cNvSpPr/>
           <p:nvPr/>
         </p:nvSpPr>
@@ -34522,7 +34932,7 @@
       </p:sp>
       <p:sp>
         <p:nvSpPr>
-          <p:cNvPr id="30" name="TextBox 29"/>
+          <p:cNvPr id="29" name="TextBox 28"/>
           <p:cNvSpPr txBox="1"/>
           <p:nvPr/>
         </p:nvSpPr>
@@ -34569,7 +34979,7 @@
       </p:sp>
       <p:sp>
         <p:nvSpPr>
-          <p:cNvPr id="31" name="TextBox 30"/>
+          <p:cNvPr id="30" name="TextBox 29"/>
           <p:cNvSpPr txBox="1"/>
           <p:nvPr/>
         </p:nvSpPr>
@@ -34616,7 +35026,7 @@
       </p:sp>
       <p:sp>
         <p:nvSpPr>
-          <p:cNvPr id="32" name="Rounded Rectangle 31"/>
+          <p:cNvPr id="31" name="Rounded Rectangle 30"/>
           <p:cNvSpPr/>
           <p:nvPr/>
         </p:nvSpPr>
@@ -34662,7 +35072,7 @@
       </p:sp>
       <p:sp>
         <p:nvSpPr>
-          <p:cNvPr id="33" name="Oval 32"/>
+          <p:cNvPr id="32" name="Oval 31"/>
           <p:cNvSpPr/>
           <p:nvPr/>
         </p:nvSpPr>
@@ -34706,7 +35116,7 @@
       </p:sp>
       <p:sp>
         <p:nvSpPr>
-          <p:cNvPr id="34" name="TextBox 33"/>
+          <p:cNvPr id="33" name="TextBox 32"/>
           <p:cNvSpPr txBox="1"/>
           <p:nvPr/>
         </p:nvSpPr>
@@ -34753,7 +35163,7 @@
       </p:sp>
       <p:sp>
         <p:nvSpPr>
-          <p:cNvPr id="35" name="TextBox 34"/>
+          <p:cNvPr id="34" name="TextBox 33"/>
           <p:cNvSpPr txBox="1"/>
           <p:nvPr/>
         </p:nvSpPr>
@@ -34800,7 +35210,7 @@
       </p:sp>
       <p:sp>
         <p:nvSpPr>
-          <p:cNvPr id="36" name="Rounded Rectangle 35"/>
+          <p:cNvPr id="35" name="Rounded Rectangle 34"/>
           <p:cNvSpPr/>
           <p:nvPr/>
         </p:nvSpPr>
@@ -34846,7 +35256,7 @@
       </p:sp>
       <p:sp>
         <p:nvSpPr>
-          <p:cNvPr id="37" name="Oval 36"/>
+          <p:cNvPr id="36" name="Oval 35"/>
           <p:cNvSpPr/>
           <p:nvPr/>
         </p:nvSpPr>
@@ -34890,7 +35300,7 @@
       </p:sp>
       <p:sp>
         <p:nvSpPr>
-          <p:cNvPr id="38" name="TextBox 37"/>
+          <p:cNvPr id="37" name="TextBox 36"/>
           <p:cNvSpPr txBox="1"/>
           <p:nvPr/>
         </p:nvSpPr>
@@ -34937,7 +35347,7 @@
       </p:sp>
       <p:sp>
         <p:nvSpPr>
-          <p:cNvPr id="39" name="TextBox 38"/>
+          <p:cNvPr id="38" name="TextBox 37"/>
           <p:cNvSpPr txBox="1"/>
           <p:nvPr/>
         </p:nvSpPr>
@@ -34984,7 +35394,7 @@
       </p:sp>
       <p:sp>
         <p:nvSpPr>
-          <p:cNvPr id="40" name="Rounded Rectangle 39"/>
+          <p:cNvPr id="39" name="Rounded Rectangle 38"/>
           <p:cNvSpPr/>
           <p:nvPr/>
         </p:nvSpPr>
@@ -35030,7 +35440,7 @@
       </p:sp>
       <p:sp>
         <p:nvSpPr>
-          <p:cNvPr id="41" name="Oval 40"/>
+          <p:cNvPr id="40" name="Oval 39"/>
           <p:cNvSpPr/>
           <p:nvPr/>
         </p:nvSpPr>
@@ -35074,7 +35484,7 @@
       </p:sp>
       <p:sp>
         <p:nvSpPr>
-          <p:cNvPr id="42" name="TextBox 41"/>
+          <p:cNvPr id="41" name="TextBox 40"/>
           <p:cNvSpPr txBox="1"/>
           <p:nvPr/>
         </p:nvSpPr>
@@ -35121,7 +35531,7 @@
       </p:sp>
       <p:sp>
         <p:nvSpPr>
-          <p:cNvPr id="43" name="TextBox 42"/>
+          <p:cNvPr id="42" name="TextBox 41"/>
           <p:cNvSpPr txBox="1"/>
           <p:nvPr/>
         </p:nvSpPr>
@@ -35168,7 +35578,7 @@
       </p:sp>
       <p:sp>
         <p:nvSpPr>
-          <p:cNvPr id="44" name="Rounded Rectangle 43"/>
+          <p:cNvPr id="43" name="Rounded Rectangle 42"/>
           <p:cNvSpPr/>
           <p:nvPr/>
         </p:nvSpPr>
@@ -35214,7 +35624,7 @@
       </p:sp>
       <p:sp>
         <p:nvSpPr>
-          <p:cNvPr id="45" name="Oval 44"/>
+          <p:cNvPr id="44" name="Oval 43"/>
           <p:cNvSpPr/>
           <p:nvPr/>
         </p:nvSpPr>
@@ -35258,7 +35668,7 @@
       </p:sp>
       <p:sp>
         <p:nvSpPr>
-          <p:cNvPr id="46" name="TextBox 45"/>
+          <p:cNvPr id="45" name="TextBox 44"/>
           <p:cNvSpPr txBox="1"/>
           <p:nvPr/>
         </p:nvSpPr>
@@ -35305,7 +35715,7 @@
       </p:sp>
       <p:sp>
         <p:nvSpPr>
-          <p:cNvPr id="47" name="TextBox 46"/>
+          <p:cNvPr id="46" name="TextBox 45"/>
           <p:cNvSpPr txBox="1"/>
           <p:nvPr/>
         </p:nvSpPr>
@@ -35352,7 +35762,7 @@
       </p:sp>
       <p:sp>
         <p:nvSpPr>
-          <p:cNvPr id="48" name="Rounded Rectangle 47"/>
+          <p:cNvPr id="47" name="Rounded Rectangle 46"/>
           <p:cNvSpPr/>
           <p:nvPr/>
         </p:nvSpPr>
@@ -35398,7 +35808,7 @@
       </p:sp>
       <p:sp>
         <p:nvSpPr>
-          <p:cNvPr id="49" name="Oval 48"/>
+          <p:cNvPr id="48" name="Oval 47"/>
           <p:cNvSpPr/>
           <p:nvPr/>
         </p:nvSpPr>
@@ -35442,7 +35852,7 @@
       </p:sp>
       <p:sp>
         <p:nvSpPr>
-          <p:cNvPr id="50" name="TextBox 49"/>
+          <p:cNvPr id="49" name="TextBox 48"/>
           <p:cNvSpPr txBox="1"/>
           <p:nvPr/>
         </p:nvSpPr>
@@ -35489,7 +35899,7 @@
       </p:sp>
       <p:sp>
         <p:nvSpPr>
-          <p:cNvPr id="51" name="TextBox 50"/>
+          <p:cNvPr id="50" name="TextBox 49"/>
           <p:cNvSpPr txBox="1"/>
           <p:nvPr/>
         </p:nvSpPr>
@@ -35536,7 +35946,7 @@
       </p:sp>
       <p:sp>
         <p:nvSpPr>
-          <p:cNvPr id="52" name="Rounded Rectangle 51"/>
+          <p:cNvPr id="51" name="Rounded Rectangle 50"/>
           <p:cNvSpPr/>
           <p:nvPr/>
         </p:nvSpPr>
@@ -35582,7 +35992,7 @@
       </p:sp>
       <p:sp>
         <p:nvSpPr>
-          <p:cNvPr id="53" name="Oval 52"/>
+          <p:cNvPr id="52" name="Oval 51"/>
           <p:cNvSpPr/>
           <p:nvPr/>
         </p:nvSpPr>
@@ -35626,7 +36036,7 @@
       </p:sp>
       <p:sp>
         <p:nvSpPr>
-          <p:cNvPr id="54" name="TextBox 53"/>
+          <p:cNvPr id="53" name="TextBox 52"/>
           <p:cNvSpPr txBox="1"/>
           <p:nvPr/>
         </p:nvSpPr>
@@ -35673,7 +36083,7 @@
       </p:sp>
       <p:sp>
         <p:nvSpPr>
-          <p:cNvPr id="55" name="TextBox 54"/>
+          <p:cNvPr id="54" name="TextBox 53"/>
           <p:cNvSpPr txBox="1"/>
           <p:nvPr/>
         </p:nvSpPr>
@@ -35714,6 +36124,64 @@
                 <a:cs typeface="NanumGothic"/>
               </a:rPr>
               <a:t>LLM → 에이전트</a:t>
+            </a:r>
+          </a:p>
+        </p:txBody>
+      </p:sp>
+      <p:sp>
+        <p:nvSpPr>
+          <p:cNvPr id="55" name="TextBox 54"/>
+          <p:cNvSpPr txBox="1"/>
+          <p:nvPr/>
+        </p:nvSpPr>
+        <p:spPr>
+          <a:xfrm>
+            <a:off x="8988552" y="6419088"/>
+            <a:ext cx="2697480" cy="365760"/>
+          </a:xfrm>
+          <a:prstGeom prst="rect">
+            <a:avLst/>
+          </a:prstGeom>
+          <a:noFill/>
+        </p:spPr>
+        <p:txBody>
+          <a:bodyPr wrap="square" anchor="ctr" lIns="0" rIns="0" tIns="0" bIns="0">
+            <a:spAutoFit/>
+          </a:bodyPr>
+          <a:lstStyle/>
+          <a:p>
+            <a:pPr algn="r">
+              <a:lnSpc>
+                <a:spcPct val="100000"/>
+              </a:lnSpc>
+              <a:spcBef>
+                <a:spcPts val="0"/>
+              </a:spcBef>
+              <a:spcAft>
+                <a:spcPts val="600"/>
+              </a:spcAft>
+            </a:pPr>
+            <a:r>
+              <a:rPr sz="900" b="1">
+                <a:solidFill>
+                  <a:srgbClr val="6366F1"/>
+                </a:solidFill>
+                <a:latin typeface="NanumGothic"/>
+                <a:ea typeface="NanumGothic"/>
+                <a:cs typeface="NanumGothic"/>
+              </a:rPr>
+              <a:t>Day 1 · 월</a:t>
+            </a:r>
+            <a:r>
+              <a:rPr sz="900" b="1">
+                <a:solidFill>
+                  <a:srgbClr val="64748B"/>
+                </a:solidFill>
+                <a:latin typeface="NanumGothic"/>
+                <a:ea typeface="NanumGothic"/>
+                <a:cs typeface="NanumGothic"/>
+              </a:rPr>
+              <a:t>   ·   4 / 42</a:t>
             </a:r>
           </a:p>
         </p:txBody>
@@ -36011,54 +36479,7 @@
       </p:sp>
       <p:sp>
         <p:nvSpPr>
-          <p:cNvPr id="8" name="TextBox 7"/>
-          <p:cNvSpPr txBox="1"/>
-          <p:nvPr/>
-        </p:nvSpPr>
-        <p:spPr>
-          <a:xfrm>
-            <a:off x="10241280" y="6419088"/>
-            <a:ext cx="1463040" cy="365760"/>
-          </a:xfrm>
-          <a:prstGeom prst="rect">
-            <a:avLst/>
-          </a:prstGeom>
-          <a:noFill/>
-        </p:spPr>
-        <p:txBody>
-          <a:bodyPr wrap="square" anchor="ctr" lIns="0" rIns="0" tIns="0" bIns="0">
-            <a:spAutoFit/>
-          </a:bodyPr>
-          <a:lstStyle/>
-          <a:p>
-            <a:pPr algn="r">
-              <a:lnSpc>
-                <a:spcPct val="100000"/>
-              </a:lnSpc>
-              <a:spcBef>
-                <a:spcPts val="0"/>
-              </a:spcBef>
-              <a:spcAft>
-                <a:spcPts val="600"/>
-              </a:spcAft>
-            </a:pPr>
-            <a:r>
-              <a:rPr sz="900" b="1">
-                <a:solidFill>
-                  <a:srgbClr val="6366F1"/>
-                </a:solidFill>
-                <a:latin typeface="NanumGothic"/>
-                <a:ea typeface="NanumGothic"/>
-                <a:cs typeface="NanumGothic"/>
-              </a:rPr>
-              <a:t>Day 1 · 월</a:t>
-            </a:r>
-          </a:p>
-        </p:txBody>
-      </p:sp>
-      <p:sp>
-        <p:nvSpPr>
-          <p:cNvPr id="9" name="Oval 8"/>
+          <p:cNvPr id="8" name="Oval 7"/>
           <p:cNvSpPr/>
           <p:nvPr/>
         </p:nvSpPr>
@@ -36102,7 +36523,7 @@
       </p:sp>
       <p:sp>
         <p:nvSpPr>
-          <p:cNvPr id="10" name="TextBox 9"/>
+          <p:cNvPr id="9" name="TextBox 8"/>
           <p:cNvSpPr txBox="1"/>
           <p:nvPr/>
         </p:nvSpPr>
@@ -36149,7 +36570,7 @@
       </p:sp>
       <p:sp>
         <p:nvSpPr>
-          <p:cNvPr id="11" name="TextBox 10"/>
+          <p:cNvPr id="10" name="TextBox 9"/>
           <p:cNvSpPr txBox="1"/>
           <p:nvPr/>
         </p:nvSpPr>
@@ -36196,7 +36617,7 @@
       </p:sp>
       <p:sp>
         <p:nvSpPr>
-          <p:cNvPr id="12" name="Oval 11"/>
+          <p:cNvPr id="11" name="Oval 10"/>
           <p:cNvSpPr/>
           <p:nvPr/>
         </p:nvSpPr>
@@ -36240,7 +36661,7 @@
       </p:sp>
       <p:sp>
         <p:nvSpPr>
-          <p:cNvPr id="13" name="TextBox 12"/>
+          <p:cNvPr id="12" name="TextBox 11"/>
           <p:cNvSpPr txBox="1"/>
           <p:nvPr/>
         </p:nvSpPr>
@@ -36287,7 +36708,7 @@
       </p:sp>
       <p:sp>
         <p:nvSpPr>
-          <p:cNvPr id="14" name="TextBox 13"/>
+          <p:cNvPr id="13" name="TextBox 12"/>
           <p:cNvSpPr txBox="1"/>
           <p:nvPr/>
         </p:nvSpPr>
@@ -36334,7 +36755,7 @@
       </p:sp>
       <p:sp>
         <p:nvSpPr>
-          <p:cNvPr id="15" name="Oval 14"/>
+          <p:cNvPr id="14" name="Oval 13"/>
           <p:cNvSpPr/>
           <p:nvPr/>
         </p:nvSpPr>
@@ -36378,7 +36799,7 @@
       </p:sp>
       <p:sp>
         <p:nvSpPr>
-          <p:cNvPr id="16" name="TextBox 15"/>
+          <p:cNvPr id="15" name="TextBox 14"/>
           <p:cNvSpPr txBox="1"/>
           <p:nvPr/>
         </p:nvSpPr>
@@ -36425,7 +36846,7 @@
       </p:sp>
       <p:sp>
         <p:nvSpPr>
-          <p:cNvPr id="17" name="TextBox 16"/>
+          <p:cNvPr id="16" name="TextBox 15"/>
           <p:cNvSpPr txBox="1"/>
           <p:nvPr/>
         </p:nvSpPr>
@@ -36472,7 +36893,7 @@
       </p:sp>
       <p:sp>
         <p:nvSpPr>
-          <p:cNvPr id="18" name="Rounded Rectangle 17"/>
+          <p:cNvPr id="17" name="Rounded Rectangle 16"/>
           <p:cNvSpPr/>
           <p:nvPr/>
         </p:nvSpPr>
@@ -36518,7 +36939,7 @@
       </p:sp>
       <p:sp>
         <p:nvSpPr>
-          <p:cNvPr id="19" name="TextBox 18"/>
+          <p:cNvPr id="18" name="TextBox 17"/>
           <p:cNvSpPr txBox="1"/>
           <p:nvPr/>
         </p:nvSpPr>
@@ -36570,6 +36991,64 @@
                 <a:cs typeface="NanumGothic"/>
               </a:rPr>
               <a:t>참고 가격(~2026.6, 1M토큰 입력/출력): Opus $5/$25 · Sonnet $3/$15 · Haiku $1/$5 (변동)</a:t>
+            </a:r>
+          </a:p>
+        </p:txBody>
+      </p:sp>
+      <p:sp>
+        <p:nvSpPr>
+          <p:cNvPr id="19" name="TextBox 18"/>
+          <p:cNvSpPr txBox="1"/>
+          <p:nvPr/>
+        </p:nvSpPr>
+        <p:spPr>
+          <a:xfrm>
+            <a:off x="8988552" y="6419088"/>
+            <a:ext cx="2697480" cy="365760"/>
+          </a:xfrm>
+          <a:prstGeom prst="rect">
+            <a:avLst/>
+          </a:prstGeom>
+          <a:noFill/>
+        </p:spPr>
+        <p:txBody>
+          <a:bodyPr wrap="square" anchor="ctr" lIns="0" rIns="0" tIns="0" bIns="0">
+            <a:spAutoFit/>
+          </a:bodyPr>
+          <a:lstStyle/>
+          <a:p>
+            <a:pPr algn="r">
+              <a:lnSpc>
+                <a:spcPct val="100000"/>
+              </a:lnSpc>
+              <a:spcBef>
+                <a:spcPts val="0"/>
+              </a:spcBef>
+              <a:spcAft>
+                <a:spcPts val="600"/>
+              </a:spcAft>
+            </a:pPr>
+            <a:r>
+              <a:rPr sz="900" b="1">
+                <a:solidFill>
+                  <a:srgbClr val="6366F1"/>
+                </a:solidFill>
+                <a:latin typeface="NanumGothic"/>
+                <a:ea typeface="NanumGothic"/>
+                <a:cs typeface="NanumGothic"/>
+              </a:rPr>
+              <a:t>Day 1 · 월</a:t>
+            </a:r>
+            <a:r>
+              <a:rPr sz="900" b="1">
+                <a:solidFill>
+                  <a:srgbClr val="64748B"/>
+                </a:solidFill>
+                <a:latin typeface="NanumGothic"/>
+                <a:ea typeface="NanumGothic"/>
+                <a:cs typeface="NanumGothic"/>
+              </a:rPr>
+              <a:t>   ·   40 / 42</a:t>
             </a:r>
           </a:p>
         </p:txBody>
@@ -36867,54 +37346,7 @@
       </p:sp>
       <p:sp>
         <p:nvSpPr>
-          <p:cNvPr id="8" name="TextBox 7"/>
-          <p:cNvSpPr txBox="1"/>
-          <p:nvPr/>
-        </p:nvSpPr>
-        <p:spPr>
-          <a:xfrm>
-            <a:off x="10241280" y="6419088"/>
-            <a:ext cx="1463040" cy="365760"/>
-          </a:xfrm>
-          <a:prstGeom prst="rect">
-            <a:avLst/>
-          </a:prstGeom>
-          <a:noFill/>
-        </p:spPr>
-        <p:txBody>
-          <a:bodyPr wrap="square" anchor="ctr" lIns="0" rIns="0" tIns="0" bIns="0">
-            <a:spAutoFit/>
-          </a:bodyPr>
-          <a:lstStyle/>
-          <a:p>
-            <a:pPr algn="r">
-              <a:lnSpc>
-                <a:spcPct val="100000"/>
-              </a:lnSpc>
-              <a:spcBef>
-                <a:spcPts val="0"/>
-              </a:spcBef>
-              <a:spcAft>
-                <a:spcPts val="600"/>
-              </a:spcAft>
-            </a:pPr>
-            <a:r>
-              <a:rPr sz="900" b="1">
-                <a:solidFill>
-                  <a:srgbClr val="6366F1"/>
-                </a:solidFill>
-                <a:latin typeface="NanumGothic"/>
-                <a:ea typeface="NanumGothic"/>
-                <a:cs typeface="NanumGothic"/>
-              </a:rPr>
-              <a:t>Day 1 · 월</a:t>
-            </a:r>
-          </a:p>
-        </p:txBody>
-      </p:sp>
-      <p:sp>
-        <p:nvSpPr>
-          <p:cNvPr id="9" name="Oval 8"/>
+          <p:cNvPr id="8" name="Oval 7"/>
           <p:cNvSpPr/>
           <p:nvPr/>
         </p:nvSpPr>
@@ -36958,7 +37390,7 @@
       </p:sp>
       <p:sp>
         <p:nvSpPr>
-          <p:cNvPr id="10" name="TextBox 9"/>
+          <p:cNvPr id="9" name="TextBox 8"/>
           <p:cNvSpPr txBox="1"/>
           <p:nvPr/>
         </p:nvSpPr>
@@ -37005,7 +37437,7 @@
       </p:sp>
       <p:sp>
         <p:nvSpPr>
-          <p:cNvPr id="11" name="TextBox 10"/>
+          <p:cNvPr id="10" name="TextBox 9"/>
           <p:cNvSpPr txBox="1"/>
           <p:nvPr/>
         </p:nvSpPr>
@@ -37052,7 +37484,7 @@
       </p:sp>
       <p:sp>
         <p:nvSpPr>
-          <p:cNvPr id="12" name="Oval 11"/>
+          <p:cNvPr id="11" name="Oval 10"/>
           <p:cNvSpPr/>
           <p:nvPr/>
         </p:nvSpPr>
@@ -37096,7 +37528,7 @@
       </p:sp>
       <p:sp>
         <p:nvSpPr>
-          <p:cNvPr id="13" name="TextBox 12"/>
+          <p:cNvPr id="12" name="TextBox 11"/>
           <p:cNvSpPr txBox="1"/>
           <p:nvPr/>
         </p:nvSpPr>
@@ -37143,7 +37575,7 @@
       </p:sp>
       <p:sp>
         <p:nvSpPr>
-          <p:cNvPr id="14" name="TextBox 13"/>
+          <p:cNvPr id="13" name="TextBox 12"/>
           <p:cNvSpPr txBox="1"/>
           <p:nvPr/>
         </p:nvSpPr>
@@ -37190,7 +37622,7 @@
       </p:sp>
       <p:sp>
         <p:nvSpPr>
-          <p:cNvPr id="15" name="Oval 14"/>
+          <p:cNvPr id="14" name="Oval 13"/>
           <p:cNvSpPr/>
           <p:nvPr/>
         </p:nvSpPr>
@@ -37234,7 +37666,7 @@
       </p:sp>
       <p:sp>
         <p:nvSpPr>
-          <p:cNvPr id="16" name="TextBox 15"/>
+          <p:cNvPr id="15" name="TextBox 14"/>
           <p:cNvSpPr txBox="1"/>
           <p:nvPr/>
         </p:nvSpPr>
@@ -37281,7 +37713,7 @@
       </p:sp>
       <p:sp>
         <p:nvSpPr>
-          <p:cNvPr id="17" name="TextBox 16"/>
+          <p:cNvPr id="16" name="TextBox 15"/>
           <p:cNvSpPr txBox="1"/>
           <p:nvPr/>
         </p:nvSpPr>
@@ -37328,7 +37760,7 @@
       </p:sp>
       <p:sp>
         <p:nvSpPr>
-          <p:cNvPr id="18" name="Rounded Rectangle 17"/>
+          <p:cNvPr id="17" name="Rounded Rectangle 16"/>
           <p:cNvSpPr/>
           <p:nvPr/>
         </p:nvSpPr>
@@ -37374,7 +37806,7 @@
       </p:sp>
       <p:sp>
         <p:nvSpPr>
-          <p:cNvPr id="19" name="TextBox 18"/>
+          <p:cNvPr id="18" name="TextBox 17"/>
           <p:cNvSpPr txBox="1"/>
           <p:nvPr/>
         </p:nvSpPr>
@@ -37426,6 +37858,64 @@
                 <a:cs typeface="NanumGothic"/>
               </a:rPr>
               <a:t>오늘의 임베딩·RAG가 리서치 에이전트의 토대다</a:t>
+            </a:r>
+          </a:p>
+        </p:txBody>
+      </p:sp>
+      <p:sp>
+        <p:nvSpPr>
+          <p:cNvPr id="19" name="TextBox 18"/>
+          <p:cNvSpPr txBox="1"/>
+          <p:nvPr/>
+        </p:nvSpPr>
+        <p:spPr>
+          <a:xfrm>
+            <a:off x="8988552" y="6419088"/>
+            <a:ext cx="2697480" cy="365760"/>
+          </a:xfrm>
+          <a:prstGeom prst="rect">
+            <a:avLst/>
+          </a:prstGeom>
+          <a:noFill/>
+        </p:spPr>
+        <p:txBody>
+          <a:bodyPr wrap="square" anchor="ctr" lIns="0" rIns="0" tIns="0" bIns="0">
+            <a:spAutoFit/>
+          </a:bodyPr>
+          <a:lstStyle/>
+          <a:p>
+            <a:pPr algn="r">
+              <a:lnSpc>
+                <a:spcPct val="100000"/>
+              </a:lnSpc>
+              <a:spcBef>
+                <a:spcPts val="0"/>
+              </a:spcBef>
+              <a:spcAft>
+                <a:spcPts val="600"/>
+              </a:spcAft>
+            </a:pPr>
+            <a:r>
+              <a:rPr sz="900" b="1">
+                <a:solidFill>
+                  <a:srgbClr val="6366F1"/>
+                </a:solidFill>
+                <a:latin typeface="NanumGothic"/>
+                <a:ea typeface="NanumGothic"/>
+                <a:cs typeface="NanumGothic"/>
+              </a:rPr>
+              <a:t>Day 1 · 월</a:t>
+            </a:r>
+            <a:r>
+              <a:rPr sz="900" b="1">
+                <a:solidFill>
+                  <a:srgbClr val="64748B"/>
+                </a:solidFill>
+                <a:latin typeface="NanumGothic"/>
+                <a:ea typeface="NanumGothic"/>
+                <a:cs typeface="NanumGothic"/>
+              </a:rPr>
+              <a:t>   ·   41 / 42</a:t>
             </a:r>
           </a:p>
         </p:txBody>
@@ -37729,53 +38219,6 @@
         </p:nvSpPr>
         <p:spPr>
           <a:xfrm>
-            <a:off x="10241280" y="6419088"/>
-            <a:ext cx="1463040" cy="365760"/>
-          </a:xfrm>
-          <a:prstGeom prst="rect">
-            <a:avLst/>
-          </a:prstGeom>
-          <a:noFill/>
-        </p:spPr>
-        <p:txBody>
-          <a:bodyPr wrap="square" anchor="ctr" lIns="0" rIns="0" tIns="0" bIns="0">
-            <a:spAutoFit/>
-          </a:bodyPr>
-          <a:lstStyle/>
-          <a:p>
-            <a:pPr algn="r">
-              <a:lnSpc>
-                <a:spcPct val="100000"/>
-              </a:lnSpc>
-              <a:spcBef>
-                <a:spcPts val="0"/>
-              </a:spcBef>
-              <a:spcAft>
-                <a:spcPts val="600"/>
-              </a:spcAft>
-            </a:pPr>
-            <a:r>
-              <a:rPr sz="900" b="1">
-                <a:solidFill>
-                  <a:srgbClr val="6366F1"/>
-                </a:solidFill>
-                <a:latin typeface="NanumGothic"/>
-                <a:ea typeface="NanumGothic"/>
-                <a:cs typeface="NanumGothic"/>
-              </a:rPr>
-              <a:t>Day 1 · 월</a:t>
-            </a:r>
-          </a:p>
-        </p:txBody>
-      </p:sp>
-      <p:sp>
-        <p:nvSpPr>
-          <p:cNvPr id="9" name="TextBox 8"/>
-          <p:cNvSpPr txBox="1"/>
-          <p:nvPr/>
-        </p:nvSpPr>
-        <p:spPr>
-          <a:xfrm>
             <a:off x="548640" y="1783080"/>
             <a:ext cx="6400800" cy="365760"/>
           </a:xfrm>
@@ -37817,7 +38260,7 @@
       </p:sp>
       <p:sp>
         <p:nvSpPr>
-          <p:cNvPr id="10" name="Oval 9"/>
+          <p:cNvPr id="9" name="Oval 8"/>
           <p:cNvSpPr/>
           <p:nvPr/>
         </p:nvSpPr>
@@ -37861,7 +38304,7 @@
       </p:sp>
       <p:sp>
         <p:nvSpPr>
-          <p:cNvPr id="11" name="TextBox 10"/>
+          <p:cNvPr id="10" name="TextBox 9"/>
           <p:cNvSpPr txBox="1"/>
           <p:nvPr/>
         </p:nvSpPr>
@@ -37908,7 +38351,7 @@
       </p:sp>
       <p:sp>
         <p:nvSpPr>
-          <p:cNvPr id="12" name="Oval 11"/>
+          <p:cNvPr id="11" name="Oval 10"/>
           <p:cNvSpPr/>
           <p:nvPr/>
         </p:nvSpPr>
@@ -37952,7 +38395,7 @@
       </p:sp>
       <p:sp>
         <p:nvSpPr>
-          <p:cNvPr id="13" name="TextBox 12"/>
+          <p:cNvPr id="12" name="TextBox 11"/>
           <p:cNvSpPr txBox="1"/>
           <p:nvPr/>
         </p:nvSpPr>
@@ -37999,7 +38442,7 @@
       </p:sp>
       <p:sp>
         <p:nvSpPr>
-          <p:cNvPr id="14" name="Oval 13"/>
+          <p:cNvPr id="13" name="Oval 12"/>
           <p:cNvSpPr/>
           <p:nvPr/>
         </p:nvSpPr>
@@ -38043,7 +38486,7 @@
       </p:sp>
       <p:sp>
         <p:nvSpPr>
-          <p:cNvPr id="15" name="TextBox 14"/>
+          <p:cNvPr id="14" name="TextBox 13"/>
           <p:cNvSpPr txBox="1"/>
           <p:nvPr/>
         </p:nvSpPr>
@@ -38090,7 +38533,7 @@
       </p:sp>
       <p:sp>
         <p:nvSpPr>
-          <p:cNvPr id="16" name="Rounded Rectangle 15"/>
+          <p:cNvPr id="15" name="Rounded Rectangle 14"/>
           <p:cNvSpPr/>
           <p:nvPr/>
         </p:nvSpPr>
@@ -38136,7 +38579,7 @@
       </p:sp>
       <p:sp>
         <p:nvSpPr>
-          <p:cNvPr id="17" name="TextBox 16"/>
+          <p:cNvPr id="16" name="TextBox 15"/>
           <p:cNvSpPr txBox="1"/>
           <p:nvPr/>
         </p:nvSpPr>
@@ -38183,7 +38626,7 @@
       </p:sp>
       <p:sp>
         <p:nvSpPr>
-          <p:cNvPr id="18" name="TextBox 17"/>
+          <p:cNvPr id="17" name="TextBox 16"/>
           <p:cNvSpPr txBox="1"/>
           <p:nvPr/>
         </p:nvSpPr>
@@ -38224,6 +38667,64 @@
                 <a:cs typeface="NanumGothic"/>
               </a:rPr>
               <a:t>AI 에이전트의 정의(LLM+tools+loop)와 리서치 에이전트 개요를 배우고, Python과 Claude Code를 설치·설정합니다.</a:t>
+            </a:r>
+          </a:p>
+        </p:txBody>
+      </p:sp>
+      <p:sp>
+        <p:nvSpPr>
+          <p:cNvPr id="18" name="TextBox 17"/>
+          <p:cNvSpPr txBox="1"/>
+          <p:nvPr/>
+        </p:nvSpPr>
+        <p:spPr>
+          <a:xfrm>
+            <a:off x="8988552" y="6419088"/>
+            <a:ext cx="2697480" cy="365760"/>
+          </a:xfrm>
+          <a:prstGeom prst="rect">
+            <a:avLst/>
+          </a:prstGeom>
+          <a:noFill/>
+        </p:spPr>
+        <p:txBody>
+          <a:bodyPr wrap="square" anchor="ctr" lIns="0" rIns="0" tIns="0" bIns="0">
+            <a:spAutoFit/>
+          </a:bodyPr>
+          <a:lstStyle/>
+          <a:p>
+            <a:pPr algn="r">
+              <a:lnSpc>
+                <a:spcPct val="100000"/>
+              </a:lnSpc>
+              <a:spcBef>
+                <a:spcPts val="0"/>
+              </a:spcBef>
+              <a:spcAft>
+                <a:spcPts val="600"/>
+              </a:spcAft>
+            </a:pPr>
+            <a:r>
+              <a:rPr sz="900" b="1">
+                <a:solidFill>
+                  <a:srgbClr val="6366F1"/>
+                </a:solidFill>
+                <a:latin typeface="NanumGothic"/>
+                <a:ea typeface="NanumGothic"/>
+                <a:cs typeface="NanumGothic"/>
+              </a:rPr>
+              <a:t>Day 1 · 월</a:t>
+            </a:r>
+            <a:r>
+              <a:rPr sz="900" b="1">
+                <a:solidFill>
+                  <a:srgbClr val="64748B"/>
+                </a:solidFill>
+                <a:latin typeface="NanumGothic"/>
+                <a:ea typeface="NanumGothic"/>
+                <a:cs typeface="NanumGothic"/>
+              </a:rPr>
+              <a:t>   ·   42 / 42</a:t>
             </a:r>
           </a:p>
         </p:txBody>
@@ -38521,54 +39022,7 @@
       </p:sp>
       <p:sp>
         <p:nvSpPr>
-          <p:cNvPr id="8" name="TextBox 7"/>
-          <p:cNvSpPr txBox="1"/>
-          <p:nvPr/>
-        </p:nvSpPr>
-        <p:spPr>
-          <a:xfrm>
-            <a:off x="10241280" y="6419088"/>
-            <a:ext cx="1463040" cy="365760"/>
-          </a:xfrm>
-          <a:prstGeom prst="rect">
-            <a:avLst/>
-          </a:prstGeom>
-          <a:noFill/>
-        </p:spPr>
-        <p:txBody>
-          <a:bodyPr wrap="square" anchor="ctr" lIns="0" rIns="0" tIns="0" bIns="0">
-            <a:spAutoFit/>
-          </a:bodyPr>
-          <a:lstStyle/>
-          <a:p>
-            <a:pPr algn="r">
-              <a:lnSpc>
-                <a:spcPct val="100000"/>
-              </a:lnSpc>
-              <a:spcBef>
-                <a:spcPts val="0"/>
-              </a:spcBef>
-              <a:spcAft>
-                <a:spcPts val="600"/>
-              </a:spcAft>
-            </a:pPr>
-            <a:r>
-              <a:rPr sz="900" b="1">
-                <a:solidFill>
-                  <a:srgbClr val="6366F1"/>
-                </a:solidFill>
-                <a:latin typeface="NanumGothic"/>
-                <a:ea typeface="NanumGothic"/>
-                <a:cs typeface="NanumGothic"/>
-              </a:rPr>
-              <a:t>Day 1 · 월</a:t>
-            </a:r>
-          </a:p>
-        </p:txBody>
-      </p:sp>
-      <p:sp>
-        <p:nvSpPr>
-          <p:cNvPr id="9" name="Oval 8"/>
+          <p:cNvPr id="8" name="Oval 7"/>
           <p:cNvSpPr/>
           <p:nvPr/>
         </p:nvSpPr>
@@ -38612,7 +39066,7 @@
       </p:sp>
       <p:sp>
         <p:nvSpPr>
-          <p:cNvPr id="10" name="TextBox 9"/>
+          <p:cNvPr id="9" name="TextBox 8"/>
           <p:cNvSpPr txBox="1"/>
           <p:nvPr/>
         </p:nvSpPr>
@@ -38659,7 +39113,7 @@
       </p:sp>
       <p:sp>
         <p:nvSpPr>
-          <p:cNvPr id="11" name="TextBox 10"/>
+          <p:cNvPr id="10" name="TextBox 9"/>
           <p:cNvSpPr txBox="1"/>
           <p:nvPr/>
         </p:nvSpPr>
@@ -38706,7 +39160,7 @@
       </p:sp>
       <p:sp>
         <p:nvSpPr>
-          <p:cNvPr id="12" name="Oval 11"/>
+          <p:cNvPr id="11" name="Oval 10"/>
           <p:cNvSpPr/>
           <p:nvPr/>
         </p:nvSpPr>
@@ -38750,7 +39204,7 @@
       </p:sp>
       <p:sp>
         <p:nvSpPr>
-          <p:cNvPr id="13" name="TextBox 12"/>
+          <p:cNvPr id="12" name="TextBox 11"/>
           <p:cNvSpPr txBox="1"/>
           <p:nvPr/>
         </p:nvSpPr>
@@ -38797,7 +39251,7 @@
       </p:sp>
       <p:sp>
         <p:nvSpPr>
-          <p:cNvPr id="14" name="TextBox 13"/>
+          <p:cNvPr id="13" name="TextBox 12"/>
           <p:cNvSpPr txBox="1"/>
           <p:nvPr/>
         </p:nvSpPr>
@@ -38844,7 +39298,7 @@
       </p:sp>
       <p:sp>
         <p:nvSpPr>
-          <p:cNvPr id="15" name="Oval 14"/>
+          <p:cNvPr id="14" name="Oval 13"/>
           <p:cNvSpPr/>
           <p:nvPr/>
         </p:nvSpPr>
@@ -38888,7 +39342,7 @@
       </p:sp>
       <p:sp>
         <p:nvSpPr>
-          <p:cNvPr id="16" name="TextBox 15"/>
+          <p:cNvPr id="15" name="TextBox 14"/>
           <p:cNvSpPr txBox="1"/>
           <p:nvPr/>
         </p:nvSpPr>
@@ -38935,7 +39389,7 @@
       </p:sp>
       <p:sp>
         <p:nvSpPr>
-          <p:cNvPr id="17" name="TextBox 16"/>
+          <p:cNvPr id="16" name="TextBox 15"/>
           <p:cNvSpPr txBox="1"/>
           <p:nvPr/>
         </p:nvSpPr>
@@ -38976,6 +39430,64 @@
                 <a:cs typeface="NanumGothic"/>
               </a:rPr>
               <a:t>프롬프트 · 모델 선택 · 환각 등 주의점</a:t>
+            </a:r>
+          </a:p>
+        </p:txBody>
+      </p:sp>
+      <p:sp>
+        <p:nvSpPr>
+          <p:cNvPr id="17" name="TextBox 16"/>
+          <p:cNvSpPr txBox="1"/>
+          <p:nvPr/>
+        </p:nvSpPr>
+        <p:spPr>
+          <a:xfrm>
+            <a:off x="8988552" y="6419088"/>
+            <a:ext cx="2697480" cy="365760"/>
+          </a:xfrm>
+          <a:prstGeom prst="rect">
+            <a:avLst/>
+          </a:prstGeom>
+          <a:noFill/>
+        </p:spPr>
+        <p:txBody>
+          <a:bodyPr wrap="square" anchor="ctr" lIns="0" rIns="0" tIns="0" bIns="0">
+            <a:spAutoFit/>
+          </a:bodyPr>
+          <a:lstStyle/>
+          <a:p>
+            <a:pPr algn="r">
+              <a:lnSpc>
+                <a:spcPct val="100000"/>
+              </a:lnSpc>
+              <a:spcBef>
+                <a:spcPts val="0"/>
+              </a:spcBef>
+              <a:spcAft>
+                <a:spcPts val="600"/>
+              </a:spcAft>
+            </a:pPr>
+            <a:r>
+              <a:rPr sz="900" b="1">
+                <a:solidFill>
+                  <a:srgbClr val="6366F1"/>
+                </a:solidFill>
+                <a:latin typeface="NanumGothic"/>
+                <a:ea typeface="NanumGothic"/>
+                <a:cs typeface="NanumGothic"/>
+              </a:rPr>
+              <a:t>Day 1 · 월</a:t>
+            </a:r>
+            <a:r>
+              <a:rPr sz="900" b="1">
+                <a:solidFill>
+                  <a:srgbClr val="64748B"/>
+                </a:solidFill>
+                <a:latin typeface="NanumGothic"/>
+                <a:ea typeface="NanumGothic"/>
+                <a:cs typeface="NanumGothic"/>
+              </a:rPr>
+              <a:t>   ·   5 / 42</a:t>
             </a:r>
           </a:p>
         </p:txBody>
@@ -39273,54 +39785,7 @@
       </p:sp>
       <p:sp>
         <p:nvSpPr>
-          <p:cNvPr id="8" name="TextBox 7"/>
-          <p:cNvSpPr txBox="1"/>
-          <p:nvPr/>
-        </p:nvSpPr>
-        <p:spPr>
-          <a:xfrm>
-            <a:off x="10241280" y="6419088"/>
-            <a:ext cx="1463040" cy="365760"/>
-          </a:xfrm>
-          <a:prstGeom prst="rect">
-            <a:avLst/>
-          </a:prstGeom>
-          <a:noFill/>
-        </p:spPr>
-        <p:txBody>
-          <a:bodyPr wrap="square" anchor="ctr" lIns="0" rIns="0" tIns="0" bIns="0">
-            <a:spAutoFit/>
-          </a:bodyPr>
-          <a:lstStyle/>
-          <a:p>
-            <a:pPr algn="r">
-              <a:lnSpc>
-                <a:spcPct val="100000"/>
-              </a:lnSpc>
-              <a:spcBef>
-                <a:spcPts val="0"/>
-              </a:spcBef>
-              <a:spcAft>
-                <a:spcPts val="600"/>
-              </a:spcAft>
-            </a:pPr>
-            <a:r>
-              <a:rPr sz="900" b="1">
-                <a:solidFill>
-                  <a:srgbClr val="6366F1"/>
-                </a:solidFill>
-                <a:latin typeface="NanumGothic"/>
-                <a:ea typeface="NanumGothic"/>
-                <a:cs typeface="NanumGothic"/>
-              </a:rPr>
-              <a:t>Day 1 · 월</a:t>
-            </a:r>
-          </a:p>
-        </p:txBody>
-      </p:sp>
-      <p:sp>
-        <p:nvSpPr>
-          <p:cNvPr id="9" name="Rounded Rectangle 8"/>
+          <p:cNvPr id="8" name="Rounded Rectangle 7"/>
           <p:cNvSpPr/>
           <p:nvPr/>
         </p:nvSpPr>
@@ -39366,7 +39831,7 @@
       </p:sp>
       <p:sp>
         <p:nvSpPr>
-          <p:cNvPr id="10" name="Rectangle 9"/>
+          <p:cNvPr id="9" name="Rectangle 8"/>
           <p:cNvSpPr/>
           <p:nvPr/>
         </p:nvSpPr>
@@ -39410,7 +39875,7 @@
       </p:sp>
       <p:sp>
         <p:nvSpPr>
-          <p:cNvPr id="11" name="TextBox 10"/>
+          <p:cNvPr id="10" name="TextBox 9"/>
           <p:cNvSpPr txBox="1"/>
           <p:nvPr/>
         </p:nvSpPr>
@@ -39457,7 +39922,7 @@
       </p:sp>
       <p:sp>
         <p:nvSpPr>
-          <p:cNvPr id="12" name="TextBox 11"/>
+          <p:cNvPr id="11" name="TextBox 10"/>
           <p:cNvSpPr txBox="1"/>
           <p:nvPr/>
         </p:nvSpPr>
@@ -39504,7 +39969,7 @@
       </p:sp>
       <p:sp>
         <p:nvSpPr>
-          <p:cNvPr id="13" name="TextBox 12"/>
+          <p:cNvPr id="12" name="TextBox 11"/>
           <p:cNvSpPr txBox="1"/>
           <p:nvPr/>
         </p:nvSpPr>
@@ -39551,7 +40016,7 @@
       </p:sp>
       <p:sp>
         <p:nvSpPr>
-          <p:cNvPr id="14" name="TextBox 13"/>
+          <p:cNvPr id="13" name="TextBox 12"/>
           <p:cNvSpPr txBox="1"/>
           <p:nvPr/>
         </p:nvSpPr>
@@ -39598,7 +40063,7 @@
       </p:sp>
       <p:sp>
         <p:nvSpPr>
-          <p:cNvPr id="15" name="Rounded Rectangle 14"/>
+          <p:cNvPr id="14" name="Rounded Rectangle 13"/>
           <p:cNvSpPr/>
           <p:nvPr/>
         </p:nvSpPr>
@@ -39644,7 +40109,7 @@
       </p:sp>
       <p:sp>
         <p:nvSpPr>
-          <p:cNvPr id="16" name="Rectangle 15"/>
+          <p:cNvPr id="15" name="Rectangle 14"/>
           <p:cNvSpPr/>
           <p:nvPr/>
         </p:nvSpPr>
@@ -39688,7 +40153,7 @@
       </p:sp>
       <p:sp>
         <p:nvSpPr>
-          <p:cNvPr id="17" name="TextBox 16"/>
+          <p:cNvPr id="16" name="TextBox 15"/>
           <p:cNvSpPr txBox="1"/>
           <p:nvPr/>
         </p:nvSpPr>
@@ -39735,7 +40200,7 @@
       </p:sp>
       <p:sp>
         <p:nvSpPr>
-          <p:cNvPr id="18" name="TextBox 17"/>
+          <p:cNvPr id="17" name="TextBox 16"/>
           <p:cNvSpPr txBox="1"/>
           <p:nvPr/>
         </p:nvSpPr>
@@ -39782,7 +40247,7 @@
       </p:sp>
       <p:sp>
         <p:nvSpPr>
-          <p:cNvPr id="19" name="TextBox 18"/>
+          <p:cNvPr id="18" name="TextBox 17"/>
           <p:cNvSpPr txBox="1"/>
           <p:nvPr/>
         </p:nvSpPr>
@@ -39829,7 +40294,7 @@
       </p:sp>
       <p:sp>
         <p:nvSpPr>
-          <p:cNvPr id="20" name="TextBox 19"/>
+          <p:cNvPr id="19" name="TextBox 18"/>
           <p:cNvSpPr txBox="1"/>
           <p:nvPr/>
         </p:nvSpPr>
@@ -39876,7 +40341,7 @@
       </p:sp>
       <p:sp>
         <p:nvSpPr>
-          <p:cNvPr id="21" name="Rounded Rectangle 20"/>
+          <p:cNvPr id="20" name="Rounded Rectangle 19"/>
           <p:cNvSpPr/>
           <p:nvPr/>
         </p:nvSpPr>
@@ -39922,7 +40387,7 @@
       </p:sp>
       <p:sp>
         <p:nvSpPr>
-          <p:cNvPr id="22" name="Rectangle 21"/>
+          <p:cNvPr id="21" name="Rectangle 20"/>
           <p:cNvSpPr/>
           <p:nvPr/>
         </p:nvSpPr>
@@ -39966,7 +40431,7 @@
       </p:sp>
       <p:sp>
         <p:nvSpPr>
-          <p:cNvPr id="23" name="TextBox 22"/>
+          <p:cNvPr id="22" name="TextBox 21"/>
           <p:cNvSpPr txBox="1"/>
           <p:nvPr/>
         </p:nvSpPr>
@@ -40013,7 +40478,7 @@
       </p:sp>
       <p:sp>
         <p:nvSpPr>
-          <p:cNvPr id="24" name="TextBox 23"/>
+          <p:cNvPr id="23" name="TextBox 22"/>
           <p:cNvSpPr txBox="1"/>
           <p:nvPr/>
         </p:nvSpPr>
@@ -40060,7 +40525,7 @@
       </p:sp>
       <p:sp>
         <p:nvSpPr>
-          <p:cNvPr id="25" name="TextBox 24"/>
+          <p:cNvPr id="24" name="TextBox 23"/>
           <p:cNvSpPr txBox="1"/>
           <p:nvPr/>
         </p:nvSpPr>
@@ -40107,7 +40572,7 @@
       </p:sp>
       <p:sp>
         <p:nvSpPr>
-          <p:cNvPr id="26" name="TextBox 25"/>
+          <p:cNvPr id="25" name="TextBox 24"/>
           <p:cNvSpPr txBox="1"/>
           <p:nvPr/>
         </p:nvSpPr>
@@ -40154,7 +40619,7 @@
       </p:sp>
       <p:sp>
         <p:nvSpPr>
-          <p:cNvPr id="27" name="Rounded Rectangle 26"/>
+          <p:cNvPr id="26" name="Rounded Rectangle 25"/>
           <p:cNvSpPr/>
           <p:nvPr/>
         </p:nvSpPr>
@@ -40200,7 +40665,7 @@
       </p:sp>
       <p:sp>
         <p:nvSpPr>
-          <p:cNvPr id="28" name="Rectangle 27"/>
+          <p:cNvPr id="27" name="Rectangle 26"/>
           <p:cNvSpPr/>
           <p:nvPr/>
         </p:nvSpPr>
@@ -40244,7 +40709,7 @@
       </p:sp>
       <p:sp>
         <p:nvSpPr>
-          <p:cNvPr id="29" name="TextBox 28"/>
+          <p:cNvPr id="28" name="TextBox 27"/>
           <p:cNvSpPr txBox="1"/>
           <p:nvPr/>
         </p:nvSpPr>
@@ -40291,7 +40756,7 @@
       </p:sp>
       <p:sp>
         <p:nvSpPr>
-          <p:cNvPr id="30" name="TextBox 29"/>
+          <p:cNvPr id="29" name="TextBox 28"/>
           <p:cNvSpPr txBox="1"/>
           <p:nvPr/>
         </p:nvSpPr>
@@ -40338,7 +40803,7 @@
       </p:sp>
       <p:sp>
         <p:nvSpPr>
-          <p:cNvPr id="31" name="TextBox 30"/>
+          <p:cNvPr id="30" name="TextBox 29"/>
           <p:cNvSpPr txBox="1"/>
           <p:nvPr/>
         </p:nvSpPr>
@@ -40385,7 +40850,7 @@
       </p:sp>
       <p:sp>
         <p:nvSpPr>
-          <p:cNvPr id="32" name="TextBox 31"/>
+          <p:cNvPr id="31" name="TextBox 30"/>
           <p:cNvSpPr txBox="1"/>
           <p:nvPr/>
         </p:nvSpPr>
@@ -40432,7 +40897,7 @@
       </p:sp>
       <p:sp>
         <p:nvSpPr>
-          <p:cNvPr id="33" name="Rounded Rectangle 32"/>
+          <p:cNvPr id="32" name="Rounded Rectangle 31"/>
           <p:cNvSpPr/>
           <p:nvPr/>
         </p:nvSpPr>
@@ -40478,7 +40943,7 @@
       </p:sp>
       <p:sp>
         <p:nvSpPr>
-          <p:cNvPr id="34" name="Rectangle 33"/>
+          <p:cNvPr id="33" name="Rectangle 32"/>
           <p:cNvSpPr/>
           <p:nvPr/>
         </p:nvSpPr>
@@ -40522,7 +40987,7 @@
       </p:sp>
       <p:sp>
         <p:nvSpPr>
-          <p:cNvPr id="35" name="TextBox 34"/>
+          <p:cNvPr id="34" name="TextBox 33"/>
           <p:cNvSpPr txBox="1"/>
           <p:nvPr/>
         </p:nvSpPr>
@@ -40569,7 +41034,7 @@
       </p:sp>
       <p:sp>
         <p:nvSpPr>
-          <p:cNvPr id="36" name="TextBox 35"/>
+          <p:cNvPr id="35" name="TextBox 34"/>
           <p:cNvSpPr txBox="1"/>
           <p:nvPr/>
         </p:nvSpPr>
@@ -40616,7 +41081,7 @@
       </p:sp>
       <p:sp>
         <p:nvSpPr>
-          <p:cNvPr id="37" name="TextBox 36"/>
+          <p:cNvPr id="36" name="TextBox 35"/>
           <p:cNvSpPr txBox="1"/>
           <p:nvPr/>
         </p:nvSpPr>
@@ -40663,7 +41128,7 @@
       </p:sp>
       <p:sp>
         <p:nvSpPr>
-          <p:cNvPr id="38" name="Rounded Rectangle 37"/>
+          <p:cNvPr id="37" name="Rounded Rectangle 36"/>
           <p:cNvSpPr/>
           <p:nvPr/>
         </p:nvSpPr>
@@ -40709,7 +41174,7 @@
       </p:sp>
       <p:sp>
         <p:nvSpPr>
-          <p:cNvPr id="39" name="TextBox 38"/>
+          <p:cNvPr id="38" name="TextBox 37"/>
           <p:cNvSpPr txBox="1"/>
           <p:nvPr/>
         </p:nvSpPr>
@@ -40761,6 +41226,64 @@
                 <a:cs typeface="NanumGothic"/>
               </a:rPr>
               <a:t>초기 통계(n-gram) → 신경망 → Transformer로 도약 — 이제 각 단계를 하나씩</a:t>
+            </a:r>
+          </a:p>
+        </p:txBody>
+      </p:sp>
+      <p:sp>
+        <p:nvSpPr>
+          <p:cNvPr id="39" name="TextBox 38"/>
+          <p:cNvSpPr txBox="1"/>
+          <p:nvPr/>
+        </p:nvSpPr>
+        <p:spPr>
+          <a:xfrm>
+            <a:off x="8988552" y="6419088"/>
+            <a:ext cx="2697480" cy="365760"/>
+          </a:xfrm>
+          <a:prstGeom prst="rect">
+            <a:avLst/>
+          </a:prstGeom>
+          <a:noFill/>
+        </p:spPr>
+        <p:txBody>
+          <a:bodyPr wrap="square" anchor="ctr" lIns="0" rIns="0" tIns="0" bIns="0">
+            <a:spAutoFit/>
+          </a:bodyPr>
+          <a:lstStyle/>
+          <a:p>
+            <a:pPr algn="r">
+              <a:lnSpc>
+                <a:spcPct val="100000"/>
+              </a:lnSpc>
+              <a:spcBef>
+                <a:spcPts val="0"/>
+              </a:spcBef>
+              <a:spcAft>
+                <a:spcPts val="600"/>
+              </a:spcAft>
+            </a:pPr>
+            <a:r>
+              <a:rPr sz="900" b="1">
+                <a:solidFill>
+                  <a:srgbClr val="6366F1"/>
+                </a:solidFill>
+                <a:latin typeface="NanumGothic"/>
+                <a:ea typeface="NanumGothic"/>
+                <a:cs typeface="NanumGothic"/>
+              </a:rPr>
+              <a:t>Day 1 · 월</a:t>
+            </a:r>
+            <a:r>
+              <a:rPr sz="900" b="1">
+                <a:solidFill>
+                  <a:srgbClr val="64748B"/>
+                </a:solidFill>
+                <a:latin typeface="NanumGothic"/>
+                <a:ea typeface="NanumGothic"/>
+                <a:cs typeface="NanumGothic"/>
+              </a:rPr>
+              <a:t>   ·   6 / 42</a:t>
             </a:r>
           </a:p>
         </p:txBody>
@@ -41058,54 +41581,7 @@
       </p:sp>
       <p:sp>
         <p:nvSpPr>
-          <p:cNvPr id="8" name="TextBox 7"/>
-          <p:cNvSpPr txBox="1"/>
-          <p:nvPr/>
-        </p:nvSpPr>
-        <p:spPr>
-          <a:xfrm>
-            <a:off x="10241280" y="6419088"/>
-            <a:ext cx="1463040" cy="365760"/>
-          </a:xfrm>
-          <a:prstGeom prst="rect">
-            <a:avLst/>
-          </a:prstGeom>
-          <a:noFill/>
-        </p:spPr>
-        <p:txBody>
-          <a:bodyPr wrap="square" anchor="ctr" lIns="0" rIns="0" tIns="0" bIns="0">
-            <a:spAutoFit/>
-          </a:bodyPr>
-          <a:lstStyle/>
-          <a:p>
-            <a:pPr algn="r">
-              <a:lnSpc>
-                <a:spcPct val="100000"/>
-              </a:lnSpc>
-              <a:spcBef>
-                <a:spcPts val="0"/>
-              </a:spcBef>
-              <a:spcAft>
-                <a:spcPts val="600"/>
-              </a:spcAft>
-            </a:pPr>
-            <a:r>
-              <a:rPr sz="900" b="1">
-                <a:solidFill>
-                  <a:srgbClr val="6366F1"/>
-                </a:solidFill>
-                <a:latin typeface="NanumGothic"/>
-                <a:ea typeface="NanumGothic"/>
-                <a:cs typeface="NanumGothic"/>
-              </a:rPr>
-              <a:t>Day 1 · 월</a:t>
-            </a:r>
-          </a:p>
-        </p:txBody>
-      </p:sp>
-      <p:sp>
-        <p:nvSpPr>
-          <p:cNvPr id="9" name="Oval 8"/>
+          <p:cNvPr id="8" name="Oval 7"/>
           <p:cNvSpPr/>
           <p:nvPr/>
         </p:nvSpPr>
@@ -41149,7 +41625,7 @@
       </p:sp>
       <p:sp>
         <p:nvSpPr>
-          <p:cNvPr id="10" name="TextBox 9"/>
+          <p:cNvPr id="9" name="TextBox 8"/>
           <p:cNvSpPr txBox="1"/>
           <p:nvPr/>
         </p:nvSpPr>
@@ -41196,7 +41672,7 @@
       </p:sp>
       <p:sp>
         <p:nvSpPr>
-          <p:cNvPr id="11" name="TextBox 10"/>
+          <p:cNvPr id="10" name="TextBox 9"/>
           <p:cNvSpPr txBox="1"/>
           <p:nvPr/>
         </p:nvSpPr>
@@ -41243,7 +41719,7 @@
       </p:sp>
       <p:sp>
         <p:nvSpPr>
-          <p:cNvPr id="12" name="Oval 11"/>
+          <p:cNvPr id="11" name="Oval 10"/>
           <p:cNvSpPr/>
           <p:nvPr/>
         </p:nvSpPr>
@@ -41287,7 +41763,7 @@
       </p:sp>
       <p:sp>
         <p:nvSpPr>
-          <p:cNvPr id="13" name="TextBox 12"/>
+          <p:cNvPr id="12" name="TextBox 11"/>
           <p:cNvSpPr txBox="1"/>
           <p:nvPr/>
         </p:nvSpPr>
@@ -41334,7 +41810,7 @@
       </p:sp>
       <p:sp>
         <p:nvSpPr>
-          <p:cNvPr id="14" name="TextBox 13"/>
+          <p:cNvPr id="13" name="TextBox 12"/>
           <p:cNvSpPr txBox="1"/>
           <p:nvPr/>
         </p:nvSpPr>
@@ -41381,7 +41857,7 @@
       </p:sp>
       <p:sp>
         <p:nvSpPr>
-          <p:cNvPr id="15" name="Oval 14"/>
+          <p:cNvPr id="14" name="Oval 13"/>
           <p:cNvSpPr/>
           <p:nvPr/>
         </p:nvSpPr>
@@ -41425,7 +41901,7 @@
       </p:sp>
       <p:sp>
         <p:nvSpPr>
-          <p:cNvPr id="16" name="TextBox 15"/>
+          <p:cNvPr id="15" name="TextBox 14"/>
           <p:cNvSpPr txBox="1"/>
           <p:nvPr/>
         </p:nvSpPr>
@@ -41472,7 +41948,7 @@
       </p:sp>
       <p:sp>
         <p:nvSpPr>
-          <p:cNvPr id="17" name="TextBox 16"/>
+          <p:cNvPr id="16" name="TextBox 15"/>
           <p:cNvSpPr txBox="1"/>
           <p:nvPr/>
         </p:nvSpPr>
@@ -41519,7 +41995,7 @@
       </p:sp>
       <p:sp>
         <p:nvSpPr>
-          <p:cNvPr id="18" name="Rounded Rectangle 17"/>
+          <p:cNvPr id="17" name="Rounded Rectangle 16"/>
           <p:cNvSpPr/>
           <p:nvPr/>
         </p:nvSpPr>
@@ -41565,7 +42041,7 @@
       </p:sp>
       <p:sp>
         <p:nvSpPr>
-          <p:cNvPr id="19" name="TextBox 18"/>
+          <p:cNvPr id="18" name="TextBox 17"/>
           <p:cNvSpPr txBox="1"/>
           <p:nvPr/>
         </p:nvSpPr>
@@ -41617,6 +42093,64 @@
                 <a:cs typeface="NanumGothic"/>
               </a:rPr>
               <a:t>오늘 배울 '임베딩'의 출발점</a:t>
+            </a:r>
+          </a:p>
+        </p:txBody>
+      </p:sp>
+      <p:sp>
+        <p:nvSpPr>
+          <p:cNvPr id="19" name="TextBox 18"/>
+          <p:cNvSpPr txBox="1"/>
+          <p:nvPr/>
+        </p:nvSpPr>
+        <p:spPr>
+          <a:xfrm>
+            <a:off x="8988552" y="6419088"/>
+            <a:ext cx="2697480" cy="365760"/>
+          </a:xfrm>
+          <a:prstGeom prst="rect">
+            <a:avLst/>
+          </a:prstGeom>
+          <a:noFill/>
+        </p:spPr>
+        <p:txBody>
+          <a:bodyPr wrap="square" anchor="ctr" lIns="0" rIns="0" tIns="0" bIns="0">
+            <a:spAutoFit/>
+          </a:bodyPr>
+          <a:lstStyle/>
+          <a:p>
+            <a:pPr algn="r">
+              <a:lnSpc>
+                <a:spcPct val="100000"/>
+              </a:lnSpc>
+              <a:spcBef>
+                <a:spcPts val="0"/>
+              </a:spcBef>
+              <a:spcAft>
+                <a:spcPts val="600"/>
+              </a:spcAft>
+            </a:pPr>
+            <a:r>
+              <a:rPr sz="900" b="1">
+                <a:solidFill>
+                  <a:srgbClr val="6366F1"/>
+                </a:solidFill>
+                <a:latin typeface="NanumGothic"/>
+                <a:ea typeface="NanumGothic"/>
+                <a:cs typeface="NanumGothic"/>
+              </a:rPr>
+              <a:t>Day 1 · 월</a:t>
+            </a:r>
+            <a:r>
+              <a:rPr sz="900" b="1">
+                <a:solidFill>
+                  <a:srgbClr val="64748B"/>
+                </a:solidFill>
+                <a:latin typeface="NanumGothic"/>
+                <a:ea typeface="NanumGothic"/>
+                <a:cs typeface="NanumGothic"/>
+              </a:rPr>
+              <a:t>   ·   7 / 42</a:t>
             </a:r>
           </a:p>
         </p:txBody>
@@ -41914,54 +42448,7 @@
       </p:sp>
       <p:sp>
         <p:nvSpPr>
-          <p:cNvPr id="8" name="TextBox 7"/>
-          <p:cNvSpPr txBox="1"/>
-          <p:nvPr/>
-        </p:nvSpPr>
-        <p:spPr>
-          <a:xfrm>
-            <a:off x="10241280" y="6419088"/>
-            <a:ext cx="1463040" cy="365760"/>
-          </a:xfrm>
-          <a:prstGeom prst="rect">
-            <a:avLst/>
-          </a:prstGeom>
-          <a:noFill/>
-        </p:spPr>
-        <p:txBody>
-          <a:bodyPr wrap="square" anchor="ctr" lIns="0" rIns="0" tIns="0" bIns="0">
-            <a:spAutoFit/>
-          </a:bodyPr>
-          <a:lstStyle/>
-          <a:p>
-            <a:pPr algn="r">
-              <a:lnSpc>
-                <a:spcPct val="100000"/>
-              </a:lnSpc>
-              <a:spcBef>
-                <a:spcPts val="0"/>
-              </a:spcBef>
-              <a:spcAft>
-                <a:spcPts val="600"/>
-              </a:spcAft>
-            </a:pPr>
-            <a:r>
-              <a:rPr sz="900" b="1">
-                <a:solidFill>
-                  <a:srgbClr val="6366F1"/>
-                </a:solidFill>
-                <a:latin typeface="NanumGothic"/>
-                <a:ea typeface="NanumGothic"/>
-                <a:cs typeface="NanumGothic"/>
-              </a:rPr>
-              <a:t>Day 1 · 월</a:t>
-            </a:r>
-          </a:p>
-        </p:txBody>
-      </p:sp>
-      <p:sp>
-        <p:nvSpPr>
-          <p:cNvPr id="9" name="Oval 8"/>
+          <p:cNvPr id="8" name="Oval 7"/>
           <p:cNvSpPr/>
           <p:nvPr/>
         </p:nvSpPr>
@@ -42005,7 +42492,7 @@
       </p:sp>
       <p:sp>
         <p:nvSpPr>
-          <p:cNvPr id="10" name="TextBox 9"/>
+          <p:cNvPr id="9" name="TextBox 8"/>
           <p:cNvSpPr txBox="1"/>
           <p:nvPr/>
         </p:nvSpPr>
@@ -42052,7 +42539,7 @@
       </p:sp>
       <p:sp>
         <p:nvSpPr>
-          <p:cNvPr id="11" name="TextBox 10"/>
+          <p:cNvPr id="10" name="TextBox 9"/>
           <p:cNvSpPr txBox="1"/>
           <p:nvPr/>
         </p:nvSpPr>
@@ -42099,7 +42586,7 @@
       </p:sp>
       <p:sp>
         <p:nvSpPr>
-          <p:cNvPr id="12" name="Oval 11"/>
+          <p:cNvPr id="11" name="Oval 10"/>
           <p:cNvSpPr/>
           <p:nvPr/>
         </p:nvSpPr>
@@ -42143,7 +42630,7 @@
       </p:sp>
       <p:sp>
         <p:nvSpPr>
-          <p:cNvPr id="13" name="TextBox 12"/>
+          <p:cNvPr id="12" name="TextBox 11"/>
           <p:cNvSpPr txBox="1"/>
           <p:nvPr/>
         </p:nvSpPr>
@@ -42190,7 +42677,7 @@
       </p:sp>
       <p:sp>
         <p:nvSpPr>
-          <p:cNvPr id="14" name="TextBox 13"/>
+          <p:cNvPr id="13" name="TextBox 12"/>
           <p:cNvSpPr txBox="1"/>
           <p:nvPr/>
         </p:nvSpPr>
@@ -42237,7 +42724,7 @@
       </p:sp>
       <p:sp>
         <p:nvSpPr>
-          <p:cNvPr id="15" name="Oval 14"/>
+          <p:cNvPr id="14" name="Oval 13"/>
           <p:cNvSpPr/>
           <p:nvPr/>
         </p:nvSpPr>
@@ -42281,7 +42768,7 @@
       </p:sp>
       <p:sp>
         <p:nvSpPr>
-          <p:cNvPr id="16" name="TextBox 15"/>
+          <p:cNvPr id="15" name="TextBox 14"/>
           <p:cNvSpPr txBox="1"/>
           <p:nvPr/>
         </p:nvSpPr>
@@ -42328,7 +42815,7 @@
       </p:sp>
       <p:sp>
         <p:nvSpPr>
-          <p:cNvPr id="17" name="TextBox 16"/>
+          <p:cNvPr id="16" name="TextBox 15"/>
           <p:cNvSpPr txBox="1"/>
           <p:nvPr/>
         </p:nvSpPr>
@@ -42375,7 +42862,7 @@
       </p:sp>
       <p:sp>
         <p:nvSpPr>
-          <p:cNvPr id="18" name="Rounded Rectangle 17"/>
+          <p:cNvPr id="17" name="Rounded Rectangle 16"/>
           <p:cNvSpPr/>
           <p:nvPr/>
         </p:nvSpPr>
@@ -42421,7 +42908,7 @@
       </p:sp>
       <p:sp>
         <p:nvSpPr>
-          <p:cNvPr id="19" name="TextBox 18"/>
+          <p:cNvPr id="18" name="TextBox 17"/>
           <p:cNvSpPr txBox="1"/>
           <p:nvPr/>
         </p:nvSpPr>
@@ -42473,6 +42960,64 @@
                 <a:cs typeface="NanumGothic"/>
               </a:rPr>
               <a:t>지금의 GPT·Claude 모두 이 구조 위에</a:t>
+            </a:r>
+          </a:p>
+        </p:txBody>
+      </p:sp>
+      <p:sp>
+        <p:nvSpPr>
+          <p:cNvPr id="19" name="TextBox 18"/>
+          <p:cNvSpPr txBox="1"/>
+          <p:nvPr/>
+        </p:nvSpPr>
+        <p:spPr>
+          <a:xfrm>
+            <a:off x="8988552" y="6419088"/>
+            <a:ext cx="2697480" cy="365760"/>
+          </a:xfrm>
+          <a:prstGeom prst="rect">
+            <a:avLst/>
+          </a:prstGeom>
+          <a:noFill/>
+        </p:spPr>
+        <p:txBody>
+          <a:bodyPr wrap="square" anchor="ctr" lIns="0" rIns="0" tIns="0" bIns="0">
+            <a:spAutoFit/>
+          </a:bodyPr>
+          <a:lstStyle/>
+          <a:p>
+            <a:pPr algn="r">
+              <a:lnSpc>
+                <a:spcPct val="100000"/>
+              </a:lnSpc>
+              <a:spcBef>
+                <a:spcPts val="0"/>
+              </a:spcBef>
+              <a:spcAft>
+                <a:spcPts val="600"/>
+              </a:spcAft>
+            </a:pPr>
+            <a:r>
+              <a:rPr sz="900" b="1">
+                <a:solidFill>
+                  <a:srgbClr val="6366F1"/>
+                </a:solidFill>
+                <a:latin typeface="NanumGothic"/>
+                <a:ea typeface="NanumGothic"/>
+                <a:cs typeface="NanumGothic"/>
+              </a:rPr>
+              <a:t>Day 1 · 월</a:t>
+            </a:r>
+            <a:r>
+              <a:rPr sz="900" b="1">
+                <a:solidFill>
+                  <a:srgbClr val="64748B"/>
+                </a:solidFill>
+                <a:latin typeface="NanumGothic"/>
+                <a:ea typeface="NanumGothic"/>
+                <a:cs typeface="NanumGothic"/>
+              </a:rPr>
+              <a:t>   ·   8 / 42</a:t>
             </a:r>
           </a:p>
         </p:txBody>
@@ -42770,54 +43315,7 @@
       </p:sp>
       <p:sp>
         <p:nvSpPr>
-          <p:cNvPr id="8" name="TextBox 7"/>
-          <p:cNvSpPr txBox="1"/>
-          <p:nvPr/>
-        </p:nvSpPr>
-        <p:spPr>
-          <a:xfrm>
-            <a:off x="10241280" y="6419088"/>
-            <a:ext cx="1463040" cy="365760"/>
-          </a:xfrm>
-          <a:prstGeom prst="rect">
-            <a:avLst/>
-          </a:prstGeom>
-          <a:noFill/>
-        </p:spPr>
-        <p:txBody>
-          <a:bodyPr wrap="square" anchor="ctr" lIns="0" rIns="0" tIns="0" bIns="0">
-            <a:spAutoFit/>
-          </a:bodyPr>
-          <a:lstStyle/>
-          <a:p>
-            <a:pPr algn="r">
-              <a:lnSpc>
-                <a:spcPct val="100000"/>
-              </a:lnSpc>
-              <a:spcBef>
-                <a:spcPts val="0"/>
-              </a:spcBef>
-              <a:spcAft>
-                <a:spcPts val="600"/>
-              </a:spcAft>
-            </a:pPr>
-            <a:r>
-              <a:rPr sz="900" b="1">
-                <a:solidFill>
-                  <a:srgbClr val="6366F1"/>
-                </a:solidFill>
-                <a:latin typeface="NanumGothic"/>
-                <a:ea typeface="NanumGothic"/>
-                <a:cs typeface="NanumGothic"/>
-              </a:rPr>
-              <a:t>Day 1 · 월</a:t>
-            </a:r>
-          </a:p>
-        </p:txBody>
-      </p:sp>
-      <p:sp>
-        <p:nvSpPr>
-          <p:cNvPr id="9" name="Oval 8"/>
+          <p:cNvPr id="8" name="Oval 7"/>
           <p:cNvSpPr/>
           <p:nvPr/>
         </p:nvSpPr>
@@ -42861,7 +43359,7 @@
       </p:sp>
       <p:sp>
         <p:nvSpPr>
-          <p:cNvPr id="10" name="TextBox 9"/>
+          <p:cNvPr id="9" name="TextBox 8"/>
           <p:cNvSpPr txBox="1"/>
           <p:nvPr/>
         </p:nvSpPr>
@@ -42908,7 +43406,7 @@
       </p:sp>
       <p:sp>
         <p:nvSpPr>
-          <p:cNvPr id="11" name="TextBox 10"/>
+          <p:cNvPr id="10" name="TextBox 9"/>
           <p:cNvSpPr txBox="1"/>
           <p:nvPr/>
         </p:nvSpPr>
@@ -42955,7 +43453,7 @@
       </p:sp>
       <p:sp>
         <p:nvSpPr>
-          <p:cNvPr id="12" name="Oval 11"/>
+          <p:cNvPr id="11" name="Oval 10"/>
           <p:cNvSpPr/>
           <p:nvPr/>
         </p:nvSpPr>
@@ -42999,7 +43497,7 @@
       </p:sp>
       <p:sp>
         <p:nvSpPr>
-          <p:cNvPr id="13" name="TextBox 12"/>
+          <p:cNvPr id="12" name="TextBox 11"/>
           <p:cNvSpPr txBox="1"/>
           <p:nvPr/>
         </p:nvSpPr>
@@ -43046,7 +43544,7 @@
       </p:sp>
       <p:sp>
         <p:nvSpPr>
-          <p:cNvPr id="14" name="TextBox 13"/>
+          <p:cNvPr id="13" name="TextBox 12"/>
           <p:cNvSpPr txBox="1"/>
           <p:nvPr/>
         </p:nvSpPr>
@@ -43093,7 +43591,7 @@
       </p:sp>
       <p:sp>
         <p:nvSpPr>
-          <p:cNvPr id="15" name="Oval 14"/>
+          <p:cNvPr id="14" name="Oval 13"/>
           <p:cNvSpPr/>
           <p:nvPr/>
         </p:nvSpPr>
@@ -43137,7 +43635,7 @@
       </p:sp>
       <p:sp>
         <p:nvSpPr>
-          <p:cNvPr id="16" name="TextBox 15"/>
+          <p:cNvPr id="15" name="TextBox 14"/>
           <p:cNvSpPr txBox="1"/>
           <p:nvPr/>
         </p:nvSpPr>
@@ -43184,7 +43682,7 @@
       </p:sp>
       <p:sp>
         <p:nvSpPr>
-          <p:cNvPr id="17" name="TextBox 16"/>
+          <p:cNvPr id="16" name="TextBox 15"/>
           <p:cNvSpPr txBox="1"/>
           <p:nvPr/>
         </p:nvSpPr>
@@ -43231,7 +43729,7 @@
       </p:sp>
       <p:sp>
         <p:nvSpPr>
-          <p:cNvPr id="18" name="Rounded Rectangle 17"/>
+          <p:cNvPr id="17" name="Rounded Rectangle 16"/>
           <p:cNvSpPr/>
           <p:nvPr/>
         </p:nvSpPr>
@@ -43277,7 +43775,7 @@
       </p:sp>
       <p:sp>
         <p:nvSpPr>
-          <p:cNvPr id="19" name="TextBox 18"/>
+          <p:cNvPr id="18" name="TextBox 17"/>
           <p:cNvSpPr txBox="1"/>
           <p:nvPr/>
         </p:nvSpPr>
@@ -43329,6 +43827,64 @@
                 <a:cs typeface="NanumGothic"/>
               </a:rPr>
               <a:t>'사전학습'이라는 오늘의 핵심 개념이 자리잡음</a:t>
+            </a:r>
+          </a:p>
+        </p:txBody>
+      </p:sp>
+      <p:sp>
+        <p:nvSpPr>
+          <p:cNvPr id="19" name="TextBox 18"/>
+          <p:cNvSpPr txBox="1"/>
+          <p:nvPr/>
+        </p:nvSpPr>
+        <p:spPr>
+          <a:xfrm>
+            <a:off x="8988552" y="6419088"/>
+            <a:ext cx="2697480" cy="365760"/>
+          </a:xfrm>
+          <a:prstGeom prst="rect">
+            <a:avLst/>
+          </a:prstGeom>
+          <a:noFill/>
+        </p:spPr>
+        <p:txBody>
+          <a:bodyPr wrap="square" anchor="ctr" lIns="0" rIns="0" tIns="0" bIns="0">
+            <a:spAutoFit/>
+          </a:bodyPr>
+          <a:lstStyle/>
+          <a:p>
+            <a:pPr algn="r">
+              <a:lnSpc>
+                <a:spcPct val="100000"/>
+              </a:lnSpc>
+              <a:spcBef>
+                <a:spcPts val="0"/>
+              </a:spcBef>
+              <a:spcAft>
+                <a:spcPts val="600"/>
+              </a:spcAft>
+            </a:pPr>
+            <a:r>
+              <a:rPr sz="900" b="1">
+                <a:solidFill>
+                  <a:srgbClr val="6366F1"/>
+                </a:solidFill>
+                <a:latin typeface="NanumGothic"/>
+                <a:ea typeface="NanumGothic"/>
+                <a:cs typeface="NanumGothic"/>
+              </a:rPr>
+              <a:t>Day 1 · 월</a:t>
+            </a:r>
+            <a:r>
+              <a:rPr sz="900" b="1">
+                <a:solidFill>
+                  <a:srgbClr val="64748B"/>
+                </a:solidFill>
+                <a:latin typeface="NanumGothic"/>
+                <a:ea typeface="NanumGothic"/>
+                <a:cs typeface="NanumGothic"/>
+              </a:rPr>
+              <a:t>   ·   9 / 42</a:t>
             </a:r>
           </a:p>
         </p:txBody>

--- a/slides/day1.pptx
+++ b/slides/day1.pptx
@@ -3978,7 +3978,7 @@
                 <a:ea typeface="NanumGothic"/>
                 <a:cs typeface="NanumGothic"/>
               </a:rPr>
-              <a:t>AI 에이전트와 응용  ·  원광대학교 5일 교육</a:t>
+              <a:t>신약 개발을 위한 AI Agent 특강</a:t>
             </a:r>
           </a:p>
         </p:txBody>
@@ -4845,7 +4845,7 @@
                 <a:ea typeface="NanumGothic"/>
                 <a:cs typeface="NanumGothic"/>
               </a:rPr>
-              <a:t>AI 에이전트와 응용  ·  원광대학교 5일 교육</a:t>
+              <a:t>신약 개발을 위한 AI Agent 특강</a:t>
             </a:r>
           </a:p>
         </p:txBody>
@@ -5712,7 +5712,7 @@
                 <a:ea typeface="NanumGothic"/>
                 <a:cs typeface="NanumGothic"/>
               </a:rPr>
-              <a:t>AI 에이전트와 응용  ·  원광대학교 5일 교육</a:t>
+              <a:t>신약 개발을 위한 AI Agent 특강</a:t>
             </a:r>
           </a:p>
         </p:txBody>
@@ -6717,7 +6717,7 @@
                 <a:ea typeface="NanumGothic"/>
                 <a:cs typeface="NanumGothic"/>
               </a:rPr>
-              <a:t>AI 에이전트와 응용  ·  원광대학교 5일 교육</a:t>
+              <a:t>신약 개발을 위한 AI Agent 특강</a:t>
             </a:r>
           </a:p>
         </p:txBody>
@@ -8235,7 +8235,7 @@
                 <a:ea typeface="NanumGothic"/>
                 <a:cs typeface="NanumGothic"/>
               </a:rPr>
-              <a:t>AI 에이전트와 응용  ·  원광대학교 5일 교육</a:t>
+              <a:t>신약 개발을 위한 AI Agent 특강</a:t>
             </a:r>
           </a:p>
         </p:txBody>
@@ -9240,7 +9240,7 @@
                 <a:ea typeface="NanumGothic"/>
                 <a:cs typeface="NanumGothic"/>
               </a:rPr>
-              <a:t>AI 에이전트와 응용  ·  원광대학교 5일 교육</a:t>
+              <a:t>신약 개발을 위한 AI Agent 특강</a:t>
             </a:r>
           </a:p>
         </p:txBody>
@@ -10107,7 +10107,7 @@
                 <a:ea typeface="NanumGothic"/>
                 <a:cs typeface="NanumGothic"/>
               </a:rPr>
-              <a:t>AI 에이전트와 응용  ·  원광대학교 5일 교육</a:t>
+              <a:t>신약 개발을 위한 AI Agent 특강</a:t>
             </a:r>
           </a:p>
         </p:txBody>
@@ -10974,7 +10974,7 @@
                 <a:ea typeface="NanumGothic"/>
                 <a:cs typeface="NanumGothic"/>
               </a:rPr>
-              <a:t>AI 에이전트와 응용  ·  원광대학교 5일 교육</a:t>
+              <a:t>신약 개발을 위한 AI Agent 특강</a:t>
             </a:r>
           </a:p>
         </p:txBody>
@@ -11841,7 +11841,7 @@
                 <a:ea typeface="NanumGothic"/>
                 <a:cs typeface="NanumGothic"/>
               </a:rPr>
-              <a:t>AI 에이전트와 응용  ·  원광대학교 5일 교육</a:t>
+              <a:t>신약 개발을 위한 AI Agent 특강</a:t>
             </a:r>
           </a:p>
         </p:txBody>
@@ -12846,7 +12846,7 @@
                 <a:ea typeface="NanumGothic"/>
                 <a:cs typeface="NanumGothic"/>
               </a:rPr>
-              <a:t>AI 에이전트와 응용  ·  원광대학교 5일 교육</a:t>
+              <a:t>신약 개발을 위한 AI Agent 특강</a:t>
             </a:r>
           </a:p>
         </p:txBody>
@@ -13851,7 +13851,7 @@
                 <a:ea typeface="NanumGothic"/>
                 <a:cs typeface="NanumGothic"/>
               </a:rPr>
-              <a:t>AI 에이전트와 응용  ·  원광대학교 5일 교육</a:t>
+              <a:t>신약 개발을 위한 AI Agent 특강</a:t>
             </a:r>
           </a:p>
         </p:txBody>
@@ -15123,7 +15123,7 @@
                 <a:ea typeface="NanumGothic"/>
                 <a:cs typeface="NanumGothic"/>
               </a:rPr>
-              <a:t>AI 에이전트와 응용  ·  원광대학교 5일 교육</a:t>
+              <a:t>신약 개발을 위한 AI Agent 특강</a:t>
             </a:r>
           </a:p>
         </p:txBody>
@@ -16363,7 +16363,7 @@
                 <a:ea typeface="NanumGothic"/>
                 <a:cs typeface="NanumGothic"/>
               </a:rPr>
-              <a:t>AI 에이전트와 응용  ·  원광대학교 5일 교육</a:t>
+              <a:t>신약 개발을 위한 AI Agent 특강</a:t>
             </a:r>
           </a:p>
         </p:txBody>
@@ -17126,7 +17126,7 @@
                 <a:ea typeface="NanumGothic"/>
                 <a:cs typeface="NanumGothic"/>
               </a:rPr>
-              <a:t>AI 에이전트와 응용  ·  원광대학교 5일 교육</a:t>
+              <a:t>신약 개발을 위한 AI Agent 특강</a:t>
             </a:r>
           </a:p>
         </p:txBody>
@@ -17889,7 +17889,7 @@
                 <a:ea typeface="NanumGothic"/>
                 <a:cs typeface="NanumGothic"/>
               </a:rPr>
-              <a:t>AI 에이전트와 응용  ·  원광대학교 5일 교육</a:t>
+              <a:t>신약 개발을 위한 AI Agent 특강</a:t>
             </a:r>
           </a:p>
         </p:txBody>
@@ -18652,7 +18652,7 @@
                 <a:ea typeface="NanumGothic"/>
                 <a:cs typeface="NanumGothic"/>
               </a:rPr>
-              <a:t>AI 에이전트와 응용  ·  원광대학교 5일 교육</a:t>
+              <a:t>신약 개발을 위한 AI Agent 특강</a:t>
             </a:r>
           </a:p>
         </p:txBody>
@@ -19657,7 +19657,7 @@
                 <a:ea typeface="NanumGothic"/>
                 <a:cs typeface="NanumGothic"/>
               </a:rPr>
-              <a:t>AI 에이전트와 응용  ·  원광대학교 5일 교육</a:t>
+              <a:t>신약 개발을 위한 AI Agent 특강</a:t>
             </a:r>
           </a:p>
         </p:txBody>
@@ -20662,7 +20662,7 @@
                 <a:ea typeface="NanumGothic"/>
                 <a:cs typeface="NanumGothic"/>
               </a:rPr>
-              <a:t>AI 에이전트와 응용  ·  원광대학교 5일 교육</a:t>
+              <a:t>신약 개발을 위한 AI Agent 특강</a:t>
             </a:r>
           </a:p>
         </p:txBody>
@@ -22180,7 +22180,7 @@
                 <a:ea typeface="NanumGothic"/>
                 <a:cs typeface="NanumGothic"/>
               </a:rPr>
-              <a:t>AI 에이전트와 응용  ·  원광대학교 5일 교육</a:t>
+              <a:t>신약 개발을 위한 AI Agent 특강</a:t>
             </a:r>
           </a:p>
         </p:txBody>
@@ -22943,7 +22943,7 @@
                 <a:ea typeface="NanumGothic"/>
                 <a:cs typeface="NanumGothic"/>
               </a:rPr>
-              <a:t>AI 에이전트와 응용  ·  원광대학교 5일 교육</a:t>
+              <a:t>신약 개발을 위한 AI Agent 특강</a:t>
             </a:r>
           </a:p>
         </p:txBody>
@@ -23810,7 +23810,7 @@
                 <a:ea typeface="NanumGothic"/>
                 <a:cs typeface="NanumGothic"/>
               </a:rPr>
-              <a:t>AI 에이전트와 응용  ·  원광대학교 5일 교육</a:t>
+              <a:t>신약 개발을 위한 AI Agent 특강</a:t>
             </a:r>
           </a:p>
         </p:txBody>
@@ -24933,7 +24933,7 @@
                 <a:ea typeface="NanumGothic"/>
                 <a:cs typeface="NanumGothic"/>
               </a:rPr>
-              <a:t>AI 에이전트와 응용  ·  원광대학교 5일 교육</a:t>
+              <a:t>신약 개발을 위한 AI Agent 특강</a:t>
             </a:r>
           </a:p>
         </p:txBody>
@@ -25938,7 +25938,7 @@
                 <a:ea typeface="NanumGothic"/>
                 <a:cs typeface="NanumGothic"/>
               </a:rPr>
-              <a:t>AI 에이전트와 응용  ·  원광대학교 5일 교육</a:t>
+              <a:t>신약 개발을 위한 AI Agent 특강</a:t>
             </a:r>
           </a:p>
         </p:txBody>
@@ -26943,7 +26943,7 @@
                 <a:ea typeface="NanumGothic"/>
                 <a:cs typeface="NanumGothic"/>
               </a:rPr>
-              <a:t>AI 에이전트와 응용  ·  원광대학교 5일 교육</a:t>
+              <a:t>신약 개발을 위한 AI Agent 특강</a:t>
             </a:r>
           </a:p>
         </p:txBody>
@@ -27948,7 +27948,7 @@
                 <a:ea typeface="NanumGothic"/>
                 <a:cs typeface="NanumGothic"/>
               </a:rPr>
-              <a:t>AI 에이전트와 응용  ·  원광대학교 5일 교육</a:t>
+              <a:t>신약 개발을 위한 AI Agent 특강</a:t>
             </a:r>
           </a:p>
         </p:txBody>
@@ -28711,7 +28711,7 @@
                 <a:ea typeface="NanumGothic"/>
                 <a:cs typeface="NanumGothic"/>
               </a:rPr>
-              <a:t>AI 에이전트와 응용  ·  원광대학교 5일 교육</a:t>
+              <a:t>신약 개발을 위한 AI Agent 특강</a:t>
             </a:r>
           </a:p>
         </p:txBody>
@@ -29474,7 +29474,7 @@
                 <a:ea typeface="NanumGothic"/>
                 <a:cs typeface="NanumGothic"/>
               </a:rPr>
-              <a:t>AI 에이전트와 응용  ·  원광대학교 5일 교육</a:t>
+              <a:t>신약 개발을 위한 AI Agent 특강</a:t>
             </a:r>
           </a:p>
         </p:txBody>
@@ -30237,7 +30237,7 @@
                 <a:ea typeface="NanumGothic"/>
                 <a:cs typeface="NanumGothic"/>
               </a:rPr>
-              <a:t>AI 에이전트와 응용  ·  원광대학교 5일 교육</a:t>
+              <a:t>신약 개발을 위한 AI Agent 특강</a:t>
             </a:r>
           </a:p>
         </p:txBody>
@@ -31000,7 +31000,7 @@
                 <a:ea typeface="NanumGothic"/>
                 <a:cs typeface="NanumGothic"/>
               </a:rPr>
-              <a:t>AI 에이전트와 응용  ·  원광대학교 5일 교육</a:t>
+              <a:t>신약 개발을 위한 AI Agent 특강</a:t>
             </a:r>
           </a:p>
         </p:txBody>
@@ -31867,7 +31867,7 @@
                 <a:ea typeface="NanumGothic"/>
                 <a:cs typeface="NanumGothic"/>
               </a:rPr>
-              <a:t>AI 에이전트와 응용  ·  원광대학교 5일 교육</a:t>
+              <a:t>신약 개발을 위한 AI Agent 특강</a:t>
             </a:r>
           </a:p>
         </p:txBody>
@@ -32954,7 +32954,7 @@
                 <a:ea typeface="NanumGothic"/>
                 <a:cs typeface="NanumGothic"/>
               </a:rPr>
-              <a:t>AI 에이전트와 응용  ·  원광대학교 5일 교육</a:t>
+              <a:t>신약 개발을 위한 AI Agent 특강</a:t>
             </a:r>
           </a:p>
         </p:txBody>
@@ -33959,7 +33959,7 @@
                 <a:ea typeface="NanumGothic"/>
                 <a:cs typeface="NanumGothic"/>
               </a:rPr>
-              <a:t>AI 에이전트와 응용  ·  원광대학교 5일 교육</a:t>
+              <a:t>신약 개발을 위한 AI Agent 특강</a:t>
             </a:r>
           </a:p>
         </p:txBody>
@@ -36472,7 +36472,7 @@
                 <a:ea typeface="NanumGothic"/>
                 <a:cs typeface="NanumGothic"/>
               </a:rPr>
-              <a:t>AI 에이전트와 응용  ·  원광대학교 5일 교육</a:t>
+              <a:t>신약 개발을 위한 AI Agent 특강</a:t>
             </a:r>
           </a:p>
         </p:txBody>
@@ -37339,7 +37339,7 @@
                 <a:ea typeface="NanumGothic"/>
                 <a:cs typeface="NanumGothic"/>
               </a:rPr>
-              <a:t>AI 에이전트와 응용  ·  원광대학교 5일 교육</a:t>
+              <a:t>신약 개발을 위한 AI Agent 특강</a:t>
             </a:r>
           </a:p>
         </p:txBody>
@@ -38206,7 +38206,7 @@
                 <a:ea typeface="NanumGothic"/>
                 <a:cs typeface="NanumGothic"/>
               </a:rPr>
-              <a:t>AI 에이전트와 응용  ·  원광대학교 5일 교육</a:t>
+              <a:t>신약 개발을 위한 AI Agent 특강</a:t>
             </a:r>
           </a:p>
         </p:txBody>
@@ -39015,7 +39015,7 @@
                 <a:ea typeface="NanumGothic"/>
                 <a:cs typeface="NanumGothic"/>
               </a:rPr>
-              <a:t>AI 에이전트와 응용  ·  원광대학교 5일 교육</a:t>
+              <a:t>신약 개발을 위한 AI Agent 특강</a:t>
             </a:r>
           </a:p>
         </p:txBody>
@@ -39778,7 +39778,7 @@
                 <a:ea typeface="NanumGothic"/>
                 <a:cs typeface="NanumGothic"/>
               </a:rPr>
-              <a:t>AI 에이전트와 응용  ·  원광대학교 5일 교육</a:t>
+              <a:t>신약 개발을 위한 AI Agent 특강</a:t>
             </a:r>
           </a:p>
         </p:txBody>
@@ -41574,7 +41574,7 @@
                 <a:ea typeface="NanumGothic"/>
                 <a:cs typeface="NanumGothic"/>
               </a:rPr>
-              <a:t>AI 에이전트와 응용  ·  원광대학교 5일 교육</a:t>
+              <a:t>신약 개발을 위한 AI Agent 특강</a:t>
             </a:r>
           </a:p>
         </p:txBody>
@@ -42441,7 +42441,7 @@
                 <a:ea typeface="NanumGothic"/>
                 <a:cs typeface="NanumGothic"/>
               </a:rPr>
-              <a:t>AI 에이전트와 응용  ·  원광대학교 5일 교육</a:t>
+              <a:t>신약 개발을 위한 AI Agent 특강</a:t>
             </a:r>
           </a:p>
         </p:txBody>
@@ -43308,7 +43308,7 @@
                 <a:ea typeface="NanumGothic"/>
                 <a:cs typeface="NanumGothic"/>
               </a:rPr>
-              <a:t>AI 에이전트와 응용  ·  원광대학교 5일 교육</a:t>
+              <a:t>신약 개발을 위한 AI Agent 특강</a:t>
             </a:r>
           </a:p>
         </p:txBody>

--- a/slides/day1.pptx
+++ b/slides/day1.pptx
@@ -4496,7 +4496,7 @@
                 <a:ea typeface="NanumGothic"/>
                 <a:cs typeface="NanumGothic"/>
               </a:rPr>
-              <a:t>능력(사전학습)과 말귀(정렬)가 합쳐진 순간</a:t>
+              <a:t>방대한 능력을 갖춘 사전학습과 지시를 따르게 하는 정렬이 결합되어 대중화가 이루어진 시점이다.</a:t>
             </a:r>
           </a:p>
         </p:txBody>
@@ -5363,7 +5363,7 @@
                 <a:ea typeface="NanumGothic"/>
                 <a:cs typeface="NanumGothic"/>
               </a:rPr>
-              <a:t>오늘 우리가 쓰는 모델들이 여기</a:t>
+              <a:t>오늘날 우리가 사용하는 모델들이 바로 이 단계에 해당한다.</a:t>
             </a:r>
           </a:p>
         </p:txBody>
@@ -6368,7 +6368,7 @@
                 <a:ea typeface="NanumGothic"/>
                 <a:cs typeface="NanumGothic"/>
               </a:rPr>
-              <a:t>의미를 아는 게 아니라 통계로 '다음 토큰'을 맞히는 것</a:t>
+              <a:t>LLM은 의미를 이해하는 것이 아니라 통계적으로 '다음 토큰'을 예측한다는 점을 기억해야 한다.</a:t>
             </a:r>
           </a:p>
         </p:txBody>
@@ -7886,7 +7886,7 @@
                 <a:ea typeface="NanumGothic"/>
                 <a:cs typeface="NanumGothic"/>
               </a:rPr>
-              <a:t>한 번에 한 토큰씩, 반복해서 생성 (autoregressive) — 이제 각 단계를 하나씩</a:t>
+              <a:t>한 번에 한 토큰씩 예측하여 반복적으로 생성하는 방식(autoregressive)이며, 이어서 각 단계를 차례로 살펴본다.</a:t>
             </a:r>
           </a:p>
         </p:txBody>
@@ -8891,7 +8891,7 @@
                 <a:ea typeface="NanumGothic"/>
                 <a:cs typeface="NanumGothic"/>
               </a:rPr>
-              <a:t>토큰 수가 곧 길이·비용 — 한글이 더 많이 든다</a:t>
+              <a:t>토큰 수가 곧 입력의 길이와 비용을 결정하며, 한글은 영어보다 더 많은 토큰을 사용한다.</a:t>
             </a:r>
           </a:p>
         </p:txBody>
@@ -9758,7 +9758,7 @@
                 <a:ea typeface="NanumGothic"/>
                 <a:cs typeface="NanumGothic"/>
               </a:rPr>
-              <a:t>모델이 아는 건 사실이 아니라 '그럴듯함' — 환각의 뿌리</a:t>
+              <a:t>모델이 다루는 것은 사실이 아니라 '그럴듯함'이며, 이것이 환각이 발생하는 근본 원인이다.</a:t>
             </a:r>
           </a:p>
         </p:txBody>
@@ -10625,7 +10625,7 @@
                 <a:ea typeface="NanumGothic"/>
                 <a:cs typeface="NanumGothic"/>
               </a:rPr>
-              <a:t>같은 질문에 매번 다른 답이 나오는 이유</a:t>
+              <a:t>동일한 질문에도 매번 다른 답이 나오는 이유가 바로 이 확률적 선택에 있다.</a:t>
             </a:r>
           </a:p>
         </p:txBody>
@@ -11492,7 +11492,7 @@
                 <a:ea typeface="NanumGothic"/>
                 <a:cs typeface="NanumGothic"/>
               </a:rPr>
-              <a:t>그래서 긴 출력은 중간 점검·검증이 중요</a:t>
+              <a:t>따라서 출력이 길어질수록 중간 점검과 검증이 더욱 중요해진다.</a:t>
             </a:r>
           </a:p>
         </p:txBody>
@@ -12497,7 +12497,7 @@
                 <a:ea typeface="NanumGothic"/>
                 <a:cs typeface="NanumGothic"/>
               </a:rPr>
-              <a:t>학습 시점·편향이 그대로 한계로 남는다</a:t>
+              <a:t>학습이 이루어진 시점과 데이터의 편향이 모델의 한계로 그대로 남는다.</a:t>
             </a:r>
           </a:p>
         </p:txBody>
@@ -13502,7 +13502,7 @@
                 <a:ea typeface="NanumGothic"/>
                 <a:cs typeface="NanumGothic"/>
               </a:rPr>
-              <a:t>능력은 같아도 정렬이 '지시 이행'을 만든다</a:t>
+              <a:t>기본 능력이 같더라도 정렬 과정이 '지시를 따르는 능력'을 만들어 낸다.</a:t>
             </a:r>
           </a:p>
         </p:txBody>
@@ -16014,7 +16014,7 @@
                 <a:ea typeface="NanumGothic"/>
                 <a:cs typeface="NanumGothic"/>
               </a:rPr>
-              <a:t>이제 각 단계를 하나씩</a:t>
+              <a:t>이어지는 슬라이드에서 정렬의 세 단계를 차례로 살펴본다.</a:t>
             </a:r>
           </a:p>
         </p:txBody>
@@ -19308,7 +19308,7 @@
                 <a:ea typeface="NanumGothic"/>
                 <a:cs typeface="NanumGothic"/>
               </a:rPr>
-              <a:t>벤치마크 수치는 빠르게 바뀜 — 강의 주에 재확인</a:t>
+              <a:t>벤치마크 수치는 빠르게 갱신되므로 강의 시점을 기준으로 다시 확인하는 것이 좋다.</a:t>
             </a:r>
           </a:p>
         </p:txBody>
@@ -20313,7 +20313,7 @@
                 <a:ea typeface="NanumGothic"/>
                 <a:cs typeface="NanumGothic"/>
               </a:rPr>
-              <a:t>키워드가 아니라 '의미'로 찾는다</a:t>
+              <a:t>임베딩은 키워드의 일치가 아니라 '의미'의 유사성으로 자료를 찾는다.</a:t>
             </a:r>
           </a:p>
         </p:txBody>
@@ -21831,7 +21831,7 @@
                 <a:ea typeface="NanumGothic"/>
                 <a:cs typeface="NanumGothic"/>
               </a:rPr>
-              <a:t>외부 지식을 붙여 환각↓·최신성↑ — 이제 각 단계를 하나씩</a:t>
+              <a:t>외부 지식을 결합해 환각을 줄이고 최신성을 높이는 방식이며, 이어서 각 단계를 차례로 살펴본다.</a:t>
             </a:r>
           </a:p>
         </p:txBody>
@@ -23461,7 +23461,7 @@
                 <a:ea typeface="NanumGothic"/>
                 <a:cs typeface="NanumGothic"/>
               </a:rPr>
-              <a:t>Day 1 임베딩이 여기서 쓰인다</a:t>
+              <a:t>오늘 학습한 임베딩이 바로 이 검색 단계에서 활용된다.</a:t>
             </a:r>
           </a:p>
         </p:txBody>
@@ -25589,7 +25589,7 @@
                 <a:ea typeface="NanumGothic"/>
                 <a:cs typeface="NanumGothic"/>
               </a:rPr>
-              <a:t>리서치 에이전트의 핵심 패턴</a:t>
+              <a:t>근거에 기반해 답하는 이 방식이 리서치 에이전트의 핵심 패턴이다.</a:t>
             </a:r>
           </a:p>
         </p:txBody>
@@ -26594,7 +26594,7 @@
                 <a:ea typeface="NanumGothic"/>
                 <a:cs typeface="NanumGothic"/>
               </a:rPr>
-              <a:t>같은 모델도 프롬프트가 출력을 좌우한다</a:t>
+              <a:t>같은 모델이라도 프롬프트의 구성이 출력의 품질을 좌우한다.</a:t>
             </a:r>
           </a:p>
         </p:txBody>
@@ -27599,7 +27599,7 @@
                 <a:ea typeface="NanumGothic"/>
                 <a:cs typeface="NanumGothic"/>
               </a:rPr>
-              <a:t>이제 각 기법을 하나씩</a:t>
+              <a:t>이어지는 슬라이드에서 세 가지 기법을 하나씩 살펴본다.</a:t>
             </a:r>
           </a:p>
         </p:txBody>
@@ -31518,7 +31518,7 @@
                 <a:ea typeface="NanumGothic"/>
                 <a:cs typeface="NanumGothic"/>
               </a:rPr>
-              <a:t>현재 Claude 최대 1M 토큰(≈책 여러 권) — 긴 문서·코드 통째 분석 (단 lost in the middle 주의)</a:t>
+              <a:t>현재 Claude는 최대 100만 토큰(책 여러 권 분량)을 처리하여 긴 문서나 코드를 통째로 분석할 수 있으나, 입력이 길수록 중간 내용을 놓칠 수 있음에 유의해야 한다.</a:t>
             </a:r>
           </a:p>
         </p:txBody>
@@ -33610,7 +33610,7 @@
                 <a:ea typeface="NanumGothic"/>
                 <a:cs typeface="NanumGothic"/>
               </a:rPr>
-              <a:t>그럴듯함 ≠ 사실 — 중요한 내용은 반드시 교차확인</a:t>
+              <a:t>그럴듯함은 사실과 다르므로, 중요한 내용은 반드시 출처로 교차확인해야 한다.</a:t>
             </a:r>
           </a:p>
         </p:txBody>
@@ -36990,7 +36990,7 @@
                 <a:ea typeface="NanumGothic"/>
                 <a:cs typeface="NanumGothic"/>
               </a:rPr>
-              <a:t>참고 가격(~2026.6, 1M토큰 입력/출력): Opus $5/$25 · Sonnet $3/$15 · Haiku $1/$5 (변동)</a:t>
+              <a:t>참고로 2026년 6월 기준 100만 토큰당 가격은 Opus가 입력 5달러·출력 25달러, Sonnet이 3·15달러, Haiku가 1·5달러이며, 가격은 변동될 수 있다.</a:t>
             </a:r>
           </a:p>
         </p:txBody>
@@ -37857,7 +37857,7 @@
                 <a:ea typeface="NanumGothic"/>
                 <a:cs typeface="NanumGothic"/>
               </a:rPr>
-              <a:t>오늘의 임베딩·RAG가 리서치 에이전트의 토대다</a:t>
+              <a:t>오늘 학습한 임베딩과 RAG가 리서치 에이전트의 토대가 된다.</a:t>
             </a:r>
           </a:p>
         </p:txBody>
@@ -41225,7 +41225,7 @@
                 <a:ea typeface="NanumGothic"/>
                 <a:cs typeface="NanumGothic"/>
               </a:rPr>
-              <a:t>초기 통계(n-gram) → 신경망 → Transformer로 도약 — 이제 각 단계를 하나씩</a:t>
+              <a:t>초기의 통계 기반 모델에서 신경망을 거쳐 Transformer로 도약한 흐름이며, 이어지는 슬라이드에서 각 단계를 차례로 살펴본다.</a:t>
             </a:r>
           </a:p>
         </p:txBody>
@@ -42092,7 +42092,7 @@
                 <a:ea typeface="NanumGothic"/>
                 <a:cs typeface="NanumGothic"/>
               </a:rPr>
-              <a:t>오늘 배울 '임베딩'의 출발점</a:t>
+              <a:t>오늘 학습할 '임베딩' 개념이 바로 이 시기에서 출발한다.</a:t>
             </a:r>
           </a:p>
         </p:txBody>
@@ -42959,7 +42959,7 @@
                 <a:ea typeface="NanumGothic"/>
                 <a:cs typeface="NanumGothic"/>
               </a:rPr>
-              <a:t>지금의 GPT·Claude 모두 이 구조 위에</a:t>
+              <a:t>현재의 GPT와 Claude를 비롯한 주요 모델은 모두 이 Transformer 구조 위에 만들어져 있다.</a:t>
             </a:r>
           </a:p>
         </p:txBody>
@@ -43826,7 +43826,7 @@
                 <a:ea typeface="NanumGothic"/>
                 <a:cs typeface="NanumGothic"/>
               </a:rPr>
-              <a:t>'사전학습'이라는 오늘의 핵심 개념이 자리잡음</a:t>
+              <a:t>오늘의 핵심 개념인 '사전학습'이 이 시기에 자리 잡았다.</a:t>
             </a:r>
           </a:p>
         </p:txBody>

--- a/slides/day1.pptx
+++ b/slides/day1.pptx
@@ -15632,7 +15632,7 @@
                 <a:ea typeface="NanumGothic"/>
                 <a:cs typeface="NanumGothic"/>
               </a:rPr>
-              <a:t>사람 선호로 '점수기' 학습</a:t>
+              <a:t>사람 선호로 '답 평가 모델' 학습</a:t>
             </a:r>
           </a:p>
         </p:txBody>
@@ -15910,7 +15910,7 @@
                 <a:ea typeface="NanumGothic"/>
                 <a:cs typeface="NanumGothic"/>
               </a:rPr>
-              <a:t>점수기로 좋은 답 쪽으로</a:t>
+              <a:t>보상 모델 점수가 높은 답 쪽으로</a:t>
             </a:r>
           </a:p>
         </p:txBody>
@@ -17035,7 +17035,7 @@
                 <a:ea typeface="NanumSquare"/>
                 <a:cs typeface="NanumSquare"/>
               </a:rPr>
-              <a:t>보상 모델 — '좋은 답' 점수기</a:t>
+              <a:t>보상 모델 — 답을 평가하는 모델</a:t>
             </a:r>
           </a:p>
         </p:txBody>
@@ -17264,7 +17264,7 @@
                 <a:ea typeface="NanumGothic"/>
                 <a:cs typeface="NanumGothic"/>
               </a:rPr>
-              <a:t>한 질문에 여러 답을 만들고, 사람이 좋은 순서로 순위</a:t>
+              <a:t>한 질문에 여러 답을 만들고, 사람이 좋은 순서로 순위를 매김</a:t>
             </a:r>
           </a:p>
         </p:txBody>
@@ -17402,7 +17402,7 @@
                 <a:ea typeface="NanumGothic"/>
                 <a:cs typeface="NanumGothic"/>
               </a:rPr>
-              <a:t>그 선호를 흉내내는 '점수 매기는 모델'을 따로 학습</a:t>
+              <a:t>그 선호를 학습해 답에 점수를 주는 '보상 모델'을 따로 만든다</a:t>
             </a:r>
           </a:p>
         </p:txBody>
@@ -17540,7 +17540,7 @@
                 <a:ea typeface="NanumGothic"/>
                 <a:cs typeface="NanumGothic"/>
               </a:rPr>
-              <a:t>사람이 매번 평가할 수 없으니 자동 채점기를 만든다</a:t>
+              <a:t>사람이 매번 평가할 수 없으니, 답을 자동으로 평가하는 모델이 필요</a:t>
             </a:r>
           </a:p>
         </p:txBody>

--- a/slides/day1.pptx
+++ b/slides/day1.pptx
@@ -47,6 +47,7 @@
     <p:sldId id="295" r:id="rId46"/>
     <p:sldId id="296" r:id="rId47"/>
     <p:sldId id="297" r:id="rId48"/>
+    <p:sldId id="298" r:id="rId49"/>
   </p:sldIdLst>
   <p:sldSz cx="12191695" cy="6858000" type="screen4x3"/>
   <p:notesSz cx="6858000" cy="9144000"/>
@@ -3687,7 +3688,7 @@
                 <a:ea typeface="NanumGothic"/>
                 <a:cs typeface="NanumGothic"/>
               </a:rPr>
-              <a:t>   ·   1 / 42</a:t>
+              <a:t>   ·   1 / 43</a:t>
             </a:r>
           </a:p>
         </p:txBody>
@@ -4554,7 +4555,7 @@
                 <a:ea typeface="NanumGothic"/>
                 <a:cs typeface="NanumGothic"/>
               </a:rPr>
-              <a:t>   ·   10 / 42</a:t>
+              <a:t>   ·   10 / 43</a:t>
             </a:r>
           </a:p>
         </p:txBody>
@@ -5421,7 +5422,7 @@
                 <a:ea typeface="NanumGothic"/>
                 <a:cs typeface="NanumGothic"/>
               </a:rPr>
-              <a:t>   ·   11 / 42</a:t>
+              <a:t>   ·   11 / 43</a:t>
             </a:r>
           </a:p>
         </p:txBody>
@@ -6426,7 +6427,7 @@
                 <a:ea typeface="NanumGothic"/>
                 <a:cs typeface="NanumGothic"/>
               </a:rPr>
-              <a:t>   ·   12 / 42</a:t>
+              <a:t>   ·   12 / 43</a:t>
             </a:r>
           </a:p>
         </p:txBody>
@@ -7944,7 +7945,7 @@
                 <a:ea typeface="NanumGothic"/>
                 <a:cs typeface="NanumGothic"/>
               </a:rPr>
-              <a:t>   ·   13 / 42</a:t>
+              <a:t>   ·   13 / 43</a:t>
             </a:r>
           </a:p>
         </p:txBody>
@@ -8949,7 +8950,7 @@
                 <a:ea typeface="NanumGothic"/>
                 <a:cs typeface="NanumGothic"/>
               </a:rPr>
-              <a:t>   ·   14 / 42</a:t>
+              <a:t>   ·   14 / 43</a:t>
             </a:r>
           </a:p>
         </p:txBody>
@@ -9816,7 +9817,7 @@
                 <a:ea typeface="NanumGothic"/>
                 <a:cs typeface="NanumGothic"/>
               </a:rPr>
-              <a:t>   ·   15 / 42</a:t>
+              <a:t>   ·   15 / 43</a:t>
             </a:r>
           </a:p>
         </p:txBody>
@@ -10683,7 +10684,7 @@
                 <a:ea typeface="NanumGothic"/>
                 <a:cs typeface="NanumGothic"/>
               </a:rPr>
-              <a:t>   ·   16 / 42</a:t>
+              <a:t>   ·   16 / 43</a:t>
             </a:r>
           </a:p>
         </p:txBody>
@@ -11550,7 +11551,7 @@
                 <a:ea typeface="NanumGothic"/>
                 <a:cs typeface="NanumGothic"/>
               </a:rPr>
-              <a:t>   ·   17 / 42</a:t>
+              <a:t>   ·   17 / 43</a:t>
             </a:r>
           </a:p>
         </p:txBody>
@@ -12555,7 +12556,7 @@
                 <a:ea typeface="NanumGothic"/>
                 <a:cs typeface="NanumGothic"/>
               </a:rPr>
-              <a:t>   ·   18 / 42</a:t>
+              <a:t>   ·   18 / 43</a:t>
             </a:r>
           </a:p>
         </p:txBody>
@@ -13560,7 +13561,7 @@
                 <a:ea typeface="NanumGothic"/>
                 <a:cs typeface="NanumGothic"/>
               </a:rPr>
-              <a:t>   ·   19 / 42</a:t>
+              <a:t>   ·   19 / 43</a:t>
             </a:r>
           </a:p>
         </p:txBody>
@@ -14832,7 +14833,7 @@
                 <a:ea typeface="NanumGothic"/>
                 <a:cs typeface="NanumGothic"/>
               </a:rPr>
-              <a:t>   ·   2 / 42</a:t>
+              <a:t>   ·   2 / 43</a:t>
             </a:r>
           </a:p>
         </p:txBody>
@@ -16072,7 +16073,7 @@
                 <a:ea typeface="NanumGothic"/>
                 <a:cs typeface="NanumGothic"/>
               </a:rPr>
-              <a:t>   ·   20 / 42</a:t>
+              <a:t>   ·   20 / 43</a:t>
             </a:r>
           </a:p>
         </p:txBody>
@@ -16835,7 +16836,7 @@
                 <a:ea typeface="NanumGothic"/>
                 <a:cs typeface="NanumGothic"/>
               </a:rPr>
-              <a:t>   ·   21 / 42</a:t>
+              <a:t>   ·   21 / 43</a:t>
             </a:r>
           </a:p>
         </p:txBody>
@@ -17598,7 +17599,7 @@
                 <a:ea typeface="NanumGothic"/>
                 <a:cs typeface="NanumGothic"/>
               </a:rPr>
-              <a:t>   ·   22 / 42</a:t>
+              <a:t>   ·   22 / 43</a:t>
             </a:r>
           </a:p>
         </p:txBody>
@@ -18361,7 +18362,7 @@
                 <a:ea typeface="NanumGothic"/>
                 <a:cs typeface="NanumGothic"/>
               </a:rPr>
-              <a:t>   ·   23 / 42</a:t>
+              <a:t>   ·   23 / 43</a:t>
             </a:r>
           </a:p>
         </p:txBody>
@@ -18514,7 +18515,7 @@
                 <a:ea typeface="NanumGothic"/>
                 <a:cs typeface="NanumGothic"/>
               </a:rPr>
-              <a:t>추론 모델</a:t>
+              <a:t>자원 비교</a:t>
             </a:r>
           </a:p>
         </p:txBody>
@@ -18561,7 +18562,7 @@
                 <a:ea typeface="NanumSquare"/>
                 <a:cs typeface="NanumSquare"/>
               </a:rPr>
-              <a:t>추론(사고)하는 모델</a:t>
+              <a:t>사전학습 vs 정렬 — 무엇이 얼마나 드나</a:t>
             </a:r>
           </a:p>
         </p:txBody>
@@ -18659,16 +18660,62 @@
       </p:sp>
       <p:sp>
         <p:nvSpPr>
-          <p:cNvPr id="8" name="Oval 7"/>
+          <p:cNvPr id="8" name="Rounded Rectangle 7"/>
           <p:cNvSpPr/>
           <p:nvPr/>
         </p:nvSpPr>
         <p:spPr>
           <a:xfrm>
-            <a:off x="548640" y="1911096"/>
-            <a:ext cx="146304" cy="146304"/>
-          </a:xfrm>
-          <a:prstGeom prst="ellipse">
+            <a:off x="502920" y="1828800"/>
+            <a:ext cx="5440680" cy="3520440"/>
+          </a:xfrm>
+          <a:prstGeom prst="roundRect">
+            <a:avLst/>
+          </a:prstGeom>
+          <a:solidFill>
+            <a:srgbClr val="F8FAFC"/>
+          </a:solidFill>
+          <a:ln w="12700">
+            <a:solidFill>
+              <a:srgbClr val="E2E8F0"/>
+            </a:solidFill>
+          </a:ln>
+          <a:effectLst/>
+        </p:spPr>
+        <p:style>
+          <a:lnRef idx="1">
+            <a:schemeClr val="accent1"/>
+          </a:lnRef>
+          <a:fillRef idx="3">
+            <a:schemeClr val="accent1"/>
+          </a:fillRef>
+          <a:effectRef idx="2">
+            <a:schemeClr val="accent1"/>
+          </a:effectRef>
+          <a:fontRef idx="minor">
+            <a:schemeClr val="lt1"/>
+          </a:fontRef>
+        </p:style>
+        <p:txBody>
+          <a:bodyPr rtlCol="0" anchor="ctr"/>
+          <a:lstStyle/>
+          <a:p>
+            <a:pPr algn="ctr"/>
+          </a:p>
+        </p:txBody>
+      </p:sp>
+      <p:sp>
+        <p:nvSpPr>
+          <p:cNvPr id="9" name="Rounded Rectangle 8"/>
+          <p:cNvSpPr/>
+          <p:nvPr/>
+        </p:nvSpPr>
+        <p:spPr>
+          <a:xfrm>
+            <a:off x="502920" y="1828800"/>
+            <a:ext cx="5440680" cy="640080"/>
+          </a:xfrm>
+          <a:prstGeom prst="roundRect">
             <a:avLst/>
           </a:prstGeom>
           <a:solidFill>
@@ -18703,14 +18750,61 @@
       </p:sp>
       <p:sp>
         <p:nvSpPr>
-          <p:cNvPr id="9" name="TextBox 8"/>
-          <p:cNvSpPr txBox="1"/>
-          <p:nvPr/>
-        </p:nvSpPr>
-        <p:spPr>
-          <a:xfrm>
-            <a:off x="868680" y="1828800"/>
-            <a:ext cx="10607040" cy="457200"/>
+          <p:cNvPr id="10" name="TextBox 9"/>
+          <p:cNvSpPr txBox="1"/>
+          <p:nvPr/>
+        </p:nvSpPr>
+        <p:spPr>
+          <a:xfrm>
+            <a:off x="777240" y="1828800"/>
+            <a:ext cx="4937760" cy="640080"/>
+          </a:xfrm>
+          <a:prstGeom prst="rect">
+            <a:avLst/>
+          </a:prstGeom>
+          <a:noFill/>
+        </p:spPr>
+        <p:txBody>
+          <a:bodyPr wrap="square" anchor="ctr" lIns="0" rIns="0" tIns="0" bIns="0">
+            <a:spAutoFit/>
+          </a:bodyPr>
+          <a:lstStyle/>
+          <a:p>
+            <a:pPr algn="l">
+              <a:lnSpc>
+                <a:spcPct val="100000"/>
+              </a:lnSpc>
+              <a:spcBef>
+                <a:spcPts val="0"/>
+              </a:spcBef>
+              <a:spcAft>
+                <a:spcPts val="600"/>
+              </a:spcAft>
+            </a:pPr>
+            <a:r>
+              <a:rPr sz="1600" b="1">
+                <a:solidFill>
+                  <a:srgbClr val="FFFFFF"/>
+                </a:solidFill>
+                <a:latin typeface="NanumSquare"/>
+                <a:ea typeface="NanumSquare"/>
+                <a:cs typeface="NanumSquare"/>
+              </a:rPr>
+              <a:t>사전학습 (지능)</a:t>
+            </a:r>
+          </a:p>
+        </p:txBody>
+      </p:sp>
+      <p:sp>
+        <p:nvSpPr>
+          <p:cNvPr id="11" name="TextBox 10"/>
+          <p:cNvSpPr txBox="1"/>
+          <p:nvPr/>
+        </p:nvSpPr>
+        <p:spPr>
+          <a:xfrm>
+            <a:off x="822960" y="2697480"/>
+            <a:ext cx="4846320" cy="548640"/>
           </a:xfrm>
           <a:prstGeom prst="rect">
             <a:avLst/>
@@ -18735,7 +18829,18 @@
               </a:spcAft>
             </a:pPr>
             <a:r>
-              <a:rPr sz="1600" b="1">
+              <a:rPr sz="1400" b="1">
+                <a:solidFill>
+                  <a:srgbClr val="6366F1"/>
+                </a:solidFill>
+                <a:latin typeface="NanumGothic"/>
+                <a:ea typeface="NanumGothic"/>
+                <a:cs typeface="NanumGothic"/>
+              </a:rPr>
+              <a:t>•  </a:t>
+            </a:r>
+            <a:r>
+              <a:rPr sz="1400" b="0">
                 <a:solidFill>
                   <a:srgbClr val="0F172A"/>
                 </a:solidFill>
@@ -18743,21 +18848,21 @@
                 <a:ea typeface="NanumGothic"/>
                 <a:cs typeface="NanumGothic"/>
               </a:rPr>
-              <a:t>일반 생성 vs 추론</a:t>
-            </a:r>
-          </a:p>
-        </p:txBody>
-      </p:sp>
-      <p:sp>
-        <p:nvSpPr>
-          <p:cNvPr id="10" name="TextBox 9"/>
-          <p:cNvSpPr txBox="1"/>
-          <p:nvPr/>
-        </p:nvSpPr>
-        <p:spPr>
-          <a:xfrm>
-            <a:off x="868680" y="2212848"/>
-            <a:ext cx="10607040" cy="457200"/>
+              <a:t>데이터: 약 15.6조 토큰 (Llama 3.1, 공개)</a:t>
+            </a:r>
+          </a:p>
+        </p:txBody>
+      </p:sp>
+      <p:sp>
+        <p:nvSpPr>
+          <p:cNvPr id="12" name="TextBox 11"/>
+          <p:cNvSpPr txBox="1"/>
+          <p:nvPr/>
+        </p:nvSpPr>
+        <p:spPr>
+          <a:xfrm>
+            <a:off x="822960" y="3264408"/>
+            <a:ext cx="4846320" cy="548640"/>
           </a:xfrm>
           <a:prstGeom prst="rect">
             <a:avLst/>
@@ -18782,35 +18887,208 @@
               </a:spcAft>
             </a:pPr>
             <a:r>
-              <a:rPr sz="1300" b="0">
-                <a:solidFill>
-                  <a:srgbClr val="64748B"/>
-                </a:solidFill>
-                <a:latin typeface="NanumGothic"/>
-                <a:ea typeface="NanumGothic"/>
-                <a:cs typeface="NanumGothic"/>
-              </a:rPr>
-              <a:t>바로 답하지 않고, 단계적으로 '생각'한 뒤 답한다</a:t>
-            </a:r>
-          </a:p>
-        </p:txBody>
-      </p:sp>
-      <p:sp>
-        <p:nvSpPr>
-          <p:cNvPr id="11" name="Oval 10"/>
+              <a:rPr sz="1400" b="1">
+                <a:solidFill>
+                  <a:srgbClr val="6366F1"/>
+                </a:solidFill>
+                <a:latin typeface="NanumGothic"/>
+                <a:ea typeface="NanumGothic"/>
+                <a:cs typeface="NanumGothic"/>
+              </a:rPr>
+              <a:t>•  </a:t>
+            </a:r>
+            <a:r>
+              <a:rPr sz="1400" b="0">
+                <a:solidFill>
+                  <a:srgbClr val="0F172A"/>
+                </a:solidFill>
+                <a:latin typeface="NanumGothic"/>
+                <a:ea typeface="NanumGothic"/>
+                <a:cs typeface="NanumGothic"/>
+              </a:rPr>
+              <a:t>컴퓨팅: H100 16,000여 개 · 3.8e25 FLOPs (공개)</a:t>
+            </a:r>
+          </a:p>
+        </p:txBody>
+      </p:sp>
+      <p:sp>
+        <p:nvSpPr>
+          <p:cNvPr id="13" name="TextBox 12"/>
+          <p:cNvSpPr txBox="1"/>
+          <p:nvPr/>
+        </p:nvSpPr>
+        <p:spPr>
+          <a:xfrm>
+            <a:off x="822960" y="3831336"/>
+            <a:ext cx="4846320" cy="548640"/>
+          </a:xfrm>
+          <a:prstGeom prst="rect">
+            <a:avLst/>
+          </a:prstGeom>
+          <a:noFill/>
+        </p:spPr>
+        <p:txBody>
+          <a:bodyPr wrap="square" anchor="t" lIns="0" rIns="0" tIns="0" bIns="0">
+            <a:spAutoFit/>
+          </a:bodyPr>
+          <a:lstStyle/>
+          <a:p>
+            <a:pPr algn="l">
+              <a:lnSpc>
+                <a:spcPct val="100000"/>
+              </a:lnSpc>
+              <a:spcBef>
+                <a:spcPts val="0"/>
+              </a:spcBef>
+              <a:spcAft>
+                <a:spcPts val="600"/>
+              </a:spcAft>
+            </a:pPr>
+            <a:r>
+              <a:rPr sz="1400" b="1">
+                <a:solidFill>
+                  <a:srgbClr val="6366F1"/>
+                </a:solidFill>
+                <a:latin typeface="NanumGothic"/>
+                <a:ea typeface="NanumGothic"/>
+                <a:cs typeface="NanumGothic"/>
+              </a:rPr>
+              <a:t>•  </a:t>
+            </a:r>
+            <a:r>
+              <a:rPr sz="1400" b="0">
+                <a:solidFill>
+                  <a:srgbClr val="0F172A"/>
+                </a:solidFill>
+                <a:latin typeface="NanumGothic"/>
+                <a:ea typeface="NanumGothic"/>
+                <a:cs typeface="NanumGothic"/>
+              </a:rPr>
+              <a:t>비용: 약 $78M~191M, 2023 최전선 (추정)</a:t>
+            </a:r>
+          </a:p>
+        </p:txBody>
+      </p:sp>
+      <p:sp>
+        <p:nvSpPr>
+          <p:cNvPr id="14" name="TextBox 13"/>
+          <p:cNvSpPr txBox="1"/>
+          <p:nvPr/>
+        </p:nvSpPr>
+        <p:spPr>
+          <a:xfrm>
+            <a:off x="822960" y="4398264"/>
+            <a:ext cx="4846320" cy="548640"/>
+          </a:xfrm>
+          <a:prstGeom prst="rect">
+            <a:avLst/>
+          </a:prstGeom>
+          <a:noFill/>
+        </p:spPr>
+        <p:txBody>
+          <a:bodyPr wrap="square" anchor="t" lIns="0" rIns="0" tIns="0" bIns="0">
+            <a:spAutoFit/>
+          </a:bodyPr>
+          <a:lstStyle/>
+          <a:p>
+            <a:pPr algn="l">
+              <a:lnSpc>
+                <a:spcPct val="100000"/>
+              </a:lnSpc>
+              <a:spcBef>
+                <a:spcPts val="0"/>
+              </a:spcBef>
+              <a:spcAft>
+                <a:spcPts val="600"/>
+              </a:spcAft>
+            </a:pPr>
+            <a:r>
+              <a:rPr sz="1400" b="1">
+                <a:solidFill>
+                  <a:srgbClr val="6366F1"/>
+                </a:solidFill>
+                <a:latin typeface="NanumGothic"/>
+                <a:ea typeface="NanumGothic"/>
+                <a:cs typeface="NanumGothic"/>
+              </a:rPr>
+              <a:t>•  </a:t>
+            </a:r>
+            <a:r>
+              <a:rPr sz="1400" b="0">
+                <a:solidFill>
+                  <a:srgbClr val="0F172A"/>
+                </a:solidFill>
+                <a:latin typeface="NanumGothic"/>
+                <a:ea typeface="NanumGothic"/>
+                <a:cs typeface="NanumGothic"/>
+              </a:rPr>
+              <a:t>GPT-4: '1억 달러 이상' (Altman, 2023)</a:t>
+            </a:r>
+          </a:p>
+        </p:txBody>
+      </p:sp>
+      <p:sp>
+        <p:nvSpPr>
+          <p:cNvPr id="15" name="Rounded Rectangle 14"/>
           <p:cNvSpPr/>
           <p:nvPr/>
         </p:nvSpPr>
         <p:spPr>
           <a:xfrm>
-            <a:off x="548640" y="2779776"/>
-            <a:ext cx="146304" cy="146304"/>
-          </a:xfrm>
-          <a:prstGeom prst="ellipse">
+            <a:off x="6172200" y="1828800"/>
+            <a:ext cx="5440680" cy="3520440"/>
+          </a:xfrm>
+          <a:prstGeom prst="roundRect">
             <a:avLst/>
           </a:prstGeom>
           <a:solidFill>
-            <a:srgbClr val="6366F1"/>
+            <a:srgbClr val="F8FAFC"/>
+          </a:solidFill>
+          <a:ln w="12700">
+            <a:solidFill>
+              <a:srgbClr val="E2E8F0"/>
+            </a:solidFill>
+          </a:ln>
+          <a:effectLst/>
+        </p:spPr>
+        <p:style>
+          <a:lnRef idx="1">
+            <a:schemeClr val="accent1"/>
+          </a:lnRef>
+          <a:fillRef idx="3">
+            <a:schemeClr val="accent1"/>
+          </a:fillRef>
+          <a:effectRef idx="2">
+            <a:schemeClr val="accent1"/>
+          </a:effectRef>
+          <a:fontRef idx="minor">
+            <a:schemeClr val="lt1"/>
+          </a:fontRef>
+        </p:style>
+        <p:txBody>
+          <a:bodyPr rtlCol="0" anchor="ctr"/>
+          <a:lstStyle/>
+          <a:p>
+            <a:pPr algn="ctr"/>
+          </a:p>
+        </p:txBody>
+      </p:sp>
+      <p:sp>
+        <p:nvSpPr>
+          <p:cNvPr id="16" name="Rounded Rectangle 15"/>
+          <p:cNvSpPr/>
+          <p:nvPr/>
+        </p:nvSpPr>
+        <p:spPr>
+          <a:xfrm>
+            <a:off x="6172200" y="1828800"/>
+            <a:ext cx="5440680" cy="640080"/>
+          </a:xfrm>
+          <a:prstGeom prst="roundRect">
+            <a:avLst/>
+          </a:prstGeom>
+          <a:solidFill>
+            <a:srgbClr val="12203C"/>
           </a:solidFill>
           <a:ln>
             <a:noFill/>
@@ -18841,14 +19119,61 @@
       </p:sp>
       <p:sp>
         <p:nvSpPr>
-          <p:cNvPr id="12" name="TextBox 11"/>
-          <p:cNvSpPr txBox="1"/>
-          <p:nvPr/>
-        </p:nvSpPr>
-        <p:spPr>
-          <a:xfrm>
-            <a:off x="868680" y="2697480"/>
-            <a:ext cx="10607040" cy="457200"/>
+          <p:cNvPr id="17" name="TextBox 16"/>
+          <p:cNvSpPr txBox="1"/>
+          <p:nvPr/>
+        </p:nvSpPr>
+        <p:spPr>
+          <a:xfrm>
+            <a:off x="6446520" y="1828800"/>
+            <a:ext cx="4937760" cy="640080"/>
+          </a:xfrm>
+          <a:prstGeom prst="rect">
+            <a:avLst/>
+          </a:prstGeom>
+          <a:noFill/>
+        </p:spPr>
+        <p:txBody>
+          <a:bodyPr wrap="square" anchor="ctr" lIns="0" rIns="0" tIns="0" bIns="0">
+            <a:spAutoFit/>
+          </a:bodyPr>
+          <a:lstStyle/>
+          <a:p>
+            <a:pPr algn="l">
+              <a:lnSpc>
+                <a:spcPct val="100000"/>
+              </a:lnSpc>
+              <a:spcBef>
+                <a:spcPts val="0"/>
+              </a:spcBef>
+              <a:spcAft>
+                <a:spcPts val="600"/>
+              </a:spcAft>
+            </a:pPr>
+            <a:r>
+              <a:rPr sz="1600" b="1">
+                <a:solidFill>
+                  <a:srgbClr val="FFFFFF"/>
+                </a:solidFill>
+                <a:latin typeface="NanumSquare"/>
+                <a:ea typeface="NanumSquare"/>
+                <a:cs typeface="NanumSquare"/>
+              </a:rPr>
+              <a:t>정렬 (행동)</a:t>
+            </a:r>
+          </a:p>
+        </p:txBody>
+      </p:sp>
+      <p:sp>
+        <p:nvSpPr>
+          <p:cNvPr id="18" name="TextBox 17"/>
+          <p:cNvSpPr txBox="1"/>
+          <p:nvPr/>
+        </p:nvSpPr>
+        <p:spPr>
+          <a:xfrm>
+            <a:off x="6492240" y="2697480"/>
+            <a:ext cx="4846320" cy="548640"/>
           </a:xfrm>
           <a:prstGeom prst="rect">
             <a:avLst/>
@@ -18873,7 +19198,18 @@
               </a:spcAft>
             </a:pPr>
             <a:r>
-              <a:rPr sz="1600" b="1">
+              <a:rPr sz="1400" b="1">
+                <a:solidFill>
+                  <a:srgbClr val="12203C"/>
+                </a:solidFill>
+                <a:latin typeface="NanumGothic"/>
+                <a:ea typeface="NanumGothic"/>
+                <a:cs typeface="NanumGothic"/>
+              </a:rPr>
+              <a:t>•  </a:t>
+            </a:r>
+            <a:r>
+              <a:rPr sz="1400" b="0">
                 <a:solidFill>
                   <a:srgbClr val="0F172A"/>
                 </a:solidFill>
@@ -18881,21 +19217,21 @@
                 <a:ea typeface="NanumGothic"/>
                 <a:cs typeface="NanumGothic"/>
               </a:rPr>
-              <a:t>언제 강한가</a:t>
-            </a:r>
-          </a:p>
-        </p:txBody>
-      </p:sp>
-      <p:sp>
-        <p:nvSpPr>
-          <p:cNvPr id="13" name="TextBox 12"/>
-          <p:cNvSpPr txBox="1"/>
-          <p:nvPr/>
-        </p:nvSpPr>
-        <p:spPr>
-          <a:xfrm>
-            <a:off x="868680" y="3081528"/>
-            <a:ext cx="10607040" cy="457200"/>
+              <a:t>데이터: 시연 약 1.3만 건 (InstructGPT, 공개)</a:t>
+            </a:r>
+          </a:p>
+        </p:txBody>
+      </p:sp>
+      <p:sp>
+        <p:nvSpPr>
+          <p:cNvPr id="19" name="TextBox 18"/>
+          <p:cNvSpPr txBox="1"/>
+          <p:nvPr/>
+        </p:nvSpPr>
+        <p:spPr>
+          <a:xfrm>
+            <a:off x="6492240" y="3264408"/>
+            <a:ext cx="4846320" cy="548640"/>
           </a:xfrm>
           <a:prstGeom prst="rect">
             <a:avLst/>
@@ -18920,73 +19256,40 @@
               </a:spcAft>
             </a:pPr>
             <a:r>
-              <a:rPr sz="1300" b="0">
-                <a:solidFill>
-                  <a:srgbClr val="64748B"/>
-                </a:solidFill>
-                <a:latin typeface="NanumGothic"/>
-                <a:ea typeface="NanumGothic"/>
-                <a:cs typeface="NanumGothic"/>
-              </a:rPr>
-              <a:t>복잡한 문제 · 다단계 추론 · 코딩</a:t>
-            </a:r>
-          </a:p>
-        </p:txBody>
-      </p:sp>
-      <p:sp>
-        <p:nvSpPr>
-          <p:cNvPr id="14" name="Oval 13"/>
-          <p:cNvSpPr/>
-          <p:nvPr/>
-        </p:nvSpPr>
-        <p:spPr>
-          <a:xfrm>
-            <a:off x="548640" y="3648456"/>
-            <a:ext cx="146304" cy="146304"/>
-          </a:xfrm>
-          <a:prstGeom prst="ellipse">
-            <a:avLst/>
-          </a:prstGeom>
-          <a:solidFill>
-            <a:srgbClr val="6366F1"/>
-          </a:solidFill>
-          <a:ln>
-            <a:noFill/>
-          </a:ln>
-          <a:effectLst/>
-        </p:spPr>
-        <p:style>
-          <a:lnRef idx="1">
-            <a:schemeClr val="accent1"/>
-          </a:lnRef>
-          <a:fillRef idx="3">
-            <a:schemeClr val="accent1"/>
-          </a:fillRef>
-          <a:effectRef idx="2">
-            <a:schemeClr val="accent1"/>
-          </a:effectRef>
-          <a:fontRef idx="minor">
-            <a:schemeClr val="lt1"/>
-          </a:fontRef>
-        </p:style>
-        <p:txBody>
-          <a:bodyPr rtlCol="0" anchor="ctr"/>
-          <a:lstStyle/>
-          <a:p>
-            <a:pPr algn="ctr"/>
-          </a:p>
-        </p:txBody>
-      </p:sp>
-      <p:sp>
-        <p:nvSpPr>
-          <p:cNvPr id="15" name="TextBox 14"/>
-          <p:cNvSpPr txBox="1"/>
-          <p:nvPr/>
-        </p:nvSpPr>
-        <p:spPr>
-          <a:xfrm>
-            <a:off x="868680" y="3566160"/>
-            <a:ext cx="10607040" cy="457200"/>
+              <a:rPr sz="1400" b="1">
+                <a:solidFill>
+                  <a:srgbClr val="12203C"/>
+                </a:solidFill>
+                <a:latin typeface="NanumGothic"/>
+                <a:ea typeface="NanumGothic"/>
+                <a:cs typeface="NanumGothic"/>
+              </a:rPr>
+              <a:t>•  </a:t>
+            </a:r>
+            <a:r>
+              <a:rPr sz="1400" b="0">
+                <a:solidFill>
+                  <a:srgbClr val="0F172A"/>
+                </a:solidFill>
+                <a:latin typeface="NanumGothic"/>
+                <a:ea typeface="NanumGothic"/>
+                <a:cs typeface="NanumGothic"/>
+              </a:rPr>
+              <a:t>인력: 훈련된 계약직 약 40명 (InstructGPT)</a:t>
+            </a:r>
+          </a:p>
+        </p:txBody>
+      </p:sp>
+      <p:sp>
+        <p:nvSpPr>
+          <p:cNvPr id="20" name="TextBox 19"/>
+          <p:cNvSpPr txBox="1"/>
+          <p:nvPr/>
+        </p:nvSpPr>
+        <p:spPr>
+          <a:xfrm>
+            <a:off x="6492240" y="3831336"/>
+            <a:ext cx="4846320" cy="548640"/>
           </a:xfrm>
           <a:prstGeom prst="rect">
             <a:avLst/>
@@ -19011,7 +19314,18 @@
               </a:spcAft>
             </a:pPr>
             <a:r>
-              <a:rPr sz="1600" b="1">
+              <a:rPr sz="1400" b="1">
+                <a:solidFill>
+                  <a:srgbClr val="12203C"/>
+                </a:solidFill>
+                <a:latin typeface="NanumGothic"/>
+                <a:ea typeface="NanumGothic"/>
+                <a:cs typeface="NanumGothic"/>
+              </a:rPr>
+              <a:t>•  </a:t>
+            </a:r>
+            <a:r>
+              <a:rPr sz="1400" b="0">
                 <a:solidFill>
                   <a:srgbClr val="0F172A"/>
                 </a:solidFill>
@@ -19019,21 +19333,21 @@
                 <a:ea typeface="NanumGothic"/>
                 <a:cs typeface="NanumGothic"/>
               </a:rPr>
-              <a:t>트레이드오프</a:t>
-            </a:r>
-          </a:p>
-        </p:txBody>
-      </p:sp>
-      <p:sp>
-        <p:nvSpPr>
-          <p:cNvPr id="16" name="TextBox 15"/>
-          <p:cNvSpPr txBox="1"/>
-          <p:nvPr/>
-        </p:nvSpPr>
-        <p:spPr>
-          <a:xfrm>
-            <a:off x="868680" y="3950208"/>
-            <a:ext cx="10607040" cy="457200"/>
+              <a:t>컴퓨팅: 사전학습의 약 1~2%</a:t>
+            </a:r>
+          </a:p>
+        </p:txBody>
+      </p:sp>
+      <p:sp>
+        <p:nvSpPr>
+          <p:cNvPr id="21" name="TextBox 20"/>
+          <p:cNvSpPr txBox="1"/>
+          <p:nvPr/>
+        </p:nvSpPr>
+        <p:spPr>
+          <a:xfrm>
+            <a:off x="6492240" y="4398264"/>
+            <a:ext cx="4846320" cy="548640"/>
           </a:xfrm>
           <a:prstGeom prst="rect">
             <a:avLst/>
@@ -19058,98 +19372,18 @@
               </a:spcAft>
             </a:pPr>
             <a:r>
-              <a:rPr sz="1300" b="0">
-                <a:solidFill>
-                  <a:srgbClr val="64748B"/>
-                </a:solidFill>
-                <a:latin typeface="NanumGothic"/>
-                <a:ea typeface="NanumGothic"/>
-                <a:cs typeface="NanumGothic"/>
-              </a:rPr>
-              <a:t>더 정확하지만 더 느리고 비싸다</a:t>
-            </a:r>
-          </a:p>
-        </p:txBody>
-      </p:sp>
-      <p:sp>
-        <p:nvSpPr>
-          <p:cNvPr id="17" name="Oval 16"/>
-          <p:cNvSpPr/>
-          <p:nvPr/>
-        </p:nvSpPr>
-        <p:spPr>
-          <a:xfrm>
-            <a:off x="548640" y="4517136"/>
-            <a:ext cx="146304" cy="146304"/>
-          </a:xfrm>
-          <a:prstGeom prst="ellipse">
-            <a:avLst/>
-          </a:prstGeom>
-          <a:solidFill>
-            <a:srgbClr val="6366F1"/>
-          </a:solidFill>
-          <a:ln>
-            <a:noFill/>
-          </a:ln>
-          <a:effectLst/>
-        </p:spPr>
-        <p:style>
-          <a:lnRef idx="1">
-            <a:schemeClr val="accent1"/>
-          </a:lnRef>
-          <a:fillRef idx="3">
-            <a:schemeClr val="accent1"/>
-          </a:fillRef>
-          <a:effectRef idx="2">
-            <a:schemeClr val="accent1"/>
-          </a:effectRef>
-          <a:fontRef idx="minor">
-            <a:schemeClr val="lt1"/>
-          </a:fontRef>
-        </p:style>
-        <p:txBody>
-          <a:bodyPr rtlCol="0" anchor="ctr"/>
-          <a:lstStyle/>
-          <a:p>
-            <a:pPr algn="ctr"/>
-          </a:p>
-        </p:txBody>
-      </p:sp>
-      <p:sp>
-        <p:nvSpPr>
-          <p:cNvPr id="18" name="TextBox 17"/>
-          <p:cNvSpPr txBox="1"/>
-          <p:nvPr/>
-        </p:nvSpPr>
-        <p:spPr>
-          <a:xfrm>
-            <a:off x="868680" y="4434840"/>
-            <a:ext cx="10607040" cy="457200"/>
-          </a:xfrm>
-          <a:prstGeom prst="rect">
-            <a:avLst/>
-          </a:prstGeom>
-          <a:noFill/>
-        </p:spPr>
-        <p:txBody>
-          <a:bodyPr wrap="square" anchor="t" lIns="0" rIns="0" tIns="0" bIns="0">
-            <a:spAutoFit/>
-          </a:bodyPr>
-          <a:lstStyle/>
-          <a:p>
-            <a:pPr algn="l">
-              <a:lnSpc>
-                <a:spcPct val="100000"/>
-              </a:lnSpc>
-              <a:spcBef>
-                <a:spcPts val="0"/>
-              </a:spcBef>
-              <a:spcAft>
-                <a:spcPts val="600"/>
-              </a:spcAft>
-            </a:pPr>
-            <a:r>
-              <a:rPr sz="1600" b="1">
+              <a:rPr sz="1400" b="1">
+                <a:solidFill>
+                  <a:srgbClr val="12203C"/>
+                </a:solidFill>
+                <a:latin typeface="NanumGothic"/>
+                <a:ea typeface="NanumGothic"/>
+                <a:cs typeface="NanumGothic"/>
+              </a:rPr>
+              <a:t>•  </a:t>
+            </a:r>
+            <a:r>
+              <a:rPr sz="1400" b="0">
                 <a:solidFill>
                   <a:srgbClr val="0F172A"/>
                 </a:solidFill>
@@ -19157,61 +19391,14 @@
                 <a:ea typeface="NanumGothic"/>
                 <a:cs typeface="NanumGothic"/>
               </a:rPr>
-              <a:t>사례</a:t>
-            </a:r>
-          </a:p>
-        </p:txBody>
-      </p:sp>
-      <p:sp>
-        <p:nvSpPr>
-          <p:cNvPr id="19" name="TextBox 18"/>
-          <p:cNvSpPr txBox="1"/>
-          <p:nvPr/>
-        </p:nvSpPr>
-        <p:spPr>
-          <a:xfrm>
-            <a:off x="868680" y="4818888"/>
-            <a:ext cx="10607040" cy="457200"/>
-          </a:xfrm>
-          <a:prstGeom prst="rect">
-            <a:avLst/>
-          </a:prstGeom>
-          <a:noFill/>
-        </p:spPr>
-        <p:txBody>
-          <a:bodyPr wrap="square" anchor="t" lIns="0" rIns="0" tIns="0" bIns="0">
-            <a:spAutoFit/>
-          </a:bodyPr>
-          <a:lstStyle/>
-          <a:p>
-            <a:pPr algn="l">
-              <a:lnSpc>
-                <a:spcPct val="100000"/>
-              </a:lnSpc>
-              <a:spcBef>
-                <a:spcPts val="0"/>
-              </a:spcBef>
-              <a:spcAft>
-                <a:spcPts val="600"/>
-              </a:spcAft>
-            </a:pPr>
-            <a:r>
-              <a:rPr sz="1300" b="0">
-                <a:solidFill>
-                  <a:srgbClr val="64748B"/>
-                </a:solidFill>
-                <a:latin typeface="NanumGothic"/>
-                <a:ea typeface="NanumGothic"/>
-                <a:cs typeface="NanumGothic"/>
-              </a:rPr>
-              <a:t>DeepSeek-R1(2025·오픈)·OpenAI o1→o3 — AIME 78%→96.7%</a:t>
-            </a:r>
-          </a:p>
-        </p:txBody>
-      </p:sp>
-      <p:sp>
-        <p:nvSpPr>
-          <p:cNvPr id="20" name="Rounded Rectangle 19"/>
+              <a:t>Llama 2: 사람 선호 비교 약 140만 건</a:t>
+            </a:r>
+          </a:p>
+        </p:txBody>
+      </p:sp>
+      <p:sp>
+        <p:nvSpPr>
+          <p:cNvPr id="22" name="Rounded Rectangle 21"/>
           <p:cNvSpPr/>
           <p:nvPr/>
         </p:nvSpPr>
@@ -19257,7 +19444,7 @@
       </p:sp>
       <p:sp>
         <p:nvSpPr>
-          <p:cNvPr id="21" name="TextBox 20"/>
+          <p:cNvPr id="23" name="TextBox 22"/>
           <p:cNvSpPr txBox="1"/>
           <p:nvPr/>
         </p:nvSpPr>
@@ -19308,14 +19495,14 @@
                 <a:ea typeface="NanumGothic"/>
                 <a:cs typeface="NanumGothic"/>
               </a:rPr>
-              <a:t>벤치마크 수치는 빠르게 갱신되므로 강의 시점을 기준으로 다시 확인하는 것이 좋다.</a:t>
-            </a:r>
-          </a:p>
-        </p:txBody>
-      </p:sp>
-      <p:sp>
-        <p:nvSpPr>
-          <p:cNvPr id="22" name="TextBox 21"/>
+              <a:t>지능은 막대한 컴퓨팅·데이터(수천만~수억 달러)로 얻고, 좋은 행동은 비교적 적은 양의 정교한 사람 판단으로 빚는다. (GPT-4·Gemini 수치는 제3자 추정치)</a:t>
+            </a:r>
+          </a:p>
+        </p:txBody>
+      </p:sp>
+      <p:sp>
+        <p:nvSpPr>
+          <p:cNvPr id="24" name="TextBox 23"/>
           <p:cNvSpPr txBox="1"/>
           <p:nvPr/>
         </p:nvSpPr>
@@ -19366,7 +19553,7 @@
                 <a:ea typeface="NanumGothic"/>
                 <a:cs typeface="NanumGothic"/>
               </a:rPr>
-              <a:t>   ·   24 / 42</a:t>
+              <a:t>   ·   24 / 43</a:t>
             </a:r>
           </a:p>
         </p:txBody>
@@ -19519,7 +19706,7 @@
                 <a:ea typeface="NanumGothic"/>
                 <a:cs typeface="NanumGothic"/>
               </a:rPr>
-              <a:t>임베딩</a:t>
+              <a:t>추론 모델</a:t>
             </a:r>
           </a:p>
         </p:txBody>
@@ -19566,7 +19753,7 @@
                 <a:ea typeface="NanumSquare"/>
                 <a:cs typeface="NanumSquare"/>
               </a:rPr>
-              <a:t>임베딩 &amp; 의미 검색</a:t>
+              <a:t>추론(사고)하는 모델</a:t>
             </a:r>
           </a:p>
         </p:txBody>
@@ -19748,7 +19935,7 @@
                 <a:ea typeface="NanumGothic"/>
                 <a:cs typeface="NanumGothic"/>
               </a:rPr>
-              <a:t>임베딩이란</a:t>
+              <a:t>일반 생성 vs 추론</a:t>
             </a:r>
           </a:p>
         </p:txBody>
@@ -19795,7 +19982,7 @@
                 <a:ea typeface="NanumGothic"/>
                 <a:cs typeface="NanumGothic"/>
               </a:rPr>
-              <a:t>텍스트를 의미를 담은 숫자 벡터로 변환</a:t>
+              <a:t>바로 답하지 않고, 단계적으로 '생각'한 뒤 답한다</a:t>
             </a:r>
           </a:p>
         </p:txBody>
@@ -19886,7 +20073,7 @@
                 <a:ea typeface="NanumGothic"/>
                 <a:cs typeface="NanumGothic"/>
               </a:rPr>
-              <a:t>의미 검색</a:t>
+              <a:t>언제 강한가</a:t>
             </a:r>
           </a:p>
         </p:txBody>
@@ -19933,7 +20120,7 @@
                 <a:ea typeface="NanumGothic"/>
                 <a:cs typeface="NanumGothic"/>
               </a:rPr>
-              <a:t>글자가 달라도 '뜻이 비슷한' 문서를 찾음 (키워드 매칭의 한계 극복)</a:t>
+              <a:t>복잡한 문제 · 다단계 추론 · 코딩</a:t>
             </a:r>
           </a:p>
         </p:txBody>
@@ -20024,7 +20211,7 @@
                 <a:ea typeface="NanumGothic"/>
                 <a:cs typeface="NanumGothic"/>
               </a:rPr>
-              <a:t>어디에 쓰나</a:t>
+              <a:t>트레이드오프</a:t>
             </a:r>
           </a:p>
         </p:txBody>
@@ -20071,7 +20258,7 @@
                 <a:ea typeface="NanumGothic"/>
                 <a:cs typeface="NanumGothic"/>
               </a:rPr>
-              <a:t>방대한 문헌에서 관련 자료 검색 — 리서치 에이전트의 토대</a:t>
+              <a:t>더 정확하지만 더 느리고 비싸다</a:t>
             </a:r>
           </a:p>
         </p:txBody>
@@ -20209,7 +20396,7 @@
                 <a:ea typeface="NanumGothic"/>
                 <a:cs typeface="NanumGothic"/>
               </a:rPr>
-              <a:t>Etsy·Spotify 검색/추천이 임베딩 기반</a:t>
+              <a:t>DeepSeek-R1(2025·오픈)·OpenAI o1→o3 — AIME 78%→96.7%</a:t>
             </a:r>
           </a:p>
         </p:txBody>
@@ -20313,7 +20500,7 @@
                 <a:ea typeface="NanumGothic"/>
                 <a:cs typeface="NanumGothic"/>
               </a:rPr>
-              <a:t>임베딩은 키워드의 일치가 아니라 '의미'의 유사성으로 자료를 찾는다.</a:t>
+              <a:t>벤치마크 수치는 빠르게 갱신되므로 강의 시점을 기준으로 다시 확인하는 것이 좋다.</a:t>
             </a:r>
           </a:p>
         </p:txBody>
@@ -20371,7 +20558,7 @@
                 <a:ea typeface="NanumGothic"/>
                 <a:cs typeface="NanumGothic"/>
               </a:rPr>
-              <a:t>   ·   25 / 42</a:t>
+              <a:t>   ·   25 / 43</a:t>
             </a:r>
           </a:p>
         </p:txBody>
@@ -20524,7 +20711,7 @@
                 <a:ea typeface="NanumGothic"/>
                 <a:cs typeface="NanumGothic"/>
               </a:rPr>
-              <a:t>RAG 개요</a:t>
+              <a:t>임베딩</a:t>
             </a:r>
           </a:p>
         </p:txBody>
@@ -20571,7 +20758,7 @@
                 <a:ea typeface="NanumSquare"/>
                 <a:cs typeface="NanumSquare"/>
               </a:rPr>
-              <a:t>검색 증강 생성 (RAG)</a:t>
+              <a:t>임베딩 &amp; 의미 검색</a:t>
             </a:r>
           </a:p>
         </p:txBody>
@@ -20669,62 +20856,16 @@
       </p:sp>
       <p:sp>
         <p:nvSpPr>
-          <p:cNvPr id="8" name="Rounded Rectangle 7"/>
+          <p:cNvPr id="8" name="Oval 7"/>
           <p:cNvSpPr/>
           <p:nvPr/>
         </p:nvSpPr>
         <p:spPr>
           <a:xfrm>
-            <a:off x="502920" y="2651760"/>
-            <a:ext cx="2548890" cy="1737360"/>
-          </a:xfrm>
-          <a:prstGeom prst="roundRect">
-            <a:avLst/>
-          </a:prstGeom>
-          <a:solidFill>
-            <a:srgbClr val="F8FAFC"/>
-          </a:solidFill>
-          <a:ln w="12700">
-            <a:solidFill>
-              <a:srgbClr val="E2E8F0"/>
-            </a:solidFill>
-          </a:ln>
-          <a:effectLst/>
-        </p:spPr>
-        <p:style>
-          <a:lnRef idx="1">
-            <a:schemeClr val="accent1"/>
-          </a:lnRef>
-          <a:fillRef idx="3">
-            <a:schemeClr val="accent1"/>
-          </a:fillRef>
-          <a:effectRef idx="2">
-            <a:schemeClr val="accent1"/>
-          </a:effectRef>
-          <a:fontRef idx="minor">
-            <a:schemeClr val="lt1"/>
-          </a:fontRef>
-        </p:style>
-        <p:txBody>
-          <a:bodyPr rtlCol="0" anchor="ctr"/>
-          <a:lstStyle/>
-          <a:p>
-            <a:pPr algn="ctr"/>
-          </a:p>
-        </p:txBody>
-      </p:sp>
-      <p:sp>
-        <p:nvSpPr>
-          <p:cNvPr id="9" name="Rectangle 8"/>
-          <p:cNvSpPr/>
-          <p:nvPr/>
-        </p:nvSpPr>
-        <p:spPr>
-          <a:xfrm>
-            <a:off x="502920" y="2651760"/>
-            <a:ext cx="2548890" cy="109728"/>
-          </a:xfrm>
-          <a:prstGeom prst="rect">
+            <a:off x="548640" y="1911096"/>
+            <a:ext cx="146304" cy="146304"/>
+          </a:xfrm>
+          <a:prstGeom prst="ellipse">
             <a:avLst/>
           </a:prstGeom>
           <a:solidFill>
@@ -20759,14 +20900,61 @@
       </p:sp>
       <p:sp>
         <p:nvSpPr>
+          <p:cNvPr id="9" name="TextBox 8"/>
+          <p:cNvSpPr txBox="1"/>
+          <p:nvPr/>
+        </p:nvSpPr>
+        <p:spPr>
+          <a:xfrm>
+            <a:off x="868680" y="1828800"/>
+            <a:ext cx="10607040" cy="457200"/>
+          </a:xfrm>
+          <a:prstGeom prst="rect">
+            <a:avLst/>
+          </a:prstGeom>
+          <a:noFill/>
+        </p:spPr>
+        <p:txBody>
+          <a:bodyPr wrap="square" anchor="t" lIns="0" rIns="0" tIns="0" bIns="0">
+            <a:spAutoFit/>
+          </a:bodyPr>
+          <a:lstStyle/>
+          <a:p>
+            <a:pPr algn="l">
+              <a:lnSpc>
+                <a:spcPct val="100000"/>
+              </a:lnSpc>
+              <a:spcBef>
+                <a:spcPts val="0"/>
+              </a:spcBef>
+              <a:spcAft>
+                <a:spcPts val="600"/>
+              </a:spcAft>
+            </a:pPr>
+            <a:r>
+              <a:rPr sz="1600" b="1">
+                <a:solidFill>
+                  <a:srgbClr val="0F172A"/>
+                </a:solidFill>
+                <a:latin typeface="NanumGothic"/>
+                <a:ea typeface="NanumGothic"/>
+                <a:cs typeface="NanumGothic"/>
+              </a:rPr>
+              <a:t>임베딩이란</a:t>
+            </a:r>
+          </a:p>
+        </p:txBody>
+      </p:sp>
+      <p:sp>
+        <p:nvSpPr>
           <p:cNvPr id="10" name="TextBox 9"/>
           <p:cNvSpPr txBox="1"/>
           <p:nvPr/>
         </p:nvSpPr>
         <p:spPr>
           <a:xfrm>
-            <a:off x="640080" y="2944368"/>
-            <a:ext cx="2274570" cy="365760"/>
+            <a:off x="868680" y="2212848"/>
+            <a:ext cx="10607040" cy="457200"/>
           </a:xfrm>
           <a:prstGeom prst="rect">
             <a:avLst/>
@@ -20791,101 +20979,7 @@
               </a:spcAft>
             </a:pPr>
             <a:r>
-              <a:rPr sz="1300" b="1">
-                <a:solidFill>
-                  <a:srgbClr val="6366F1"/>
-                </a:solidFill>
-                <a:latin typeface="NanumSquare"/>
-                <a:ea typeface="NanumSquare"/>
-                <a:cs typeface="NanumSquare"/>
-              </a:rPr>
-              <a:t>1</a:t>
-            </a:r>
-          </a:p>
-        </p:txBody>
-      </p:sp>
-      <p:sp>
-        <p:nvSpPr>
-          <p:cNvPr id="11" name="TextBox 10"/>
-          <p:cNvSpPr txBox="1"/>
-          <p:nvPr/>
-        </p:nvSpPr>
-        <p:spPr>
-          <a:xfrm>
-            <a:off x="640080" y="3310128"/>
-            <a:ext cx="2274570" cy="548640"/>
-          </a:xfrm>
-          <a:prstGeom prst="rect">
-            <a:avLst/>
-          </a:prstGeom>
-          <a:noFill/>
-        </p:spPr>
-        <p:txBody>
-          <a:bodyPr wrap="square" anchor="t" lIns="0" rIns="0" tIns="0" bIns="0">
-            <a:spAutoFit/>
-          </a:bodyPr>
-          <a:lstStyle/>
-          <a:p>
-            <a:pPr algn="l">
-              <a:lnSpc>
-                <a:spcPct val="100000"/>
-              </a:lnSpc>
-              <a:spcBef>
-                <a:spcPts val="0"/>
-              </a:spcBef>
-              <a:spcAft>
-                <a:spcPts val="600"/>
-              </a:spcAft>
-            </a:pPr>
-            <a:r>
-              <a:rPr sz="1500" b="1">
-                <a:solidFill>
-                  <a:srgbClr val="0F172A"/>
-                </a:solidFill>
-                <a:latin typeface="NanumGothic"/>
-                <a:ea typeface="NanumGothic"/>
-                <a:cs typeface="NanumGothic"/>
-              </a:rPr>
-              <a:t>질문</a:t>
-            </a:r>
-          </a:p>
-        </p:txBody>
-      </p:sp>
-      <p:sp>
-        <p:nvSpPr>
-          <p:cNvPr id="12" name="TextBox 11"/>
-          <p:cNvSpPr txBox="1"/>
-          <p:nvPr/>
-        </p:nvSpPr>
-        <p:spPr>
-          <a:xfrm>
-            <a:off x="640080" y="3822192"/>
-            <a:ext cx="2274570" cy="457200"/>
-          </a:xfrm>
-          <a:prstGeom prst="rect">
-            <a:avLst/>
-          </a:prstGeom>
-          <a:noFill/>
-        </p:spPr>
-        <p:txBody>
-          <a:bodyPr wrap="square" anchor="t" lIns="0" rIns="0" tIns="0" bIns="0">
-            <a:spAutoFit/>
-          </a:bodyPr>
-          <a:lstStyle/>
-          <a:p>
-            <a:pPr algn="l">
-              <a:lnSpc>
-                <a:spcPct val="100000"/>
-              </a:lnSpc>
-              <a:spcBef>
-                <a:spcPts val="0"/>
-              </a:spcBef>
-              <a:spcAft>
-                <a:spcPts val="600"/>
-              </a:spcAft>
-            </a:pPr>
-            <a:r>
-              <a:rPr sz="1100" b="0">
+              <a:rPr sz="1300" b="0">
                 <a:solidFill>
                   <a:srgbClr val="64748B"/>
                 </a:solidFill>
@@ -20893,116 +20987,23 @@
                 <a:ea typeface="NanumGothic"/>
                 <a:cs typeface="NanumGothic"/>
               </a:rPr>
-              <a:t>사용자 질문</a:t>
-            </a:r>
-          </a:p>
-        </p:txBody>
-      </p:sp>
-      <p:sp>
-        <p:nvSpPr>
-          <p:cNvPr id="13" name="TextBox 12"/>
-          <p:cNvSpPr txBox="1"/>
-          <p:nvPr/>
-        </p:nvSpPr>
-        <p:spPr>
-          <a:xfrm>
-            <a:off x="3097530" y="3154680"/>
-            <a:ext cx="274320" cy="548640"/>
-          </a:xfrm>
-          <a:prstGeom prst="rect">
-            <a:avLst/>
-          </a:prstGeom>
-          <a:noFill/>
-        </p:spPr>
-        <p:txBody>
-          <a:bodyPr wrap="square" anchor="ctr" lIns="0" rIns="0" tIns="0" bIns="0">
-            <a:spAutoFit/>
-          </a:bodyPr>
-          <a:lstStyle/>
-          <a:p>
-            <a:pPr algn="ctr">
-              <a:lnSpc>
-                <a:spcPct val="100000"/>
-              </a:lnSpc>
-              <a:spcBef>
-                <a:spcPts val="0"/>
-              </a:spcBef>
-              <a:spcAft>
-                <a:spcPts val="600"/>
-              </a:spcAft>
-            </a:pPr>
-            <a:r>
-              <a:rPr sz="2200" b="1">
-                <a:solidFill>
-                  <a:srgbClr val="6366F1"/>
-                </a:solidFill>
-                <a:latin typeface="NanumSquare"/>
-                <a:ea typeface="NanumSquare"/>
-                <a:cs typeface="NanumSquare"/>
-              </a:rPr>
-              <a:t>→</a:t>
-            </a:r>
-          </a:p>
-        </p:txBody>
-      </p:sp>
-      <p:sp>
-        <p:nvSpPr>
-          <p:cNvPr id="14" name="Rounded Rectangle 13"/>
+              <a:t>텍스트를 의미를 담은 숫자 벡터로 변환</a:t>
+            </a:r>
+          </a:p>
+        </p:txBody>
+      </p:sp>
+      <p:sp>
+        <p:nvSpPr>
+          <p:cNvPr id="11" name="Oval 10"/>
           <p:cNvSpPr/>
           <p:nvPr/>
         </p:nvSpPr>
         <p:spPr>
           <a:xfrm>
-            <a:off x="3371850" y="2651760"/>
-            <a:ext cx="2548890" cy="1737360"/>
-          </a:xfrm>
-          <a:prstGeom prst="roundRect">
-            <a:avLst/>
-          </a:prstGeom>
-          <a:solidFill>
-            <a:srgbClr val="F8FAFC"/>
-          </a:solidFill>
-          <a:ln w="12700">
-            <a:solidFill>
-              <a:srgbClr val="E2E8F0"/>
-            </a:solidFill>
-          </a:ln>
-          <a:effectLst/>
-        </p:spPr>
-        <p:style>
-          <a:lnRef idx="1">
-            <a:schemeClr val="accent1"/>
-          </a:lnRef>
-          <a:fillRef idx="3">
-            <a:schemeClr val="accent1"/>
-          </a:fillRef>
-          <a:effectRef idx="2">
-            <a:schemeClr val="accent1"/>
-          </a:effectRef>
-          <a:fontRef idx="minor">
-            <a:schemeClr val="lt1"/>
-          </a:fontRef>
-        </p:style>
-        <p:txBody>
-          <a:bodyPr rtlCol="0" anchor="ctr"/>
-          <a:lstStyle/>
-          <a:p>
-            <a:pPr algn="ctr"/>
-          </a:p>
-        </p:txBody>
-      </p:sp>
-      <p:sp>
-        <p:nvSpPr>
-          <p:cNvPr id="15" name="Rectangle 14"/>
-          <p:cNvSpPr/>
-          <p:nvPr/>
-        </p:nvSpPr>
-        <p:spPr>
-          <a:xfrm>
-            <a:off x="3371850" y="2651760"/>
-            <a:ext cx="2548890" cy="109728"/>
-          </a:xfrm>
-          <a:prstGeom prst="rect">
+            <a:off x="548640" y="2779776"/>
+            <a:ext cx="146304" cy="146304"/>
+          </a:xfrm>
+          <a:prstGeom prst="ellipse">
             <a:avLst/>
           </a:prstGeom>
           <a:solidFill>
@@ -21037,14 +21038,14 @@
       </p:sp>
       <p:sp>
         <p:nvSpPr>
-          <p:cNvPr id="16" name="TextBox 15"/>
-          <p:cNvSpPr txBox="1"/>
-          <p:nvPr/>
-        </p:nvSpPr>
-        <p:spPr>
-          <a:xfrm>
-            <a:off x="3509010" y="2944368"/>
-            <a:ext cx="2274570" cy="365760"/>
+          <p:cNvPr id="12" name="TextBox 11"/>
+          <p:cNvSpPr txBox="1"/>
+          <p:nvPr/>
+        </p:nvSpPr>
+        <p:spPr>
+          <a:xfrm>
+            <a:off x="868680" y="2697480"/>
+            <a:ext cx="10607040" cy="457200"/>
           </a:xfrm>
           <a:prstGeom prst="rect">
             <a:avLst/>
@@ -21069,29 +21070,29 @@
               </a:spcAft>
             </a:pPr>
             <a:r>
-              <a:rPr sz="1300" b="1">
-                <a:solidFill>
-                  <a:srgbClr val="6366F1"/>
-                </a:solidFill>
-                <a:latin typeface="NanumSquare"/>
-                <a:ea typeface="NanumSquare"/>
-                <a:cs typeface="NanumSquare"/>
-              </a:rPr>
-              <a:t>2</a:t>
-            </a:r>
-          </a:p>
-        </p:txBody>
-      </p:sp>
-      <p:sp>
-        <p:nvSpPr>
-          <p:cNvPr id="17" name="TextBox 16"/>
-          <p:cNvSpPr txBox="1"/>
-          <p:nvPr/>
-        </p:nvSpPr>
-        <p:spPr>
-          <a:xfrm>
-            <a:off x="3509010" y="3310128"/>
-            <a:ext cx="2274570" cy="548640"/>
+              <a:rPr sz="1600" b="1">
+                <a:solidFill>
+                  <a:srgbClr val="0F172A"/>
+                </a:solidFill>
+                <a:latin typeface="NanumGothic"/>
+                <a:ea typeface="NanumGothic"/>
+                <a:cs typeface="NanumGothic"/>
+              </a:rPr>
+              <a:t>의미 검색</a:t>
+            </a:r>
+          </a:p>
+        </p:txBody>
+      </p:sp>
+      <p:sp>
+        <p:nvSpPr>
+          <p:cNvPr id="13" name="TextBox 12"/>
+          <p:cNvSpPr txBox="1"/>
+          <p:nvPr/>
+        </p:nvSpPr>
+        <p:spPr>
+          <a:xfrm>
+            <a:off x="868680" y="3081528"/>
+            <a:ext cx="10607040" cy="457200"/>
           </a:xfrm>
           <a:prstGeom prst="rect">
             <a:avLst/>
@@ -21116,54 +21117,7 @@
               </a:spcAft>
             </a:pPr>
             <a:r>
-              <a:rPr sz="1500" b="1">
-                <a:solidFill>
-                  <a:srgbClr val="0F172A"/>
-                </a:solidFill>
-                <a:latin typeface="NanumGothic"/>
-                <a:ea typeface="NanumGothic"/>
-                <a:cs typeface="NanumGothic"/>
-              </a:rPr>
-              <a:t>검색</a:t>
-            </a:r>
-          </a:p>
-        </p:txBody>
-      </p:sp>
-      <p:sp>
-        <p:nvSpPr>
-          <p:cNvPr id="18" name="TextBox 17"/>
-          <p:cNvSpPr txBox="1"/>
-          <p:nvPr/>
-        </p:nvSpPr>
-        <p:spPr>
-          <a:xfrm>
-            <a:off x="3509010" y="3822192"/>
-            <a:ext cx="2274570" cy="457200"/>
-          </a:xfrm>
-          <a:prstGeom prst="rect">
-            <a:avLst/>
-          </a:prstGeom>
-          <a:noFill/>
-        </p:spPr>
-        <p:txBody>
-          <a:bodyPr wrap="square" anchor="t" lIns="0" rIns="0" tIns="0" bIns="0">
-            <a:spAutoFit/>
-          </a:bodyPr>
-          <a:lstStyle/>
-          <a:p>
-            <a:pPr algn="l">
-              <a:lnSpc>
-                <a:spcPct val="100000"/>
-              </a:lnSpc>
-              <a:spcBef>
-                <a:spcPts val="0"/>
-              </a:spcBef>
-              <a:spcAft>
-                <a:spcPts val="600"/>
-              </a:spcAft>
-            </a:pPr>
-            <a:r>
-              <a:rPr sz="1100" b="0">
+              <a:rPr sz="1300" b="0">
                 <a:solidFill>
                   <a:srgbClr val="64748B"/>
                 </a:solidFill>
@@ -21171,116 +21125,23 @@
                 <a:ea typeface="NanumGothic"/>
                 <a:cs typeface="NanumGothic"/>
               </a:rPr>
-              <a:t>관련 문서 찾기(임베딩)</a:t>
-            </a:r>
-          </a:p>
-        </p:txBody>
-      </p:sp>
-      <p:sp>
-        <p:nvSpPr>
-          <p:cNvPr id="19" name="TextBox 18"/>
-          <p:cNvSpPr txBox="1"/>
-          <p:nvPr/>
-        </p:nvSpPr>
-        <p:spPr>
-          <a:xfrm>
-            <a:off x="5966460" y="3154680"/>
-            <a:ext cx="274320" cy="548640"/>
-          </a:xfrm>
-          <a:prstGeom prst="rect">
-            <a:avLst/>
-          </a:prstGeom>
-          <a:noFill/>
-        </p:spPr>
-        <p:txBody>
-          <a:bodyPr wrap="square" anchor="ctr" lIns="0" rIns="0" tIns="0" bIns="0">
-            <a:spAutoFit/>
-          </a:bodyPr>
-          <a:lstStyle/>
-          <a:p>
-            <a:pPr algn="ctr">
-              <a:lnSpc>
-                <a:spcPct val="100000"/>
-              </a:lnSpc>
-              <a:spcBef>
-                <a:spcPts val="0"/>
-              </a:spcBef>
-              <a:spcAft>
-                <a:spcPts val="600"/>
-              </a:spcAft>
-            </a:pPr>
-            <a:r>
-              <a:rPr sz="2200" b="1">
-                <a:solidFill>
-                  <a:srgbClr val="6366F1"/>
-                </a:solidFill>
-                <a:latin typeface="NanumSquare"/>
-                <a:ea typeface="NanumSquare"/>
-                <a:cs typeface="NanumSquare"/>
-              </a:rPr>
-              <a:t>→</a:t>
-            </a:r>
-          </a:p>
-        </p:txBody>
-      </p:sp>
-      <p:sp>
-        <p:nvSpPr>
-          <p:cNvPr id="20" name="Rounded Rectangle 19"/>
+              <a:t>글자가 달라도 '뜻이 비슷한' 문서를 찾음 (키워드 매칭의 한계 극복)</a:t>
+            </a:r>
+          </a:p>
+        </p:txBody>
+      </p:sp>
+      <p:sp>
+        <p:nvSpPr>
+          <p:cNvPr id="14" name="Oval 13"/>
           <p:cNvSpPr/>
           <p:nvPr/>
         </p:nvSpPr>
         <p:spPr>
           <a:xfrm>
-            <a:off x="6240780" y="2651760"/>
-            <a:ext cx="2548890" cy="1737360"/>
-          </a:xfrm>
-          <a:prstGeom prst="roundRect">
-            <a:avLst/>
-          </a:prstGeom>
-          <a:solidFill>
-            <a:srgbClr val="F8FAFC"/>
-          </a:solidFill>
-          <a:ln w="12700">
-            <a:solidFill>
-              <a:srgbClr val="E2E8F0"/>
-            </a:solidFill>
-          </a:ln>
-          <a:effectLst/>
-        </p:spPr>
-        <p:style>
-          <a:lnRef idx="1">
-            <a:schemeClr val="accent1"/>
-          </a:lnRef>
-          <a:fillRef idx="3">
-            <a:schemeClr val="accent1"/>
-          </a:fillRef>
-          <a:effectRef idx="2">
-            <a:schemeClr val="accent1"/>
-          </a:effectRef>
-          <a:fontRef idx="minor">
-            <a:schemeClr val="lt1"/>
-          </a:fontRef>
-        </p:style>
-        <p:txBody>
-          <a:bodyPr rtlCol="0" anchor="ctr"/>
-          <a:lstStyle/>
-          <a:p>
-            <a:pPr algn="ctr"/>
-          </a:p>
-        </p:txBody>
-      </p:sp>
-      <p:sp>
-        <p:nvSpPr>
-          <p:cNvPr id="21" name="Rectangle 20"/>
-          <p:cNvSpPr/>
-          <p:nvPr/>
-        </p:nvSpPr>
-        <p:spPr>
-          <a:xfrm>
-            <a:off x="6240780" y="2651760"/>
-            <a:ext cx="2548890" cy="109728"/>
-          </a:xfrm>
-          <a:prstGeom prst="rect">
+            <a:off x="548640" y="3648456"/>
+            <a:ext cx="146304" cy="146304"/>
+          </a:xfrm>
+          <a:prstGeom prst="ellipse">
             <a:avLst/>
           </a:prstGeom>
           <a:solidFill>
@@ -21315,14 +21176,14 @@
       </p:sp>
       <p:sp>
         <p:nvSpPr>
-          <p:cNvPr id="22" name="TextBox 21"/>
-          <p:cNvSpPr txBox="1"/>
-          <p:nvPr/>
-        </p:nvSpPr>
-        <p:spPr>
-          <a:xfrm>
-            <a:off x="6377940" y="2944368"/>
-            <a:ext cx="2274570" cy="365760"/>
+          <p:cNvPr id="15" name="TextBox 14"/>
+          <p:cNvSpPr txBox="1"/>
+          <p:nvPr/>
+        </p:nvSpPr>
+        <p:spPr>
+          <a:xfrm>
+            <a:off x="868680" y="3566160"/>
+            <a:ext cx="10607040" cy="457200"/>
           </a:xfrm>
           <a:prstGeom prst="rect">
             <a:avLst/>
@@ -21347,29 +21208,29 @@
               </a:spcAft>
             </a:pPr>
             <a:r>
-              <a:rPr sz="1300" b="1">
-                <a:solidFill>
-                  <a:srgbClr val="6366F1"/>
-                </a:solidFill>
-                <a:latin typeface="NanumSquare"/>
-                <a:ea typeface="NanumSquare"/>
-                <a:cs typeface="NanumSquare"/>
-              </a:rPr>
-              <a:t>3</a:t>
-            </a:r>
-          </a:p>
-        </p:txBody>
-      </p:sp>
-      <p:sp>
-        <p:nvSpPr>
-          <p:cNvPr id="23" name="TextBox 22"/>
-          <p:cNvSpPr txBox="1"/>
-          <p:nvPr/>
-        </p:nvSpPr>
-        <p:spPr>
-          <a:xfrm>
-            <a:off x="6377940" y="3310128"/>
-            <a:ext cx="2274570" cy="548640"/>
+              <a:rPr sz="1600" b="1">
+                <a:solidFill>
+                  <a:srgbClr val="0F172A"/>
+                </a:solidFill>
+                <a:latin typeface="NanumGothic"/>
+                <a:ea typeface="NanumGothic"/>
+                <a:cs typeface="NanumGothic"/>
+              </a:rPr>
+              <a:t>어디에 쓰나</a:t>
+            </a:r>
+          </a:p>
+        </p:txBody>
+      </p:sp>
+      <p:sp>
+        <p:nvSpPr>
+          <p:cNvPr id="16" name="TextBox 15"/>
+          <p:cNvSpPr txBox="1"/>
+          <p:nvPr/>
+        </p:nvSpPr>
+        <p:spPr>
+          <a:xfrm>
+            <a:off x="868680" y="3950208"/>
+            <a:ext cx="10607040" cy="457200"/>
           </a:xfrm>
           <a:prstGeom prst="rect">
             <a:avLst/>
@@ -21394,54 +21255,7 @@
               </a:spcAft>
             </a:pPr>
             <a:r>
-              <a:rPr sz="1500" b="1">
-                <a:solidFill>
-                  <a:srgbClr val="0F172A"/>
-                </a:solidFill>
-                <a:latin typeface="NanumGothic"/>
-                <a:ea typeface="NanumGothic"/>
-                <a:cs typeface="NanumGothic"/>
-              </a:rPr>
-              <a:t>주입</a:t>
-            </a:r>
-          </a:p>
-        </p:txBody>
-      </p:sp>
-      <p:sp>
-        <p:nvSpPr>
-          <p:cNvPr id="24" name="TextBox 23"/>
-          <p:cNvSpPr txBox="1"/>
-          <p:nvPr/>
-        </p:nvSpPr>
-        <p:spPr>
-          <a:xfrm>
-            <a:off x="6377940" y="3822192"/>
-            <a:ext cx="2274570" cy="457200"/>
-          </a:xfrm>
-          <a:prstGeom prst="rect">
-            <a:avLst/>
-          </a:prstGeom>
-          <a:noFill/>
-        </p:spPr>
-        <p:txBody>
-          <a:bodyPr wrap="square" anchor="t" lIns="0" rIns="0" tIns="0" bIns="0">
-            <a:spAutoFit/>
-          </a:bodyPr>
-          <a:lstStyle/>
-          <a:p>
-            <a:pPr algn="l">
-              <a:lnSpc>
-                <a:spcPct val="100000"/>
-              </a:lnSpc>
-              <a:spcBef>
-                <a:spcPts val="0"/>
-              </a:spcBef>
-              <a:spcAft>
-                <a:spcPts val="600"/>
-              </a:spcAft>
-            </a:pPr>
-            <a:r>
-              <a:rPr sz="1100" b="0">
+              <a:rPr sz="1300" b="0">
                 <a:solidFill>
                   <a:srgbClr val="64748B"/>
                 </a:solidFill>
@@ -21449,116 +21263,23 @@
                 <a:ea typeface="NanumGothic"/>
                 <a:cs typeface="NanumGothic"/>
               </a:rPr>
-              <a:t>찾은 근거를 프롬프트에</a:t>
-            </a:r>
-          </a:p>
-        </p:txBody>
-      </p:sp>
-      <p:sp>
-        <p:nvSpPr>
-          <p:cNvPr id="25" name="TextBox 24"/>
-          <p:cNvSpPr txBox="1"/>
-          <p:nvPr/>
-        </p:nvSpPr>
-        <p:spPr>
-          <a:xfrm>
-            <a:off x="8835390" y="3154680"/>
-            <a:ext cx="274320" cy="548640"/>
-          </a:xfrm>
-          <a:prstGeom prst="rect">
-            <a:avLst/>
-          </a:prstGeom>
-          <a:noFill/>
-        </p:spPr>
-        <p:txBody>
-          <a:bodyPr wrap="square" anchor="ctr" lIns="0" rIns="0" tIns="0" bIns="0">
-            <a:spAutoFit/>
-          </a:bodyPr>
-          <a:lstStyle/>
-          <a:p>
-            <a:pPr algn="ctr">
-              <a:lnSpc>
-                <a:spcPct val="100000"/>
-              </a:lnSpc>
-              <a:spcBef>
-                <a:spcPts val="0"/>
-              </a:spcBef>
-              <a:spcAft>
-                <a:spcPts val="600"/>
-              </a:spcAft>
-            </a:pPr>
-            <a:r>
-              <a:rPr sz="2200" b="1">
-                <a:solidFill>
-                  <a:srgbClr val="6366F1"/>
-                </a:solidFill>
-                <a:latin typeface="NanumSquare"/>
-                <a:ea typeface="NanumSquare"/>
-                <a:cs typeface="NanumSquare"/>
-              </a:rPr>
-              <a:t>→</a:t>
-            </a:r>
-          </a:p>
-        </p:txBody>
-      </p:sp>
-      <p:sp>
-        <p:nvSpPr>
-          <p:cNvPr id="26" name="Rounded Rectangle 25"/>
+              <a:t>방대한 문헌에서 관련 자료 검색 — 리서치 에이전트의 토대</a:t>
+            </a:r>
+          </a:p>
+        </p:txBody>
+      </p:sp>
+      <p:sp>
+        <p:nvSpPr>
+          <p:cNvPr id="17" name="Oval 16"/>
           <p:cNvSpPr/>
           <p:nvPr/>
         </p:nvSpPr>
         <p:spPr>
           <a:xfrm>
-            <a:off x="9109710" y="2651760"/>
-            <a:ext cx="2548890" cy="1737360"/>
-          </a:xfrm>
-          <a:prstGeom prst="roundRect">
-            <a:avLst/>
-          </a:prstGeom>
-          <a:solidFill>
-            <a:srgbClr val="F8FAFC"/>
-          </a:solidFill>
-          <a:ln w="12700">
-            <a:solidFill>
-              <a:srgbClr val="E2E8F0"/>
-            </a:solidFill>
-          </a:ln>
-          <a:effectLst/>
-        </p:spPr>
-        <p:style>
-          <a:lnRef idx="1">
-            <a:schemeClr val="accent1"/>
-          </a:lnRef>
-          <a:fillRef idx="3">
-            <a:schemeClr val="accent1"/>
-          </a:fillRef>
-          <a:effectRef idx="2">
-            <a:schemeClr val="accent1"/>
-          </a:effectRef>
-          <a:fontRef idx="minor">
-            <a:schemeClr val="lt1"/>
-          </a:fontRef>
-        </p:style>
-        <p:txBody>
-          <a:bodyPr rtlCol="0" anchor="ctr"/>
-          <a:lstStyle/>
-          <a:p>
-            <a:pPr algn="ctr"/>
-          </a:p>
-        </p:txBody>
-      </p:sp>
-      <p:sp>
-        <p:nvSpPr>
-          <p:cNvPr id="27" name="Rectangle 26"/>
-          <p:cNvSpPr/>
-          <p:nvPr/>
-        </p:nvSpPr>
-        <p:spPr>
-          <a:xfrm>
-            <a:off x="9109710" y="2651760"/>
-            <a:ext cx="2548890" cy="109728"/>
-          </a:xfrm>
-          <a:prstGeom prst="rect">
+            <a:off x="548640" y="4517136"/>
+            <a:ext cx="146304" cy="146304"/>
+          </a:xfrm>
+          <a:prstGeom prst="ellipse">
             <a:avLst/>
           </a:prstGeom>
           <a:solidFill>
@@ -21593,14 +21314,14 @@
       </p:sp>
       <p:sp>
         <p:nvSpPr>
-          <p:cNvPr id="28" name="TextBox 27"/>
-          <p:cNvSpPr txBox="1"/>
-          <p:nvPr/>
-        </p:nvSpPr>
-        <p:spPr>
-          <a:xfrm>
-            <a:off x="9246870" y="2944368"/>
-            <a:ext cx="2274570" cy="365760"/>
+          <p:cNvPr id="18" name="TextBox 17"/>
+          <p:cNvSpPr txBox="1"/>
+          <p:nvPr/>
+        </p:nvSpPr>
+        <p:spPr>
+          <a:xfrm>
+            <a:off x="868680" y="4434840"/>
+            <a:ext cx="10607040" cy="457200"/>
           </a:xfrm>
           <a:prstGeom prst="rect">
             <a:avLst/>
@@ -21625,29 +21346,29 @@
               </a:spcAft>
             </a:pPr>
             <a:r>
-              <a:rPr sz="1300" b="1">
-                <a:solidFill>
-                  <a:srgbClr val="6366F1"/>
-                </a:solidFill>
-                <a:latin typeface="NanumSquare"/>
-                <a:ea typeface="NanumSquare"/>
-                <a:cs typeface="NanumSquare"/>
-              </a:rPr>
-              <a:t>4</a:t>
-            </a:r>
-          </a:p>
-        </p:txBody>
-      </p:sp>
-      <p:sp>
-        <p:nvSpPr>
-          <p:cNvPr id="29" name="TextBox 28"/>
-          <p:cNvSpPr txBox="1"/>
-          <p:nvPr/>
-        </p:nvSpPr>
-        <p:spPr>
-          <a:xfrm>
-            <a:off x="9246870" y="3310128"/>
-            <a:ext cx="2274570" cy="548640"/>
+              <a:rPr sz="1600" b="1">
+                <a:solidFill>
+                  <a:srgbClr val="0F172A"/>
+                </a:solidFill>
+                <a:latin typeface="NanumGothic"/>
+                <a:ea typeface="NanumGothic"/>
+                <a:cs typeface="NanumGothic"/>
+              </a:rPr>
+              <a:t>사례</a:t>
+            </a:r>
+          </a:p>
+        </p:txBody>
+      </p:sp>
+      <p:sp>
+        <p:nvSpPr>
+          <p:cNvPr id="19" name="TextBox 18"/>
+          <p:cNvSpPr txBox="1"/>
+          <p:nvPr/>
+        </p:nvSpPr>
+        <p:spPr>
+          <a:xfrm>
+            <a:off x="868680" y="4818888"/>
+            <a:ext cx="10607040" cy="457200"/>
           </a:xfrm>
           <a:prstGeom prst="rect">
             <a:avLst/>
@@ -21672,54 +21393,7 @@
               </a:spcAft>
             </a:pPr>
             <a:r>
-              <a:rPr sz="1500" b="1">
-                <a:solidFill>
-                  <a:srgbClr val="0F172A"/>
-                </a:solidFill>
-                <a:latin typeface="NanumGothic"/>
-                <a:ea typeface="NanumGothic"/>
-                <a:cs typeface="NanumGothic"/>
-              </a:rPr>
-              <a:t>생성</a:t>
-            </a:r>
-          </a:p>
-        </p:txBody>
-      </p:sp>
-      <p:sp>
-        <p:nvSpPr>
-          <p:cNvPr id="30" name="TextBox 29"/>
-          <p:cNvSpPr txBox="1"/>
-          <p:nvPr/>
-        </p:nvSpPr>
-        <p:spPr>
-          <a:xfrm>
-            <a:off x="9246870" y="3822192"/>
-            <a:ext cx="2274570" cy="457200"/>
-          </a:xfrm>
-          <a:prstGeom prst="rect">
-            <a:avLst/>
-          </a:prstGeom>
-          <a:noFill/>
-        </p:spPr>
-        <p:txBody>
-          <a:bodyPr wrap="square" anchor="t" lIns="0" rIns="0" tIns="0" bIns="0">
-            <a:spAutoFit/>
-          </a:bodyPr>
-          <a:lstStyle/>
-          <a:p>
-            <a:pPr algn="l">
-              <a:lnSpc>
-                <a:spcPct val="100000"/>
-              </a:lnSpc>
-              <a:spcBef>
-                <a:spcPts val="0"/>
-              </a:spcBef>
-              <a:spcAft>
-                <a:spcPts val="600"/>
-              </a:spcAft>
-            </a:pPr>
-            <a:r>
-              <a:rPr sz="1100" b="0">
+              <a:rPr sz="1300" b="0">
                 <a:solidFill>
                   <a:srgbClr val="64748B"/>
                 </a:solidFill>
@@ -21727,20 +21401,20 @@
                 <a:ea typeface="NanumGothic"/>
                 <a:cs typeface="NanumGothic"/>
               </a:rPr>
-              <a:t>근거 기반으로 답</a:t>
-            </a:r>
-          </a:p>
-        </p:txBody>
-      </p:sp>
-      <p:sp>
-        <p:nvSpPr>
-          <p:cNvPr id="31" name="Rounded Rectangle 30"/>
+              <a:t>Etsy·Spotify 검색/추천이 임베딩 기반</a:t>
+            </a:r>
+          </a:p>
+        </p:txBody>
+      </p:sp>
+      <p:sp>
+        <p:nvSpPr>
+          <p:cNvPr id="20" name="Rounded Rectangle 19"/>
           <p:cNvSpPr/>
           <p:nvPr/>
         </p:nvSpPr>
         <p:spPr>
           <a:xfrm>
-            <a:off x="502920" y="5029200"/>
+            <a:off x="502920" y="5532120"/>
             <a:ext cx="11155680" cy="658368"/>
           </a:xfrm>
           <a:prstGeom prst="roundRect">
@@ -21780,13 +21454,13 @@
       </p:sp>
       <p:sp>
         <p:nvSpPr>
-          <p:cNvPr id="32" name="TextBox 31"/>
-          <p:cNvSpPr txBox="1"/>
-          <p:nvPr/>
-        </p:nvSpPr>
-        <p:spPr>
-          <a:xfrm>
-            <a:off x="777240" y="5029200"/>
+          <p:cNvPr id="21" name="TextBox 20"/>
+          <p:cNvSpPr txBox="1"/>
+          <p:nvPr/>
+        </p:nvSpPr>
+        <p:spPr>
+          <a:xfrm>
+            <a:off x="777240" y="5532120"/>
             <a:ext cx="10607040" cy="658368"/>
           </a:xfrm>
           <a:prstGeom prst="rect">
@@ -21831,14 +21505,14 @@
                 <a:ea typeface="NanumGothic"/>
                 <a:cs typeface="NanumGothic"/>
               </a:rPr>
-              <a:t>외부 지식을 결합해 환각을 줄이고 최신성을 높이는 방식이며, 이어서 각 단계를 차례로 살펴본다.</a:t>
-            </a:r>
-          </a:p>
-        </p:txBody>
-      </p:sp>
-      <p:sp>
-        <p:nvSpPr>
-          <p:cNvPr id="33" name="TextBox 32"/>
+              <a:t>임베딩은 키워드의 일치가 아니라 '의미'의 유사성으로 자료를 찾는다.</a:t>
+            </a:r>
+          </a:p>
+        </p:txBody>
+      </p:sp>
+      <p:sp>
+        <p:nvSpPr>
+          <p:cNvPr id="22" name="TextBox 21"/>
           <p:cNvSpPr txBox="1"/>
           <p:nvPr/>
         </p:nvSpPr>
@@ -21889,7 +21563,7 @@
                 <a:ea typeface="NanumGothic"/>
                 <a:cs typeface="NanumGothic"/>
               </a:rPr>
-              <a:t>   ·   26 / 42</a:t>
+              <a:t>   ·   26 / 43</a:t>
             </a:r>
           </a:p>
         </p:txBody>
@@ -22042,7 +21716,7 @@
                 <a:ea typeface="NanumGothic"/>
                 <a:cs typeface="NanumGothic"/>
               </a:rPr>
-              <a:t>RAG ①</a:t>
+              <a:t>RAG 개요</a:t>
             </a:r>
           </a:p>
         </p:txBody>
@@ -22089,7 +21763,7 @@
                 <a:ea typeface="NanumSquare"/>
                 <a:cs typeface="NanumSquare"/>
               </a:rPr>
-              <a:t>질문 — 무엇을 묻나</a:t>
+              <a:t>검색 증강 생성 (RAG)</a:t>
             </a:r>
           </a:p>
         </p:txBody>
@@ -22187,16 +21861,62 @@
       </p:sp>
       <p:sp>
         <p:nvSpPr>
-          <p:cNvPr id="8" name="Oval 7"/>
+          <p:cNvPr id="8" name="Rounded Rectangle 7"/>
           <p:cNvSpPr/>
           <p:nvPr/>
         </p:nvSpPr>
         <p:spPr>
           <a:xfrm>
-            <a:off x="548640" y="1911096"/>
-            <a:ext cx="146304" cy="146304"/>
-          </a:xfrm>
-          <a:prstGeom prst="ellipse">
+            <a:off x="502920" y="2651760"/>
+            <a:ext cx="2548890" cy="1737360"/>
+          </a:xfrm>
+          <a:prstGeom prst="roundRect">
+            <a:avLst/>
+          </a:prstGeom>
+          <a:solidFill>
+            <a:srgbClr val="F8FAFC"/>
+          </a:solidFill>
+          <a:ln w="12700">
+            <a:solidFill>
+              <a:srgbClr val="E2E8F0"/>
+            </a:solidFill>
+          </a:ln>
+          <a:effectLst/>
+        </p:spPr>
+        <p:style>
+          <a:lnRef idx="1">
+            <a:schemeClr val="accent1"/>
+          </a:lnRef>
+          <a:fillRef idx="3">
+            <a:schemeClr val="accent1"/>
+          </a:fillRef>
+          <a:effectRef idx="2">
+            <a:schemeClr val="accent1"/>
+          </a:effectRef>
+          <a:fontRef idx="minor">
+            <a:schemeClr val="lt1"/>
+          </a:fontRef>
+        </p:style>
+        <p:txBody>
+          <a:bodyPr rtlCol="0" anchor="ctr"/>
+          <a:lstStyle/>
+          <a:p>
+            <a:pPr algn="ctr"/>
+          </a:p>
+        </p:txBody>
+      </p:sp>
+      <p:sp>
+        <p:nvSpPr>
+          <p:cNvPr id="9" name="Rectangle 8"/>
+          <p:cNvSpPr/>
+          <p:nvPr/>
+        </p:nvSpPr>
+        <p:spPr>
+          <a:xfrm>
+            <a:off x="502920" y="2651760"/>
+            <a:ext cx="2548890" cy="109728"/>
+          </a:xfrm>
+          <a:prstGeom prst="rect">
             <a:avLst/>
           </a:prstGeom>
           <a:solidFill>
@@ -22231,14 +21951,14 @@
       </p:sp>
       <p:sp>
         <p:nvSpPr>
-          <p:cNvPr id="9" name="TextBox 8"/>
-          <p:cNvSpPr txBox="1"/>
-          <p:nvPr/>
-        </p:nvSpPr>
-        <p:spPr>
-          <a:xfrm>
-            <a:off x="868680" y="1828800"/>
-            <a:ext cx="10607040" cy="457200"/>
+          <p:cNvPr id="10" name="TextBox 9"/>
+          <p:cNvSpPr txBox="1"/>
+          <p:nvPr/>
+        </p:nvSpPr>
+        <p:spPr>
+          <a:xfrm>
+            <a:off x="640080" y="2944368"/>
+            <a:ext cx="2274570" cy="365760"/>
           </a:xfrm>
           <a:prstGeom prst="rect">
             <a:avLst/>
@@ -22263,7 +21983,54 @@
               </a:spcAft>
             </a:pPr>
             <a:r>
-              <a:rPr sz="1600" b="1">
+              <a:rPr sz="1300" b="1">
+                <a:solidFill>
+                  <a:srgbClr val="6366F1"/>
+                </a:solidFill>
+                <a:latin typeface="NanumSquare"/>
+                <a:ea typeface="NanumSquare"/>
+                <a:cs typeface="NanumSquare"/>
+              </a:rPr>
+              <a:t>1</a:t>
+            </a:r>
+          </a:p>
+        </p:txBody>
+      </p:sp>
+      <p:sp>
+        <p:nvSpPr>
+          <p:cNvPr id="11" name="TextBox 10"/>
+          <p:cNvSpPr txBox="1"/>
+          <p:nvPr/>
+        </p:nvSpPr>
+        <p:spPr>
+          <a:xfrm>
+            <a:off x="640080" y="3310128"/>
+            <a:ext cx="2274570" cy="548640"/>
+          </a:xfrm>
+          <a:prstGeom prst="rect">
+            <a:avLst/>
+          </a:prstGeom>
+          <a:noFill/>
+        </p:spPr>
+        <p:txBody>
+          <a:bodyPr wrap="square" anchor="t" lIns="0" rIns="0" tIns="0" bIns="0">
+            <a:spAutoFit/>
+          </a:bodyPr>
+          <a:lstStyle/>
+          <a:p>
+            <a:pPr algn="l">
+              <a:lnSpc>
+                <a:spcPct val="100000"/>
+              </a:lnSpc>
+              <a:spcBef>
+                <a:spcPts val="0"/>
+              </a:spcBef>
+              <a:spcAft>
+                <a:spcPts val="600"/>
+              </a:spcAft>
+            </a:pPr>
+            <a:r>
+              <a:rPr sz="1500" b="1">
                 <a:solidFill>
                   <a:srgbClr val="0F172A"/>
                 </a:solidFill>
@@ -22271,21 +22038,21 @@
                 <a:ea typeface="NanumGothic"/>
                 <a:cs typeface="NanumGothic"/>
               </a:rPr>
-              <a:t>입력</a:t>
-            </a:r>
-          </a:p>
-        </p:txBody>
-      </p:sp>
-      <p:sp>
-        <p:nvSpPr>
-          <p:cNvPr id="10" name="TextBox 9"/>
-          <p:cNvSpPr txBox="1"/>
-          <p:nvPr/>
-        </p:nvSpPr>
-        <p:spPr>
-          <a:xfrm>
-            <a:off x="868680" y="2212848"/>
-            <a:ext cx="10607040" cy="457200"/>
+              <a:t>질문</a:t>
+            </a:r>
+          </a:p>
+        </p:txBody>
+      </p:sp>
+      <p:sp>
+        <p:nvSpPr>
+          <p:cNvPr id="12" name="TextBox 11"/>
+          <p:cNvSpPr txBox="1"/>
+          <p:nvPr/>
+        </p:nvSpPr>
+        <p:spPr>
+          <a:xfrm>
+            <a:off x="640080" y="3822192"/>
+            <a:ext cx="2274570" cy="457200"/>
           </a:xfrm>
           <a:prstGeom prst="rect">
             <a:avLst/>
@@ -22310,7 +22077,7 @@
               </a:spcAft>
             </a:pPr>
             <a:r>
-              <a:rPr sz="1300" b="0">
+              <a:rPr sz="1100" b="0">
                 <a:solidFill>
                   <a:srgbClr val="64748B"/>
                 </a:solidFill>
@@ -22318,23 +22085,116 @@
                 <a:ea typeface="NanumGothic"/>
                 <a:cs typeface="NanumGothic"/>
               </a:rPr>
-              <a:t>사용자의 질문이 출발점</a:t>
-            </a:r>
-          </a:p>
-        </p:txBody>
-      </p:sp>
-      <p:sp>
-        <p:nvSpPr>
-          <p:cNvPr id="11" name="Oval 10"/>
+              <a:t>사용자 질문</a:t>
+            </a:r>
+          </a:p>
+        </p:txBody>
+      </p:sp>
+      <p:sp>
+        <p:nvSpPr>
+          <p:cNvPr id="13" name="TextBox 12"/>
+          <p:cNvSpPr txBox="1"/>
+          <p:nvPr/>
+        </p:nvSpPr>
+        <p:spPr>
+          <a:xfrm>
+            <a:off x="3097530" y="3154680"/>
+            <a:ext cx="274320" cy="548640"/>
+          </a:xfrm>
+          <a:prstGeom prst="rect">
+            <a:avLst/>
+          </a:prstGeom>
+          <a:noFill/>
+        </p:spPr>
+        <p:txBody>
+          <a:bodyPr wrap="square" anchor="ctr" lIns="0" rIns="0" tIns="0" bIns="0">
+            <a:spAutoFit/>
+          </a:bodyPr>
+          <a:lstStyle/>
+          <a:p>
+            <a:pPr algn="ctr">
+              <a:lnSpc>
+                <a:spcPct val="100000"/>
+              </a:lnSpc>
+              <a:spcBef>
+                <a:spcPts val="0"/>
+              </a:spcBef>
+              <a:spcAft>
+                <a:spcPts val="600"/>
+              </a:spcAft>
+            </a:pPr>
+            <a:r>
+              <a:rPr sz="2200" b="1">
+                <a:solidFill>
+                  <a:srgbClr val="6366F1"/>
+                </a:solidFill>
+                <a:latin typeface="NanumSquare"/>
+                <a:ea typeface="NanumSquare"/>
+                <a:cs typeface="NanumSquare"/>
+              </a:rPr>
+              <a:t>→</a:t>
+            </a:r>
+          </a:p>
+        </p:txBody>
+      </p:sp>
+      <p:sp>
+        <p:nvSpPr>
+          <p:cNvPr id="14" name="Rounded Rectangle 13"/>
           <p:cNvSpPr/>
           <p:nvPr/>
         </p:nvSpPr>
         <p:spPr>
           <a:xfrm>
-            <a:off x="548640" y="2779776"/>
-            <a:ext cx="146304" cy="146304"/>
-          </a:xfrm>
-          <a:prstGeom prst="ellipse">
+            <a:off x="3371850" y="2651760"/>
+            <a:ext cx="2548890" cy="1737360"/>
+          </a:xfrm>
+          <a:prstGeom prst="roundRect">
+            <a:avLst/>
+          </a:prstGeom>
+          <a:solidFill>
+            <a:srgbClr val="F8FAFC"/>
+          </a:solidFill>
+          <a:ln w="12700">
+            <a:solidFill>
+              <a:srgbClr val="E2E8F0"/>
+            </a:solidFill>
+          </a:ln>
+          <a:effectLst/>
+        </p:spPr>
+        <p:style>
+          <a:lnRef idx="1">
+            <a:schemeClr val="accent1"/>
+          </a:lnRef>
+          <a:fillRef idx="3">
+            <a:schemeClr val="accent1"/>
+          </a:fillRef>
+          <a:effectRef idx="2">
+            <a:schemeClr val="accent1"/>
+          </a:effectRef>
+          <a:fontRef idx="minor">
+            <a:schemeClr val="lt1"/>
+          </a:fontRef>
+        </p:style>
+        <p:txBody>
+          <a:bodyPr rtlCol="0" anchor="ctr"/>
+          <a:lstStyle/>
+          <a:p>
+            <a:pPr algn="ctr"/>
+          </a:p>
+        </p:txBody>
+      </p:sp>
+      <p:sp>
+        <p:nvSpPr>
+          <p:cNvPr id="15" name="Rectangle 14"/>
+          <p:cNvSpPr/>
+          <p:nvPr/>
+        </p:nvSpPr>
+        <p:spPr>
+          <a:xfrm>
+            <a:off x="3371850" y="2651760"/>
+            <a:ext cx="2548890" cy="109728"/>
+          </a:xfrm>
+          <a:prstGeom prst="rect">
             <a:avLst/>
           </a:prstGeom>
           <a:solidFill>
@@ -22369,14 +22229,14 @@
       </p:sp>
       <p:sp>
         <p:nvSpPr>
-          <p:cNvPr id="12" name="TextBox 11"/>
-          <p:cNvSpPr txBox="1"/>
-          <p:nvPr/>
-        </p:nvSpPr>
-        <p:spPr>
-          <a:xfrm>
-            <a:off x="868680" y="2697480"/>
-            <a:ext cx="10607040" cy="457200"/>
+          <p:cNvPr id="16" name="TextBox 15"/>
+          <p:cNvSpPr txBox="1"/>
+          <p:nvPr/>
+        </p:nvSpPr>
+        <p:spPr>
+          <a:xfrm>
+            <a:off x="3509010" y="2944368"/>
+            <a:ext cx="2274570" cy="365760"/>
           </a:xfrm>
           <a:prstGeom prst="rect">
             <a:avLst/>
@@ -22401,7 +22261,54 @@
               </a:spcAft>
             </a:pPr>
             <a:r>
-              <a:rPr sz="1600" b="1">
+              <a:rPr sz="1300" b="1">
+                <a:solidFill>
+                  <a:srgbClr val="6366F1"/>
+                </a:solidFill>
+                <a:latin typeface="NanumSquare"/>
+                <a:ea typeface="NanumSquare"/>
+                <a:cs typeface="NanumSquare"/>
+              </a:rPr>
+              <a:t>2</a:t>
+            </a:r>
+          </a:p>
+        </p:txBody>
+      </p:sp>
+      <p:sp>
+        <p:nvSpPr>
+          <p:cNvPr id="17" name="TextBox 16"/>
+          <p:cNvSpPr txBox="1"/>
+          <p:nvPr/>
+        </p:nvSpPr>
+        <p:spPr>
+          <a:xfrm>
+            <a:off x="3509010" y="3310128"/>
+            <a:ext cx="2274570" cy="548640"/>
+          </a:xfrm>
+          <a:prstGeom prst="rect">
+            <a:avLst/>
+          </a:prstGeom>
+          <a:noFill/>
+        </p:spPr>
+        <p:txBody>
+          <a:bodyPr wrap="square" anchor="t" lIns="0" rIns="0" tIns="0" bIns="0">
+            <a:spAutoFit/>
+          </a:bodyPr>
+          <a:lstStyle/>
+          <a:p>
+            <a:pPr algn="l">
+              <a:lnSpc>
+                <a:spcPct val="100000"/>
+              </a:lnSpc>
+              <a:spcBef>
+                <a:spcPts val="0"/>
+              </a:spcBef>
+              <a:spcAft>
+                <a:spcPts val="600"/>
+              </a:spcAft>
+            </a:pPr>
+            <a:r>
+              <a:rPr sz="1500" b="1">
                 <a:solidFill>
                   <a:srgbClr val="0F172A"/>
                 </a:solidFill>
@@ -22409,21 +22316,21 @@
                 <a:ea typeface="NanumGothic"/>
                 <a:cs typeface="NanumGothic"/>
               </a:rPr>
-              <a:t>필요시 분해</a:t>
-            </a:r>
-          </a:p>
-        </p:txBody>
-      </p:sp>
-      <p:sp>
-        <p:nvSpPr>
-          <p:cNvPr id="13" name="TextBox 12"/>
-          <p:cNvSpPr txBox="1"/>
-          <p:nvPr/>
-        </p:nvSpPr>
-        <p:spPr>
-          <a:xfrm>
-            <a:off x="868680" y="3081528"/>
-            <a:ext cx="10607040" cy="457200"/>
+              <a:t>검색</a:t>
+            </a:r>
+          </a:p>
+        </p:txBody>
+      </p:sp>
+      <p:sp>
+        <p:nvSpPr>
+          <p:cNvPr id="18" name="TextBox 17"/>
+          <p:cNvSpPr txBox="1"/>
+          <p:nvPr/>
+        </p:nvSpPr>
+        <p:spPr>
+          <a:xfrm>
+            <a:off x="3509010" y="3822192"/>
+            <a:ext cx="2274570" cy="457200"/>
           </a:xfrm>
           <a:prstGeom prst="rect">
             <a:avLst/>
@@ -22448,7 +22355,7 @@
               </a:spcAft>
             </a:pPr>
             <a:r>
-              <a:rPr sz="1300" b="0">
+              <a:rPr sz="1100" b="0">
                 <a:solidFill>
                   <a:srgbClr val="64748B"/>
                 </a:solidFill>
@@ -22456,23 +22363,116 @@
                 <a:ea typeface="NanumGothic"/>
                 <a:cs typeface="NanumGothic"/>
               </a:rPr>
-              <a:t>큰 질문이면 검색 가능한 작은 질의로</a:t>
-            </a:r>
-          </a:p>
-        </p:txBody>
-      </p:sp>
-      <p:sp>
-        <p:nvSpPr>
-          <p:cNvPr id="14" name="Oval 13"/>
+              <a:t>관련 문서 찾기(임베딩)</a:t>
+            </a:r>
+          </a:p>
+        </p:txBody>
+      </p:sp>
+      <p:sp>
+        <p:nvSpPr>
+          <p:cNvPr id="19" name="TextBox 18"/>
+          <p:cNvSpPr txBox="1"/>
+          <p:nvPr/>
+        </p:nvSpPr>
+        <p:spPr>
+          <a:xfrm>
+            <a:off x="5966460" y="3154680"/>
+            <a:ext cx="274320" cy="548640"/>
+          </a:xfrm>
+          <a:prstGeom prst="rect">
+            <a:avLst/>
+          </a:prstGeom>
+          <a:noFill/>
+        </p:spPr>
+        <p:txBody>
+          <a:bodyPr wrap="square" anchor="ctr" lIns="0" rIns="0" tIns="0" bIns="0">
+            <a:spAutoFit/>
+          </a:bodyPr>
+          <a:lstStyle/>
+          <a:p>
+            <a:pPr algn="ctr">
+              <a:lnSpc>
+                <a:spcPct val="100000"/>
+              </a:lnSpc>
+              <a:spcBef>
+                <a:spcPts val="0"/>
+              </a:spcBef>
+              <a:spcAft>
+                <a:spcPts val="600"/>
+              </a:spcAft>
+            </a:pPr>
+            <a:r>
+              <a:rPr sz="2200" b="1">
+                <a:solidFill>
+                  <a:srgbClr val="6366F1"/>
+                </a:solidFill>
+                <a:latin typeface="NanumSquare"/>
+                <a:ea typeface="NanumSquare"/>
+                <a:cs typeface="NanumSquare"/>
+              </a:rPr>
+              <a:t>→</a:t>
+            </a:r>
+          </a:p>
+        </p:txBody>
+      </p:sp>
+      <p:sp>
+        <p:nvSpPr>
+          <p:cNvPr id="20" name="Rounded Rectangle 19"/>
           <p:cNvSpPr/>
           <p:nvPr/>
         </p:nvSpPr>
         <p:spPr>
           <a:xfrm>
-            <a:off x="548640" y="3648456"/>
-            <a:ext cx="146304" cy="146304"/>
-          </a:xfrm>
-          <a:prstGeom prst="ellipse">
+            <a:off x="6240780" y="2651760"/>
+            <a:ext cx="2548890" cy="1737360"/>
+          </a:xfrm>
+          <a:prstGeom prst="roundRect">
+            <a:avLst/>
+          </a:prstGeom>
+          <a:solidFill>
+            <a:srgbClr val="F8FAFC"/>
+          </a:solidFill>
+          <a:ln w="12700">
+            <a:solidFill>
+              <a:srgbClr val="E2E8F0"/>
+            </a:solidFill>
+          </a:ln>
+          <a:effectLst/>
+        </p:spPr>
+        <p:style>
+          <a:lnRef idx="1">
+            <a:schemeClr val="accent1"/>
+          </a:lnRef>
+          <a:fillRef idx="3">
+            <a:schemeClr val="accent1"/>
+          </a:fillRef>
+          <a:effectRef idx="2">
+            <a:schemeClr val="accent1"/>
+          </a:effectRef>
+          <a:fontRef idx="minor">
+            <a:schemeClr val="lt1"/>
+          </a:fontRef>
+        </p:style>
+        <p:txBody>
+          <a:bodyPr rtlCol="0" anchor="ctr"/>
+          <a:lstStyle/>
+          <a:p>
+            <a:pPr algn="ctr"/>
+          </a:p>
+        </p:txBody>
+      </p:sp>
+      <p:sp>
+        <p:nvSpPr>
+          <p:cNvPr id="21" name="Rectangle 20"/>
+          <p:cNvSpPr/>
+          <p:nvPr/>
+        </p:nvSpPr>
+        <p:spPr>
+          <a:xfrm>
+            <a:off x="6240780" y="2651760"/>
+            <a:ext cx="2548890" cy="109728"/>
+          </a:xfrm>
+          <a:prstGeom prst="rect">
             <a:avLst/>
           </a:prstGeom>
           <a:solidFill>
@@ -22507,14 +22507,14 @@
       </p:sp>
       <p:sp>
         <p:nvSpPr>
-          <p:cNvPr id="15" name="TextBox 14"/>
-          <p:cNvSpPr txBox="1"/>
-          <p:nvPr/>
-        </p:nvSpPr>
-        <p:spPr>
-          <a:xfrm>
-            <a:off x="868680" y="3566160"/>
-            <a:ext cx="10607040" cy="457200"/>
+          <p:cNvPr id="22" name="TextBox 21"/>
+          <p:cNvSpPr txBox="1"/>
+          <p:nvPr/>
+        </p:nvSpPr>
+        <p:spPr>
+          <a:xfrm>
+            <a:off x="6377940" y="2944368"/>
+            <a:ext cx="2274570" cy="365760"/>
           </a:xfrm>
           <a:prstGeom prst="rect">
             <a:avLst/>
@@ -22539,7 +22539,54 @@
               </a:spcAft>
             </a:pPr>
             <a:r>
-              <a:rPr sz="1600" b="1">
+              <a:rPr sz="1300" b="1">
+                <a:solidFill>
+                  <a:srgbClr val="6366F1"/>
+                </a:solidFill>
+                <a:latin typeface="NanumSquare"/>
+                <a:ea typeface="NanumSquare"/>
+                <a:cs typeface="NanumSquare"/>
+              </a:rPr>
+              <a:t>3</a:t>
+            </a:r>
+          </a:p>
+        </p:txBody>
+      </p:sp>
+      <p:sp>
+        <p:nvSpPr>
+          <p:cNvPr id="23" name="TextBox 22"/>
+          <p:cNvSpPr txBox="1"/>
+          <p:nvPr/>
+        </p:nvSpPr>
+        <p:spPr>
+          <a:xfrm>
+            <a:off x="6377940" y="3310128"/>
+            <a:ext cx="2274570" cy="548640"/>
+          </a:xfrm>
+          <a:prstGeom prst="rect">
+            <a:avLst/>
+          </a:prstGeom>
+          <a:noFill/>
+        </p:spPr>
+        <p:txBody>
+          <a:bodyPr wrap="square" anchor="t" lIns="0" rIns="0" tIns="0" bIns="0">
+            <a:spAutoFit/>
+          </a:bodyPr>
+          <a:lstStyle/>
+          <a:p>
+            <a:pPr algn="l">
+              <a:lnSpc>
+                <a:spcPct val="100000"/>
+              </a:lnSpc>
+              <a:spcBef>
+                <a:spcPts val="0"/>
+              </a:spcBef>
+              <a:spcAft>
+                <a:spcPts val="600"/>
+              </a:spcAft>
+            </a:pPr>
+            <a:r>
+              <a:rPr sz="1500" b="1">
                 <a:solidFill>
                   <a:srgbClr val="0F172A"/>
                 </a:solidFill>
@@ -22547,21 +22594,21 @@
                 <a:ea typeface="NanumGothic"/>
                 <a:cs typeface="NanumGothic"/>
               </a:rPr>
-              <a:t>목표</a:t>
-            </a:r>
-          </a:p>
-        </p:txBody>
-      </p:sp>
-      <p:sp>
-        <p:nvSpPr>
-          <p:cNvPr id="16" name="TextBox 15"/>
-          <p:cNvSpPr txBox="1"/>
-          <p:nvPr/>
-        </p:nvSpPr>
-        <p:spPr>
-          <a:xfrm>
-            <a:off x="868680" y="3950208"/>
-            <a:ext cx="10607040" cy="457200"/>
+              <a:t>주입</a:t>
+            </a:r>
+          </a:p>
+        </p:txBody>
+      </p:sp>
+      <p:sp>
+        <p:nvSpPr>
+          <p:cNvPr id="24" name="TextBox 23"/>
+          <p:cNvSpPr txBox="1"/>
+          <p:nvPr/>
+        </p:nvSpPr>
+        <p:spPr>
+          <a:xfrm>
+            <a:off x="6377940" y="3822192"/>
+            <a:ext cx="2274570" cy="457200"/>
           </a:xfrm>
           <a:prstGeom prst="rect">
             <a:avLst/>
@@ -22586,22 +22633,404 @@
               </a:spcAft>
             </a:pPr>
             <a:r>
+              <a:rPr sz="1100" b="0">
+                <a:solidFill>
+                  <a:srgbClr val="64748B"/>
+                </a:solidFill>
+                <a:latin typeface="NanumGothic"/>
+                <a:ea typeface="NanumGothic"/>
+                <a:cs typeface="NanumGothic"/>
+              </a:rPr>
+              <a:t>찾은 근거를 프롬프트에</a:t>
+            </a:r>
+          </a:p>
+        </p:txBody>
+      </p:sp>
+      <p:sp>
+        <p:nvSpPr>
+          <p:cNvPr id="25" name="TextBox 24"/>
+          <p:cNvSpPr txBox="1"/>
+          <p:nvPr/>
+        </p:nvSpPr>
+        <p:spPr>
+          <a:xfrm>
+            <a:off x="8835390" y="3154680"/>
+            <a:ext cx="274320" cy="548640"/>
+          </a:xfrm>
+          <a:prstGeom prst="rect">
+            <a:avLst/>
+          </a:prstGeom>
+          <a:noFill/>
+        </p:spPr>
+        <p:txBody>
+          <a:bodyPr wrap="square" anchor="ctr" lIns="0" rIns="0" tIns="0" bIns="0">
+            <a:spAutoFit/>
+          </a:bodyPr>
+          <a:lstStyle/>
+          <a:p>
+            <a:pPr algn="ctr">
+              <a:lnSpc>
+                <a:spcPct val="100000"/>
+              </a:lnSpc>
+              <a:spcBef>
+                <a:spcPts val="0"/>
+              </a:spcBef>
+              <a:spcAft>
+                <a:spcPts val="600"/>
+              </a:spcAft>
+            </a:pPr>
+            <a:r>
+              <a:rPr sz="2200" b="1">
+                <a:solidFill>
+                  <a:srgbClr val="6366F1"/>
+                </a:solidFill>
+                <a:latin typeface="NanumSquare"/>
+                <a:ea typeface="NanumSquare"/>
+                <a:cs typeface="NanumSquare"/>
+              </a:rPr>
+              <a:t>→</a:t>
+            </a:r>
+          </a:p>
+        </p:txBody>
+      </p:sp>
+      <p:sp>
+        <p:nvSpPr>
+          <p:cNvPr id="26" name="Rounded Rectangle 25"/>
+          <p:cNvSpPr/>
+          <p:nvPr/>
+        </p:nvSpPr>
+        <p:spPr>
+          <a:xfrm>
+            <a:off x="9109710" y="2651760"/>
+            <a:ext cx="2548890" cy="1737360"/>
+          </a:xfrm>
+          <a:prstGeom prst="roundRect">
+            <a:avLst/>
+          </a:prstGeom>
+          <a:solidFill>
+            <a:srgbClr val="F8FAFC"/>
+          </a:solidFill>
+          <a:ln w="12700">
+            <a:solidFill>
+              <a:srgbClr val="E2E8F0"/>
+            </a:solidFill>
+          </a:ln>
+          <a:effectLst/>
+        </p:spPr>
+        <p:style>
+          <a:lnRef idx="1">
+            <a:schemeClr val="accent1"/>
+          </a:lnRef>
+          <a:fillRef idx="3">
+            <a:schemeClr val="accent1"/>
+          </a:fillRef>
+          <a:effectRef idx="2">
+            <a:schemeClr val="accent1"/>
+          </a:effectRef>
+          <a:fontRef idx="minor">
+            <a:schemeClr val="lt1"/>
+          </a:fontRef>
+        </p:style>
+        <p:txBody>
+          <a:bodyPr rtlCol="0" anchor="ctr"/>
+          <a:lstStyle/>
+          <a:p>
+            <a:pPr algn="ctr"/>
+          </a:p>
+        </p:txBody>
+      </p:sp>
+      <p:sp>
+        <p:nvSpPr>
+          <p:cNvPr id="27" name="Rectangle 26"/>
+          <p:cNvSpPr/>
+          <p:nvPr/>
+        </p:nvSpPr>
+        <p:spPr>
+          <a:xfrm>
+            <a:off x="9109710" y="2651760"/>
+            <a:ext cx="2548890" cy="109728"/>
+          </a:xfrm>
+          <a:prstGeom prst="rect">
+            <a:avLst/>
+          </a:prstGeom>
+          <a:solidFill>
+            <a:srgbClr val="6366F1"/>
+          </a:solidFill>
+          <a:ln>
+            <a:noFill/>
+          </a:ln>
+          <a:effectLst/>
+        </p:spPr>
+        <p:style>
+          <a:lnRef idx="1">
+            <a:schemeClr val="accent1"/>
+          </a:lnRef>
+          <a:fillRef idx="3">
+            <a:schemeClr val="accent1"/>
+          </a:fillRef>
+          <a:effectRef idx="2">
+            <a:schemeClr val="accent1"/>
+          </a:effectRef>
+          <a:fontRef idx="minor">
+            <a:schemeClr val="lt1"/>
+          </a:fontRef>
+        </p:style>
+        <p:txBody>
+          <a:bodyPr rtlCol="0" anchor="ctr"/>
+          <a:lstStyle/>
+          <a:p>
+            <a:pPr algn="ctr"/>
+          </a:p>
+        </p:txBody>
+      </p:sp>
+      <p:sp>
+        <p:nvSpPr>
+          <p:cNvPr id="28" name="TextBox 27"/>
+          <p:cNvSpPr txBox="1"/>
+          <p:nvPr/>
+        </p:nvSpPr>
+        <p:spPr>
+          <a:xfrm>
+            <a:off x="9246870" y="2944368"/>
+            <a:ext cx="2274570" cy="365760"/>
+          </a:xfrm>
+          <a:prstGeom prst="rect">
+            <a:avLst/>
+          </a:prstGeom>
+          <a:noFill/>
+        </p:spPr>
+        <p:txBody>
+          <a:bodyPr wrap="square" anchor="t" lIns="0" rIns="0" tIns="0" bIns="0">
+            <a:spAutoFit/>
+          </a:bodyPr>
+          <a:lstStyle/>
+          <a:p>
+            <a:pPr algn="l">
+              <a:lnSpc>
+                <a:spcPct val="100000"/>
+              </a:lnSpc>
+              <a:spcBef>
+                <a:spcPts val="0"/>
+              </a:spcBef>
+              <a:spcAft>
+                <a:spcPts val="600"/>
+              </a:spcAft>
+            </a:pPr>
+            <a:r>
+              <a:rPr sz="1300" b="1">
+                <a:solidFill>
+                  <a:srgbClr val="6366F1"/>
+                </a:solidFill>
+                <a:latin typeface="NanumSquare"/>
+                <a:ea typeface="NanumSquare"/>
+                <a:cs typeface="NanumSquare"/>
+              </a:rPr>
+              <a:t>4</a:t>
+            </a:r>
+          </a:p>
+        </p:txBody>
+      </p:sp>
+      <p:sp>
+        <p:nvSpPr>
+          <p:cNvPr id="29" name="TextBox 28"/>
+          <p:cNvSpPr txBox="1"/>
+          <p:nvPr/>
+        </p:nvSpPr>
+        <p:spPr>
+          <a:xfrm>
+            <a:off x="9246870" y="3310128"/>
+            <a:ext cx="2274570" cy="548640"/>
+          </a:xfrm>
+          <a:prstGeom prst="rect">
+            <a:avLst/>
+          </a:prstGeom>
+          <a:noFill/>
+        </p:spPr>
+        <p:txBody>
+          <a:bodyPr wrap="square" anchor="t" lIns="0" rIns="0" tIns="0" bIns="0">
+            <a:spAutoFit/>
+          </a:bodyPr>
+          <a:lstStyle/>
+          <a:p>
+            <a:pPr algn="l">
+              <a:lnSpc>
+                <a:spcPct val="100000"/>
+              </a:lnSpc>
+              <a:spcBef>
+                <a:spcPts val="0"/>
+              </a:spcBef>
+              <a:spcAft>
+                <a:spcPts val="600"/>
+              </a:spcAft>
+            </a:pPr>
+            <a:r>
+              <a:rPr sz="1500" b="1">
+                <a:solidFill>
+                  <a:srgbClr val="0F172A"/>
+                </a:solidFill>
+                <a:latin typeface="NanumGothic"/>
+                <a:ea typeface="NanumGothic"/>
+                <a:cs typeface="NanumGothic"/>
+              </a:rPr>
+              <a:t>생성</a:t>
+            </a:r>
+          </a:p>
+        </p:txBody>
+      </p:sp>
+      <p:sp>
+        <p:nvSpPr>
+          <p:cNvPr id="30" name="TextBox 29"/>
+          <p:cNvSpPr txBox="1"/>
+          <p:nvPr/>
+        </p:nvSpPr>
+        <p:spPr>
+          <a:xfrm>
+            <a:off x="9246870" y="3822192"/>
+            <a:ext cx="2274570" cy="457200"/>
+          </a:xfrm>
+          <a:prstGeom prst="rect">
+            <a:avLst/>
+          </a:prstGeom>
+          <a:noFill/>
+        </p:spPr>
+        <p:txBody>
+          <a:bodyPr wrap="square" anchor="t" lIns="0" rIns="0" tIns="0" bIns="0">
+            <a:spAutoFit/>
+          </a:bodyPr>
+          <a:lstStyle/>
+          <a:p>
+            <a:pPr algn="l">
+              <a:lnSpc>
+                <a:spcPct val="100000"/>
+              </a:lnSpc>
+              <a:spcBef>
+                <a:spcPts val="0"/>
+              </a:spcBef>
+              <a:spcAft>
+                <a:spcPts val="600"/>
+              </a:spcAft>
+            </a:pPr>
+            <a:r>
+              <a:rPr sz="1100" b="0">
+                <a:solidFill>
+                  <a:srgbClr val="64748B"/>
+                </a:solidFill>
+                <a:latin typeface="NanumGothic"/>
+                <a:ea typeface="NanumGothic"/>
+                <a:cs typeface="NanumGothic"/>
+              </a:rPr>
+              <a:t>근거 기반으로 답</a:t>
+            </a:r>
+          </a:p>
+        </p:txBody>
+      </p:sp>
+      <p:sp>
+        <p:nvSpPr>
+          <p:cNvPr id="31" name="Rounded Rectangle 30"/>
+          <p:cNvSpPr/>
+          <p:nvPr/>
+        </p:nvSpPr>
+        <p:spPr>
+          <a:xfrm>
+            <a:off x="502920" y="5029200"/>
+            <a:ext cx="11155680" cy="658368"/>
+          </a:xfrm>
+          <a:prstGeom prst="roundRect">
+            <a:avLst/>
+          </a:prstGeom>
+          <a:solidFill>
+            <a:srgbClr val="F1F5F9"/>
+          </a:solidFill>
+          <a:ln w="12700">
+            <a:solidFill>
+              <a:srgbClr val="E2E8F0"/>
+            </a:solidFill>
+          </a:ln>
+          <a:effectLst/>
+        </p:spPr>
+        <p:style>
+          <a:lnRef idx="1">
+            <a:schemeClr val="accent1"/>
+          </a:lnRef>
+          <a:fillRef idx="3">
+            <a:schemeClr val="accent1"/>
+          </a:fillRef>
+          <a:effectRef idx="2">
+            <a:schemeClr val="accent1"/>
+          </a:effectRef>
+          <a:fontRef idx="minor">
+            <a:schemeClr val="lt1"/>
+          </a:fontRef>
+        </p:style>
+        <p:txBody>
+          <a:bodyPr rtlCol="0" anchor="ctr"/>
+          <a:lstStyle/>
+          <a:p>
+            <a:pPr algn="ctr"/>
+          </a:p>
+        </p:txBody>
+      </p:sp>
+      <p:sp>
+        <p:nvSpPr>
+          <p:cNvPr id="32" name="TextBox 31"/>
+          <p:cNvSpPr txBox="1"/>
+          <p:nvPr/>
+        </p:nvSpPr>
+        <p:spPr>
+          <a:xfrm>
+            <a:off x="777240" y="5029200"/>
+            <a:ext cx="10607040" cy="658368"/>
+          </a:xfrm>
+          <a:prstGeom prst="rect">
+            <a:avLst/>
+          </a:prstGeom>
+          <a:noFill/>
+        </p:spPr>
+        <p:txBody>
+          <a:bodyPr wrap="square" anchor="ctr" lIns="0" rIns="0" tIns="0" bIns="0">
+            <a:spAutoFit/>
+          </a:bodyPr>
+          <a:lstStyle/>
+          <a:p>
+            <a:pPr algn="l">
+              <a:lnSpc>
+                <a:spcPct val="100000"/>
+              </a:lnSpc>
+              <a:spcBef>
+                <a:spcPts val="0"/>
+              </a:spcBef>
+              <a:spcAft>
+                <a:spcPts val="600"/>
+              </a:spcAft>
+            </a:pPr>
+            <a:r>
+              <a:rPr sz="1200" b="1">
+                <a:solidFill>
+                  <a:srgbClr val="6366F1"/>
+                </a:solidFill>
+                <a:latin typeface="NanumGothic"/>
+                <a:ea typeface="NanumGothic"/>
+                <a:cs typeface="NanumGothic"/>
+              </a:rPr>
+              <a:t>NOTE   </a:t>
+            </a:r>
+            <a:r>
               <a:rPr sz="1300" b="0">
                 <a:solidFill>
-                  <a:srgbClr val="64748B"/>
-                </a:solidFill>
-                <a:latin typeface="NanumGothic"/>
-                <a:ea typeface="NanumGothic"/>
-                <a:cs typeface="NanumGothic"/>
-              </a:rPr>
-              <a:t>'무슨 근거를 찾아야 하나'를 정한다</a:t>
-            </a:r>
-          </a:p>
-        </p:txBody>
-      </p:sp>
-      <p:sp>
-        <p:nvSpPr>
-          <p:cNvPr id="17" name="TextBox 16"/>
+                  <a:srgbClr val="0F172A"/>
+                </a:solidFill>
+                <a:latin typeface="NanumGothic"/>
+                <a:ea typeface="NanumGothic"/>
+                <a:cs typeface="NanumGothic"/>
+              </a:rPr>
+              <a:t>외부 지식을 결합해 환각을 줄이고 최신성을 높이는 방식이며, 이어서 각 단계를 차례로 살펴본다.</a:t>
+            </a:r>
+          </a:p>
+        </p:txBody>
+      </p:sp>
+      <p:sp>
+        <p:nvSpPr>
+          <p:cNvPr id="33" name="TextBox 32"/>
           <p:cNvSpPr txBox="1"/>
           <p:nvPr/>
         </p:nvSpPr>
@@ -22652,7 +23081,7 @@
                 <a:ea typeface="NanumGothic"/>
                 <a:cs typeface="NanumGothic"/>
               </a:rPr>
-              <a:t>   ·   27 / 42</a:t>
+              <a:t>   ·   27 / 43</a:t>
             </a:r>
           </a:p>
         </p:txBody>
@@ -22805,7 +23234,7 @@
                 <a:ea typeface="NanumGothic"/>
                 <a:cs typeface="NanumGothic"/>
               </a:rPr>
-              <a:t>RAG ②</a:t>
+              <a:t>RAG ①</a:t>
             </a:r>
           </a:p>
         </p:txBody>
@@ -22852,7 +23281,7 @@
                 <a:ea typeface="NanumSquare"/>
                 <a:cs typeface="NanumSquare"/>
               </a:rPr>
-              <a:t>검색 — 관련 문서 찾기</a:t>
+              <a:t>질문 — 무엇을 묻나</a:t>
             </a:r>
           </a:p>
         </p:txBody>
@@ -23034,7 +23463,7 @@
                 <a:ea typeface="NanumGothic"/>
                 <a:cs typeface="NanumGothic"/>
               </a:rPr>
-              <a:t>방법</a:t>
+              <a:t>입력</a:t>
             </a:r>
           </a:p>
         </p:txBody>
@@ -23081,7 +23510,7 @@
                 <a:ea typeface="NanumGothic"/>
                 <a:cs typeface="NanumGothic"/>
               </a:rPr>
-              <a:t>질문을 임베딩해 '의미가 가까운' 문서를 검색</a:t>
+              <a:t>사용자의 질문이 출발점</a:t>
             </a:r>
           </a:p>
         </p:txBody>
@@ -23172,7 +23601,7 @@
                 <a:ea typeface="NanumGothic"/>
                 <a:cs typeface="NanumGothic"/>
               </a:rPr>
-              <a:t>대상</a:t>
+              <a:t>필요시 분해</a:t>
             </a:r>
           </a:p>
         </p:txBody>
@@ -23219,7 +23648,7 @@
                 <a:ea typeface="NanumGothic"/>
                 <a:cs typeface="NanumGothic"/>
               </a:rPr>
-              <a:t>문서 폴더·DB·웹 등 (이번 프로젝트는 로컬 corpus)</a:t>
+              <a:t>큰 질문이면 검색 가능한 작은 질의로</a:t>
             </a:r>
           </a:p>
         </p:txBody>
@@ -23310,7 +23739,7 @@
                 <a:ea typeface="NanumGothic"/>
                 <a:cs typeface="NanumGothic"/>
               </a:rPr>
-              <a:t>결과</a:t>
+              <a:t>목표</a:t>
             </a:r>
           </a:p>
         </p:txBody>
@@ -23357,118 +23786,14 @@
                 <a:ea typeface="NanumGothic"/>
                 <a:cs typeface="NanumGothic"/>
               </a:rPr>
-              <a:t>관련 문단 몇 개 + 출처</a:t>
-            </a:r>
-          </a:p>
-        </p:txBody>
-      </p:sp>
-      <p:sp>
-        <p:nvSpPr>
-          <p:cNvPr id="17" name="Rounded Rectangle 16"/>
-          <p:cNvSpPr/>
-          <p:nvPr/>
-        </p:nvSpPr>
-        <p:spPr>
-          <a:xfrm>
-            <a:off x="502920" y="5532120"/>
-            <a:ext cx="11155680" cy="658368"/>
-          </a:xfrm>
-          <a:prstGeom prst="roundRect">
-            <a:avLst/>
-          </a:prstGeom>
-          <a:solidFill>
-            <a:srgbClr val="F1F5F9"/>
-          </a:solidFill>
-          <a:ln w="12700">
-            <a:solidFill>
-              <a:srgbClr val="E2E8F0"/>
-            </a:solidFill>
-          </a:ln>
-          <a:effectLst/>
-        </p:spPr>
-        <p:style>
-          <a:lnRef idx="1">
-            <a:schemeClr val="accent1"/>
-          </a:lnRef>
-          <a:fillRef idx="3">
-            <a:schemeClr val="accent1"/>
-          </a:fillRef>
-          <a:effectRef idx="2">
-            <a:schemeClr val="accent1"/>
-          </a:effectRef>
-          <a:fontRef idx="minor">
-            <a:schemeClr val="lt1"/>
-          </a:fontRef>
-        </p:style>
-        <p:txBody>
-          <a:bodyPr rtlCol="0" anchor="ctr"/>
-          <a:lstStyle/>
-          <a:p>
-            <a:pPr algn="ctr"/>
-          </a:p>
-        </p:txBody>
-      </p:sp>
-      <p:sp>
-        <p:nvSpPr>
-          <p:cNvPr id="18" name="TextBox 17"/>
-          <p:cNvSpPr txBox="1"/>
-          <p:nvPr/>
-        </p:nvSpPr>
-        <p:spPr>
-          <a:xfrm>
-            <a:off x="777240" y="5532120"/>
-            <a:ext cx="10607040" cy="658368"/>
-          </a:xfrm>
-          <a:prstGeom prst="rect">
-            <a:avLst/>
-          </a:prstGeom>
-          <a:noFill/>
-        </p:spPr>
-        <p:txBody>
-          <a:bodyPr wrap="square" anchor="ctr" lIns="0" rIns="0" tIns="0" bIns="0">
-            <a:spAutoFit/>
-          </a:bodyPr>
-          <a:lstStyle/>
-          <a:p>
-            <a:pPr algn="l">
-              <a:lnSpc>
-                <a:spcPct val="100000"/>
-              </a:lnSpc>
-              <a:spcBef>
-                <a:spcPts val="0"/>
-              </a:spcBef>
-              <a:spcAft>
-                <a:spcPts val="600"/>
-              </a:spcAft>
-            </a:pPr>
-            <a:r>
-              <a:rPr sz="1200" b="1">
-                <a:solidFill>
-                  <a:srgbClr val="6366F1"/>
-                </a:solidFill>
-                <a:latin typeface="NanumGothic"/>
-                <a:ea typeface="NanumGothic"/>
-                <a:cs typeface="NanumGothic"/>
-              </a:rPr>
-              <a:t>NOTE   </a:t>
-            </a:r>
-            <a:r>
-              <a:rPr sz="1300" b="0">
-                <a:solidFill>
-                  <a:srgbClr val="0F172A"/>
-                </a:solidFill>
-                <a:latin typeface="NanumGothic"/>
-                <a:ea typeface="NanumGothic"/>
-                <a:cs typeface="NanumGothic"/>
-              </a:rPr>
-              <a:t>오늘 학습한 임베딩이 바로 이 검색 단계에서 활용된다.</a:t>
-            </a:r>
-          </a:p>
-        </p:txBody>
-      </p:sp>
-      <p:sp>
-        <p:nvSpPr>
-          <p:cNvPr id="19" name="TextBox 18"/>
+              <a:t>'무슨 근거를 찾아야 하나'를 정한다</a:t>
+            </a:r>
+          </a:p>
+        </p:txBody>
+      </p:sp>
+      <p:sp>
+        <p:nvSpPr>
+          <p:cNvPr id="17" name="TextBox 16"/>
           <p:cNvSpPr txBox="1"/>
           <p:nvPr/>
         </p:nvSpPr>
@@ -23519,7 +23844,7 @@
                 <a:ea typeface="NanumGothic"/>
                 <a:cs typeface="NanumGothic"/>
               </a:rPr>
-              <a:t>   ·   28 / 42</a:t>
+              <a:t>   ·   28 / 43</a:t>
             </a:r>
           </a:p>
         </p:txBody>
@@ -23672,7 +23997,7 @@
                 <a:ea typeface="NanumGothic"/>
                 <a:cs typeface="NanumGothic"/>
               </a:rPr>
-              <a:t>RAG ③</a:t>
+              <a:t>RAG ②</a:t>
             </a:r>
           </a:p>
         </p:txBody>
@@ -23719,7 +24044,7 @@
                 <a:ea typeface="NanumSquare"/>
                 <a:cs typeface="NanumSquare"/>
               </a:rPr>
-              <a:t>주입 — 근거를 프롬프트에</a:t>
+              <a:t>검색 — 관련 문서 찾기</a:t>
             </a:r>
           </a:p>
         </p:txBody>
@@ -23901,7 +24226,7 @@
                 <a:ea typeface="NanumGothic"/>
                 <a:cs typeface="NanumGothic"/>
               </a:rPr>
-              <a:t>무엇</a:t>
+              <a:t>방법</a:t>
             </a:r>
           </a:p>
         </p:txBody>
@@ -23948,7 +24273,7 @@
                 <a:ea typeface="NanumGothic"/>
                 <a:cs typeface="NanumGothic"/>
               </a:rPr>
-              <a:t>찾은 문단을 프롬프트 안에 같이 넣어줌</a:t>
+              <a:t>질문을 임베딩해 '의미가 가까운' 문서를 검색</a:t>
             </a:r>
           </a:p>
         </p:txBody>
@@ -24039,7 +24364,7 @@
                 <a:ea typeface="NanumGothic"/>
                 <a:cs typeface="NanumGothic"/>
               </a:rPr>
-              <a:t>효과</a:t>
+              <a:t>대상</a:t>
             </a:r>
           </a:p>
         </p:txBody>
@@ -24086,7 +24411,7 @@
                 <a:ea typeface="NanumGothic"/>
                 <a:cs typeface="NanumGothic"/>
               </a:rPr>
-              <a:t>모델이 '기억'이 아니라 '눈앞의 근거'로 답하게</a:t>
+              <a:t>문서 폴더·DB·웹 등 (이번 프로젝트는 로컬 corpus)</a:t>
             </a:r>
           </a:p>
         </p:txBody>
@@ -24177,7 +24502,7 @@
                 <a:ea typeface="NanumGothic"/>
                 <a:cs typeface="NanumGothic"/>
               </a:rPr>
-              <a:t>주의</a:t>
+              <a:t>결과</a:t>
             </a:r>
           </a:p>
         </p:txBody>
@@ -24224,14 +24549,118 @@
                 <a:ea typeface="NanumGothic"/>
                 <a:cs typeface="NanumGothic"/>
               </a:rPr>
-              <a:t>너무 많이 넣으면 컨텍스트 한계·비용↑</a:t>
-            </a:r>
-          </a:p>
-        </p:txBody>
-      </p:sp>
-      <p:sp>
-        <p:nvSpPr>
-          <p:cNvPr id="17" name="TextBox 16"/>
+              <a:t>관련 문단 몇 개 + 출처</a:t>
+            </a:r>
+          </a:p>
+        </p:txBody>
+      </p:sp>
+      <p:sp>
+        <p:nvSpPr>
+          <p:cNvPr id="17" name="Rounded Rectangle 16"/>
+          <p:cNvSpPr/>
+          <p:nvPr/>
+        </p:nvSpPr>
+        <p:spPr>
+          <a:xfrm>
+            <a:off x="502920" y="5532120"/>
+            <a:ext cx="11155680" cy="658368"/>
+          </a:xfrm>
+          <a:prstGeom prst="roundRect">
+            <a:avLst/>
+          </a:prstGeom>
+          <a:solidFill>
+            <a:srgbClr val="F1F5F9"/>
+          </a:solidFill>
+          <a:ln w="12700">
+            <a:solidFill>
+              <a:srgbClr val="E2E8F0"/>
+            </a:solidFill>
+          </a:ln>
+          <a:effectLst/>
+        </p:spPr>
+        <p:style>
+          <a:lnRef idx="1">
+            <a:schemeClr val="accent1"/>
+          </a:lnRef>
+          <a:fillRef idx="3">
+            <a:schemeClr val="accent1"/>
+          </a:fillRef>
+          <a:effectRef idx="2">
+            <a:schemeClr val="accent1"/>
+          </a:effectRef>
+          <a:fontRef idx="minor">
+            <a:schemeClr val="lt1"/>
+          </a:fontRef>
+        </p:style>
+        <p:txBody>
+          <a:bodyPr rtlCol="0" anchor="ctr"/>
+          <a:lstStyle/>
+          <a:p>
+            <a:pPr algn="ctr"/>
+          </a:p>
+        </p:txBody>
+      </p:sp>
+      <p:sp>
+        <p:nvSpPr>
+          <p:cNvPr id="18" name="TextBox 17"/>
+          <p:cNvSpPr txBox="1"/>
+          <p:nvPr/>
+        </p:nvSpPr>
+        <p:spPr>
+          <a:xfrm>
+            <a:off x="777240" y="5532120"/>
+            <a:ext cx="10607040" cy="658368"/>
+          </a:xfrm>
+          <a:prstGeom prst="rect">
+            <a:avLst/>
+          </a:prstGeom>
+          <a:noFill/>
+        </p:spPr>
+        <p:txBody>
+          <a:bodyPr wrap="square" anchor="ctr" lIns="0" rIns="0" tIns="0" bIns="0">
+            <a:spAutoFit/>
+          </a:bodyPr>
+          <a:lstStyle/>
+          <a:p>
+            <a:pPr algn="l">
+              <a:lnSpc>
+                <a:spcPct val="100000"/>
+              </a:lnSpc>
+              <a:spcBef>
+                <a:spcPts val="0"/>
+              </a:spcBef>
+              <a:spcAft>
+                <a:spcPts val="600"/>
+              </a:spcAft>
+            </a:pPr>
+            <a:r>
+              <a:rPr sz="1200" b="1">
+                <a:solidFill>
+                  <a:srgbClr val="6366F1"/>
+                </a:solidFill>
+                <a:latin typeface="NanumGothic"/>
+                <a:ea typeface="NanumGothic"/>
+                <a:cs typeface="NanumGothic"/>
+              </a:rPr>
+              <a:t>NOTE   </a:t>
+            </a:r>
+            <a:r>
+              <a:rPr sz="1300" b="0">
+                <a:solidFill>
+                  <a:srgbClr val="0F172A"/>
+                </a:solidFill>
+                <a:latin typeface="NanumGothic"/>
+                <a:ea typeface="NanumGothic"/>
+                <a:cs typeface="NanumGothic"/>
+              </a:rPr>
+              <a:t>오늘 학습한 임베딩이 바로 이 검색 단계에서 활용된다.</a:t>
+            </a:r>
+          </a:p>
+        </p:txBody>
+      </p:sp>
+      <p:sp>
+        <p:nvSpPr>
+          <p:cNvPr id="19" name="TextBox 18"/>
           <p:cNvSpPr txBox="1"/>
           <p:nvPr/>
         </p:nvSpPr>
@@ -24282,7 +24711,7 @@
                 <a:ea typeface="NanumGothic"/>
                 <a:cs typeface="NanumGothic"/>
               </a:rPr>
-              <a:t>   ·   29 / 42</a:t>
+              <a:t>   ·   29 / 43</a:t>
             </a:r>
           </a:p>
         </p:txBody>
@@ -24642,7 +25071,7 @@
                 <a:ea typeface="NanumGothic"/>
                 <a:cs typeface="NanumGothic"/>
               </a:rPr>
-              <a:t>   ·   3 / 42</a:t>
+              <a:t>   ·   3 / 43</a:t>
             </a:r>
           </a:p>
         </p:txBody>
@@ -24795,7 +25224,7 @@
                 <a:ea typeface="NanumGothic"/>
                 <a:cs typeface="NanumGothic"/>
               </a:rPr>
-              <a:t>RAG ④</a:t>
+              <a:t>RAG ③</a:t>
             </a:r>
           </a:p>
         </p:txBody>
@@ -24842,7 +25271,7 @@
                 <a:ea typeface="NanumSquare"/>
                 <a:cs typeface="NanumSquare"/>
               </a:rPr>
-              <a:t>생성 — 근거 기반 답</a:t>
+              <a:t>주입 — 근거를 프롬프트에</a:t>
             </a:r>
           </a:p>
         </p:txBody>
@@ -25071,7 +25500,7 @@
                 <a:ea typeface="NanumGothic"/>
                 <a:cs typeface="NanumGothic"/>
               </a:rPr>
-              <a:t>주입된 근거를 바탕으로 답 생성</a:t>
+              <a:t>찾은 문단을 프롬프트 안에 같이 넣어줌</a:t>
             </a:r>
           </a:p>
         </p:txBody>
@@ -25162,7 +25591,7 @@
                 <a:ea typeface="NanumGothic"/>
                 <a:cs typeface="NanumGothic"/>
               </a:rPr>
-              <a:t>핵심</a:t>
+              <a:t>효과</a:t>
             </a:r>
           </a:p>
         </p:txBody>
@@ -25209,7 +25638,7 @@
                 <a:ea typeface="NanumGothic"/>
                 <a:cs typeface="NanumGothic"/>
               </a:rPr>
-              <a:t>출처를 함께 제시 → 검증 가능</a:t>
+              <a:t>모델이 '기억'이 아니라 '눈앞의 근거'로 답하게</a:t>
             </a:r>
           </a:p>
         </p:txBody>
@@ -25300,7 +25729,7 @@
                 <a:ea typeface="NanumGothic"/>
                 <a:cs typeface="NanumGothic"/>
               </a:rPr>
-              <a:t>효과</a:t>
+              <a:t>주의</a:t>
             </a:r>
           </a:p>
         </p:txBody>
@@ -25347,256 +25776,14 @@
                 <a:ea typeface="NanumGothic"/>
                 <a:cs typeface="NanumGothic"/>
               </a:rPr>
-              <a:t>환각↓ · 최신·전문 정보 반영↑</a:t>
-            </a:r>
-          </a:p>
-        </p:txBody>
-      </p:sp>
-      <p:sp>
-        <p:nvSpPr>
-          <p:cNvPr id="17" name="Oval 16"/>
-          <p:cNvSpPr/>
-          <p:nvPr/>
-        </p:nvSpPr>
-        <p:spPr>
-          <a:xfrm>
-            <a:off x="548640" y="4517136"/>
-            <a:ext cx="146304" cy="146304"/>
-          </a:xfrm>
-          <a:prstGeom prst="ellipse">
-            <a:avLst/>
-          </a:prstGeom>
-          <a:solidFill>
-            <a:srgbClr val="6366F1"/>
-          </a:solidFill>
-          <a:ln>
-            <a:noFill/>
-          </a:ln>
-          <a:effectLst/>
-        </p:spPr>
-        <p:style>
-          <a:lnRef idx="1">
-            <a:schemeClr val="accent1"/>
-          </a:lnRef>
-          <a:fillRef idx="3">
-            <a:schemeClr val="accent1"/>
-          </a:fillRef>
-          <a:effectRef idx="2">
-            <a:schemeClr val="accent1"/>
-          </a:effectRef>
-          <a:fontRef idx="minor">
-            <a:schemeClr val="lt1"/>
-          </a:fontRef>
-        </p:style>
-        <p:txBody>
-          <a:bodyPr rtlCol="0" anchor="ctr"/>
-          <a:lstStyle/>
-          <a:p>
-            <a:pPr algn="ctr"/>
-          </a:p>
-        </p:txBody>
-      </p:sp>
-      <p:sp>
-        <p:nvSpPr>
-          <p:cNvPr id="18" name="TextBox 17"/>
-          <p:cNvSpPr txBox="1"/>
-          <p:nvPr/>
-        </p:nvSpPr>
-        <p:spPr>
-          <a:xfrm>
-            <a:off x="868680" y="4434840"/>
-            <a:ext cx="10607040" cy="457200"/>
-          </a:xfrm>
-          <a:prstGeom prst="rect">
-            <a:avLst/>
-          </a:prstGeom>
-          <a:noFill/>
-        </p:spPr>
-        <p:txBody>
-          <a:bodyPr wrap="square" anchor="t" lIns="0" rIns="0" tIns="0" bIns="0">
-            <a:spAutoFit/>
-          </a:bodyPr>
-          <a:lstStyle/>
-          <a:p>
-            <a:pPr algn="l">
-              <a:lnSpc>
-                <a:spcPct val="100000"/>
-              </a:lnSpc>
-              <a:spcBef>
-                <a:spcPts val="0"/>
-              </a:spcBef>
-              <a:spcAft>
-                <a:spcPts val="600"/>
-              </a:spcAft>
-            </a:pPr>
-            <a:r>
-              <a:rPr sz="1600" b="1">
-                <a:solidFill>
-                  <a:srgbClr val="0F172A"/>
-                </a:solidFill>
-                <a:latin typeface="NanumGothic"/>
-                <a:ea typeface="NanumGothic"/>
-                <a:cs typeface="NanumGothic"/>
-              </a:rPr>
-              <a:t>사례</a:t>
-            </a:r>
-          </a:p>
-        </p:txBody>
-      </p:sp>
-      <p:sp>
-        <p:nvSpPr>
-          <p:cNvPr id="19" name="TextBox 18"/>
-          <p:cNvSpPr txBox="1"/>
-          <p:nvPr/>
-        </p:nvSpPr>
-        <p:spPr>
-          <a:xfrm>
-            <a:off x="868680" y="4818888"/>
-            <a:ext cx="10607040" cy="457200"/>
-          </a:xfrm>
-          <a:prstGeom prst="rect">
-            <a:avLst/>
-          </a:prstGeom>
-          <a:noFill/>
-        </p:spPr>
-        <p:txBody>
-          <a:bodyPr wrap="square" anchor="t" lIns="0" rIns="0" tIns="0" bIns="0">
-            <a:spAutoFit/>
-          </a:bodyPr>
-          <a:lstStyle/>
-          <a:p>
-            <a:pPr algn="l">
-              <a:lnSpc>
-                <a:spcPct val="100000"/>
-              </a:lnSpc>
-              <a:spcBef>
-                <a:spcPts val="0"/>
-              </a:spcBef>
-              <a:spcAft>
-                <a:spcPts val="600"/>
-              </a:spcAft>
-            </a:pPr>
-            <a:r>
-              <a:rPr sz="1300" b="0">
-                <a:solidFill>
-                  <a:srgbClr val="64748B"/>
-                </a:solidFill>
-                <a:latin typeface="NanumGothic"/>
-                <a:ea typeface="NanumGothic"/>
-                <a:cs typeface="NanumGothic"/>
-              </a:rPr>
-              <a:t>OpenEvidence — 동료심사 문헌(NEJM·JAMA) 기반 의사용 Q&amp;A (약학 RAG)</a:t>
-            </a:r>
-          </a:p>
-        </p:txBody>
-      </p:sp>
-      <p:sp>
-        <p:nvSpPr>
-          <p:cNvPr id="20" name="Rounded Rectangle 19"/>
-          <p:cNvSpPr/>
-          <p:nvPr/>
-        </p:nvSpPr>
-        <p:spPr>
-          <a:xfrm>
-            <a:off x="502920" y="5532120"/>
-            <a:ext cx="11155680" cy="658368"/>
-          </a:xfrm>
-          <a:prstGeom prst="roundRect">
-            <a:avLst/>
-          </a:prstGeom>
-          <a:solidFill>
-            <a:srgbClr val="F1F5F9"/>
-          </a:solidFill>
-          <a:ln w="12700">
-            <a:solidFill>
-              <a:srgbClr val="E2E8F0"/>
-            </a:solidFill>
-          </a:ln>
-          <a:effectLst/>
-        </p:spPr>
-        <p:style>
-          <a:lnRef idx="1">
-            <a:schemeClr val="accent1"/>
-          </a:lnRef>
-          <a:fillRef idx="3">
-            <a:schemeClr val="accent1"/>
-          </a:fillRef>
-          <a:effectRef idx="2">
-            <a:schemeClr val="accent1"/>
-          </a:effectRef>
-          <a:fontRef idx="minor">
-            <a:schemeClr val="lt1"/>
-          </a:fontRef>
-        </p:style>
-        <p:txBody>
-          <a:bodyPr rtlCol="0" anchor="ctr"/>
-          <a:lstStyle/>
-          <a:p>
-            <a:pPr algn="ctr"/>
-          </a:p>
-        </p:txBody>
-      </p:sp>
-      <p:sp>
-        <p:nvSpPr>
-          <p:cNvPr id="21" name="TextBox 20"/>
-          <p:cNvSpPr txBox="1"/>
-          <p:nvPr/>
-        </p:nvSpPr>
-        <p:spPr>
-          <a:xfrm>
-            <a:off x="777240" y="5532120"/>
-            <a:ext cx="10607040" cy="658368"/>
-          </a:xfrm>
-          <a:prstGeom prst="rect">
-            <a:avLst/>
-          </a:prstGeom>
-          <a:noFill/>
-        </p:spPr>
-        <p:txBody>
-          <a:bodyPr wrap="square" anchor="ctr" lIns="0" rIns="0" tIns="0" bIns="0">
-            <a:spAutoFit/>
-          </a:bodyPr>
-          <a:lstStyle/>
-          <a:p>
-            <a:pPr algn="l">
-              <a:lnSpc>
-                <a:spcPct val="100000"/>
-              </a:lnSpc>
-              <a:spcBef>
-                <a:spcPts val="0"/>
-              </a:spcBef>
-              <a:spcAft>
-                <a:spcPts val="600"/>
-              </a:spcAft>
-            </a:pPr>
-            <a:r>
-              <a:rPr sz="1200" b="1">
-                <a:solidFill>
-                  <a:srgbClr val="6366F1"/>
-                </a:solidFill>
-                <a:latin typeface="NanumGothic"/>
-                <a:ea typeface="NanumGothic"/>
-                <a:cs typeface="NanumGothic"/>
-              </a:rPr>
-              <a:t>NOTE   </a:t>
-            </a:r>
-            <a:r>
-              <a:rPr sz="1300" b="0">
-                <a:solidFill>
-                  <a:srgbClr val="0F172A"/>
-                </a:solidFill>
-                <a:latin typeface="NanumGothic"/>
-                <a:ea typeface="NanumGothic"/>
-                <a:cs typeface="NanumGothic"/>
-              </a:rPr>
-              <a:t>근거에 기반해 답하는 이 방식이 리서치 에이전트의 핵심 패턴이다.</a:t>
-            </a:r>
-          </a:p>
-        </p:txBody>
-      </p:sp>
-      <p:sp>
-        <p:nvSpPr>
-          <p:cNvPr id="22" name="TextBox 21"/>
+              <a:t>너무 많이 넣으면 컨텍스트 한계·비용↑</a:t>
+            </a:r>
+          </a:p>
+        </p:txBody>
+      </p:sp>
+      <p:sp>
+        <p:nvSpPr>
+          <p:cNvPr id="17" name="TextBox 16"/>
           <p:cNvSpPr txBox="1"/>
           <p:nvPr/>
         </p:nvSpPr>
@@ -25647,7 +25834,7 @@
                 <a:ea typeface="NanumGothic"/>
                 <a:cs typeface="NanumGothic"/>
               </a:rPr>
-              <a:t>   ·   30 / 42</a:t>
+              <a:t>   ·   30 / 43</a:t>
             </a:r>
           </a:p>
         </p:txBody>
@@ -25800,7 +25987,7 @@
                 <a:ea typeface="NanumGothic"/>
                 <a:cs typeface="NanumGothic"/>
               </a:rPr>
-              <a:t>프롬프트</a:t>
+              <a:t>RAG ④</a:t>
             </a:r>
           </a:p>
         </p:txBody>
@@ -25847,7 +26034,7 @@
                 <a:ea typeface="NanumSquare"/>
                 <a:cs typeface="NanumSquare"/>
               </a:rPr>
-              <a:t>프롬프트가 동작을 바꾼다</a:t>
+              <a:t>생성 — 근거 기반 답</a:t>
             </a:r>
           </a:p>
         </p:txBody>
@@ -26029,7 +26216,7 @@
                 <a:ea typeface="NanumGothic"/>
                 <a:cs typeface="NanumGothic"/>
               </a:rPr>
-              <a:t>프롬프트 = 모델에 주는 입력 전체</a:t>
+              <a:t>무엇</a:t>
             </a:r>
           </a:p>
         </p:txBody>
@@ -26076,7 +26263,7 @@
                 <a:ea typeface="NanumGothic"/>
                 <a:cs typeface="NanumGothic"/>
               </a:rPr>
-              <a:t>지시 + 맥락 + 예시 + 데이터</a:t>
+              <a:t>주입된 근거를 바탕으로 답 생성</a:t>
             </a:r>
           </a:p>
         </p:txBody>
@@ -26167,7 +26354,7 @@
                 <a:ea typeface="NanumGothic"/>
                 <a:cs typeface="NanumGothic"/>
               </a:rPr>
-              <a:t>좋은 프롬프트</a:t>
+              <a:t>핵심</a:t>
             </a:r>
           </a:p>
         </p:txBody>
@@ -26214,7 +26401,7 @@
                 <a:ea typeface="NanumGothic"/>
                 <a:cs typeface="NanumGothic"/>
               </a:rPr>
-              <a:t>명확한 목표 · 충분한 맥락 · 원하는 형식 명시</a:t>
+              <a:t>출처를 함께 제시 → 검증 가능</a:t>
             </a:r>
           </a:p>
         </p:txBody>
@@ -26305,7 +26492,7 @@
                 <a:ea typeface="NanumGothic"/>
                 <a:cs typeface="NanumGothic"/>
               </a:rPr>
-              <a:t>나쁜 프롬프트</a:t>
+              <a:t>효과</a:t>
             </a:r>
           </a:p>
         </p:txBody>
@@ -26352,7 +26539,7 @@
                 <a:ea typeface="NanumGothic"/>
                 <a:cs typeface="NanumGothic"/>
               </a:rPr>
-              <a:t>모호·맥락 부족 → 엉뚱하거나 일반적인 답</a:t>
+              <a:t>환각↓ · 최신·전문 정보 반영↑</a:t>
             </a:r>
           </a:p>
         </p:txBody>
@@ -26443,7 +26630,7 @@
                 <a:ea typeface="NanumGothic"/>
                 <a:cs typeface="NanumGothic"/>
               </a:rPr>
-              <a:t>비교 예시</a:t>
+              <a:t>사례</a:t>
             </a:r>
           </a:p>
         </p:txBody>
@@ -26490,7 +26677,7 @@
                 <a:ea typeface="NanumGothic"/>
                 <a:cs typeface="NanumGothic"/>
               </a:rPr>
-              <a:t>'코딩 도와줘' vs 'CSV 항목별 합계 코드 만들고 실행·확인해줘'</a:t>
+              <a:t>OpenEvidence — 동료심사 문헌(NEJM·JAMA) 기반 의사용 Q&amp;A (약학 RAG)</a:t>
             </a:r>
           </a:p>
         </p:txBody>
@@ -26594,7 +26781,7 @@
                 <a:ea typeface="NanumGothic"/>
                 <a:cs typeface="NanumGothic"/>
               </a:rPr>
-              <a:t>같은 모델이라도 프롬프트의 구성이 출력의 품질을 좌우한다.</a:t>
+              <a:t>근거에 기반해 답하는 이 방식이 리서치 에이전트의 핵심 패턴이다.</a:t>
             </a:r>
           </a:p>
         </p:txBody>
@@ -26652,7 +26839,7 @@
                 <a:ea typeface="NanumGothic"/>
                 <a:cs typeface="NanumGothic"/>
               </a:rPr>
-              <a:t>   ·   31 / 42</a:t>
+              <a:t>   ·   31 / 43</a:t>
             </a:r>
           </a:p>
         </p:txBody>
@@ -26805,7 +26992,7 @@
                 <a:ea typeface="NanumGothic"/>
                 <a:cs typeface="NanumGothic"/>
               </a:rPr>
-              <a:t>프롬프트 기법</a:t>
+              <a:t>프롬프트</a:t>
             </a:r>
           </a:p>
         </p:txBody>
@@ -26852,7 +27039,7 @@
                 <a:ea typeface="NanumSquare"/>
                 <a:cs typeface="NanumSquare"/>
               </a:rPr>
-              <a:t>자주 쓰는 패턴 — 3가지</a:t>
+              <a:t>프롬프트가 동작을 바꾼다</a:t>
             </a:r>
           </a:p>
         </p:txBody>
@@ -27034,7 +27221,7 @@
                 <a:ea typeface="NanumGothic"/>
                 <a:cs typeface="NanumGothic"/>
               </a:rPr>
-              <a:t>역할·맥락 부여</a:t>
+              <a:t>프롬프트 = 모델에 주는 입력 전체</a:t>
             </a:r>
           </a:p>
         </p:txBody>
@@ -27081,7 +27268,7 @@
                 <a:ea typeface="NanumGothic"/>
                 <a:cs typeface="NanumGothic"/>
               </a:rPr>
-              <a:t>누가·무엇을·왜</a:t>
+              <a:t>지시 + 맥락 + 예시 + 데이터</a:t>
             </a:r>
           </a:p>
         </p:txBody>
@@ -27172,7 +27359,7 @@
                 <a:ea typeface="NanumGothic"/>
                 <a:cs typeface="NanumGothic"/>
               </a:rPr>
-              <a:t>예시 제공 (few-shot)</a:t>
+              <a:t>좋은 프롬프트</a:t>
             </a:r>
           </a:p>
         </p:txBody>
@@ -27219,7 +27406,7 @@
                 <a:ea typeface="NanumGothic"/>
                 <a:cs typeface="NanumGothic"/>
               </a:rPr>
-              <a:t>원하는 입출력 예를 보여주기</a:t>
+              <a:t>명확한 목표 · 충분한 맥락 · 원하는 형식 명시</a:t>
             </a:r>
           </a:p>
         </p:txBody>
@@ -27310,7 +27497,7 @@
                 <a:ea typeface="NanumGothic"/>
                 <a:cs typeface="NanumGothic"/>
               </a:rPr>
-              <a:t>단계적 사고 (CoT)</a:t>
+              <a:t>나쁜 프롬프트</a:t>
             </a:r>
           </a:p>
         </p:txBody>
@@ -27357,7 +27544,7 @@
                 <a:ea typeface="NanumGothic"/>
                 <a:cs typeface="NanumGothic"/>
               </a:rPr>
-              <a:t>단계별로 생각하게</a:t>
+              <a:t>모호·맥락 부족 → 엉뚱하거나 일반적인 답</a:t>
             </a:r>
           </a:p>
         </p:txBody>
@@ -27448,7 +27635,7 @@
                 <a:ea typeface="NanumGothic"/>
                 <a:cs typeface="NanumGothic"/>
               </a:rPr>
-              <a:t>사례</a:t>
+              <a:t>비교 예시</a:t>
             </a:r>
           </a:p>
         </p:txBody>
@@ -27495,7 +27682,7 @@
                 <a:ea typeface="NanumGothic"/>
                 <a:cs typeface="NanumGothic"/>
               </a:rPr>
-              <a:t>GPT-3(2020) — 예시 몇 개(few-shot)만으로 번역·Q&amp;A 수행</a:t>
+              <a:t>'코딩 도와줘' vs 'CSV 항목별 합계 코드 만들고 실행·확인해줘'</a:t>
             </a:r>
           </a:p>
         </p:txBody>
@@ -27599,7 +27786,7 @@
                 <a:ea typeface="NanumGothic"/>
                 <a:cs typeface="NanumGothic"/>
               </a:rPr>
-              <a:t>이어지는 슬라이드에서 세 가지 기법을 하나씩 살펴본다.</a:t>
+              <a:t>같은 모델이라도 프롬프트의 구성이 출력의 품질을 좌우한다.</a:t>
             </a:r>
           </a:p>
         </p:txBody>
@@ -27657,7 +27844,7 @@
                 <a:ea typeface="NanumGothic"/>
                 <a:cs typeface="NanumGothic"/>
               </a:rPr>
-              <a:t>   ·   32 / 42</a:t>
+              <a:t>   ·   32 / 43</a:t>
             </a:r>
           </a:p>
         </p:txBody>
@@ -27810,7 +27997,7 @@
                 <a:ea typeface="NanumGothic"/>
                 <a:cs typeface="NanumGothic"/>
               </a:rPr>
-              <a:t>기법 ①</a:t>
+              <a:t>프롬프트 기법</a:t>
             </a:r>
           </a:p>
         </p:txBody>
@@ -27857,7 +28044,7 @@
                 <a:ea typeface="NanumSquare"/>
                 <a:cs typeface="NanumSquare"/>
               </a:rPr>
-              <a:t>역할·맥락 부여</a:t>
+              <a:t>자주 쓰는 패턴 — 3가지</a:t>
             </a:r>
           </a:p>
         </p:txBody>
@@ -28039,7 +28226,7 @@
                 <a:ea typeface="NanumGothic"/>
                 <a:cs typeface="NanumGothic"/>
               </a:rPr>
-              <a:t>방법</a:t>
+              <a:t>역할·맥락 부여</a:t>
             </a:r>
           </a:p>
         </p:txBody>
@@ -28086,7 +28273,7 @@
                 <a:ea typeface="NanumGothic"/>
                 <a:cs typeface="NanumGothic"/>
               </a:rPr>
-              <a:t>'너는 약학 전문가야' + 상황·목적·대상 독자</a:t>
+              <a:t>누가·무엇을·왜</a:t>
             </a:r>
           </a:p>
         </p:txBody>
@@ -28177,7 +28364,7 @@
                 <a:ea typeface="NanumGothic"/>
                 <a:cs typeface="NanumGothic"/>
               </a:rPr>
-              <a:t>효과</a:t>
+              <a:t>예시 제공 (few-shot)</a:t>
             </a:r>
           </a:p>
         </p:txBody>
@@ -28224,7 +28411,7 @@
                 <a:ea typeface="NanumGothic"/>
                 <a:cs typeface="NanumGothic"/>
               </a:rPr>
-              <a:t>답의 톤·깊이·용어 수준이 맞춰짐</a:t>
+              <a:t>원하는 입출력 예를 보여주기</a:t>
             </a:r>
           </a:p>
         </p:txBody>
@@ -28315,7 +28502,7 @@
                 <a:ea typeface="NanumGothic"/>
                 <a:cs typeface="NanumGothic"/>
               </a:rPr>
-              <a:t>예</a:t>
+              <a:t>단계적 사고 (CoT)</a:t>
             </a:r>
           </a:p>
         </p:txBody>
@@ -28362,14 +28549,256 @@
                 <a:ea typeface="NanumGothic"/>
                 <a:cs typeface="NanumGothic"/>
               </a:rPr>
-              <a:t>'비전공자에게 설명하듯' vs '전문가용으로'</a:t>
-            </a:r>
-          </a:p>
-        </p:txBody>
-      </p:sp>
-      <p:sp>
-        <p:nvSpPr>
-          <p:cNvPr id="17" name="TextBox 16"/>
+              <a:t>단계별로 생각하게</a:t>
+            </a:r>
+          </a:p>
+        </p:txBody>
+      </p:sp>
+      <p:sp>
+        <p:nvSpPr>
+          <p:cNvPr id="17" name="Oval 16"/>
+          <p:cNvSpPr/>
+          <p:nvPr/>
+        </p:nvSpPr>
+        <p:spPr>
+          <a:xfrm>
+            <a:off x="548640" y="4517136"/>
+            <a:ext cx="146304" cy="146304"/>
+          </a:xfrm>
+          <a:prstGeom prst="ellipse">
+            <a:avLst/>
+          </a:prstGeom>
+          <a:solidFill>
+            <a:srgbClr val="6366F1"/>
+          </a:solidFill>
+          <a:ln>
+            <a:noFill/>
+          </a:ln>
+          <a:effectLst/>
+        </p:spPr>
+        <p:style>
+          <a:lnRef idx="1">
+            <a:schemeClr val="accent1"/>
+          </a:lnRef>
+          <a:fillRef idx="3">
+            <a:schemeClr val="accent1"/>
+          </a:fillRef>
+          <a:effectRef idx="2">
+            <a:schemeClr val="accent1"/>
+          </a:effectRef>
+          <a:fontRef idx="minor">
+            <a:schemeClr val="lt1"/>
+          </a:fontRef>
+        </p:style>
+        <p:txBody>
+          <a:bodyPr rtlCol="0" anchor="ctr"/>
+          <a:lstStyle/>
+          <a:p>
+            <a:pPr algn="ctr"/>
+          </a:p>
+        </p:txBody>
+      </p:sp>
+      <p:sp>
+        <p:nvSpPr>
+          <p:cNvPr id="18" name="TextBox 17"/>
+          <p:cNvSpPr txBox="1"/>
+          <p:nvPr/>
+        </p:nvSpPr>
+        <p:spPr>
+          <a:xfrm>
+            <a:off x="868680" y="4434840"/>
+            <a:ext cx="10607040" cy="457200"/>
+          </a:xfrm>
+          <a:prstGeom prst="rect">
+            <a:avLst/>
+          </a:prstGeom>
+          <a:noFill/>
+        </p:spPr>
+        <p:txBody>
+          <a:bodyPr wrap="square" anchor="t" lIns="0" rIns="0" tIns="0" bIns="0">
+            <a:spAutoFit/>
+          </a:bodyPr>
+          <a:lstStyle/>
+          <a:p>
+            <a:pPr algn="l">
+              <a:lnSpc>
+                <a:spcPct val="100000"/>
+              </a:lnSpc>
+              <a:spcBef>
+                <a:spcPts val="0"/>
+              </a:spcBef>
+              <a:spcAft>
+                <a:spcPts val="600"/>
+              </a:spcAft>
+            </a:pPr>
+            <a:r>
+              <a:rPr sz="1600" b="1">
+                <a:solidFill>
+                  <a:srgbClr val="0F172A"/>
+                </a:solidFill>
+                <a:latin typeface="NanumGothic"/>
+                <a:ea typeface="NanumGothic"/>
+                <a:cs typeface="NanumGothic"/>
+              </a:rPr>
+              <a:t>사례</a:t>
+            </a:r>
+          </a:p>
+        </p:txBody>
+      </p:sp>
+      <p:sp>
+        <p:nvSpPr>
+          <p:cNvPr id="19" name="TextBox 18"/>
+          <p:cNvSpPr txBox="1"/>
+          <p:nvPr/>
+        </p:nvSpPr>
+        <p:spPr>
+          <a:xfrm>
+            <a:off x="868680" y="4818888"/>
+            <a:ext cx="10607040" cy="457200"/>
+          </a:xfrm>
+          <a:prstGeom prst="rect">
+            <a:avLst/>
+          </a:prstGeom>
+          <a:noFill/>
+        </p:spPr>
+        <p:txBody>
+          <a:bodyPr wrap="square" anchor="t" lIns="0" rIns="0" tIns="0" bIns="0">
+            <a:spAutoFit/>
+          </a:bodyPr>
+          <a:lstStyle/>
+          <a:p>
+            <a:pPr algn="l">
+              <a:lnSpc>
+                <a:spcPct val="100000"/>
+              </a:lnSpc>
+              <a:spcBef>
+                <a:spcPts val="0"/>
+              </a:spcBef>
+              <a:spcAft>
+                <a:spcPts val="600"/>
+              </a:spcAft>
+            </a:pPr>
+            <a:r>
+              <a:rPr sz="1300" b="0">
+                <a:solidFill>
+                  <a:srgbClr val="64748B"/>
+                </a:solidFill>
+                <a:latin typeface="NanumGothic"/>
+                <a:ea typeface="NanumGothic"/>
+                <a:cs typeface="NanumGothic"/>
+              </a:rPr>
+              <a:t>GPT-3(2020) — 예시 몇 개(few-shot)만으로 번역·Q&amp;A 수행</a:t>
+            </a:r>
+          </a:p>
+        </p:txBody>
+      </p:sp>
+      <p:sp>
+        <p:nvSpPr>
+          <p:cNvPr id="20" name="Rounded Rectangle 19"/>
+          <p:cNvSpPr/>
+          <p:nvPr/>
+        </p:nvSpPr>
+        <p:spPr>
+          <a:xfrm>
+            <a:off x="502920" y="5532120"/>
+            <a:ext cx="11155680" cy="658368"/>
+          </a:xfrm>
+          <a:prstGeom prst="roundRect">
+            <a:avLst/>
+          </a:prstGeom>
+          <a:solidFill>
+            <a:srgbClr val="F1F5F9"/>
+          </a:solidFill>
+          <a:ln w="12700">
+            <a:solidFill>
+              <a:srgbClr val="E2E8F0"/>
+            </a:solidFill>
+          </a:ln>
+          <a:effectLst/>
+        </p:spPr>
+        <p:style>
+          <a:lnRef idx="1">
+            <a:schemeClr val="accent1"/>
+          </a:lnRef>
+          <a:fillRef idx="3">
+            <a:schemeClr val="accent1"/>
+          </a:fillRef>
+          <a:effectRef idx="2">
+            <a:schemeClr val="accent1"/>
+          </a:effectRef>
+          <a:fontRef idx="minor">
+            <a:schemeClr val="lt1"/>
+          </a:fontRef>
+        </p:style>
+        <p:txBody>
+          <a:bodyPr rtlCol="0" anchor="ctr"/>
+          <a:lstStyle/>
+          <a:p>
+            <a:pPr algn="ctr"/>
+          </a:p>
+        </p:txBody>
+      </p:sp>
+      <p:sp>
+        <p:nvSpPr>
+          <p:cNvPr id="21" name="TextBox 20"/>
+          <p:cNvSpPr txBox="1"/>
+          <p:nvPr/>
+        </p:nvSpPr>
+        <p:spPr>
+          <a:xfrm>
+            <a:off x="777240" y="5532120"/>
+            <a:ext cx="10607040" cy="658368"/>
+          </a:xfrm>
+          <a:prstGeom prst="rect">
+            <a:avLst/>
+          </a:prstGeom>
+          <a:noFill/>
+        </p:spPr>
+        <p:txBody>
+          <a:bodyPr wrap="square" anchor="ctr" lIns="0" rIns="0" tIns="0" bIns="0">
+            <a:spAutoFit/>
+          </a:bodyPr>
+          <a:lstStyle/>
+          <a:p>
+            <a:pPr algn="l">
+              <a:lnSpc>
+                <a:spcPct val="100000"/>
+              </a:lnSpc>
+              <a:spcBef>
+                <a:spcPts val="0"/>
+              </a:spcBef>
+              <a:spcAft>
+                <a:spcPts val="600"/>
+              </a:spcAft>
+            </a:pPr>
+            <a:r>
+              <a:rPr sz="1200" b="1">
+                <a:solidFill>
+                  <a:srgbClr val="6366F1"/>
+                </a:solidFill>
+                <a:latin typeface="NanumGothic"/>
+                <a:ea typeface="NanumGothic"/>
+                <a:cs typeface="NanumGothic"/>
+              </a:rPr>
+              <a:t>NOTE   </a:t>
+            </a:r>
+            <a:r>
+              <a:rPr sz="1300" b="0">
+                <a:solidFill>
+                  <a:srgbClr val="0F172A"/>
+                </a:solidFill>
+                <a:latin typeface="NanumGothic"/>
+                <a:ea typeface="NanumGothic"/>
+                <a:cs typeface="NanumGothic"/>
+              </a:rPr>
+              <a:t>이어지는 슬라이드에서 세 가지 기법을 하나씩 살펴본다.</a:t>
+            </a:r>
+          </a:p>
+        </p:txBody>
+      </p:sp>
+      <p:sp>
+        <p:nvSpPr>
+          <p:cNvPr id="22" name="TextBox 21"/>
           <p:cNvSpPr txBox="1"/>
           <p:nvPr/>
         </p:nvSpPr>
@@ -28420,7 +28849,7 @@
                 <a:ea typeface="NanumGothic"/>
                 <a:cs typeface="NanumGothic"/>
               </a:rPr>
-              <a:t>   ·   33 / 42</a:t>
+              <a:t>   ·   33 / 43</a:t>
             </a:r>
           </a:p>
         </p:txBody>
@@ -28573,7 +29002,7 @@
                 <a:ea typeface="NanumGothic"/>
                 <a:cs typeface="NanumGothic"/>
               </a:rPr>
-              <a:t>기법 ②</a:t>
+              <a:t>기법 ①</a:t>
             </a:r>
           </a:p>
         </p:txBody>
@@ -28620,7 +29049,7 @@
                 <a:ea typeface="NanumSquare"/>
                 <a:cs typeface="NanumSquare"/>
               </a:rPr>
-              <a:t>예시 제공 (few-shot)</a:t>
+              <a:t>역할·맥락 부여</a:t>
             </a:r>
           </a:p>
         </p:txBody>
@@ -28849,7 +29278,7 @@
                 <a:ea typeface="NanumGothic"/>
                 <a:cs typeface="NanumGothic"/>
               </a:rPr>
-              <a:t>원하는 입력→출력 예를 2~3개 보여준 뒤 본 작업 요청</a:t>
+              <a:t>'너는 약학 전문가야' + 상황·목적·대상 독자</a:t>
             </a:r>
           </a:p>
         </p:txBody>
@@ -28987,7 +29416,7 @@
                 <a:ea typeface="NanumGothic"/>
                 <a:cs typeface="NanumGothic"/>
               </a:rPr>
-              <a:t>형식·스타일이 안정 (말로 설명하기 어려운 형식에 특히)</a:t>
+              <a:t>답의 톤·깊이·용어 수준이 맞춰짐</a:t>
             </a:r>
           </a:p>
         </p:txBody>
@@ -29125,7 +29554,7 @@
                 <a:ea typeface="NanumGothic"/>
                 <a:cs typeface="NanumGothic"/>
               </a:rPr>
-              <a:t>표 형식 예시 2개 → 새 데이터도 같은 표로</a:t>
+              <a:t>'비전공자에게 설명하듯' vs '전문가용으로'</a:t>
             </a:r>
           </a:p>
         </p:txBody>
@@ -29183,7 +29612,7 @@
                 <a:ea typeface="NanumGothic"/>
                 <a:cs typeface="NanumGothic"/>
               </a:rPr>
-              <a:t>   ·   34 / 42</a:t>
+              <a:t>   ·   34 / 43</a:t>
             </a:r>
           </a:p>
         </p:txBody>
@@ -29336,7 +29765,7 @@
                 <a:ea typeface="NanumGothic"/>
                 <a:cs typeface="NanumGothic"/>
               </a:rPr>
-              <a:t>기법 ③</a:t>
+              <a:t>기법 ②</a:t>
             </a:r>
           </a:p>
         </p:txBody>
@@ -29383,7 +29812,7 @@
                 <a:ea typeface="NanumSquare"/>
                 <a:cs typeface="NanumSquare"/>
               </a:rPr>
-              <a:t>단계적 사고 (CoT)</a:t>
+              <a:t>예시 제공 (few-shot)</a:t>
             </a:r>
           </a:p>
         </p:txBody>
@@ -29612,7 +30041,7 @@
                 <a:ea typeface="NanumGothic"/>
                 <a:cs typeface="NanumGothic"/>
               </a:rPr>
-              <a:t>'단계별로 생각해줘' / '근거를 먼저 정리한 뒤 답해줘'</a:t>
+              <a:t>원하는 입력→출력 예를 2~3개 보여준 뒤 본 작업 요청</a:t>
             </a:r>
           </a:p>
         </p:txBody>
@@ -29750,7 +30179,7 @@
                 <a:ea typeface="NanumGothic"/>
                 <a:cs typeface="NanumGothic"/>
               </a:rPr>
-              <a:t>복잡한 추론·계산의 정확도↑ (생각을 펼치게)</a:t>
+              <a:t>형식·스타일이 안정 (말로 설명하기 어려운 형식에 특히)</a:t>
             </a:r>
           </a:p>
         </p:txBody>
@@ -29841,7 +30270,7 @@
                 <a:ea typeface="NanumGothic"/>
                 <a:cs typeface="NanumGothic"/>
               </a:rPr>
-              <a:t>주의</a:t>
+              <a:t>예</a:t>
             </a:r>
           </a:p>
         </p:txBody>
@@ -29888,7 +30317,7 @@
                 <a:ea typeface="NanumGothic"/>
                 <a:cs typeface="NanumGothic"/>
               </a:rPr>
-              <a:t>간단한 작업엔 굳이 — 길어지고 느려짐</a:t>
+              <a:t>표 형식 예시 2개 → 새 데이터도 같은 표로</a:t>
             </a:r>
           </a:p>
         </p:txBody>
@@ -29946,7 +30375,7 @@
                 <a:ea typeface="NanumGothic"/>
                 <a:cs typeface="NanumGothic"/>
               </a:rPr>
-              <a:t>   ·   35 / 42</a:t>
+              <a:t>   ·   35 / 43</a:t>
             </a:r>
           </a:p>
         </p:txBody>
@@ -30099,7 +30528,7 @@
                 <a:ea typeface="NanumGothic"/>
                 <a:cs typeface="NanumGothic"/>
               </a:rPr>
-              <a:t>생성 제어</a:t>
+              <a:t>기법 ③</a:t>
             </a:r>
           </a:p>
         </p:txBody>
@@ -30146,7 +30575,7 @@
                 <a:ea typeface="NanumSquare"/>
                 <a:cs typeface="NanumSquare"/>
               </a:rPr>
-              <a:t>같은 모델, 다른 출력</a:t>
+              <a:t>단계적 사고 (CoT)</a:t>
             </a:r>
           </a:p>
         </p:txBody>
@@ -30328,7 +30757,7 @@
                 <a:ea typeface="NanumGothic"/>
                 <a:cs typeface="NanumGothic"/>
               </a:rPr>
-              <a:t>temperature</a:t>
+              <a:t>방법</a:t>
             </a:r>
           </a:p>
         </p:txBody>
@@ -30375,7 +30804,7 @@
                 <a:ea typeface="NanumGothic"/>
                 <a:cs typeface="NanumGothic"/>
               </a:rPr>
-              <a:t>낮으면 결정적·일관, 높으면 다양·창의(불안정)</a:t>
+              <a:t>'단계별로 생각해줘' / '근거를 먼저 정리한 뒤 답해줘'</a:t>
             </a:r>
           </a:p>
         </p:txBody>
@@ -30466,7 +30895,7 @@
                 <a:ea typeface="NanumGothic"/>
                 <a:cs typeface="NanumGothic"/>
               </a:rPr>
-              <a:t>확률적 생성</a:t>
+              <a:t>효과</a:t>
             </a:r>
           </a:p>
         </p:txBody>
@@ -30513,7 +30942,7 @@
                 <a:ea typeface="NanumGothic"/>
                 <a:cs typeface="NanumGothic"/>
               </a:rPr>
-              <a:t>같은 질문도 매번 다른 답이 나올 수 있다</a:t>
+              <a:t>복잡한 추론·계산의 정확도↑ (생각을 펼치게)</a:t>
             </a:r>
           </a:p>
         </p:txBody>
@@ -30604,7 +31033,7 @@
                 <a:ea typeface="NanumGothic"/>
                 <a:cs typeface="NanumGothic"/>
               </a:rPr>
-              <a:t>재현성에의 함의</a:t>
+              <a:t>주의</a:t>
             </a:r>
           </a:p>
         </p:txBody>
@@ -30651,7 +31080,7 @@
                 <a:ea typeface="NanumGothic"/>
                 <a:cs typeface="NanumGothic"/>
               </a:rPr>
-              <a:t>리서치엔 낮은 temperature가 유리 — 결과 안정</a:t>
+              <a:t>간단한 작업엔 굳이 — 길어지고 느려짐</a:t>
             </a:r>
           </a:p>
         </p:txBody>
@@ -30709,7 +31138,7 @@
                 <a:ea typeface="NanumGothic"/>
                 <a:cs typeface="NanumGothic"/>
               </a:rPr>
-              <a:t>   ·   36 / 42</a:t>
+              <a:t>   ·   36 / 43</a:t>
             </a:r>
           </a:p>
         </p:txBody>
@@ -30862,7 +31291,7 @@
                 <a:ea typeface="NanumGothic"/>
                 <a:cs typeface="NanumGothic"/>
               </a:rPr>
-              <a:t>컨텍스트</a:t>
+              <a:t>생성 제어</a:t>
             </a:r>
           </a:p>
         </p:txBody>
@@ -30909,7 +31338,7 @@
                 <a:ea typeface="NanumSquare"/>
                 <a:cs typeface="NanumSquare"/>
               </a:rPr>
-              <a:t>컨텍스트 윈도우</a:t>
+              <a:t>같은 모델, 다른 출력</a:t>
             </a:r>
           </a:p>
         </p:txBody>
@@ -31091,7 +31520,7 @@
                 <a:ea typeface="NanumGothic"/>
                 <a:cs typeface="NanumGothic"/>
               </a:rPr>
-              <a:t>한 번에 볼 수 있는 토큰 한계</a:t>
+              <a:t>temperature</a:t>
             </a:r>
           </a:p>
         </p:txBody>
@@ -31138,7 +31567,7 @@
                 <a:ea typeface="NanumGothic"/>
                 <a:cs typeface="NanumGothic"/>
               </a:rPr>
-              <a:t>프롬프트+대화+자료가 이 한도 안에 들어가야</a:t>
+              <a:t>낮으면 결정적·일관, 높으면 다양·창의(불안정)</a:t>
             </a:r>
           </a:p>
         </p:txBody>
@@ -31229,7 +31658,7 @@
                 <a:ea typeface="NanumGothic"/>
                 <a:cs typeface="NanumGothic"/>
               </a:rPr>
-              <a:t>길어지면</a:t>
+              <a:t>확률적 생성</a:t>
             </a:r>
           </a:p>
         </p:txBody>
@@ -31276,7 +31705,7 @@
                 <a:ea typeface="NanumGothic"/>
                 <a:cs typeface="NanumGothic"/>
               </a:rPr>
-              <a:t>비용↑·속도↓·중간 내용 놓침(lost in the middle)</a:t>
+              <a:t>같은 질문도 매번 다른 답이 나올 수 있다</a:t>
             </a:r>
           </a:p>
         </p:txBody>
@@ -31367,7 +31796,7 @@
                 <a:ea typeface="NanumGothic"/>
                 <a:cs typeface="NanumGothic"/>
               </a:rPr>
-              <a:t>에이전트와의 관련</a:t>
+              <a:t>재현성에의 함의</a:t>
             </a:r>
           </a:p>
         </p:txBody>
@@ -31414,118 +31843,14 @@
                 <a:ea typeface="NanumGothic"/>
                 <a:cs typeface="NanumGothic"/>
               </a:rPr>
-              <a:t>외부 메모리·검색·도구로 한계를 보완</a:t>
-            </a:r>
-          </a:p>
-        </p:txBody>
-      </p:sp>
-      <p:sp>
-        <p:nvSpPr>
-          <p:cNvPr id="17" name="Rounded Rectangle 16"/>
-          <p:cNvSpPr/>
-          <p:nvPr/>
-        </p:nvSpPr>
-        <p:spPr>
-          <a:xfrm>
-            <a:off x="502920" y="5532120"/>
-            <a:ext cx="11155680" cy="658368"/>
-          </a:xfrm>
-          <a:prstGeom prst="roundRect">
-            <a:avLst/>
-          </a:prstGeom>
-          <a:solidFill>
-            <a:srgbClr val="F1F5F9"/>
-          </a:solidFill>
-          <a:ln w="12700">
-            <a:solidFill>
-              <a:srgbClr val="E2E8F0"/>
-            </a:solidFill>
-          </a:ln>
-          <a:effectLst/>
-        </p:spPr>
-        <p:style>
-          <a:lnRef idx="1">
-            <a:schemeClr val="accent1"/>
-          </a:lnRef>
-          <a:fillRef idx="3">
-            <a:schemeClr val="accent1"/>
-          </a:fillRef>
-          <a:effectRef idx="2">
-            <a:schemeClr val="accent1"/>
-          </a:effectRef>
-          <a:fontRef idx="minor">
-            <a:schemeClr val="lt1"/>
-          </a:fontRef>
-        </p:style>
-        <p:txBody>
-          <a:bodyPr rtlCol="0" anchor="ctr"/>
-          <a:lstStyle/>
-          <a:p>
-            <a:pPr algn="ctr"/>
-          </a:p>
-        </p:txBody>
-      </p:sp>
-      <p:sp>
-        <p:nvSpPr>
-          <p:cNvPr id="18" name="TextBox 17"/>
-          <p:cNvSpPr txBox="1"/>
-          <p:nvPr/>
-        </p:nvSpPr>
-        <p:spPr>
-          <a:xfrm>
-            <a:off x="777240" y="5532120"/>
-            <a:ext cx="10607040" cy="658368"/>
-          </a:xfrm>
-          <a:prstGeom prst="rect">
-            <a:avLst/>
-          </a:prstGeom>
-          <a:noFill/>
-        </p:spPr>
-        <p:txBody>
-          <a:bodyPr wrap="square" anchor="ctr" lIns="0" rIns="0" tIns="0" bIns="0">
-            <a:spAutoFit/>
-          </a:bodyPr>
-          <a:lstStyle/>
-          <a:p>
-            <a:pPr algn="l">
-              <a:lnSpc>
-                <a:spcPct val="100000"/>
-              </a:lnSpc>
-              <a:spcBef>
-                <a:spcPts val="0"/>
-              </a:spcBef>
-              <a:spcAft>
-                <a:spcPts val="600"/>
-              </a:spcAft>
-            </a:pPr>
-            <a:r>
-              <a:rPr sz="1200" b="1">
-                <a:solidFill>
-                  <a:srgbClr val="6366F1"/>
-                </a:solidFill>
-                <a:latin typeface="NanumGothic"/>
-                <a:ea typeface="NanumGothic"/>
-                <a:cs typeface="NanumGothic"/>
-              </a:rPr>
-              <a:t>NOTE   </a:t>
-            </a:r>
-            <a:r>
-              <a:rPr sz="1300" b="0">
-                <a:solidFill>
-                  <a:srgbClr val="0F172A"/>
-                </a:solidFill>
-                <a:latin typeface="NanumGothic"/>
-                <a:ea typeface="NanumGothic"/>
-                <a:cs typeface="NanumGothic"/>
-              </a:rPr>
-              <a:t>현재 Claude는 최대 100만 토큰(책 여러 권 분량)을 처리하여 긴 문서나 코드를 통째로 분석할 수 있으나, 입력이 길수록 중간 내용을 놓칠 수 있음에 유의해야 한다.</a:t>
-            </a:r>
-          </a:p>
-        </p:txBody>
-      </p:sp>
-      <p:sp>
-        <p:nvSpPr>
-          <p:cNvPr id="19" name="TextBox 18"/>
+              <a:t>리서치엔 낮은 temperature가 유리 — 결과 안정</a:t>
+            </a:r>
+          </a:p>
+        </p:txBody>
+      </p:sp>
+      <p:sp>
+        <p:nvSpPr>
+          <p:cNvPr id="17" name="TextBox 16"/>
           <p:cNvSpPr txBox="1"/>
           <p:nvPr/>
         </p:nvSpPr>
@@ -31576,7 +31901,7 @@
                 <a:ea typeface="NanumGothic"/>
                 <a:cs typeface="NanumGothic"/>
               </a:rPr>
-              <a:t>   ·   37 / 42</a:t>
+              <a:t>   ·   37 / 43</a:t>
             </a:r>
           </a:p>
         </p:txBody>
@@ -31729,7 +32054,7 @@
                 <a:ea typeface="NanumGothic"/>
                 <a:cs typeface="NanumGothic"/>
               </a:rPr>
-              <a:t>핵심 균형</a:t>
+              <a:t>컨텍스트</a:t>
             </a:r>
           </a:p>
         </p:txBody>
@@ -31776,7 +32101,7 @@
                 <a:ea typeface="NanumSquare"/>
                 <a:cs typeface="NanumSquare"/>
               </a:rPr>
-              <a:t>LLM의 능력과 한계</a:t>
+              <a:t>컨텍스트 윈도우</a:t>
             </a:r>
           </a:p>
         </p:txBody>
@@ -31874,20 +32199,434 @@
       </p:sp>
       <p:sp>
         <p:nvSpPr>
-          <p:cNvPr id="8" name="Rounded Rectangle 7"/>
+          <p:cNvPr id="8" name="Oval 7"/>
           <p:cNvSpPr/>
           <p:nvPr/>
         </p:nvSpPr>
         <p:spPr>
           <a:xfrm>
-            <a:off x="502920" y="1828800"/>
-            <a:ext cx="5440680" cy="4023360"/>
+            <a:off x="548640" y="1911096"/>
+            <a:ext cx="146304" cy="146304"/>
+          </a:xfrm>
+          <a:prstGeom prst="ellipse">
+            <a:avLst/>
+          </a:prstGeom>
+          <a:solidFill>
+            <a:srgbClr val="6366F1"/>
+          </a:solidFill>
+          <a:ln>
+            <a:noFill/>
+          </a:ln>
+          <a:effectLst/>
+        </p:spPr>
+        <p:style>
+          <a:lnRef idx="1">
+            <a:schemeClr val="accent1"/>
+          </a:lnRef>
+          <a:fillRef idx="3">
+            <a:schemeClr val="accent1"/>
+          </a:fillRef>
+          <a:effectRef idx="2">
+            <a:schemeClr val="accent1"/>
+          </a:effectRef>
+          <a:fontRef idx="minor">
+            <a:schemeClr val="lt1"/>
+          </a:fontRef>
+        </p:style>
+        <p:txBody>
+          <a:bodyPr rtlCol="0" anchor="ctr"/>
+          <a:lstStyle/>
+          <a:p>
+            <a:pPr algn="ctr"/>
+          </a:p>
+        </p:txBody>
+      </p:sp>
+      <p:sp>
+        <p:nvSpPr>
+          <p:cNvPr id="9" name="TextBox 8"/>
+          <p:cNvSpPr txBox="1"/>
+          <p:nvPr/>
+        </p:nvSpPr>
+        <p:spPr>
+          <a:xfrm>
+            <a:off x="868680" y="1828800"/>
+            <a:ext cx="10607040" cy="457200"/>
+          </a:xfrm>
+          <a:prstGeom prst="rect">
+            <a:avLst/>
+          </a:prstGeom>
+          <a:noFill/>
+        </p:spPr>
+        <p:txBody>
+          <a:bodyPr wrap="square" anchor="t" lIns="0" rIns="0" tIns="0" bIns="0">
+            <a:spAutoFit/>
+          </a:bodyPr>
+          <a:lstStyle/>
+          <a:p>
+            <a:pPr algn="l">
+              <a:lnSpc>
+                <a:spcPct val="100000"/>
+              </a:lnSpc>
+              <a:spcBef>
+                <a:spcPts val="0"/>
+              </a:spcBef>
+              <a:spcAft>
+                <a:spcPts val="600"/>
+              </a:spcAft>
+            </a:pPr>
+            <a:r>
+              <a:rPr sz="1600" b="1">
+                <a:solidFill>
+                  <a:srgbClr val="0F172A"/>
+                </a:solidFill>
+                <a:latin typeface="NanumGothic"/>
+                <a:ea typeface="NanumGothic"/>
+                <a:cs typeface="NanumGothic"/>
+              </a:rPr>
+              <a:t>한 번에 볼 수 있는 토큰 한계</a:t>
+            </a:r>
+          </a:p>
+        </p:txBody>
+      </p:sp>
+      <p:sp>
+        <p:nvSpPr>
+          <p:cNvPr id="10" name="TextBox 9"/>
+          <p:cNvSpPr txBox="1"/>
+          <p:nvPr/>
+        </p:nvSpPr>
+        <p:spPr>
+          <a:xfrm>
+            <a:off x="868680" y="2212848"/>
+            <a:ext cx="10607040" cy="457200"/>
+          </a:xfrm>
+          <a:prstGeom prst="rect">
+            <a:avLst/>
+          </a:prstGeom>
+          <a:noFill/>
+        </p:spPr>
+        <p:txBody>
+          <a:bodyPr wrap="square" anchor="t" lIns="0" rIns="0" tIns="0" bIns="0">
+            <a:spAutoFit/>
+          </a:bodyPr>
+          <a:lstStyle/>
+          <a:p>
+            <a:pPr algn="l">
+              <a:lnSpc>
+                <a:spcPct val="100000"/>
+              </a:lnSpc>
+              <a:spcBef>
+                <a:spcPts val="0"/>
+              </a:spcBef>
+              <a:spcAft>
+                <a:spcPts val="600"/>
+              </a:spcAft>
+            </a:pPr>
+            <a:r>
+              <a:rPr sz="1300" b="0">
+                <a:solidFill>
+                  <a:srgbClr val="64748B"/>
+                </a:solidFill>
+                <a:latin typeface="NanumGothic"/>
+                <a:ea typeface="NanumGothic"/>
+                <a:cs typeface="NanumGothic"/>
+              </a:rPr>
+              <a:t>프롬프트+대화+자료가 이 한도 안에 들어가야</a:t>
+            </a:r>
+          </a:p>
+        </p:txBody>
+      </p:sp>
+      <p:sp>
+        <p:nvSpPr>
+          <p:cNvPr id="11" name="Oval 10"/>
+          <p:cNvSpPr/>
+          <p:nvPr/>
+        </p:nvSpPr>
+        <p:spPr>
+          <a:xfrm>
+            <a:off x="548640" y="2779776"/>
+            <a:ext cx="146304" cy="146304"/>
+          </a:xfrm>
+          <a:prstGeom prst="ellipse">
+            <a:avLst/>
+          </a:prstGeom>
+          <a:solidFill>
+            <a:srgbClr val="6366F1"/>
+          </a:solidFill>
+          <a:ln>
+            <a:noFill/>
+          </a:ln>
+          <a:effectLst/>
+        </p:spPr>
+        <p:style>
+          <a:lnRef idx="1">
+            <a:schemeClr val="accent1"/>
+          </a:lnRef>
+          <a:fillRef idx="3">
+            <a:schemeClr val="accent1"/>
+          </a:fillRef>
+          <a:effectRef idx="2">
+            <a:schemeClr val="accent1"/>
+          </a:effectRef>
+          <a:fontRef idx="minor">
+            <a:schemeClr val="lt1"/>
+          </a:fontRef>
+        </p:style>
+        <p:txBody>
+          <a:bodyPr rtlCol="0" anchor="ctr"/>
+          <a:lstStyle/>
+          <a:p>
+            <a:pPr algn="ctr"/>
+          </a:p>
+        </p:txBody>
+      </p:sp>
+      <p:sp>
+        <p:nvSpPr>
+          <p:cNvPr id="12" name="TextBox 11"/>
+          <p:cNvSpPr txBox="1"/>
+          <p:nvPr/>
+        </p:nvSpPr>
+        <p:spPr>
+          <a:xfrm>
+            <a:off x="868680" y="2697480"/>
+            <a:ext cx="10607040" cy="457200"/>
+          </a:xfrm>
+          <a:prstGeom prst="rect">
+            <a:avLst/>
+          </a:prstGeom>
+          <a:noFill/>
+        </p:spPr>
+        <p:txBody>
+          <a:bodyPr wrap="square" anchor="t" lIns="0" rIns="0" tIns="0" bIns="0">
+            <a:spAutoFit/>
+          </a:bodyPr>
+          <a:lstStyle/>
+          <a:p>
+            <a:pPr algn="l">
+              <a:lnSpc>
+                <a:spcPct val="100000"/>
+              </a:lnSpc>
+              <a:spcBef>
+                <a:spcPts val="0"/>
+              </a:spcBef>
+              <a:spcAft>
+                <a:spcPts val="600"/>
+              </a:spcAft>
+            </a:pPr>
+            <a:r>
+              <a:rPr sz="1600" b="1">
+                <a:solidFill>
+                  <a:srgbClr val="0F172A"/>
+                </a:solidFill>
+                <a:latin typeface="NanumGothic"/>
+                <a:ea typeface="NanumGothic"/>
+                <a:cs typeface="NanumGothic"/>
+              </a:rPr>
+              <a:t>길어지면</a:t>
+            </a:r>
+          </a:p>
+        </p:txBody>
+      </p:sp>
+      <p:sp>
+        <p:nvSpPr>
+          <p:cNvPr id="13" name="TextBox 12"/>
+          <p:cNvSpPr txBox="1"/>
+          <p:nvPr/>
+        </p:nvSpPr>
+        <p:spPr>
+          <a:xfrm>
+            <a:off x="868680" y="3081528"/>
+            <a:ext cx="10607040" cy="457200"/>
+          </a:xfrm>
+          <a:prstGeom prst="rect">
+            <a:avLst/>
+          </a:prstGeom>
+          <a:noFill/>
+        </p:spPr>
+        <p:txBody>
+          <a:bodyPr wrap="square" anchor="t" lIns="0" rIns="0" tIns="0" bIns="0">
+            <a:spAutoFit/>
+          </a:bodyPr>
+          <a:lstStyle/>
+          <a:p>
+            <a:pPr algn="l">
+              <a:lnSpc>
+                <a:spcPct val="100000"/>
+              </a:lnSpc>
+              <a:spcBef>
+                <a:spcPts val="0"/>
+              </a:spcBef>
+              <a:spcAft>
+                <a:spcPts val="600"/>
+              </a:spcAft>
+            </a:pPr>
+            <a:r>
+              <a:rPr sz="1300" b="0">
+                <a:solidFill>
+                  <a:srgbClr val="64748B"/>
+                </a:solidFill>
+                <a:latin typeface="NanumGothic"/>
+                <a:ea typeface="NanumGothic"/>
+                <a:cs typeface="NanumGothic"/>
+              </a:rPr>
+              <a:t>비용↑·속도↓·중간 내용 놓침(lost in the middle)</a:t>
+            </a:r>
+          </a:p>
+        </p:txBody>
+      </p:sp>
+      <p:sp>
+        <p:nvSpPr>
+          <p:cNvPr id="14" name="Oval 13"/>
+          <p:cNvSpPr/>
+          <p:nvPr/>
+        </p:nvSpPr>
+        <p:spPr>
+          <a:xfrm>
+            <a:off x="548640" y="3648456"/>
+            <a:ext cx="146304" cy="146304"/>
+          </a:xfrm>
+          <a:prstGeom prst="ellipse">
+            <a:avLst/>
+          </a:prstGeom>
+          <a:solidFill>
+            <a:srgbClr val="6366F1"/>
+          </a:solidFill>
+          <a:ln>
+            <a:noFill/>
+          </a:ln>
+          <a:effectLst/>
+        </p:spPr>
+        <p:style>
+          <a:lnRef idx="1">
+            <a:schemeClr val="accent1"/>
+          </a:lnRef>
+          <a:fillRef idx="3">
+            <a:schemeClr val="accent1"/>
+          </a:fillRef>
+          <a:effectRef idx="2">
+            <a:schemeClr val="accent1"/>
+          </a:effectRef>
+          <a:fontRef idx="minor">
+            <a:schemeClr val="lt1"/>
+          </a:fontRef>
+        </p:style>
+        <p:txBody>
+          <a:bodyPr rtlCol="0" anchor="ctr"/>
+          <a:lstStyle/>
+          <a:p>
+            <a:pPr algn="ctr"/>
+          </a:p>
+        </p:txBody>
+      </p:sp>
+      <p:sp>
+        <p:nvSpPr>
+          <p:cNvPr id="15" name="TextBox 14"/>
+          <p:cNvSpPr txBox="1"/>
+          <p:nvPr/>
+        </p:nvSpPr>
+        <p:spPr>
+          <a:xfrm>
+            <a:off x="868680" y="3566160"/>
+            <a:ext cx="10607040" cy="457200"/>
+          </a:xfrm>
+          <a:prstGeom prst="rect">
+            <a:avLst/>
+          </a:prstGeom>
+          <a:noFill/>
+        </p:spPr>
+        <p:txBody>
+          <a:bodyPr wrap="square" anchor="t" lIns="0" rIns="0" tIns="0" bIns="0">
+            <a:spAutoFit/>
+          </a:bodyPr>
+          <a:lstStyle/>
+          <a:p>
+            <a:pPr algn="l">
+              <a:lnSpc>
+                <a:spcPct val="100000"/>
+              </a:lnSpc>
+              <a:spcBef>
+                <a:spcPts val="0"/>
+              </a:spcBef>
+              <a:spcAft>
+                <a:spcPts val="600"/>
+              </a:spcAft>
+            </a:pPr>
+            <a:r>
+              <a:rPr sz="1600" b="1">
+                <a:solidFill>
+                  <a:srgbClr val="0F172A"/>
+                </a:solidFill>
+                <a:latin typeface="NanumGothic"/>
+                <a:ea typeface="NanumGothic"/>
+                <a:cs typeface="NanumGothic"/>
+              </a:rPr>
+              <a:t>에이전트와의 관련</a:t>
+            </a:r>
+          </a:p>
+        </p:txBody>
+      </p:sp>
+      <p:sp>
+        <p:nvSpPr>
+          <p:cNvPr id="16" name="TextBox 15"/>
+          <p:cNvSpPr txBox="1"/>
+          <p:nvPr/>
+        </p:nvSpPr>
+        <p:spPr>
+          <a:xfrm>
+            <a:off x="868680" y="3950208"/>
+            <a:ext cx="10607040" cy="457200"/>
+          </a:xfrm>
+          <a:prstGeom prst="rect">
+            <a:avLst/>
+          </a:prstGeom>
+          <a:noFill/>
+        </p:spPr>
+        <p:txBody>
+          <a:bodyPr wrap="square" anchor="t" lIns="0" rIns="0" tIns="0" bIns="0">
+            <a:spAutoFit/>
+          </a:bodyPr>
+          <a:lstStyle/>
+          <a:p>
+            <a:pPr algn="l">
+              <a:lnSpc>
+                <a:spcPct val="100000"/>
+              </a:lnSpc>
+              <a:spcBef>
+                <a:spcPts val="0"/>
+              </a:spcBef>
+              <a:spcAft>
+                <a:spcPts val="600"/>
+              </a:spcAft>
+            </a:pPr>
+            <a:r>
+              <a:rPr sz="1300" b="0">
+                <a:solidFill>
+                  <a:srgbClr val="64748B"/>
+                </a:solidFill>
+                <a:latin typeface="NanumGothic"/>
+                <a:ea typeface="NanumGothic"/>
+                <a:cs typeface="NanumGothic"/>
+              </a:rPr>
+              <a:t>외부 메모리·검색·도구로 한계를 보완</a:t>
+            </a:r>
+          </a:p>
+        </p:txBody>
+      </p:sp>
+      <p:sp>
+        <p:nvSpPr>
+          <p:cNvPr id="17" name="Rounded Rectangle 16"/>
+          <p:cNvSpPr/>
+          <p:nvPr/>
+        </p:nvSpPr>
+        <p:spPr>
+          <a:xfrm>
+            <a:off x="502920" y="5532120"/>
+            <a:ext cx="11155680" cy="658368"/>
           </a:xfrm>
           <a:prstGeom prst="roundRect">
             <a:avLst/>
           </a:prstGeom>
           <a:solidFill>
-            <a:srgbClr val="F8FAFC"/>
+            <a:srgbClr val="F1F5F9"/>
           </a:solidFill>
           <a:ln w="12700">
             <a:solidFill>
@@ -31920,58 +32659,14 @@
       </p:sp>
       <p:sp>
         <p:nvSpPr>
-          <p:cNvPr id="9" name="Rounded Rectangle 8"/>
-          <p:cNvSpPr/>
-          <p:nvPr/>
-        </p:nvSpPr>
-        <p:spPr>
-          <a:xfrm>
-            <a:off x="502920" y="1828800"/>
-            <a:ext cx="5440680" cy="640080"/>
-          </a:xfrm>
-          <a:prstGeom prst="roundRect">
-            <a:avLst/>
-          </a:prstGeom>
-          <a:solidFill>
-            <a:srgbClr val="6366F1"/>
-          </a:solidFill>
-          <a:ln>
-            <a:noFill/>
-          </a:ln>
-          <a:effectLst/>
-        </p:spPr>
-        <p:style>
-          <a:lnRef idx="1">
-            <a:schemeClr val="accent1"/>
-          </a:lnRef>
-          <a:fillRef idx="3">
-            <a:schemeClr val="accent1"/>
-          </a:fillRef>
-          <a:effectRef idx="2">
-            <a:schemeClr val="accent1"/>
-          </a:effectRef>
-          <a:fontRef idx="minor">
-            <a:schemeClr val="lt1"/>
-          </a:fontRef>
-        </p:style>
-        <p:txBody>
-          <a:bodyPr rtlCol="0" anchor="ctr"/>
-          <a:lstStyle/>
-          <a:p>
-            <a:pPr algn="ctr"/>
-          </a:p>
-        </p:txBody>
-      </p:sp>
-      <p:sp>
-        <p:nvSpPr>
-          <p:cNvPr id="10" name="TextBox 9"/>
-          <p:cNvSpPr txBox="1"/>
-          <p:nvPr/>
-        </p:nvSpPr>
-        <p:spPr>
-          <a:xfrm>
-            <a:off x="777240" y="1828800"/>
-            <a:ext cx="4937760" cy="640080"/>
+          <p:cNvPr id="18" name="TextBox 17"/>
+          <p:cNvSpPr txBox="1"/>
+          <p:nvPr/>
+        </p:nvSpPr>
+        <p:spPr>
+          <a:xfrm>
+            <a:off x="777240" y="5532120"/>
+            <a:ext cx="10607040" cy="658368"/>
           </a:xfrm>
           <a:prstGeom prst="rect">
             <a:avLst/>
@@ -31996,54 +32691,7 @@
               </a:spcAft>
             </a:pPr>
             <a:r>
-              <a:rPr sz="1600" b="1">
-                <a:solidFill>
-                  <a:srgbClr val="FFFFFF"/>
-                </a:solidFill>
-                <a:latin typeface="NanumSquare"/>
-                <a:ea typeface="NanumSquare"/>
-                <a:cs typeface="NanumSquare"/>
-              </a:rPr>
-              <a:t>잘하는 것</a:t>
-            </a:r>
-          </a:p>
-        </p:txBody>
-      </p:sp>
-      <p:sp>
-        <p:nvSpPr>
-          <p:cNvPr id="11" name="TextBox 10"/>
-          <p:cNvSpPr txBox="1"/>
-          <p:nvPr/>
-        </p:nvSpPr>
-        <p:spPr>
-          <a:xfrm>
-            <a:off x="822960" y="2697480"/>
-            <a:ext cx="4846320" cy="548640"/>
-          </a:xfrm>
-          <a:prstGeom prst="rect">
-            <a:avLst/>
-          </a:prstGeom>
-          <a:noFill/>
-        </p:spPr>
-        <p:txBody>
-          <a:bodyPr wrap="square" anchor="t" lIns="0" rIns="0" tIns="0" bIns="0">
-            <a:spAutoFit/>
-          </a:bodyPr>
-          <a:lstStyle/>
-          <a:p>
-            <a:pPr algn="l">
-              <a:lnSpc>
-                <a:spcPct val="100000"/>
-              </a:lnSpc>
-              <a:spcBef>
-                <a:spcPts val="0"/>
-              </a:spcBef>
-              <a:spcAft>
-                <a:spcPts val="600"/>
-              </a:spcAft>
-            </a:pPr>
-            <a:r>
-              <a:rPr sz="1400" b="1">
+              <a:rPr sz="1200" b="1">
                 <a:solidFill>
                   <a:srgbClr val="6366F1"/>
                 </a:solidFill>
@@ -32051,10 +32699,10 @@
                 <a:ea typeface="NanumGothic"/>
                 <a:cs typeface="NanumGothic"/>
               </a:rPr>
-              <a:t>•  </a:t>
-            </a:r>
-            <a:r>
-              <a:rPr sz="1400" b="0">
+              <a:t>NOTE   </a:t>
+            </a:r>
+            <a:r>
+              <a:rPr sz="1300" b="0">
                 <a:solidFill>
                   <a:srgbClr val="0F172A"/>
                 </a:solidFill>
@@ -32062,376 +32710,7 @@
                 <a:ea typeface="NanumGothic"/>
                 <a:cs typeface="NanumGothic"/>
               </a:rPr>
-              <a:t>요약·번역·분류</a:t>
-            </a:r>
-          </a:p>
-        </p:txBody>
-      </p:sp>
-      <p:sp>
-        <p:nvSpPr>
-          <p:cNvPr id="12" name="TextBox 11"/>
-          <p:cNvSpPr txBox="1"/>
-          <p:nvPr/>
-        </p:nvSpPr>
-        <p:spPr>
-          <a:xfrm>
-            <a:off x="822960" y="3264408"/>
-            <a:ext cx="4846320" cy="548640"/>
-          </a:xfrm>
-          <a:prstGeom prst="rect">
-            <a:avLst/>
-          </a:prstGeom>
-          <a:noFill/>
-        </p:spPr>
-        <p:txBody>
-          <a:bodyPr wrap="square" anchor="t" lIns="0" rIns="0" tIns="0" bIns="0">
-            <a:spAutoFit/>
-          </a:bodyPr>
-          <a:lstStyle/>
-          <a:p>
-            <a:pPr algn="l">
-              <a:lnSpc>
-                <a:spcPct val="100000"/>
-              </a:lnSpc>
-              <a:spcBef>
-                <a:spcPts val="0"/>
-              </a:spcBef>
-              <a:spcAft>
-                <a:spcPts val="600"/>
-              </a:spcAft>
-            </a:pPr>
-            <a:r>
-              <a:rPr sz="1400" b="1">
-                <a:solidFill>
-                  <a:srgbClr val="6366F1"/>
-                </a:solidFill>
-                <a:latin typeface="NanumGothic"/>
-                <a:ea typeface="NanumGothic"/>
-                <a:cs typeface="NanumGothic"/>
-              </a:rPr>
-              <a:t>•  </a:t>
-            </a:r>
-            <a:r>
-              <a:rPr sz="1400" b="0">
-                <a:solidFill>
-                  <a:srgbClr val="0F172A"/>
-                </a:solidFill>
-                <a:latin typeface="NanumGothic"/>
-                <a:ea typeface="NanumGothic"/>
-                <a:cs typeface="NanumGothic"/>
-              </a:rPr>
-              <a:t>코드 생성·설명</a:t>
-            </a:r>
-          </a:p>
-        </p:txBody>
-      </p:sp>
-      <p:sp>
-        <p:nvSpPr>
-          <p:cNvPr id="13" name="TextBox 12"/>
-          <p:cNvSpPr txBox="1"/>
-          <p:nvPr/>
-        </p:nvSpPr>
-        <p:spPr>
-          <a:xfrm>
-            <a:off x="822960" y="3831336"/>
-            <a:ext cx="4846320" cy="548640"/>
-          </a:xfrm>
-          <a:prstGeom prst="rect">
-            <a:avLst/>
-          </a:prstGeom>
-          <a:noFill/>
-        </p:spPr>
-        <p:txBody>
-          <a:bodyPr wrap="square" anchor="t" lIns="0" rIns="0" tIns="0" bIns="0">
-            <a:spAutoFit/>
-          </a:bodyPr>
-          <a:lstStyle/>
-          <a:p>
-            <a:pPr algn="l">
-              <a:lnSpc>
-                <a:spcPct val="100000"/>
-              </a:lnSpc>
-              <a:spcBef>
-                <a:spcPts val="0"/>
-              </a:spcBef>
-              <a:spcAft>
-                <a:spcPts val="600"/>
-              </a:spcAft>
-            </a:pPr>
-            <a:r>
-              <a:rPr sz="1400" b="1">
-                <a:solidFill>
-                  <a:srgbClr val="6366F1"/>
-                </a:solidFill>
-                <a:latin typeface="NanumGothic"/>
-                <a:ea typeface="NanumGothic"/>
-                <a:cs typeface="NanumGothic"/>
-              </a:rPr>
-              <a:t>•  </a:t>
-            </a:r>
-            <a:r>
-              <a:rPr sz="1400" b="0">
-                <a:solidFill>
-                  <a:srgbClr val="0F172A"/>
-                </a:solidFill>
-                <a:latin typeface="NanumGothic"/>
-                <a:ea typeface="NanumGothic"/>
-                <a:cs typeface="NanumGothic"/>
-              </a:rPr>
-              <a:t>텍스트 추출·재구성</a:t>
-            </a:r>
-          </a:p>
-        </p:txBody>
-      </p:sp>
-      <p:sp>
-        <p:nvSpPr>
-          <p:cNvPr id="14" name="TextBox 13"/>
-          <p:cNvSpPr txBox="1"/>
-          <p:nvPr/>
-        </p:nvSpPr>
-        <p:spPr>
-          <a:xfrm>
-            <a:off x="822960" y="4398264"/>
-            <a:ext cx="4846320" cy="548640"/>
-          </a:xfrm>
-          <a:prstGeom prst="rect">
-            <a:avLst/>
-          </a:prstGeom>
-          <a:noFill/>
-        </p:spPr>
-        <p:txBody>
-          <a:bodyPr wrap="square" anchor="t" lIns="0" rIns="0" tIns="0" bIns="0">
-            <a:spAutoFit/>
-          </a:bodyPr>
-          <a:lstStyle/>
-          <a:p>
-            <a:pPr algn="l">
-              <a:lnSpc>
-                <a:spcPct val="100000"/>
-              </a:lnSpc>
-              <a:spcBef>
-                <a:spcPts val="0"/>
-              </a:spcBef>
-              <a:spcAft>
-                <a:spcPts val="600"/>
-              </a:spcAft>
-            </a:pPr>
-            <a:r>
-              <a:rPr sz="1400" b="1">
-                <a:solidFill>
-                  <a:srgbClr val="6366F1"/>
-                </a:solidFill>
-                <a:latin typeface="NanumGothic"/>
-                <a:ea typeface="NanumGothic"/>
-                <a:cs typeface="NanumGothic"/>
-              </a:rPr>
-              <a:t>•  </a:t>
-            </a:r>
-            <a:r>
-              <a:rPr sz="1400" b="0">
-                <a:solidFill>
-                  <a:srgbClr val="0F172A"/>
-                </a:solidFill>
-                <a:latin typeface="NanumGothic"/>
-                <a:ea typeface="NanumGothic"/>
-                <a:cs typeface="NanumGothic"/>
-              </a:rPr>
-              <a:t>브레인스토밍</a:t>
-            </a:r>
-          </a:p>
-        </p:txBody>
-      </p:sp>
-      <p:sp>
-        <p:nvSpPr>
-          <p:cNvPr id="15" name="Rounded Rectangle 14"/>
-          <p:cNvSpPr/>
-          <p:nvPr/>
-        </p:nvSpPr>
-        <p:spPr>
-          <a:xfrm>
-            <a:off x="6172200" y="1828800"/>
-            <a:ext cx="5440680" cy="4023360"/>
-          </a:xfrm>
-          <a:prstGeom prst="roundRect">
-            <a:avLst/>
-          </a:prstGeom>
-          <a:solidFill>
-            <a:srgbClr val="F8FAFC"/>
-          </a:solidFill>
-          <a:ln w="12700">
-            <a:solidFill>
-              <a:srgbClr val="E2E8F0"/>
-            </a:solidFill>
-          </a:ln>
-          <a:effectLst/>
-        </p:spPr>
-        <p:style>
-          <a:lnRef idx="1">
-            <a:schemeClr val="accent1"/>
-          </a:lnRef>
-          <a:fillRef idx="3">
-            <a:schemeClr val="accent1"/>
-          </a:fillRef>
-          <a:effectRef idx="2">
-            <a:schemeClr val="accent1"/>
-          </a:effectRef>
-          <a:fontRef idx="minor">
-            <a:schemeClr val="lt1"/>
-          </a:fontRef>
-        </p:style>
-        <p:txBody>
-          <a:bodyPr rtlCol="0" anchor="ctr"/>
-          <a:lstStyle/>
-          <a:p>
-            <a:pPr algn="ctr"/>
-          </a:p>
-        </p:txBody>
-      </p:sp>
-      <p:sp>
-        <p:nvSpPr>
-          <p:cNvPr id="16" name="Rounded Rectangle 15"/>
-          <p:cNvSpPr/>
-          <p:nvPr/>
-        </p:nvSpPr>
-        <p:spPr>
-          <a:xfrm>
-            <a:off x="6172200" y="1828800"/>
-            <a:ext cx="5440680" cy="640080"/>
-          </a:xfrm>
-          <a:prstGeom prst="roundRect">
-            <a:avLst/>
-          </a:prstGeom>
-          <a:solidFill>
-            <a:srgbClr val="12203C"/>
-          </a:solidFill>
-          <a:ln>
-            <a:noFill/>
-          </a:ln>
-          <a:effectLst/>
-        </p:spPr>
-        <p:style>
-          <a:lnRef idx="1">
-            <a:schemeClr val="accent1"/>
-          </a:lnRef>
-          <a:fillRef idx="3">
-            <a:schemeClr val="accent1"/>
-          </a:fillRef>
-          <a:effectRef idx="2">
-            <a:schemeClr val="accent1"/>
-          </a:effectRef>
-          <a:fontRef idx="minor">
-            <a:schemeClr val="lt1"/>
-          </a:fontRef>
-        </p:style>
-        <p:txBody>
-          <a:bodyPr rtlCol="0" anchor="ctr"/>
-          <a:lstStyle/>
-          <a:p>
-            <a:pPr algn="ctr"/>
-          </a:p>
-        </p:txBody>
-      </p:sp>
-      <p:sp>
-        <p:nvSpPr>
-          <p:cNvPr id="17" name="TextBox 16"/>
-          <p:cNvSpPr txBox="1"/>
-          <p:nvPr/>
-        </p:nvSpPr>
-        <p:spPr>
-          <a:xfrm>
-            <a:off x="6446520" y="1828800"/>
-            <a:ext cx="4937760" cy="640080"/>
-          </a:xfrm>
-          <a:prstGeom prst="rect">
-            <a:avLst/>
-          </a:prstGeom>
-          <a:noFill/>
-        </p:spPr>
-        <p:txBody>
-          <a:bodyPr wrap="square" anchor="ctr" lIns="0" rIns="0" tIns="0" bIns="0">
-            <a:spAutoFit/>
-          </a:bodyPr>
-          <a:lstStyle/>
-          <a:p>
-            <a:pPr algn="l">
-              <a:lnSpc>
-                <a:spcPct val="100000"/>
-              </a:lnSpc>
-              <a:spcBef>
-                <a:spcPts val="0"/>
-              </a:spcBef>
-              <a:spcAft>
-                <a:spcPts val="600"/>
-              </a:spcAft>
-            </a:pPr>
-            <a:r>
-              <a:rPr sz="1600" b="1">
-                <a:solidFill>
-                  <a:srgbClr val="FFFFFF"/>
-                </a:solidFill>
-                <a:latin typeface="NanumSquare"/>
-                <a:ea typeface="NanumSquare"/>
-                <a:cs typeface="NanumSquare"/>
-              </a:rPr>
-              <a:t>주의할 것</a:t>
-            </a:r>
-          </a:p>
-        </p:txBody>
-      </p:sp>
-      <p:sp>
-        <p:nvSpPr>
-          <p:cNvPr id="18" name="TextBox 17"/>
-          <p:cNvSpPr txBox="1"/>
-          <p:nvPr/>
-        </p:nvSpPr>
-        <p:spPr>
-          <a:xfrm>
-            <a:off x="6492240" y="2697480"/>
-            <a:ext cx="4846320" cy="548640"/>
-          </a:xfrm>
-          <a:prstGeom prst="rect">
-            <a:avLst/>
-          </a:prstGeom>
-          <a:noFill/>
-        </p:spPr>
-        <p:txBody>
-          <a:bodyPr wrap="square" anchor="t" lIns="0" rIns="0" tIns="0" bIns="0">
-            <a:spAutoFit/>
-          </a:bodyPr>
-          <a:lstStyle/>
-          <a:p>
-            <a:pPr algn="l">
-              <a:lnSpc>
-                <a:spcPct val="100000"/>
-              </a:lnSpc>
-              <a:spcBef>
-                <a:spcPts val="0"/>
-              </a:spcBef>
-              <a:spcAft>
-                <a:spcPts val="600"/>
-              </a:spcAft>
-            </a:pPr>
-            <a:r>
-              <a:rPr sz="1400" b="1">
-                <a:solidFill>
-                  <a:srgbClr val="12203C"/>
-                </a:solidFill>
-                <a:latin typeface="NanumGothic"/>
-                <a:ea typeface="NanumGothic"/>
-                <a:cs typeface="NanumGothic"/>
-              </a:rPr>
-              <a:t>•  </a:t>
-            </a:r>
-            <a:r>
-              <a:rPr sz="1400" b="0">
-                <a:solidFill>
-                  <a:srgbClr val="0F172A"/>
-                </a:solidFill>
-                <a:latin typeface="NanumGothic"/>
-                <a:ea typeface="NanumGothic"/>
-                <a:cs typeface="NanumGothic"/>
-              </a:rPr>
-              <a:t>환각 — 없는 사실 지어냄</a:t>
+              <a:t>현재 Claude는 최대 100만 토큰(책 여러 권 분량)을 처리하여 긴 문서나 코드를 통째로 분석할 수 있으나, 입력이 길수록 중간 내용을 놓칠 수 있음에 유의해야 한다.</a:t>
             </a:r>
           </a:p>
         </p:txBody>
@@ -32439,180 +32718,6 @@
       <p:sp>
         <p:nvSpPr>
           <p:cNvPr id="19" name="TextBox 18"/>
-          <p:cNvSpPr txBox="1"/>
-          <p:nvPr/>
-        </p:nvSpPr>
-        <p:spPr>
-          <a:xfrm>
-            <a:off x="6492240" y="3264408"/>
-            <a:ext cx="4846320" cy="548640"/>
-          </a:xfrm>
-          <a:prstGeom prst="rect">
-            <a:avLst/>
-          </a:prstGeom>
-          <a:noFill/>
-        </p:spPr>
-        <p:txBody>
-          <a:bodyPr wrap="square" anchor="t" lIns="0" rIns="0" tIns="0" bIns="0">
-            <a:spAutoFit/>
-          </a:bodyPr>
-          <a:lstStyle/>
-          <a:p>
-            <a:pPr algn="l">
-              <a:lnSpc>
-                <a:spcPct val="100000"/>
-              </a:lnSpc>
-              <a:spcBef>
-                <a:spcPts val="0"/>
-              </a:spcBef>
-              <a:spcAft>
-                <a:spcPts val="600"/>
-              </a:spcAft>
-            </a:pPr>
-            <a:r>
-              <a:rPr sz="1400" b="1">
-                <a:solidFill>
-                  <a:srgbClr val="12203C"/>
-                </a:solidFill>
-                <a:latin typeface="NanumGothic"/>
-                <a:ea typeface="NanumGothic"/>
-                <a:cs typeface="NanumGothic"/>
-              </a:rPr>
-              <a:t>•  </a:t>
-            </a:r>
-            <a:r>
-              <a:rPr sz="1400" b="0">
-                <a:solidFill>
-                  <a:srgbClr val="0F172A"/>
-                </a:solidFill>
-                <a:latin typeface="NanumGothic"/>
-                <a:ea typeface="NanumGothic"/>
-                <a:cs typeface="NanumGothic"/>
-              </a:rPr>
-              <a:t>최신·실시간 정보</a:t>
-            </a:r>
-          </a:p>
-        </p:txBody>
-      </p:sp>
-      <p:sp>
-        <p:nvSpPr>
-          <p:cNvPr id="20" name="TextBox 19"/>
-          <p:cNvSpPr txBox="1"/>
-          <p:nvPr/>
-        </p:nvSpPr>
-        <p:spPr>
-          <a:xfrm>
-            <a:off x="6492240" y="3831336"/>
-            <a:ext cx="4846320" cy="548640"/>
-          </a:xfrm>
-          <a:prstGeom prst="rect">
-            <a:avLst/>
-          </a:prstGeom>
-          <a:noFill/>
-        </p:spPr>
-        <p:txBody>
-          <a:bodyPr wrap="square" anchor="t" lIns="0" rIns="0" tIns="0" bIns="0">
-            <a:spAutoFit/>
-          </a:bodyPr>
-          <a:lstStyle/>
-          <a:p>
-            <a:pPr algn="l">
-              <a:lnSpc>
-                <a:spcPct val="100000"/>
-              </a:lnSpc>
-              <a:spcBef>
-                <a:spcPts val="0"/>
-              </a:spcBef>
-              <a:spcAft>
-                <a:spcPts val="600"/>
-              </a:spcAft>
-            </a:pPr>
-            <a:r>
-              <a:rPr sz="1400" b="1">
-                <a:solidFill>
-                  <a:srgbClr val="12203C"/>
-                </a:solidFill>
-                <a:latin typeface="NanumGothic"/>
-                <a:ea typeface="NanumGothic"/>
-                <a:cs typeface="NanumGothic"/>
-              </a:rPr>
-              <a:t>•  </a:t>
-            </a:r>
-            <a:r>
-              <a:rPr sz="1400" b="0">
-                <a:solidFill>
-                  <a:srgbClr val="0F172A"/>
-                </a:solidFill>
-                <a:latin typeface="NanumGothic"/>
-                <a:ea typeface="NanumGothic"/>
-                <a:cs typeface="NanumGothic"/>
-              </a:rPr>
-              <a:t>정확한 계산·셈</a:t>
-            </a:r>
-          </a:p>
-        </p:txBody>
-      </p:sp>
-      <p:sp>
-        <p:nvSpPr>
-          <p:cNvPr id="21" name="TextBox 20"/>
-          <p:cNvSpPr txBox="1"/>
-          <p:nvPr/>
-        </p:nvSpPr>
-        <p:spPr>
-          <a:xfrm>
-            <a:off x="6492240" y="4398264"/>
-            <a:ext cx="4846320" cy="548640"/>
-          </a:xfrm>
-          <a:prstGeom prst="rect">
-            <a:avLst/>
-          </a:prstGeom>
-          <a:noFill/>
-        </p:spPr>
-        <p:txBody>
-          <a:bodyPr wrap="square" anchor="t" lIns="0" rIns="0" tIns="0" bIns="0">
-            <a:spAutoFit/>
-          </a:bodyPr>
-          <a:lstStyle/>
-          <a:p>
-            <a:pPr algn="l">
-              <a:lnSpc>
-                <a:spcPct val="100000"/>
-              </a:lnSpc>
-              <a:spcBef>
-                <a:spcPts val="0"/>
-              </a:spcBef>
-              <a:spcAft>
-                <a:spcPts val="600"/>
-              </a:spcAft>
-            </a:pPr>
-            <a:r>
-              <a:rPr sz="1400" b="1">
-                <a:solidFill>
-                  <a:srgbClr val="12203C"/>
-                </a:solidFill>
-                <a:latin typeface="NanumGothic"/>
-                <a:ea typeface="NanumGothic"/>
-                <a:cs typeface="NanumGothic"/>
-              </a:rPr>
-              <a:t>•  </a:t>
-            </a:r>
-            <a:r>
-              <a:rPr sz="1400" b="0">
-                <a:solidFill>
-                  <a:srgbClr val="0F172A"/>
-                </a:solidFill>
-                <a:latin typeface="NanumGothic"/>
-                <a:ea typeface="NanumGothic"/>
-                <a:cs typeface="NanumGothic"/>
-              </a:rPr>
-              <a:t>일관된 장기 추론</a:t>
-            </a:r>
-          </a:p>
-        </p:txBody>
-      </p:sp>
-      <p:sp>
-        <p:nvSpPr>
-          <p:cNvPr id="22" name="TextBox 21"/>
           <p:cNvSpPr txBox="1"/>
           <p:nvPr/>
         </p:nvSpPr>
@@ -32663,7 +32768,7 @@
                 <a:ea typeface="NanumGothic"/>
                 <a:cs typeface="NanumGothic"/>
               </a:rPr>
-              <a:t>   ·   38 / 42</a:t>
+              <a:t>   ·   38 / 43</a:t>
             </a:r>
           </a:p>
         </p:txBody>
@@ -32816,7 +32921,7 @@
                 <a:ea typeface="NanumGothic"/>
                 <a:cs typeface="NanumGothic"/>
               </a:rPr>
-              <a:t>주의</a:t>
+              <a:t>핵심 균형</a:t>
             </a:r>
           </a:p>
         </p:txBody>
@@ -32863,7 +32968,7 @@
                 <a:ea typeface="NanumSquare"/>
                 <a:cs typeface="NanumSquare"/>
               </a:rPr>
-              <a:t>환각(hallucination) 바로 알기</a:t>
+              <a:t>LLM의 능력과 한계</a:t>
             </a:r>
           </a:p>
         </p:txBody>
@@ -32961,16 +33066,62 @@
       </p:sp>
       <p:sp>
         <p:nvSpPr>
-          <p:cNvPr id="8" name="Oval 7"/>
+          <p:cNvPr id="8" name="Rounded Rectangle 7"/>
           <p:cNvSpPr/>
           <p:nvPr/>
         </p:nvSpPr>
         <p:spPr>
           <a:xfrm>
-            <a:off x="548640" y="1911096"/>
-            <a:ext cx="146304" cy="146304"/>
-          </a:xfrm>
-          <a:prstGeom prst="ellipse">
+            <a:off x="502920" y="1828800"/>
+            <a:ext cx="5440680" cy="4023360"/>
+          </a:xfrm>
+          <a:prstGeom prst="roundRect">
+            <a:avLst/>
+          </a:prstGeom>
+          <a:solidFill>
+            <a:srgbClr val="F8FAFC"/>
+          </a:solidFill>
+          <a:ln w="12700">
+            <a:solidFill>
+              <a:srgbClr val="E2E8F0"/>
+            </a:solidFill>
+          </a:ln>
+          <a:effectLst/>
+        </p:spPr>
+        <p:style>
+          <a:lnRef idx="1">
+            <a:schemeClr val="accent1"/>
+          </a:lnRef>
+          <a:fillRef idx="3">
+            <a:schemeClr val="accent1"/>
+          </a:fillRef>
+          <a:effectRef idx="2">
+            <a:schemeClr val="accent1"/>
+          </a:effectRef>
+          <a:fontRef idx="minor">
+            <a:schemeClr val="lt1"/>
+          </a:fontRef>
+        </p:style>
+        <p:txBody>
+          <a:bodyPr rtlCol="0" anchor="ctr"/>
+          <a:lstStyle/>
+          <a:p>
+            <a:pPr algn="ctr"/>
+          </a:p>
+        </p:txBody>
+      </p:sp>
+      <p:sp>
+        <p:nvSpPr>
+          <p:cNvPr id="9" name="Rounded Rectangle 8"/>
+          <p:cNvSpPr/>
+          <p:nvPr/>
+        </p:nvSpPr>
+        <p:spPr>
+          <a:xfrm>
+            <a:off x="502920" y="1828800"/>
+            <a:ext cx="5440680" cy="640080"/>
+          </a:xfrm>
+          <a:prstGeom prst="roundRect">
             <a:avLst/>
           </a:prstGeom>
           <a:solidFill>
@@ -33005,14 +33156,61 @@
       </p:sp>
       <p:sp>
         <p:nvSpPr>
-          <p:cNvPr id="9" name="TextBox 8"/>
-          <p:cNvSpPr txBox="1"/>
-          <p:nvPr/>
-        </p:nvSpPr>
-        <p:spPr>
-          <a:xfrm>
-            <a:off x="868680" y="1828800"/>
-            <a:ext cx="10607040" cy="457200"/>
+          <p:cNvPr id="10" name="TextBox 9"/>
+          <p:cNvSpPr txBox="1"/>
+          <p:nvPr/>
+        </p:nvSpPr>
+        <p:spPr>
+          <a:xfrm>
+            <a:off x="777240" y="1828800"/>
+            <a:ext cx="4937760" cy="640080"/>
+          </a:xfrm>
+          <a:prstGeom prst="rect">
+            <a:avLst/>
+          </a:prstGeom>
+          <a:noFill/>
+        </p:spPr>
+        <p:txBody>
+          <a:bodyPr wrap="square" anchor="ctr" lIns="0" rIns="0" tIns="0" bIns="0">
+            <a:spAutoFit/>
+          </a:bodyPr>
+          <a:lstStyle/>
+          <a:p>
+            <a:pPr algn="l">
+              <a:lnSpc>
+                <a:spcPct val="100000"/>
+              </a:lnSpc>
+              <a:spcBef>
+                <a:spcPts val="0"/>
+              </a:spcBef>
+              <a:spcAft>
+                <a:spcPts val="600"/>
+              </a:spcAft>
+            </a:pPr>
+            <a:r>
+              <a:rPr sz="1600" b="1">
+                <a:solidFill>
+                  <a:srgbClr val="FFFFFF"/>
+                </a:solidFill>
+                <a:latin typeface="NanumSquare"/>
+                <a:ea typeface="NanumSquare"/>
+                <a:cs typeface="NanumSquare"/>
+              </a:rPr>
+              <a:t>잘하는 것</a:t>
+            </a:r>
+          </a:p>
+        </p:txBody>
+      </p:sp>
+      <p:sp>
+        <p:nvSpPr>
+          <p:cNvPr id="11" name="TextBox 10"/>
+          <p:cNvSpPr txBox="1"/>
+          <p:nvPr/>
+        </p:nvSpPr>
+        <p:spPr>
+          <a:xfrm>
+            <a:off x="822960" y="2697480"/>
+            <a:ext cx="4846320" cy="548640"/>
           </a:xfrm>
           <a:prstGeom prst="rect">
             <a:avLst/>
@@ -33037,7 +33235,18 @@
               </a:spcAft>
             </a:pPr>
             <a:r>
-              <a:rPr sz="1600" b="1">
+              <a:rPr sz="1400" b="1">
+                <a:solidFill>
+                  <a:srgbClr val="6366F1"/>
+                </a:solidFill>
+                <a:latin typeface="NanumGothic"/>
+                <a:ea typeface="NanumGothic"/>
+                <a:cs typeface="NanumGothic"/>
+              </a:rPr>
+              <a:t>•  </a:t>
+            </a:r>
+            <a:r>
+              <a:rPr sz="1400" b="0">
                 <a:solidFill>
                   <a:srgbClr val="0F172A"/>
                 </a:solidFill>
@@ -33045,21 +33254,21 @@
                 <a:ea typeface="NanumGothic"/>
                 <a:cs typeface="NanumGothic"/>
               </a:rPr>
-              <a:t>그럴듯하지만 틀린 출력</a:t>
-            </a:r>
-          </a:p>
-        </p:txBody>
-      </p:sp>
-      <p:sp>
-        <p:nvSpPr>
-          <p:cNvPr id="10" name="TextBox 9"/>
-          <p:cNvSpPr txBox="1"/>
-          <p:nvPr/>
-        </p:nvSpPr>
-        <p:spPr>
-          <a:xfrm>
-            <a:off x="868680" y="2212848"/>
-            <a:ext cx="10607040" cy="457200"/>
+              <a:t>요약·번역·분류</a:t>
+            </a:r>
+          </a:p>
+        </p:txBody>
+      </p:sp>
+      <p:sp>
+        <p:nvSpPr>
+          <p:cNvPr id="12" name="TextBox 11"/>
+          <p:cNvSpPr txBox="1"/>
+          <p:nvPr/>
+        </p:nvSpPr>
+        <p:spPr>
+          <a:xfrm>
+            <a:off x="822960" y="3264408"/>
+            <a:ext cx="4846320" cy="548640"/>
           </a:xfrm>
           <a:prstGeom prst="rect">
             <a:avLst/>
@@ -33084,449 +33293,162 @@
               </a:spcAft>
             </a:pPr>
             <a:r>
-              <a:rPr sz="1300" b="0">
-                <a:solidFill>
-                  <a:srgbClr val="64748B"/>
-                </a:solidFill>
-                <a:latin typeface="NanumGothic"/>
-                <a:ea typeface="NanumGothic"/>
-                <a:cs typeface="NanumGothic"/>
-              </a:rPr>
-              <a:t>출처·인용·수치를 자신있게 지어내기도</a:t>
-            </a:r>
-          </a:p>
-        </p:txBody>
-      </p:sp>
-      <p:sp>
-        <p:nvSpPr>
-          <p:cNvPr id="11" name="Oval 10"/>
+              <a:rPr sz="1400" b="1">
+                <a:solidFill>
+                  <a:srgbClr val="6366F1"/>
+                </a:solidFill>
+                <a:latin typeface="NanumGothic"/>
+                <a:ea typeface="NanumGothic"/>
+                <a:cs typeface="NanumGothic"/>
+              </a:rPr>
+              <a:t>•  </a:t>
+            </a:r>
+            <a:r>
+              <a:rPr sz="1400" b="0">
+                <a:solidFill>
+                  <a:srgbClr val="0F172A"/>
+                </a:solidFill>
+                <a:latin typeface="NanumGothic"/>
+                <a:ea typeface="NanumGothic"/>
+                <a:cs typeface="NanumGothic"/>
+              </a:rPr>
+              <a:t>코드 생성·설명</a:t>
+            </a:r>
+          </a:p>
+        </p:txBody>
+      </p:sp>
+      <p:sp>
+        <p:nvSpPr>
+          <p:cNvPr id="13" name="TextBox 12"/>
+          <p:cNvSpPr txBox="1"/>
+          <p:nvPr/>
+        </p:nvSpPr>
+        <p:spPr>
+          <a:xfrm>
+            <a:off x="822960" y="3831336"/>
+            <a:ext cx="4846320" cy="548640"/>
+          </a:xfrm>
+          <a:prstGeom prst="rect">
+            <a:avLst/>
+          </a:prstGeom>
+          <a:noFill/>
+        </p:spPr>
+        <p:txBody>
+          <a:bodyPr wrap="square" anchor="t" lIns="0" rIns="0" tIns="0" bIns="0">
+            <a:spAutoFit/>
+          </a:bodyPr>
+          <a:lstStyle/>
+          <a:p>
+            <a:pPr algn="l">
+              <a:lnSpc>
+                <a:spcPct val="100000"/>
+              </a:lnSpc>
+              <a:spcBef>
+                <a:spcPts val="0"/>
+              </a:spcBef>
+              <a:spcAft>
+                <a:spcPts val="600"/>
+              </a:spcAft>
+            </a:pPr>
+            <a:r>
+              <a:rPr sz="1400" b="1">
+                <a:solidFill>
+                  <a:srgbClr val="6366F1"/>
+                </a:solidFill>
+                <a:latin typeface="NanumGothic"/>
+                <a:ea typeface="NanumGothic"/>
+                <a:cs typeface="NanumGothic"/>
+              </a:rPr>
+              <a:t>•  </a:t>
+            </a:r>
+            <a:r>
+              <a:rPr sz="1400" b="0">
+                <a:solidFill>
+                  <a:srgbClr val="0F172A"/>
+                </a:solidFill>
+                <a:latin typeface="NanumGothic"/>
+                <a:ea typeface="NanumGothic"/>
+                <a:cs typeface="NanumGothic"/>
+              </a:rPr>
+              <a:t>텍스트 추출·재구성</a:t>
+            </a:r>
+          </a:p>
+        </p:txBody>
+      </p:sp>
+      <p:sp>
+        <p:nvSpPr>
+          <p:cNvPr id="14" name="TextBox 13"/>
+          <p:cNvSpPr txBox="1"/>
+          <p:nvPr/>
+        </p:nvSpPr>
+        <p:spPr>
+          <a:xfrm>
+            <a:off x="822960" y="4398264"/>
+            <a:ext cx="4846320" cy="548640"/>
+          </a:xfrm>
+          <a:prstGeom prst="rect">
+            <a:avLst/>
+          </a:prstGeom>
+          <a:noFill/>
+        </p:spPr>
+        <p:txBody>
+          <a:bodyPr wrap="square" anchor="t" lIns="0" rIns="0" tIns="0" bIns="0">
+            <a:spAutoFit/>
+          </a:bodyPr>
+          <a:lstStyle/>
+          <a:p>
+            <a:pPr algn="l">
+              <a:lnSpc>
+                <a:spcPct val="100000"/>
+              </a:lnSpc>
+              <a:spcBef>
+                <a:spcPts val="0"/>
+              </a:spcBef>
+              <a:spcAft>
+                <a:spcPts val="600"/>
+              </a:spcAft>
+            </a:pPr>
+            <a:r>
+              <a:rPr sz="1400" b="1">
+                <a:solidFill>
+                  <a:srgbClr val="6366F1"/>
+                </a:solidFill>
+                <a:latin typeface="NanumGothic"/>
+                <a:ea typeface="NanumGothic"/>
+                <a:cs typeface="NanumGothic"/>
+              </a:rPr>
+              <a:t>•  </a:t>
+            </a:r>
+            <a:r>
+              <a:rPr sz="1400" b="0">
+                <a:solidFill>
+                  <a:srgbClr val="0F172A"/>
+                </a:solidFill>
+                <a:latin typeface="NanumGothic"/>
+                <a:ea typeface="NanumGothic"/>
+                <a:cs typeface="NanumGothic"/>
+              </a:rPr>
+              <a:t>브레인스토밍</a:t>
+            </a:r>
+          </a:p>
+        </p:txBody>
+      </p:sp>
+      <p:sp>
+        <p:nvSpPr>
+          <p:cNvPr id="15" name="Rounded Rectangle 14"/>
           <p:cNvSpPr/>
           <p:nvPr/>
         </p:nvSpPr>
         <p:spPr>
           <a:xfrm>
-            <a:off x="548640" y="2779776"/>
-            <a:ext cx="146304" cy="146304"/>
-          </a:xfrm>
-          <a:prstGeom prst="ellipse">
+            <a:off x="6172200" y="1828800"/>
+            <a:ext cx="5440680" cy="4023360"/>
+          </a:xfrm>
+          <a:prstGeom prst="roundRect">
             <a:avLst/>
           </a:prstGeom>
           <a:solidFill>
-            <a:srgbClr val="6366F1"/>
-          </a:solidFill>
-          <a:ln>
-            <a:noFill/>
-          </a:ln>
-          <a:effectLst/>
-        </p:spPr>
-        <p:style>
-          <a:lnRef idx="1">
-            <a:schemeClr val="accent1"/>
-          </a:lnRef>
-          <a:fillRef idx="3">
-            <a:schemeClr val="accent1"/>
-          </a:fillRef>
-          <a:effectRef idx="2">
-            <a:schemeClr val="accent1"/>
-          </a:effectRef>
-          <a:fontRef idx="minor">
-            <a:schemeClr val="lt1"/>
-          </a:fontRef>
-        </p:style>
-        <p:txBody>
-          <a:bodyPr rtlCol="0" anchor="ctr"/>
-          <a:lstStyle/>
-          <a:p>
-            <a:pPr algn="ctr"/>
-          </a:p>
-        </p:txBody>
-      </p:sp>
-      <p:sp>
-        <p:nvSpPr>
-          <p:cNvPr id="12" name="TextBox 11"/>
-          <p:cNvSpPr txBox="1"/>
-          <p:nvPr/>
-        </p:nvSpPr>
-        <p:spPr>
-          <a:xfrm>
-            <a:off x="868680" y="2697480"/>
-            <a:ext cx="10607040" cy="457200"/>
-          </a:xfrm>
-          <a:prstGeom prst="rect">
-            <a:avLst/>
-          </a:prstGeom>
-          <a:noFill/>
-        </p:spPr>
-        <p:txBody>
-          <a:bodyPr wrap="square" anchor="t" lIns="0" rIns="0" tIns="0" bIns="0">
-            <a:spAutoFit/>
-          </a:bodyPr>
-          <a:lstStyle/>
-          <a:p>
-            <a:pPr algn="l">
-              <a:lnSpc>
-                <a:spcPct val="100000"/>
-              </a:lnSpc>
-              <a:spcBef>
-                <a:spcPts val="0"/>
-              </a:spcBef>
-              <a:spcAft>
-                <a:spcPts val="600"/>
-              </a:spcAft>
-            </a:pPr>
-            <a:r>
-              <a:rPr sz="1600" b="1">
-                <a:solidFill>
-                  <a:srgbClr val="0F172A"/>
-                </a:solidFill>
-                <a:latin typeface="NanumGothic"/>
-                <a:ea typeface="NanumGothic"/>
-                <a:cs typeface="NanumGothic"/>
-              </a:rPr>
-              <a:t>왜 생기나</a:t>
-            </a:r>
-          </a:p>
-        </p:txBody>
-      </p:sp>
-      <p:sp>
-        <p:nvSpPr>
-          <p:cNvPr id="13" name="TextBox 12"/>
-          <p:cNvSpPr txBox="1"/>
-          <p:nvPr/>
-        </p:nvSpPr>
-        <p:spPr>
-          <a:xfrm>
-            <a:off x="868680" y="3081528"/>
-            <a:ext cx="10607040" cy="457200"/>
-          </a:xfrm>
-          <a:prstGeom prst="rect">
-            <a:avLst/>
-          </a:prstGeom>
-          <a:noFill/>
-        </p:spPr>
-        <p:txBody>
-          <a:bodyPr wrap="square" anchor="t" lIns="0" rIns="0" tIns="0" bIns="0">
-            <a:spAutoFit/>
-          </a:bodyPr>
-          <a:lstStyle/>
-          <a:p>
-            <a:pPr algn="l">
-              <a:lnSpc>
-                <a:spcPct val="100000"/>
-              </a:lnSpc>
-              <a:spcBef>
-                <a:spcPts val="0"/>
-              </a:spcBef>
-              <a:spcAft>
-                <a:spcPts val="600"/>
-              </a:spcAft>
-            </a:pPr>
-            <a:r>
-              <a:rPr sz="1300" b="0">
-                <a:solidFill>
-                  <a:srgbClr val="64748B"/>
-                </a:solidFill>
-                <a:latin typeface="NanumGothic"/>
-                <a:ea typeface="NanumGothic"/>
-                <a:cs typeface="NanumGothic"/>
-              </a:rPr>
-              <a:t>'그럴듯한 다음 토큰'을 생성할 뿐 사실 검증을 안 함</a:t>
-            </a:r>
-          </a:p>
-        </p:txBody>
-      </p:sp>
-      <p:sp>
-        <p:nvSpPr>
-          <p:cNvPr id="14" name="Oval 13"/>
-          <p:cNvSpPr/>
-          <p:nvPr/>
-        </p:nvSpPr>
-        <p:spPr>
-          <a:xfrm>
-            <a:off x="548640" y="3648456"/>
-            <a:ext cx="146304" cy="146304"/>
-          </a:xfrm>
-          <a:prstGeom prst="ellipse">
-            <a:avLst/>
-          </a:prstGeom>
-          <a:solidFill>
-            <a:srgbClr val="6366F1"/>
-          </a:solidFill>
-          <a:ln>
-            <a:noFill/>
-          </a:ln>
-          <a:effectLst/>
-        </p:spPr>
-        <p:style>
-          <a:lnRef idx="1">
-            <a:schemeClr val="accent1"/>
-          </a:lnRef>
-          <a:fillRef idx="3">
-            <a:schemeClr val="accent1"/>
-          </a:fillRef>
-          <a:effectRef idx="2">
-            <a:schemeClr val="accent1"/>
-          </a:effectRef>
-          <a:fontRef idx="minor">
-            <a:schemeClr val="lt1"/>
-          </a:fontRef>
-        </p:style>
-        <p:txBody>
-          <a:bodyPr rtlCol="0" anchor="ctr"/>
-          <a:lstStyle/>
-          <a:p>
-            <a:pPr algn="ctr"/>
-          </a:p>
-        </p:txBody>
-      </p:sp>
-      <p:sp>
-        <p:nvSpPr>
-          <p:cNvPr id="15" name="TextBox 14"/>
-          <p:cNvSpPr txBox="1"/>
-          <p:nvPr/>
-        </p:nvSpPr>
-        <p:spPr>
-          <a:xfrm>
-            <a:off x="868680" y="3566160"/>
-            <a:ext cx="10607040" cy="457200"/>
-          </a:xfrm>
-          <a:prstGeom prst="rect">
-            <a:avLst/>
-          </a:prstGeom>
-          <a:noFill/>
-        </p:spPr>
-        <p:txBody>
-          <a:bodyPr wrap="square" anchor="t" lIns="0" rIns="0" tIns="0" bIns="0">
-            <a:spAutoFit/>
-          </a:bodyPr>
-          <a:lstStyle/>
-          <a:p>
-            <a:pPr algn="l">
-              <a:lnSpc>
-                <a:spcPct val="100000"/>
-              </a:lnSpc>
-              <a:spcBef>
-                <a:spcPts val="0"/>
-              </a:spcBef>
-              <a:spcAft>
-                <a:spcPts val="600"/>
-              </a:spcAft>
-            </a:pPr>
-            <a:r>
-              <a:rPr sz="1600" b="1">
-                <a:solidFill>
-                  <a:srgbClr val="0F172A"/>
-                </a:solidFill>
-                <a:latin typeface="NanumGothic"/>
-                <a:ea typeface="NanumGothic"/>
-                <a:cs typeface="NanumGothic"/>
-              </a:rPr>
-              <a:t>대응</a:t>
-            </a:r>
-          </a:p>
-        </p:txBody>
-      </p:sp>
-      <p:sp>
-        <p:nvSpPr>
-          <p:cNvPr id="16" name="TextBox 15"/>
-          <p:cNvSpPr txBox="1"/>
-          <p:nvPr/>
-        </p:nvSpPr>
-        <p:spPr>
-          <a:xfrm>
-            <a:off x="868680" y="3950208"/>
-            <a:ext cx="10607040" cy="457200"/>
-          </a:xfrm>
-          <a:prstGeom prst="rect">
-            <a:avLst/>
-          </a:prstGeom>
-          <a:noFill/>
-        </p:spPr>
-        <p:txBody>
-          <a:bodyPr wrap="square" anchor="t" lIns="0" rIns="0" tIns="0" bIns="0">
-            <a:spAutoFit/>
-          </a:bodyPr>
-          <a:lstStyle/>
-          <a:p>
-            <a:pPr algn="l">
-              <a:lnSpc>
-                <a:spcPct val="100000"/>
-              </a:lnSpc>
-              <a:spcBef>
-                <a:spcPts val="0"/>
-              </a:spcBef>
-              <a:spcAft>
-                <a:spcPts val="600"/>
-              </a:spcAft>
-            </a:pPr>
-            <a:r>
-              <a:rPr sz="1300" b="0">
-                <a:solidFill>
-                  <a:srgbClr val="64748B"/>
-                </a:solidFill>
-                <a:latin typeface="NanumGothic"/>
-                <a:ea typeface="NanumGothic"/>
-                <a:cs typeface="NanumGothic"/>
-              </a:rPr>
-              <a:t>출처 확인·검색 연동(RAG)·교차검증 → 리서치 에이전트의 존재 이유</a:t>
-            </a:r>
-          </a:p>
-        </p:txBody>
-      </p:sp>
-      <p:sp>
-        <p:nvSpPr>
-          <p:cNvPr id="17" name="Oval 16"/>
-          <p:cNvSpPr/>
-          <p:nvPr/>
-        </p:nvSpPr>
-        <p:spPr>
-          <a:xfrm>
-            <a:off x="548640" y="4517136"/>
-            <a:ext cx="146304" cy="146304"/>
-          </a:xfrm>
-          <a:prstGeom prst="ellipse">
-            <a:avLst/>
-          </a:prstGeom>
-          <a:solidFill>
-            <a:srgbClr val="6366F1"/>
-          </a:solidFill>
-          <a:ln>
-            <a:noFill/>
-          </a:ln>
-          <a:effectLst/>
-        </p:spPr>
-        <p:style>
-          <a:lnRef idx="1">
-            <a:schemeClr val="accent1"/>
-          </a:lnRef>
-          <a:fillRef idx="3">
-            <a:schemeClr val="accent1"/>
-          </a:fillRef>
-          <a:effectRef idx="2">
-            <a:schemeClr val="accent1"/>
-          </a:effectRef>
-          <a:fontRef idx="minor">
-            <a:schemeClr val="lt1"/>
-          </a:fontRef>
-        </p:style>
-        <p:txBody>
-          <a:bodyPr rtlCol="0" anchor="ctr"/>
-          <a:lstStyle/>
-          <a:p>
-            <a:pPr algn="ctr"/>
-          </a:p>
-        </p:txBody>
-      </p:sp>
-      <p:sp>
-        <p:nvSpPr>
-          <p:cNvPr id="18" name="TextBox 17"/>
-          <p:cNvSpPr txBox="1"/>
-          <p:nvPr/>
-        </p:nvSpPr>
-        <p:spPr>
-          <a:xfrm>
-            <a:off x="868680" y="4434840"/>
-            <a:ext cx="10607040" cy="457200"/>
-          </a:xfrm>
-          <a:prstGeom prst="rect">
-            <a:avLst/>
-          </a:prstGeom>
-          <a:noFill/>
-        </p:spPr>
-        <p:txBody>
-          <a:bodyPr wrap="square" anchor="t" lIns="0" rIns="0" tIns="0" bIns="0">
-            <a:spAutoFit/>
-          </a:bodyPr>
-          <a:lstStyle/>
-          <a:p>
-            <a:pPr algn="l">
-              <a:lnSpc>
-                <a:spcPct val="100000"/>
-              </a:lnSpc>
-              <a:spcBef>
-                <a:spcPts val="0"/>
-              </a:spcBef>
-              <a:spcAft>
-                <a:spcPts val="600"/>
-              </a:spcAft>
-            </a:pPr>
-            <a:r>
-              <a:rPr sz="1600" b="1">
-                <a:solidFill>
-                  <a:srgbClr val="0F172A"/>
-                </a:solidFill>
-                <a:latin typeface="NanumGothic"/>
-                <a:ea typeface="NanumGothic"/>
-                <a:cs typeface="NanumGothic"/>
-              </a:rPr>
-              <a:t>실제 사례</a:t>
-            </a:r>
-          </a:p>
-        </p:txBody>
-      </p:sp>
-      <p:sp>
-        <p:nvSpPr>
-          <p:cNvPr id="19" name="TextBox 18"/>
-          <p:cNvSpPr txBox="1"/>
-          <p:nvPr/>
-        </p:nvSpPr>
-        <p:spPr>
-          <a:xfrm>
-            <a:off x="868680" y="4818888"/>
-            <a:ext cx="10607040" cy="457200"/>
-          </a:xfrm>
-          <a:prstGeom prst="rect">
-            <a:avLst/>
-          </a:prstGeom>
-          <a:noFill/>
-        </p:spPr>
-        <p:txBody>
-          <a:bodyPr wrap="square" anchor="t" lIns="0" rIns="0" tIns="0" bIns="0">
-            <a:spAutoFit/>
-          </a:bodyPr>
-          <a:lstStyle/>
-          <a:p>
-            <a:pPr algn="l">
-              <a:lnSpc>
-                <a:spcPct val="100000"/>
-              </a:lnSpc>
-              <a:spcBef>
-                <a:spcPts val="0"/>
-              </a:spcBef>
-              <a:spcAft>
-                <a:spcPts val="600"/>
-              </a:spcAft>
-            </a:pPr>
-            <a:r>
-              <a:rPr sz="1300" b="0">
-                <a:solidFill>
-                  <a:srgbClr val="64748B"/>
-                </a:solidFill>
-                <a:latin typeface="NanumGothic"/>
-                <a:ea typeface="NanumGothic"/>
-                <a:cs typeface="NanumGothic"/>
-              </a:rPr>
-              <a:t>변호사가 ChatGPT 가짜 판례 인용→벌금(Mata v. Avianca, 2023) · 에어캐나다 챗봇이 없는 환불정책 지어내 배상(2024)</a:t>
-            </a:r>
-          </a:p>
-        </p:txBody>
-      </p:sp>
-      <p:sp>
-        <p:nvSpPr>
-          <p:cNvPr id="20" name="Rounded Rectangle 19"/>
-          <p:cNvSpPr/>
-          <p:nvPr/>
-        </p:nvSpPr>
-        <p:spPr>
-          <a:xfrm>
-            <a:off x="502920" y="5532120"/>
-            <a:ext cx="11155680" cy="658368"/>
-          </a:xfrm>
-          <a:prstGeom prst="roundRect">
-            <a:avLst/>
-          </a:prstGeom>
-          <a:solidFill>
-            <a:srgbClr val="F1F5F9"/>
+            <a:srgbClr val="F8FAFC"/>
           </a:solidFill>
           <a:ln w="12700">
             <a:solidFill>
@@ -33559,50 +33481,315 @@
       </p:sp>
       <p:sp>
         <p:nvSpPr>
+          <p:cNvPr id="16" name="Rounded Rectangle 15"/>
+          <p:cNvSpPr/>
+          <p:nvPr/>
+        </p:nvSpPr>
+        <p:spPr>
+          <a:xfrm>
+            <a:off x="6172200" y="1828800"/>
+            <a:ext cx="5440680" cy="640080"/>
+          </a:xfrm>
+          <a:prstGeom prst="roundRect">
+            <a:avLst/>
+          </a:prstGeom>
+          <a:solidFill>
+            <a:srgbClr val="12203C"/>
+          </a:solidFill>
+          <a:ln>
+            <a:noFill/>
+          </a:ln>
+          <a:effectLst/>
+        </p:spPr>
+        <p:style>
+          <a:lnRef idx="1">
+            <a:schemeClr val="accent1"/>
+          </a:lnRef>
+          <a:fillRef idx="3">
+            <a:schemeClr val="accent1"/>
+          </a:fillRef>
+          <a:effectRef idx="2">
+            <a:schemeClr val="accent1"/>
+          </a:effectRef>
+          <a:fontRef idx="minor">
+            <a:schemeClr val="lt1"/>
+          </a:fontRef>
+        </p:style>
+        <p:txBody>
+          <a:bodyPr rtlCol="0" anchor="ctr"/>
+          <a:lstStyle/>
+          <a:p>
+            <a:pPr algn="ctr"/>
+          </a:p>
+        </p:txBody>
+      </p:sp>
+      <p:sp>
+        <p:nvSpPr>
+          <p:cNvPr id="17" name="TextBox 16"/>
+          <p:cNvSpPr txBox="1"/>
+          <p:nvPr/>
+        </p:nvSpPr>
+        <p:spPr>
+          <a:xfrm>
+            <a:off x="6446520" y="1828800"/>
+            <a:ext cx="4937760" cy="640080"/>
+          </a:xfrm>
+          <a:prstGeom prst="rect">
+            <a:avLst/>
+          </a:prstGeom>
+          <a:noFill/>
+        </p:spPr>
+        <p:txBody>
+          <a:bodyPr wrap="square" anchor="ctr" lIns="0" rIns="0" tIns="0" bIns="0">
+            <a:spAutoFit/>
+          </a:bodyPr>
+          <a:lstStyle/>
+          <a:p>
+            <a:pPr algn="l">
+              <a:lnSpc>
+                <a:spcPct val="100000"/>
+              </a:lnSpc>
+              <a:spcBef>
+                <a:spcPts val="0"/>
+              </a:spcBef>
+              <a:spcAft>
+                <a:spcPts val="600"/>
+              </a:spcAft>
+            </a:pPr>
+            <a:r>
+              <a:rPr sz="1600" b="1">
+                <a:solidFill>
+                  <a:srgbClr val="FFFFFF"/>
+                </a:solidFill>
+                <a:latin typeface="NanumSquare"/>
+                <a:ea typeface="NanumSquare"/>
+                <a:cs typeface="NanumSquare"/>
+              </a:rPr>
+              <a:t>주의할 것</a:t>
+            </a:r>
+          </a:p>
+        </p:txBody>
+      </p:sp>
+      <p:sp>
+        <p:nvSpPr>
+          <p:cNvPr id="18" name="TextBox 17"/>
+          <p:cNvSpPr txBox="1"/>
+          <p:nvPr/>
+        </p:nvSpPr>
+        <p:spPr>
+          <a:xfrm>
+            <a:off x="6492240" y="2697480"/>
+            <a:ext cx="4846320" cy="548640"/>
+          </a:xfrm>
+          <a:prstGeom prst="rect">
+            <a:avLst/>
+          </a:prstGeom>
+          <a:noFill/>
+        </p:spPr>
+        <p:txBody>
+          <a:bodyPr wrap="square" anchor="t" lIns="0" rIns="0" tIns="0" bIns="0">
+            <a:spAutoFit/>
+          </a:bodyPr>
+          <a:lstStyle/>
+          <a:p>
+            <a:pPr algn="l">
+              <a:lnSpc>
+                <a:spcPct val="100000"/>
+              </a:lnSpc>
+              <a:spcBef>
+                <a:spcPts val="0"/>
+              </a:spcBef>
+              <a:spcAft>
+                <a:spcPts val="600"/>
+              </a:spcAft>
+            </a:pPr>
+            <a:r>
+              <a:rPr sz="1400" b="1">
+                <a:solidFill>
+                  <a:srgbClr val="12203C"/>
+                </a:solidFill>
+                <a:latin typeface="NanumGothic"/>
+                <a:ea typeface="NanumGothic"/>
+                <a:cs typeface="NanumGothic"/>
+              </a:rPr>
+              <a:t>•  </a:t>
+            </a:r>
+            <a:r>
+              <a:rPr sz="1400" b="0">
+                <a:solidFill>
+                  <a:srgbClr val="0F172A"/>
+                </a:solidFill>
+                <a:latin typeface="NanumGothic"/>
+                <a:ea typeface="NanumGothic"/>
+                <a:cs typeface="NanumGothic"/>
+              </a:rPr>
+              <a:t>환각 — 없는 사실 지어냄</a:t>
+            </a:r>
+          </a:p>
+        </p:txBody>
+      </p:sp>
+      <p:sp>
+        <p:nvSpPr>
+          <p:cNvPr id="19" name="TextBox 18"/>
+          <p:cNvSpPr txBox="1"/>
+          <p:nvPr/>
+        </p:nvSpPr>
+        <p:spPr>
+          <a:xfrm>
+            <a:off x="6492240" y="3264408"/>
+            <a:ext cx="4846320" cy="548640"/>
+          </a:xfrm>
+          <a:prstGeom prst="rect">
+            <a:avLst/>
+          </a:prstGeom>
+          <a:noFill/>
+        </p:spPr>
+        <p:txBody>
+          <a:bodyPr wrap="square" anchor="t" lIns="0" rIns="0" tIns="0" bIns="0">
+            <a:spAutoFit/>
+          </a:bodyPr>
+          <a:lstStyle/>
+          <a:p>
+            <a:pPr algn="l">
+              <a:lnSpc>
+                <a:spcPct val="100000"/>
+              </a:lnSpc>
+              <a:spcBef>
+                <a:spcPts val="0"/>
+              </a:spcBef>
+              <a:spcAft>
+                <a:spcPts val="600"/>
+              </a:spcAft>
+            </a:pPr>
+            <a:r>
+              <a:rPr sz="1400" b="1">
+                <a:solidFill>
+                  <a:srgbClr val="12203C"/>
+                </a:solidFill>
+                <a:latin typeface="NanumGothic"/>
+                <a:ea typeface="NanumGothic"/>
+                <a:cs typeface="NanumGothic"/>
+              </a:rPr>
+              <a:t>•  </a:t>
+            </a:r>
+            <a:r>
+              <a:rPr sz="1400" b="0">
+                <a:solidFill>
+                  <a:srgbClr val="0F172A"/>
+                </a:solidFill>
+                <a:latin typeface="NanumGothic"/>
+                <a:ea typeface="NanumGothic"/>
+                <a:cs typeface="NanumGothic"/>
+              </a:rPr>
+              <a:t>최신·실시간 정보</a:t>
+            </a:r>
+          </a:p>
+        </p:txBody>
+      </p:sp>
+      <p:sp>
+        <p:nvSpPr>
+          <p:cNvPr id="20" name="TextBox 19"/>
+          <p:cNvSpPr txBox="1"/>
+          <p:nvPr/>
+        </p:nvSpPr>
+        <p:spPr>
+          <a:xfrm>
+            <a:off x="6492240" y="3831336"/>
+            <a:ext cx="4846320" cy="548640"/>
+          </a:xfrm>
+          <a:prstGeom prst="rect">
+            <a:avLst/>
+          </a:prstGeom>
+          <a:noFill/>
+        </p:spPr>
+        <p:txBody>
+          <a:bodyPr wrap="square" anchor="t" lIns="0" rIns="0" tIns="0" bIns="0">
+            <a:spAutoFit/>
+          </a:bodyPr>
+          <a:lstStyle/>
+          <a:p>
+            <a:pPr algn="l">
+              <a:lnSpc>
+                <a:spcPct val="100000"/>
+              </a:lnSpc>
+              <a:spcBef>
+                <a:spcPts val="0"/>
+              </a:spcBef>
+              <a:spcAft>
+                <a:spcPts val="600"/>
+              </a:spcAft>
+            </a:pPr>
+            <a:r>
+              <a:rPr sz="1400" b="1">
+                <a:solidFill>
+                  <a:srgbClr val="12203C"/>
+                </a:solidFill>
+                <a:latin typeface="NanumGothic"/>
+                <a:ea typeface="NanumGothic"/>
+                <a:cs typeface="NanumGothic"/>
+              </a:rPr>
+              <a:t>•  </a:t>
+            </a:r>
+            <a:r>
+              <a:rPr sz="1400" b="0">
+                <a:solidFill>
+                  <a:srgbClr val="0F172A"/>
+                </a:solidFill>
+                <a:latin typeface="NanumGothic"/>
+                <a:ea typeface="NanumGothic"/>
+                <a:cs typeface="NanumGothic"/>
+              </a:rPr>
+              <a:t>정확한 계산·셈</a:t>
+            </a:r>
+          </a:p>
+        </p:txBody>
+      </p:sp>
+      <p:sp>
+        <p:nvSpPr>
           <p:cNvPr id="21" name="TextBox 20"/>
           <p:cNvSpPr txBox="1"/>
           <p:nvPr/>
         </p:nvSpPr>
         <p:spPr>
           <a:xfrm>
-            <a:off x="777240" y="5532120"/>
-            <a:ext cx="10607040" cy="658368"/>
-          </a:xfrm>
-          <a:prstGeom prst="rect">
-            <a:avLst/>
-          </a:prstGeom>
-          <a:noFill/>
-        </p:spPr>
-        <p:txBody>
-          <a:bodyPr wrap="square" anchor="ctr" lIns="0" rIns="0" tIns="0" bIns="0">
-            <a:spAutoFit/>
-          </a:bodyPr>
-          <a:lstStyle/>
-          <a:p>
-            <a:pPr algn="l">
-              <a:lnSpc>
-                <a:spcPct val="100000"/>
-              </a:lnSpc>
-              <a:spcBef>
-                <a:spcPts val="0"/>
-              </a:spcBef>
-              <a:spcAft>
-                <a:spcPts val="600"/>
-              </a:spcAft>
-            </a:pPr>
-            <a:r>
-              <a:rPr sz="1200" b="1">
-                <a:solidFill>
-                  <a:srgbClr val="6366F1"/>
-                </a:solidFill>
-                <a:latin typeface="NanumGothic"/>
-                <a:ea typeface="NanumGothic"/>
-                <a:cs typeface="NanumGothic"/>
-              </a:rPr>
-              <a:t>NOTE   </a:t>
-            </a:r>
-            <a:r>
-              <a:rPr sz="1300" b="0">
+            <a:off x="6492240" y="4398264"/>
+            <a:ext cx="4846320" cy="548640"/>
+          </a:xfrm>
+          <a:prstGeom prst="rect">
+            <a:avLst/>
+          </a:prstGeom>
+          <a:noFill/>
+        </p:spPr>
+        <p:txBody>
+          <a:bodyPr wrap="square" anchor="t" lIns="0" rIns="0" tIns="0" bIns="0">
+            <a:spAutoFit/>
+          </a:bodyPr>
+          <a:lstStyle/>
+          <a:p>
+            <a:pPr algn="l">
+              <a:lnSpc>
+                <a:spcPct val="100000"/>
+              </a:lnSpc>
+              <a:spcBef>
+                <a:spcPts val="0"/>
+              </a:spcBef>
+              <a:spcAft>
+                <a:spcPts val="600"/>
+              </a:spcAft>
+            </a:pPr>
+            <a:r>
+              <a:rPr sz="1400" b="1">
+                <a:solidFill>
+                  <a:srgbClr val="12203C"/>
+                </a:solidFill>
+                <a:latin typeface="NanumGothic"/>
+                <a:ea typeface="NanumGothic"/>
+                <a:cs typeface="NanumGothic"/>
+              </a:rPr>
+              <a:t>•  </a:t>
+            </a:r>
+            <a:r>
+              <a:rPr sz="1400" b="0">
                 <a:solidFill>
                   <a:srgbClr val="0F172A"/>
                 </a:solidFill>
@@ -33610,7 +33797,7 @@
                 <a:ea typeface="NanumGothic"/>
                 <a:cs typeface="NanumGothic"/>
               </a:rPr>
-              <a:t>그럴듯함은 사실과 다르므로, 중요한 내용은 반드시 출처로 교차확인해야 한다.</a:t>
+              <a:t>일관된 장기 추론</a:t>
             </a:r>
           </a:p>
         </p:txBody>
@@ -33668,7 +33855,7 @@
                 <a:ea typeface="NanumGothic"/>
                 <a:cs typeface="NanumGothic"/>
               </a:rPr>
-              <a:t>   ·   39 / 42</a:t>
+              <a:t>   ·   39 / 43</a:t>
             </a:r>
           </a:p>
         </p:txBody>
@@ -36181,7 +36368,7 @@
                 <a:ea typeface="NanumGothic"/>
                 <a:cs typeface="NanumGothic"/>
               </a:rPr>
-              <a:t>   ·   4 / 42</a:t>
+              <a:t>   ·   4 / 43</a:t>
             </a:r>
           </a:p>
         </p:txBody>
@@ -36334,7 +36521,7 @@
                 <a:ea typeface="NanumGothic"/>
                 <a:cs typeface="NanumGothic"/>
               </a:rPr>
-              <a:t>모델 선택</a:t>
+              <a:t>주의</a:t>
             </a:r>
           </a:p>
         </p:txBody>
@@ -36381,7 +36568,7 @@
                 <a:ea typeface="NanumSquare"/>
                 <a:cs typeface="NanumSquare"/>
               </a:rPr>
-              <a:t>어떤 모델을 쓸까</a:t>
+              <a:t>환각(hallucination) 바로 알기</a:t>
             </a:r>
           </a:p>
         </p:txBody>
@@ -36563,7 +36750,7 @@
                 <a:ea typeface="NanumGothic"/>
                 <a:cs typeface="NanumGothic"/>
               </a:rPr>
-              <a:t>크기 ↔ 성능</a:t>
+              <a:t>그럴듯하지만 틀린 출력</a:t>
             </a:r>
           </a:p>
         </p:txBody>
@@ -36610,7 +36797,7 @@
                 <a:ea typeface="NanumGothic"/>
                 <a:cs typeface="NanumGothic"/>
               </a:rPr>
-              <a:t>큰 모델 = 똑똑하지만 느리고 비쌈</a:t>
+              <a:t>출처·인용·수치를 자신있게 지어내기도</a:t>
             </a:r>
           </a:p>
         </p:txBody>
@@ -36701,7 +36888,7 @@
                 <a:ea typeface="NanumGothic"/>
                 <a:cs typeface="NanumGothic"/>
               </a:rPr>
-              <a:t>작업에 맞게</a:t>
+              <a:t>왜 생기나</a:t>
             </a:r>
           </a:p>
         </p:txBody>
@@ -36748,7 +36935,7 @@
                 <a:ea typeface="NanumGothic"/>
                 <a:cs typeface="NanumGothic"/>
               </a:rPr>
-              <a:t>간단한 작업엔 작고 빠른 모델, 어려운 작업엔 크고/추론 모델</a:t>
+              <a:t>'그럴듯한 다음 토큰'을 생성할 뿐 사실 검증을 안 함</a:t>
             </a:r>
           </a:p>
         </p:txBody>
@@ -36839,7 +37026,7 @@
                 <a:ea typeface="NanumGothic"/>
                 <a:cs typeface="NanumGothic"/>
               </a:rPr>
-              <a:t>Claude 예</a:t>
+              <a:t>대응</a:t>
             </a:r>
           </a:p>
         </p:txBody>
@@ -36886,14 +37073,152 @@
                 <a:ea typeface="NanumGothic"/>
                 <a:cs typeface="NanumGothic"/>
               </a:rPr>
-              <a:t>Opus(최상위) · Sonnet(균형) · Haiku(빠름·저비용)</a:t>
-            </a:r>
-          </a:p>
-        </p:txBody>
-      </p:sp>
-      <p:sp>
-        <p:nvSpPr>
-          <p:cNvPr id="17" name="Rounded Rectangle 16"/>
+              <a:t>출처 확인·검색 연동(RAG)·교차검증 → 리서치 에이전트의 존재 이유</a:t>
+            </a:r>
+          </a:p>
+        </p:txBody>
+      </p:sp>
+      <p:sp>
+        <p:nvSpPr>
+          <p:cNvPr id="17" name="Oval 16"/>
+          <p:cNvSpPr/>
+          <p:nvPr/>
+        </p:nvSpPr>
+        <p:spPr>
+          <a:xfrm>
+            <a:off x="548640" y="4517136"/>
+            <a:ext cx="146304" cy="146304"/>
+          </a:xfrm>
+          <a:prstGeom prst="ellipse">
+            <a:avLst/>
+          </a:prstGeom>
+          <a:solidFill>
+            <a:srgbClr val="6366F1"/>
+          </a:solidFill>
+          <a:ln>
+            <a:noFill/>
+          </a:ln>
+          <a:effectLst/>
+        </p:spPr>
+        <p:style>
+          <a:lnRef idx="1">
+            <a:schemeClr val="accent1"/>
+          </a:lnRef>
+          <a:fillRef idx="3">
+            <a:schemeClr val="accent1"/>
+          </a:fillRef>
+          <a:effectRef idx="2">
+            <a:schemeClr val="accent1"/>
+          </a:effectRef>
+          <a:fontRef idx="minor">
+            <a:schemeClr val="lt1"/>
+          </a:fontRef>
+        </p:style>
+        <p:txBody>
+          <a:bodyPr rtlCol="0" anchor="ctr"/>
+          <a:lstStyle/>
+          <a:p>
+            <a:pPr algn="ctr"/>
+          </a:p>
+        </p:txBody>
+      </p:sp>
+      <p:sp>
+        <p:nvSpPr>
+          <p:cNvPr id="18" name="TextBox 17"/>
+          <p:cNvSpPr txBox="1"/>
+          <p:nvPr/>
+        </p:nvSpPr>
+        <p:spPr>
+          <a:xfrm>
+            <a:off x="868680" y="4434840"/>
+            <a:ext cx="10607040" cy="457200"/>
+          </a:xfrm>
+          <a:prstGeom prst="rect">
+            <a:avLst/>
+          </a:prstGeom>
+          <a:noFill/>
+        </p:spPr>
+        <p:txBody>
+          <a:bodyPr wrap="square" anchor="t" lIns="0" rIns="0" tIns="0" bIns="0">
+            <a:spAutoFit/>
+          </a:bodyPr>
+          <a:lstStyle/>
+          <a:p>
+            <a:pPr algn="l">
+              <a:lnSpc>
+                <a:spcPct val="100000"/>
+              </a:lnSpc>
+              <a:spcBef>
+                <a:spcPts val="0"/>
+              </a:spcBef>
+              <a:spcAft>
+                <a:spcPts val="600"/>
+              </a:spcAft>
+            </a:pPr>
+            <a:r>
+              <a:rPr sz="1600" b="1">
+                <a:solidFill>
+                  <a:srgbClr val="0F172A"/>
+                </a:solidFill>
+                <a:latin typeface="NanumGothic"/>
+                <a:ea typeface="NanumGothic"/>
+                <a:cs typeface="NanumGothic"/>
+              </a:rPr>
+              <a:t>실제 사례</a:t>
+            </a:r>
+          </a:p>
+        </p:txBody>
+      </p:sp>
+      <p:sp>
+        <p:nvSpPr>
+          <p:cNvPr id="19" name="TextBox 18"/>
+          <p:cNvSpPr txBox="1"/>
+          <p:nvPr/>
+        </p:nvSpPr>
+        <p:spPr>
+          <a:xfrm>
+            <a:off x="868680" y="4818888"/>
+            <a:ext cx="10607040" cy="457200"/>
+          </a:xfrm>
+          <a:prstGeom prst="rect">
+            <a:avLst/>
+          </a:prstGeom>
+          <a:noFill/>
+        </p:spPr>
+        <p:txBody>
+          <a:bodyPr wrap="square" anchor="t" lIns="0" rIns="0" tIns="0" bIns="0">
+            <a:spAutoFit/>
+          </a:bodyPr>
+          <a:lstStyle/>
+          <a:p>
+            <a:pPr algn="l">
+              <a:lnSpc>
+                <a:spcPct val="100000"/>
+              </a:lnSpc>
+              <a:spcBef>
+                <a:spcPts val="0"/>
+              </a:spcBef>
+              <a:spcAft>
+                <a:spcPts val="600"/>
+              </a:spcAft>
+            </a:pPr>
+            <a:r>
+              <a:rPr sz="1300" b="0">
+                <a:solidFill>
+                  <a:srgbClr val="64748B"/>
+                </a:solidFill>
+                <a:latin typeface="NanumGothic"/>
+                <a:ea typeface="NanumGothic"/>
+                <a:cs typeface="NanumGothic"/>
+              </a:rPr>
+              <a:t>변호사가 ChatGPT 가짜 판례 인용→벌금(Mata v. Avianca, 2023) · 에어캐나다 챗봇이 없는 환불정책 지어내 배상(2024)</a:t>
+            </a:r>
+          </a:p>
+        </p:txBody>
+      </p:sp>
+      <p:sp>
+        <p:nvSpPr>
+          <p:cNvPr id="20" name="Rounded Rectangle 19"/>
           <p:cNvSpPr/>
           <p:nvPr/>
         </p:nvSpPr>
@@ -36939,7 +37264,7 @@
       </p:sp>
       <p:sp>
         <p:nvSpPr>
-          <p:cNvPr id="18" name="TextBox 17"/>
+          <p:cNvPr id="21" name="TextBox 20"/>
           <p:cNvSpPr txBox="1"/>
           <p:nvPr/>
         </p:nvSpPr>
@@ -36990,14 +37315,14 @@
                 <a:ea typeface="NanumGothic"/>
                 <a:cs typeface="NanumGothic"/>
               </a:rPr>
-              <a:t>참고로 2026년 6월 기준 100만 토큰당 가격은 Opus가 입력 5달러·출력 25달러, Sonnet이 3·15달러, Haiku가 1·5달러이며, 가격은 변동될 수 있다.</a:t>
-            </a:r>
-          </a:p>
-        </p:txBody>
-      </p:sp>
-      <p:sp>
-        <p:nvSpPr>
-          <p:cNvPr id="19" name="TextBox 18"/>
+              <a:t>그럴듯함은 사실과 다르므로, 중요한 내용은 반드시 출처로 교차확인해야 한다.</a:t>
+            </a:r>
+          </a:p>
+        </p:txBody>
+      </p:sp>
+      <p:sp>
+        <p:nvSpPr>
+          <p:cNvPr id="22" name="TextBox 21"/>
           <p:cNvSpPr txBox="1"/>
           <p:nvPr/>
         </p:nvSpPr>
@@ -37048,7 +37373,7 @@
                 <a:ea typeface="NanumGothic"/>
                 <a:cs typeface="NanumGothic"/>
               </a:rPr>
-              <a:t>   ·   40 / 42</a:t>
+              <a:t>   ·   40 / 43</a:t>
             </a:r>
           </a:p>
         </p:txBody>
@@ -37201,7 +37526,7 @@
                 <a:ea typeface="NanumGothic"/>
                 <a:cs typeface="NanumGothic"/>
               </a:rPr>
-              <a:t>브릿지</a:t>
+              <a:t>모델 선택</a:t>
             </a:r>
           </a:p>
         </p:txBody>
@@ -37248,7 +37573,7 @@
                 <a:ea typeface="NanumSquare"/>
                 <a:cs typeface="NanumSquare"/>
               </a:rPr>
-              <a:t>LLM → 에이전트로 가는 길</a:t>
+              <a:t>어떤 모델을 쓸까</a:t>
             </a:r>
           </a:p>
         </p:txBody>
@@ -37430,7 +37755,7 @@
                 <a:ea typeface="NanumGothic"/>
                 <a:cs typeface="NanumGothic"/>
               </a:rPr>
-              <a:t>LLM 단독의 한계</a:t>
+              <a:t>크기 ↔ 성능</a:t>
             </a:r>
           </a:p>
         </p:txBody>
@@ -37477,7 +37802,7 @@
                 <a:ea typeface="NanumGothic"/>
                 <a:cs typeface="NanumGothic"/>
               </a:rPr>
-              <a:t>도구 없음 · 기억 없음 · 한 번의 응답으로 끝</a:t>
+              <a:t>큰 모델 = 똑똑하지만 느리고 비쌈</a:t>
             </a:r>
           </a:p>
         </p:txBody>
@@ -37568,7 +37893,7 @@
                 <a:ea typeface="NanumGothic"/>
                 <a:cs typeface="NanumGothic"/>
               </a:rPr>
-              <a:t>RAG·검색을 루프로 = 에이전트</a:t>
+              <a:t>작업에 맞게</a:t>
             </a:r>
           </a:p>
         </p:txBody>
@@ -37615,7 +37940,7 @@
                 <a:ea typeface="NanumGothic"/>
                 <a:cs typeface="NanumGothic"/>
               </a:rPr>
-              <a:t>찾고 → 검증하고 → 종합 — 리서치 에이전트로</a:t>
+              <a:t>간단한 작업엔 작고 빠른 모델, 어려운 작업엔 크고/추론 모델</a:t>
             </a:r>
           </a:p>
         </p:txBody>
@@ -37706,7 +38031,7 @@
                 <a:ea typeface="NanumGothic"/>
                 <a:cs typeface="NanumGothic"/>
               </a:rPr>
-              <a:t>다음: Day 2</a:t>
+              <a:t>Claude 예</a:t>
             </a:r>
           </a:p>
         </p:txBody>
@@ -37753,7 +38078,7 @@
                 <a:ea typeface="NanumGothic"/>
                 <a:cs typeface="NanumGothic"/>
               </a:rPr>
-              <a:t>에이전트의 정의와 Claude Code 실습</a:t>
+              <a:t>Opus(최상위) · Sonnet(균형) · Haiku(빠름·저비용)</a:t>
             </a:r>
           </a:p>
         </p:txBody>
@@ -37857,7 +38182,7 @@
                 <a:ea typeface="NanumGothic"/>
                 <a:cs typeface="NanumGothic"/>
               </a:rPr>
-              <a:t>오늘 학습한 임베딩과 RAG가 리서치 에이전트의 토대가 된다.</a:t>
+              <a:t>참고로 2026년 6월 기준 100만 토큰당 가격은 Opus가 입력 5달러·출력 25달러, Sonnet이 3·15달러, Haiku가 1·5달러이며, 가격은 변동될 수 있다.</a:t>
             </a:r>
           </a:p>
         </p:txBody>
@@ -37915,7 +38240,7 @@
                 <a:ea typeface="NanumGothic"/>
                 <a:cs typeface="NanumGothic"/>
               </a:rPr>
-              <a:t>   ·   41 / 42</a:t>
+              <a:t>   ·   41 / 43</a:t>
             </a:r>
           </a:p>
         </p:txBody>
@@ -38068,6 +38393,873 @@
                 <a:ea typeface="NanumGothic"/>
                 <a:cs typeface="NanumGothic"/>
               </a:rPr>
+              <a:t>브릿지</a:t>
+            </a:r>
+          </a:p>
+        </p:txBody>
+      </p:sp>
+      <p:sp>
+        <p:nvSpPr>
+          <p:cNvPr id="5" name="TextBox 4"/>
+          <p:cNvSpPr txBox="1"/>
+          <p:nvPr/>
+        </p:nvSpPr>
+        <p:spPr>
+          <a:xfrm>
+            <a:off x="502920" y="713232"/>
+            <a:ext cx="11155680" cy="731520"/>
+          </a:xfrm>
+          <a:prstGeom prst="rect">
+            <a:avLst/>
+          </a:prstGeom>
+          <a:noFill/>
+        </p:spPr>
+        <p:txBody>
+          <a:bodyPr wrap="square" anchor="t" lIns="0" rIns="0" tIns="0" bIns="0">
+            <a:spAutoFit/>
+          </a:bodyPr>
+          <a:lstStyle/>
+          <a:p>
+            <a:pPr algn="l">
+              <a:lnSpc>
+                <a:spcPct val="100000"/>
+              </a:lnSpc>
+              <a:spcBef>
+                <a:spcPts val="0"/>
+              </a:spcBef>
+              <a:spcAft>
+                <a:spcPts val="600"/>
+              </a:spcAft>
+            </a:pPr>
+            <a:r>
+              <a:rPr sz="2700" b="1">
+                <a:solidFill>
+                  <a:srgbClr val="0F172A"/>
+                </a:solidFill>
+                <a:latin typeface="NanumSquare"/>
+                <a:ea typeface="NanumSquare"/>
+                <a:cs typeface="NanumSquare"/>
+              </a:rPr>
+              <a:t>LLM → 에이전트로 가는 길</a:t>
+            </a:r>
+          </a:p>
+        </p:txBody>
+      </p:sp>
+      <p:sp>
+        <p:nvSpPr>
+          <p:cNvPr id="6" name="Rectangle 5"/>
+          <p:cNvSpPr/>
+          <p:nvPr/>
+        </p:nvSpPr>
+        <p:spPr>
+          <a:xfrm>
+            <a:off x="521207" y="1417320"/>
+            <a:ext cx="1005840" cy="45720"/>
+          </a:xfrm>
+          <a:prstGeom prst="rect">
+            <a:avLst/>
+          </a:prstGeom>
+          <a:solidFill>
+            <a:srgbClr val="6366F1"/>
+          </a:solidFill>
+          <a:ln>
+            <a:noFill/>
+          </a:ln>
+          <a:effectLst/>
+        </p:spPr>
+        <p:style>
+          <a:lnRef idx="1">
+            <a:schemeClr val="accent1"/>
+          </a:lnRef>
+          <a:fillRef idx="3">
+            <a:schemeClr val="accent1"/>
+          </a:fillRef>
+          <a:effectRef idx="2">
+            <a:schemeClr val="accent1"/>
+          </a:effectRef>
+          <a:fontRef idx="minor">
+            <a:schemeClr val="lt1"/>
+          </a:fontRef>
+        </p:style>
+        <p:txBody>
+          <a:bodyPr rtlCol="0" anchor="ctr"/>
+          <a:lstStyle/>
+          <a:p>
+            <a:pPr algn="ctr"/>
+          </a:p>
+        </p:txBody>
+      </p:sp>
+      <p:sp>
+        <p:nvSpPr>
+          <p:cNvPr id="7" name="TextBox 6"/>
+          <p:cNvSpPr txBox="1"/>
+          <p:nvPr/>
+        </p:nvSpPr>
+        <p:spPr>
+          <a:xfrm>
+            <a:off x="502920" y="6419088"/>
+            <a:ext cx="7315200" cy="365760"/>
+          </a:xfrm>
+          <a:prstGeom prst="rect">
+            <a:avLst/>
+          </a:prstGeom>
+          <a:noFill/>
+        </p:spPr>
+        <p:txBody>
+          <a:bodyPr wrap="square" anchor="ctr" lIns="0" rIns="0" tIns="0" bIns="0">
+            <a:spAutoFit/>
+          </a:bodyPr>
+          <a:lstStyle/>
+          <a:p>
+            <a:pPr algn="l">
+              <a:lnSpc>
+                <a:spcPct val="100000"/>
+              </a:lnSpc>
+              <a:spcBef>
+                <a:spcPts val="0"/>
+              </a:spcBef>
+              <a:spcAft>
+                <a:spcPts val="600"/>
+              </a:spcAft>
+            </a:pPr>
+            <a:r>
+              <a:rPr sz="900" b="0">
+                <a:solidFill>
+                  <a:srgbClr val="64748B"/>
+                </a:solidFill>
+                <a:latin typeface="NanumGothic"/>
+                <a:ea typeface="NanumGothic"/>
+                <a:cs typeface="NanumGothic"/>
+              </a:rPr>
+              <a:t>신약 개발을 위한 AI Agent 특강</a:t>
+            </a:r>
+          </a:p>
+        </p:txBody>
+      </p:sp>
+      <p:sp>
+        <p:nvSpPr>
+          <p:cNvPr id="8" name="Oval 7"/>
+          <p:cNvSpPr/>
+          <p:nvPr/>
+        </p:nvSpPr>
+        <p:spPr>
+          <a:xfrm>
+            <a:off x="548640" y="1911096"/>
+            <a:ext cx="146304" cy="146304"/>
+          </a:xfrm>
+          <a:prstGeom prst="ellipse">
+            <a:avLst/>
+          </a:prstGeom>
+          <a:solidFill>
+            <a:srgbClr val="6366F1"/>
+          </a:solidFill>
+          <a:ln>
+            <a:noFill/>
+          </a:ln>
+          <a:effectLst/>
+        </p:spPr>
+        <p:style>
+          <a:lnRef idx="1">
+            <a:schemeClr val="accent1"/>
+          </a:lnRef>
+          <a:fillRef idx="3">
+            <a:schemeClr val="accent1"/>
+          </a:fillRef>
+          <a:effectRef idx="2">
+            <a:schemeClr val="accent1"/>
+          </a:effectRef>
+          <a:fontRef idx="minor">
+            <a:schemeClr val="lt1"/>
+          </a:fontRef>
+        </p:style>
+        <p:txBody>
+          <a:bodyPr rtlCol="0" anchor="ctr"/>
+          <a:lstStyle/>
+          <a:p>
+            <a:pPr algn="ctr"/>
+          </a:p>
+        </p:txBody>
+      </p:sp>
+      <p:sp>
+        <p:nvSpPr>
+          <p:cNvPr id="9" name="TextBox 8"/>
+          <p:cNvSpPr txBox="1"/>
+          <p:nvPr/>
+        </p:nvSpPr>
+        <p:spPr>
+          <a:xfrm>
+            <a:off x="868680" y="1828800"/>
+            <a:ext cx="10607040" cy="457200"/>
+          </a:xfrm>
+          <a:prstGeom prst="rect">
+            <a:avLst/>
+          </a:prstGeom>
+          <a:noFill/>
+        </p:spPr>
+        <p:txBody>
+          <a:bodyPr wrap="square" anchor="t" lIns="0" rIns="0" tIns="0" bIns="0">
+            <a:spAutoFit/>
+          </a:bodyPr>
+          <a:lstStyle/>
+          <a:p>
+            <a:pPr algn="l">
+              <a:lnSpc>
+                <a:spcPct val="100000"/>
+              </a:lnSpc>
+              <a:spcBef>
+                <a:spcPts val="0"/>
+              </a:spcBef>
+              <a:spcAft>
+                <a:spcPts val="600"/>
+              </a:spcAft>
+            </a:pPr>
+            <a:r>
+              <a:rPr sz="1600" b="1">
+                <a:solidFill>
+                  <a:srgbClr val="0F172A"/>
+                </a:solidFill>
+                <a:latin typeface="NanumGothic"/>
+                <a:ea typeface="NanumGothic"/>
+                <a:cs typeface="NanumGothic"/>
+              </a:rPr>
+              <a:t>LLM 단독의 한계</a:t>
+            </a:r>
+          </a:p>
+        </p:txBody>
+      </p:sp>
+      <p:sp>
+        <p:nvSpPr>
+          <p:cNvPr id="10" name="TextBox 9"/>
+          <p:cNvSpPr txBox="1"/>
+          <p:nvPr/>
+        </p:nvSpPr>
+        <p:spPr>
+          <a:xfrm>
+            <a:off x="868680" y="2212848"/>
+            <a:ext cx="10607040" cy="457200"/>
+          </a:xfrm>
+          <a:prstGeom prst="rect">
+            <a:avLst/>
+          </a:prstGeom>
+          <a:noFill/>
+        </p:spPr>
+        <p:txBody>
+          <a:bodyPr wrap="square" anchor="t" lIns="0" rIns="0" tIns="0" bIns="0">
+            <a:spAutoFit/>
+          </a:bodyPr>
+          <a:lstStyle/>
+          <a:p>
+            <a:pPr algn="l">
+              <a:lnSpc>
+                <a:spcPct val="100000"/>
+              </a:lnSpc>
+              <a:spcBef>
+                <a:spcPts val="0"/>
+              </a:spcBef>
+              <a:spcAft>
+                <a:spcPts val="600"/>
+              </a:spcAft>
+            </a:pPr>
+            <a:r>
+              <a:rPr sz="1300" b="0">
+                <a:solidFill>
+                  <a:srgbClr val="64748B"/>
+                </a:solidFill>
+                <a:latin typeface="NanumGothic"/>
+                <a:ea typeface="NanumGothic"/>
+                <a:cs typeface="NanumGothic"/>
+              </a:rPr>
+              <a:t>도구 없음 · 기억 없음 · 한 번의 응답으로 끝</a:t>
+            </a:r>
+          </a:p>
+        </p:txBody>
+      </p:sp>
+      <p:sp>
+        <p:nvSpPr>
+          <p:cNvPr id="11" name="Oval 10"/>
+          <p:cNvSpPr/>
+          <p:nvPr/>
+        </p:nvSpPr>
+        <p:spPr>
+          <a:xfrm>
+            <a:off x="548640" y="2779776"/>
+            <a:ext cx="146304" cy="146304"/>
+          </a:xfrm>
+          <a:prstGeom prst="ellipse">
+            <a:avLst/>
+          </a:prstGeom>
+          <a:solidFill>
+            <a:srgbClr val="6366F1"/>
+          </a:solidFill>
+          <a:ln>
+            <a:noFill/>
+          </a:ln>
+          <a:effectLst/>
+        </p:spPr>
+        <p:style>
+          <a:lnRef idx="1">
+            <a:schemeClr val="accent1"/>
+          </a:lnRef>
+          <a:fillRef idx="3">
+            <a:schemeClr val="accent1"/>
+          </a:fillRef>
+          <a:effectRef idx="2">
+            <a:schemeClr val="accent1"/>
+          </a:effectRef>
+          <a:fontRef idx="minor">
+            <a:schemeClr val="lt1"/>
+          </a:fontRef>
+        </p:style>
+        <p:txBody>
+          <a:bodyPr rtlCol="0" anchor="ctr"/>
+          <a:lstStyle/>
+          <a:p>
+            <a:pPr algn="ctr"/>
+          </a:p>
+        </p:txBody>
+      </p:sp>
+      <p:sp>
+        <p:nvSpPr>
+          <p:cNvPr id="12" name="TextBox 11"/>
+          <p:cNvSpPr txBox="1"/>
+          <p:nvPr/>
+        </p:nvSpPr>
+        <p:spPr>
+          <a:xfrm>
+            <a:off x="868680" y="2697480"/>
+            <a:ext cx="10607040" cy="457200"/>
+          </a:xfrm>
+          <a:prstGeom prst="rect">
+            <a:avLst/>
+          </a:prstGeom>
+          <a:noFill/>
+        </p:spPr>
+        <p:txBody>
+          <a:bodyPr wrap="square" anchor="t" lIns="0" rIns="0" tIns="0" bIns="0">
+            <a:spAutoFit/>
+          </a:bodyPr>
+          <a:lstStyle/>
+          <a:p>
+            <a:pPr algn="l">
+              <a:lnSpc>
+                <a:spcPct val="100000"/>
+              </a:lnSpc>
+              <a:spcBef>
+                <a:spcPts val="0"/>
+              </a:spcBef>
+              <a:spcAft>
+                <a:spcPts val="600"/>
+              </a:spcAft>
+            </a:pPr>
+            <a:r>
+              <a:rPr sz="1600" b="1">
+                <a:solidFill>
+                  <a:srgbClr val="0F172A"/>
+                </a:solidFill>
+                <a:latin typeface="NanumGothic"/>
+                <a:ea typeface="NanumGothic"/>
+                <a:cs typeface="NanumGothic"/>
+              </a:rPr>
+              <a:t>RAG·검색을 루프로 = 에이전트</a:t>
+            </a:r>
+          </a:p>
+        </p:txBody>
+      </p:sp>
+      <p:sp>
+        <p:nvSpPr>
+          <p:cNvPr id="13" name="TextBox 12"/>
+          <p:cNvSpPr txBox="1"/>
+          <p:nvPr/>
+        </p:nvSpPr>
+        <p:spPr>
+          <a:xfrm>
+            <a:off x="868680" y="3081528"/>
+            <a:ext cx="10607040" cy="457200"/>
+          </a:xfrm>
+          <a:prstGeom prst="rect">
+            <a:avLst/>
+          </a:prstGeom>
+          <a:noFill/>
+        </p:spPr>
+        <p:txBody>
+          <a:bodyPr wrap="square" anchor="t" lIns="0" rIns="0" tIns="0" bIns="0">
+            <a:spAutoFit/>
+          </a:bodyPr>
+          <a:lstStyle/>
+          <a:p>
+            <a:pPr algn="l">
+              <a:lnSpc>
+                <a:spcPct val="100000"/>
+              </a:lnSpc>
+              <a:spcBef>
+                <a:spcPts val="0"/>
+              </a:spcBef>
+              <a:spcAft>
+                <a:spcPts val="600"/>
+              </a:spcAft>
+            </a:pPr>
+            <a:r>
+              <a:rPr sz="1300" b="0">
+                <a:solidFill>
+                  <a:srgbClr val="64748B"/>
+                </a:solidFill>
+                <a:latin typeface="NanumGothic"/>
+                <a:ea typeface="NanumGothic"/>
+                <a:cs typeface="NanumGothic"/>
+              </a:rPr>
+              <a:t>찾고 → 검증하고 → 종합 — 리서치 에이전트로</a:t>
+            </a:r>
+          </a:p>
+        </p:txBody>
+      </p:sp>
+      <p:sp>
+        <p:nvSpPr>
+          <p:cNvPr id="14" name="Oval 13"/>
+          <p:cNvSpPr/>
+          <p:nvPr/>
+        </p:nvSpPr>
+        <p:spPr>
+          <a:xfrm>
+            <a:off x="548640" y="3648456"/>
+            <a:ext cx="146304" cy="146304"/>
+          </a:xfrm>
+          <a:prstGeom prst="ellipse">
+            <a:avLst/>
+          </a:prstGeom>
+          <a:solidFill>
+            <a:srgbClr val="6366F1"/>
+          </a:solidFill>
+          <a:ln>
+            <a:noFill/>
+          </a:ln>
+          <a:effectLst/>
+        </p:spPr>
+        <p:style>
+          <a:lnRef idx="1">
+            <a:schemeClr val="accent1"/>
+          </a:lnRef>
+          <a:fillRef idx="3">
+            <a:schemeClr val="accent1"/>
+          </a:fillRef>
+          <a:effectRef idx="2">
+            <a:schemeClr val="accent1"/>
+          </a:effectRef>
+          <a:fontRef idx="minor">
+            <a:schemeClr val="lt1"/>
+          </a:fontRef>
+        </p:style>
+        <p:txBody>
+          <a:bodyPr rtlCol="0" anchor="ctr"/>
+          <a:lstStyle/>
+          <a:p>
+            <a:pPr algn="ctr"/>
+          </a:p>
+        </p:txBody>
+      </p:sp>
+      <p:sp>
+        <p:nvSpPr>
+          <p:cNvPr id="15" name="TextBox 14"/>
+          <p:cNvSpPr txBox="1"/>
+          <p:nvPr/>
+        </p:nvSpPr>
+        <p:spPr>
+          <a:xfrm>
+            <a:off x="868680" y="3566160"/>
+            <a:ext cx="10607040" cy="457200"/>
+          </a:xfrm>
+          <a:prstGeom prst="rect">
+            <a:avLst/>
+          </a:prstGeom>
+          <a:noFill/>
+        </p:spPr>
+        <p:txBody>
+          <a:bodyPr wrap="square" anchor="t" lIns="0" rIns="0" tIns="0" bIns="0">
+            <a:spAutoFit/>
+          </a:bodyPr>
+          <a:lstStyle/>
+          <a:p>
+            <a:pPr algn="l">
+              <a:lnSpc>
+                <a:spcPct val="100000"/>
+              </a:lnSpc>
+              <a:spcBef>
+                <a:spcPts val="0"/>
+              </a:spcBef>
+              <a:spcAft>
+                <a:spcPts val="600"/>
+              </a:spcAft>
+            </a:pPr>
+            <a:r>
+              <a:rPr sz="1600" b="1">
+                <a:solidFill>
+                  <a:srgbClr val="0F172A"/>
+                </a:solidFill>
+                <a:latin typeface="NanumGothic"/>
+                <a:ea typeface="NanumGothic"/>
+                <a:cs typeface="NanumGothic"/>
+              </a:rPr>
+              <a:t>다음: Day 2</a:t>
+            </a:r>
+          </a:p>
+        </p:txBody>
+      </p:sp>
+      <p:sp>
+        <p:nvSpPr>
+          <p:cNvPr id="16" name="TextBox 15"/>
+          <p:cNvSpPr txBox="1"/>
+          <p:nvPr/>
+        </p:nvSpPr>
+        <p:spPr>
+          <a:xfrm>
+            <a:off x="868680" y="3950208"/>
+            <a:ext cx="10607040" cy="457200"/>
+          </a:xfrm>
+          <a:prstGeom prst="rect">
+            <a:avLst/>
+          </a:prstGeom>
+          <a:noFill/>
+        </p:spPr>
+        <p:txBody>
+          <a:bodyPr wrap="square" anchor="t" lIns="0" rIns="0" tIns="0" bIns="0">
+            <a:spAutoFit/>
+          </a:bodyPr>
+          <a:lstStyle/>
+          <a:p>
+            <a:pPr algn="l">
+              <a:lnSpc>
+                <a:spcPct val="100000"/>
+              </a:lnSpc>
+              <a:spcBef>
+                <a:spcPts val="0"/>
+              </a:spcBef>
+              <a:spcAft>
+                <a:spcPts val="600"/>
+              </a:spcAft>
+            </a:pPr>
+            <a:r>
+              <a:rPr sz="1300" b="0">
+                <a:solidFill>
+                  <a:srgbClr val="64748B"/>
+                </a:solidFill>
+                <a:latin typeface="NanumGothic"/>
+                <a:ea typeface="NanumGothic"/>
+                <a:cs typeface="NanumGothic"/>
+              </a:rPr>
+              <a:t>에이전트의 정의와 Claude Code 실습</a:t>
+            </a:r>
+          </a:p>
+        </p:txBody>
+      </p:sp>
+      <p:sp>
+        <p:nvSpPr>
+          <p:cNvPr id="17" name="Rounded Rectangle 16"/>
+          <p:cNvSpPr/>
+          <p:nvPr/>
+        </p:nvSpPr>
+        <p:spPr>
+          <a:xfrm>
+            <a:off x="502920" y="5532120"/>
+            <a:ext cx="11155680" cy="658368"/>
+          </a:xfrm>
+          <a:prstGeom prst="roundRect">
+            <a:avLst/>
+          </a:prstGeom>
+          <a:solidFill>
+            <a:srgbClr val="F1F5F9"/>
+          </a:solidFill>
+          <a:ln w="12700">
+            <a:solidFill>
+              <a:srgbClr val="E2E8F0"/>
+            </a:solidFill>
+          </a:ln>
+          <a:effectLst/>
+        </p:spPr>
+        <p:style>
+          <a:lnRef idx="1">
+            <a:schemeClr val="accent1"/>
+          </a:lnRef>
+          <a:fillRef idx="3">
+            <a:schemeClr val="accent1"/>
+          </a:fillRef>
+          <a:effectRef idx="2">
+            <a:schemeClr val="accent1"/>
+          </a:effectRef>
+          <a:fontRef idx="minor">
+            <a:schemeClr val="lt1"/>
+          </a:fontRef>
+        </p:style>
+        <p:txBody>
+          <a:bodyPr rtlCol="0" anchor="ctr"/>
+          <a:lstStyle/>
+          <a:p>
+            <a:pPr algn="ctr"/>
+          </a:p>
+        </p:txBody>
+      </p:sp>
+      <p:sp>
+        <p:nvSpPr>
+          <p:cNvPr id="18" name="TextBox 17"/>
+          <p:cNvSpPr txBox="1"/>
+          <p:nvPr/>
+        </p:nvSpPr>
+        <p:spPr>
+          <a:xfrm>
+            <a:off x="777240" y="5532120"/>
+            <a:ext cx="10607040" cy="658368"/>
+          </a:xfrm>
+          <a:prstGeom prst="rect">
+            <a:avLst/>
+          </a:prstGeom>
+          <a:noFill/>
+        </p:spPr>
+        <p:txBody>
+          <a:bodyPr wrap="square" anchor="ctr" lIns="0" rIns="0" tIns="0" bIns="0">
+            <a:spAutoFit/>
+          </a:bodyPr>
+          <a:lstStyle/>
+          <a:p>
+            <a:pPr algn="l">
+              <a:lnSpc>
+                <a:spcPct val="100000"/>
+              </a:lnSpc>
+              <a:spcBef>
+                <a:spcPts val="0"/>
+              </a:spcBef>
+              <a:spcAft>
+                <a:spcPts val="600"/>
+              </a:spcAft>
+            </a:pPr>
+            <a:r>
+              <a:rPr sz="1200" b="1">
+                <a:solidFill>
+                  <a:srgbClr val="6366F1"/>
+                </a:solidFill>
+                <a:latin typeface="NanumGothic"/>
+                <a:ea typeface="NanumGothic"/>
+                <a:cs typeface="NanumGothic"/>
+              </a:rPr>
+              <a:t>NOTE   </a:t>
+            </a:r>
+            <a:r>
+              <a:rPr sz="1300" b="0">
+                <a:solidFill>
+                  <a:srgbClr val="0F172A"/>
+                </a:solidFill>
+                <a:latin typeface="NanumGothic"/>
+                <a:ea typeface="NanumGothic"/>
+                <a:cs typeface="NanumGothic"/>
+              </a:rPr>
+              <a:t>오늘 학습한 임베딩과 RAG가 리서치 에이전트의 토대가 된다.</a:t>
+            </a:r>
+          </a:p>
+        </p:txBody>
+      </p:sp>
+      <p:sp>
+        <p:nvSpPr>
+          <p:cNvPr id="19" name="TextBox 18"/>
+          <p:cNvSpPr txBox="1"/>
+          <p:nvPr/>
+        </p:nvSpPr>
+        <p:spPr>
+          <a:xfrm>
+            <a:off x="8988552" y="6419088"/>
+            <a:ext cx="2697480" cy="365760"/>
+          </a:xfrm>
+          <a:prstGeom prst="rect">
+            <a:avLst/>
+          </a:prstGeom>
+          <a:noFill/>
+        </p:spPr>
+        <p:txBody>
+          <a:bodyPr wrap="square" anchor="ctr" lIns="0" rIns="0" tIns="0" bIns="0">
+            <a:spAutoFit/>
+          </a:bodyPr>
+          <a:lstStyle/>
+          <a:p>
+            <a:pPr algn="r">
+              <a:lnSpc>
+                <a:spcPct val="100000"/>
+              </a:lnSpc>
+              <a:spcBef>
+                <a:spcPts val="0"/>
+              </a:spcBef>
+              <a:spcAft>
+                <a:spcPts val="600"/>
+              </a:spcAft>
+            </a:pPr>
+            <a:r>
+              <a:rPr sz="900" b="1">
+                <a:solidFill>
+                  <a:srgbClr val="6366F1"/>
+                </a:solidFill>
+                <a:latin typeface="NanumGothic"/>
+                <a:ea typeface="NanumGothic"/>
+                <a:cs typeface="NanumGothic"/>
+              </a:rPr>
+              <a:t>Day 1 · 월</a:t>
+            </a:r>
+            <a:r>
+              <a:rPr sz="900" b="1">
+                <a:solidFill>
+                  <a:srgbClr val="64748B"/>
+                </a:solidFill>
+                <a:latin typeface="NanumGothic"/>
+                <a:ea typeface="NanumGothic"/>
+                <a:cs typeface="NanumGothic"/>
+              </a:rPr>
+              <a:t>   ·   42 / 43</a:t>
+            </a:r>
+          </a:p>
+        </p:txBody>
+      </p:sp>
+    </p:spTree>
+  </p:cSld>
+  <p:clrMapOvr>
+    <a:masterClrMapping/>
+  </p:clrMapOvr>
+</p:sld>
+</file>
+
+<file path=ppt/slides/slide43.xml><?xml version="1.0" encoding="utf-8"?>
+<p:sld xmlns:a="http://schemas.openxmlformats.org/drawingml/2006/main" xmlns:p="http://schemas.openxmlformats.org/presentationml/2006/main" xmlns:r="http://schemas.openxmlformats.org/officeDocument/2006/relationships">
+  <p:cSld>
+    <p:spTree>
+      <p:nvGrpSpPr>
+        <p:cNvPr id="1" name=""/>
+        <p:cNvGrpSpPr/>
+        <p:nvPr/>
+      </p:nvGrpSpPr>
+      <p:grpSpPr/>
+      <p:sp>
+        <p:nvSpPr>
+          <p:cNvPr id="2" name="Rectangle 1"/>
+          <p:cNvSpPr/>
+          <p:nvPr/>
+        </p:nvSpPr>
+        <p:spPr>
+          <a:xfrm>
+            <a:off x="0" y="0"/>
+            <a:ext cx="12191695" cy="6858000"/>
+          </a:xfrm>
+          <a:prstGeom prst="rect">
+            <a:avLst/>
+          </a:prstGeom>
+          <a:solidFill>
+            <a:srgbClr val="FFFFFF"/>
+          </a:solidFill>
+          <a:ln>
+            <a:noFill/>
+          </a:ln>
+          <a:effectLst/>
+        </p:spPr>
+        <p:style>
+          <a:lnRef idx="1">
+            <a:schemeClr val="accent1"/>
+          </a:lnRef>
+          <a:fillRef idx="3">
+            <a:schemeClr val="accent1"/>
+          </a:fillRef>
+          <a:effectRef idx="2">
+            <a:schemeClr val="accent1"/>
+          </a:effectRef>
+          <a:fontRef idx="minor">
+            <a:schemeClr val="lt1"/>
+          </a:fontRef>
+        </p:style>
+        <p:txBody>
+          <a:bodyPr rtlCol="0" anchor="ctr"/>
+          <a:lstStyle/>
+          <a:p>
+            <a:pPr algn="ctr"/>
+          </a:p>
+        </p:txBody>
+      </p:sp>
+      <p:sp>
+        <p:nvSpPr>
+          <p:cNvPr id="3" name="Rectangle 2"/>
+          <p:cNvSpPr/>
+          <p:nvPr/>
+        </p:nvSpPr>
+        <p:spPr>
+          <a:xfrm>
+            <a:off x="0" y="0"/>
+            <a:ext cx="164592" cy="6858000"/>
+          </a:xfrm>
+          <a:prstGeom prst="rect">
+            <a:avLst/>
+          </a:prstGeom>
+          <a:solidFill>
+            <a:srgbClr val="6366F1"/>
+          </a:solidFill>
+          <a:ln>
+            <a:noFill/>
+          </a:ln>
+          <a:effectLst/>
+        </p:spPr>
+        <p:style>
+          <a:lnRef idx="1">
+            <a:schemeClr val="accent1"/>
+          </a:lnRef>
+          <a:fillRef idx="3">
+            <a:schemeClr val="accent1"/>
+          </a:fillRef>
+          <a:effectRef idx="2">
+            <a:schemeClr val="accent1"/>
+          </a:effectRef>
+          <a:fontRef idx="minor">
+            <a:schemeClr val="lt1"/>
+          </a:fontRef>
+        </p:style>
+        <p:txBody>
+          <a:bodyPr rtlCol="0" anchor="ctr"/>
+          <a:lstStyle/>
+          <a:p>
+            <a:pPr algn="ctr"/>
+          </a:p>
+        </p:txBody>
+      </p:sp>
+      <p:sp>
+        <p:nvSpPr>
+          <p:cNvPr id="4" name="TextBox 3"/>
+          <p:cNvSpPr txBox="1"/>
+          <p:nvPr/>
+        </p:nvSpPr>
+        <p:spPr>
+          <a:xfrm>
+            <a:off x="502920" y="384048"/>
+            <a:ext cx="10058400" cy="320040"/>
+          </a:xfrm>
+          <a:prstGeom prst="rect">
+            <a:avLst/>
+          </a:prstGeom>
+          <a:noFill/>
+        </p:spPr>
+        <p:txBody>
+          <a:bodyPr wrap="square" anchor="t" lIns="0" rIns="0" tIns="0" bIns="0">
+            <a:spAutoFit/>
+          </a:bodyPr>
+          <a:lstStyle/>
+          <a:p>
+            <a:pPr algn="l">
+              <a:lnSpc>
+                <a:spcPct val="100000"/>
+              </a:lnSpc>
+              <a:spcBef>
+                <a:spcPts val="0"/>
+              </a:spcBef>
+              <a:spcAft>
+                <a:spcPts val="600"/>
+              </a:spcAft>
+            </a:pPr>
+            <a:r>
+              <a:rPr sz="1200" b="1">
+                <a:solidFill>
+                  <a:srgbClr val="6366F1"/>
+                </a:solidFill>
+                <a:latin typeface="NanumGothic"/>
+                <a:ea typeface="NanumGothic"/>
+                <a:cs typeface="NanumGothic"/>
+              </a:rPr>
               <a:t>SUMMARY</a:t>
             </a:r>
           </a:p>
@@ -38724,7 +39916,7 @@
                 <a:ea typeface="NanumGothic"/>
                 <a:cs typeface="NanumGothic"/>
               </a:rPr>
-              <a:t>   ·   42 / 42</a:t>
+              <a:t>   ·   43 / 43</a:t>
             </a:r>
           </a:p>
         </p:txBody>
@@ -39487,7 +40679,7 @@
                 <a:ea typeface="NanumGothic"/>
                 <a:cs typeface="NanumGothic"/>
               </a:rPr>
-              <a:t>   ·   5 / 42</a:t>
+              <a:t>   ·   5 / 43</a:t>
             </a:r>
           </a:p>
         </p:txBody>
@@ -41283,7 +42475,7 @@
                 <a:ea typeface="NanumGothic"/>
                 <a:cs typeface="NanumGothic"/>
               </a:rPr>
-              <a:t>   ·   6 / 42</a:t>
+              <a:t>   ·   6 / 43</a:t>
             </a:r>
           </a:p>
         </p:txBody>
@@ -42150,7 +43342,7 @@
                 <a:ea typeface="NanumGothic"/>
                 <a:cs typeface="NanumGothic"/>
               </a:rPr>
-              <a:t>   ·   7 / 42</a:t>
+              <a:t>   ·   7 / 43</a:t>
             </a:r>
           </a:p>
         </p:txBody>
@@ -43017,7 +44209,7 @@
                 <a:ea typeface="NanumGothic"/>
                 <a:cs typeface="NanumGothic"/>
               </a:rPr>
-              <a:t>   ·   8 / 42</a:t>
+              <a:t>   ·   8 / 43</a:t>
             </a:r>
           </a:p>
         </p:txBody>
@@ -43884,7 +45076,7 @@
                 <a:ea typeface="NanumGothic"/>
                 <a:cs typeface="NanumGothic"/>
               </a:rPr>
-              <a:t>   ·   9 / 42</a:t>
+              <a:t>   ·   9 / 43</a:t>
             </a:r>
           </a:p>
         </p:txBody>

--- a/slides/day1.pptx
+++ b/slides/day1.pptx
@@ -8387,7 +8387,7 @@
         </p:nvSpPr>
         <p:spPr>
           <a:xfrm>
-            <a:off x="548640" y="2779776"/>
+            <a:off x="548640" y="2633472"/>
             <a:ext cx="146304" cy="146304"/>
           </a:xfrm>
           <a:prstGeom prst="ellipse">
@@ -8431,7 +8431,7 @@
         </p:nvSpPr>
         <p:spPr>
           <a:xfrm>
-            <a:off x="868680" y="2697480"/>
+            <a:off x="868680" y="2551176"/>
             <a:ext cx="10607040" cy="457200"/>
           </a:xfrm>
           <a:prstGeom prst="rect">
@@ -8478,7 +8478,7 @@
         </p:nvSpPr>
         <p:spPr>
           <a:xfrm>
-            <a:off x="868680" y="3081528"/>
+            <a:off x="868680" y="2935224"/>
             <a:ext cx="10607040" cy="457200"/>
           </a:xfrm>
           <a:prstGeom prst="rect">
@@ -8525,7 +8525,7 @@
         </p:nvSpPr>
         <p:spPr>
           <a:xfrm>
-            <a:off x="548640" y="3648456"/>
+            <a:off x="548640" y="3355848"/>
             <a:ext cx="146304" cy="146304"/>
           </a:xfrm>
           <a:prstGeom prst="ellipse">
@@ -8569,7 +8569,7 @@
         </p:nvSpPr>
         <p:spPr>
           <a:xfrm>
-            <a:off x="868680" y="3566160"/>
+            <a:off x="868680" y="3273552"/>
             <a:ext cx="10607040" cy="457200"/>
           </a:xfrm>
           <a:prstGeom prst="rect">
@@ -8616,7 +8616,7 @@
         </p:nvSpPr>
         <p:spPr>
           <a:xfrm>
-            <a:off x="868680" y="3950208"/>
+            <a:off x="868680" y="3657600"/>
             <a:ext cx="10607040" cy="457200"/>
           </a:xfrm>
           <a:prstGeom prst="rect">
@@ -8663,7 +8663,7 @@
         </p:nvSpPr>
         <p:spPr>
           <a:xfrm>
-            <a:off x="548640" y="4517136"/>
+            <a:off x="548640" y="4078224"/>
             <a:ext cx="146304" cy="146304"/>
           </a:xfrm>
           <a:prstGeom prst="ellipse">
@@ -8707,7 +8707,7 @@
         </p:nvSpPr>
         <p:spPr>
           <a:xfrm>
-            <a:off x="868680" y="4434840"/>
+            <a:off x="868680" y="3995928"/>
             <a:ext cx="10607040" cy="457200"/>
           </a:xfrm>
           <a:prstGeom prst="rect">
@@ -8754,7 +8754,7 @@
         </p:nvSpPr>
         <p:spPr>
           <a:xfrm>
-            <a:off x="868680" y="4818888"/>
+            <a:off x="868680" y="4379976"/>
             <a:ext cx="10607040" cy="457200"/>
           </a:xfrm>
           <a:prstGeom prst="rect">
@@ -8795,7 +8795,145 @@
       </p:sp>
       <p:sp>
         <p:nvSpPr>
-          <p:cNvPr id="20" name="Rounded Rectangle 19"/>
+          <p:cNvPr id="20" name="Oval 19"/>
+          <p:cNvSpPr/>
+          <p:nvPr/>
+        </p:nvSpPr>
+        <p:spPr>
+          <a:xfrm>
+            <a:off x="548640" y="4800600"/>
+            <a:ext cx="146304" cy="146304"/>
+          </a:xfrm>
+          <a:prstGeom prst="ellipse">
+            <a:avLst/>
+          </a:prstGeom>
+          <a:solidFill>
+            <a:srgbClr val="6366F1"/>
+          </a:solidFill>
+          <a:ln>
+            <a:noFill/>
+          </a:ln>
+          <a:effectLst/>
+        </p:spPr>
+        <p:style>
+          <a:lnRef idx="1">
+            <a:schemeClr val="accent1"/>
+          </a:lnRef>
+          <a:fillRef idx="3">
+            <a:schemeClr val="accent1"/>
+          </a:fillRef>
+          <a:effectRef idx="2">
+            <a:schemeClr val="accent1"/>
+          </a:effectRef>
+          <a:fontRef idx="minor">
+            <a:schemeClr val="lt1"/>
+          </a:fontRef>
+        </p:style>
+        <p:txBody>
+          <a:bodyPr rtlCol="0" anchor="ctr"/>
+          <a:lstStyle/>
+          <a:p>
+            <a:pPr algn="ctr"/>
+          </a:p>
+        </p:txBody>
+      </p:sp>
+      <p:sp>
+        <p:nvSpPr>
+          <p:cNvPr id="21" name="TextBox 20"/>
+          <p:cNvSpPr txBox="1"/>
+          <p:nvPr/>
+        </p:nvSpPr>
+        <p:spPr>
+          <a:xfrm>
+            <a:off x="868680" y="4718304"/>
+            <a:ext cx="10607040" cy="457200"/>
+          </a:xfrm>
+          <a:prstGeom prst="rect">
+            <a:avLst/>
+          </a:prstGeom>
+          <a:noFill/>
+        </p:spPr>
+        <p:txBody>
+          <a:bodyPr wrap="square" anchor="t" lIns="0" rIns="0" tIns="0" bIns="0">
+            <a:spAutoFit/>
+          </a:bodyPr>
+          <a:lstStyle/>
+          <a:p>
+            <a:pPr algn="l">
+              <a:lnSpc>
+                <a:spcPct val="100000"/>
+              </a:lnSpc>
+              <a:spcBef>
+                <a:spcPts val="0"/>
+              </a:spcBef>
+              <a:spcAft>
+                <a:spcPts val="600"/>
+              </a:spcAft>
+            </a:pPr>
+            <a:r>
+              <a:rPr sz="1600" b="1">
+                <a:solidFill>
+                  <a:srgbClr val="0F172A"/>
+                </a:solidFill>
+                <a:latin typeface="NanumGothic"/>
+                <a:ea typeface="NanumGothic"/>
+                <a:cs typeface="NanumGothic"/>
+              </a:rPr>
+              <a:t>직접 해보기</a:t>
+            </a:r>
+          </a:p>
+        </p:txBody>
+      </p:sp>
+      <p:sp>
+        <p:nvSpPr>
+          <p:cNvPr id="22" name="TextBox 21"/>
+          <p:cNvSpPr txBox="1"/>
+          <p:nvPr/>
+        </p:nvSpPr>
+        <p:spPr>
+          <a:xfrm>
+            <a:off x="868680" y="5102352"/>
+            <a:ext cx="10607040" cy="457200"/>
+          </a:xfrm>
+          <a:prstGeom prst="rect">
+            <a:avLst/>
+          </a:prstGeom>
+          <a:noFill/>
+        </p:spPr>
+        <p:txBody>
+          <a:bodyPr wrap="square" anchor="t" lIns="0" rIns="0" tIns="0" bIns="0">
+            <a:spAutoFit/>
+          </a:bodyPr>
+          <a:lstStyle/>
+          <a:p>
+            <a:pPr algn="l">
+              <a:lnSpc>
+                <a:spcPct val="100000"/>
+              </a:lnSpc>
+              <a:spcBef>
+                <a:spcPts val="0"/>
+              </a:spcBef>
+              <a:spcAft>
+                <a:spcPts val="600"/>
+              </a:spcAft>
+            </a:pPr>
+            <a:r>
+              <a:rPr sz="1300" b="0">
+                <a:solidFill>
+                  <a:srgbClr val="64748B"/>
+                </a:solidFill>
+                <a:latin typeface="NanumGothic"/>
+                <a:ea typeface="NanumGothic"/>
+                <a:cs typeface="NanumGothic"/>
+              </a:rPr>
+              <a:t>platform.openai.com/tokenizer — 문장을 넣어 토큰이 어떻게 쪼개지는지 확인</a:t>
+            </a:r>
+          </a:p>
+        </p:txBody>
+      </p:sp>
+      <p:sp>
+        <p:nvSpPr>
+          <p:cNvPr id="23" name="Rounded Rectangle 22"/>
           <p:cNvSpPr/>
           <p:nvPr/>
         </p:nvSpPr>
@@ -8841,7 +8979,7 @@
       </p:sp>
       <p:sp>
         <p:nvSpPr>
-          <p:cNvPr id="21" name="TextBox 20"/>
+          <p:cNvPr id="24" name="TextBox 23"/>
           <p:cNvSpPr txBox="1"/>
           <p:nvPr/>
         </p:nvSpPr>
@@ -8899,7 +9037,7 @@
       </p:sp>
       <p:sp>
         <p:nvSpPr>
-          <p:cNvPr id="22" name="TextBox 21"/>
+          <p:cNvPr id="25" name="TextBox 24"/>
           <p:cNvSpPr txBox="1"/>
           <p:nvPr/>
         </p:nvSpPr>

--- a/slides/day1.pptx
+++ b/slides/day1.pptx
@@ -19633,7 +19633,7 @@
                 <a:ea typeface="NanumGothic"/>
                 <a:cs typeface="NanumGothic"/>
               </a:rPr>
-              <a:t>지능은 막대한 컴퓨팅·데이터(수천만~수억 달러)로 얻고, 좋은 행동은 비교적 적은 양의 정교한 사람 판단으로 빚는다. (GPT-4·Gemini 수치는 제3자 추정치)</a:t>
+              <a:t>지능은 막대한 컴퓨팅·데이터(수천만~수억 달러)로 얻는 반면, 바람직한 행동은 비교적 적은 양의 정교한 사람 판단으로 형성된다. (GPT-4·Gemini 수치는 제3자 추정치)</a:t>
             </a:r>
           </a:p>
         </p:txBody>
